--- a/音视频编解码.pptx
+++ b/音视频编解码.pptx
@@ -6,6 +6,7 @@
   </p:sldMasterIdLst>
   <p:sldIdLst>
     <p:sldId id="256" r:id="rId2"/>
+    <p:sldId id="257" r:id="rId3"/>
   </p:sldIdLst>
   <p:sldSz cx="12192000" cy="6858000"/>
   <p:notesSz cx="6858000" cy="9144000"/>
@@ -104,6 +105,11 @@
       </a:defRPr>
     </a:lvl9pPr>
   </p:defaultTextStyle>
+  <p:extLst>
+    <p:ext uri="{EFAFB233-063F-42B5-8137-9DF3F51BA10A}">
+      <p15:sldGuideLst xmlns:p15="http://schemas.microsoft.com/office/powerpoint/2012/main"/>
+    </p:ext>
+  </p:extLst>
 </p:presentation>
 </file>
 
@@ -238,7 +244,7 @@
           <a:p>
             <a:fld id="{EA80D996-CE9E-432A-86C4-A040E9078786}" type="datetimeFigureOut">
               <a:rPr lang="zh-CN" altLang="en-US" smtClean="0"/>
-              <a:t>2019/1/14</a:t>
+              <a:t>2019/1/25</a:t>
             </a:fld>
             <a:endParaRPr lang="zh-CN" altLang="en-US"/>
           </a:p>
@@ -408,7 +414,7 @@
           <a:p>
             <a:fld id="{EA80D996-CE9E-432A-86C4-A040E9078786}" type="datetimeFigureOut">
               <a:rPr lang="zh-CN" altLang="en-US" smtClean="0"/>
-              <a:t>2019/1/14</a:t>
+              <a:t>2019/1/25</a:t>
             </a:fld>
             <a:endParaRPr lang="zh-CN" altLang="en-US"/>
           </a:p>
@@ -588,7 +594,7 @@
           <a:p>
             <a:fld id="{EA80D996-CE9E-432A-86C4-A040E9078786}" type="datetimeFigureOut">
               <a:rPr lang="zh-CN" altLang="en-US" smtClean="0"/>
-              <a:t>2019/1/14</a:t>
+              <a:t>2019/1/25</a:t>
             </a:fld>
             <a:endParaRPr lang="zh-CN" altLang="en-US"/>
           </a:p>
@@ -758,7 +764,7 @@
           <a:p>
             <a:fld id="{EA80D996-CE9E-432A-86C4-A040E9078786}" type="datetimeFigureOut">
               <a:rPr lang="zh-CN" altLang="en-US" smtClean="0"/>
-              <a:t>2019/1/14</a:t>
+              <a:t>2019/1/25</a:t>
             </a:fld>
             <a:endParaRPr lang="zh-CN" altLang="en-US"/>
           </a:p>
@@ -1004,7 +1010,7 @@
           <a:p>
             <a:fld id="{EA80D996-CE9E-432A-86C4-A040E9078786}" type="datetimeFigureOut">
               <a:rPr lang="zh-CN" altLang="en-US" smtClean="0"/>
-              <a:t>2019/1/14</a:t>
+              <a:t>2019/1/25</a:t>
             </a:fld>
             <a:endParaRPr lang="zh-CN" altLang="en-US"/>
           </a:p>
@@ -1236,7 +1242,7 @@
           <a:p>
             <a:fld id="{EA80D996-CE9E-432A-86C4-A040E9078786}" type="datetimeFigureOut">
               <a:rPr lang="zh-CN" altLang="en-US" smtClean="0"/>
-              <a:t>2019/1/14</a:t>
+              <a:t>2019/1/25</a:t>
             </a:fld>
             <a:endParaRPr lang="zh-CN" altLang="en-US"/>
           </a:p>
@@ -1603,7 +1609,7 @@
           <a:p>
             <a:fld id="{EA80D996-CE9E-432A-86C4-A040E9078786}" type="datetimeFigureOut">
               <a:rPr lang="zh-CN" altLang="en-US" smtClean="0"/>
-              <a:t>2019/1/14</a:t>
+              <a:t>2019/1/25</a:t>
             </a:fld>
             <a:endParaRPr lang="zh-CN" altLang="en-US"/>
           </a:p>
@@ -1721,7 +1727,7 @@
           <a:p>
             <a:fld id="{EA80D996-CE9E-432A-86C4-A040E9078786}" type="datetimeFigureOut">
               <a:rPr lang="zh-CN" altLang="en-US" smtClean="0"/>
-              <a:t>2019/1/14</a:t>
+              <a:t>2019/1/25</a:t>
             </a:fld>
             <a:endParaRPr lang="zh-CN" altLang="en-US"/>
           </a:p>
@@ -1816,7 +1822,7 @@
           <a:p>
             <a:fld id="{EA80D996-CE9E-432A-86C4-A040E9078786}" type="datetimeFigureOut">
               <a:rPr lang="zh-CN" altLang="en-US" smtClean="0"/>
-              <a:t>2019/1/14</a:t>
+              <a:t>2019/1/25</a:t>
             </a:fld>
             <a:endParaRPr lang="zh-CN" altLang="en-US"/>
           </a:p>
@@ -2093,7 +2099,7 @@
           <a:p>
             <a:fld id="{EA80D996-CE9E-432A-86C4-A040E9078786}" type="datetimeFigureOut">
               <a:rPr lang="zh-CN" altLang="en-US" smtClean="0"/>
-              <a:t>2019/1/14</a:t>
+              <a:t>2019/1/25</a:t>
             </a:fld>
             <a:endParaRPr lang="zh-CN" altLang="en-US"/>
           </a:p>
@@ -2346,7 +2352,7 @@
           <a:p>
             <a:fld id="{EA80D996-CE9E-432A-86C4-A040E9078786}" type="datetimeFigureOut">
               <a:rPr lang="zh-CN" altLang="en-US" smtClean="0"/>
-              <a:t>2019/1/14</a:t>
+              <a:t>2019/1/25</a:t>
             </a:fld>
             <a:endParaRPr lang="zh-CN" altLang="en-US"/>
           </a:p>
@@ -2559,7 +2565,7 @@
           <a:p>
             <a:fld id="{EA80D996-CE9E-432A-86C4-A040E9078786}" type="datetimeFigureOut">
               <a:rPr lang="zh-CN" altLang="en-US" smtClean="0"/>
-              <a:t>2019/1/14</a:t>
+              <a:t>2019/1/25</a:t>
             </a:fld>
             <a:endParaRPr lang="zh-CN" altLang="en-US"/>
           </a:p>
@@ -3902,6 +3908,935 @@
 </p:sld>
 </file>
 
+<file path=ppt/slides/slide2.xml><?xml version="1.0" encoding="utf-8"?>
+<p:sld xmlns:a="http://schemas.openxmlformats.org/drawingml/2006/main" xmlns:r="http://schemas.openxmlformats.org/officeDocument/2006/relationships" xmlns:p="http://schemas.openxmlformats.org/presentationml/2006/main">
+  <p:cSld>
+    <p:spTree>
+      <p:nvGrpSpPr>
+        <p:cNvPr id="1" name=""/>
+        <p:cNvGrpSpPr/>
+        <p:nvPr/>
+      </p:nvGrpSpPr>
+      <p:grpSpPr>
+        <a:xfrm>
+          <a:off x="0" y="0"/>
+          <a:ext cx="0" cy="0"/>
+          <a:chOff x="0" y="0"/>
+          <a:chExt cx="0" cy="0"/>
+        </a:xfrm>
+      </p:grpSpPr>
+      <p:sp>
+        <p:nvSpPr>
+          <p:cNvPr id="50" name="矩形 49"/>
+          <p:cNvSpPr/>
+          <p:nvPr/>
+        </p:nvSpPr>
+        <p:spPr>
+          <a:xfrm>
+            <a:off x="6847954" y="706947"/>
+            <a:ext cx="1625486" cy="1700973"/>
+          </a:xfrm>
+          <a:prstGeom prst="rect">
+            <a:avLst/>
+          </a:prstGeom>
+        </p:spPr>
+        <p:style>
+          <a:lnRef idx="2">
+            <a:schemeClr val="accent1"/>
+          </a:lnRef>
+          <a:fillRef idx="1">
+            <a:schemeClr val="lt1"/>
+          </a:fillRef>
+          <a:effectRef idx="0">
+            <a:schemeClr val="accent1"/>
+          </a:effectRef>
+          <a:fontRef idx="minor">
+            <a:schemeClr val="dk1"/>
+          </a:fontRef>
+        </p:style>
+        <p:txBody>
+          <a:bodyPr rtlCol="0" anchor="ctr"/>
+          <a:lstStyle/>
+          <a:p>
+            <a:pPr algn="ctr"/>
+            <a:endParaRPr lang="zh-CN" altLang="en-US" sz="1100" dirty="0">
+              <a:latin typeface="Times New Roman" panose="02020603050405020304" pitchFamily="18" charset="0"/>
+              <a:cs typeface="Times New Roman" panose="02020603050405020304" pitchFamily="18" charset="0"/>
+            </a:endParaRPr>
+          </a:p>
+        </p:txBody>
+      </p:sp>
+      <p:sp>
+        <p:nvSpPr>
+          <p:cNvPr id="47" name="矩形 46"/>
+          <p:cNvSpPr/>
+          <p:nvPr/>
+        </p:nvSpPr>
+        <p:spPr>
+          <a:xfrm>
+            <a:off x="2232314" y="421340"/>
+            <a:ext cx="1720735" cy="2227847"/>
+          </a:xfrm>
+          <a:prstGeom prst="rect">
+            <a:avLst/>
+          </a:prstGeom>
+        </p:spPr>
+        <p:style>
+          <a:lnRef idx="2">
+            <a:schemeClr val="accent1"/>
+          </a:lnRef>
+          <a:fillRef idx="1">
+            <a:schemeClr val="lt1"/>
+          </a:fillRef>
+          <a:effectRef idx="0">
+            <a:schemeClr val="accent1"/>
+          </a:effectRef>
+          <a:fontRef idx="minor">
+            <a:schemeClr val="dk1"/>
+          </a:fontRef>
+        </p:style>
+        <p:txBody>
+          <a:bodyPr rtlCol="0" anchor="ctr"/>
+          <a:lstStyle/>
+          <a:p>
+            <a:pPr algn="ctr"/>
+            <a:endParaRPr lang="zh-CN" altLang="en-US" sz="1100" dirty="0">
+              <a:latin typeface="Times New Roman" panose="02020603050405020304" pitchFamily="18" charset="0"/>
+              <a:cs typeface="Times New Roman" panose="02020603050405020304" pitchFamily="18" charset="0"/>
+            </a:endParaRPr>
+          </a:p>
+        </p:txBody>
+      </p:sp>
+      <p:sp>
+        <p:nvSpPr>
+          <p:cNvPr id="44" name="矩形 43"/>
+          <p:cNvSpPr/>
+          <p:nvPr/>
+        </p:nvSpPr>
+        <p:spPr>
+          <a:xfrm>
+            <a:off x="4248494" y="1030742"/>
+            <a:ext cx="1720735" cy="2227847"/>
+          </a:xfrm>
+          <a:prstGeom prst="rect">
+            <a:avLst/>
+          </a:prstGeom>
+        </p:spPr>
+        <p:style>
+          <a:lnRef idx="2">
+            <a:schemeClr val="accent1"/>
+          </a:lnRef>
+          <a:fillRef idx="1">
+            <a:schemeClr val="lt1"/>
+          </a:fillRef>
+          <a:effectRef idx="0">
+            <a:schemeClr val="accent1"/>
+          </a:effectRef>
+          <a:fontRef idx="minor">
+            <a:schemeClr val="dk1"/>
+          </a:fontRef>
+        </p:style>
+        <p:txBody>
+          <a:bodyPr rtlCol="0" anchor="ctr"/>
+          <a:lstStyle/>
+          <a:p>
+            <a:pPr algn="ctr"/>
+            <a:endParaRPr lang="zh-CN" altLang="en-US" sz="1100" dirty="0">
+              <a:latin typeface="Times New Roman" panose="02020603050405020304" pitchFamily="18" charset="0"/>
+              <a:cs typeface="Times New Roman" panose="02020603050405020304" pitchFamily="18" charset="0"/>
+            </a:endParaRPr>
+          </a:p>
+        </p:txBody>
+      </p:sp>
+      <p:sp>
+        <p:nvSpPr>
+          <p:cNvPr id="6" name="矩形 5"/>
+          <p:cNvSpPr/>
+          <p:nvPr/>
+        </p:nvSpPr>
+        <p:spPr>
+          <a:xfrm>
+            <a:off x="2414154" y="606793"/>
+            <a:ext cx="1321724" cy="423949"/>
+          </a:xfrm>
+          <a:prstGeom prst="rect">
+            <a:avLst/>
+          </a:prstGeom>
+        </p:spPr>
+        <p:style>
+          <a:lnRef idx="1">
+            <a:schemeClr val="accent1"/>
+          </a:lnRef>
+          <a:fillRef idx="2">
+            <a:schemeClr val="accent1"/>
+          </a:fillRef>
+          <a:effectRef idx="1">
+            <a:schemeClr val="accent1"/>
+          </a:effectRef>
+          <a:fontRef idx="minor">
+            <a:schemeClr val="dk1"/>
+          </a:fontRef>
+        </p:style>
+        <p:txBody>
+          <a:bodyPr rtlCol="0" anchor="ctr"/>
+          <a:lstStyle/>
+          <a:p>
+            <a:pPr algn="ctr"/>
+            <a:r>
+              <a:rPr lang="en-US" altLang="zh-CN" sz="1100" dirty="0" smtClean="0">
+                <a:latin typeface="Times New Roman" panose="02020603050405020304" pitchFamily="18" charset="0"/>
+                <a:cs typeface="Times New Roman" panose="02020603050405020304" pitchFamily="18" charset="0"/>
+              </a:rPr>
+              <a:t>u</a:t>
+            </a:r>
+            <a:r>
+              <a:rPr lang="en-US" altLang="zh-CN" sz="1100" dirty="0" smtClean="0">
+                <a:latin typeface="Times New Roman" panose="02020603050405020304" pitchFamily="18" charset="0"/>
+                <a:cs typeface="Times New Roman" panose="02020603050405020304" pitchFamily="18" charset="0"/>
+              </a:rPr>
+              <a:t>int8_t* data</a:t>
+            </a:r>
+            <a:endParaRPr lang="zh-CN" altLang="en-US" sz="1100" dirty="0">
+              <a:latin typeface="Times New Roman" panose="02020603050405020304" pitchFamily="18" charset="0"/>
+              <a:cs typeface="Times New Roman" panose="02020603050405020304" pitchFamily="18" charset="0"/>
+            </a:endParaRPr>
+          </a:p>
+        </p:txBody>
+      </p:sp>
+      <p:sp>
+        <p:nvSpPr>
+          <p:cNvPr id="7" name="矩形 6"/>
+          <p:cNvSpPr/>
+          <p:nvPr/>
+        </p:nvSpPr>
+        <p:spPr>
+          <a:xfrm>
+            <a:off x="2414154" y="1172098"/>
+            <a:ext cx="1321724" cy="423949"/>
+          </a:xfrm>
+          <a:prstGeom prst="rect">
+            <a:avLst/>
+          </a:prstGeom>
+        </p:spPr>
+        <p:style>
+          <a:lnRef idx="1">
+            <a:schemeClr val="accent1"/>
+          </a:lnRef>
+          <a:fillRef idx="2">
+            <a:schemeClr val="accent1"/>
+          </a:fillRef>
+          <a:effectRef idx="1">
+            <a:schemeClr val="accent1"/>
+          </a:effectRef>
+          <a:fontRef idx="minor">
+            <a:schemeClr val="dk1"/>
+          </a:fontRef>
+        </p:style>
+        <p:txBody>
+          <a:bodyPr rtlCol="0" anchor="ctr"/>
+          <a:lstStyle/>
+          <a:p>
+            <a:pPr algn="ctr"/>
+            <a:r>
+              <a:rPr lang="en-US" altLang="zh-CN" sz="1100" dirty="0" smtClean="0">
+                <a:latin typeface="Times New Roman" panose="02020603050405020304" pitchFamily="18" charset="0"/>
+                <a:cs typeface="Times New Roman" panose="02020603050405020304" pitchFamily="18" charset="0"/>
+              </a:rPr>
+              <a:t>int size</a:t>
+            </a:r>
+          </a:p>
+        </p:txBody>
+      </p:sp>
+      <p:sp>
+        <p:nvSpPr>
+          <p:cNvPr id="8" name="矩形 7"/>
+          <p:cNvSpPr/>
+          <p:nvPr/>
+        </p:nvSpPr>
+        <p:spPr>
+          <a:xfrm>
+            <a:off x="2414154" y="1736334"/>
+            <a:ext cx="1321724" cy="423949"/>
+          </a:xfrm>
+          <a:prstGeom prst="rect">
+            <a:avLst/>
+          </a:prstGeom>
+        </p:spPr>
+        <p:style>
+          <a:lnRef idx="1">
+            <a:schemeClr val="accent1"/>
+          </a:lnRef>
+          <a:fillRef idx="2">
+            <a:schemeClr val="accent1"/>
+          </a:fillRef>
+          <a:effectRef idx="1">
+            <a:schemeClr val="accent1"/>
+          </a:effectRef>
+          <a:fontRef idx="minor">
+            <a:schemeClr val="dk1"/>
+          </a:fontRef>
+        </p:style>
+        <p:txBody>
+          <a:bodyPr rtlCol="0" anchor="ctr"/>
+          <a:lstStyle/>
+          <a:p>
+            <a:pPr algn="ctr"/>
+            <a:r>
+              <a:rPr lang="en-US" altLang="zh-CN" sz="1100" dirty="0" smtClean="0">
+                <a:latin typeface="Times New Roman" panose="02020603050405020304" pitchFamily="18" charset="0"/>
+                <a:cs typeface="Times New Roman" panose="02020603050405020304" pitchFamily="18" charset="0"/>
+              </a:rPr>
+              <a:t>AVBufferRef* buf </a:t>
+            </a:r>
+            <a:endParaRPr lang="zh-CN" altLang="en-US" sz="1100" dirty="0">
+              <a:latin typeface="Times New Roman" panose="02020603050405020304" pitchFamily="18" charset="0"/>
+              <a:cs typeface="Times New Roman" panose="02020603050405020304" pitchFamily="18" charset="0"/>
+            </a:endParaRPr>
+          </a:p>
+        </p:txBody>
+      </p:sp>
+      <p:sp>
+        <p:nvSpPr>
+          <p:cNvPr id="27" name="矩形 26"/>
+          <p:cNvSpPr/>
+          <p:nvPr/>
+        </p:nvSpPr>
+        <p:spPr>
+          <a:xfrm>
+            <a:off x="4423062" y="1159625"/>
+            <a:ext cx="1321724" cy="423949"/>
+          </a:xfrm>
+          <a:prstGeom prst="rect">
+            <a:avLst/>
+          </a:prstGeom>
+        </p:spPr>
+        <p:style>
+          <a:lnRef idx="1">
+            <a:schemeClr val="accent1"/>
+          </a:lnRef>
+          <a:fillRef idx="2">
+            <a:schemeClr val="accent1"/>
+          </a:fillRef>
+          <a:effectRef idx="1">
+            <a:schemeClr val="accent1"/>
+          </a:effectRef>
+          <a:fontRef idx="minor">
+            <a:schemeClr val="dk1"/>
+          </a:fontRef>
+        </p:style>
+        <p:txBody>
+          <a:bodyPr rtlCol="0" anchor="ctr"/>
+          <a:lstStyle/>
+          <a:p>
+            <a:pPr algn="ctr"/>
+            <a:r>
+              <a:rPr lang="en-US" altLang="zh-CN" sz="1100" dirty="0" smtClean="0">
+                <a:latin typeface="Times New Roman" panose="02020603050405020304" pitchFamily="18" charset="0"/>
+                <a:cs typeface="Times New Roman" panose="02020603050405020304" pitchFamily="18" charset="0"/>
+              </a:rPr>
+              <a:t>AVBuffer* buffer</a:t>
+            </a:r>
+            <a:endParaRPr lang="zh-CN" altLang="en-US" sz="1100" dirty="0">
+              <a:latin typeface="Times New Roman" panose="02020603050405020304" pitchFamily="18" charset="0"/>
+              <a:cs typeface="Times New Roman" panose="02020603050405020304" pitchFamily="18" charset="0"/>
+            </a:endParaRPr>
+          </a:p>
+        </p:txBody>
+      </p:sp>
+      <p:sp>
+        <p:nvSpPr>
+          <p:cNvPr id="28" name="矩形 27"/>
+          <p:cNvSpPr/>
+          <p:nvPr/>
+        </p:nvSpPr>
+        <p:spPr>
+          <a:xfrm>
+            <a:off x="4423062" y="1751933"/>
+            <a:ext cx="1321724" cy="423949"/>
+          </a:xfrm>
+          <a:prstGeom prst="rect">
+            <a:avLst/>
+          </a:prstGeom>
+        </p:spPr>
+        <p:style>
+          <a:lnRef idx="1">
+            <a:schemeClr val="accent1"/>
+          </a:lnRef>
+          <a:fillRef idx="2">
+            <a:schemeClr val="accent1"/>
+          </a:fillRef>
+          <a:effectRef idx="1">
+            <a:schemeClr val="accent1"/>
+          </a:effectRef>
+          <a:fontRef idx="minor">
+            <a:schemeClr val="dk1"/>
+          </a:fontRef>
+        </p:style>
+        <p:txBody>
+          <a:bodyPr rtlCol="0" anchor="ctr"/>
+          <a:lstStyle/>
+          <a:p>
+            <a:pPr algn="ctr"/>
+            <a:r>
+              <a:rPr lang="en-US" altLang="zh-CN" sz="1100" dirty="0" smtClean="0">
+                <a:latin typeface="Times New Roman" panose="02020603050405020304" pitchFamily="18" charset="0"/>
+                <a:cs typeface="Times New Roman" panose="02020603050405020304" pitchFamily="18" charset="0"/>
+              </a:rPr>
+              <a:t>u</a:t>
+            </a:r>
+            <a:r>
+              <a:rPr lang="en-US" altLang="zh-CN" sz="1100" dirty="0" smtClean="0">
+                <a:latin typeface="Times New Roman" panose="02020603050405020304" pitchFamily="18" charset="0"/>
+                <a:cs typeface="Times New Roman" panose="02020603050405020304" pitchFamily="18" charset="0"/>
+              </a:rPr>
+              <a:t>int8_t* data</a:t>
+            </a:r>
+            <a:endParaRPr lang="zh-CN" altLang="en-US" sz="1100" dirty="0">
+              <a:latin typeface="Times New Roman" panose="02020603050405020304" pitchFamily="18" charset="0"/>
+              <a:cs typeface="Times New Roman" panose="02020603050405020304" pitchFamily="18" charset="0"/>
+            </a:endParaRPr>
+          </a:p>
+        </p:txBody>
+      </p:sp>
+      <p:sp>
+        <p:nvSpPr>
+          <p:cNvPr id="31" name="矩形 30"/>
+          <p:cNvSpPr/>
+          <p:nvPr/>
+        </p:nvSpPr>
+        <p:spPr>
+          <a:xfrm>
+            <a:off x="4423062" y="2331720"/>
+            <a:ext cx="1321724" cy="423949"/>
+          </a:xfrm>
+          <a:prstGeom prst="rect">
+            <a:avLst/>
+          </a:prstGeom>
+        </p:spPr>
+        <p:style>
+          <a:lnRef idx="1">
+            <a:schemeClr val="accent1"/>
+          </a:lnRef>
+          <a:fillRef idx="2">
+            <a:schemeClr val="accent1"/>
+          </a:fillRef>
+          <a:effectRef idx="1">
+            <a:schemeClr val="accent1"/>
+          </a:effectRef>
+          <a:fontRef idx="minor">
+            <a:schemeClr val="dk1"/>
+          </a:fontRef>
+        </p:style>
+        <p:txBody>
+          <a:bodyPr rtlCol="0" anchor="ctr"/>
+          <a:lstStyle/>
+          <a:p>
+            <a:pPr algn="ctr"/>
+            <a:r>
+              <a:rPr lang="en-US" altLang="zh-CN" sz="1100" dirty="0" smtClean="0">
+                <a:latin typeface="Times New Roman" panose="02020603050405020304" pitchFamily="18" charset="0"/>
+                <a:cs typeface="Times New Roman" panose="02020603050405020304" pitchFamily="18" charset="0"/>
+              </a:rPr>
+              <a:t>int* size</a:t>
+            </a:r>
+            <a:endParaRPr lang="zh-CN" altLang="en-US" sz="1100" dirty="0">
+              <a:latin typeface="Times New Roman" panose="02020603050405020304" pitchFamily="18" charset="0"/>
+              <a:cs typeface="Times New Roman" panose="02020603050405020304" pitchFamily="18" charset="0"/>
+            </a:endParaRPr>
+          </a:p>
+        </p:txBody>
+      </p:sp>
+      <p:sp>
+        <p:nvSpPr>
+          <p:cNvPr id="42" name="矩形 41"/>
+          <p:cNvSpPr/>
+          <p:nvPr/>
+        </p:nvSpPr>
+        <p:spPr>
+          <a:xfrm>
+            <a:off x="7049886" y="780377"/>
+            <a:ext cx="1225434" cy="423949"/>
+          </a:xfrm>
+          <a:prstGeom prst="rect">
+            <a:avLst/>
+          </a:prstGeom>
+        </p:spPr>
+        <p:style>
+          <a:lnRef idx="2">
+            <a:schemeClr val="accent1"/>
+          </a:lnRef>
+          <a:fillRef idx="1">
+            <a:schemeClr val="lt1"/>
+          </a:fillRef>
+          <a:effectRef idx="0">
+            <a:schemeClr val="accent1"/>
+          </a:effectRef>
+          <a:fontRef idx="minor">
+            <a:schemeClr val="dk1"/>
+          </a:fontRef>
+        </p:style>
+        <p:txBody>
+          <a:bodyPr rtlCol="0" anchor="ctr"/>
+          <a:lstStyle/>
+          <a:p>
+            <a:pPr algn="ctr"/>
+            <a:r>
+              <a:rPr lang="zh-CN" altLang="en-US" sz="1100" dirty="0" smtClean="0">
+                <a:latin typeface="Times New Roman" panose="02020603050405020304" pitchFamily="18" charset="0"/>
+                <a:cs typeface="Times New Roman" panose="02020603050405020304" pitchFamily="18" charset="0"/>
+              </a:rPr>
+              <a:t>用户数据</a:t>
+            </a:r>
+            <a:endParaRPr lang="zh-CN" altLang="en-US" sz="1100" dirty="0">
+              <a:latin typeface="Times New Roman" panose="02020603050405020304" pitchFamily="18" charset="0"/>
+              <a:cs typeface="Times New Roman" panose="02020603050405020304" pitchFamily="18" charset="0"/>
+            </a:endParaRPr>
+          </a:p>
+        </p:txBody>
+      </p:sp>
+      <p:sp>
+        <p:nvSpPr>
+          <p:cNvPr id="43" name="矩形 42"/>
+          <p:cNvSpPr/>
+          <p:nvPr/>
+        </p:nvSpPr>
+        <p:spPr>
+          <a:xfrm>
+            <a:off x="7049885" y="1212635"/>
+            <a:ext cx="1225436" cy="423949"/>
+          </a:xfrm>
+          <a:prstGeom prst="rect">
+            <a:avLst/>
+          </a:prstGeom>
+        </p:spPr>
+        <p:style>
+          <a:lnRef idx="2">
+            <a:schemeClr val="accent1"/>
+          </a:lnRef>
+          <a:fillRef idx="1">
+            <a:schemeClr val="lt1"/>
+          </a:fillRef>
+          <a:effectRef idx="0">
+            <a:schemeClr val="accent1"/>
+          </a:effectRef>
+          <a:fontRef idx="minor">
+            <a:schemeClr val="dk1"/>
+          </a:fontRef>
+        </p:style>
+        <p:txBody>
+          <a:bodyPr rtlCol="0" anchor="ctr"/>
+          <a:lstStyle/>
+          <a:p>
+            <a:pPr algn="ctr"/>
+            <a:r>
+              <a:rPr lang="zh-CN" altLang="en-US" sz="1100" dirty="0" smtClean="0">
+                <a:latin typeface="Times New Roman" panose="02020603050405020304" pitchFamily="18" charset="0"/>
+                <a:cs typeface="Times New Roman" panose="02020603050405020304" pitchFamily="18" charset="0"/>
+              </a:rPr>
+              <a:t>引用计数值</a:t>
+            </a:r>
+            <a:endParaRPr lang="en-US" altLang="zh-CN" sz="1100" dirty="0" smtClean="0">
+              <a:latin typeface="Times New Roman" panose="02020603050405020304" pitchFamily="18" charset="0"/>
+              <a:cs typeface="Times New Roman" panose="02020603050405020304" pitchFamily="18" charset="0"/>
+            </a:endParaRPr>
+          </a:p>
+        </p:txBody>
+      </p:sp>
+      <p:sp>
+        <p:nvSpPr>
+          <p:cNvPr id="3" name="文本框 2"/>
+          <p:cNvSpPr txBox="1"/>
+          <p:nvPr/>
+        </p:nvSpPr>
+        <p:spPr>
+          <a:xfrm>
+            <a:off x="4275513" y="2778555"/>
+            <a:ext cx="1693716" cy="461665"/>
+          </a:xfrm>
+          <a:prstGeom prst="rect">
+            <a:avLst/>
+          </a:prstGeom>
+          <a:noFill/>
+        </p:spPr>
+        <p:txBody>
+          <a:bodyPr wrap="square" rtlCol="0">
+            <a:spAutoFit/>
+          </a:bodyPr>
+          <a:lstStyle/>
+          <a:p>
+            <a:pPr algn="ctr"/>
+            <a:r>
+              <a:rPr lang="en-US" altLang="zh-CN" sz="1200" dirty="0" smtClean="0">
+                <a:latin typeface="Times New Roman" panose="02020603050405020304" pitchFamily="18" charset="0"/>
+                <a:cs typeface="Times New Roman" panose="02020603050405020304" pitchFamily="18" charset="0"/>
+              </a:rPr>
+              <a:t>AVBufferRef</a:t>
+            </a:r>
+          </a:p>
+          <a:p>
+            <a:pPr algn="ctr"/>
+            <a:r>
+              <a:rPr lang="zh-CN" altLang="en-US" sz="1200" dirty="0" smtClean="0">
+                <a:latin typeface="Times New Roman" panose="02020603050405020304" pitchFamily="18" charset="0"/>
+                <a:cs typeface="Times New Roman" panose="02020603050405020304" pitchFamily="18" charset="0"/>
+              </a:rPr>
+              <a:t>（引用计数智能指针）</a:t>
+            </a:r>
+            <a:endParaRPr lang="zh-CN" altLang="en-US" sz="1200" dirty="0">
+              <a:latin typeface="Times New Roman" panose="02020603050405020304" pitchFamily="18" charset="0"/>
+              <a:cs typeface="Times New Roman" panose="02020603050405020304" pitchFamily="18" charset="0"/>
+            </a:endParaRPr>
+          </a:p>
+        </p:txBody>
+      </p:sp>
+      <p:cxnSp>
+        <p:nvCxnSpPr>
+          <p:cNvPr id="16" name="直接箭头连接符 15"/>
+          <p:cNvCxnSpPr>
+            <a:stCxn id="8" idx="3"/>
+          </p:cNvCxnSpPr>
+          <p:nvPr/>
+        </p:nvCxnSpPr>
+        <p:spPr>
+          <a:xfrm flipV="1">
+            <a:off x="3735878" y="1948308"/>
+            <a:ext cx="539635" cy="1"/>
+          </a:xfrm>
+          <a:prstGeom prst="straightConnector1">
+            <a:avLst/>
+          </a:prstGeom>
+          <a:ln>
+            <a:tailEnd type="triangle"/>
+          </a:ln>
+        </p:spPr>
+        <p:style>
+          <a:lnRef idx="1">
+            <a:schemeClr val="accent1"/>
+          </a:lnRef>
+          <a:fillRef idx="0">
+            <a:schemeClr val="accent1"/>
+          </a:fillRef>
+          <a:effectRef idx="0">
+            <a:schemeClr val="accent1"/>
+          </a:effectRef>
+          <a:fontRef idx="minor">
+            <a:schemeClr val="tx1"/>
+          </a:fontRef>
+        </p:style>
+      </p:cxnSp>
+      <p:sp>
+        <p:nvSpPr>
+          <p:cNvPr id="48" name="文本框 47"/>
+          <p:cNvSpPr txBox="1"/>
+          <p:nvPr/>
+        </p:nvSpPr>
+        <p:spPr>
+          <a:xfrm>
+            <a:off x="2321677" y="2239296"/>
+            <a:ext cx="1693716" cy="276999"/>
+          </a:xfrm>
+          <a:prstGeom prst="rect">
+            <a:avLst/>
+          </a:prstGeom>
+          <a:noFill/>
+        </p:spPr>
+        <p:txBody>
+          <a:bodyPr wrap="square" rtlCol="0">
+            <a:spAutoFit/>
+          </a:bodyPr>
+          <a:lstStyle/>
+          <a:p>
+            <a:pPr algn="ctr"/>
+            <a:r>
+              <a:rPr lang="en-US" altLang="zh-CN" sz="1200" dirty="0" smtClean="0">
+                <a:latin typeface="Times New Roman" panose="02020603050405020304" pitchFamily="18" charset="0"/>
+                <a:cs typeface="Times New Roman" panose="02020603050405020304" pitchFamily="18" charset="0"/>
+              </a:rPr>
+              <a:t>AVPacket</a:t>
+            </a:r>
+            <a:endParaRPr lang="zh-CN" altLang="en-US" sz="1200" dirty="0">
+              <a:latin typeface="Times New Roman" panose="02020603050405020304" pitchFamily="18" charset="0"/>
+              <a:cs typeface="Times New Roman" panose="02020603050405020304" pitchFamily="18" charset="0"/>
+            </a:endParaRPr>
+          </a:p>
+        </p:txBody>
+      </p:sp>
+      <p:sp>
+        <p:nvSpPr>
+          <p:cNvPr id="53" name="矩形 52"/>
+          <p:cNvSpPr/>
+          <p:nvPr/>
+        </p:nvSpPr>
+        <p:spPr>
+          <a:xfrm>
+            <a:off x="7049883" y="1636584"/>
+            <a:ext cx="1225436" cy="423949"/>
+          </a:xfrm>
+          <a:prstGeom prst="rect">
+            <a:avLst/>
+          </a:prstGeom>
+        </p:spPr>
+        <p:style>
+          <a:lnRef idx="2">
+            <a:schemeClr val="accent1"/>
+          </a:lnRef>
+          <a:fillRef idx="1">
+            <a:schemeClr val="lt1"/>
+          </a:fillRef>
+          <a:effectRef idx="0">
+            <a:schemeClr val="accent1"/>
+          </a:effectRef>
+          <a:fontRef idx="minor">
+            <a:schemeClr val="dk1"/>
+          </a:fontRef>
+        </p:style>
+        <p:txBody>
+          <a:bodyPr rtlCol="0" anchor="ctr"/>
+          <a:lstStyle/>
+          <a:p>
+            <a:pPr algn="ctr"/>
+            <a:r>
+              <a:rPr lang="en-US" altLang="zh-CN" sz="1100" dirty="0">
+                <a:latin typeface="Times New Roman" panose="02020603050405020304" pitchFamily="18" charset="0"/>
+                <a:cs typeface="Times New Roman" panose="02020603050405020304" pitchFamily="18" charset="0"/>
+              </a:rPr>
+              <a:t>……</a:t>
+            </a:r>
+            <a:endParaRPr lang="zh-CN" altLang="en-US" sz="1100" dirty="0">
+              <a:latin typeface="Times New Roman" panose="02020603050405020304" pitchFamily="18" charset="0"/>
+              <a:cs typeface="Times New Roman" panose="02020603050405020304" pitchFamily="18" charset="0"/>
+            </a:endParaRPr>
+          </a:p>
+        </p:txBody>
+      </p:sp>
+      <p:cxnSp>
+        <p:nvCxnSpPr>
+          <p:cNvPr id="55" name="直接箭头连接符 54"/>
+          <p:cNvCxnSpPr/>
+          <p:nvPr/>
+        </p:nvCxnSpPr>
+        <p:spPr>
+          <a:xfrm>
+            <a:off x="5744785" y="1367803"/>
+            <a:ext cx="1103169" cy="3797"/>
+          </a:xfrm>
+          <a:prstGeom prst="straightConnector1">
+            <a:avLst/>
+          </a:prstGeom>
+          <a:ln>
+            <a:tailEnd type="triangle"/>
+          </a:ln>
+        </p:spPr>
+        <p:style>
+          <a:lnRef idx="1">
+            <a:schemeClr val="accent1"/>
+          </a:lnRef>
+          <a:fillRef idx="0">
+            <a:schemeClr val="accent1"/>
+          </a:fillRef>
+          <a:effectRef idx="0">
+            <a:schemeClr val="accent1"/>
+          </a:effectRef>
+          <a:fontRef idx="minor">
+            <a:schemeClr val="tx1"/>
+          </a:fontRef>
+        </p:style>
+      </p:cxnSp>
+      <p:sp>
+        <p:nvSpPr>
+          <p:cNvPr id="59" name="任意多边形 58"/>
+          <p:cNvSpPr/>
+          <p:nvPr/>
+        </p:nvSpPr>
+        <p:spPr>
+          <a:xfrm>
+            <a:off x="3741420" y="182183"/>
+            <a:ext cx="3299460" cy="739837"/>
+          </a:xfrm>
+          <a:custGeom>
+            <a:avLst/>
+            <a:gdLst>
+              <a:gd name="connsiteX0" fmla="*/ 0 w 3299460"/>
+              <a:gd name="connsiteY0" fmla="*/ 633157 h 739837"/>
+              <a:gd name="connsiteX1" fmla="*/ 1143000 w 3299460"/>
+              <a:gd name="connsiteY1" fmla="*/ 697 h 739837"/>
+              <a:gd name="connsiteX2" fmla="*/ 3299460 w 3299460"/>
+              <a:gd name="connsiteY2" fmla="*/ 739837 h 739837"/>
+              <a:gd name="connsiteX3" fmla="*/ 3299460 w 3299460"/>
+              <a:gd name="connsiteY3" fmla="*/ 739837 h 739837"/>
+            </a:gdLst>
+            <a:ahLst/>
+            <a:cxnLst>
+              <a:cxn ang="0">
+                <a:pos x="connsiteX0" y="connsiteY0"/>
+              </a:cxn>
+              <a:cxn ang="0">
+                <a:pos x="connsiteX1" y="connsiteY1"/>
+              </a:cxn>
+              <a:cxn ang="0">
+                <a:pos x="connsiteX2" y="connsiteY2"/>
+              </a:cxn>
+              <a:cxn ang="0">
+                <a:pos x="connsiteX3" y="connsiteY3"/>
+              </a:cxn>
+            </a:cxnLst>
+            <a:rect l="l" t="t" r="r" b="b"/>
+            <a:pathLst>
+              <a:path w="3299460" h="739837">
+                <a:moveTo>
+                  <a:pt x="0" y="633157"/>
+                </a:moveTo>
+                <a:cubicBezTo>
+                  <a:pt x="296545" y="308037"/>
+                  <a:pt x="593090" y="-17083"/>
+                  <a:pt x="1143000" y="697"/>
+                </a:cubicBezTo>
+                <a:cubicBezTo>
+                  <a:pt x="1692910" y="18477"/>
+                  <a:pt x="3299460" y="739837"/>
+                  <a:pt x="3299460" y="739837"/>
+                </a:cubicBezTo>
+                <a:lnTo>
+                  <a:pt x="3299460" y="739837"/>
+                </a:lnTo>
+              </a:path>
+            </a:pathLst>
+          </a:custGeom>
+          <a:noFill/>
+          <a:ln>
+            <a:headEnd type="none" w="med" len="med"/>
+            <a:tailEnd type="triangle" w="med" len="med"/>
+          </a:ln>
+        </p:spPr>
+        <p:style>
+          <a:lnRef idx="2">
+            <a:schemeClr val="accent1">
+              <a:shade val="50000"/>
+            </a:schemeClr>
+          </a:lnRef>
+          <a:fillRef idx="1">
+            <a:schemeClr val="accent1"/>
+          </a:fillRef>
+          <a:effectRef idx="0">
+            <a:schemeClr val="accent1"/>
+          </a:effectRef>
+          <a:fontRef idx="minor">
+            <a:schemeClr val="lt1"/>
+          </a:fontRef>
+        </p:style>
+        <p:txBody>
+          <a:bodyPr rtlCol="0" anchor="ctr"/>
+          <a:lstStyle/>
+          <a:p>
+            <a:pPr algn="ctr"/>
+            <a:endParaRPr lang="zh-CN" altLang="en-US"/>
+          </a:p>
+        </p:txBody>
+      </p:sp>
+      <p:sp>
+        <p:nvSpPr>
+          <p:cNvPr id="64" name="任意多边形 63"/>
+          <p:cNvSpPr/>
+          <p:nvPr/>
+        </p:nvSpPr>
+        <p:spPr>
+          <a:xfrm>
+            <a:off x="5745480" y="1059180"/>
+            <a:ext cx="1295400" cy="958326"/>
+          </a:xfrm>
+          <a:custGeom>
+            <a:avLst/>
+            <a:gdLst>
+              <a:gd name="connsiteX0" fmla="*/ 0 w 1295400"/>
+              <a:gd name="connsiteY0" fmla="*/ 914400 h 958326"/>
+              <a:gd name="connsiteX1" fmla="*/ 845820 w 1295400"/>
+              <a:gd name="connsiteY1" fmla="*/ 853440 h 958326"/>
+              <a:gd name="connsiteX2" fmla="*/ 1295400 w 1295400"/>
+              <a:gd name="connsiteY2" fmla="*/ 0 h 958326"/>
+              <a:gd name="connsiteX3" fmla="*/ 1295400 w 1295400"/>
+              <a:gd name="connsiteY3" fmla="*/ 0 h 958326"/>
+            </a:gdLst>
+            <a:ahLst/>
+            <a:cxnLst>
+              <a:cxn ang="0">
+                <a:pos x="connsiteX0" y="connsiteY0"/>
+              </a:cxn>
+              <a:cxn ang="0">
+                <a:pos x="connsiteX1" y="connsiteY1"/>
+              </a:cxn>
+              <a:cxn ang="0">
+                <a:pos x="connsiteX2" y="connsiteY2"/>
+              </a:cxn>
+              <a:cxn ang="0">
+                <a:pos x="connsiteX3" y="connsiteY3"/>
+              </a:cxn>
+            </a:cxnLst>
+            <a:rect l="l" t="t" r="r" b="b"/>
+            <a:pathLst>
+              <a:path w="1295400" h="958326">
+                <a:moveTo>
+                  <a:pt x="0" y="914400"/>
+                </a:moveTo>
+                <a:cubicBezTo>
+                  <a:pt x="314960" y="960120"/>
+                  <a:pt x="629920" y="1005840"/>
+                  <a:pt x="845820" y="853440"/>
+                </a:cubicBezTo>
+                <a:cubicBezTo>
+                  <a:pt x="1061720" y="701040"/>
+                  <a:pt x="1295400" y="0"/>
+                  <a:pt x="1295400" y="0"/>
+                </a:cubicBezTo>
+                <a:lnTo>
+                  <a:pt x="1295400" y="0"/>
+                </a:lnTo>
+              </a:path>
+            </a:pathLst>
+          </a:custGeom>
+          <a:noFill/>
+          <a:ln>
+            <a:headEnd type="none" w="med" len="med"/>
+            <a:tailEnd type="triangle" w="med" len="med"/>
+          </a:ln>
+        </p:spPr>
+        <p:style>
+          <a:lnRef idx="2">
+            <a:schemeClr val="accent1">
+              <a:shade val="50000"/>
+            </a:schemeClr>
+          </a:lnRef>
+          <a:fillRef idx="1">
+            <a:schemeClr val="accent1"/>
+          </a:fillRef>
+          <a:effectRef idx="0">
+            <a:schemeClr val="accent1"/>
+          </a:effectRef>
+          <a:fontRef idx="minor">
+            <a:schemeClr val="lt1"/>
+          </a:fontRef>
+        </p:style>
+        <p:txBody>
+          <a:bodyPr rtlCol="0" anchor="ctr"/>
+          <a:lstStyle/>
+          <a:p>
+            <a:pPr algn="ctr"/>
+            <a:endParaRPr lang="zh-CN" altLang="en-US"/>
+          </a:p>
+        </p:txBody>
+      </p:sp>
+    </p:spTree>
+    <p:extLst>
+      <p:ext uri="{BB962C8B-B14F-4D97-AF65-F5344CB8AC3E}">
+        <p14:creationId xmlns:p14="http://schemas.microsoft.com/office/powerpoint/2010/main" val="3842126617"/>
+      </p:ext>
+    </p:extLst>
+  </p:cSld>
+  <p:clrMapOvr>
+    <a:masterClrMapping/>
+  </p:clrMapOvr>
+</p:sld>
+</file>
+
 <file path=ppt/theme/theme1.xml><?xml version="1.0" encoding="utf-8"?>
 <a:theme xmlns:a="http://schemas.openxmlformats.org/drawingml/2006/main" name="Office 主题​​">
   <a:themeElements>

--- a/音视频编解码.pptx
+++ b/音视频编解码.pptx
@@ -7,6 +7,7 @@
   <p:sldIdLst>
     <p:sldId id="256" r:id="rId2"/>
     <p:sldId id="257" r:id="rId3"/>
+    <p:sldId id="258" r:id="rId4"/>
   </p:sldIdLst>
   <p:sldSz cx="12192000" cy="6858000"/>
   <p:notesSz cx="6858000" cy="9144000"/>
@@ -244,7 +245,7 @@
           <a:p>
             <a:fld id="{EA80D996-CE9E-432A-86C4-A040E9078786}" type="datetimeFigureOut">
               <a:rPr lang="zh-CN" altLang="en-US" smtClean="0"/>
-              <a:t>2019/1/25</a:t>
+              <a:t>2019/2/22</a:t>
             </a:fld>
             <a:endParaRPr lang="zh-CN" altLang="en-US"/>
           </a:p>
@@ -414,7 +415,7 @@
           <a:p>
             <a:fld id="{EA80D996-CE9E-432A-86C4-A040E9078786}" type="datetimeFigureOut">
               <a:rPr lang="zh-CN" altLang="en-US" smtClean="0"/>
-              <a:t>2019/1/25</a:t>
+              <a:t>2019/2/22</a:t>
             </a:fld>
             <a:endParaRPr lang="zh-CN" altLang="en-US"/>
           </a:p>
@@ -594,7 +595,7 @@
           <a:p>
             <a:fld id="{EA80D996-CE9E-432A-86C4-A040E9078786}" type="datetimeFigureOut">
               <a:rPr lang="zh-CN" altLang="en-US" smtClean="0"/>
-              <a:t>2019/1/25</a:t>
+              <a:t>2019/2/22</a:t>
             </a:fld>
             <a:endParaRPr lang="zh-CN" altLang="en-US"/>
           </a:p>
@@ -764,7 +765,7 @@
           <a:p>
             <a:fld id="{EA80D996-CE9E-432A-86C4-A040E9078786}" type="datetimeFigureOut">
               <a:rPr lang="zh-CN" altLang="en-US" smtClean="0"/>
-              <a:t>2019/1/25</a:t>
+              <a:t>2019/2/22</a:t>
             </a:fld>
             <a:endParaRPr lang="zh-CN" altLang="en-US"/>
           </a:p>
@@ -1010,7 +1011,7 @@
           <a:p>
             <a:fld id="{EA80D996-CE9E-432A-86C4-A040E9078786}" type="datetimeFigureOut">
               <a:rPr lang="zh-CN" altLang="en-US" smtClean="0"/>
-              <a:t>2019/1/25</a:t>
+              <a:t>2019/2/22</a:t>
             </a:fld>
             <a:endParaRPr lang="zh-CN" altLang="en-US"/>
           </a:p>
@@ -1242,7 +1243,7 @@
           <a:p>
             <a:fld id="{EA80D996-CE9E-432A-86C4-A040E9078786}" type="datetimeFigureOut">
               <a:rPr lang="zh-CN" altLang="en-US" smtClean="0"/>
-              <a:t>2019/1/25</a:t>
+              <a:t>2019/2/22</a:t>
             </a:fld>
             <a:endParaRPr lang="zh-CN" altLang="en-US"/>
           </a:p>
@@ -1609,7 +1610,7 @@
           <a:p>
             <a:fld id="{EA80D996-CE9E-432A-86C4-A040E9078786}" type="datetimeFigureOut">
               <a:rPr lang="zh-CN" altLang="en-US" smtClean="0"/>
-              <a:t>2019/1/25</a:t>
+              <a:t>2019/2/22</a:t>
             </a:fld>
             <a:endParaRPr lang="zh-CN" altLang="en-US"/>
           </a:p>
@@ -1727,7 +1728,7 @@
           <a:p>
             <a:fld id="{EA80D996-CE9E-432A-86C4-A040E9078786}" type="datetimeFigureOut">
               <a:rPr lang="zh-CN" altLang="en-US" smtClean="0"/>
-              <a:t>2019/1/25</a:t>
+              <a:t>2019/2/22</a:t>
             </a:fld>
             <a:endParaRPr lang="zh-CN" altLang="en-US"/>
           </a:p>
@@ -1822,7 +1823,7 @@
           <a:p>
             <a:fld id="{EA80D996-CE9E-432A-86C4-A040E9078786}" type="datetimeFigureOut">
               <a:rPr lang="zh-CN" altLang="en-US" smtClean="0"/>
-              <a:t>2019/1/25</a:t>
+              <a:t>2019/2/22</a:t>
             </a:fld>
             <a:endParaRPr lang="zh-CN" altLang="en-US"/>
           </a:p>
@@ -2099,7 +2100,7 @@
           <a:p>
             <a:fld id="{EA80D996-CE9E-432A-86C4-A040E9078786}" type="datetimeFigureOut">
               <a:rPr lang="zh-CN" altLang="en-US" smtClean="0"/>
-              <a:t>2019/1/25</a:t>
+              <a:t>2019/2/22</a:t>
             </a:fld>
             <a:endParaRPr lang="zh-CN" altLang="en-US"/>
           </a:p>
@@ -2352,7 +2353,7 @@
           <a:p>
             <a:fld id="{EA80D996-CE9E-432A-86C4-A040E9078786}" type="datetimeFigureOut">
               <a:rPr lang="zh-CN" altLang="en-US" smtClean="0"/>
-              <a:t>2019/1/25</a:t>
+              <a:t>2019/2/22</a:t>
             </a:fld>
             <a:endParaRPr lang="zh-CN" altLang="en-US"/>
           </a:p>
@@ -2565,7 +2566,7 @@
           <a:p>
             <a:fld id="{EA80D996-CE9E-432A-86C4-A040E9078786}" type="datetimeFigureOut">
               <a:rPr lang="zh-CN" altLang="en-US" smtClean="0"/>
-              <a:t>2019/1/25</a:t>
+              <a:t>2019/2/22</a:t>
             </a:fld>
             <a:endParaRPr lang="zh-CN" altLang="en-US"/>
           </a:p>
@@ -4087,14 +4088,7 @@
                 <a:latin typeface="Times New Roman" panose="02020603050405020304" pitchFamily="18" charset="0"/>
                 <a:cs typeface="Times New Roman" panose="02020603050405020304" pitchFamily="18" charset="0"/>
               </a:rPr>
-              <a:t>u</a:t>
-            </a:r>
-            <a:r>
-              <a:rPr lang="en-US" altLang="zh-CN" sz="1100" dirty="0" smtClean="0">
-                <a:latin typeface="Times New Roman" panose="02020603050405020304" pitchFamily="18" charset="0"/>
-                <a:cs typeface="Times New Roman" panose="02020603050405020304" pitchFamily="18" charset="0"/>
-              </a:rPr>
-              <a:t>int8_t* data</a:t>
+              <a:t>uint8_t* data</a:t>
             </a:r>
             <a:endParaRPr lang="zh-CN" altLang="en-US" sz="1100" dirty="0">
               <a:latin typeface="Times New Roman" panose="02020603050405020304" pitchFamily="18" charset="0"/>
@@ -4282,14 +4276,7 @@
                 <a:latin typeface="Times New Roman" panose="02020603050405020304" pitchFamily="18" charset="0"/>
                 <a:cs typeface="Times New Roman" panose="02020603050405020304" pitchFamily="18" charset="0"/>
               </a:rPr>
-              <a:t>u</a:t>
-            </a:r>
-            <a:r>
-              <a:rPr lang="en-US" altLang="zh-CN" sz="1100" dirty="0" smtClean="0">
-                <a:latin typeface="Times New Roman" panose="02020603050405020304" pitchFamily="18" charset="0"/>
-                <a:cs typeface="Times New Roman" panose="02020603050405020304" pitchFamily="18" charset="0"/>
-              </a:rPr>
-              <a:t>int8_t* data</a:t>
+              <a:t>uint8_t* data</a:t>
             </a:r>
             <a:endParaRPr lang="zh-CN" altLang="en-US" sz="1100" dirty="0">
               <a:latin typeface="Times New Roman" panose="02020603050405020304" pitchFamily="18" charset="0"/>
@@ -4828,6 +4815,1066 @@
     <p:extLst>
       <p:ext uri="{BB962C8B-B14F-4D97-AF65-F5344CB8AC3E}">
         <p14:creationId xmlns:p14="http://schemas.microsoft.com/office/powerpoint/2010/main" val="3842126617"/>
+      </p:ext>
+    </p:extLst>
+  </p:cSld>
+  <p:clrMapOvr>
+    <a:masterClrMapping/>
+  </p:clrMapOvr>
+</p:sld>
+</file>
+
+<file path=ppt/slides/slide3.xml><?xml version="1.0" encoding="utf-8"?>
+<p:sld xmlns:a="http://schemas.openxmlformats.org/drawingml/2006/main" xmlns:r="http://schemas.openxmlformats.org/officeDocument/2006/relationships" xmlns:p="http://schemas.openxmlformats.org/presentationml/2006/main">
+  <p:cSld>
+    <p:spTree>
+      <p:nvGrpSpPr>
+        <p:cNvPr id="1" name=""/>
+        <p:cNvGrpSpPr/>
+        <p:nvPr/>
+      </p:nvGrpSpPr>
+      <p:grpSpPr>
+        <a:xfrm>
+          <a:off x="0" y="0"/>
+          <a:ext cx="0" cy="0"/>
+          <a:chOff x="0" y="0"/>
+          <a:chExt cx="0" cy="0"/>
+        </a:xfrm>
+      </p:grpSpPr>
+      <p:sp>
+        <p:nvSpPr>
+          <p:cNvPr id="4" name="矩形 3"/>
+          <p:cNvSpPr/>
+          <p:nvPr/>
+        </p:nvSpPr>
+        <p:spPr>
+          <a:xfrm>
+            <a:off x="6884321" y="3297993"/>
+            <a:ext cx="1321724" cy="423949"/>
+          </a:xfrm>
+          <a:prstGeom prst="rect">
+            <a:avLst/>
+          </a:prstGeom>
+        </p:spPr>
+        <p:style>
+          <a:lnRef idx="1">
+            <a:schemeClr val="accent1"/>
+          </a:lnRef>
+          <a:fillRef idx="2">
+            <a:schemeClr val="accent1"/>
+          </a:fillRef>
+          <a:effectRef idx="1">
+            <a:schemeClr val="accent1"/>
+          </a:effectRef>
+          <a:fontRef idx="minor">
+            <a:schemeClr val="dk1"/>
+          </a:fontRef>
+        </p:style>
+        <p:txBody>
+          <a:bodyPr rtlCol="0" anchor="ctr"/>
+          <a:lstStyle/>
+          <a:p>
+            <a:pPr algn="ctr"/>
+            <a:r>
+              <a:rPr lang="zh-CN" altLang="en-US" sz="1100" dirty="0" smtClean="0">
+                <a:latin typeface="Times New Roman" panose="02020603050405020304" pitchFamily="18" charset="0"/>
+                <a:cs typeface="Times New Roman" panose="02020603050405020304" pitchFamily="18" charset="0"/>
+              </a:rPr>
+              <a:t>正常</a:t>
+            </a:r>
+            <a:r>
+              <a:rPr lang="en-US" altLang="zh-CN" sz="1100" dirty="0" smtClean="0">
+                <a:latin typeface="Times New Roman" panose="02020603050405020304" pitchFamily="18" charset="0"/>
+                <a:cs typeface="Times New Roman" panose="02020603050405020304" pitchFamily="18" charset="0"/>
+              </a:rPr>
+              <a:t>space</a:t>
+            </a:r>
+            <a:r>
+              <a:rPr lang="zh-CN" altLang="en-US" sz="1100" dirty="0" smtClean="0">
+                <a:latin typeface="Times New Roman" panose="02020603050405020304" pitchFamily="18" charset="0"/>
+                <a:cs typeface="Times New Roman" panose="02020603050405020304" pitchFamily="18" charset="0"/>
+              </a:rPr>
+              <a:t>未按下</a:t>
+            </a:r>
+            <a:endParaRPr lang="zh-CN" altLang="en-US" sz="1100" dirty="0">
+              <a:latin typeface="Times New Roman" panose="02020603050405020304" pitchFamily="18" charset="0"/>
+              <a:cs typeface="Times New Roman" panose="02020603050405020304" pitchFamily="18" charset="0"/>
+            </a:endParaRPr>
+          </a:p>
+        </p:txBody>
+      </p:sp>
+      <p:sp>
+        <p:nvSpPr>
+          <p:cNvPr id="5" name="矩形 4"/>
+          <p:cNvSpPr/>
+          <p:nvPr/>
+        </p:nvSpPr>
+        <p:spPr>
+          <a:xfrm>
+            <a:off x="5046430" y="2226198"/>
+            <a:ext cx="1321724" cy="423949"/>
+          </a:xfrm>
+          <a:prstGeom prst="rect">
+            <a:avLst/>
+          </a:prstGeom>
+        </p:spPr>
+        <p:style>
+          <a:lnRef idx="1">
+            <a:schemeClr val="accent1"/>
+          </a:lnRef>
+          <a:fillRef idx="2">
+            <a:schemeClr val="accent1"/>
+          </a:fillRef>
+          <a:effectRef idx="1">
+            <a:schemeClr val="accent1"/>
+          </a:effectRef>
+          <a:fontRef idx="minor">
+            <a:schemeClr val="dk1"/>
+          </a:fontRef>
+        </p:style>
+        <p:txBody>
+          <a:bodyPr rtlCol="0" anchor="ctr"/>
+          <a:lstStyle/>
+          <a:p>
+            <a:pPr algn="ctr"/>
+            <a:r>
+              <a:rPr lang="zh-CN" altLang="en-US" sz="1100" dirty="0" smtClean="0">
+                <a:latin typeface="Times New Roman" panose="02020603050405020304" pitchFamily="18" charset="0"/>
+                <a:cs typeface="Times New Roman" panose="02020603050405020304" pitchFamily="18" charset="0"/>
+              </a:rPr>
+              <a:t>正常</a:t>
+            </a:r>
+            <a:r>
+              <a:rPr lang="en-US" altLang="zh-CN" sz="1100" dirty="0">
+                <a:latin typeface="Times New Roman" panose="02020603050405020304" pitchFamily="18" charset="0"/>
+                <a:cs typeface="Times New Roman" panose="02020603050405020304" pitchFamily="18" charset="0"/>
+              </a:rPr>
+              <a:t>space</a:t>
+            </a:r>
+            <a:r>
+              <a:rPr lang="zh-CN" altLang="en-US" sz="1100" dirty="0" smtClean="0">
+                <a:latin typeface="Times New Roman" panose="02020603050405020304" pitchFamily="18" charset="0"/>
+                <a:cs typeface="Times New Roman" panose="02020603050405020304" pitchFamily="18" charset="0"/>
+              </a:rPr>
+              <a:t>按下</a:t>
+            </a:r>
+            <a:endParaRPr lang="zh-CN" altLang="en-US" sz="1100" dirty="0">
+              <a:latin typeface="Times New Roman" panose="02020603050405020304" pitchFamily="18" charset="0"/>
+              <a:cs typeface="Times New Roman" panose="02020603050405020304" pitchFamily="18" charset="0"/>
+            </a:endParaRPr>
+          </a:p>
+        </p:txBody>
+      </p:sp>
+      <p:sp>
+        <p:nvSpPr>
+          <p:cNvPr id="6" name="矩形 5"/>
+          <p:cNvSpPr/>
+          <p:nvPr/>
+        </p:nvSpPr>
+        <p:spPr>
+          <a:xfrm>
+            <a:off x="3270622" y="1064356"/>
+            <a:ext cx="1321724" cy="423949"/>
+          </a:xfrm>
+          <a:prstGeom prst="rect">
+            <a:avLst/>
+          </a:prstGeom>
+        </p:spPr>
+        <p:style>
+          <a:lnRef idx="1">
+            <a:schemeClr val="accent1"/>
+          </a:lnRef>
+          <a:fillRef idx="2">
+            <a:schemeClr val="accent1"/>
+          </a:fillRef>
+          <a:effectRef idx="1">
+            <a:schemeClr val="accent1"/>
+          </a:effectRef>
+          <a:fontRef idx="minor">
+            <a:schemeClr val="dk1"/>
+          </a:fontRef>
+        </p:style>
+        <p:txBody>
+          <a:bodyPr rtlCol="0" anchor="ctr"/>
+          <a:lstStyle/>
+          <a:p>
+            <a:pPr algn="ctr"/>
+            <a:r>
+              <a:rPr lang="zh-CN" altLang="en-US" sz="1100" dirty="0" smtClean="0">
+                <a:latin typeface="Times New Roman" panose="02020603050405020304" pitchFamily="18" charset="0"/>
+                <a:cs typeface="Times New Roman" panose="02020603050405020304" pitchFamily="18" charset="0"/>
+              </a:rPr>
+              <a:t>暂停</a:t>
+            </a:r>
+            <a:r>
+              <a:rPr lang="en-US" altLang="zh-CN" sz="1100" dirty="0" smtClean="0">
+                <a:latin typeface="Times New Roman" panose="02020603050405020304" pitchFamily="18" charset="0"/>
+                <a:cs typeface="Times New Roman" panose="02020603050405020304" pitchFamily="18" charset="0"/>
+              </a:rPr>
+              <a:t>space</a:t>
+            </a:r>
+            <a:r>
+              <a:rPr lang="zh-CN" altLang="en-US" sz="1100" dirty="0" smtClean="0">
+                <a:latin typeface="Times New Roman" panose="02020603050405020304" pitchFamily="18" charset="0"/>
+                <a:cs typeface="Times New Roman" panose="02020603050405020304" pitchFamily="18" charset="0"/>
+              </a:rPr>
+              <a:t>按下</a:t>
+            </a:r>
+            <a:endParaRPr lang="zh-CN" altLang="en-US" sz="1100" dirty="0">
+              <a:latin typeface="Times New Roman" panose="02020603050405020304" pitchFamily="18" charset="0"/>
+              <a:cs typeface="Times New Roman" panose="02020603050405020304" pitchFamily="18" charset="0"/>
+            </a:endParaRPr>
+          </a:p>
+        </p:txBody>
+      </p:sp>
+      <p:sp>
+        <p:nvSpPr>
+          <p:cNvPr id="7" name="矩形 6"/>
+          <p:cNvSpPr/>
+          <p:nvPr/>
+        </p:nvSpPr>
+        <p:spPr>
+          <a:xfrm>
+            <a:off x="3270622" y="3297994"/>
+            <a:ext cx="1321724" cy="423949"/>
+          </a:xfrm>
+          <a:prstGeom prst="rect">
+            <a:avLst/>
+          </a:prstGeom>
+        </p:spPr>
+        <p:style>
+          <a:lnRef idx="1">
+            <a:schemeClr val="accent1"/>
+          </a:lnRef>
+          <a:fillRef idx="2">
+            <a:schemeClr val="accent1"/>
+          </a:fillRef>
+          <a:effectRef idx="1">
+            <a:schemeClr val="accent1"/>
+          </a:effectRef>
+          <a:fontRef idx="minor">
+            <a:schemeClr val="dk1"/>
+          </a:fontRef>
+        </p:style>
+        <p:txBody>
+          <a:bodyPr rtlCol="0" anchor="ctr"/>
+          <a:lstStyle/>
+          <a:p>
+            <a:pPr algn="ctr"/>
+            <a:r>
+              <a:rPr lang="zh-CN" altLang="en-US" sz="1100" dirty="0" smtClean="0">
+                <a:latin typeface="Times New Roman" panose="02020603050405020304" pitchFamily="18" charset="0"/>
+                <a:cs typeface="Times New Roman" panose="02020603050405020304" pitchFamily="18" charset="0"/>
+              </a:rPr>
+              <a:t>暂停</a:t>
+            </a:r>
+            <a:r>
+              <a:rPr lang="en-US" altLang="zh-CN" sz="1100" dirty="0" smtClean="0">
+                <a:latin typeface="Times New Roman" panose="02020603050405020304" pitchFamily="18" charset="0"/>
+                <a:cs typeface="Times New Roman" panose="02020603050405020304" pitchFamily="18" charset="0"/>
+              </a:rPr>
+              <a:t>space</a:t>
+            </a:r>
+            <a:r>
+              <a:rPr lang="zh-CN" altLang="en-US" sz="1100" dirty="0" smtClean="0">
+                <a:latin typeface="Times New Roman" panose="02020603050405020304" pitchFamily="18" charset="0"/>
+                <a:cs typeface="Times New Roman" panose="02020603050405020304" pitchFamily="18" charset="0"/>
+              </a:rPr>
+              <a:t>未</a:t>
+            </a:r>
+            <a:r>
+              <a:rPr lang="zh-CN" altLang="en-US" sz="1100" dirty="0" smtClean="0">
+                <a:latin typeface="Times New Roman" panose="02020603050405020304" pitchFamily="18" charset="0"/>
+                <a:cs typeface="Times New Roman" panose="02020603050405020304" pitchFamily="18" charset="0"/>
+              </a:rPr>
+              <a:t>按下</a:t>
+            </a:r>
+            <a:endParaRPr lang="zh-CN" altLang="en-US" sz="1100" dirty="0">
+              <a:latin typeface="Times New Roman" panose="02020603050405020304" pitchFamily="18" charset="0"/>
+              <a:cs typeface="Times New Roman" panose="02020603050405020304" pitchFamily="18" charset="0"/>
+            </a:endParaRPr>
+          </a:p>
+        </p:txBody>
+      </p:sp>
+      <p:sp>
+        <p:nvSpPr>
+          <p:cNvPr id="8" name="矩形 7"/>
+          <p:cNvSpPr/>
+          <p:nvPr/>
+        </p:nvSpPr>
+        <p:spPr>
+          <a:xfrm>
+            <a:off x="6884321" y="1064356"/>
+            <a:ext cx="1321724" cy="423949"/>
+          </a:xfrm>
+          <a:prstGeom prst="rect">
+            <a:avLst/>
+          </a:prstGeom>
+        </p:spPr>
+        <p:style>
+          <a:lnRef idx="1">
+            <a:schemeClr val="accent1"/>
+          </a:lnRef>
+          <a:fillRef idx="2">
+            <a:schemeClr val="accent1"/>
+          </a:fillRef>
+          <a:effectRef idx="1">
+            <a:schemeClr val="accent1"/>
+          </a:effectRef>
+          <a:fontRef idx="minor">
+            <a:schemeClr val="dk1"/>
+          </a:fontRef>
+        </p:style>
+        <p:txBody>
+          <a:bodyPr rtlCol="0" anchor="ctr"/>
+          <a:lstStyle/>
+          <a:p>
+            <a:pPr algn="ctr"/>
+            <a:r>
+              <a:rPr lang="zh-CN" altLang="en-US" sz="1100" dirty="0" smtClean="0">
+                <a:latin typeface="Times New Roman" panose="02020603050405020304" pitchFamily="18" charset="0"/>
+                <a:cs typeface="Times New Roman" panose="02020603050405020304" pitchFamily="18" charset="0"/>
+              </a:rPr>
+              <a:t>快进</a:t>
+            </a:r>
+            <a:r>
+              <a:rPr lang="en-US" altLang="zh-CN" sz="1100" dirty="0" smtClean="0">
+                <a:latin typeface="Times New Roman" panose="02020603050405020304" pitchFamily="18" charset="0"/>
+                <a:cs typeface="Times New Roman" panose="02020603050405020304" pitchFamily="18" charset="0"/>
+              </a:rPr>
+              <a:t>space</a:t>
+            </a:r>
+            <a:r>
+              <a:rPr lang="zh-CN" altLang="en-US" sz="1100" dirty="0" smtClean="0">
+                <a:latin typeface="Times New Roman" panose="02020603050405020304" pitchFamily="18" charset="0"/>
+                <a:cs typeface="Times New Roman" panose="02020603050405020304" pitchFamily="18" charset="0"/>
+              </a:rPr>
+              <a:t>按下</a:t>
+            </a:r>
+            <a:endParaRPr lang="zh-CN" altLang="en-US" sz="1100" dirty="0">
+              <a:latin typeface="Times New Roman" panose="02020603050405020304" pitchFamily="18" charset="0"/>
+              <a:cs typeface="Times New Roman" panose="02020603050405020304" pitchFamily="18" charset="0"/>
+            </a:endParaRPr>
+          </a:p>
+        </p:txBody>
+      </p:sp>
+      <p:sp>
+        <p:nvSpPr>
+          <p:cNvPr id="29" name="文本框 28"/>
+          <p:cNvSpPr txBox="1"/>
+          <p:nvPr/>
+        </p:nvSpPr>
+        <p:spPr>
+          <a:xfrm>
+            <a:off x="6202462" y="3542674"/>
+            <a:ext cx="415287" cy="276999"/>
+          </a:xfrm>
+          <a:prstGeom prst="rect">
+            <a:avLst/>
+          </a:prstGeom>
+          <a:noFill/>
+        </p:spPr>
+        <p:txBody>
+          <a:bodyPr wrap="square" rtlCol="0">
+            <a:spAutoFit/>
+          </a:bodyPr>
+          <a:lstStyle/>
+          <a:p>
+            <a:pPr algn="ctr"/>
+            <a:r>
+              <a:rPr lang="zh-CN" altLang="en-US" sz="1200" dirty="0" smtClean="0">
+                <a:solidFill>
+                  <a:schemeClr val="accent1">
+                    <a:lumMod val="75000"/>
+                  </a:schemeClr>
+                </a:solidFill>
+                <a:latin typeface="Times New Roman" panose="02020603050405020304" pitchFamily="18" charset="0"/>
+                <a:cs typeface="Times New Roman" panose="02020603050405020304" pitchFamily="18" charset="0"/>
+              </a:rPr>
+              <a:t>下</a:t>
+            </a:r>
+            <a:endParaRPr lang="zh-CN" altLang="en-US" sz="1200" dirty="0">
+              <a:solidFill>
+                <a:schemeClr val="accent1">
+                  <a:lumMod val="75000"/>
+                </a:schemeClr>
+              </a:solidFill>
+              <a:latin typeface="Times New Roman" panose="02020603050405020304" pitchFamily="18" charset="0"/>
+              <a:cs typeface="Times New Roman" panose="02020603050405020304" pitchFamily="18" charset="0"/>
+            </a:endParaRPr>
+          </a:p>
+        </p:txBody>
+      </p:sp>
+      <p:cxnSp>
+        <p:nvCxnSpPr>
+          <p:cNvPr id="31" name="曲线连接符 30"/>
+          <p:cNvCxnSpPr>
+            <a:stCxn id="5" idx="0"/>
+            <a:endCxn id="8" idx="1"/>
+          </p:cNvCxnSpPr>
+          <p:nvPr/>
+        </p:nvCxnSpPr>
+        <p:spPr>
+          <a:xfrm rot="5400000" flipH="1" flipV="1">
+            <a:off x="5820873" y="1162751"/>
+            <a:ext cx="949867" cy="1177029"/>
+          </a:xfrm>
+          <a:prstGeom prst="curvedConnector2">
+            <a:avLst/>
+          </a:prstGeom>
+          <a:ln>
+            <a:tailEnd type="triangle"/>
+          </a:ln>
+        </p:spPr>
+        <p:style>
+          <a:lnRef idx="1">
+            <a:schemeClr val="accent1"/>
+          </a:lnRef>
+          <a:fillRef idx="0">
+            <a:schemeClr val="accent1"/>
+          </a:fillRef>
+          <a:effectRef idx="0">
+            <a:schemeClr val="accent1"/>
+          </a:effectRef>
+          <a:fontRef idx="minor">
+            <a:schemeClr val="tx1"/>
+          </a:fontRef>
+        </p:style>
+      </p:cxnSp>
+      <p:sp>
+        <p:nvSpPr>
+          <p:cNvPr id="33" name="文本框 32"/>
+          <p:cNvSpPr txBox="1"/>
+          <p:nvPr/>
+        </p:nvSpPr>
+        <p:spPr>
+          <a:xfrm>
+            <a:off x="6161594" y="1468039"/>
+            <a:ext cx="415287" cy="276999"/>
+          </a:xfrm>
+          <a:prstGeom prst="rect">
+            <a:avLst/>
+          </a:prstGeom>
+          <a:noFill/>
+        </p:spPr>
+        <p:txBody>
+          <a:bodyPr wrap="square" rtlCol="0">
+            <a:spAutoFit/>
+          </a:bodyPr>
+          <a:lstStyle/>
+          <a:p>
+            <a:pPr algn="ctr"/>
+            <a:r>
+              <a:rPr lang="zh-CN" altLang="en-US" sz="1200" dirty="0" smtClean="0">
+                <a:solidFill>
+                  <a:schemeClr val="accent1">
+                    <a:lumMod val="75000"/>
+                  </a:schemeClr>
+                </a:solidFill>
+                <a:latin typeface="Times New Roman" panose="02020603050405020304" pitchFamily="18" charset="0"/>
+                <a:cs typeface="Times New Roman" panose="02020603050405020304" pitchFamily="18" charset="0"/>
+              </a:rPr>
+              <a:t>下</a:t>
+            </a:r>
+            <a:endParaRPr lang="zh-CN" altLang="en-US" sz="1200" dirty="0">
+              <a:solidFill>
+                <a:schemeClr val="accent1">
+                  <a:lumMod val="75000"/>
+                </a:schemeClr>
+              </a:solidFill>
+              <a:latin typeface="Times New Roman" panose="02020603050405020304" pitchFamily="18" charset="0"/>
+              <a:cs typeface="Times New Roman" panose="02020603050405020304" pitchFamily="18" charset="0"/>
+            </a:endParaRPr>
+          </a:p>
+        </p:txBody>
+      </p:sp>
+      <p:cxnSp>
+        <p:nvCxnSpPr>
+          <p:cNvPr id="35" name="曲线连接符 34"/>
+          <p:cNvCxnSpPr>
+            <a:stCxn id="8" idx="0"/>
+            <a:endCxn id="8" idx="3"/>
+          </p:cNvCxnSpPr>
+          <p:nvPr/>
+        </p:nvCxnSpPr>
+        <p:spPr>
+          <a:xfrm rot="16200000" flipH="1">
+            <a:off x="7769626" y="839912"/>
+            <a:ext cx="211975" cy="660862"/>
+          </a:xfrm>
+          <a:prstGeom prst="curvedConnector4">
+            <a:avLst>
+              <a:gd name="adj1" fmla="val -262420"/>
+              <a:gd name="adj2" fmla="val 151887"/>
+            </a:avLst>
+          </a:prstGeom>
+          <a:ln>
+            <a:tailEnd type="triangle"/>
+          </a:ln>
+        </p:spPr>
+        <p:style>
+          <a:lnRef idx="1">
+            <a:schemeClr val="accent1"/>
+          </a:lnRef>
+          <a:fillRef idx="0">
+            <a:schemeClr val="accent1"/>
+          </a:fillRef>
+          <a:effectRef idx="0">
+            <a:schemeClr val="accent1"/>
+          </a:effectRef>
+          <a:fontRef idx="minor">
+            <a:schemeClr val="tx1"/>
+          </a:fontRef>
+        </p:style>
+      </p:cxnSp>
+      <p:sp>
+        <p:nvSpPr>
+          <p:cNvPr id="36" name="文本框 35"/>
+          <p:cNvSpPr txBox="1"/>
+          <p:nvPr/>
+        </p:nvSpPr>
+        <p:spPr>
+          <a:xfrm>
+            <a:off x="8206045" y="293395"/>
+            <a:ext cx="415287" cy="276999"/>
+          </a:xfrm>
+          <a:prstGeom prst="rect">
+            <a:avLst/>
+          </a:prstGeom>
+          <a:noFill/>
+        </p:spPr>
+        <p:txBody>
+          <a:bodyPr wrap="square" rtlCol="0">
+            <a:spAutoFit/>
+          </a:bodyPr>
+          <a:lstStyle/>
+          <a:p>
+            <a:pPr algn="ctr"/>
+            <a:r>
+              <a:rPr lang="zh-CN" altLang="en-US" sz="1200" dirty="0" smtClean="0">
+                <a:solidFill>
+                  <a:schemeClr val="accent1">
+                    <a:lumMod val="75000"/>
+                  </a:schemeClr>
+                </a:solidFill>
+                <a:latin typeface="Times New Roman" panose="02020603050405020304" pitchFamily="18" charset="0"/>
+                <a:cs typeface="Times New Roman" panose="02020603050405020304" pitchFamily="18" charset="0"/>
+              </a:rPr>
+              <a:t>下</a:t>
+            </a:r>
+            <a:endParaRPr lang="zh-CN" altLang="en-US" sz="1200" dirty="0">
+              <a:solidFill>
+                <a:schemeClr val="accent1">
+                  <a:lumMod val="75000"/>
+                </a:schemeClr>
+              </a:solidFill>
+              <a:latin typeface="Times New Roman" panose="02020603050405020304" pitchFamily="18" charset="0"/>
+              <a:cs typeface="Times New Roman" panose="02020603050405020304" pitchFamily="18" charset="0"/>
+            </a:endParaRPr>
+          </a:p>
+        </p:txBody>
+      </p:sp>
+      <p:sp>
+        <p:nvSpPr>
+          <p:cNvPr id="39" name="文本框 38"/>
+          <p:cNvSpPr txBox="1"/>
+          <p:nvPr/>
+        </p:nvSpPr>
+        <p:spPr>
+          <a:xfrm>
+            <a:off x="8956789" y="2226199"/>
+            <a:ext cx="415287" cy="276999"/>
+          </a:xfrm>
+          <a:prstGeom prst="rect">
+            <a:avLst/>
+          </a:prstGeom>
+          <a:noFill/>
+        </p:spPr>
+        <p:txBody>
+          <a:bodyPr wrap="square" rtlCol="0">
+            <a:spAutoFit/>
+          </a:bodyPr>
+          <a:lstStyle/>
+          <a:p>
+            <a:pPr algn="ctr"/>
+            <a:r>
+              <a:rPr lang="zh-CN" altLang="en-US" sz="1200" dirty="0" smtClean="0">
+                <a:solidFill>
+                  <a:schemeClr val="accent1">
+                    <a:lumMod val="75000"/>
+                  </a:schemeClr>
+                </a:solidFill>
+                <a:latin typeface="Times New Roman" panose="02020603050405020304" pitchFamily="18" charset="0"/>
+                <a:cs typeface="Times New Roman" panose="02020603050405020304" pitchFamily="18" charset="0"/>
+              </a:rPr>
+              <a:t>上</a:t>
+            </a:r>
+            <a:endParaRPr lang="zh-CN" altLang="en-US" sz="1200" dirty="0">
+              <a:solidFill>
+                <a:schemeClr val="accent1">
+                  <a:lumMod val="75000"/>
+                </a:schemeClr>
+              </a:solidFill>
+              <a:latin typeface="Times New Roman" panose="02020603050405020304" pitchFamily="18" charset="0"/>
+              <a:cs typeface="Times New Roman" panose="02020603050405020304" pitchFamily="18" charset="0"/>
+            </a:endParaRPr>
+          </a:p>
+        </p:txBody>
+      </p:sp>
+      <p:cxnSp>
+        <p:nvCxnSpPr>
+          <p:cNvPr id="43" name="曲线连接符 42"/>
+          <p:cNvCxnSpPr>
+            <a:stCxn id="5" idx="0"/>
+            <a:endCxn id="6" idx="3"/>
+          </p:cNvCxnSpPr>
+          <p:nvPr/>
+        </p:nvCxnSpPr>
+        <p:spPr>
+          <a:xfrm rot="16200000" flipV="1">
+            <a:off x="4674886" y="1193792"/>
+            <a:ext cx="949867" cy="1114946"/>
+          </a:xfrm>
+          <a:prstGeom prst="curvedConnector2">
+            <a:avLst/>
+          </a:prstGeom>
+          <a:ln>
+            <a:headEnd type="triangle" w="med" len="med"/>
+            <a:tailEnd type="none" w="med" len="med"/>
+          </a:ln>
+        </p:spPr>
+        <p:style>
+          <a:lnRef idx="1">
+            <a:schemeClr val="accent1"/>
+          </a:lnRef>
+          <a:fillRef idx="0">
+            <a:schemeClr val="accent1"/>
+          </a:fillRef>
+          <a:effectRef idx="0">
+            <a:schemeClr val="accent1"/>
+          </a:effectRef>
+          <a:fontRef idx="minor">
+            <a:schemeClr val="tx1"/>
+          </a:fontRef>
+        </p:style>
+      </p:cxnSp>
+      <p:sp>
+        <p:nvSpPr>
+          <p:cNvPr id="44" name="文本框 43"/>
+          <p:cNvSpPr txBox="1"/>
+          <p:nvPr/>
+        </p:nvSpPr>
+        <p:spPr>
+          <a:xfrm>
+            <a:off x="5057427" y="1489554"/>
+            <a:ext cx="415287" cy="276999"/>
+          </a:xfrm>
+          <a:prstGeom prst="rect">
+            <a:avLst/>
+          </a:prstGeom>
+          <a:noFill/>
+        </p:spPr>
+        <p:txBody>
+          <a:bodyPr wrap="square" rtlCol="0">
+            <a:spAutoFit/>
+          </a:bodyPr>
+          <a:lstStyle/>
+          <a:p>
+            <a:pPr algn="ctr"/>
+            <a:r>
+              <a:rPr lang="zh-CN" altLang="en-US" sz="1200" dirty="0" smtClean="0">
+                <a:solidFill>
+                  <a:schemeClr val="accent1">
+                    <a:lumMod val="75000"/>
+                  </a:schemeClr>
+                </a:solidFill>
+                <a:latin typeface="Times New Roman" panose="02020603050405020304" pitchFamily="18" charset="0"/>
+                <a:cs typeface="Times New Roman" panose="02020603050405020304" pitchFamily="18" charset="0"/>
+              </a:rPr>
+              <a:t>上</a:t>
+            </a:r>
+            <a:endParaRPr lang="zh-CN" altLang="en-US" sz="1200" dirty="0">
+              <a:solidFill>
+                <a:schemeClr val="accent1">
+                  <a:lumMod val="75000"/>
+                </a:schemeClr>
+              </a:solidFill>
+              <a:latin typeface="Times New Roman" panose="02020603050405020304" pitchFamily="18" charset="0"/>
+              <a:cs typeface="Times New Roman" panose="02020603050405020304" pitchFamily="18" charset="0"/>
+            </a:endParaRPr>
+          </a:p>
+        </p:txBody>
+      </p:sp>
+      <p:cxnSp>
+        <p:nvCxnSpPr>
+          <p:cNvPr id="46" name="曲线连接符 45"/>
+          <p:cNvCxnSpPr>
+            <a:stCxn id="6" idx="1"/>
+            <a:endCxn id="7" idx="1"/>
+          </p:cNvCxnSpPr>
+          <p:nvPr/>
+        </p:nvCxnSpPr>
+        <p:spPr>
+          <a:xfrm rot="10800000" flipV="1">
+            <a:off x="3270622" y="1276331"/>
+            <a:ext cx="12700" cy="2233638"/>
+          </a:xfrm>
+          <a:prstGeom prst="curvedConnector3">
+            <a:avLst>
+              <a:gd name="adj1" fmla="val 7560000"/>
+            </a:avLst>
+          </a:prstGeom>
+          <a:ln>
+            <a:headEnd type="triangle" w="med" len="med"/>
+            <a:tailEnd type="none" w="med" len="med"/>
+          </a:ln>
+        </p:spPr>
+        <p:style>
+          <a:lnRef idx="1">
+            <a:schemeClr val="accent1"/>
+          </a:lnRef>
+          <a:fillRef idx="0">
+            <a:schemeClr val="accent1"/>
+          </a:fillRef>
+          <a:effectRef idx="0">
+            <a:schemeClr val="accent1"/>
+          </a:effectRef>
+          <a:fontRef idx="minor">
+            <a:schemeClr val="tx1"/>
+          </a:fontRef>
+        </p:style>
+      </p:cxnSp>
+      <p:sp>
+        <p:nvSpPr>
+          <p:cNvPr id="47" name="文本框 46"/>
+          <p:cNvSpPr txBox="1"/>
+          <p:nvPr/>
+        </p:nvSpPr>
+        <p:spPr>
+          <a:xfrm>
+            <a:off x="1965432" y="2226198"/>
+            <a:ext cx="415287" cy="276999"/>
+          </a:xfrm>
+          <a:prstGeom prst="rect">
+            <a:avLst/>
+          </a:prstGeom>
+          <a:noFill/>
+        </p:spPr>
+        <p:txBody>
+          <a:bodyPr wrap="square" rtlCol="0">
+            <a:spAutoFit/>
+          </a:bodyPr>
+          <a:lstStyle/>
+          <a:p>
+            <a:pPr algn="ctr"/>
+            <a:r>
+              <a:rPr lang="zh-CN" altLang="en-US" sz="1200" dirty="0" smtClean="0">
+                <a:solidFill>
+                  <a:schemeClr val="accent1">
+                    <a:lumMod val="75000"/>
+                  </a:schemeClr>
+                </a:solidFill>
+                <a:latin typeface="Times New Roman" panose="02020603050405020304" pitchFamily="18" charset="0"/>
+                <a:cs typeface="Times New Roman" panose="02020603050405020304" pitchFamily="18" charset="0"/>
+              </a:rPr>
+              <a:t>下</a:t>
+            </a:r>
+            <a:endParaRPr lang="zh-CN" altLang="en-US" sz="1200" dirty="0">
+              <a:solidFill>
+                <a:schemeClr val="accent1">
+                  <a:lumMod val="75000"/>
+                </a:schemeClr>
+              </a:solidFill>
+              <a:latin typeface="Times New Roman" panose="02020603050405020304" pitchFamily="18" charset="0"/>
+              <a:cs typeface="Times New Roman" panose="02020603050405020304" pitchFamily="18" charset="0"/>
+            </a:endParaRPr>
+          </a:p>
+        </p:txBody>
+      </p:sp>
+      <p:cxnSp>
+        <p:nvCxnSpPr>
+          <p:cNvPr id="49" name="曲线连接符 48"/>
+          <p:cNvCxnSpPr>
+            <a:stCxn id="7" idx="3"/>
+            <a:endCxn id="5" idx="2"/>
+          </p:cNvCxnSpPr>
+          <p:nvPr/>
+        </p:nvCxnSpPr>
+        <p:spPr>
+          <a:xfrm flipV="1">
+            <a:off x="4592346" y="2650147"/>
+            <a:ext cx="1114946" cy="859822"/>
+          </a:xfrm>
+          <a:prstGeom prst="curvedConnector2">
+            <a:avLst/>
+          </a:prstGeom>
+          <a:ln>
+            <a:headEnd type="triangle" w="med" len="med"/>
+            <a:tailEnd type="none" w="med" len="med"/>
+          </a:ln>
+        </p:spPr>
+        <p:style>
+          <a:lnRef idx="1">
+            <a:schemeClr val="accent1"/>
+          </a:lnRef>
+          <a:fillRef idx="0">
+            <a:schemeClr val="accent1"/>
+          </a:fillRef>
+          <a:effectRef idx="0">
+            <a:schemeClr val="accent1"/>
+          </a:effectRef>
+          <a:fontRef idx="minor">
+            <a:schemeClr val="tx1"/>
+          </a:fontRef>
+        </p:style>
+      </p:cxnSp>
+      <p:sp>
+        <p:nvSpPr>
+          <p:cNvPr id="50" name="文本框 49"/>
+          <p:cNvSpPr txBox="1"/>
+          <p:nvPr/>
+        </p:nvSpPr>
+        <p:spPr>
+          <a:xfrm>
+            <a:off x="5126313" y="3509969"/>
+            <a:ext cx="415287" cy="276999"/>
+          </a:xfrm>
+          <a:prstGeom prst="rect">
+            <a:avLst/>
+          </a:prstGeom>
+          <a:noFill/>
+        </p:spPr>
+        <p:txBody>
+          <a:bodyPr wrap="square" rtlCol="0">
+            <a:spAutoFit/>
+          </a:bodyPr>
+          <a:lstStyle/>
+          <a:p>
+            <a:pPr algn="ctr"/>
+            <a:r>
+              <a:rPr lang="zh-CN" altLang="en-US" sz="1200" dirty="0" smtClean="0">
+                <a:solidFill>
+                  <a:schemeClr val="accent1">
+                    <a:lumMod val="75000"/>
+                  </a:schemeClr>
+                </a:solidFill>
+                <a:latin typeface="Times New Roman" panose="02020603050405020304" pitchFamily="18" charset="0"/>
+                <a:cs typeface="Times New Roman" panose="02020603050405020304" pitchFamily="18" charset="0"/>
+              </a:rPr>
+              <a:t>上</a:t>
+            </a:r>
+            <a:endParaRPr lang="zh-CN" altLang="en-US" sz="1200" dirty="0">
+              <a:solidFill>
+                <a:schemeClr val="accent1">
+                  <a:lumMod val="75000"/>
+                </a:schemeClr>
+              </a:solidFill>
+              <a:latin typeface="Times New Roman" panose="02020603050405020304" pitchFamily="18" charset="0"/>
+              <a:cs typeface="Times New Roman" panose="02020603050405020304" pitchFamily="18" charset="0"/>
+            </a:endParaRPr>
+          </a:p>
+        </p:txBody>
+      </p:sp>
+      <p:cxnSp>
+        <p:nvCxnSpPr>
+          <p:cNvPr id="57" name="曲线连接符 56"/>
+          <p:cNvCxnSpPr>
+            <a:stCxn id="6" idx="0"/>
+            <a:endCxn id="8" idx="0"/>
+          </p:cNvCxnSpPr>
+          <p:nvPr/>
+        </p:nvCxnSpPr>
+        <p:spPr>
+          <a:xfrm rot="5400000" flipH="1" flipV="1">
+            <a:off x="5738333" y="-742493"/>
+            <a:ext cx="12700" cy="3613699"/>
+          </a:xfrm>
+          <a:prstGeom prst="curvedConnector3">
+            <a:avLst>
+              <a:gd name="adj1" fmla="val 1800000"/>
+            </a:avLst>
+          </a:prstGeom>
+          <a:ln>
+            <a:tailEnd type="triangle"/>
+          </a:ln>
+        </p:spPr>
+        <p:style>
+          <a:lnRef idx="1">
+            <a:schemeClr val="accent1"/>
+          </a:lnRef>
+          <a:fillRef idx="0">
+            <a:schemeClr val="accent1"/>
+          </a:fillRef>
+          <a:effectRef idx="0">
+            <a:schemeClr val="accent1"/>
+          </a:effectRef>
+          <a:fontRef idx="minor">
+            <a:schemeClr val="tx1"/>
+          </a:fontRef>
+        </p:style>
+      </p:cxnSp>
+      <p:sp>
+        <p:nvSpPr>
+          <p:cNvPr id="59" name="文本框 58"/>
+          <p:cNvSpPr txBox="1"/>
+          <p:nvPr/>
+        </p:nvSpPr>
+        <p:spPr>
+          <a:xfrm>
+            <a:off x="5510646" y="310952"/>
+            <a:ext cx="415287" cy="276999"/>
+          </a:xfrm>
+          <a:prstGeom prst="rect">
+            <a:avLst/>
+          </a:prstGeom>
+          <a:noFill/>
+        </p:spPr>
+        <p:txBody>
+          <a:bodyPr wrap="square" rtlCol="0">
+            <a:spAutoFit/>
+          </a:bodyPr>
+          <a:lstStyle/>
+          <a:p>
+            <a:pPr algn="ctr"/>
+            <a:r>
+              <a:rPr lang="zh-CN" altLang="en-US" sz="1200" dirty="0" smtClean="0">
+                <a:solidFill>
+                  <a:schemeClr val="accent1">
+                    <a:lumMod val="75000"/>
+                  </a:schemeClr>
+                </a:solidFill>
+                <a:latin typeface="Times New Roman" panose="02020603050405020304" pitchFamily="18" charset="0"/>
+                <a:cs typeface="Times New Roman" panose="02020603050405020304" pitchFamily="18" charset="0"/>
+              </a:rPr>
+              <a:t>下</a:t>
+            </a:r>
+            <a:endParaRPr lang="zh-CN" altLang="en-US" sz="1200" dirty="0">
+              <a:solidFill>
+                <a:schemeClr val="accent1">
+                  <a:lumMod val="75000"/>
+                </a:schemeClr>
+              </a:solidFill>
+              <a:latin typeface="Times New Roman" panose="02020603050405020304" pitchFamily="18" charset="0"/>
+              <a:cs typeface="Times New Roman" panose="02020603050405020304" pitchFamily="18" charset="0"/>
+            </a:endParaRPr>
+          </a:p>
+        </p:txBody>
+      </p:sp>
+      <p:cxnSp>
+        <p:nvCxnSpPr>
+          <p:cNvPr id="68" name="曲线连接符 67"/>
+          <p:cNvCxnSpPr>
+            <a:stCxn id="8" idx="3"/>
+            <a:endCxn id="4" idx="3"/>
+          </p:cNvCxnSpPr>
+          <p:nvPr/>
+        </p:nvCxnSpPr>
+        <p:spPr>
+          <a:xfrm>
+            <a:off x="8206045" y="1276331"/>
+            <a:ext cx="12700" cy="2233637"/>
+          </a:xfrm>
+          <a:prstGeom prst="curvedConnector3">
+            <a:avLst>
+              <a:gd name="adj1" fmla="val 6720000"/>
+            </a:avLst>
+          </a:prstGeom>
+          <a:ln>
+            <a:tailEnd type="triangle"/>
+          </a:ln>
+        </p:spPr>
+        <p:style>
+          <a:lnRef idx="1">
+            <a:schemeClr val="accent1"/>
+          </a:lnRef>
+          <a:fillRef idx="0">
+            <a:schemeClr val="accent1"/>
+          </a:fillRef>
+          <a:effectRef idx="0">
+            <a:schemeClr val="accent1"/>
+          </a:effectRef>
+          <a:fontRef idx="minor">
+            <a:schemeClr val="tx1"/>
+          </a:fontRef>
+        </p:style>
+      </p:cxnSp>
+      <p:cxnSp>
+        <p:nvCxnSpPr>
+          <p:cNvPr id="76" name="曲线连接符 75"/>
+          <p:cNvCxnSpPr>
+            <a:stCxn id="4" idx="1"/>
+            <a:endCxn id="5" idx="2"/>
+          </p:cNvCxnSpPr>
+          <p:nvPr/>
+        </p:nvCxnSpPr>
+        <p:spPr>
+          <a:xfrm rot="10800000">
+            <a:off x="5707293" y="2650148"/>
+            <a:ext cx="1177029" cy="859821"/>
+          </a:xfrm>
+          <a:prstGeom prst="curvedConnector2">
+            <a:avLst/>
+          </a:prstGeom>
+          <a:ln>
+            <a:tailEnd type="triangle"/>
+          </a:ln>
+        </p:spPr>
+        <p:style>
+          <a:lnRef idx="1">
+            <a:schemeClr val="accent1"/>
+          </a:lnRef>
+          <a:fillRef idx="0">
+            <a:schemeClr val="accent1"/>
+          </a:fillRef>
+          <a:effectRef idx="0">
+            <a:schemeClr val="accent1"/>
+          </a:effectRef>
+          <a:fontRef idx="minor">
+            <a:schemeClr val="tx1"/>
+          </a:fontRef>
+        </p:style>
+      </p:cxnSp>
+      <p:sp>
+        <p:nvSpPr>
+          <p:cNvPr id="81" name="文本框 80"/>
+          <p:cNvSpPr txBox="1"/>
+          <p:nvPr/>
+        </p:nvSpPr>
+        <p:spPr>
+          <a:xfrm>
+            <a:off x="213360" y="3939540"/>
+            <a:ext cx="2141220" cy="1200329"/>
+          </a:xfrm>
+          <a:prstGeom prst="rect">
+            <a:avLst/>
+          </a:prstGeom>
+          <a:noFill/>
+        </p:spPr>
+        <p:txBody>
+          <a:bodyPr wrap="square" rtlCol="0">
+            <a:spAutoFit/>
+          </a:bodyPr>
+          <a:lstStyle/>
+          <a:p>
+            <a:r>
+              <a:rPr lang="zh-CN" altLang="en-US" dirty="0" smtClean="0"/>
+              <a:t>暂停状态什么都不做</a:t>
+            </a:r>
+            <a:endParaRPr lang="en-US" altLang="zh-CN" dirty="0" smtClean="0"/>
+          </a:p>
+          <a:p>
+            <a:r>
+              <a:rPr lang="zh-CN" altLang="en-US" dirty="0" smtClean="0"/>
+              <a:t>快进和正常状态 设置间隔</a:t>
+            </a:r>
+            <a:endParaRPr lang="zh-CN" altLang="en-US" dirty="0"/>
+          </a:p>
+        </p:txBody>
+      </p:sp>
+    </p:spTree>
+    <p:extLst>
+      <p:ext uri="{BB962C8B-B14F-4D97-AF65-F5344CB8AC3E}">
+        <p14:creationId xmlns:p14="http://schemas.microsoft.com/office/powerpoint/2010/main" val="2680810510"/>
       </p:ext>
     </p:extLst>
   </p:cSld>

--- a/音视频编解码.pptx
+++ b/音视频编解码.pptx
@@ -8,6 +8,7 @@
     <p:sldId id="256" r:id="rId2"/>
     <p:sldId id="257" r:id="rId3"/>
     <p:sldId id="258" r:id="rId4"/>
+    <p:sldId id="259" r:id="rId5"/>
   </p:sldIdLst>
   <p:sldSz cx="12192000" cy="6858000"/>
   <p:notesSz cx="6858000" cy="9144000"/>
@@ -245,7 +246,7 @@
           <a:p>
             <a:fld id="{EA80D996-CE9E-432A-86C4-A040E9078786}" type="datetimeFigureOut">
               <a:rPr lang="zh-CN" altLang="en-US" smtClean="0"/>
-              <a:t>2019/2/22</a:t>
+              <a:t>2019/3/2</a:t>
             </a:fld>
             <a:endParaRPr lang="zh-CN" altLang="en-US"/>
           </a:p>
@@ -415,7 +416,7 @@
           <a:p>
             <a:fld id="{EA80D996-CE9E-432A-86C4-A040E9078786}" type="datetimeFigureOut">
               <a:rPr lang="zh-CN" altLang="en-US" smtClean="0"/>
-              <a:t>2019/2/22</a:t>
+              <a:t>2019/3/2</a:t>
             </a:fld>
             <a:endParaRPr lang="zh-CN" altLang="en-US"/>
           </a:p>
@@ -595,7 +596,7 @@
           <a:p>
             <a:fld id="{EA80D996-CE9E-432A-86C4-A040E9078786}" type="datetimeFigureOut">
               <a:rPr lang="zh-CN" altLang="en-US" smtClean="0"/>
-              <a:t>2019/2/22</a:t>
+              <a:t>2019/3/2</a:t>
             </a:fld>
             <a:endParaRPr lang="zh-CN" altLang="en-US"/>
           </a:p>
@@ -765,7 +766,7 @@
           <a:p>
             <a:fld id="{EA80D996-CE9E-432A-86C4-A040E9078786}" type="datetimeFigureOut">
               <a:rPr lang="zh-CN" altLang="en-US" smtClean="0"/>
-              <a:t>2019/2/22</a:t>
+              <a:t>2019/3/2</a:t>
             </a:fld>
             <a:endParaRPr lang="zh-CN" altLang="en-US"/>
           </a:p>
@@ -1011,7 +1012,7 @@
           <a:p>
             <a:fld id="{EA80D996-CE9E-432A-86C4-A040E9078786}" type="datetimeFigureOut">
               <a:rPr lang="zh-CN" altLang="en-US" smtClean="0"/>
-              <a:t>2019/2/22</a:t>
+              <a:t>2019/3/2</a:t>
             </a:fld>
             <a:endParaRPr lang="zh-CN" altLang="en-US"/>
           </a:p>
@@ -1243,7 +1244,7 @@
           <a:p>
             <a:fld id="{EA80D996-CE9E-432A-86C4-A040E9078786}" type="datetimeFigureOut">
               <a:rPr lang="zh-CN" altLang="en-US" smtClean="0"/>
-              <a:t>2019/2/22</a:t>
+              <a:t>2019/3/2</a:t>
             </a:fld>
             <a:endParaRPr lang="zh-CN" altLang="en-US"/>
           </a:p>
@@ -1610,7 +1611,7 @@
           <a:p>
             <a:fld id="{EA80D996-CE9E-432A-86C4-A040E9078786}" type="datetimeFigureOut">
               <a:rPr lang="zh-CN" altLang="en-US" smtClean="0"/>
-              <a:t>2019/2/22</a:t>
+              <a:t>2019/3/2</a:t>
             </a:fld>
             <a:endParaRPr lang="zh-CN" altLang="en-US"/>
           </a:p>
@@ -1728,7 +1729,7 @@
           <a:p>
             <a:fld id="{EA80D996-CE9E-432A-86C4-A040E9078786}" type="datetimeFigureOut">
               <a:rPr lang="zh-CN" altLang="en-US" smtClean="0"/>
-              <a:t>2019/2/22</a:t>
+              <a:t>2019/3/2</a:t>
             </a:fld>
             <a:endParaRPr lang="zh-CN" altLang="en-US"/>
           </a:p>
@@ -1823,7 +1824,7 @@
           <a:p>
             <a:fld id="{EA80D996-CE9E-432A-86C4-A040E9078786}" type="datetimeFigureOut">
               <a:rPr lang="zh-CN" altLang="en-US" smtClean="0"/>
-              <a:t>2019/2/22</a:t>
+              <a:t>2019/3/2</a:t>
             </a:fld>
             <a:endParaRPr lang="zh-CN" altLang="en-US"/>
           </a:p>
@@ -2100,7 +2101,7 @@
           <a:p>
             <a:fld id="{EA80D996-CE9E-432A-86C4-A040E9078786}" type="datetimeFigureOut">
               <a:rPr lang="zh-CN" altLang="en-US" smtClean="0"/>
-              <a:t>2019/2/22</a:t>
+              <a:t>2019/3/2</a:t>
             </a:fld>
             <a:endParaRPr lang="zh-CN" altLang="en-US"/>
           </a:p>
@@ -2353,7 +2354,7 @@
           <a:p>
             <a:fld id="{EA80D996-CE9E-432A-86C4-A040E9078786}" type="datetimeFigureOut">
               <a:rPr lang="zh-CN" altLang="en-US" smtClean="0"/>
-              <a:t>2019/2/22</a:t>
+              <a:t>2019/3/2</a:t>
             </a:fld>
             <a:endParaRPr lang="zh-CN" altLang="en-US"/>
           </a:p>
@@ -2566,7 +2567,7 @@
           <a:p>
             <a:fld id="{EA80D996-CE9E-432A-86C4-A040E9078786}" type="datetimeFigureOut">
               <a:rPr lang="zh-CN" altLang="en-US" smtClean="0"/>
-              <a:t>2019/2/22</a:t>
+              <a:t>2019/3/2</a:t>
             </a:fld>
             <a:endParaRPr lang="zh-CN" altLang="en-US"/>
           </a:p>
@@ -5080,14 +5081,7 @@
                 <a:latin typeface="Times New Roman" panose="02020603050405020304" pitchFamily="18" charset="0"/>
                 <a:cs typeface="Times New Roman" panose="02020603050405020304" pitchFamily="18" charset="0"/>
               </a:rPr>
-              <a:t>未</a:t>
-            </a:r>
-            <a:r>
-              <a:rPr lang="zh-CN" altLang="en-US" sz="1100" dirty="0" smtClean="0">
-                <a:latin typeface="Times New Roman" panose="02020603050405020304" pitchFamily="18" charset="0"/>
-                <a:cs typeface="Times New Roman" panose="02020603050405020304" pitchFamily="18" charset="0"/>
-              </a:rPr>
-              <a:t>按下</a:t>
+              <a:t>未按下</a:t>
             </a:r>
             <a:endParaRPr lang="zh-CN" altLang="en-US" sz="1100" dirty="0">
               <a:latin typeface="Times New Roman" panose="02020603050405020304" pitchFamily="18" charset="0"/>
@@ -5875,6 +5869,5236 @@
     <p:extLst>
       <p:ext uri="{BB962C8B-B14F-4D97-AF65-F5344CB8AC3E}">
         <p14:creationId xmlns:p14="http://schemas.microsoft.com/office/powerpoint/2010/main" val="2680810510"/>
+      </p:ext>
+    </p:extLst>
+  </p:cSld>
+  <p:clrMapOvr>
+    <a:masterClrMapping/>
+  </p:clrMapOvr>
+</p:sld>
+</file>
+
+<file path=ppt/slides/slide4.xml><?xml version="1.0" encoding="utf-8"?>
+<p:sld xmlns:a="http://schemas.openxmlformats.org/drawingml/2006/main" xmlns:r="http://schemas.openxmlformats.org/officeDocument/2006/relationships" xmlns:p="http://schemas.openxmlformats.org/presentationml/2006/main">
+  <p:cSld>
+    <p:spTree>
+      <p:nvGrpSpPr>
+        <p:cNvPr id="1" name=""/>
+        <p:cNvGrpSpPr/>
+        <p:nvPr/>
+      </p:nvGrpSpPr>
+      <p:grpSpPr>
+        <a:xfrm>
+          <a:off x="0" y="0"/>
+          <a:ext cx="0" cy="0"/>
+          <a:chOff x="0" y="0"/>
+          <a:chExt cx="0" cy="0"/>
+        </a:xfrm>
+      </p:grpSpPr>
+      <p:sp>
+        <p:nvSpPr>
+          <p:cNvPr id="4" name="矩形 3"/>
+          <p:cNvSpPr/>
+          <p:nvPr/>
+        </p:nvSpPr>
+        <p:spPr>
+          <a:xfrm>
+            <a:off x="5568790" y="3302183"/>
+            <a:ext cx="2297556" cy="363901"/>
+          </a:xfrm>
+          <a:prstGeom prst="rect">
+            <a:avLst/>
+          </a:prstGeom>
+          <a:solidFill>
+            <a:schemeClr val="bg1"/>
+          </a:solidFill>
+          <a:ln>
+            <a:solidFill>
+              <a:srgbClr val="FF0000"/>
+            </a:solidFill>
+            <a:prstDash val="sysDash"/>
+          </a:ln>
+        </p:spPr>
+        <p:style>
+          <a:lnRef idx="2">
+            <a:schemeClr val="accent1">
+              <a:shade val="50000"/>
+            </a:schemeClr>
+          </a:lnRef>
+          <a:fillRef idx="1">
+            <a:schemeClr val="accent1"/>
+          </a:fillRef>
+          <a:effectRef idx="0">
+            <a:schemeClr val="accent1"/>
+          </a:effectRef>
+          <a:fontRef idx="minor">
+            <a:schemeClr val="lt1"/>
+          </a:fontRef>
+        </p:style>
+        <p:txBody>
+          <a:bodyPr rtlCol="0" anchor="ctr"/>
+          <a:lstStyle/>
+          <a:p>
+            <a:pPr algn="ctr"/>
+            <a:endParaRPr lang="zh-CN" altLang="en-US"/>
+          </a:p>
+        </p:txBody>
+      </p:sp>
+      <p:sp>
+        <p:nvSpPr>
+          <p:cNvPr id="5" name="矩形 4"/>
+          <p:cNvSpPr/>
+          <p:nvPr/>
+        </p:nvSpPr>
+        <p:spPr>
+          <a:xfrm>
+            <a:off x="3292440" y="4139737"/>
+            <a:ext cx="1276461" cy="340823"/>
+          </a:xfrm>
+          <a:prstGeom prst="rect">
+            <a:avLst/>
+          </a:prstGeom>
+          <a:solidFill>
+            <a:schemeClr val="bg1"/>
+          </a:solidFill>
+          <a:ln>
+            <a:solidFill>
+              <a:srgbClr val="FF0000"/>
+            </a:solidFill>
+            <a:prstDash val="sysDash"/>
+          </a:ln>
+        </p:spPr>
+        <p:style>
+          <a:lnRef idx="2">
+            <a:schemeClr val="accent1">
+              <a:shade val="50000"/>
+            </a:schemeClr>
+          </a:lnRef>
+          <a:fillRef idx="1">
+            <a:schemeClr val="accent1"/>
+          </a:fillRef>
+          <a:effectRef idx="0">
+            <a:schemeClr val="accent1"/>
+          </a:effectRef>
+          <a:fontRef idx="minor">
+            <a:schemeClr val="lt1"/>
+          </a:fontRef>
+        </p:style>
+        <p:txBody>
+          <a:bodyPr rtlCol="0" anchor="ctr"/>
+          <a:lstStyle/>
+          <a:p>
+            <a:pPr algn="ctr"/>
+            <a:endParaRPr lang="zh-CN" altLang="en-US"/>
+          </a:p>
+        </p:txBody>
+      </p:sp>
+      <p:sp>
+        <p:nvSpPr>
+          <p:cNvPr id="6" name="矩形 5"/>
+          <p:cNvSpPr/>
+          <p:nvPr/>
+        </p:nvSpPr>
+        <p:spPr>
+          <a:xfrm>
+            <a:off x="1638622" y="4705002"/>
+            <a:ext cx="1276461" cy="340823"/>
+          </a:xfrm>
+          <a:prstGeom prst="rect">
+            <a:avLst/>
+          </a:prstGeom>
+          <a:solidFill>
+            <a:schemeClr val="bg1"/>
+          </a:solidFill>
+          <a:ln>
+            <a:solidFill>
+              <a:srgbClr val="FF0000"/>
+            </a:solidFill>
+            <a:prstDash val="sysDash"/>
+          </a:ln>
+        </p:spPr>
+        <p:style>
+          <a:lnRef idx="2">
+            <a:schemeClr val="accent1">
+              <a:shade val="50000"/>
+            </a:schemeClr>
+          </a:lnRef>
+          <a:fillRef idx="1">
+            <a:schemeClr val="accent1"/>
+          </a:fillRef>
+          <a:effectRef idx="0">
+            <a:schemeClr val="accent1"/>
+          </a:effectRef>
+          <a:fontRef idx="minor">
+            <a:schemeClr val="lt1"/>
+          </a:fontRef>
+        </p:style>
+        <p:txBody>
+          <a:bodyPr rtlCol="0" anchor="ctr"/>
+          <a:lstStyle/>
+          <a:p>
+            <a:pPr algn="ctr"/>
+            <a:endParaRPr lang="zh-CN" altLang="en-US"/>
+          </a:p>
+        </p:txBody>
+      </p:sp>
+      <p:sp>
+        <p:nvSpPr>
+          <p:cNvPr id="7" name="矩形 6"/>
+          <p:cNvSpPr/>
+          <p:nvPr/>
+        </p:nvSpPr>
+        <p:spPr>
+          <a:xfrm>
+            <a:off x="1056966" y="5212078"/>
+            <a:ext cx="558840" cy="282634"/>
+          </a:xfrm>
+          <a:prstGeom prst="rect">
+            <a:avLst/>
+          </a:prstGeom>
+          <a:solidFill>
+            <a:schemeClr val="bg1"/>
+          </a:solidFill>
+          <a:ln>
+            <a:solidFill>
+              <a:srgbClr val="FF0000"/>
+            </a:solidFill>
+            <a:prstDash val="sysDash"/>
+          </a:ln>
+        </p:spPr>
+        <p:style>
+          <a:lnRef idx="2">
+            <a:schemeClr val="accent1">
+              <a:shade val="50000"/>
+            </a:schemeClr>
+          </a:lnRef>
+          <a:fillRef idx="1">
+            <a:schemeClr val="accent1"/>
+          </a:fillRef>
+          <a:effectRef idx="0">
+            <a:schemeClr val="accent1"/>
+          </a:effectRef>
+          <a:fontRef idx="minor">
+            <a:schemeClr val="lt1"/>
+          </a:fontRef>
+        </p:style>
+        <p:txBody>
+          <a:bodyPr rtlCol="0" anchor="ctr"/>
+          <a:lstStyle/>
+          <a:p>
+            <a:pPr algn="ctr"/>
+            <a:endParaRPr lang="zh-CN" altLang="en-US"/>
+          </a:p>
+        </p:txBody>
+      </p:sp>
+      <p:sp>
+        <p:nvSpPr>
+          <p:cNvPr id="8" name="椭圆 7"/>
+          <p:cNvSpPr/>
+          <p:nvPr/>
+        </p:nvSpPr>
+        <p:spPr>
+          <a:xfrm>
+            <a:off x="1159624" y="5311832"/>
+            <a:ext cx="141317" cy="141317"/>
+          </a:xfrm>
+          <a:prstGeom prst="ellipse">
+            <a:avLst/>
+          </a:prstGeom>
+        </p:spPr>
+        <p:style>
+          <a:lnRef idx="2">
+            <a:schemeClr val="accent1">
+              <a:shade val="50000"/>
+            </a:schemeClr>
+          </a:lnRef>
+          <a:fillRef idx="1">
+            <a:schemeClr val="accent1"/>
+          </a:fillRef>
+          <a:effectRef idx="0">
+            <a:schemeClr val="accent1"/>
+          </a:effectRef>
+          <a:fontRef idx="minor">
+            <a:schemeClr val="lt1"/>
+          </a:fontRef>
+        </p:style>
+        <p:txBody>
+          <a:bodyPr rtlCol="0" anchor="ctr"/>
+          <a:lstStyle/>
+          <a:p>
+            <a:pPr algn="ctr"/>
+            <a:endParaRPr lang="zh-CN" altLang="en-US"/>
+          </a:p>
+        </p:txBody>
+      </p:sp>
+      <p:sp>
+        <p:nvSpPr>
+          <p:cNvPr id="9" name="椭圆 8"/>
+          <p:cNvSpPr/>
+          <p:nvPr/>
+        </p:nvSpPr>
+        <p:spPr>
+          <a:xfrm>
+            <a:off x="1393858" y="5311832"/>
+            <a:ext cx="141317" cy="141317"/>
+          </a:xfrm>
+          <a:prstGeom prst="ellipse">
+            <a:avLst/>
+          </a:prstGeom>
+        </p:spPr>
+        <p:style>
+          <a:lnRef idx="2">
+            <a:schemeClr val="accent1">
+              <a:shade val="50000"/>
+            </a:schemeClr>
+          </a:lnRef>
+          <a:fillRef idx="1">
+            <a:schemeClr val="accent1"/>
+          </a:fillRef>
+          <a:effectRef idx="0">
+            <a:schemeClr val="accent1"/>
+          </a:effectRef>
+          <a:fontRef idx="minor">
+            <a:schemeClr val="lt1"/>
+          </a:fontRef>
+        </p:style>
+        <p:txBody>
+          <a:bodyPr rtlCol="0" anchor="ctr"/>
+          <a:lstStyle/>
+          <a:p>
+            <a:pPr algn="ctr"/>
+            <a:endParaRPr lang="zh-CN" altLang="en-US"/>
+          </a:p>
+        </p:txBody>
+      </p:sp>
+      <p:sp>
+        <p:nvSpPr>
+          <p:cNvPr id="10" name="椭圆 9"/>
+          <p:cNvSpPr/>
+          <p:nvPr/>
+        </p:nvSpPr>
+        <p:spPr>
+          <a:xfrm>
+            <a:off x="1628092" y="5311832"/>
+            <a:ext cx="141317" cy="141317"/>
+          </a:xfrm>
+          <a:prstGeom prst="ellipse">
+            <a:avLst/>
+          </a:prstGeom>
+          <a:solidFill>
+            <a:schemeClr val="bg1"/>
+          </a:solidFill>
+          <a:ln>
+            <a:prstDash val="dash"/>
+          </a:ln>
+        </p:spPr>
+        <p:style>
+          <a:lnRef idx="2">
+            <a:schemeClr val="accent1">
+              <a:shade val="50000"/>
+            </a:schemeClr>
+          </a:lnRef>
+          <a:fillRef idx="1">
+            <a:schemeClr val="accent1"/>
+          </a:fillRef>
+          <a:effectRef idx="0">
+            <a:schemeClr val="accent1"/>
+          </a:effectRef>
+          <a:fontRef idx="minor">
+            <a:schemeClr val="lt1"/>
+          </a:fontRef>
+        </p:style>
+        <p:txBody>
+          <a:bodyPr rtlCol="0" anchor="ctr"/>
+          <a:lstStyle/>
+          <a:p>
+            <a:pPr algn="ctr"/>
+            <a:endParaRPr lang="zh-CN" altLang="en-US"/>
+          </a:p>
+        </p:txBody>
+      </p:sp>
+      <p:sp>
+        <p:nvSpPr>
+          <p:cNvPr id="11" name="椭圆 10"/>
+          <p:cNvSpPr/>
+          <p:nvPr/>
+        </p:nvSpPr>
+        <p:spPr>
+          <a:xfrm>
+            <a:off x="1862326" y="5311832"/>
+            <a:ext cx="141317" cy="141317"/>
+          </a:xfrm>
+          <a:prstGeom prst="ellipse">
+            <a:avLst/>
+          </a:prstGeom>
+          <a:solidFill>
+            <a:schemeClr val="bg1"/>
+          </a:solidFill>
+          <a:ln>
+            <a:prstDash val="dash"/>
+          </a:ln>
+        </p:spPr>
+        <p:style>
+          <a:lnRef idx="2">
+            <a:schemeClr val="accent1">
+              <a:shade val="50000"/>
+            </a:schemeClr>
+          </a:lnRef>
+          <a:fillRef idx="1">
+            <a:schemeClr val="accent1"/>
+          </a:fillRef>
+          <a:effectRef idx="0">
+            <a:schemeClr val="accent1"/>
+          </a:effectRef>
+          <a:fontRef idx="minor">
+            <a:schemeClr val="lt1"/>
+          </a:fontRef>
+        </p:style>
+        <p:txBody>
+          <a:bodyPr rtlCol="0" anchor="ctr"/>
+          <a:lstStyle/>
+          <a:p>
+            <a:pPr algn="ctr"/>
+            <a:endParaRPr lang="zh-CN" altLang="en-US"/>
+          </a:p>
+        </p:txBody>
+      </p:sp>
+      <p:sp>
+        <p:nvSpPr>
+          <p:cNvPr id="12" name="椭圆 11"/>
+          <p:cNvSpPr/>
+          <p:nvPr/>
+        </p:nvSpPr>
+        <p:spPr>
+          <a:xfrm>
+            <a:off x="2096560" y="5311832"/>
+            <a:ext cx="141317" cy="141317"/>
+          </a:xfrm>
+          <a:prstGeom prst="ellipse">
+            <a:avLst/>
+          </a:prstGeom>
+          <a:solidFill>
+            <a:schemeClr val="bg1"/>
+          </a:solidFill>
+          <a:ln>
+            <a:prstDash val="dash"/>
+          </a:ln>
+        </p:spPr>
+        <p:style>
+          <a:lnRef idx="2">
+            <a:schemeClr val="accent1">
+              <a:shade val="50000"/>
+            </a:schemeClr>
+          </a:lnRef>
+          <a:fillRef idx="1">
+            <a:schemeClr val="accent1"/>
+          </a:fillRef>
+          <a:effectRef idx="0">
+            <a:schemeClr val="accent1"/>
+          </a:effectRef>
+          <a:fontRef idx="minor">
+            <a:schemeClr val="lt1"/>
+          </a:fontRef>
+        </p:style>
+        <p:txBody>
+          <a:bodyPr rtlCol="0" anchor="ctr"/>
+          <a:lstStyle/>
+          <a:p>
+            <a:pPr algn="ctr"/>
+            <a:endParaRPr lang="zh-CN" altLang="en-US"/>
+          </a:p>
+        </p:txBody>
+      </p:sp>
+      <p:sp>
+        <p:nvSpPr>
+          <p:cNvPr id="13" name="椭圆 12"/>
+          <p:cNvSpPr/>
+          <p:nvPr/>
+        </p:nvSpPr>
+        <p:spPr>
+          <a:xfrm>
+            <a:off x="2330794" y="5311832"/>
+            <a:ext cx="141317" cy="141317"/>
+          </a:xfrm>
+          <a:prstGeom prst="ellipse">
+            <a:avLst/>
+          </a:prstGeom>
+          <a:solidFill>
+            <a:schemeClr val="bg1"/>
+          </a:solidFill>
+          <a:ln>
+            <a:prstDash val="dash"/>
+          </a:ln>
+        </p:spPr>
+        <p:style>
+          <a:lnRef idx="2">
+            <a:schemeClr val="accent1">
+              <a:shade val="50000"/>
+            </a:schemeClr>
+          </a:lnRef>
+          <a:fillRef idx="1">
+            <a:schemeClr val="accent1"/>
+          </a:fillRef>
+          <a:effectRef idx="0">
+            <a:schemeClr val="accent1"/>
+          </a:effectRef>
+          <a:fontRef idx="minor">
+            <a:schemeClr val="lt1"/>
+          </a:fontRef>
+        </p:style>
+        <p:txBody>
+          <a:bodyPr rtlCol="0" anchor="ctr"/>
+          <a:lstStyle/>
+          <a:p>
+            <a:pPr algn="ctr"/>
+            <a:endParaRPr lang="zh-CN" altLang="en-US"/>
+          </a:p>
+        </p:txBody>
+      </p:sp>
+      <p:sp>
+        <p:nvSpPr>
+          <p:cNvPr id="14" name="椭圆 13"/>
+          <p:cNvSpPr/>
+          <p:nvPr/>
+        </p:nvSpPr>
+        <p:spPr>
+          <a:xfrm>
+            <a:off x="2565028" y="5311832"/>
+            <a:ext cx="141317" cy="141317"/>
+          </a:xfrm>
+          <a:prstGeom prst="ellipse">
+            <a:avLst/>
+          </a:prstGeom>
+          <a:solidFill>
+            <a:schemeClr val="bg1"/>
+          </a:solidFill>
+          <a:ln>
+            <a:prstDash val="dash"/>
+          </a:ln>
+        </p:spPr>
+        <p:style>
+          <a:lnRef idx="2">
+            <a:schemeClr val="accent1">
+              <a:shade val="50000"/>
+            </a:schemeClr>
+          </a:lnRef>
+          <a:fillRef idx="1">
+            <a:schemeClr val="accent1"/>
+          </a:fillRef>
+          <a:effectRef idx="0">
+            <a:schemeClr val="accent1"/>
+          </a:effectRef>
+          <a:fontRef idx="minor">
+            <a:schemeClr val="lt1"/>
+          </a:fontRef>
+        </p:style>
+        <p:txBody>
+          <a:bodyPr rtlCol="0" anchor="ctr"/>
+          <a:lstStyle/>
+          <a:p>
+            <a:pPr algn="ctr"/>
+            <a:endParaRPr lang="zh-CN" altLang="en-US"/>
+          </a:p>
+        </p:txBody>
+      </p:sp>
+      <p:sp>
+        <p:nvSpPr>
+          <p:cNvPr id="15" name="椭圆 14"/>
+          <p:cNvSpPr/>
+          <p:nvPr/>
+        </p:nvSpPr>
+        <p:spPr>
+          <a:xfrm>
+            <a:off x="2799262" y="5311832"/>
+            <a:ext cx="141317" cy="141317"/>
+          </a:xfrm>
+          <a:prstGeom prst="ellipse">
+            <a:avLst/>
+          </a:prstGeom>
+          <a:solidFill>
+            <a:schemeClr val="bg1"/>
+          </a:solidFill>
+          <a:ln>
+            <a:prstDash val="dash"/>
+          </a:ln>
+        </p:spPr>
+        <p:style>
+          <a:lnRef idx="2">
+            <a:schemeClr val="accent1">
+              <a:shade val="50000"/>
+            </a:schemeClr>
+          </a:lnRef>
+          <a:fillRef idx="1">
+            <a:schemeClr val="accent1"/>
+          </a:fillRef>
+          <a:effectRef idx="0">
+            <a:schemeClr val="accent1"/>
+          </a:effectRef>
+          <a:fontRef idx="minor">
+            <a:schemeClr val="lt1"/>
+          </a:fontRef>
+        </p:style>
+        <p:txBody>
+          <a:bodyPr rtlCol="0" anchor="ctr"/>
+          <a:lstStyle/>
+          <a:p>
+            <a:pPr algn="ctr"/>
+            <a:endParaRPr lang="zh-CN" altLang="en-US"/>
+          </a:p>
+        </p:txBody>
+      </p:sp>
+      <p:sp>
+        <p:nvSpPr>
+          <p:cNvPr id="16" name="椭圆 15"/>
+          <p:cNvSpPr/>
+          <p:nvPr/>
+        </p:nvSpPr>
+        <p:spPr>
+          <a:xfrm>
+            <a:off x="3033496" y="5311832"/>
+            <a:ext cx="141317" cy="141317"/>
+          </a:xfrm>
+          <a:prstGeom prst="ellipse">
+            <a:avLst/>
+          </a:prstGeom>
+          <a:solidFill>
+            <a:schemeClr val="bg1"/>
+          </a:solidFill>
+          <a:ln>
+            <a:prstDash val="dash"/>
+          </a:ln>
+        </p:spPr>
+        <p:style>
+          <a:lnRef idx="2">
+            <a:schemeClr val="accent1">
+              <a:shade val="50000"/>
+            </a:schemeClr>
+          </a:lnRef>
+          <a:fillRef idx="1">
+            <a:schemeClr val="accent1"/>
+          </a:fillRef>
+          <a:effectRef idx="0">
+            <a:schemeClr val="accent1"/>
+          </a:effectRef>
+          <a:fontRef idx="minor">
+            <a:schemeClr val="lt1"/>
+          </a:fontRef>
+        </p:style>
+        <p:txBody>
+          <a:bodyPr rtlCol="0" anchor="ctr"/>
+          <a:lstStyle/>
+          <a:p>
+            <a:pPr algn="ctr"/>
+            <a:endParaRPr lang="zh-CN" altLang="en-US"/>
+          </a:p>
+        </p:txBody>
+      </p:sp>
+      <p:sp>
+        <p:nvSpPr>
+          <p:cNvPr id="17" name="椭圆 16"/>
+          <p:cNvSpPr/>
+          <p:nvPr/>
+        </p:nvSpPr>
+        <p:spPr>
+          <a:xfrm>
+            <a:off x="3267730" y="5311832"/>
+            <a:ext cx="141317" cy="141317"/>
+          </a:xfrm>
+          <a:prstGeom prst="ellipse">
+            <a:avLst/>
+          </a:prstGeom>
+          <a:solidFill>
+            <a:schemeClr val="bg1"/>
+          </a:solidFill>
+          <a:ln>
+            <a:prstDash val="dash"/>
+          </a:ln>
+        </p:spPr>
+        <p:style>
+          <a:lnRef idx="2">
+            <a:schemeClr val="accent1">
+              <a:shade val="50000"/>
+            </a:schemeClr>
+          </a:lnRef>
+          <a:fillRef idx="1">
+            <a:schemeClr val="accent1"/>
+          </a:fillRef>
+          <a:effectRef idx="0">
+            <a:schemeClr val="accent1"/>
+          </a:effectRef>
+          <a:fontRef idx="minor">
+            <a:schemeClr val="lt1"/>
+          </a:fontRef>
+        </p:style>
+        <p:txBody>
+          <a:bodyPr rtlCol="0" anchor="ctr"/>
+          <a:lstStyle/>
+          <a:p>
+            <a:pPr algn="ctr"/>
+            <a:endParaRPr lang="zh-CN" altLang="en-US"/>
+          </a:p>
+        </p:txBody>
+      </p:sp>
+      <p:sp>
+        <p:nvSpPr>
+          <p:cNvPr id="18" name="椭圆 17"/>
+          <p:cNvSpPr/>
+          <p:nvPr/>
+        </p:nvSpPr>
+        <p:spPr>
+          <a:xfrm>
+            <a:off x="3501964" y="5311832"/>
+            <a:ext cx="141317" cy="141317"/>
+          </a:xfrm>
+          <a:prstGeom prst="ellipse">
+            <a:avLst/>
+          </a:prstGeom>
+          <a:solidFill>
+            <a:schemeClr val="bg1"/>
+          </a:solidFill>
+          <a:ln>
+            <a:prstDash val="dash"/>
+          </a:ln>
+        </p:spPr>
+        <p:style>
+          <a:lnRef idx="2">
+            <a:schemeClr val="accent1">
+              <a:shade val="50000"/>
+            </a:schemeClr>
+          </a:lnRef>
+          <a:fillRef idx="1">
+            <a:schemeClr val="accent1"/>
+          </a:fillRef>
+          <a:effectRef idx="0">
+            <a:schemeClr val="accent1"/>
+          </a:effectRef>
+          <a:fontRef idx="minor">
+            <a:schemeClr val="lt1"/>
+          </a:fontRef>
+        </p:style>
+        <p:txBody>
+          <a:bodyPr rtlCol="0" anchor="ctr"/>
+          <a:lstStyle/>
+          <a:p>
+            <a:pPr algn="ctr"/>
+            <a:endParaRPr lang="zh-CN" altLang="en-US"/>
+          </a:p>
+        </p:txBody>
+      </p:sp>
+      <p:sp>
+        <p:nvSpPr>
+          <p:cNvPr id="19" name="椭圆 18"/>
+          <p:cNvSpPr/>
+          <p:nvPr/>
+        </p:nvSpPr>
+        <p:spPr>
+          <a:xfrm>
+            <a:off x="3736198" y="5311832"/>
+            <a:ext cx="141317" cy="141317"/>
+          </a:xfrm>
+          <a:prstGeom prst="ellipse">
+            <a:avLst/>
+          </a:prstGeom>
+          <a:solidFill>
+            <a:schemeClr val="bg1"/>
+          </a:solidFill>
+          <a:ln>
+            <a:prstDash val="dash"/>
+          </a:ln>
+        </p:spPr>
+        <p:style>
+          <a:lnRef idx="2">
+            <a:schemeClr val="accent1">
+              <a:shade val="50000"/>
+            </a:schemeClr>
+          </a:lnRef>
+          <a:fillRef idx="1">
+            <a:schemeClr val="accent1"/>
+          </a:fillRef>
+          <a:effectRef idx="0">
+            <a:schemeClr val="accent1"/>
+          </a:effectRef>
+          <a:fontRef idx="minor">
+            <a:schemeClr val="lt1"/>
+          </a:fontRef>
+        </p:style>
+        <p:txBody>
+          <a:bodyPr rtlCol="0" anchor="ctr"/>
+          <a:lstStyle/>
+          <a:p>
+            <a:pPr algn="ctr"/>
+            <a:endParaRPr lang="zh-CN" altLang="en-US"/>
+          </a:p>
+        </p:txBody>
+      </p:sp>
+      <p:sp>
+        <p:nvSpPr>
+          <p:cNvPr id="20" name="椭圆 19"/>
+          <p:cNvSpPr/>
+          <p:nvPr/>
+        </p:nvSpPr>
+        <p:spPr>
+          <a:xfrm>
+            <a:off x="3970432" y="5311832"/>
+            <a:ext cx="141317" cy="141317"/>
+          </a:xfrm>
+          <a:prstGeom prst="ellipse">
+            <a:avLst/>
+          </a:prstGeom>
+          <a:solidFill>
+            <a:schemeClr val="bg1"/>
+          </a:solidFill>
+          <a:ln>
+            <a:prstDash val="dash"/>
+          </a:ln>
+        </p:spPr>
+        <p:style>
+          <a:lnRef idx="2">
+            <a:schemeClr val="accent1">
+              <a:shade val="50000"/>
+            </a:schemeClr>
+          </a:lnRef>
+          <a:fillRef idx="1">
+            <a:schemeClr val="accent1"/>
+          </a:fillRef>
+          <a:effectRef idx="0">
+            <a:schemeClr val="accent1"/>
+          </a:effectRef>
+          <a:fontRef idx="minor">
+            <a:schemeClr val="lt1"/>
+          </a:fontRef>
+        </p:style>
+        <p:txBody>
+          <a:bodyPr rtlCol="0" anchor="ctr"/>
+          <a:lstStyle/>
+          <a:p>
+            <a:pPr algn="ctr"/>
+            <a:endParaRPr lang="zh-CN" altLang="en-US"/>
+          </a:p>
+        </p:txBody>
+      </p:sp>
+      <p:sp>
+        <p:nvSpPr>
+          <p:cNvPr id="21" name="椭圆 20"/>
+          <p:cNvSpPr/>
+          <p:nvPr/>
+        </p:nvSpPr>
+        <p:spPr>
+          <a:xfrm>
+            <a:off x="4204666" y="5311832"/>
+            <a:ext cx="141317" cy="141317"/>
+          </a:xfrm>
+          <a:prstGeom prst="ellipse">
+            <a:avLst/>
+          </a:prstGeom>
+          <a:solidFill>
+            <a:schemeClr val="bg1"/>
+          </a:solidFill>
+          <a:ln>
+            <a:prstDash val="dash"/>
+          </a:ln>
+        </p:spPr>
+        <p:style>
+          <a:lnRef idx="2">
+            <a:schemeClr val="accent1">
+              <a:shade val="50000"/>
+            </a:schemeClr>
+          </a:lnRef>
+          <a:fillRef idx="1">
+            <a:schemeClr val="accent1"/>
+          </a:fillRef>
+          <a:effectRef idx="0">
+            <a:schemeClr val="accent1"/>
+          </a:effectRef>
+          <a:fontRef idx="minor">
+            <a:schemeClr val="lt1"/>
+          </a:fontRef>
+        </p:style>
+        <p:txBody>
+          <a:bodyPr rtlCol="0" anchor="ctr"/>
+          <a:lstStyle/>
+          <a:p>
+            <a:pPr algn="ctr"/>
+            <a:endParaRPr lang="zh-CN" altLang="en-US"/>
+          </a:p>
+        </p:txBody>
+      </p:sp>
+      <p:sp>
+        <p:nvSpPr>
+          <p:cNvPr id="22" name="椭圆 21"/>
+          <p:cNvSpPr/>
+          <p:nvPr/>
+        </p:nvSpPr>
+        <p:spPr>
+          <a:xfrm>
+            <a:off x="4438900" y="5311832"/>
+            <a:ext cx="141317" cy="141317"/>
+          </a:xfrm>
+          <a:prstGeom prst="ellipse">
+            <a:avLst/>
+          </a:prstGeom>
+          <a:solidFill>
+            <a:schemeClr val="bg1"/>
+          </a:solidFill>
+          <a:ln>
+            <a:prstDash val="dash"/>
+          </a:ln>
+        </p:spPr>
+        <p:style>
+          <a:lnRef idx="2">
+            <a:schemeClr val="accent1">
+              <a:shade val="50000"/>
+            </a:schemeClr>
+          </a:lnRef>
+          <a:fillRef idx="1">
+            <a:schemeClr val="accent1"/>
+          </a:fillRef>
+          <a:effectRef idx="0">
+            <a:schemeClr val="accent1"/>
+          </a:effectRef>
+          <a:fontRef idx="minor">
+            <a:schemeClr val="lt1"/>
+          </a:fontRef>
+        </p:style>
+        <p:txBody>
+          <a:bodyPr rtlCol="0" anchor="ctr"/>
+          <a:lstStyle/>
+          <a:p>
+            <a:pPr algn="ctr"/>
+            <a:endParaRPr lang="zh-CN" altLang="en-US"/>
+          </a:p>
+        </p:txBody>
+      </p:sp>
+      <p:sp>
+        <p:nvSpPr>
+          <p:cNvPr id="23" name="椭圆 22"/>
+          <p:cNvSpPr/>
+          <p:nvPr/>
+        </p:nvSpPr>
+        <p:spPr>
+          <a:xfrm>
+            <a:off x="4673134" y="5311832"/>
+            <a:ext cx="141317" cy="141317"/>
+          </a:xfrm>
+          <a:prstGeom prst="ellipse">
+            <a:avLst/>
+          </a:prstGeom>
+          <a:solidFill>
+            <a:schemeClr val="bg1"/>
+          </a:solidFill>
+          <a:ln>
+            <a:prstDash val="dash"/>
+          </a:ln>
+        </p:spPr>
+        <p:style>
+          <a:lnRef idx="2">
+            <a:schemeClr val="accent1">
+              <a:shade val="50000"/>
+            </a:schemeClr>
+          </a:lnRef>
+          <a:fillRef idx="1">
+            <a:schemeClr val="accent1"/>
+          </a:fillRef>
+          <a:effectRef idx="0">
+            <a:schemeClr val="accent1"/>
+          </a:effectRef>
+          <a:fontRef idx="minor">
+            <a:schemeClr val="lt1"/>
+          </a:fontRef>
+        </p:style>
+        <p:txBody>
+          <a:bodyPr rtlCol="0" anchor="ctr"/>
+          <a:lstStyle/>
+          <a:p>
+            <a:pPr algn="ctr"/>
+            <a:endParaRPr lang="zh-CN" altLang="en-US"/>
+          </a:p>
+        </p:txBody>
+      </p:sp>
+      <p:sp>
+        <p:nvSpPr>
+          <p:cNvPr id="24" name="椭圆 23"/>
+          <p:cNvSpPr/>
+          <p:nvPr/>
+        </p:nvSpPr>
+        <p:spPr>
+          <a:xfrm>
+            <a:off x="4907368" y="5311832"/>
+            <a:ext cx="141317" cy="141317"/>
+          </a:xfrm>
+          <a:prstGeom prst="ellipse">
+            <a:avLst/>
+          </a:prstGeom>
+          <a:solidFill>
+            <a:schemeClr val="bg1"/>
+          </a:solidFill>
+          <a:ln>
+            <a:prstDash val="dash"/>
+          </a:ln>
+        </p:spPr>
+        <p:style>
+          <a:lnRef idx="2">
+            <a:schemeClr val="accent1">
+              <a:shade val="50000"/>
+            </a:schemeClr>
+          </a:lnRef>
+          <a:fillRef idx="1">
+            <a:schemeClr val="accent1"/>
+          </a:fillRef>
+          <a:effectRef idx="0">
+            <a:schemeClr val="accent1"/>
+          </a:effectRef>
+          <a:fontRef idx="minor">
+            <a:schemeClr val="lt1"/>
+          </a:fontRef>
+        </p:style>
+        <p:txBody>
+          <a:bodyPr rtlCol="0" anchor="ctr"/>
+          <a:lstStyle/>
+          <a:p>
+            <a:pPr algn="ctr"/>
+            <a:endParaRPr lang="zh-CN" altLang="en-US"/>
+          </a:p>
+        </p:txBody>
+      </p:sp>
+      <p:sp>
+        <p:nvSpPr>
+          <p:cNvPr id="25" name="椭圆 24"/>
+          <p:cNvSpPr/>
+          <p:nvPr/>
+        </p:nvSpPr>
+        <p:spPr>
+          <a:xfrm>
+            <a:off x="5141602" y="5311832"/>
+            <a:ext cx="141317" cy="141317"/>
+          </a:xfrm>
+          <a:prstGeom prst="ellipse">
+            <a:avLst/>
+          </a:prstGeom>
+          <a:solidFill>
+            <a:schemeClr val="bg1"/>
+          </a:solidFill>
+          <a:ln>
+            <a:prstDash val="dash"/>
+          </a:ln>
+        </p:spPr>
+        <p:style>
+          <a:lnRef idx="2">
+            <a:schemeClr val="accent1">
+              <a:shade val="50000"/>
+            </a:schemeClr>
+          </a:lnRef>
+          <a:fillRef idx="1">
+            <a:schemeClr val="accent1"/>
+          </a:fillRef>
+          <a:effectRef idx="0">
+            <a:schemeClr val="accent1"/>
+          </a:effectRef>
+          <a:fontRef idx="minor">
+            <a:schemeClr val="lt1"/>
+          </a:fontRef>
+        </p:style>
+        <p:txBody>
+          <a:bodyPr rtlCol="0" anchor="ctr"/>
+          <a:lstStyle/>
+          <a:p>
+            <a:pPr algn="ctr"/>
+            <a:endParaRPr lang="zh-CN" altLang="en-US"/>
+          </a:p>
+        </p:txBody>
+      </p:sp>
+      <p:sp>
+        <p:nvSpPr>
+          <p:cNvPr id="26" name="椭圆 25"/>
+          <p:cNvSpPr/>
+          <p:nvPr/>
+        </p:nvSpPr>
+        <p:spPr>
+          <a:xfrm>
+            <a:off x="5375836" y="5311832"/>
+            <a:ext cx="141317" cy="141317"/>
+          </a:xfrm>
+          <a:prstGeom prst="ellipse">
+            <a:avLst/>
+          </a:prstGeom>
+          <a:solidFill>
+            <a:schemeClr val="bg1"/>
+          </a:solidFill>
+          <a:ln>
+            <a:prstDash val="dash"/>
+          </a:ln>
+        </p:spPr>
+        <p:style>
+          <a:lnRef idx="2">
+            <a:schemeClr val="accent1">
+              <a:shade val="50000"/>
+            </a:schemeClr>
+          </a:lnRef>
+          <a:fillRef idx="1">
+            <a:schemeClr val="accent1"/>
+          </a:fillRef>
+          <a:effectRef idx="0">
+            <a:schemeClr val="accent1"/>
+          </a:effectRef>
+          <a:fontRef idx="minor">
+            <a:schemeClr val="lt1"/>
+          </a:fontRef>
+        </p:style>
+        <p:txBody>
+          <a:bodyPr rtlCol="0" anchor="ctr"/>
+          <a:lstStyle/>
+          <a:p>
+            <a:pPr algn="ctr"/>
+            <a:endParaRPr lang="zh-CN" altLang="en-US"/>
+          </a:p>
+        </p:txBody>
+      </p:sp>
+      <p:sp>
+        <p:nvSpPr>
+          <p:cNvPr id="27" name="椭圆 26"/>
+          <p:cNvSpPr/>
+          <p:nvPr/>
+        </p:nvSpPr>
+        <p:spPr>
+          <a:xfrm>
+            <a:off x="5610070" y="5311832"/>
+            <a:ext cx="141317" cy="141317"/>
+          </a:xfrm>
+          <a:prstGeom prst="ellipse">
+            <a:avLst/>
+          </a:prstGeom>
+          <a:solidFill>
+            <a:schemeClr val="bg1"/>
+          </a:solidFill>
+          <a:ln>
+            <a:prstDash val="dash"/>
+          </a:ln>
+        </p:spPr>
+        <p:style>
+          <a:lnRef idx="2">
+            <a:schemeClr val="accent1">
+              <a:shade val="50000"/>
+            </a:schemeClr>
+          </a:lnRef>
+          <a:fillRef idx="1">
+            <a:schemeClr val="accent1"/>
+          </a:fillRef>
+          <a:effectRef idx="0">
+            <a:schemeClr val="accent1"/>
+          </a:effectRef>
+          <a:fontRef idx="minor">
+            <a:schemeClr val="lt1"/>
+          </a:fontRef>
+        </p:style>
+        <p:txBody>
+          <a:bodyPr rtlCol="0" anchor="ctr"/>
+          <a:lstStyle/>
+          <a:p>
+            <a:pPr algn="ctr"/>
+            <a:endParaRPr lang="zh-CN" altLang="en-US"/>
+          </a:p>
+        </p:txBody>
+      </p:sp>
+      <p:sp>
+        <p:nvSpPr>
+          <p:cNvPr id="28" name="椭圆 27"/>
+          <p:cNvSpPr/>
+          <p:nvPr/>
+        </p:nvSpPr>
+        <p:spPr>
+          <a:xfrm>
+            <a:off x="5844304" y="5311832"/>
+            <a:ext cx="141317" cy="141317"/>
+          </a:xfrm>
+          <a:prstGeom prst="ellipse">
+            <a:avLst/>
+          </a:prstGeom>
+          <a:solidFill>
+            <a:schemeClr val="bg1"/>
+          </a:solidFill>
+          <a:ln>
+            <a:prstDash val="dash"/>
+          </a:ln>
+        </p:spPr>
+        <p:style>
+          <a:lnRef idx="2">
+            <a:schemeClr val="accent1">
+              <a:shade val="50000"/>
+            </a:schemeClr>
+          </a:lnRef>
+          <a:fillRef idx="1">
+            <a:schemeClr val="accent1"/>
+          </a:fillRef>
+          <a:effectRef idx="0">
+            <a:schemeClr val="accent1"/>
+          </a:effectRef>
+          <a:fontRef idx="minor">
+            <a:schemeClr val="lt1"/>
+          </a:fontRef>
+        </p:style>
+        <p:txBody>
+          <a:bodyPr rtlCol="0" anchor="ctr"/>
+          <a:lstStyle/>
+          <a:p>
+            <a:pPr algn="ctr"/>
+            <a:endParaRPr lang="zh-CN" altLang="en-US"/>
+          </a:p>
+        </p:txBody>
+      </p:sp>
+      <p:sp>
+        <p:nvSpPr>
+          <p:cNvPr id="29" name="椭圆 28"/>
+          <p:cNvSpPr/>
+          <p:nvPr/>
+        </p:nvSpPr>
+        <p:spPr>
+          <a:xfrm>
+            <a:off x="6078538" y="5311832"/>
+            <a:ext cx="141317" cy="141317"/>
+          </a:xfrm>
+          <a:prstGeom prst="ellipse">
+            <a:avLst/>
+          </a:prstGeom>
+          <a:solidFill>
+            <a:schemeClr val="bg1"/>
+          </a:solidFill>
+          <a:ln>
+            <a:prstDash val="dash"/>
+          </a:ln>
+        </p:spPr>
+        <p:style>
+          <a:lnRef idx="2">
+            <a:schemeClr val="accent1">
+              <a:shade val="50000"/>
+            </a:schemeClr>
+          </a:lnRef>
+          <a:fillRef idx="1">
+            <a:schemeClr val="accent1"/>
+          </a:fillRef>
+          <a:effectRef idx="0">
+            <a:schemeClr val="accent1"/>
+          </a:effectRef>
+          <a:fontRef idx="minor">
+            <a:schemeClr val="lt1"/>
+          </a:fontRef>
+        </p:style>
+        <p:txBody>
+          <a:bodyPr rtlCol="0" anchor="ctr"/>
+          <a:lstStyle/>
+          <a:p>
+            <a:pPr algn="ctr"/>
+            <a:endParaRPr lang="zh-CN" altLang="en-US"/>
+          </a:p>
+        </p:txBody>
+      </p:sp>
+      <p:sp>
+        <p:nvSpPr>
+          <p:cNvPr id="30" name="椭圆 29"/>
+          <p:cNvSpPr/>
+          <p:nvPr/>
+        </p:nvSpPr>
+        <p:spPr>
+          <a:xfrm>
+            <a:off x="6312772" y="5311832"/>
+            <a:ext cx="141317" cy="141317"/>
+          </a:xfrm>
+          <a:prstGeom prst="ellipse">
+            <a:avLst/>
+          </a:prstGeom>
+          <a:solidFill>
+            <a:schemeClr val="bg1"/>
+          </a:solidFill>
+          <a:ln>
+            <a:prstDash val="dash"/>
+          </a:ln>
+        </p:spPr>
+        <p:style>
+          <a:lnRef idx="2">
+            <a:schemeClr val="accent1">
+              <a:shade val="50000"/>
+            </a:schemeClr>
+          </a:lnRef>
+          <a:fillRef idx="1">
+            <a:schemeClr val="accent1"/>
+          </a:fillRef>
+          <a:effectRef idx="0">
+            <a:schemeClr val="accent1"/>
+          </a:effectRef>
+          <a:fontRef idx="minor">
+            <a:schemeClr val="lt1"/>
+          </a:fontRef>
+        </p:style>
+        <p:txBody>
+          <a:bodyPr rtlCol="0" anchor="ctr"/>
+          <a:lstStyle/>
+          <a:p>
+            <a:pPr algn="ctr"/>
+            <a:endParaRPr lang="zh-CN" altLang="en-US"/>
+          </a:p>
+        </p:txBody>
+      </p:sp>
+      <p:sp>
+        <p:nvSpPr>
+          <p:cNvPr id="31" name="椭圆 30"/>
+          <p:cNvSpPr/>
+          <p:nvPr/>
+        </p:nvSpPr>
+        <p:spPr>
+          <a:xfrm>
+            <a:off x="6547006" y="5311832"/>
+            <a:ext cx="141317" cy="141317"/>
+          </a:xfrm>
+          <a:prstGeom prst="ellipse">
+            <a:avLst/>
+          </a:prstGeom>
+          <a:solidFill>
+            <a:schemeClr val="bg1"/>
+          </a:solidFill>
+          <a:ln>
+            <a:prstDash val="dash"/>
+          </a:ln>
+        </p:spPr>
+        <p:style>
+          <a:lnRef idx="2">
+            <a:schemeClr val="accent1">
+              <a:shade val="50000"/>
+            </a:schemeClr>
+          </a:lnRef>
+          <a:fillRef idx="1">
+            <a:schemeClr val="accent1"/>
+          </a:fillRef>
+          <a:effectRef idx="0">
+            <a:schemeClr val="accent1"/>
+          </a:effectRef>
+          <a:fontRef idx="minor">
+            <a:schemeClr val="lt1"/>
+          </a:fontRef>
+        </p:style>
+        <p:txBody>
+          <a:bodyPr rtlCol="0" anchor="ctr"/>
+          <a:lstStyle/>
+          <a:p>
+            <a:pPr algn="ctr"/>
+            <a:endParaRPr lang="zh-CN" altLang="en-US"/>
+          </a:p>
+        </p:txBody>
+      </p:sp>
+      <p:sp>
+        <p:nvSpPr>
+          <p:cNvPr id="32" name="椭圆 31"/>
+          <p:cNvSpPr/>
+          <p:nvPr/>
+        </p:nvSpPr>
+        <p:spPr>
+          <a:xfrm>
+            <a:off x="6781240" y="5311832"/>
+            <a:ext cx="141317" cy="141317"/>
+          </a:xfrm>
+          <a:prstGeom prst="ellipse">
+            <a:avLst/>
+          </a:prstGeom>
+          <a:solidFill>
+            <a:schemeClr val="bg1"/>
+          </a:solidFill>
+          <a:ln>
+            <a:prstDash val="dash"/>
+          </a:ln>
+        </p:spPr>
+        <p:style>
+          <a:lnRef idx="2">
+            <a:schemeClr val="accent1">
+              <a:shade val="50000"/>
+            </a:schemeClr>
+          </a:lnRef>
+          <a:fillRef idx="1">
+            <a:schemeClr val="accent1"/>
+          </a:fillRef>
+          <a:effectRef idx="0">
+            <a:schemeClr val="accent1"/>
+          </a:effectRef>
+          <a:fontRef idx="minor">
+            <a:schemeClr val="lt1"/>
+          </a:fontRef>
+        </p:style>
+        <p:txBody>
+          <a:bodyPr rtlCol="0" anchor="ctr"/>
+          <a:lstStyle/>
+          <a:p>
+            <a:pPr algn="ctr"/>
+            <a:endParaRPr lang="zh-CN" altLang="en-US"/>
+          </a:p>
+        </p:txBody>
+      </p:sp>
+      <p:sp>
+        <p:nvSpPr>
+          <p:cNvPr id="33" name="椭圆 32"/>
+          <p:cNvSpPr/>
+          <p:nvPr/>
+        </p:nvSpPr>
+        <p:spPr>
+          <a:xfrm>
+            <a:off x="7015474" y="5311832"/>
+            <a:ext cx="141317" cy="141317"/>
+          </a:xfrm>
+          <a:prstGeom prst="ellipse">
+            <a:avLst/>
+          </a:prstGeom>
+          <a:solidFill>
+            <a:schemeClr val="bg1"/>
+          </a:solidFill>
+          <a:ln>
+            <a:prstDash val="dash"/>
+          </a:ln>
+        </p:spPr>
+        <p:style>
+          <a:lnRef idx="2">
+            <a:schemeClr val="accent1">
+              <a:shade val="50000"/>
+            </a:schemeClr>
+          </a:lnRef>
+          <a:fillRef idx="1">
+            <a:schemeClr val="accent1"/>
+          </a:fillRef>
+          <a:effectRef idx="0">
+            <a:schemeClr val="accent1"/>
+          </a:effectRef>
+          <a:fontRef idx="minor">
+            <a:schemeClr val="lt1"/>
+          </a:fontRef>
+        </p:style>
+        <p:txBody>
+          <a:bodyPr rtlCol="0" anchor="ctr"/>
+          <a:lstStyle/>
+          <a:p>
+            <a:pPr algn="ctr"/>
+            <a:endParaRPr lang="zh-CN" altLang="en-US"/>
+          </a:p>
+        </p:txBody>
+      </p:sp>
+      <p:sp>
+        <p:nvSpPr>
+          <p:cNvPr id="34" name="椭圆 33"/>
+          <p:cNvSpPr/>
+          <p:nvPr/>
+        </p:nvSpPr>
+        <p:spPr>
+          <a:xfrm>
+            <a:off x="7249708" y="5311832"/>
+            <a:ext cx="141317" cy="141317"/>
+          </a:xfrm>
+          <a:prstGeom prst="ellipse">
+            <a:avLst/>
+          </a:prstGeom>
+          <a:solidFill>
+            <a:schemeClr val="bg1"/>
+          </a:solidFill>
+          <a:ln>
+            <a:prstDash val="dash"/>
+          </a:ln>
+        </p:spPr>
+        <p:style>
+          <a:lnRef idx="2">
+            <a:schemeClr val="accent1">
+              <a:shade val="50000"/>
+            </a:schemeClr>
+          </a:lnRef>
+          <a:fillRef idx="1">
+            <a:schemeClr val="accent1"/>
+          </a:fillRef>
+          <a:effectRef idx="0">
+            <a:schemeClr val="accent1"/>
+          </a:effectRef>
+          <a:fontRef idx="minor">
+            <a:schemeClr val="lt1"/>
+          </a:fontRef>
+        </p:style>
+        <p:txBody>
+          <a:bodyPr rtlCol="0" anchor="ctr"/>
+          <a:lstStyle/>
+          <a:p>
+            <a:pPr algn="ctr"/>
+            <a:endParaRPr lang="zh-CN" altLang="en-US"/>
+          </a:p>
+        </p:txBody>
+      </p:sp>
+      <p:sp>
+        <p:nvSpPr>
+          <p:cNvPr id="35" name="椭圆 34"/>
+          <p:cNvSpPr/>
+          <p:nvPr/>
+        </p:nvSpPr>
+        <p:spPr>
+          <a:xfrm>
+            <a:off x="7483942" y="5311832"/>
+            <a:ext cx="141317" cy="141317"/>
+          </a:xfrm>
+          <a:prstGeom prst="ellipse">
+            <a:avLst/>
+          </a:prstGeom>
+          <a:solidFill>
+            <a:schemeClr val="bg1"/>
+          </a:solidFill>
+          <a:ln>
+            <a:prstDash val="dash"/>
+          </a:ln>
+        </p:spPr>
+        <p:style>
+          <a:lnRef idx="2">
+            <a:schemeClr val="accent1">
+              <a:shade val="50000"/>
+            </a:schemeClr>
+          </a:lnRef>
+          <a:fillRef idx="1">
+            <a:schemeClr val="accent1"/>
+          </a:fillRef>
+          <a:effectRef idx="0">
+            <a:schemeClr val="accent1"/>
+          </a:effectRef>
+          <a:fontRef idx="minor">
+            <a:schemeClr val="lt1"/>
+          </a:fontRef>
+        </p:style>
+        <p:txBody>
+          <a:bodyPr rtlCol="0" anchor="ctr"/>
+          <a:lstStyle/>
+          <a:p>
+            <a:pPr algn="ctr"/>
+            <a:endParaRPr lang="zh-CN" altLang="en-US"/>
+          </a:p>
+        </p:txBody>
+      </p:sp>
+      <p:sp>
+        <p:nvSpPr>
+          <p:cNvPr id="36" name="椭圆 35"/>
+          <p:cNvSpPr/>
+          <p:nvPr/>
+        </p:nvSpPr>
+        <p:spPr>
+          <a:xfrm>
+            <a:off x="7718176" y="5311832"/>
+            <a:ext cx="141317" cy="141317"/>
+          </a:xfrm>
+          <a:prstGeom prst="ellipse">
+            <a:avLst/>
+          </a:prstGeom>
+          <a:solidFill>
+            <a:schemeClr val="bg1"/>
+          </a:solidFill>
+          <a:ln>
+            <a:prstDash val="dash"/>
+          </a:ln>
+        </p:spPr>
+        <p:style>
+          <a:lnRef idx="2">
+            <a:schemeClr val="accent1">
+              <a:shade val="50000"/>
+            </a:schemeClr>
+          </a:lnRef>
+          <a:fillRef idx="1">
+            <a:schemeClr val="accent1"/>
+          </a:fillRef>
+          <a:effectRef idx="0">
+            <a:schemeClr val="accent1"/>
+          </a:effectRef>
+          <a:fontRef idx="minor">
+            <a:schemeClr val="lt1"/>
+          </a:fontRef>
+        </p:style>
+        <p:txBody>
+          <a:bodyPr rtlCol="0" anchor="ctr"/>
+          <a:lstStyle/>
+          <a:p>
+            <a:pPr algn="ctr"/>
+            <a:endParaRPr lang="zh-CN" altLang="en-US"/>
+          </a:p>
+        </p:txBody>
+      </p:sp>
+      <p:sp>
+        <p:nvSpPr>
+          <p:cNvPr id="37" name="椭圆 36"/>
+          <p:cNvSpPr/>
+          <p:nvPr/>
+        </p:nvSpPr>
+        <p:spPr>
+          <a:xfrm>
+            <a:off x="7952410" y="5311832"/>
+            <a:ext cx="141317" cy="141317"/>
+          </a:xfrm>
+          <a:prstGeom prst="ellipse">
+            <a:avLst/>
+          </a:prstGeom>
+          <a:solidFill>
+            <a:schemeClr val="bg1"/>
+          </a:solidFill>
+          <a:ln>
+            <a:prstDash val="dash"/>
+          </a:ln>
+        </p:spPr>
+        <p:style>
+          <a:lnRef idx="2">
+            <a:schemeClr val="accent1">
+              <a:shade val="50000"/>
+            </a:schemeClr>
+          </a:lnRef>
+          <a:fillRef idx="1">
+            <a:schemeClr val="accent1"/>
+          </a:fillRef>
+          <a:effectRef idx="0">
+            <a:schemeClr val="accent1"/>
+          </a:effectRef>
+          <a:fontRef idx="minor">
+            <a:schemeClr val="lt1"/>
+          </a:fontRef>
+        </p:style>
+        <p:txBody>
+          <a:bodyPr rtlCol="0" anchor="ctr"/>
+          <a:lstStyle/>
+          <a:p>
+            <a:pPr algn="ctr"/>
+            <a:endParaRPr lang="zh-CN" altLang="en-US"/>
+          </a:p>
+        </p:txBody>
+      </p:sp>
+      <p:sp>
+        <p:nvSpPr>
+          <p:cNvPr id="38" name="椭圆 37"/>
+          <p:cNvSpPr/>
+          <p:nvPr/>
+        </p:nvSpPr>
+        <p:spPr>
+          <a:xfrm>
+            <a:off x="8186644" y="5311832"/>
+            <a:ext cx="141317" cy="141317"/>
+          </a:xfrm>
+          <a:prstGeom prst="ellipse">
+            <a:avLst/>
+          </a:prstGeom>
+          <a:solidFill>
+            <a:schemeClr val="bg1"/>
+          </a:solidFill>
+          <a:ln>
+            <a:prstDash val="dash"/>
+          </a:ln>
+        </p:spPr>
+        <p:style>
+          <a:lnRef idx="2">
+            <a:schemeClr val="accent1">
+              <a:shade val="50000"/>
+            </a:schemeClr>
+          </a:lnRef>
+          <a:fillRef idx="1">
+            <a:schemeClr val="accent1"/>
+          </a:fillRef>
+          <a:effectRef idx="0">
+            <a:schemeClr val="accent1"/>
+          </a:effectRef>
+          <a:fontRef idx="minor">
+            <a:schemeClr val="lt1"/>
+          </a:fontRef>
+        </p:style>
+        <p:txBody>
+          <a:bodyPr rtlCol="0" anchor="ctr"/>
+          <a:lstStyle/>
+          <a:p>
+            <a:pPr algn="ctr"/>
+            <a:endParaRPr lang="zh-CN" altLang="en-US"/>
+          </a:p>
+        </p:txBody>
+      </p:sp>
+      <p:sp>
+        <p:nvSpPr>
+          <p:cNvPr id="39" name="椭圆 38"/>
+          <p:cNvSpPr/>
+          <p:nvPr/>
+        </p:nvSpPr>
+        <p:spPr>
+          <a:xfrm>
+            <a:off x="8420890" y="5311832"/>
+            <a:ext cx="141317" cy="141317"/>
+          </a:xfrm>
+          <a:prstGeom prst="ellipse">
+            <a:avLst/>
+          </a:prstGeom>
+          <a:solidFill>
+            <a:schemeClr val="bg1"/>
+          </a:solidFill>
+          <a:ln>
+            <a:prstDash val="dash"/>
+          </a:ln>
+        </p:spPr>
+        <p:style>
+          <a:lnRef idx="2">
+            <a:schemeClr val="accent1">
+              <a:shade val="50000"/>
+            </a:schemeClr>
+          </a:lnRef>
+          <a:fillRef idx="1">
+            <a:schemeClr val="accent1"/>
+          </a:fillRef>
+          <a:effectRef idx="0">
+            <a:schemeClr val="accent1"/>
+          </a:effectRef>
+          <a:fontRef idx="minor">
+            <a:schemeClr val="lt1"/>
+          </a:fontRef>
+        </p:style>
+        <p:txBody>
+          <a:bodyPr rtlCol="0" anchor="ctr"/>
+          <a:lstStyle/>
+          <a:p>
+            <a:pPr algn="ctr"/>
+            <a:endParaRPr lang="zh-CN" altLang="en-US"/>
+          </a:p>
+        </p:txBody>
+      </p:sp>
+      <p:sp>
+        <p:nvSpPr>
+          <p:cNvPr id="40" name="椭圆 39"/>
+          <p:cNvSpPr/>
+          <p:nvPr/>
+        </p:nvSpPr>
+        <p:spPr>
+          <a:xfrm>
+            <a:off x="1300941" y="4796443"/>
+            <a:ext cx="141317" cy="141317"/>
+          </a:xfrm>
+          <a:prstGeom prst="ellipse">
+            <a:avLst/>
+          </a:prstGeom>
+        </p:spPr>
+        <p:style>
+          <a:lnRef idx="2">
+            <a:schemeClr val="accent1">
+              <a:shade val="50000"/>
+            </a:schemeClr>
+          </a:lnRef>
+          <a:fillRef idx="1">
+            <a:schemeClr val="accent1"/>
+          </a:fillRef>
+          <a:effectRef idx="0">
+            <a:schemeClr val="accent1"/>
+          </a:effectRef>
+          <a:fontRef idx="minor">
+            <a:schemeClr val="lt1"/>
+          </a:fontRef>
+        </p:style>
+        <p:txBody>
+          <a:bodyPr rtlCol="0" anchor="ctr"/>
+          <a:lstStyle/>
+          <a:p>
+            <a:pPr algn="ctr"/>
+            <a:endParaRPr lang="zh-CN" altLang="en-US"/>
+          </a:p>
+        </p:txBody>
+      </p:sp>
+      <p:sp>
+        <p:nvSpPr>
+          <p:cNvPr id="41" name="椭圆 40"/>
+          <p:cNvSpPr/>
+          <p:nvPr/>
+        </p:nvSpPr>
+        <p:spPr>
+          <a:xfrm flipH="1">
+            <a:off x="1721009" y="4796444"/>
+            <a:ext cx="141318" cy="141316"/>
+          </a:xfrm>
+          <a:prstGeom prst="ellipse">
+            <a:avLst/>
+          </a:prstGeom>
+        </p:spPr>
+        <p:style>
+          <a:lnRef idx="2">
+            <a:schemeClr val="accent1">
+              <a:shade val="50000"/>
+            </a:schemeClr>
+          </a:lnRef>
+          <a:fillRef idx="1">
+            <a:schemeClr val="accent1"/>
+          </a:fillRef>
+          <a:effectRef idx="0">
+            <a:schemeClr val="accent1"/>
+          </a:effectRef>
+          <a:fontRef idx="minor">
+            <a:schemeClr val="lt1"/>
+          </a:fontRef>
+        </p:style>
+        <p:txBody>
+          <a:bodyPr rtlCol="0" anchor="ctr"/>
+          <a:lstStyle/>
+          <a:p>
+            <a:pPr algn="ctr"/>
+            <a:endParaRPr lang="zh-CN" altLang="en-US"/>
+          </a:p>
+        </p:txBody>
+      </p:sp>
+      <p:sp>
+        <p:nvSpPr>
+          <p:cNvPr id="42" name="椭圆 41"/>
+          <p:cNvSpPr/>
+          <p:nvPr/>
+        </p:nvSpPr>
+        <p:spPr>
+          <a:xfrm>
+            <a:off x="2223929" y="4796443"/>
+            <a:ext cx="141317" cy="141317"/>
+          </a:xfrm>
+          <a:prstGeom prst="ellipse">
+            <a:avLst/>
+          </a:prstGeom>
+        </p:spPr>
+        <p:style>
+          <a:lnRef idx="2">
+            <a:schemeClr val="accent1">
+              <a:shade val="50000"/>
+            </a:schemeClr>
+          </a:lnRef>
+          <a:fillRef idx="1">
+            <a:schemeClr val="accent1"/>
+          </a:fillRef>
+          <a:effectRef idx="0">
+            <a:schemeClr val="accent1"/>
+          </a:effectRef>
+          <a:fontRef idx="minor">
+            <a:schemeClr val="lt1"/>
+          </a:fontRef>
+        </p:style>
+        <p:txBody>
+          <a:bodyPr rtlCol="0" anchor="ctr"/>
+          <a:lstStyle/>
+          <a:p>
+            <a:pPr algn="ctr"/>
+            <a:endParaRPr lang="zh-CN" altLang="en-US"/>
+          </a:p>
+        </p:txBody>
+      </p:sp>
+      <p:sp>
+        <p:nvSpPr>
+          <p:cNvPr id="43" name="椭圆 42"/>
+          <p:cNvSpPr/>
+          <p:nvPr/>
+        </p:nvSpPr>
+        <p:spPr>
+          <a:xfrm flipH="1">
+            <a:off x="2679879" y="4796443"/>
+            <a:ext cx="141318" cy="141316"/>
+          </a:xfrm>
+          <a:prstGeom prst="ellipse">
+            <a:avLst/>
+          </a:prstGeom>
+        </p:spPr>
+        <p:style>
+          <a:lnRef idx="2">
+            <a:schemeClr val="accent1">
+              <a:shade val="50000"/>
+            </a:schemeClr>
+          </a:lnRef>
+          <a:fillRef idx="1">
+            <a:schemeClr val="accent1"/>
+          </a:fillRef>
+          <a:effectRef idx="0">
+            <a:schemeClr val="accent1"/>
+          </a:effectRef>
+          <a:fontRef idx="minor">
+            <a:schemeClr val="lt1"/>
+          </a:fontRef>
+        </p:style>
+        <p:txBody>
+          <a:bodyPr rtlCol="0" anchor="ctr"/>
+          <a:lstStyle/>
+          <a:p>
+            <a:pPr algn="ctr"/>
+            <a:endParaRPr lang="zh-CN" altLang="en-US"/>
+          </a:p>
+        </p:txBody>
+      </p:sp>
+      <p:sp>
+        <p:nvSpPr>
+          <p:cNvPr id="44" name="椭圆 43"/>
+          <p:cNvSpPr/>
+          <p:nvPr/>
+        </p:nvSpPr>
+        <p:spPr>
+          <a:xfrm>
+            <a:off x="3160865" y="4796442"/>
+            <a:ext cx="141317" cy="141317"/>
+          </a:xfrm>
+          <a:prstGeom prst="ellipse">
+            <a:avLst/>
+          </a:prstGeom>
+          <a:solidFill>
+            <a:schemeClr val="bg1"/>
+          </a:solidFill>
+          <a:ln>
+            <a:prstDash val="dash"/>
+          </a:ln>
+        </p:spPr>
+        <p:style>
+          <a:lnRef idx="2">
+            <a:schemeClr val="accent1">
+              <a:shade val="50000"/>
+            </a:schemeClr>
+          </a:lnRef>
+          <a:fillRef idx="1">
+            <a:schemeClr val="accent1"/>
+          </a:fillRef>
+          <a:effectRef idx="0">
+            <a:schemeClr val="accent1"/>
+          </a:effectRef>
+          <a:fontRef idx="minor">
+            <a:schemeClr val="lt1"/>
+          </a:fontRef>
+        </p:style>
+        <p:txBody>
+          <a:bodyPr rtlCol="0" anchor="ctr"/>
+          <a:lstStyle/>
+          <a:p>
+            <a:pPr algn="ctr"/>
+            <a:endParaRPr lang="zh-CN" altLang="en-US"/>
+          </a:p>
+        </p:txBody>
+      </p:sp>
+      <p:sp>
+        <p:nvSpPr>
+          <p:cNvPr id="45" name="椭圆 44"/>
+          <p:cNvSpPr/>
+          <p:nvPr/>
+        </p:nvSpPr>
+        <p:spPr>
+          <a:xfrm flipH="1">
+            <a:off x="3616815" y="4796443"/>
+            <a:ext cx="141318" cy="141316"/>
+          </a:xfrm>
+          <a:prstGeom prst="ellipse">
+            <a:avLst/>
+          </a:prstGeom>
+          <a:solidFill>
+            <a:schemeClr val="bg1"/>
+          </a:solidFill>
+          <a:ln>
+            <a:prstDash val="dash"/>
+          </a:ln>
+        </p:spPr>
+        <p:style>
+          <a:lnRef idx="2">
+            <a:schemeClr val="accent1">
+              <a:shade val="50000"/>
+            </a:schemeClr>
+          </a:lnRef>
+          <a:fillRef idx="1">
+            <a:schemeClr val="accent1"/>
+          </a:fillRef>
+          <a:effectRef idx="0">
+            <a:schemeClr val="accent1"/>
+          </a:effectRef>
+          <a:fontRef idx="minor">
+            <a:schemeClr val="lt1"/>
+          </a:fontRef>
+        </p:style>
+        <p:txBody>
+          <a:bodyPr rtlCol="0" anchor="ctr"/>
+          <a:lstStyle/>
+          <a:p>
+            <a:pPr algn="ctr"/>
+            <a:endParaRPr lang="zh-CN" altLang="en-US"/>
+          </a:p>
+        </p:txBody>
+      </p:sp>
+      <p:sp>
+        <p:nvSpPr>
+          <p:cNvPr id="46" name="椭圆 45"/>
+          <p:cNvSpPr/>
+          <p:nvPr/>
+        </p:nvSpPr>
+        <p:spPr>
+          <a:xfrm>
+            <a:off x="4072766" y="4796442"/>
+            <a:ext cx="141317" cy="141317"/>
+          </a:xfrm>
+          <a:prstGeom prst="ellipse">
+            <a:avLst/>
+          </a:prstGeom>
+          <a:solidFill>
+            <a:schemeClr val="bg1"/>
+          </a:solidFill>
+          <a:ln>
+            <a:prstDash val="dash"/>
+          </a:ln>
+        </p:spPr>
+        <p:style>
+          <a:lnRef idx="2">
+            <a:schemeClr val="accent1">
+              <a:shade val="50000"/>
+            </a:schemeClr>
+          </a:lnRef>
+          <a:fillRef idx="1">
+            <a:schemeClr val="accent1"/>
+          </a:fillRef>
+          <a:effectRef idx="0">
+            <a:schemeClr val="accent1"/>
+          </a:effectRef>
+          <a:fontRef idx="minor">
+            <a:schemeClr val="lt1"/>
+          </a:fontRef>
+        </p:style>
+        <p:txBody>
+          <a:bodyPr rtlCol="0" anchor="ctr"/>
+          <a:lstStyle/>
+          <a:p>
+            <a:pPr algn="ctr"/>
+            <a:endParaRPr lang="zh-CN" altLang="en-US"/>
+          </a:p>
+        </p:txBody>
+      </p:sp>
+      <p:sp>
+        <p:nvSpPr>
+          <p:cNvPr id="47" name="椭圆 46"/>
+          <p:cNvSpPr/>
+          <p:nvPr/>
+        </p:nvSpPr>
+        <p:spPr>
+          <a:xfrm flipH="1">
+            <a:off x="4531816" y="4796443"/>
+            <a:ext cx="141318" cy="141316"/>
+          </a:xfrm>
+          <a:prstGeom prst="ellipse">
+            <a:avLst/>
+          </a:prstGeom>
+          <a:solidFill>
+            <a:schemeClr val="bg1"/>
+          </a:solidFill>
+          <a:ln>
+            <a:prstDash val="dash"/>
+          </a:ln>
+        </p:spPr>
+        <p:style>
+          <a:lnRef idx="2">
+            <a:schemeClr val="accent1">
+              <a:shade val="50000"/>
+            </a:schemeClr>
+          </a:lnRef>
+          <a:fillRef idx="1">
+            <a:schemeClr val="accent1"/>
+          </a:fillRef>
+          <a:effectRef idx="0">
+            <a:schemeClr val="accent1"/>
+          </a:effectRef>
+          <a:fontRef idx="minor">
+            <a:schemeClr val="lt1"/>
+          </a:fontRef>
+        </p:style>
+        <p:txBody>
+          <a:bodyPr rtlCol="0" anchor="ctr"/>
+          <a:lstStyle/>
+          <a:p>
+            <a:pPr algn="ctr"/>
+            <a:endParaRPr lang="zh-CN" altLang="en-US"/>
+          </a:p>
+        </p:txBody>
+      </p:sp>
+      <p:sp>
+        <p:nvSpPr>
+          <p:cNvPr id="48" name="椭圆 47"/>
+          <p:cNvSpPr/>
+          <p:nvPr/>
+        </p:nvSpPr>
+        <p:spPr>
+          <a:xfrm>
+            <a:off x="5026427" y="4796443"/>
+            <a:ext cx="141317" cy="141317"/>
+          </a:xfrm>
+          <a:prstGeom prst="ellipse">
+            <a:avLst/>
+          </a:prstGeom>
+          <a:solidFill>
+            <a:schemeClr val="bg1"/>
+          </a:solidFill>
+          <a:ln>
+            <a:prstDash val="dash"/>
+          </a:ln>
+        </p:spPr>
+        <p:style>
+          <a:lnRef idx="2">
+            <a:schemeClr val="accent1">
+              <a:shade val="50000"/>
+            </a:schemeClr>
+          </a:lnRef>
+          <a:fillRef idx="1">
+            <a:schemeClr val="accent1"/>
+          </a:fillRef>
+          <a:effectRef idx="0">
+            <a:schemeClr val="accent1"/>
+          </a:effectRef>
+          <a:fontRef idx="minor">
+            <a:schemeClr val="lt1"/>
+          </a:fontRef>
+        </p:style>
+        <p:txBody>
+          <a:bodyPr rtlCol="0" anchor="ctr"/>
+          <a:lstStyle/>
+          <a:p>
+            <a:pPr algn="ctr"/>
+            <a:endParaRPr lang="zh-CN" altLang="en-US"/>
+          </a:p>
+        </p:txBody>
+      </p:sp>
+      <p:sp>
+        <p:nvSpPr>
+          <p:cNvPr id="49" name="椭圆 48"/>
+          <p:cNvSpPr/>
+          <p:nvPr/>
+        </p:nvSpPr>
+        <p:spPr>
+          <a:xfrm flipH="1">
+            <a:off x="5446495" y="4796444"/>
+            <a:ext cx="141318" cy="141316"/>
+          </a:xfrm>
+          <a:prstGeom prst="ellipse">
+            <a:avLst/>
+          </a:prstGeom>
+          <a:solidFill>
+            <a:schemeClr val="bg1"/>
+          </a:solidFill>
+          <a:ln>
+            <a:prstDash val="dash"/>
+          </a:ln>
+        </p:spPr>
+        <p:style>
+          <a:lnRef idx="2">
+            <a:schemeClr val="accent1">
+              <a:shade val="50000"/>
+            </a:schemeClr>
+          </a:lnRef>
+          <a:fillRef idx="1">
+            <a:schemeClr val="accent1"/>
+          </a:fillRef>
+          <a:effectRef idx="0">
+            <a:schemeClr val="accent1"/>
+          </a:effectRef>
+          <a:fontRef idx="minor">
+            <a:schemeClr val="lt1"/>
+          </a:fontRef>
+        </p:style>
+        <p:txBody>
+          <a:bodyPr rtlCol="0" anchor="ctr"/>
+          <a:lstStyle/>
+          <a:p>
+            <a:pPr algn="ctr"/>
+            <a:endParaRPr lang="zh-CN" altLang="en-US"/>
+          </a:p>
+        </p:txBody>
+      </p:sp>
+      <p:sp>
+        <p:nvSpPr>
+          <p:cNvPr id="50" name="椭圆 49"/>
+          <p:cNvSpPr/>
+          <p:nvPr/>
+        </p:nvSpPr>
+        <p:spPr>
+          <a:xfrm>
+            <a:off x="5949415" y="4796443"/>
+            <a:ext cx="141317" cy="141317"/>
+          </a:xfrm>
+          <a:prstGeom prst="ellipse">
+            <a:avLst/>
+          </a:prstGeom>
+          <a:solidFill>
+            <a:schemeClr val="bg1"/>
+          </a:solidFill>
+          <a:ln>
+            <a:prstDash val="dash"/>
+          </a:ln>
+        </p:spPr>
+        <p:style>
+          <a:lnRef idx="2">
+            <a:schemeClr val="accent1">
+              <a:shade val="50000"/>
+            </a:schemeClr>
+          </a:lnRef>
+          <a:fillRef idx="1">
+            <a:schemeClr val="accent1"/>
+          </a:fillRef>
+          <a:effectRef idx="0">
+            <a:schemeClr val="accent1"/>
+          </a:effectRef>
+          <a:fontRef idx="minor">
+            <a:schemeClr val="lt1"/>
+          </a:fontRef>
+        </p:style>
+        <p:txBody>
+          <a:bodyPr rtlCol="0" anchor="ctr"/>
+          <a:lstStyle/>
+          <a:p>
+            <a:pPr algn="ctr"/>
+            <a:endParaRPr lang="zh-CN" altLang="en-US"/>
+          </a:p>
+        </p:txBody>
+      </p:sp>
+      <p:sp>
+        <p:nvSpPr>
+          <p:cNvPr id="51" name="椭圆 50"/>
+          <p:cNvSpPr/>
+          <p:nvPr/>
+        </p:nvSpPr>
+        <p:spPr>
+          <a:xfrm flipH="1">
+            <a:off x="6405365" y="4796443"/>
+            <a:ext cx="141318" cy="141316"/>
+          </a:xfrm>
+          <a:prstGeom prst="ellipse">
+            <a:avLst/>
+          </a:prstGeom>
+          <a:solidFill>
+            <a:schemeClr val="bg1"/>
+          </a:solidFill>
+          <a:ln>
+            <a:prstDash val="dash"/>
+          </a:ln>
+        </p:spPr>
+        <p:style>
+          <a:lnRef idx="2">
+            <a:schemeClr val="accent1">
+              <a:shade val="50000"/>
+            </a:schemeClr>
+          </a:lnRef>
+          <a:fillRef idx="1">
+            <a:schemeClr val="accent1"/>
+          </a:fillRef>
+          <a:effectRef idx="0">
+            <a:schemeClr val="accent1"/>
+          </a:effectRef>
+          <a:fontRef idx="minor">
+            <a:schemeClr val="lt1"/>
+          </a:fontRef>
+        </p:style>
+        <p:txBody>
+          <a:bodyPr rtlCol="0" anchor="ctr"/>
+          <a:lstStyle/>
+          <a:p>
+            <a:pPr algn="ctr"/>
+            <a:endParaRPr lang="zh-CN" altLang="en-US"/>
+          </a:p>
+        </p:txBody>
+      </p:sp>
+      <p:sp>
+        <p:nvSpPr>
+          <p:cNvPr id="52" name="椭圆 51"/>
+          <p:cNvSpPr/>
+          <p:nvPr/>
+        </p:nvSpPr>
+        <p:spPr>
+          <a:xfrm>
+            <a:off x="6886351" y="4796442"/>
+            <a:ext cx="141317" cy="141317"/>
+          </a:xfrm>
+          <a:prstGeom prst="ellipse">
+            <a:avLst/>
+          </a:prstGeom>
+          <a:solidFill>
+            <a:schemeClr val="bg1"/>
+          </a:solidFill>
+          <a:ln>
+            <a:prstDash val="dash"/>
+          </a:ln>
+        </p:spPr>
+        <p:style>
+          <a:lnRef idx="2">
+            <a:schemeClr val="accent1">
+              <a:shade val="50000"/>
+            </a:schemeClr>
+          </a:lnRef>
+          <a:fillRef idx="1">
+            <a:schemeClr val="accent1"/>
+          </a:fillRef>
+          <a:effectRef idx="0">
+            <a:schemeClr val="accent1"/>
+          </a:effectRef>
+          <a:fontRef idx="minor">
+            <a:schemeClr val="lt1"/>
+          </a:fontRef>
+        </p:style>
+        <p:txBody>
+          <a:bodyPr rtlCol="0" anchor="ctr"/>
+          <a:lstStyle/>
+          <a:p>
+            <a:pPr algn="ctr"/>
+            <a:endParaRPr lang="zh-CN" altLang="en-US"/>
+          </a:p>
+        </p:txBody>
+      </p:sp>
+      <p:sp>
+        <p:nvSpPr>
+          <p:cNvPr id="53" name="椭圆 52"/>
+          <p:cNvSpPr/>
+          <p:nvPr/>
+        </p:nvSpPr>
+        <p:spPr>
+          <a:xfrm flipH="1">
+            <a:off x="7342301" y="4796443"/>
+            <a:ext cx="141318" cy="141316"/>
+          </a:xfrm>
+          <a:prstGeom prst="ellipse">
+            <a:avLst/>
+          </a:prstGeom>
+          <a:solidFill>
+            <a:schemeClr val="bg1"/>
+          </a:solidFill>
+          <a:ln>
+            <a:prstDash val="dash"/>
+          </a:ln>
+        </p:spPr>
+        <p:style>
+          <a:lnRef idx="2">
+            <a:schemeClr val="accent1">
+              <a:shade val="50000"/>
+            </a:schemeClr>
+          </a:lnRef>
+          <a:fillRef idx="1">
+            <a:schemeClr val="accent1"/>
+          </a:fillRef>
+          <a:effectRef idx="0">
+            <a:schemeClr val="accent1"/>
+          </a:effectRef>
+          <a:fontRef idx="minor">
+            <a:schemeClr val="lt1"/>
+          </a:fontRef>
+        </p:style>
+        <p:txBody>
+          <a:bodyPr rtlCol="0" anchor="ctr"/>
+          <a:lstStyle/>
+          <a:p>
+            <a:pPr algn="ctr"/>
+            <a:endParaRPr lang="zh-CN" altLang="en-US"/>
+          </a:p>
+        </p:txBody>
+      </p:sp>
+      <p:sp>
+        <p:nvSpPr>
+          <p:cNvPr id="54" name="椭圆 53"/>
+          <p:cNvSpPr/>
+          <p:nvPr/>
+        </p:nvSpPr>
+        <p:spPr>
+          <a:xfrm>
+            <a:off x="7798252" y="4796442"/>
+            <a:ext cx="141317" cy="141317"/>
+          </a:xfrm>
+          <a:prstGeom prst="ellipse">
+            <a:avLst/>
+          </a:prstGeom>
+          <a:solidFill>
+            <a:schemeClr val="bg1"/>
+          </a:solidFill>
+          <a:ln>
+            <a:prstDash val="dash"/>
+          </a:ln>
+        </p:spPr>
+        <p:style>
+          <a:lnRef idx="2">
+            <a:schemeClr val="accent1">
+              <a:shade val="50000"/>
+            </a:schemeClr>
+          </a:lnRef>
+          <a:fillRef idx="1">
+            <a:schemeClr val="accent1"/>
+          </a:fillRef>
+          <a:effectRef idx="0">
+            <a:schemeClr val="accent1"/>
+          </a:effectRef>
+          <a:fontRef idx="minor">
+            <a:schemeClr val="lt1"/>
+          </a:fontRef>
+        </p:style>
+        <p:txBody>
+          <a:bodyPr rtlCol="0" anchor="ctr"/>
+          <a:lstStyle/>
+          <a:p>
+            <a:pPr algn="ctr"/>
+            <a:endParaRPr lang="zh-CN" altLang="en-US"/>
+          </a:p>
+        </p:txBody>
+      </p:sp>
+      <p:sp>
+        <p:nvSpPr>
+          <p:cNvPr id="55" name="椭圆 54"/>
+          <p:cNvSpPr/>
+          <p:nvPr/>
+        </p:nvSpPr>
+        <p:spPr>
+          <a:xfrm flipH="1">
+            <a:off x="8257302" y="4796443"/>
+            <a:ext cx="141318" cy="141316"/>
+          </a:xfrm>
+          <a:prstGeom prst="ellipse">
+            <a:avLst/>
+          </a:prstGeom>
+          <a:solidFill>
+            <a:schemeClr val="bg1"/>
+          </a:solidFill>
+          <a:ln>
+            <a:prstDash val="dash"/>
+          </a:ln>
+        </p:spPr>
+        <p:style>
+          <a:lnRef idx="2">
+            <a:schemeClr val="accent1">
+              <a:shade val="50000"/>
+            </a:schemeClr>
+          </a:lnRef>
+          <a:fillRef idx="1">
+            <a:schemeClr val="accent1"/>
+          </a:fillRef>
+          <a:effectRef idx="0">
+            <a:schemeClr val="accent1"/>
+          </a:effectRef>
+          <a:fontRef idx="minor">
+            <a:schemeClr val="lt1"/>
+          </a:fontRef>
+        </p:style>
+        <p:txBody>
+          <a:bodyPr rtlCol="0" anchor="ctr"/>
+          <a:lstStyle/>
+          <a:p>
+            <a:pPr algn="ctr"/>
+            <a:endParaRPr lang="zh-CN" altLang="en-US"/>
+          </a:p>
+        </p:txBody>
+      </p:sp>
+      <p:sp>
+        <p:nvSpPr>
+          <p:cNvPr id="56" name="椭圆 55"/>
+          <p:cNvSpPr/>
+          <p:nvPr/>
+        </p:nvSpPr>
+        <p:spPr>
+          <a:xfrm>
+            <a:off x="1491207" y="4239491"/>
+            <a:ext cx="141317" cy="141317"/>
+          </a:xfrm>
+          <a:prstGeom prst="ellipse">
+            <a:avLst/>
+          </a:prstGeom>
+        </p:spPr>
+        <p:style>
+          <a:lnRef idx="2">
+            <a:schemeClr val="accent1">
+              <a:shade val="50000"/>
+            </a:schemeClr>
+          </a:lnRef>
+          <a:fillRef idx="1">
+            <a:schemeClr val="accent1"/>
+          </a:fillRef>
+          <a:effectRef idx="0">
+            <a:schemeClr val="accent1"/>
+          </a:effectRef>
+          <a:fontRef idx="minor">
+            <a:schemeClr val="lt1"/>
+          </a:fontRef>
+        </p:style>
+        <p:txBody>
+          <a:bodyPr rtlCol="0" anchor="ctr"/>
+          <a:lstStyle/>
+          <a:p>
+            <a:pPr algn="ctr"/>
+            <a:endParaRPr lang="zh-CN" altLang="en-US"/>
+          </a:p>
+        </p:txBody>
+      </p:sp>
+      <p:sp>
+        <p:nvSpPr>
+          <p:cNvPr id="57" name="椭圆 56"/>
+          <p:cNvSpPr/>
+          <p:nvPr/>
+        </p:nvSpPr>
+        <p:spPr>
+          <a:xfrm>
+            <a:off x="2445420" y="4239491"/>
+            <a:ext cx="141317" cy="141317"/>
+          </a:xfrm>
+          <a:prstGeom prst="ellipse">
+            <a:avLst/>
+          </a:prstGeom>
+        </p:spPr>
+        <p:style>
+          <a:lnRef idx="2">
+            <a:schemeClr val="accent1">
+              <a:shade val="50000"/>
+            </a:schemeClr>
+          </a:lnRef>
+          <a:fillRef idx="1">
+            <a:schemeClr val="accent1"/>
+          </a:fillRef>
+          <a:effectRef idx="0">
+            <a:schemeClr val="accent1"/>
+          </a:effectRef>
+          <a:fontRef idx="minor">
+            <a:schemeClr val="lt1"/>
+          </a:fontRef>
+        </p:style>
+        <p:txBody>
+          <a:bodyPr rtlCol="0" anchor="ctr"/>
+          <a:lstStyle/>
+          <a:p>
+            <a:pPr algn="ctr"/>
+            <a:endParaRPr lang="zh-CN" altLang="en-US"/>
+          </a:p>
+        </p:txBody>
+      </p:sp>
+      <p:sp>
+        <p:nvSpPr>
+          <p:cNvPr id="58" name="椭圆 57"/>
+          <p:cNvSpPr/>
+          <p:nvPr/>
+        </p:nvSpPr>
+        <p:spPr>
+          <a:xfrm>
+            <a:off x="3398609" y="4272742"/>
+            <a:ext cx="101050" cy="108066"/>
+          </a:xfrm>
+          <a:prstGeom prst="ellipse">
+            <a:avLst/>
+          </a:prstGeom>
+        </p:spPr>
+        <p:style>
+          <a:lnRef idx="2">
+            <a:schemeClr val="accent1">
+              <a:shade val="50000"/>
+            </a:schemeClr>
+          </a:lnRef>
+          <a:fillRef idx="1">
+            <a:schemeClr val="accent1"/>
+          </a:fillRef>
+          <a:effectRef idx="0">
+            <a:schemeClr val="accent1"/>
+          </a:effectRef>
+          <a:fontRef idx="minor">
+            <a:schemeClr val="lt1"/>
+          </a:fontRef>
+        </p:style>
+        <p:txBody>
+          <a:bodyPr rtlCol="0" anchor="ctr"/>
+          <a:lstStyle/>
+          <a:p>
+            <a:pPr algn="ctr"/>
+            <a:endParaRPr lang="zh-CN" altLang="en-US"/>
+          </a:p>
+        </p:txBody>
+      </p:sp>
+      <p:sp>
+        <p:nvSpPr>
+          <p:cNvPr id="59" name="椭圆 58"/>
+          <p:cNvSpPr/>
+          <p:nvPr/>
+        </p:nvSpPr>
+        <p:spPr>
+          <a:xfrm>
+            <a:off x="4352821" y="4239491"/>
+            <a:ext cx="141317" cy="141317"/>
+          </a:xfrm>
+          <a:prstGeom prst="ellipse">
+            <a:avLst/>
+          </a:prstGeom>
+        </p:spPr>
+        <p:style>
+          <a:lnRef idx="2">
+            <a:schemeClr val="accent1">
+              <a:shade val="50000"/>
+            </a:schemeClr>
+          </a:lnRef>
+          <a:fillRef idx="1">
+            <a:schemeClr val="accent1"/>
+          </a:fillRef>
+          <a:effectRef idx="0">
+            <a:schemeClr val="accent1"/>
+          </a:effectRef>
+          <a:fontRef idx="minor">
+            <a:schemeClr val="lt1"/>
+          </a:fontRef>
+        </p:style>
+        <p:txBody>
+          <a:bodyPr rtlCol="0" anchor="ctr"/>
+          <a:lstStyle/>
+          <a:p>
+            <a:pPr algn="ctr"/>
+            <a:endParaRPr lang="zh-CN" altLang="en-US"/>
+          </a:p>
+        </p:txBody>
+      </p:sp>
+      <p:sp>
+        <p:nvSpPr>
+          <p:cNvPr id="60" name="椭圆 59"/>
+          <p:cNvSpPr/>
+          <p:nvPr/>
+        </p:nvSpPr>
+        <p:spPr>
+          <a:xfrm>
+            <a:off x="5232113" y="4239491"/>
+            <a:ext cx="141317" cy="141317"/>
+          </a:xfrm>
+          <a:prstGeom prst="ellipse">
+            <a:avLst/>
+          </a:prstGeom>
+          <a:solidFill>
+            <a:schemeClr val="bg1"/>
+          </a:solidFill>
+          <a:ln>
+            <a:prstDash val="dash"/>
+          </a:ln>
+        </p:spPr>
+        <p:style>
+          <a:lnRef idx="2">
+            <a:schemeClr val="accent1">
+              <a:shade val="50000"/>
+            </a:schemeClr>
+          </a:lnRef>
+          <a:fillRef idx="1">
+            <a:schemeClr val="accent1"/>
+          </a:fillRef>
+          <a:effectRef idx="0">
+            <a:schemeClr val="accent1"/>
+          </a:effectRef>
+          <a:fontRef idx="minor">
+            <a:schemeClr val="lt1"/>
+          </a:fontRef>
+        </p:style>
+        <p:txBody>
+          <a:bodyPr rtlCol="0" anchor="ctr"/>
+          <a:lstStyle/>
+          <a:p>
+            <a:pPr algn="ctr"/>
+            <a:endParaRPr lang="zh-CN" altLang="en-US"/>
+          </a:p>
+        </p:txBody>
+      </p:sp>
+      <p:sp>
+        <p:nvSpPr>
+          <p:cNvPr id="61" name="椭圆 60"/>
+          <p:cNvSpPr/>
+          <p:nvPr/>
+        </p:nvSpPr>
+        <p:spPr>
+          <a:xfrm>
+            <a:off x="6186326" y="4239491"/>
+            <a:ext cx="141317" cy="141317"/>
+          </a:xfrm>
+          <a:prstGeom prst="ellipse">
+            <a:avLst/>
+          </a:prstGeom>
+          <a:solidFill>
+            <a:schemeClr val="bg1"/>
+          </a:solidFill>
+          <a:ln>
+            <a:prstDash val="dash"/>
+          </a:ln>
+        </p:spPr>
+        <p:style>
+          <a:lnRef idx="2">
+            <a:schemeClr val="accent1">
+              <a:shade val="50000"/>
+            </a:schemeClr>
+          </a:lnRef>
+          <a:fillRef idx="1">
+            <a:schemeClr val="accent1"/>
+          </a:fillRef>
+          <a:effectRef idx="0">
+            <a:schemeClr val="accent1"/>
+          </a:effectRef>
+          <a:fontRef idx="minor">
+            <a:schemeClr val="lt1"/>
+          </a:fontRef>
+        </p:style>
+        <p:txBody>
+          <a:bodyPr rtlCol="0" anchor="ctr"/>
+          <a:lstStyle/>
+          <a:p>
+            <a:pPr algn="ctr"/>
+            <a:endParaRPr lang="zh-CN" altLang="en-US"/>
+          </a:p>
+        </p:txBody>
+      </p:sp>
+      <p:sp>
+        <p:nvSpPr>
+          <p:cNvPr id="62" name="椭圆 61"/>
+          <p:cNvSpPr/>
+          <p:nvPr/>
+        </p:nvSpPr>
+        <p:spPr>
+          <a:xfrm>
+            <a:off x="7139514" y="4239491"/>
+            <a:ext cx="141317" cy="141317"/>
+          </a:xfrm>
+          <a:prstGeom prst="ellipse">
+            <a:avLst/>
+          </a:prstGeom>
+          <a:solidFill>
+            <a:schemeClr val="bg1"/>
+          </a:solidFill>
+          <a:ln>
+            <a:prstDash val="dash"/>
+          </a:ln>
+        </p:spPr>
+        <p:style>
+          <a:lnRef idx="2">
+            <a:schemeClr val="accent1">
+              <a:shade val="50000"/>
+            </a:schemeClr>
+          </a:lnRef>
+          <a:fillRef idx="1">
+            <a:schemeClr val="accent1"/>
+          </a:fillRef>
+          <a:effectRef idx="0">
+            <a:schemeClr val="accent1"/>
+          </a:effectRef>
+          <a:fontRef idx="minor">
+            <a:schemeClr val="lt1"/>
+          </a:fontRef>
+        </p:style>
+        <p:txBody>
+          <a:bodyPr rtlCol="0" anchor="ctr"/>
+          <a:lstStyle/>
+          <a:p>
+            <a:pPr algn="ctr"/>
+            <a:endParaRPr lang="zh-CN" altLang="en-US"/>
+          </a:p>
+        </p:txBody>
+      </p:sp>
+      <p:sp>
+        <p:nvSpPr>
+          <p:cNvPr id="63" name="椭圆 62"/>
+          <p:cNvSpPr/>
+          <p:nvPr/>
+        </p:nvSpPr>
+        <p:spPr>
+          <a:xfrm>
+            <a:off x="8029988" y="4239491"/>
+            <a:ext cx="141317" cy="141317"/>
+          </a:xfrm>
+          <a:prstGeom prst="ellipse">
+            <a:avLst/>
+          </a:prstGeom>
+          <a:solidFill>
+            <a:schemeClr val="bg1"/>
+          </a:solidFill>
+          <a:ln>
+            <a:prstDash val="dash"/>
+          </a:ln>
+        </p:spPr>
+        <p:style>
+          <a:lnRef idx="2">
+            <a:schemeClr val="accent1">
+              <a:shade val="50000"/>
+            </a:schemeClr>
+          </a:lnRef>
+          <a:fillRef idx="1">
+            <a:schemeClr val="accent1"/>
+          </a:fillRef>
+          <a:effectRef idx="0">
+            <a:schemeClr val="accent1"/>
+          </a:effectRef>
+          <a:fontRef idx="minor">
+            <a:schemeClr val="lt1"/>
+          </a:fontRef>
+        </p:style>
+        <p:txBody>
+          <a:bodyPr rtlCol="0" anchor="ctr"/>
+          <a:lstStyle/>
+          <a:p>
+            <a:pPr algn="ctr"/>
+            <a:endParaRPr lang="zh-CN" altLang="en-US"/>
+          </a:p>
+        </p:txBody>
+      </p:sp>
+      <p:sp>
+        <p:nvSpPr>
+          <p:cNvPr id="64" name="椭圆 63"/>
+          <p:cNvSpPr/>
+          <p:nvPr/>
+        </p:nvSpPr>
+        <p:spPr>
+          <a:xfrm>
+            <a:off x="1955243" y="3433156"/>
+            <a:ext cx="141317" cy="141317"/>
+          </a:xfrm>
+          <a:prstGeom prst="ellipse">
+            <a:avLst/>
+          </a:prstGeom>
+        </p:spPr>
+        <p:style>
+          <a:lnRef idx="2">
+            <a:schemeClr val="accent1">
+              <a:shade val="50000"/>
+            </a:schemeClr>
+          </a:lnRef>
+          <a:fillRef idx="1">
+            <a:schemeClr val="accent1"/>
+          </a:fillRef>
+          <a:effectRef idx="0">
+            <a:schemeClr val="accent1"/>
+          </a:effectRef>
+          <a:fontRef idx="minor">
+            <a:schemeClr val="lt1"/>
+          </a:fontRef>
+        </p:style>
+        <p:txBody>
+          <a:bodyPr rtlCol="0" anchor="ctr"/>
+          <a:lstStyle/>
+          <a:p>
+            <a:pPr algn="ctr"/>
+            <a:endParaRPr lang="zh-CN" altLang="en-US"/>
+          </a:p>
+        </p:txBody>
+      </p:sp>
+      <p:sp>
+        <p:nvSpPr>
+          <p:cNvPr id="65" name="椭圆 64"/>
+          <p:cNvSpPr/>
+          <p:nvPr/>
+        </p:nvSpPr>
+        <p:spPr>
+          <a:xfrm>
+            <a:off x="4743792" y="2219497"/>
+            <a:ext cx="141317" cy="141317"/>
+          </a:xfrm>
+          <a:prstGeom prst="ellipse">
+            <a:avLst/>
+          </a:prstGeom>
+        </p:spPr>
+        <p:style>
+          <a:lnRef idx="2">
+            <a:schemeClr val="accent1">
+              <a:shade val="50000"/>
+            </a:schemeClr>
+          </a:lnRef>
+          <a:fillRef idx="1">
+            <a:schemeClr val="accent1"/>
+          </a:fillRef>
+          <a:effectRef idx="0">
+            <a:schemeClr val="accent1"/>
+          </a:effectRef>
+          <a:fontRef idx="minor">
+            <a:schemeClr val="lt1"/>
+          </a:fontRef>
+        </p:style>
+        <p:txBody>
+          <a:bodyPr rtlCol="0" anchor="ctr"/>
+          <a:lstStyle/>
+          <a:p>
+            <a:pPr algn="ctr"/>
+            <a:endParaRPr lang="zh-CN" altLang="en-US"/>
+          </a:p>
+        </p:txBody>
+      </p:sp>
+      <p:sp>
+        <p:nvSpPr>
+          <p:cNvPr id="66" name="椭圆 65"/>
+          <p:cNvSpPr/>
+          <p:nvPr/>
+        </p:nvSpPr>
+        <p:spPr>
+          <a:xfrm>
+            <a:off x="5658927" y="3433154"/>
+            <a:ext cx="141317" cy="141317"/>
+          </a:xfrm>
+          <a:prstGeom prst="ellipse">
+            <a:avLst/>
+          </a:prstGeom>
+        </p:spPr>
+        <p:style>
+          <a:lnRef idx="2">
+            <a:schemeClr val="accent1">
+              <a:shade val="50000"/>
+            </a:schemeClr>
+          </a:lnRef>
+          <a:fillRef idx="1">
+            <a:schemeClr val="accent1"/>
+          </a:fillRef>
+          <a:effectRef idx="0">
+            <a:schemeClr val="accent1"/>
+          </a:effectRef>
+          <a:fontRef idx="minor">
+            <a:schemeClr val="lt1"/>
+          </a:fontRef>
+        </p:style>
+        <p:txBody>
+          <a:bodyPr rtlCol="0" anchor="ctr"/>
+          <a:lstStyle/>
+          <a:p>
+            <a:pPr algn="ctr"/>
+            <a:endParaRPr lang="zh-CN" altLang="en-US"/>
+          </a:p>
+        </p:txBody>
+      </p:sp>
+      <p:sp>
+        <p:nvSpPr>
+          <p:cNvPr id="67" name="椭圆 66"/>
+          <p:cNvSpPr/>
+          <p:nvPr/>
+        </p:nvSpPr>
+        <p:spPr>
+          <a:xfrm>
+            <a:off x="7554600" y="3433153"/>
+            <a:ext cx="141317" cy="141317"/>
+          </a:xfrm>
+          <a:prstGeom prst="ellipse">
+            <a:avLst/>
+          </a:prstGeom>
+        </p:spPr>
+        <p:style>
+          <a:lnRef idx="2">
+            <a:schemeClr val="accent1">
+              <a:shade val="50000"/>
+            </a:schemeClr>
+          </a:lnRef>
+          <a:fillRef idx="1">
+            <a:schemeClr val="accent1"/>
+          </a:fillRef>
+          <a:effectRef idx="0">
+            <a:schemeClr val="accent1"/>
+          </a:effectRef>
+          <a:fontRef idx="minor">
+            <a:schemeClr val="lt1"/>
+          </a:fontRef>
+        </p:style>
+        <p:txBody>
+          <a:bodyPr rtlCol="0" anchor="ctr"/>
+          <a:lstStyle/>
+          <a:p>
+            <a:pPr algn="ctr"/>
+            <a:endParaRPr lang="zh-CN" altLang="en-US"/>
+          </a:p>
+        </p:txBody>
+      </p:sp>
+      <p:sp>
+        <p:nvSpPr>
+          <p:cNvPr id="68" name="椭圆 67"/>
+          <p:cNvSpPr/>
+          <p:nvPr/>
+        </p:nvSpPr>
+        <p:spPr>
+          <a:xfrm>
+            <a:off x="2940579" y="2867889"/>
+            <a:ext cx="141317" cy="141317"/>
+          </a:xfrm>
+          <a:prstGeom prst="ellipse">
+            <a:avLst/>
+          </a:prstGeom>
+        </p:spPr>
+        <p:style>
+          <a:lnRef idx="2">
+            <a:schemeClr val="accent1">
+              <a:shade val="50000"/>
+            </a:schemeClr>
+          </a:lnRef>
+          <a:fillRef idx="1">
+            <a:schemeClr val="accent1"/>
+          </a:fillRef>
+          <a:effectRef idx="0">
+            <a:schemeClr val="accent1"/>
+          </a:effectRef>
+          <a:fontRef idx="minor">
+            <a:schemeClr val="lt1"/>
+          </a:fontRef>
+        </p:style>
+        <p:txBody>
+          <a:bodyPr rtlCol="0" anchor="ctr"/>
+          <a:lstStyle/>
+          <a:p>
+            <a:pPr algn="ctr"/>
+            <a:endParaRPr lang="zh-CN" altLang="en-US"/>
+          </a:p>
+        </p:txBody>
+      </p:sp>
+      <p:sp>
+        <p:nvSpPr>
+          <p:cNvPr id="69" name="椭圆 68"/>
+          <p:cNvSpPr/>
+          <p:nvPr/>
+        </p:nvSpPr>
+        <p:spPr>
+          <a:xfrm>
+            <a:off x="6688323" y="2867889"/>
+            <a:ext cx="141317" cy="141317"/>
+          </a:xfrm>
+          <a:prstGeom prst="ellipse">
+            <a:avLst/>
+          </a:prstGeom>
+        </p:spPr>
+        <p:style>
+          <a:lnRef idx="2">
+            <a:schemeClr val="accent1">
+              <a:shade val="50000"/>
+            </a:schemeClr>
+          </a:lnRef>
+          <a:fillRef idx="1">
+            <a:schemeClr val="accent1"/>
+          </a:fillRef>
+          <a:effectRef idx="0">
+            <a:schemeClr val="accent1"/>
+          </a:effectRef>
+          <a:fontRef idx="minor">
+            <a:schemeClr val="lt1"/>
+          </a:fontRef>
+        </p:style>
+        <p:txBody>
+          <a:bodyPr rtlCol="0" anchor="ctr"/>
+          <a:lstStyle/>
+          <a:p>
+            <a:pPr algn="ctr"/>
+            <a:endParaRPr lang="zh-CN" altLang="en-US"/>
+          </a:p>
+        </p:txBody>
+      </p:sp>
+      <p:cxnSp>
+        <p:nvCxnSpPr>
+          <p:cNvPr id="70" name="直接箭头连接符 69"/>
+          <p:cNvCxnSpPr>
+            <a:stCxn id="65" idx="3"/>
+            <a:endCxn id="68" idx="7"/>
+          </p:cNvCxnSpPr>
+          <p:nvPr/>
+        </p:nvCxnSpPr>
+        <p:spPr>
+          <a:xfrm flipH="1">
+            <a:off x="3061201" y="2340119"/>
+            <a:ext cx="1703286" cy="548465"/>
+          </a:xfrm>
+          <a:prstGeom prst="straightConnector1">
+            <a:avLst/>
+          </a:prstGeom>
+          <a:ln>
+            <a:tailEnd type="triangle"/>
+          </a:ln>
+        </p:spPr>
+        <p:style>
+          <a:lnRef idx="1">
+            <a:schemeClr val="accent1"/>
+          </a:lnRef>
+          <a:fillRef idx="0">
+            <a:schemeClr val="accent1"/>
+          </a:fillRef>
+          <a:effectRef idx="0">
+            <a:schemeClr val="accent1"/>
+          </a:effectRef>
+          <a:fontRef idx="minor">
+            <a:schemeClr val="tx1"/>
+          </a:fontRef>
+        </p:style>
+      </p:cxnSp>
+      <p:cxnSp>
+        <p:nvCxnSpPr>
+          <p:cNvPr id="71" name="直接箭头连接符 70"/>
+          <p:cNvCxnSpPr>
+            <a:stCxn id="65" idx="5"/>
+            <a:endCxn id="69" idx="1"/>
+          </p:cNvCxnSpPr>
+          <p:nvPr/>
+        </p:nvCxnSpPr>
+        <p:spPr>
+          <a:xfrm>
+            <a:off x="4864414" y="2340119"/>
+            <a:ext cx="1844604" cy="548465"/>
+          </a:xfrm>
+          <a:prstGeom prst="straightConnector1">
+            <a:avLst/>
+          </a:prstGeom>
+          <a:ln>
+            <a:tailEnd type="triangle"/>
+          </a:ln>
+        </p:spPr>
+        <p:style>
+          <a:lnRef idx="1">
+            <a:schemeClr val="accent1"/>
+          </a:lnRef>
+          <a:fillRef idx="0">
+            <a:schemeClr val="accent1"/>
+          </a:fillRef>
+          <a:effectRef idx="0">
+            <a:schemeClr val="accent1"/>
+          </a:effectRef>
+          <a:fontRef idx="minor">
+            <a:schemeClr val="tx1"/>
+          </a:fontRef>
+        </p:style>
+      </p:cxnSp>
+      <p:cxnSp>
+        <p:nvCxnSpPr>
+          <p:cNvPr id="72" name="直接箭头连接符 71"/>
+          <p:cNvCxnSpPr>
+            <a:stCxn id="68" idx="3"/>
+            <a:endCxn id="64" idx="0"/>
+          </p:cNvCxnSpPr>
+          <p:nvPr/>
+        </p:nvCxnSpPr>
+        <p:spPr>
+          <a:xfrm flipH="1">
+            <a:off x="2025902" y="2988511"/>
+            <a:ext cx="935372" cy="444645"/>
+          </a:xfrm>
+          <a:prstGeom prst="straightConnector1">
+            <a:avLst/>
+          </a:prstGeom>
+          <a:ln>
+            <a:tailEnd type="triangle"/>
+          </a:ln>
+        </p:spPr>
+        <p:style>
+          <a:lnRef idx="1">
+            <a:schemeClr val="accent1"/>
+          </a:lnRef>
+          <a:fillRef idx="0">
+            <a:schemeClr val="accent1"/>
+          </a:fillRef>
+          <a:effectRef idx="0">
+            <a:schemeClr val="accent1"/>
+          </a:effectRef>
+          <a:fontRef idx="minor">
+            <a:schemeClr val="tx1"/>
+          </a:fontRef>
+        </p:style>
+      </p:cxnSp>
+      <p:sp>
+        <p:nvSpPr>
+          <p:cNvPr id="73" name="椭圆 72"/>
+          <p:cNvSpPr/>
+          <p:nvPr/>
+        </p:nvSpPr>
+        <p:spPr>
+          <a:xfrm>
+            <a:off x="3877515" y="3472597"/>
+            <a:ext cx="101050" cy="108066"/>
+          </a:xfrm>
+          <a:prstGeom prst="ellipse">
+            <a:avLst/>
+          </a:prstGeom>
+        </p:spPr>
+        <p:style>
+          <a:lnRef idx="2">
+            <a:schemeClr val="accent1">
+              <a:shade val="50000"/>
+            </a:schemeClr>
+          </a:lnRef>
+          <a:fillRef idx="1">
+            <a:schemeClr val="accent1"/>
+          </a:fillRef>
+          <a:effectRef idx="0">
+            <a:schemeClr val="accent1"/>
+          </a:effectRef>
+          <a:fontRef idx="minor">
+            <a:schemeClr val="lt1"/>
+          </a:fontRef>
+        </p:style>
+        <p:txBody>
+          <a:bodyPr rtlCol="0" anchor="ctr"/>
+          <a:lstStyle/>
+          <a:p>
+            <a:pPr algn="ctr"/>
+            <a:endParaRPr lang="zh-CN" altLang="en-US"/>
+          </a:p>
+        </p:txBody>
+      </p:sp>
+      <p:cxnSp>
+        <p:nvCxnSpPr>
+          <p:cNvPr id="74" name="直接箭头连接符 73"/>
+          <p:cNvCxnSpPr>
+            <a:stCxn id="68" idx="4"/>
+            <a:endCxn id="73" idx="0"/>
+          </p:cNvCxnSpPr>
+          <p:nvPr/>
+        </p:nvCxnSpPr>
+        <p:spPr>
+          <a:xfrm>
+            <a:off x="3011238" y="3009206"/>
+            <a:ext cx="916802" cy="463391"/>
+          </a:xfrm>
+          <a:prstGeom prst="straightConnector1">
+            <a:avLst/>
+          </a:prstGeom>
+          <a:ln>
+            <a:tailEnd type="triangle"/>
+          </a:ln>
+        </p:spPr>
+        <p:style>
+          <a:lnRef idx="1">
+            <a:schemeClr val="accent1"/>
+          </a:lnRef>
+          <a:fillRef idx="0">
+            <a:schemeClr val="accent1"/>
+          </a:fillRef>
+          <a:effectRef idx="0">
+            <a:schemeClr val="accent1"/>
+          </a:effectRef>
+          <a:fontRef idx="minor">
+            <a:schemeClr val="tx1"/>
+          </a:fontRef>
+        </p:style>
+      </p:cxnSp>
+      <p:cxnSp>
+        <p:nvCxnSpPr>
+          <p:cNvPr id="75" name="直接箭头连接符 74"/>
+          <p:cNvCxnSpPr>
+            <a:stCxn id="69" idx="3"/>
+            <a:endCxn id="66" idx="7"/>
+          </p:cNvCxnSpPr>
+          <p:nvPr/>
+        </p:nvCxnSpPr>
+        <p:spPr>
+          <a:xfrm flipH="1">
+            <a:off x="5779549" y="2988511"/>
+            <a:ext cx="929469" cy="465338"/>
+          </a:xfrm>
+          <a:prstGeom prst="straightConnector1">
+            <a:avLst/>
+          </a:prstGeom>
+          <a:ln>
+            <a:tailEnd type="triangle"/>
+          </a:ln>
+        </p:spPr>
+        <p:style>
+          <a:lnRef idx="1">
+            <a:schemeClr val="accent1"/>
+          </a:lnRef>
+          <a:fillRef idx="0">
+            <a:schemeClr val="accent1"/>
+          </a:fillRef>
+          <a:effectRef idx="0">
+            <a:schemeClr val="accent1"/>
+          </a:effectRef>
+          <a:fontRef idx="minor">
+            <a:schemeClr val="tx1"/>
+          </a:fontRef>
+        </p:style>
+      </p:cxnSp>
+      <p:cxnSp>
+        <p:nvCxnSpPr>
+          <p:cNvPr id="76" name="直接箭头连接符 75"/>
+          <p:cNvCxnSpPr>
+            <a:stCxn id="69" idx="4"/>
+            <a:endCxn id="67" idx="1"/>
+          </p:cNvCxnSpPr>
+          <p:nvPr/>
+        </p:nvCxnSpPr>
+        <p:spPr>
+          <a:xfrm>
+            <a:off x="6758982" y="3009206"/>
+            <a:ext cx="816313" cy="444642"/>
+          </a:xfrm>
+          <a:prstGeom prst="straightConnector1">
+            <a:avLst/>
+          </a:prstGeom>
+          <a:ln>
+            <a:tailEnd type="triangle"/>
+          </a:ln>
+        </p:spPr>
+        <p:style>
+          <a:lnRef idx="1">
+            <a:schemeClr val="accent1"/>
+          </a:lnRef>
+          <a:fillRef idx="0">
+            <a:schemeClr val="accent1"/>
+          </a:fillRef>
+          <a:effectRef idx="0">
+            <a:schemeClr val="accent1"/>
+          </a:effectRef>
+          <a:fontRef idx="minor">
+            <a:schemeClr val="tx1"/>
+          </a:fontRef>
+        </p:style>
+      </p:cxnSp>
+      <p:cxnSp>
+        <p:nvCxnSpPr>
+          <p:cNvPr id="77" name="直接箭头连接符 76"/>
+          <p:cNvCxnSpPr>
+            <a:stCxn id="64" idx="3"/>
+            <a:endCxn id="56" idx="0"/>
+          </p:cNvCxnSpPr>
+          <p:nvPr/>
+        </p:nvCxnSpPr>
+        <p:spPr>
+          <a:xfrm flipH="1">
+            <a:off x="1561866" y="3553778"/>
+            <a:ext cx="414072" cy="685713"/>
+          </a:xfrm>
+          <a:prstGeom prst="straightConnector1">
+            <a:avLst/>
+          </a:prstGeom>
+          <a:ln>
+            <a:tailEnd type="triangle"/>
+          </a:ln>
+        </p:spPr>
+        <p:style>
+          <a:lnRef idx="1">
+            <a:schemeClr val="accent1"/>
+          </a:lnRef>
+          <a:fillRef idx="0">
+            <a:schemeClr val="accent1"/>
+          </a:fillRef>
+          <a:effectRef idx="0">
+            <a:schemeClr val="accent1"/>
+          </a:effectRef>
+          <a:fontRef idx="minor">
+            <a:schemeClr val="tx1"/>
+          </a:fontRef>
+        </p:style>
+      </p:cxnSp>
+      <p:cxnSp>
+        <p:nvCxnSpPr>
+          <p:cNvPr id="78" name="直接箭头连接符 77"/>
+          <p:cNvCxnSpPr>
+            <a:stCxn id="64" idx="5"/>
+            <a:endCxn id="57" idx="7"/>
+          </p:cNvCxnSpPr>
+          <p:nvPr/>
+        </p:nvCxnSpPr>
+        <p:spPr>
+          <a:xfrm>
+            <a:off x="2075865" y="3553778"/>
+            <a:ext cx="490177" cy="706408"/>
+          </a:xfrm>
+          <a:prstGeom prst="straightConnector1">
+            <a:avLst/>
+          </a:prstGeom>
+          <a:ln>
+            <a:tailEnd type="triangle"/>
+          </a:ln>
+        </p:spPr>
+        <p:style>
+          <a:lnRef idx="1">
+            <a:schemeClr val="accent1"/>
+          </a:lnRef>
+          <a:fillRef idx="0">
+            <a:schemeClr val="accent1"/>
+          </a:fillRef>
+          <a:effectRef idx="0">
+            <a:schemeClr val="accent1"/>
+          </a:effectRef>
+          <a:fontRef idx="minor">
+            <a:schemeClr val="tx1"/>
+          </a:fontRef>
+        </p:style>
+      </p:cxnSp>
+      <p:cxnSp>
+        <p:nvCxnSpPr>
+          <p:cNvPr id="79" name="直接箭头连接符 78"/>
+          <p:cNvCxnSpPr>
+            <a:stCxn id="73" idx="3"/>
+            <a:endCxn id="58" idx="6"/>
+          </p:cNvCxnSpPr>
+          <p:nvPr/>
+        </p:nvCxnSpPr>
+        <p:spPr>
+          <a:xfrm flipH="1">
+            <a:off x="3499659" y="3564837"/>
+            <a:ext cx="392654" cy="761938"/>
+          </a:xfrm>
+          <a:prstGeom prst="straightConnector1">
+            <a:avLst/>
+          </a:prstGeom>
+          <a:ln>
+            <a:tailEnd type="triangle"/>
+          </a:ln>
+        </p:spPr>
+        <p:style>
+          <a:lnRef idx="1">
+            <a:schemeClr val="accent1"/>
+          </a:lnRef>
+          <a:fillRef idx="0">
+            <a:schemeClr val="accent1"/>
+          </a:fillRef>
+          <a:effectRef idx="0">
+            <a:schemeClr val="accent1"/>
+          </a:effectRef>
+          <a:fontRef idx="minor">
+            <a:schemeClr val="tx1"/>
+          </a:fontRef>
+        </p:style>
+      </p:cxnSp>
+      <p:cxnSp>
+        <p:nvCxnSpPr>
+          <p:cNvPr id="80" name="直接箭头连接符 79"/>
+          <p:cNvCxnSpPr>
+            <a:stCxn id="73" idx="5"/>
+            <a:endCxn id="59" idx="1"/>
+          </p:cNvCxnSpPr>
+          <p:nvPr/>
+        </p:nvCxnSpPr>
+        <p:spPr>
+          <a:xfrm>
+            <a:off x="3963767" y="3564837"/>
+            <a:ext cx="409749" cy="695349"/>
+          </a:xfrm>
+          <a:prstGeom prst="straightConnector1">
+            <a:avLst/>
+          </a:prstGeom>
+          <a:ln>
+            <a:tailEnd type="triangle"/>
+          </a:ln>
+        </p:spPr>
+        <p:style>
+          <a:lnRef idx="1">
+            <a:schemeClr val="accent1"/>
+          </a:lnRef>
+          <a:fillRef idx="0">
+            <a:schemeClr val="accent1"/>
+          </a:fillRef>
+          <a:effectRef idx="0">
+            <a:schemeClr val="accent1"/>
+          </a:effectRef>
+          <a:fontRef idx="minor">
+            <a:schemeClr val="tx1"/>
+          </a:fontRef>
+        </p:style>
+      </p:cxnSp>
+      <p:cxnSp>
+        <p:nvCxnSpPr>
+          <p:cNvPr id="81" name="直接箭头连接符 80"/>
+          <p:cNvCxnSpPr>
+            <a:stCxn id="66" idx="3"/>
+            <a:endCxn id="60" idx="0"/>
+          </p:cNvCxnSpPr>
+          <p:nvPr/>
+        </p:nvCxnSpPr>
+        <p:spPr>
+          <a:xfrm flipH="1">
+            <a:off x="5302772" y="3553776"/>
+            <a:ext cx="376850" cy="685715"/>
+          </a:xfrm>
+          <a:prstGeom prst="straightConnector1">
+            <a:avLst/>
+          </a:prstGeom>
+          <a:ln>
+            <a:prstDash val="dash"/>
+            <a:tailEnd type="triangle"/>
+          </a:ln>
+        </p:spPr>
+        <p:style>
+          <a:lnRef idx="1">
+            <a:schemeClr val="accent1"/>
+          </a:lnRef>
+          <a:fillRef idx="0">
+            <a:schemeClr val="accent1"/>
+          </a:fillRef>
+          <a:effectRef idx="0">
+            <a:schemeClr val="accent1"/>
+          </a:effectRef>
+          <a:fontRef idx="minor">
+            <a:schemeClr val="tx1"/>
+          </a:fontRef>
+        </p:style>
+      </p:cxnSp>
+      <p:cxnSp>
+        <p:nvCxnSpPr>
+          <p:cNvPr id="82" name="直接箭头连接符 81"/>
+          <p:cNvCxnSpPr>
+            <a:stCxn id="66" idx="4"/>
+            <a:endCxn id="61" idx="1"/>
+          </p:cNvCxnSpPr>
+          <p:nvPr/>
+        </p:nvCxnSpPr>
+        <p:spPr>
+          <a:xfrm>
+            <a:off x="5729586" y="3574471"/>
+            <a:ext cx="477435" cy="685715"/>
+          </a:xfrm>
+          <a:prstGeom prst="straightConnector1">
+            <a:avLst/>
+          </a:prstGeom>
+          <a:ln>
+            <a:prstDash val="dash"/>
+            <a:tailEnd type="triangle"/>
+          </a:ln>
+        </p:spPr>
+        <p:style>
+          <a:lnRef idx="1">
+            <a:schemeClr val="accent1"/>
+          </a:lnRef>
+          <a:fillRef idx="0">
+            <a:schemeClr val="accent1"/>
+          </a:fillRef>
+          <a:effectRef idx="0">
+            <a:schemeClr val="accent1"/>
+          </a:effectRef>
+          <a:fontRef idx="minor">
+            <a:schemeClr val="tx1"/>
+          </a:fontRef>
+        </p:style>
+      </p:cxnSp>
+      <p:cxnSp>
+        <p:nvCxnSpPr>
+          <p:cNvPr id="83" name="直接箭头连接符 82"/>
+          <p:cNvCxnSpPr>
+            <a:stCxn id="67" idx="4"/>
+            <a:endCxn id="62" idx="0"/>
+          </p:cNvCxnSpPr>
+          <p:nvPr/>
+        </p:nvCxnSpPr>
+        <p:spPr>
+          <a:xfrm flipH="1">
+            <a:off x="7210173" y="3574470"/>
+            <a:ext cx="415086" cy="665021"/>
+          </a:xfrm>
+          <a:prstGeom prst="straightConnector1">
+            <a:avLst/>
+          </a:prstGeom>
+          <a:ln>
+            <a:prstDash val="dash"/>
+            <a:tailEnd type="triangle"/>
+          </a:ln>
+        </p:spPr>
+        <p:style>
+          <a:lnRef idx="1">
+            <a:schemeClr val="accent1"/>
+          </a:lnRef>
+          <a:fillRef idx="0">
+            <a:schemeClr val="accent1"/>
+          </a:fillRef>
+          <a:effectRef idx="0">
+            <a:schemeClr val="accent1"/>
+          </a:effectRef>
+          <a:fontRef idx="minor">
+            <a:schemeClr val="tx1"/>
+          </a:fontRef>
+        </p:style>
+      </p:cxnSp>
+      <p:cxnSp>
+        <p:nvCxnSpPr>
+          <p:cNvPr id="84" name="直接箭头连接符 83"/>
+          <p:cNvCxnSpPr>
+            <a:stCxn id="67" idx="5"/>
+            <a:endCxn id="63" idx="0"/>
+          </p:cNvCxnSpPr>
+          <p:nvPr/>
+        </p:nvCxnSpPr>
+        <p:spPr>
+          <a:xfrm>
+            <a:off x="7675222" y="3553775"/>
+            <a:ext cx="425425" cy="685716"/>
+          </a:xfrm>
+          <a:prstGeom prst="straightConnector1">
+            <a:avLst/>
+          </a:prstGeom>
+          <a:ln>
+            <a:prstDash val="dash"/>
+            <a:tailEnd type="triangle"/>
+          </a:ln>
+        </p:spPr>
+        <p:style>
+          <a:lnRef idx="1">
+            <a:schemeClr val="accent1"/>
+          </a:lnRef>
+          <a:fillRef idx="0">
+            <a:schemeClr val="accent1"/>
+          </a:fillRef>
+          <a:effectRef idx="0">
+            <a:schemeClr val="accent1"/>
+          </a:effectRef>
+          <a:fontRef idx="minor">
+            <a:schemeClr val="tx1"/>
+          </a:fontRef>
+        </p:style>
+      </p:cxnSp>
+      <p:cxnSp>
+        <p:nvCxnSpPr>
+          <p:cNvPr id="85" name="直接箭头连接符 84"/>
+          <p:cNvCxnSpPr>
+            <a:stCxn id="56" idx="4"/>
+            <a:endCxn id="40" idx="0"/>
+          </p:cNvCxnSpPr>
+          <p:nvPr/>
+        </p:nvCxnSpPr>
+        <p:spPr>
+          <a:xfrm flipH="1">
+            <a:off x="1371600" y="4380808"/>
+            <a:ext cx="190266" cy="415635"/>
+          </a:xfrm>
+          <a:prstGeom prst="straightConnector1">
+            <a:avLst/>
+          </a:prstGeom>
+          <a:ln>
+            <a:tailEnd type="triangle"/>
+          </a:ln>
+        </p:spPr>
+        <p:style>
+          <a:lnRef idx="1">
+            <a:schemeClr val="accent1"/>
+          </a:lnRef>
+          <a:fillRef idx="0">
+            <a:schemeClr val="accent1"/>
+          </a:fillRef>
+          <a:effectRef idx="0">
+            <a:schemeClr val="accent1"/>
+          </a:effectRef>
+          <a:fontRef idx="minor">
+            <a:schemeClr val="tx1"/>
+          </a:fontRef>
+        </p:style>
+      </p:cxnSp>
+      <p:cxnSp>
+        <p:nvCxnSpPr>
+          <p:cNvPr id="86" name="直接箭头连接符 85"/>
+          <p:cNvCxnSpPr>
+            <a:stCxn id="56" idx="4"/>
+            <a:endCxn id="41" idx="0"/>
+          </p:cNvCxnSpPr>
+          <p:nvPr/>
+        </p:nvCxnSpPr>
+        <p:spPr>
+          <a:xfrm>
+            <a:off x="1561866" y="4380808"/>
+            <a:ext cx="229802" cy="415636"/>
+          </a:xfrm>
+          <a:prstGeom prst="straightConnector1">
+            <a:avLst/>
+          </a:prstGeom>
+          <a:ln>
+            <a:tailEnd type="triangle"/>
+          </a:ln>
+        </p:spPr>
+        <p:style>
+          <a:lnRef idx="1">
+            <a:schemeClr val="accent1"/>
+          </a:lnRef>
+          <a:fillRef idx="0">
+            <a:schemeClr val="accent1"/>
+          </a:fillRef>
+          <a:effectRef idx="0">
+            <a:schemeClr val="accent1"/>
+          </a:effectRef>
+          <a:fontRef idx="minor">
+            <a:schemeClr val="tx1"/>
+          </a:fontRef>
+        </p:style>
+      </p:cxnSp>
+      <p:cxnSp>
+        <p:nvCxnSpPr>
+          <p:cNvPr id="87" name="直接箭头连接符 86"/>
+          <p:cNvCxnSpPr>
+            <a:stCxn id="57" idx="3"/>
+            <a:endCxn id="42" idx="0"/>
+          </p:cNvCxnSpPr>
+          <p:nvPr/>
+        </p:nvCxnSpPr>
+        <p:spPr>
+          <a:xfrm flipH="1">
+            <a:off x="2294588" y="4360113"/>
+            <a:ext cx="171527" cy="436330"/>
+          </a:xfrm>
+          <a:prstGeom prst="straightConnector1">
+            <a:avLst/>
+          </a:prstGeom>
+          <a:ln>
+            <a:tailEnd type="triangle"/>
+          </a:ln>
+        </p:spPr>
+        <p:style>
+          <a:lnRef idx="1">
+            <a:schemeClr val="accent1"/>
+          </a:lnRef>
+          <a:fillRef idx="0">
+            <a:schemeClr val="accent1"/>
+          </a:fillRef>
+          <a:effectRef idx="0">
+            <a:schemeClr val="accent1"/>
+          </a:effectRef>
+          <a:fontRef idx="minor">
+            <a:schemeClr val="tx1"/>
+          </a:fontRef>
+        </p:style>
+      </p:cxnSp>
+      <p:cxnSp>
+        <p:nvCxnSpPr>
+          <p:cNvPr id="88" name="直接箭头连接符 87"/>
+          <p:cNvCxnSpPr>
+            <a:stCxn id="57" idx="4"/>
+            <a:endCxn id="43" idx="0"/>
+          </p:cNvCxnSpPr>
+          <p:nvPr/>
+        </p:nvCxnSpPr>
+        <p:spPr>
+          <a:xfrm>
+            <a:off x="2516079" y="4380808"/>
+            <a:ext cx="234459" cy="415635"/>
+          </a:xfrm>
+          <a:prstGeom prst="straightConnector1">
+            <a:avLst/>
+          </a:prstGeom>
+          <a:ln>
+            <a:tailEnd type="triangle"/>
+          </a:ln>
+        </p:spPr>
+        <p:style>
+          <a:lnRef idx="1">
+            <a:schemeClr val="accent1"/>
+          </a:lnRef>
+          <a:fillRef idx="0">
+            <a:schemeClr val="accent1"/>
+          </a:fillRef>
+          <a:effectRef idx="0">
+            <a:schemeClr val="accent1"/>
+          </a:effectRef>
+          <a:fontRef idx="minor">
+            <a:schemeClr val="tx1"/>
+          </a:fontRef>
+        </p:style>
+      </p:cxnSp>
+      <p:cxnSp>
+        <p:nvCxnSpPr>
+          <p:cNvPr id="89" name="直接箭头连接符 88"/>
+          <p:cNvCxnSpPr>
+            <a:stCxn id="58" idx="3"/>
+            <a:endCxn id="44" idx="0"/>
+          </p:cNvCxnSpPr>
+          <p:nvPr/>
+        </p:nvCxnSpPr>
+        <p:spPr>
+          <a:xfrm flipH="1">
+            <a:off x="3231524" y="4364982"/>
+            <a:ext cx="181883" cy="431460"/>
+          </a:xfrm>
+          <a:prstGeom prst="straightConnector1">
+            <a:avLst/>
+          </a:prstGeom>
+          <a:ln>
+            <a:prstDash val="dash"/>
+            <a:tailEnd type="triangle"/>
+          </a:ln>
+        </p:spPr>
+        <p:style>
+          <a:lnRef idx="1">
+            <a:schemeClr val="accent1"/>
+          </a:lnRef>
+          <a:fillRef idx="0">
+            <a:schemeClr val="accent1"/>
+          </a:fillRef>
+          <a:effectRef idx="0">
+            <a:schemeClr val="accent1"/>
+          </a:effectRef>
+          <a:fontRef idx="minor">
+            <a:schemeClr val="tx1"/>
+          </a:fontRef>
+        </p:style>
+      </p:cxnSp>
+      <p:cxnSp>
+        <p:nvCxnSpPr>
+          <p:cNvPr id="90" name="直接箭头连接符 89"/>
+          <p:cNvCxnSpPr>
+            <a:stCxn id="58" idx="4"/>
+            <a:endCxn id="45" idx="0"/>
+          </p:cNvCxnSpPr>
+          <p:nvPr/>
+        </p:nvCxnSpPr>
+        <p:spPr>
+          <a:xfrm>
+            <a:off x="3449134" y="4380808"/>
+            <a:ext cx="238340" cy="415635"/>
+          </a:xfrm>
+          <a:prstGeom prst="straightConnector1">
+            <a:avLst/>
+          </a:prstGeom>
+          <a:ln>
+            <a:prstDash val="dash"/>
+            <a:tailEnd type="triangle"/>
+          </a:ln>
+        </p:spPr>
+        <p:style>
+          <a:lnRef idx="1">
+            <a:schemeClr val="accent1"/>
+          </a:lnRef>
+          <a:fillRef idx="0">
+            <a:schemeClr val="accent1"/>
+          </a:fillRef>
+          <a:effectRef idx="0">
+            <a:schemeClr val="accent1"/>
+          </a:effectRef>
+          <a:fontRef idx="minor">
+            <a:schemeClr val="tx1"/>
+          </a:fontRef>
+        </p:style>
+      </p:cxnSp>
+      <p:cxnSp>
+        <p:nvCxnSpPr>
+          <p:cNvPr id="91" name="直接箭头连接符 90"/>
+          <p:cNvCxnSpPr>
+            <a:stCxn id="59" idx="4"/>
+            <a:endCxn id="46" idx="7"/>
+          </p:cNvCxnSpPr>
+          <p:nvPr/>
+        </p:nvCxnSpPr>
+        <p:spPr>
+          <a:xfrm flipH="1">
+            <a:off x="4193388" y="4380808"/>
+            <a:ext cx="230092" cy="436329"/>
+          </a:xfrm>
+          <a:prstGeom prst="straightConnector1">
+            <a:avLst/>
+          </a:prstGeom>
+          <a:ln>
+            <a:prstDash val="dash"/>
+            <a:tailEnd type="triangle"/>
+          </a:ln>
+        </p:spPr>
+        <p:style>
+          <a:lnRef idx="1">
+            <a:schemeClr val="accent1"/>
+          </a:lnRef>
+          <a:fillRef idx="0">
+            <a:schemeClr val="accent1"/>
+          </a:fillRef>
+          <a:effectRef idx="0">
+            <a:schemeClr val="accent1"/>
+          </a:effectRef>
+          <a:fontRef idx="minor">
+            <a:schemeClr val="tx1"/>
+          </a:fontRef>
+        </p:style>
+      </p:cxnSp>
+      <p:cxnSp>
+        <p:nvCxnSpPr>
+          <p:cNvPr id="92" name="直接箭头连接符 91"/>
+          <p:cNvCxnSpPr>
+            <a:stCxn id="59" idx="4"/>
+            <a:endCxn id="47" idx="0"/>
+          </p:cNvCxnSpPr>
+          <p:nvPr/>
+        </p:nvCxnSpPr>
+        <p:spPr>
+          <a:xfrm>
+            <a:off x="4423480" y="4380808"/>
+            <a:ext cx="178995" cy="415635"/>
+          </a:xfrm>
+          <a:prstGeom prst="straightConnector1">
+            <a:avLst/>
+          </a:prstGeom>
+          <a:ln>
+            <a:prstDash val="dash"/>
+            <a:tailEnd type="triangle"/>
+          </a:ln>
+        </p:spPr>
+        <p:style>
+          <a:lnRef idx="1">
+            <a:schemeClr val="accent1"/>
+          </a:lnRef>
+          <a:fillRef idx="0">
+            <a:schemeClr val="accent1"/>
+          </a:fillRef>
+          <a:effectRef idx="0">
+            <a:schemeClr val="accent1"/>
+          </a:effectRef>
+          <a:fontRef idx="minor">
+            <a:schemeClr val="tx1"/>
+          </a:fontRef>
+        </p:style>
+      </p:cxnSp>
+      <p:cxnSp>
+        <p:nvCxnSpPr>
+          <p:cNvPr id="93" name="直接箭头连接符 92"/>
+          <p:cNvCxnSpPr>
+            <a:stCxn id="60" idx="3"/>
+            <a:endCxn id="48" idx="0"/>
+          </p:cNvCxnSpPr>
+          <p:nvPr/>
+        </p:nvCxnSpPr>
+        <p:spPr>
+          <a:xfrm flipH="1">
+            <a:off x="5097086" y="4360113"/>
+            <a:ext cx="155722" cy="436330"/>
+          </a:xfrm>
+          <a:prstGeom prst="straightConnector1">
+            <a:avLst/>
+          </a:prstGeom>
+          <a:ln>
+            <a:prstDash val="dash"/>
+            <a:tailEnd type="triangle"/>
+          </a:ln>
+        </p:spPr>
+        <p:style>
+          <a:lnRef idx="1">
+            <a:schemeClr val="accent1"/>
+          </a:lnRef>
+          <a:fillRef idx="0">
+            <a:schemeClr val="accent1"/>
+          </a:fillRef>
+          <a:effectRef idx="0">
+            <a:schemeClr val="accent1"/>
+          </a:effectRef>
+          <a:fontRef idx="minor">
+            <a:schemeClr val="tx1"/>
+          </a:fontRef>
+        </p:style>
+      </p:cxnSp>
+      <p:cxnSp>
+        <p:nvCxnSpPr>
+          <p:cNvPr id="94" name="直接箭头连接符 93"/>
+          <p:cNvCxnSpPr>
+            <a:stCxn id="60" idx="4"/>
+            <a:endCxn id="49" idx="0"/>
+          </p:cNvCxnSpPr>
+          <p:nvPr/>
+        </p:nvCxnSpPr>
+        <p:spPr>
+          <a:xfrm>
+            <a:off x="5302772" y="4380808"/>
+            <a:ext cx="214382" cy="415636"/>
+          </a:xfrm>
+          <a:prstGeom prst="straightConnector1">
+            <a:avLst/>
+          </a:prstGeom>
+          <a:ln>
+            <a:prstDash val="dash"/>
+            <a:tailEnd type="triangle"/>
+          </a:ln>
+        </p:spPr>
+        <p:style>
+          <a:lnRef idx="1">
+            <a:schemeClr val="accent1"/>
+          </a:lnRef>
+          <a:fillRef idx="0">
+            <a:schemeClr val="accent1"/>
+          </a:fillRef>
+          <a:effectRef idx="0">
+            <a:schemeClr val="accent1"/>
+          </a:effectRef>
+          <a:fontRef idx="minor">
+            <a:schemeClr val="tx1"/>
+          </a:fontRef>
+        </p:style>
+      </p:cxnSp>
+      <p:cxnSp>
+        <p:nvCxnSpPr>
+          <p:cNvPr id="95" name="直接箭头连接符 94"/>
+          <p:cNvCxnSpPr>
+            <a:stCxn id="61" idx="3"/>
+            <a:endCxn id="50" idx="0"/>
+          </p:cNvCxnSpPr>
+          <p:nvPr/>
+        </p:nvCxnSpPr>
+        <p:spPr>
+          <a:xfrm flipH="1">
+            <a:off x="6020074" y="4360113"/>
+            <a:ext cx="186947" cy="436330"/>
+          </a:xfrm>
+          <a:prstGeom prst="straightConnector1">
+            <a:avLst/>
+          </a:prstGeom>
+          <a:ln>
+            <a:prstDash val="dash"/>
+            <a:tailEnd type="triangle"/>
+          </a:ln>
+        </p:spPr>
+        <p:style>
+          <a:lnRef idx="1">
+            <a:schemeClr val="accent1"/>
+          </a:lnRef>
+          <a:fillRef idx="0">
+            <a:schemeClr val="accent1"/>
+          </a:fillRef>
+          <a:effectRef idx="0">
+            <a:schemeClr val="accent1"/>
+          </a:effectRef>
+          <a:fontRef idx="minor">
+            <a:schemeClr val="tx1"/>
+          </a:fontRef>
+        </p:style>
+      </p:cxnSp>
+      <p:cxnSp>
+        <p:nvCxnSpPr>
+          <p:cNvPr id="96" name="直接箭头连接符 95"/>
+          <p:cNvCxnSpPr>
+            <a:stCxn id="61" idx="4"/>
+            <a:endCxn id="51" idx="1"/>
+          </p:cNvCxnSpPr>
+          <p:nvPr/>
+        </p:nvCxnSpPr>
+        <p:spPr>
+          <a:xfrm>
+            <a:off x="6256985" y="4380808"/>
+            <a:ext cx="269002" cy="436330"/>
+          </a:xfrm>
+          <a:prstGeom prst="straightConnector1">
+            <a:avLst/>
+          </a:prstGeom>
+          <a:ln>
+            <a:prstDash val="dash"/>
+            <a:tailEnd type="triangle"/>
+          </a:ln>
+        </p:spPr>
+        <p:style>
+          <a:lnRef idx="1">
+            <a:schemeClr val="accent1"/>
+          </a:lnRef>
+          <a:fillRef idx="0">
+            <a:schemeClr val="accent1"/>
+          </a:fillRef>
+          <a:effectRef idx="0">
+            <a:schemeClr val="accent1"/>
+          </a:effectRef>
+          <a:fontRef idx="minor">
+            <a:schemeClr val="tx1"/>
+          </a:fontRef>
+        </p:style>
+      </p:cxnSp>
+      <p:cxnSp>
+        <p:nvCxnSpPr>
+          <p:cNvPr id="97" name="直接箭头连接符 96"/>
+          <p:cNvCxnSpPr>
+            <a:stCxn id="62" idx="4"/>
+            <a:endCxn id="52" idx="0"/>
+          </p:cNvCxnSpPr>
+          <p:nvPr/>
+        </p:nvCxnSpPr>
+        <p:spPr>
+          <a:xfrm flipH="1">
+            <a:off x="6957010" y="4380808"/>
+            <a:ext cx="253163" cy="415634"/>
+          </a:xfrm>
+          <a:prstGeom prst="straightConnector1">
+            <a:avLst/>
+          </a:prstGeom>
+          <a:ln>
+            <a:prstDash val="dash"/>
+            <a:tailEnd type="triangle"/>
+          </a:ln>
+        </p:spPr>
+        <p:style>
+          <a:lnRef idx="1">
+            <a:schemeClr val="accent1"/>
+          </a:lnRef>
+          <a:fillRef idx="0">
+            <a:schemeClr val="accent1"/>
+          </a:fillRef>
+          <a:effectRef idx="0">
+            <a:schemeClr val="accent1"/>
+          </a:effectRef>
+          <a:fontRef idx="minor">
+            <a:schemeClr val="tx1"/>
+          </a:fontRef>
+        </p:style>
+      </p:cxnSp>
+      <p:cxnSp>
+        <p:nvCxnSpPr>
+          <p:cNvPr id="98" name="直接箭头连接符 97"/>
+          <p:cNvCxnSpPr>
+            <a:stCxn id="62" idx="4"/>
+            <a:endCxn id="53" idx="1"/>
+          </p:cNvCxnSpPr>
+          <p:nvPr/>
+        </p:nvCxnSpPr>
+        <p:spPr>
+          <a:xfrm>
+            <a:off x="7210173" y="4380808"/>
+            <a:ext cx="252750" cy="436330"/>
+          </a:xfrm>
+          <a:prstGeom prst="straightConnector1">
+            <a:avLst/>
+          </a:prstGeom>
+          <a:ln>
+            <a:prstDash val="dash"/>
+            <a:tailEnd type="triangle"/>
+          </a:ln>
+        </p:spPr>
+        <p:style>
+          <a:lnRef idx="1">
+            <a:schemeClr val="accent1"/>
+          </a:lnRef>
+          <a:fillRef idx="0">
+            <a:schemeClr val="accent1"/>
+          </a:fillRef>
+          <a:effectRef idx="0">
+            <a:schemeClr val="accent1"/>
+          </a:effectRef>
+          <a:fontRef idx="minor">
+            <a:schemeClr val="tx1"/>
+          </a:fontRef>
+        </p:style>
+      </p:cxnSp>
+      <p:cxnSp>
+        <p:nvCxnSpPr>
+          <p:cNvPr id="99" name="直接箭头连接符 98"/>
+          <p:cNvCxnSpPr>
+            <a:stCxn id="63" idx="4"/>
+            <a:endCxn id="54" idx="0"/>
+          </p:cNvCxnSpPr>
+          <p:nvPr/>
+        </p:nvCxnSpPr>
+        <p:spPr>
+          <a:xfrm flipH="1">
+            <a:off x="7868911" y="4380808"/>
+            <a:ext cx="231736" cy="415634"/>
+          </a:xfrm>
+          <a:prstGeom prst="straightConnector1">
+            <a:avLst/>
+          </a:prstGeom>
+          <a:ln>
+            <a:prstDash val="dash"/>
+            <a:tailEnd type="triangle"/>
+          </a:ln>
+        </p:spPr>
+        <p:style>
+          <a:lnRef idx="1">
+            <a:schemeClr val="accent1"/>
+          </a:lnRef>
+          <a:fillRef idx="0">
+            <a:schemeClr val="accent1"/>
+          </a:fillRef>
+          <a:effectRef idx="0">
+            <a:schemeClr val="accent1"/>
+          </a:effectRef>
+          <a:fontRef idx="minor">
+            <a:schemeClr val="tx1"/>
+          </a:fontRef>
+        </p:style>
+      </p:cxnSp>
+      <p:cxnSp>
+        <p:nvCxnSpPr>
+          <p:cNvPr id="100" name="直接箭头连接符 99"/>
+          <p:cNvCxnSpPr>
+            <a:stCxn id="63" idx="4"/>
+            <a:endCxn id="55" idx="0"/>
+          </p:cNvCxnSpPr>
+          <p:nvPr/>
+        </p:nvCxnSpPr>
+        <p:spPr>
+          <a:xfrm>
+            <a:off x="8100647" y="4380808"/>
+            <a:ext cx="227314" cy="415635"/>
+          </a:xfrm>
+          <a:prstGeom prst="straightConnector1">
+            <a:avLst/>
+          </a:prstGeom>
+          <a:ln>
+            <a:prstDash val="dash"/>
+            <a:tailEnd type="triangle"/>
+          </a:ln>
+        </p:spPr>
+        <p:style>
+          <a:lnRef idx="1">
+            <a:schemeClr val="accent1"/>
+          </a:lnRef>
+          <a:fillRef idx="0">
+            <a:schemeClr val="accent1"/>
+          </a:fillRef>
+          <a:effectRef idx="0">
+            <a:schemeClr val="accent1"/>
+          </a:effectRef>
+          <a:fontRef idx="minor">
+            <a:schemeClr val="tx1"/>
+          </a:fontRef>
+        </p:style>
+      </p:cxnSp>
+      <p:cxnSp>
+        <p:nvCxnSpPr>
+          <p:cNvPr id="101" name="直接箭头连接符 100"/>
+          <p:cNvCxnSpPr>
+            <a:stCxn id="40" idx="3"/>
+            <a:endCxn id="8" idx="0"/>
+          </p:cNvCxnSpPr>
+          <p:nvPr/>
+        </p:nvCxnSpPr>
+        <p:spPr>
+          <a:xfrm flipH="1">
+            <a:off x="1230283" y="4917065"/>
+            <a:ext cx="91353" cy="394767"/>
+          </a:xfrm>
+          <a:prstGeom prst="straightConnector1">
+            <a:avLst/>
+          </a:prstGeom>
+          <a:ln>
+            <a:tailEnd type="triangle"/>
+          </a:ln>
+        </p:spPr>
+        <p:style>
+          <a:lnRef idx="1">
+            <a:schemeClr val="accent1"/>
+          </a:lnRef>
+          <a:fillRef idx="0">
+            <a:schemeClr val="accent1"/>
+          </a:fillRef>
+          <a:effectRef idx="0">
+            <a:schemeClr val="accent1"/>
+          </a:effectRef>
+          <a:fontRef idx="minor">
+            <a:schemeClr val="tx1"/>
+          </a:fontRef>
+        </p:style>
+      </p:cxnSp>
+      <p:cxnSp>
+        <p:nvCxnSpPr>
+          <p:cNvPr id="102" name="直接箭头连接符 101"/>
+          <p:cNvCxnSpPr/>
+          <p:nvPr/>
+        </p:nvCxnSpPr>
+        <p:spPr>
+          <a:xfrm flipH="1">
+            <a:off x="1673006" y="4937759"/>
+            <a:ext cx="91353" cy="394767"/>
+          </a:xfrm>
+          <a:prstGeom prst="straightConnector1">
+            <a:avLst/>
+          </a:prstGeom>
+          <a:ln>
+            <a:prstDash val="dash"/>
+            <a:tailEnd type="triangle"/>
+          </a:ln>
+        </p:spPr>
+        <p:style>
+          <a:lnRef idx="1">
+            <a:schemeClr val="accent1"/>
+          </a:lnRef>
+          <a:fillRef idx="0">
+            <a:schemeClr val="accent1"/>
+          </a:fillRef>
+          <a:effectRef idx="0">
+            <a:schemeClr val="accent1"/>
+          </a:effectRef>
+          <a:fontRef idx="minor">
+            <a:schemeClr val="tx1"/>
+          </a:fontRef>
+        </p:style>
+      </p:cxnSp>
+      <p:cxnSp>
+        <p:nvCxnSpPr>
+          <p:cNvPr id="103" name="直接箭头连接符 102"/>
+          <p:cNvCxnSpPr/>
+          <p:nvPr/>
+        </p:nvCxnSpPr>
+        <p:spPr>
+          <a:xfrm flipH="1">
+            <a:off x="2154701" y="4929534"/>
+            <a:ext cx="91353" cy="394767"/>
+          </a:xfrm>
+          <a:prstGeom prst="straightConnector1">
+            <a:avLst/>
+          </a:prstGeom>
+          <a:ln>
+            <a:prstDash val="dash"/>
+            <a:tailEnd type="triangle"/>
+          </a:ln>
+        </p:spPr>
+        <p:style>
+          <a:lnRef idx="1">
+            <a:schemeClr val="accent1"/>
+          </a:lnRef>
+          <a:fillRef idx="0">
+            <a:schemeClr val="accent1"/>
+          </a:fillRef>
+          <a:effectRef idx="0">
+            <a:schemeClr val="accent1"/>
+          </a:effectRef>
+          <a:fontRef idx="minor">
+            <a:schemeClr val="tx1"/>
+          </a:fontRef>
+        </p:style>
+      </p:cxnSp>
+      <p:cxnSp>
+        <p:nvCxnSpPr>
+          <p:cNvPr id="104" name="直接箭头连接符 103"/>
+          <p:cNvCxnSpPr/>
+          <p:nvPr/>
+        </p:nvCxnSpPr>
+        <p:spPr>
+          <a:xfrm flipH="1">
+            <a:off x="2611327" y="4937759"/>
+            <a:ext cx="91353" cy="394767"/>
+          </a:xfrm>
+          <a:prstGeom prst="straightConnector1">
+            <a:avLst/>
+          </a:prstGeom>
+          <a:ln>
+            <a:prstDash val="dash"/>
+            <a:tailEnd type="triangle"/>
+          </a:ln>
+        </p:spPr>
+        <p:style>
+          <a:lnRef idx="1">
+            <a:schemeClr val="accent1"/>
+          </a:lnRef>
+          <a:fillRef idx="0">
+            <a:schemeClr val="accent1"/>
+          </a:fillRef>
+          <a:effectRef idx="0">
+            <a:schemeClr val="accent1"/>
+          </a:effectRef>
+          <a:fontRef idx="minor">
+            <a:schemeClr val="tx1"/>
+          </a:fontRef>
+        </p:style>
+      </p:cxnSp>
+      <p:cxnSp>
+        <p:nvCxnSpPr>
+          <p:cNvPr id="105" name="直接箭头连接符 104"/>
+          <p:cNvCxnSpPr/>
+          <p:nvPr/>
+        </p:nvCxnSpPr>
+        <p:spPr>
+          <a:xfrm flipH="1">
+            <a:off x="3095640" y="4937759"/>
+            <a:ext cx="91353" cy="394767"/>
+          </a:xfrm>
+          <a:prstGeom prst="straightConnector1">
+            <a:avLst/>
+          </a:prstGeom>
+          <a:ln>
+            <a:prstDash val="dash"/>
+            <a:tailEnd type="triangle"/>
+          </a:ln>
+        </p:spPr>
+        <p:style>
+          <a:lnRef idx="1">
+            <a:schemeClr val="accent1"/>
+          </a:lnRef>
+          <a:fillRef idx="0">
+            <a:schemeClr val="accent1"/>
+          </a:fillRef>
+          <a:effectRef idx="0">
+            <a:schemeClr val="accent1"/>
+          </a:effectRef>
+          <a:fontRef idx="minor">
+            <a:schemeClr val="tx1"/>
+          </a:fontRef>
+        </p:style>
+      </p:cxnSp>
+      <p:cxnSp>
+        <p:nvCxnSpPr>
+          <p:cNvPr id="106" name="直接箭头连接符 105"/>
+          <p:cNvCxnSpPr/>
+          <p:nvPr/>
+        </p:nvCxnSpPr>
+        <p:spPr>
+          <a:xfrm flipH="1">
+            <a:off x="3546158" y="4937759"/>
+            <a:ext cx="91353" cy="394767"/>
+          </a:xfrm>
+          <a:prstGeom prst="straightConnector1">
+            <a:avLst/>
+          </a:prstGeom>
+          <a:ln>
+            <a:prstDash val="dash"/>
+            <a:tailEnd type="triangle"/>
+          </a:ln>
+        </p:spPr>
+        <p:style>
+          <a:lnRef idx="1">
+            <a:schemeClr val="accent1"/>
+          </a:lnRef>
+          <a:fillRef idx="0">
+            <a:schemeClr val="accent1"/>
+          </a:fillRef>
+          <a:effectRef idx="0">
+            <a:schemeClr val="accent1"/>
+          </a:effectRef>
+          <a:fontRef idx="minor">
+            <a:schemeClr val="tx1"/>
+          </a:fontRef>
+        </p:style>
+      </p:cxnSp>
+      <p:cxnSp>
+        <p:nvCxnSpPr>
+          <p:cNvPr id="107" name="直接箭头连接符 106"/>
+          <p:cNvCxnSpPr/>
+          <p:nvPr/>
+        </p:nvCxnSpPr>
+        <p:spPr>
+          <a:xfrm flipH="1">
+            <a:off x="4028573" y="4937759"/>
+            <a:ext cx="91353" cy="394767"/>
+          </a:xfrm>
+          <a:prstGeom prst="straightConnector1">
+            <a:avLst/>
+          </a:prstGeom>
+          <a:ln>
+            <a:prstDash val="dash"/>
+            <a:tailEnd type="triangle"/>
+          </a:ln>
+        </p:spPr>
+        <p:style>
+          <a:lnRef idx="1">
+            <a:schemeClr val="accent1"/>
+          </a:lnRef>
+          <a:fillRef idx="0">
+            <a:schemeClr val="accent1"/>
+          </a:fillRef>
+          <a:effectRef idx="0">
+            <a:schemeClr val="accent1"/>
+          </a:effectRef>
+          <a:fontRef idx="minor">
+            <a:schemeClr val="tx1"/>
+          </a:fontRef>
+        </p:style>
+      </p:cxnSp>
+      <p:cxnSp>
+        <p:nvCxnSpPr>
+          <p:cNvPr id="108" name="直接箭头连接符 107"/>
+          <p:cNvCxnSpPr/>
+          <p:nvPr/>
+        </p:nvCxnSpPr>
+        <p:spPr>
+          <a:xfrm flipH="1">
+            <a:off x="4502638" y="4937759"/>
+            <a:ext cx="91353" cy="394767"/>
+          </a:xfrm>
+          <a:prstGeom prst="straightConnector1">
+            <a:avLst/>
+          </a:prstGeom>
+          <a:ln>
+            <a:prstDash val="dash"/>
+            <a:tailEnd type="triangle"/>
+          </a:ln>
+        </p:spPr>
+        <p:style>
+          <a:lnRef idx="1">
+            <a:schemeClr val="accent1"/>
+          </a:lnRef>
+          <a:fillRef idx="0">
+            <a:schemeClr val="accent1"/>
+          </a:fillRef>
+          <a:effectRef idx="0">
+            <a:schemeClr val="accent1"/>
+          </a:effectRef>
+          <a:fontRef idx="minor">
+            <a:schemeClr val="tx1"/>
+          </a:fontRef>
+        </p:style>
+      </p:cxnSp>
+      <p:cxnSp>
+        <p:nvCxnSpPr>
+          <p:cNvPr id="109" name="直接箭头连接符 108"/>
+          <p:cNvCxnSpPr/>
+          <p:nvPr/>
+        </p:nvCxnSpPr>
+        <p:spPr>
+          <a:xfrm flipH="1">
+            <a:off x="4984185" y="4937758"/>
+            <a:ext cx="91353" cy="394767"/>
+          </a:xfrm>
+          <a:prstGeom prst="straightConnector1">
+            <a:avLst/>
+          </a:prstGeom>
+          <a:ln>
+            <a:prstDash val="dash"/>
+            <a:tailEnd type="triangle"/>
+          </a:ln>
+        </p:spPr>
+        <p:style>
+          <a:lnRef idx="1">
+            <a:schemeClr val="accent1"/>
+          </a:lnRef>
+          <a:fillRef idx="0">
+            <a:schemeClr val="accent1"/>
+          </a:fillRef>
+          <a:effectRef idx="0">
+            <a:schemeClr val="accent1"/>
+          </a:effectRef>
+          <a:fontRef idx="minor">
+            <a:schemeClr val="tx1"/>
+          </a:fontRef>
+        </p:style>
+      </p:cxnSp>
+      <p:cxnSp>
+        <p:nvCxnSpPr>
+          <p:cNvPr id="110" name="直接箭头连接符 109"/>
+          <p:cNvCxnSpPr/>
+          <p:nvPr/>
+        </p:nvCxnSpPr>
+        <p:spPr>
+          <a:xfrm flipH="1">
+            <a:off x="5416059" y="4929533"/>
+            <a:ext cx="91353" cy="394767"/>
+          </a:xfrm>
+          <a:prstGeom prst="straightConnector1">
+            <a:avLst/>
+          </a:prstGeom>
+          <a:ln>
+            <a:prstDash val="dash"/>
+            <a:tailEnd type="triangle"/>
+          </a:ln>
+        </p:spPr>
+        <p:style>
+          <a:lnRef idx="1">
+            <a:schemeClr val="accent1"/>
+          </a:lnRef>
+          <a:fillRef idx="0">
+            <a:schemeClr val="accent1"/>
+          </a:fillRef>
+          <a:effectRef idx="0">
+            <a:schemeClr val="accent1"/>
+          </a:effectRef>
+          <a:fontRef idx="minor">
+            <a:schemeClr val="tx1"/>
+          </a:fontRef>
+        </p:style>
+      </p:cxnSp>
+      <p:cxnSp>
+        <p:nvCxnSpPr>
+          <p:cNvPr id="111" name="直接箭头连接符 110"/>
+          <p:cNvCxnSpPr/>
+          <p:nvPr/>
+        </p:nvCxnSpPr>
+        <p:spPr>
+          <a:xfrm flipH="1">
+            <a:off x="5929720" y="4917064"/>
+            <a:ext cx="91353" cy="394767"/>
+          </a:xfrm>
+          <a:prstGeom prst="straightConnector1">
+            <a:avLst/>
+          </a:prstGeom>
+          <a:ln>
+            <a:prstDash val="dash"/>
+            <a:tailEnd type="triangle"/>
+          </a:ln>
+        </p:spPr>
+        <p:style>
+          <a:lnRef idx="1">
+            <a:schemeClr val="accent1"/>
+          </a:lnRef>
+          <a:fillRef idx="0">
+            <a:schemeClr val="accent1"/>
+          </a:fillRef>
+          <a:effectRef idx="0">
+            <a:schemeClr val="accent1"/>
+          </a:effectRef>
+          <a:fontRef idx="minor">
+            <a:schemeClr val="tx1"/>
+          </a:fontRef>
+        </p:style>
+      </p:cxnSp>
+      <p:cxnSp>
+        <p:nvCxnSpPr>
+          <p:cNvPr id="112" name="直接箭头连接符 111"/>
+          <p:cNvCxnSpPr/>
+          <p:nvPr/>
+        </p:nvCxnSpPr>
+        <p:spPr>
+          <a:xfrm flipH="1">
+            <a:off x="6368527" y="4927412"/>
+            <a:ext cx="91353" cy="394767"/>
+          </a:xfrm>
+          <a:prstGeom prst="straightConnector1">
+            <a:avLst/>
+          </a:prstGeom>
+          <a:ln>
+            <a:prstDash val="dash"/>
+            <a:tailEnd type="triangle"/>
+          </a:ln>
+        </p:spPr>
+        <p:style>
+          <a:lnRef idx="1">
+            <a:schemeClr val="accent1"/>
+          </a:lnRef>
+          <a:fillRef idx="0">
+            <a:schemeClr val="accent1"/>
+          </a:fillRef>
+          <a:effectRef idx="0">
+            <a:schemeClr val="accent1"/>
+          </a:effectRef>
+          <a:fontRef idx="minor">
+            <a:schemeClr val="tx1"/>
+          </a:fontRef>
+        </p:style>
+      </p:cxnSp>
+      <p:cxnSp>
+        <p:nvCxnSpPr>
+          <p:cNvPr id="113" name="直接箭头连接符 112"/>
+          <p:cNvCxnSpPr/>
+          <p:nvPr/>
+        </p:nvCxnSpPr>
+        <p:spPr>
+          <a:xfrm flipH="1">
+            <a:off x="6858580" y="4910959"/>
+            <a:ext cx="91353" cy="394767"/>
+          </a:xfrm>
+          <a:prstGeom prst="straightConnector1">
+            <a:avLst/>
+          </a:prstGeom>
+          <a:ln>
+            <a:prstDash val="dash"/>
+            <a:tailEnd type="triangle"/>
+          </a:ln>
+        </p:spPr>
+        <p:style>
+          <a:lnRef idx="1">
+            <a:schemeClr val="accent1"/>
+          </a:lnRef>
+          <a:fillRef idx="0">
+            <a:schemeClr val="accent1"/>
+          </a:fillRef>
+          <a:effectRef idx="0">
+            <a:schemeClr val="accent1"/>
+          </a:effectRef>
+          <a:fontRef idx="minor">
+            <a:schemeClr val="tx1"/>
+          </a:fontRef>
+        </p:style>
+      </p:cxnSp>
+      <p:cxnSp>
+        <p:nvCxnSpPr>
+          <p:cNvPr id="114" name="直接箭头连接符 113"/>
+          <p:cNvCxnSpPr/>
+          <p:nvPr/>
+        </p:nvCxnSpPr>
+        <p:spPr>
+          <a:xfrm flipH="1">
+            <a:off x="7309142" y="4927412"/>
+            <a:ext cx="91353" cy="394767"/>
+          </a:xfrm>
+          <a:prstGeom prst="straightConnector1">
+            <a:avLst/>
+          </a:prstGeom>
+          <a:ln>
+            <a:prstDash val="dash"/>
+            <a:tailEnd type="triangle"/>
+          </a:ln>
+        </p:spPr>
+        <p:style>
+          <a:lnRef idx="1">
+            <a:schemeClr val="accent1"/>
+          </a:lnRef>
+          <a:fillRef idx="0">
+            <a:schemeClr val="accent1"/>
+          </a:fillRef>
+          <a:effectRef idx="0">
+            <a:schemeClr val="accent1"/>
+          </a:effectRef>
+          <a:fontRef idx="minor">
+            <a:schemeClr val="tx1"/>
+          </a:fontRef>
+        </p:style>
+      </p:cxnSp>
+      <p:cxnSp>
+        <p:nvCxnSpPr>
+          <p:cNvPr id="115" name="直接箭头连接符 114"/>
+          <p:cNvCxnSpPr/>
+          <p:nvPr/>
+        </p:nvCxnSpPr>
+        <p:spPr>
+          <a:xfrm flipH="1">
+            <a:off x="7774993" y="4927412"/>
+            <a:ext cx="91353" cy="394767"/>
+          </a:xfrm>
+          <a:prstGeom prst="straightConnector1">
+            <a:avLst/>
+          </a:prstGeom>
+          <a:ln>
+            <a:prstDash val="dash"/>
+            <a:tailEnd type="triangle"/>
+          </a:ln>
+        </p:spPr>
+        <p:style>
+          <a:lnRef idx="1">
+            <a:schemeClr val="accent1"/>
+          </a:lnRef>
+          <a:fillRef idx="0">
+            <a:schemeClr val="accent1"/>
+          </a:fillRef>
+          <a:effectRef idx="0">
+            <a:schemeClr val="accent1"/>
+          </a:effectRef>
+          <a:fontRef idx="minor">
+            <a:schemeClr val="tx1"/>
+          </a:fontRef>
+        </p:style>
+      </p:cxnSp>
+      <p:cxnSp>
+        <p:nvCxnSpPr>
+          <p:cNvPr id="116" name="直接箭头连接符 115"/>
+          <p:cNvCxnSpPr/>
+          <p:nvPr/>
+        </p:nvCxnSpPr>
+        <p:spPr>
+          <a:xfrm flipH="1">
+            <a:off x="8231808" y="4927412"/>
+            <a:ext cx="91353" cy="394767"/>
+          </a:xfrm>
+          <a:prstGeom prst="straightConnector1">
+            <a:avLst/>
+          </a:prstGeom>
+          <a:ln>
+            <a:prstDash val="dash"/>
+            <a:tailEnd type="triangle"/>
+          </a:ln>
+        </p:spPr>
+        <p:style>
+          <a:lnRef idx="1">
+            <a:schemeClr val="accent1"/>
+          </a:lnRef>
+          <a:fillRef idx="0">
+            <a:schemeClr val="accent1"/>
+          </a:fillRef>
+          <a:effectRef idx="0">
+            <a:schemeClr val="accent1"/>
+          </a:effectRef>
+          <a:fontRef idx="minor">
+            <a:schemeClr val="tx1"/>
+          </a:fontRef>
+        </p:style>
+      </p:cxnSp>
+      <p:cxnSp>
+        <p:nvCxnSpPr>
+          <p:cNvPr id="117" name="直接箭头连接符 116"/>
+          <p:cNvCxnSpPr>
+            <a:stCxn id="40" idx="4"/>
+            <a:endCxn id="9" idx="0"/>
+          </p:cNvCxnSpPr>
+          <p:nvPr/>
+        </p:nvCxnSpPr>
+        <p:spPr>
+          <a:xfrm>
+            <a:off x="1371600" y="4937760"/>
+            <a:ext cx="92917" cy="374072"/>
+          </a:xfrm>
+          <a:prstGeom prst="straightConnector1">
+            <a:avLst/>
+          </a:prstGeom>
+          <a:ln>
+            <a:tailEnd type="triangle"/>
+          </a:ln>
+        </p:spPr>
+        <p:style>
+          <a:lnRef idx="1">
+            <a:schemeClr val="accent1"/>
+          </a:lnRef>
+          <a:fillRef idx="0">
+            <a:schemeClr val="accent1"/>
+          </a:fillRef>
+          <a:effectRef idx="0">
+            <a:schemeClr val="accent1"/>
+          </a:effectRef>
+          <a:fontRef idx="minor">
+            <a:schemeClr val="tx1"/>
+          </a:fontRef>
+        </p:style>
+      </p:cxnSp>
+      <p:cxnSp>
+        <p:nvCxnSpPr>
+          <p:cNvPr id="118" name="直接箭头连接符 117"/>
+          <p:cNvCxnSpPr>
+            <a:endCxn id="11" idx="0"/>
+          </p:cNvCxnSpPr>
+          <p:nvPr/>
+        </p:nvCxnSpPr>
+        <p:spPr>
+          <a:xfrm>
+            <a:off x="1804277" y="4906801"/>
+            <a:ext cx="128708" cy="405031"/>
+          </a:xfrm>
+          <a:prstGeom prst="straightConnector1">
+            <a:avLst/>
+          </a:prstGeom>
+          <a:ln>
+            <a:prstDash val="dash"/>
+            <a:tailEnd type="triangle"/>
+          </a:ln>
+        </p:spPr>
+        <p:style>
+          <a:lnRef idx="1">
+            <a:schemeClr val="accent1"/>
+          </a:lnRef>
+          <a:fillRef idx="0">
+            <a:schemeClr val="accent1"/>
+          </a:fillRef>
+          <a:effectRef idx="0">
+            <a:schemeClr val="accent1"/>
+          </a:effectRef>
+          <a:fontRef idx="minor">
+            <a:schemeClr val="tx1"/>
+          </a:fontRef>
+        </p:style>
+      </p:cxnSp>
+      <p:cxnSp>
+        <p:nvCxnSpPr>
+          <p:cNvPr id="119" name="直接箭头连接符 118"/>
+          <p:cNvCxnSpPr/>
+          <p:nvPr/>
+        </p:nvCxnSpPr>
+        <p:spPr>
+          <a:xfrm>
+            <a:off x="2303716" y="4925545"/>
+            <a:ext cx="92917" cy="374072"/>
+          </a:xfrm>
+          <a:prstGeom prst="straightConnector1">
+            <a:avLst/>
+          </a:prstGeom>
+          <a:ln>
+            <a:prstDash val="dash"/>
+            <a:tailEnd type="triangle"/>
+          </a:ln>
+        </p:spPr>
+        <p:style>
+          <a:lnRef idx="1">
+            <a:schemeClr val="accent1"/>
+          </a:lnRef>
+          <a:fillRef idx="0">
+            <a:schemeClr val="accent1"/>
+          </a:fillRef>
+          <a:effectRef idx="0">
+            <a:schemeClr val="accent1"/>
+          </a:effectRef>
+          <a:fontRef idx="minor">
+            <a:schemeClr val="tx1"/>
+          </a:fontRef>
+        </p:style>
+      </p:cxnSp>
+      <p:cxnSp>
+        <p:nvCxnSpPr>
+          <p:cNvPr id="120" name="直接箭头连接符 119"/>
+          <p:cNvCxnSpPr>
+            <a:endCxn id="15" idx="0"/>
+          </p:cNvCxnSpPr>
+          <p:nvPr/>
+        </p:nvCxnSpPr>
+        <p:spPr>
+          <a:xfrm>
+            <a:off x="2726878" y="4906801"/>
+            <a:ext cx="143043" cy="405031"/>
+          </a:xfrm>
+          <a:prstGeom prst="straightConnector1">
+            <a:avLst/>
+          </a:prstGeom>
+          <a:ln>
+            <a:prstDash val="dash"/>
+            <a:tailEnd type="triangle"/>
+          </a:ln>
+        </p:spPr>
+        <p:style>
+          <a:lnRef idx="1">
+            <a:schemeClr val="accent1"/>
+          </a:lnRef>
+          <a:fillRef idx="0">
+            <a:schemeClr val="accent1"/>
+          </a:fillRef>
+          <a:effectRef idx="0">
+            <a:schemeClr val="accent1"/>
+          </a:effectRef>
+          <a:fontRef idx="minor">
+            <a:schemeClr val="tx1"/>
+          </a:fontRef>
+        </p:style>
+      </p:cxnSp>
+      <p:cxnSp>
+        <p:nvCxnSpPr>
+          <p:cNvPr id="121" name="直接箭头连接符 120"/>
+          <p:cNvCxnSpPr/>
+          <p:nvPr/>
+        </p:nvCxnSpPr>
+        <p:spPr>
+          <a:xfrm>
+            <a:off x="3202075" y="4941913"/>
+            <a:ext cx="92917" cy="374072"/>
+          </a:xfrm>
+          <a:prstGeom prst="straightConnector1">
+            <a:avLst/>
+          </a:prstGeom>
+          <a:ln>
+            <a:prstDash val="dash"/>
+            <a:tailEnd type="triangle"/>
+          </a:ln>
+        </p:spPr>
+        <p:style>
+          <a:lnRef idx="1">
+            <a:schemeClr val="accent1"/>
+          </a:lnRef>
+          <a:fillRef idx="0">
+            <a:schemeClr val="accent1"/>
+          </a:fillRef>
+          <a:effectRef idx="0">
+            <a:schemeClr val="accent1"/>
+          </a:effectRef>
+          <a:fontRef idx="minor">
+            <a:schemeClr val="tx1"/>
+          </a:fontRef>
+        </p:style>
+      </p:cxnSp>
+      <p:cxnSp>
+        <p:nvCxnSpPr>
+          <p:cNvPr id="122" name="直接箭头连接符 121"/>
+          <p:cNvCxnSpPr>
+            <a:endCxn id="19" idx="0"/>
+          </p:cNvCxnSpPr>
+          <p:nvPr/>
+        </p:nvCxnSpPr>
+        <p:spPr>
+          <a:xfrm>
+            <a:off x="3683877" y="4908666"/>
+            <a:ext cx="122980" cy="403166"/>
+          </a:xfrm>
+          <a:prstGeom prst="straightConnector1">
+            <a:avLst/>
+          </a:prstGeom>
+          <a:ln>
+            <a:prstDash val="dash"/>
+            <a:tailEnd type="triangle"/>
+          </a:ln>
+        </p:spPr>
+        <p:style>
+          <a:lnRef idx="1">
+            <a:schemeClr val="accent1"/>
+          </a:lnRef>
+          <a:fillRef idx="0">
+            <a:schemeClr val="accent1"/>
+          </a:fillRef>
+          <a:effectRef idx="0">
+            <a:schemeClr val="accent1"/>
+          </a:effectRef>
+          <a:fontRef idx="minor">
+            <a:schemeClr val="tx1"/>
+          </a:fontRef>
+        </p:style>
+      </p:cxnSp>
+      <p:cxnSp>
+        <p:nvCxnSpPr>
+          <p:cNvPr id="123" name="直接箭头连接符 122"/>
+          <p:cNvCxnSpPr>
+            <a:endCxn id="21" idx="1"/>
+          </p:cNvCxnSpPr>
+          <p:nvPr/>
+        </p:nvCxnSpPr>
+        <p:spPr>
+          <a:xfrm>
+            <a:off x="4149898" y="4896365"/>
+            <a:ext cx="75463" cy="436162"/>
+          </a:xfrm>
+          <a:prstGeom prst="straightConnector1">
+            <a:avLst/>
+          </a:prstGeom>
+          <a:ln>
+            <a:prstDash val="dash"/>
+            <a:tailEnd type="triangle"/>
+          </a:ln>
+        </p:spPr>
+        <p:style>
+          <a:lnRef idx="1">
+            <a:schemeClr val="accent1"/>
+          </a:lnRef>
+          <a:fillRef idx="0">
+            <a:schemeClr val="accent1"/>
+          </a:fillRef>
+          <a:effectRef idx="0">
+            <a:schemeClr val="accent1"/>
+          </a:effectRef>
+          <a:fontRef idx="minor">
+            <a:schemeClr val="tx1"/>
+          </a:fontRef>
+        </p:style>
+      </p:cxnSp>
+      <p:cxnSp>
+        <p:nvCxnSpPr>
+          <p:cNvPr id="124" name="直接箭头连接符 123"/>
+          <p:cNvCxnSpPr>
+            <a:endCxn id="23" idx="0"/>
+          </p:cNvCxnSpPr>
+          <p:nvPr/>
+        </p:nvCxnSpPr>
+        <p:spPr>
+          <a:xfrm>
+            <a:off x="4624427" y="4871255"/>
+            <a:ext cx="119366" cy="440577"/>
+          </a:xfrm>
+          <a:prstGeom prst="straightConnector1">
+            <a:avLst/>
+          </a:prstGeom>
+          <a:ln>
+            <a:prstDash val="dash"/>
+            <a:tailEnd type="triangle"/>
+          </a:ln>
+        </p:spPr>
+        <p:style>
+          <a:lnRef idx="1">
+            <a:schemeClr val="accent1"/>
+          </a:lnRef>
+          <a:fillRef idx="0">
+            <a:schemeClr val="accent1"/>
+          </a:fillRef>
+          <a:effectRef idx="0">
+            <a:schemeClr val="accent1"/>
+          </a:effectRef>
+          <a:fontRef idx="minor">
+            <a:schemeClr val="tx1"/>
+          </a:fontRef>
+        </p:style>
+      </p:cxnSp>
+      <p:cxnSp>
+        <p:nvCxnSpPr>
+          <p:cNvPr id="125" name="直接箭头连接符 124"/>
+          <p:cNvCxnSpPr>
+            <a:endCxn id="25" idx="0"/>
+          </p:cNvCxnSpPr>
+          <p:nvPr/>
+        </p:nvCxnSpPr>
+        <p:spPr>
+          <a:xfrm>
+            <a:off x="5099405" y="4896365"/>
+            <a:ext cx="112856" cy="415467"/>
+          </a:xfrm>
+          <a:prstGeom prst="straightConnector1">
+            <a:avLst/>
+          </a:prstGeom>
+          <a:ln>
+            <a:prstDash val="dash"/>
+            <a:tailEnd type="triangle"/>
+          </a:ln>
+        </p:spPr>
+        <p:style>
+          <a:lnRef idx="1">
+            <a:schemeClr val="accent1"/>
+          </a:lnRef>
+          <a:fillRef idx="0">
+            <a:schemeClr val="accent1"/>
+          </a:fillRef>
+          <a:effectRef idx="0">
+            <a:schemeClr val="accent1"/>
+          </a:effectRef>
+          <a:fontRef idx="minor">
+            <a:schemeClr val="tx1"/>
+          </a:fontRef>
+        </p:style>
+      </p:cxnSp>
+      <p:cxnSp>
+        <p:nvCxnSpPr>
+          <p:cNvPr id="126" name="直接箭头连接符 125"/>
+          <p:cNvCxnSpPr/>
+          <p:nvPr/>
+        </p:nvCxnSpPr>
+        <p:spPr>
+          <a:xfrm>
+            <a:off x="5572852" y="4914940"/>
+            <a:ext cx="92917" cy="374072"/>
+          </a:xfrm>
+          <a:prstGeom prst="straightConnector1">
+            <a:avLst/>
+          </a:prstGeom>
+          <a:ln>
+            <a:prstDash val="dash"/>
+            <a:tailEnd type="triangle"/>
+          </a:ln>
+        </p:spPr>
+        <p:style>
+          <a:lnRef idx="1">
+            <a:schemeClr val="accent1"/>
+          </a:lnRef>
+          <a:fillRef idx="0">
+            <a:schemeClr val="accent1"/>
+          </a:fillRef>
+          <a:effectRef idx="0">
+            <a:schemeClr val="accent1"/>
+          </a:effectRef>
+          <a:fontRef idx="minor">
+            <a:schemeClr val="tx1"/>
+          </a:fontRef>
+        </p:style>
+      </p:cxnSp>
+      <p:cxnSp>
+        <p:nvCxnSpPr>
+          <p:cNvPr id="127" name="直接箭头连接符 126"/>
+          <p:cNvCxnSpPr/>
+          <p:nvPr/>
+        </p:nvCxnSpPr>
+        <p:spPr>
+          <a:xfrm>
+            <a:off x="6029829" y="4914940"/>
+            <a:ext cx="92917" cy="374072"/>
+          </a:xfrm>
+          <a:prstGeom prst="straightConnector1">
+            <a:avLst/>
+          </a:prstGeom>
+          <a:ln>
+            <a:prstDash val="dash"/>
+            <a:tailEnd type="triangle"/>
+          </a:ln>
+        </p:spPr>
+        <p:style>
+          <a:lnRef idx="1">
+            <a:schemeClr val="accent1"/>
+          </a:lnRef>
+          <a:fillRef idx="0">
+            <a:schemeClr val="accent1"/>
+          </a:fillRef>
+          <a:effectRef idx="0">
+            <a:schemeClr val="accent1"/>
+          </a:effectRef>
+          <a:fontRef idx="minor">
+            <a:schemeClr val="tx1"/>
+          </a:fontRef>
+        </p:style>
+      </p:cxnSp>
+      <p:cxnSp>
+        <p:nvCxnSpPr>
+          <p:cNvPr id="128" name="直接箭头连接符 127"/>
+          <p:cNvCxnSpPr>
+            <a:endCxn id="31" idx="0"/>
+          </p:cNvCxnSpPr>
+          <p:nvPr/>
+        </p:nvCxnSpPr>
+        <p:spPr>
+          <a:xfrm>
+            <a:off x="6472819" y="4888051"/>
+            <a:ext cx="144846" cy="423781"/>
+          </a:xfrm>
+          <a:prstGeom prst="straightConnector1">
+            <a:avLst/>
+          </a:prstGeom>
+          <a:ln>
+            <a:prstDash val="dash"/>
+            <a:tailEnd type="triangle"/>
+          </a:ln>
+        </p:spPr>
+        <p:style>
+          <a:lnRef idx="1">
+            <a:schemeClr val="accent1"/>
+          </a:lnRef>
+          <a:fillRef idx="0">
+            <a:schemeClr val="accent1"/>
+          </a:fillRef>
+          <a:effectRef idx="0">
+            <a:schemeClr val="accent1"/>
+          </a:effectRef>
+          <a:fontRef idx="minor">
+            <a:schemeClr val="tx1"/>
+          </a:fontRef>
+        </p:style>
+      </p:cxnSp>
+      <p:cxnSp>
+        <p:nvCxnSpPr>
+          <p:cNvPr id="129" name="直接箭头连接符 128"/>
+          <p:cNvCxnSpPr>
+            <a:endCxn id="33" idx="7"/>
+          </p:cNvCxnSpPr>
+          <p:nvPr/>
+        </p:nvCxnSpPr>
+        <p:spPr>
+          <a:xfrm>
+            <a:off x="6964436" y="4906801"/>
+            <a:ext cx="171660" cy="425726"/>
+          </a:xfrm>
+          <a:prstGeom prst="straightConnector1">
+            <a:avLst/>
+          </a:prstGeom>
+          <a:ln>
+            <a:prstDash val="dash"/>
+            <a:tailEnd type="triangle"/>
+          </a:ln>
+        </p:spPr>
+        <p:style>
+          <a:lnRef idx="1">
+            <a:schemeClr val="accent1"/>
+          </a:lnRef>
+          <a:fillRef idx="0">
+            <a:schemeClr val="accent1"/>
+          </a:fillRef>
+          <a:effectRef idx="0">
+            <a:schemeClr val="accent1"/>
+          </a:effectRef>
+          <a:fontRef idx="minor">
+            <a:schemeClr val="tx1"/>
+          </a:fontRef>
+        </p:style>
+      </p:cxnSp>
+      <p:cxnSp>
+        <p:nvCxnSpPr>
+          <p:cNvPr id="130" name="直接箭头连接符 129"/>
+          <p:cNvCxnSpPr/>
+          <p:nvPr/>
+        </p:nvCxnSpPr>
+        <p:spPr>
+          <a:xfrm>
+            <a:off x="7445659" y="4921306"/>
+            <a:ext cx="92917" cy="374072"/>
+          </a:xfrm>
+          <a:prstGeom prst="straightConnector1">
+            <a:avLst/>
+          </a:prstGeom>
+          <a:ln>
+            <a:prstDash val="dash"/>
+            <a:tailEnd type="triangle"/>
+          </a:ln>
+        </p:spPr>
+        <p:style>
+          <a:lnRef idx="1">
+            <a:schemeClr val="accent1"/>
+          </a:lnRef>
+          <a:fillRef idx="0">
+            <a:schemeClr val="accent1"/>
+          </a:fillRef>
+          <a:effectRef idx="0">
+            <a:schemeClr val="accent1"/>
+          </a:effectRef>
+          <a:fontRef idx="minor">
+            <a:schemeClr val="tx1"/>
+          </a:fontRef>
+        </p:style>
+      </p:cxnSp>
+      <p:cxnSp>
+        <p:nvCxnSpPr>
+          <p:cNvPr id="131" name="直接箭头连接符 130"/>
+          <p:cNvCxnSpPr>
+            <a:endCxn id="37" idx="0"/>
+          </p:cNvCxnSpPr>
+          <p:nvPr/>
+        </p:nvCxnSpPr>
+        <p:spPr>
+          <a:xfrm>
+            <a:off x="7876704" y="4921306"/>
+            <a:ext cx="146365" cy="390526"/>
+          </a:xfrm>
+          <a:prstGeom prst="straightConnector1">
+            <a:avLst/>
+          </a:prstGeom>
+          <a:ln>
+            <a:prstDash val="dash"/>
+            <a:tailEnd type="triangle"/>
+          </a:ln>
+        </p:spPr>
+        <p:style>
+          <a:lnRef idx="1">
+            <a:schemeClr val="accent1"/>
+          </a:lnRef>
+          <a:fillRef idx="0">
+            <a:schemeClr val="accent1"/>
+          </a:fillRef>
+          <a:effectRef idx="0">
+            <a:schemeClr val="accent1"/>
+          </a:effectRef>
+          <a:fontRef idx="minor">
+            <a:schemeClr val="tx1"/>
+          </a:fontRef>
+        </p:style>
+      </p:cxnSp>
+      <p:cxnSp>
+        <p:nvCxnSpPr>
+          <p:cNvPr id="132" name="直接箭头连接符 131"/>
+          <p:cNvCxnSpPr>
+            <a:endCxn id="39" idx="1"/>
+          </p:cNvCxnSpPr>
+          <p:nvPr/>
+        </p:nvCxnSpPr>
+        <p:spPr>
+          <a:xfrm>
+            <a:off x="8352161" y="4902643"/>
+            <a:ext cx="89424" cy="429884"/>
+          </a:xfrm>
+          <a:prstGeom prst="straightConnector1">
+            <a:avLst/>
+          </a:prstGeom>
+          <a:ln>
+            <a:prstDash val="dash"/>
+            <a:tailEnd type="triangle"/>
+          </a:ln>
+        </p:spPr>
+        <p:style>
+          <a:lnRef idx="1">
+            <a:schemeClr val="accent1"/>
+          </a:lnRef>
+          <a:fillRef idx="0">
+            <a:schemeClr val="accent1"/>
+          </a:fillRef>
+          <a:effectRef idx="0">
+            <a:schemeClr val="accent1"/>
+          </a:effectRef>
+          <a:fontRef idx="minor">
+            <a:schemeClr val="tx1"/>
+          </a:fontRef>
+        </p:style>
+      </p:cxnSp>
+    </p:spTree>
+    <p:extLst>
+      <p:ext uri="{BB962C8B-B14F-4D97-AF65-F5344CB8AC3E}">
+        <p14:creationId xmlns:p14="http://schemas.microsoft.com/office/powerpoint/2010/main" val="3824382024"/>
       </p:ext>
     </p:extLst>
   </p:cSld>

--- a/音视频编解码.pptx
+++ b/音视频编解码.pptx
@@ -9,6 +9,7 @@
     <p:sldId id="257" r:id="rId3"/>
     <p:sldId id="258" r:id="rId4"/>
     <p:sldId id="259" r:id="rId5"/>
+    <p:sldId id="260" r:id="rId6"/>
   </p:sldIdLst>
   <p:sldSz cx="12192000" cy="6858000"/>
   <p:notesSz cx="6858000" cy="9144000"/>
@@ -246,7 +247,7 @@
           <a:p>
             <a:fld id="{EA80D996-CE9E-432A-86C4-A040E9078786}" type="datetimeFigureOut">
               <a:rPr lang="zh-CN" altLang="en-US" smtClean="0"/>
-              <a:t>2019/3/2</a:t>
+              <a:t>2019/4/20</a:t>
             </a:fld>
             <a:endParaRPr lang="zh-CN" altLang="en-US"/>
           </a:p>
@@ -416,7 +417,7 @@
           <a:p>
             <a:fld id="{EA80D996-CE9E-432A-86C4-A040E9078786}" type="datetimeFigureOut">
               <a:rPr lang="zh-CN" altLang="en-US" smtClean="0"/>
-              <a:t>2019/3/2</a:t>
+              <a:t>2019/4/20</a:t>
             </a:fld>
             <a:endParaRPr lang="zh-CN" altLang="en-US"/>
           </a:p>
@@ -596,7 +597,7 @@
           <a:p>
             <a:fld id="{EA80D996-CE9E-432A-86C4-A040E9078786}" type="datetimeFigureOut">
               <a:rPr lang="zh-CN" altLang="en-US" smtClean="0"/>
-              <a:t>2019/3/2</a:t>
+              <a:t>2019/4/20</a:t>
             </a:fld>
             <a:endParaRPr lang="zh-CN" altLang="en-US"/>
           </a:p>
@@ -766,7 +767,7 @@
           <a:p>
             <a:fld id="{EA80D996-CE9E-432A-86C4-A040E9078786}" type="datetimeFigureOut">
               <a:rPr lang="zh-CN" altLang="en-US" smtClean="0"/>
-              <a:t>2019/3/2</a:t>
+              <a:t>2019/4/20</a:t>
             </a:fld>
             <a:endParaRPr lang="zh-CN" altLang="en-US"/>
           </a:p>
@@ -1012,7 +1013,7 @@
           <a:p>
             <a:fld id="{EA80D996-CE9E-432A-86C4-A040E9078786}" type="datetimeFigureOut">
               <a:rPr lang="zh-CN" altLang="en-US" smtClean="0"/>
-              <a:t>2019/3/2</a:t>
+              <a:t>2019/4/20</a:t>
             </a:fld>
             <a:endParaRPr lang="zh-CN" altLang="en-US"/>
           </a:p>
@@ -1244,7 +1245,7 @@
           <a:p>
             <a:fld id="{EA80D996-CE9E-432A-86C4-A040E9078786}" type="datetimeFigureOut">
               <a:rPr lang="zh-CN" altLang="en-US" smtClean="0"/>
-              <a:t>2019/3/2</a:t>
+              <a:t>2019/4/20</a:t>
             </a:fld>
             <a:endParaRPr lang="zh-CN" altLang="en-US"/>
           </a:p>
@@ -1611,7 +1612,7 @@
           <a:p>
             <a:fld id="{EA80D996-CE9E-432A-86C4-A040E9078786}" type="datetimeFigureOut">
               <a:rPr lang="zh-CN" altLang="en-US" smtClean="0"/>
-              <a:t>2019/3/2</a:t>
+              <a:t>2019/4/20</a:t>
             </a:fld>
             <a:endParaRPr lang="zh-CN" altLang="en-US"/>
           </a:p>
@@ -1729,7 +1730,7 @@
           <a:p>
             <a:fld id="{EA80D996-CE9E-432A-86C4-A040E9078786}" type="datetimeFigureOut">
               <a:rPr lang="zh-CN" altLang="en-US" smtClean="0"/>
-              <a:t>2019/3/2</a:t>
+              <a:t>2019/4/20</a:t>
             </a:fld>
             <a:endParaRPr lang="zh-CN" altLang="en-US"/>
           </a:p>
@@ -1824,7 +1825,7 @@
           <a:p>
             <a:fld id="{EA80D996-CE9E-432A-86C4-A040E9078786}" type="datetimeFigureOut">
               <a:rPr lang="zh-CN" altLang="en-US" smtClean="0"/>
-              <a:t>2019/3/2</a:t>
+              <a:t>2019/4/20</a:t>
             </a:fld>
             <a:endParaRPr lang="zh-CN" altLang="en-US"/>
           </a:p>
@@ -2101,7 +2102,7 @@
           <a:p>
             <a:fld id="{EA80D996-CE9E-432A-86C4-A040E9078786}" type="datetimeFigureOut">
               <a:rPr lang="zh-CN" altLang="en-US" smtClean="0"/>
-              <a:t>2019/3/2</a:t>
+              <a:t>2019/4/20</a:t>
             </a:fld>
             <a:endParaRPr lang="zh-CN" altLang="en-US"/>
           </a:p>
@@ -2354,7 +2355,7 @@
           <a:p>
             <a:fld id="{EA80D996-CE9E-432A-86C4-A040E9078786}" type="datetimeFigureOut">
               <a:rPr lang="zh-CN" altLang="en-US" smtClean="0"/>
-              <a:t>2019/3/2</a:t>
+              <a:t>2019/4/20</a:t>
             </a:fld>
             <a:endParaRPr lang="zh-CN" altLang="en-US"/>
           </a:p>
@@ -2567,7 +2568,7 @@
           <a:p>
             <a:fld id="{EA80D996-CE9E-432A-86C4-A040E9078786}" type="datetimeFigureOut">
               <a:rPr lang="zh-CN" altLang="en-US" smtClean="0"/>
-              <a:t>2019/3/2</a:t>
+              <a:t>2019/4/20</a:t>
             </a:fld>
             <a:endParaRPr lang="zh-CN" altLang="en-US"/>
           </a:p>
@@ -11108,6 +11109,321 @@
 </p:sld>
 </file>
 
+<file path=ppt/slides/slide5.xml><?xml version="1.0" encoding="utf-8"?>
+<p:sld xmlns:a="http://schemas.openxmlformats.org/drawingml/2006/main" xmlns:r="http://schemas.openxmlformats.org/officeDocument/2006/relationships" xmlns:p="http://schemas.openxmlformats.org/presentationml/2006/main">
+  <p:cSld>
+    <p:spTree>
+      <p:nvGrpSpPr>
+        <p:cNvPr id="1" name=""/>
+        <p:cNvGrpSpPr/>
+        <p:nvPr/>
+      </p:nvGrpSpPr>
+      <p:grpSpPr>
+        <a:xfrm>
+          <a:off x="0" y="0"/>
+          <a:ext cx="0" cy="0"/>
+          <a:chOff x="0" y="0"/>
+          <a:chExt cx="0" cy="0"/>
+        </a:xfrm>
+      </p:grpSpPr>
+      <p:pic>
+        <p:nvPicPr>
+          <p:cNvPr id="1026" name="Picture 2" descr="http://c.biancheng.net/cpp/uploads/allimg/151020/1-151020132J32G.jpg"/>
+          <p:cNvPicPr>
+            <a:picLocks noChangeAspect="1" noChangeArrowheads="1"/>
+          </p:cNvPicPr>
+          <p:nvPr/>
+        </p:nvPicPr>
+        <p:blipFill>
+          <a:blip r:embed="rId2">
+            <a:extLst>
+              <a:ext uri="{28A0092B-C50C-407E-A947-70E740481C1C}">
+                <a14:useLocalDpi xmlns:a14="http://schemas.microsoft.com/office/drawing/2010/main" val="0"/>
+              </a:ext>
+            </a:extLst>
+          </a:blip>
+          <a:srcRect/>
+          <a:stretch>
+            <a:fillRect/>
+          </a:stretch>
+        </p:blipFill>
+        <p:spPr bwMode="auto">
+          <a:xfrm>
+            <a:off x="1909561" y="882793"/>
+            <a:ext cx="4171950" cy="4410076"/>
+          </a:xfrm>
+          <a:prstGeom prst="rect">
+            <a:avLst/>
+          </a:prstGeom>
+          <a:noFill/>
+          <a:extLst>
+            <a:ext uri="{909E8E84-426E-40DD-AFC4-6F175D3DCCD1}">
+              <a14:hiddenFill xmlns:a14="http://schemas.microsoft.com/office/drawing/2010/main">
+                <a:solidFill>
+                  <a:srgbClr val="FFFFFF"/>
+                </a:solidFill>
+              </a14:hiddenFill>
+            </a:ext>
+          </a:extLst>
+        </p:spPr>
+      </p:pic>
+      <p:sp>
+        <p:nvSpPr>
+          <p:cNvPr id="4" name="文本框 3"/>
+          <p:cNvSpPr txBox="1"/>
+          <p:nvPr/>
+        </p:nvSpPr>
+        <p:spPr>
+          <a:xfrm>
+            <a:off x="1737359" y="2327563"/>
+            <a:ext cx="1471353" cy="323165"/>
+          </a:xfrm>
+          <a:prstGeom prst="rect">
+            <a:avLst/>
+          </a:prstGeom>
+          <a:noFill/>
+        </p:spPr>
+        <p:txBody>
+          <a:bodyPr wrap="square" rtlCol="0">
+            <a:spAutoFit/>
+          </a:bodyPr>
+          <a:lstStyle/>
+          <a:p>
+            <a:r>
+              <a:rPr lang="en-US" altLang="zh-CN" sz="1500" dirty="0" smtClean="0">
+                <a:solidFill>
+                  <a:srgbClr val="FF0000"/>
+                </a:solidFill>
+                <a:latin typeface="Times New Roman" panose="02020603050405020304" pitchFamily="18" charset="0"/>
+                <a:cs typeface="Times New Roman" panose="02020603050405020304" pitchFamily="18" charset="0"/>
+              </a:rPr>
+              <a:t>connect()</a:t>
+            </a:r>
+            <a:r>
+              <a:rPr lang="zh-CN" altLang="en-US" sz="1500" dirty="0" smtClean="0">
+                <a:solidFill>
+                  <a:srgbClr val="FF0000"/>
+                </a:solidFill>
+                <a:latin typeface="Times New Roman" panose="02020603050405020304" pitchFamily="18" charset="0"/>
+                <a:cs typeface="Times New Roman" panose="02020603050405020304" pitchFamily="18" charset="0"/>
+              </a:rPr>
+              <a:t>阻塞</a:t>
+            </a:r>
+            <a:endParaRPr lang="zh-CN" altLang="en-US" sz="1500" dirty="0">
+              <a:solidFill>
+                <a:srgbClr val="FF0000"/>
+              </a:solidFill>
+              <a:latin typeface="Times New Roman" panose="02020603050405020304" pitchFamily="18" charset="0"/>
+              <a:cs typeface="Times New Roman" panose="02020603050405020304" pitchFamily="18" charset="0"/>
+            </a:endParaRPr>
+          </a:p>
+        </p:txBody>
+      </p:sp>
+      <p:sp>
+        <p:nvSpPr>
+          <p:cNvPr id="6" name="文本框 5"/>
+          <p:cNvSpPr txBox="1"/>
+          <p:nvPr/>
+        </p:nvSpPr>
+        <p:spPr>
+          <a:xfrm>
+            <a:off x="1670858" y="3933915"/>
+            <a:ext cx="1471353" cy="323165"/>
+          </a:xfrm>
+          <a:prstGeom prst="rect">
+            <a:avLst/>
+          </a:prstGeom>
+          <a:noFill/>
+        </p:spPr>
+        <p:txBody>
+          <a:bodyPr wrap="square" rtlCol="0">
+            <a:spAutoFit/>
+          </a:bodyPr>
+          <a:lstStyle/>
+          <a:p>
+            <a:r>
+              <a:rPr lang="en-US" altLang="zh-CN" sz="1500" dirty="0" smtClean="0">
+                <a:solidFill>
+                  <a:srgbClr val="FF0000"/>
+                </a:solidFill>
+                <a:latin typeface="Times New Roman" panose="02020603050405020304" pitchFamily="18" charset="0"/>
+                <a:cs typeface="Times New Roman" panose="02020603050405020304" pitchFamily="18" charset="0"/>
+              </a:rPr>
+              <a:t>connect()</a:t>
+            </a:r>
+            <a:r>
+              <a:rPr lang="zh-CN" altLang="en-US" sz="1500" dirty="0" smtClean="0">
+                <a:solidFill>
+                  <a:srgbClr val="FF0000"/>
+                </a:solidFill>
+                <a:latin typeface="Times New Roman" panose="02020603050405020304" pitchFamily="18" charset="0"/>
+                <a:cs typeface="Times New Roman" panose="02020603050405020304" pitchFamily="18" charset="0"/>
+              </a:rPr>
+              <a:t>返回</a:t>
+            </a:r>
+            <a:endParaRPr lang="zh-CN" altLang="en-US" sz="1500" dirty="0">
+              <a:solidFill>
+                <a:srgbClr val="FF0000"/>
+              </a:solidFill>
+              <a:latin typeface="Times New Roman" panose="02020603050405020304" pitchFamily="18" charset="0"/>
+              <a:cs typeface="Times New Roman" panose="02020603050405020304" pitchFamily="18" charset="0"/>
+            </a:endParaRPr>
+          </a:p>
+        </p:txBody>
+      </p:sp>
+      <p:sp>
+        <p:nvSpPr>
+          <p:cNvPr id="7" name="文本框 6"/>
+          <p:cNvSpPr txBox="1"/>
+          <p:nvPr/>
+        </p:nvSpPr>
+        <p:spPr>
+          <a:xfrm>
+            <a:off x="5660967" y="2019991"/>
+            <a:ext cx="1221971" cy="323165"/>
+          </a:xfrm>
+          <a:prstGeom prst="rect">
+            <a:avLst/>
+          </a:prstGeom>
+          <a:noFill/>
+        </p:spPr>
+        <p:txBody>
+          <a:bodyPr wrap="square" rtlCol="0">
+            <a:spAutoFit/>
+          </a:bodyPr>
+          <a:lstStyle/>
+          <a:p>
+            <a:r>
+              <a:rPr lang="en-US" altLang="zh-CN" sz="1500" dirty="0" smtClean="0">
+                <a:solidFill>
+                  <a:srgbClr val="FF0000"/>
+                </a:solidFill>
+                <a:latin typeface="Times New Roman" panose="02020603050405020304" pitchFamily="18" charset="0"/>
+                <a:cs typeface="Times New Roman" panose="02020603050405020304" pitchFamily="18" charset="0"/>
+              </a:rPr>
+              <a:t>accept()</a:t>
+            </a:r>
+            <a:r>
+              <a:rPr lang="zh-CN" altLang="en-US" sz="1500" dirty="0" smtClean="0">
+                <a:solidFill>
+                  <a:srgbClr val="FF0000"/>
+                </a:solidFill>
+                <a:latin typeface="Times New Roman" panose="02020603050405020304" pitchFamily="18" charset="0"/>
+                <a:cs typeface="Times New Roman" panose="02020603050405020304" pitchFamily="18" charset="0"/>
+              </a:rPr>
+              <a:t>阻塞</a:t>
+            </a:r>
+            <a:endParaRPr lang="zh-CN" altLang="en-US" sz="1500" dirty="0">
+              <a:solidFill>
+                <a:srgbClr val="FF0000"/>
+              </a:solidFill>
+              <a:latin typeface="Times New Roman" panose="02020603050405020304" pitchFamily="18" charset="0"/>
+              <a:cs typeface="Times New Roman" panose="02020603050405020304" pitchFamily="18" charset="0"/>
+            </a:endParaRPr>
+          </a:p>
+        </p:txBody>
+      </p:sp>
+      <p:sp>
+        <p:nvSpPr>
+          <p:cNvPr id="8" name="文本框 7"/>
+          <p:cNvSpPr txBox="1"/>
+          <p:nvPr/>
+        </p:nvSpPr>
+        <p:spPr>
+          <a:xfrm>
+            <a:off x="5287645" y="3933914"/>
+            <a:ext cx="1471353" cy="323165"/>
+          </a:xfrm>
+          <a:prstGeom prst="rect">
+            <a:avLst/>
+          </a:prstGeom>
+          <a:noFill/>
+        </p:spPr>
+        <p:txBody>
+          <a:bodyPr wrap="square" rtlCol="0">
+            <a:spAutoFit/>
+          </a:bodyPr>
+          <a:lstStyle/>
+          <a:p>
+            <a:r>
+              <a:rPr lang="en-US" altLang="zh-CN" sz="1500" dirty="0" smtClean="0">
+                <a:solidFill>
+                  <a:srgbClr val="FF0000"/>
+                </a:solidFill>
+                <a:latin typeface="Times New Roman" panose="02020603050405020304" pitchFamily="18" charset="0"/>
+                <a:cs typeface="Times New Roman" panose="02020603050405020304" pitchFamily="18" charset="0"/>
+              </a:rPr>
+              <a:t>accept()</a:t>
+            </a:r>
+            <a:r>
+              <a:rPr lang="zh-CN" altLang="en-US" sz="1500" dirty="0" smtClean="0">
+                <a:solidFill>
+                  <a:srgbClr val="FF0000"/>
+                </a:solidFill>
+                <a:latin typeface="Times New Roman" panose="02020603050405020304" pitchFamily="18" charset="0"/>
+                <a:cs typeface="Times New Roman" panose="02020603050405020304" pitchFamily="18" charset="0"/>
+              </a:rPr>
+              <a:t>返回</a:t>
+            </a:r>
+            <a:endParaRPr lang="zh-CN" altLang="en-US" sz="1500" dirty="0">
+              <a:solidFill>
+                <a:srgbClr val="FF0000"/>
+              </a:solidFill>
+              <a:latin typeface="Times New Roman" panose="02020603050405020304" pitchFamily="18" charset="0"/>
+              <a:cs typeface="Times New Roman" panose="02020603050405020304" pitchFamily="18" charset="0"/>
+            </a:endParaRPr>
+          </a:p>
+        </p:txBody>
+      </p:sp>
+      <p:cxnSp>
+        <p:nvCxnSpPr>
+          <p:cNvPr id="9" name="直接连接符 8"/>
+          <p:cNvCxnSpPr/>
+          <p:nvPr/>
+        </p:nvCxnSpPr>
+        <p:spPr>
+          <a:xfrm>
+            <a:off x="5370772" y="2181572"/>
+            <a:ext cx="373322" cy="1"/>
+          </a:xfrm>
+          <a:prstGeom prst="line">
+            <a:avLst/>
+          </a:prstGeom>
+          <a:ln w="28575">
+            <a:solidFill>
+              <a:srgbClr val="FF0000"/>
+            </a:solidFill>
+            <a:prstDash val="sysDash"/>
+          </a:ln>
+        </p:spPr>
+        <p:style>
+          <a:lnRef idx="1">
+            <a:schemeClr val="accent1"/>
+          </a:lnRef>
+          <a:fillRef idx="0">
+            <a:schemeClr val="accent1"/>
+          </a:fillRef>
+          <a:effectRef idx="0">
+            <a:schemeClr val="accent1"/>
+          </a:effectRef>
+          <a:fontRef idx="minor">
+            <a:schemeClr val="tx1"/>
+          </a:fontRef>
+        </p:style>
+      </p:cxnSp>
+    </p:spTree>
+    <p:extLst>
+      <p:ext uri="{BB962C8B-B14F-4D97-AF65-F5344CB8AC3E}">
+        <p14:creationId xmlns:p14="http://schemas.microsoft.com/office/powerpoint/2010/main" val="2481155115"/>
+      </p:ext>
+    </p:extLst>
+  </p:cSld>
+  <p:clrMapOvr>
+    <a:masterClrMapping/>
+  </p:clrMapOvr>
+</p:sld>
+</file>
+
 <file path=ppt/theme/theme1.xml><?xml version="1.0" encoding="utf-8"?>
 <a:theme xmlns:a="http://schemas.openxmlformats.org/drawingml/2006/main" name="Office 主题​​">
   <a:themeElements>

--- a/音视频编解码.pptx
+++ b/音视频编解码.pptx
@@ -10,6 +10,7 @@
     <p:sldId id="258" r:id="rId4"/>
     <p:sldId id="259" r:id="rId5"/>
     <p:sldId id="260" r:id="rId6"/>
+    <p:sldId id="261" r:id="rId7"/>
   </p:sldIdLst>
   <p:sldSz cx="12192000" cy="6858000"/>
   <p:notesSz cx="6858000" cy="9144000"/>
@@ -247,7 +248,7 @@
           <a:p>
             <a:fld id="{EA80D996-CE9E-432A-86C4-A040E9078786}" type="datetimeFigureOut">
               <a:rPr lang="zh-CN" altLang="en-US" smtClean="0"/>
-              <a:t>2019/4/20</a:t>
+              <a:t>2019/5/24</a:t>
             </a:fld>
             <a:endParaRPr lang="zh-CN" altLang="en-US"/>
           </a:p>
@@ -417,7 +418,7 @@
           <a:p>
             <a:fld id="{EA80D996-CE9E-432A-86C4-A040E9078786}" type="datetimeFigureOut">
               <a:rPr lang="zh-CN" altLang="en-US" smtClean="0"/>
-              <a:t>2019/4/20</a:t>
+              <a:t>2019/5/24</a:t>
             </a:fld>
             <a:endParaRPr lang="zh-CN" altLang="en-US"/>
           </a:p>
@@ -597,7 +598,7 @@
           <a:p>
             <a:fld id="{EA80D996-CE9E-432A-86C4-A040E9078786}" type="datetimeFigureOut">
               <a:rPr lang="zh-CN" altLang="en-US" smtClean="0"/>
-              <a:t>2019/4/20</a:t>
+              <a:t>2019/5/24</a:t>
             </a:fld>
             <a:endParaRPr lang="zh-CN" altLang="en-US"/>
           </a:p>
@@ -767,7 +768,7 @@
           <a:p>
             <a:fld id="{EA80D996-CE9E-432A-86C4-A040E9078786}" type="datetimeFigureOut">
               <a:rPr lang="zh-CN" altLang="en-US" smtClean="0"/>
-              <a:t>2019/4/20</a:t>
+              <a:t>2019/5/24</a:t>
             </a:fld>
             <a:endParaRPr lang="zh-CN" altLang="en-US"/>
           </a:p>
@@ -1013,7 +1014,7 @@
           <a:p>
             <a:fld id="{EA80D996-CE9E-432A-86C4-A040E9078786}" type="datetimeFigureOut">
               <a:rPr lang="zh-CN" altLang="en-US" smtClean="0"/>
-              <a:t>2019/4/20</a:t>
+              <a:t>2019/5/24</a:t>
             </a:fld>
             <a:endParaRPr lang="zh-CN" altLang="en-US"/>
           </a:p>
@@ -1245,7 +1246,7 @@
           <a:p>
             <a:fld id="{EA80D996-CE9E-432A-86C4-A040E9078786}" type="datetimeFigureOut">
               <a:rPr lang="zh-CN" altLang="en-US" smtClean="0"/>
-              <a:t>2019/4/20</a:t>
+              <a:t>2019/5/24</a:t>
             </a:fld>
             <a:endParaRPr lang="zh-CN" altLang="en-US"/>
           </a:p>
@@ -1612,7 +1613,7 @@
           <a:p>
             <a:fld id="{EA80D996-CE9E-432A-86C4-A040E9078786}" type="datetimeFigureOut">
               <a:rPr lang="zh-CN" altLang="en-US" smtClean="0"/>
-              <a:t>2019/4/20</a:t>
+              <a:t>2019/5/24</a:t>
             </a:fld>
             <a:endParaRPr lang="zh-CN" altLang="en-US"/>
           </a:p>
@@ -1730,7 +1731,7 @@
           <a:p>
             <a:fld id="{EA80D996-CE9E-432A-86C4-A040E9078786}" type="datetimeFigureOut">
               <a:rPr lang="zh-CN" altLang="en-US" smtClean="0"/>
-              <a:t>2019/4/20</a:t>
+              <a:t>2019/5/24</a:t>
             </a:fld>
             <a:endParaRPr lang="zh-CN" altLang="en-US"/>
           </a:p>
@@ -1825,7 +1826,7 @@
           <a:p>
             <a:fld id="{EA80D996-CE9E-432A-86C4-A040E9078786}" type="datetimeFigureOut">
               <a:rPr lang="zh-CN" altLang="en-US" smtClean="0"/>
-              <a:t>2019/4/20</a:t>
+              <a:t>2019/5/24</a:t>
             </a:fld>
             <a:endParaRPr lang="zh-CN" altLang="en-US"/>
           </a:p>
@@ -2102,7 +2103,7 @@
           <a:p>
             <a:fld id="{EA80D996-CE9E-432A-86C4-A040E9078786}" type="datetimeFigureOut">
               <a:rPr lang="zh-CN" altLang="en-US" smtClean="0"/>
-              <a:t>2019/4/20</a:t>
+              <a:t>2019/5/24</a:t>
             </a:fld>
             <a:endParaRPr lang="zh-CN" altLang="en-US"/>
           </a:p>
@@ -2355,7 +2356,7 @@
           <a:p>
             <a:fld id="{EA80D996-CE9E-432A-86C4-A040E9078786}" type="datetimeFigureOut">
               <a:rPr lang="zh-CN" altLang="en-US" smtClean="0"/>
-              <a:t>2019/4/20</a:t>
+              <a:t>2019/5/24</a:t>
             </a:fld>
             <a:endParaRPr lang="zh-CN" altLang="en-US"/>
           </a:p>
@@ -2568,7 +2569,7 @@
           <a:p>
             <a:fld id="{EA80D996-CE9E-432A-86C4-A040E9078786}" type="datetimeFigureOut">
               <a:rPr lang="zh-CN" altLang="en-US" smtClean="0"/>
-              <a:t>2019/4/20</a:t>
+              <a:t>2019/5/24</a:t>
             </a:fld>
             <a:endParaRPr lang="zh-CN" altLang="en-US"/>
           </a:p>
@@ -11424,6 +11425,3139 @@
 </p:sld>
 </file>
 
+<file path=ppt/slides/slide6.xml><?xml version="1.0" encoding="utf-8"?>
+<p:sld xmlns:a="http://schemas.openxmlformats.org/drawingml/2006/main" xmlns:r="http://schemas.openxmlformats.org/officeDocument/2006/relationships" xmlns:p="http://schemas.openxmlformats.org/presentationml/2006/main">
+  <p:cSld>
+    <p:spTree>
+      <p:nvGrpSpPr>
+        <p:cNvPr id="1" name=""/>
+        <p:cNvGrpSpPr/>
+        <p:nvPr/>
+      </p:nvGrpSpPr>
+      <p:grpSpPr>
+        <a:xfrm>
+          <a:off x="0" y="0"/>
+          <a:ext cx="0" cy="0"/>
+          <a:chOff x="0" y="0"/>
+          <a:chExt cx="0" cy="0"/>
+        </a:xfrm>
+      </p:grpSpPr>
+      <p:sp>
+        <p:nvSpPr>
+          <p:cNvPr id="4" name="文本框 3"/>
+          <p:cNvSpPr txBox="1"/>
+          <p:nvPr/>
+        </p:nvSpPr>
+        <p:spPr>
+          <a:xfrm>
+            <a:off x="1655897" y="39250"/>
+            <a:ext cx="2326906" cy="246221"/>
+          </a:xfrm>
+          <a:prstGeom prst="rect">
+            <a:avLst/>
+          </a:prstGeom>
+          <a:ln>
+            <a:prstDash val="sysDot"/>
+          </a:ln>
+        </p:spPr>
+        <p:style>
+          <a:lnRef idx="2">
+            <a:schemeClr val="accent2"/>
+          </a:lnRef>
+          <a:fillRef idx="1">
+            <a:schemeClr val="lt1"/>
+          </a:fillRef>
+          <a:effectRef idx="0">
+            <a:schemeClr val="accent2"/>
+          </a:effectRef>
+          <a:fontRef idx="minor">
+            <a:schemeClr val="dk1"/>
+          </a:fontRef>
+        </p:style>
+        <p:txBody>
+          <a:bodyPr wrap="square" rtlCol="0">
+            <a:spAutoFit/>
+          </a:bodyPr>
+          <a:lstStyle/>
+          <a:p>
+            <a:pPr algn="ctr"/>
+            <a:r>
+              <a:rPr lang="zh-CN" altLang="en-US" sz="1000" smtClean="0">
+                <a:latin typeface="Times New Roman" panose="02020603050405020304" pitchFamily="18" charset="0"/>
+                <a:cs typeface="Times New Roman" panose="02020603050405020304" pitchFamily="18" charset="0"/>
+              </a:rPr>
+              <a:t>分析</a:t>
+            </a:r>
+            <a:r>
+              <a:rPr lang="en-US" altLang="zh-CN" sz="1000" smtClean="0">
+                <a:latin typeface="Times New Roman" panose="02020603050405020304" pitchFamily="18" charset="0"/>
+                <a:cs typeface="Times New Roman" panose="02020603050405020304" pitchFamily="18" charset="0"/>
+              </a:rPr>
+              <a:t>doctor.mp4</a:t>
+            </a:r>
+            <a:r>
+              <a:rPr lang="zh-CN" altLang="en-US" sz="1000" dirty="0" smtClean="0">
+                <a:latin typeface="Times New Roman" panose="02020603050405020304" pitchFamily="18" charset="0"/>
+                <a:cs typeface="Times New Roman" panose="02020603050405020304" pitchFamily="18" charset="0"/>
+              </a:rPr>
+              <a:t>的结果</a:t>
+            </a:r>
+            <a:endParaRPr lang="zh-CN" altLang="en-US" sz="1000" dirty="0">
+              <a:latin typeface="Times New Roman" panose="02020603050405020304" pitchFamily="18" charset="0"/>
+              <a:cs typeface="Times New Roman" panose="02020603050405020304" pitchFamily="18" charset="0"/>
+            </a:endParaRPr>
+          </a:p>
+        </p:txBody>
+      </p:sp>
+      <p:sp>
+        <p:nvSpPr>
+          <p:cNvPr id="5" name="文本框 4"/>
+          <p:cNvSpPr txBox="1"/>
+          <p:nvPr/>
+        </p:nvSpPr>
+        <p:spPr>
+          <a:xfrm>
+            <a:off x="47956" y="558830"/>
+            <a:ext cx="1339554" cy="553998"/>
+          </a:xfrm>
+          <a:prstGeom prst="rect">
+            <a:avLst/>
+          </a:prstGeom>
+          <a:ln>
+            <a:prstDash val="sysDot"/>
+          </a:ln>
+        </p:spPr>
+        <p:style>
+          <a:lnRef idx="2">
+            <a:schemeClr val="accent2"/>
+          </a:lnRef>
+          <a:fillRef idx="1">
+            <a:schemeClr val="lt1"/>
+          </a:fillRef>
+          <a:effectRef idx="0">
+            <a:schemeClr val="accent2"/>
+          </a:effectRef>
+          <a:fontRef idx="minor">
+            <a:schemeClr val="dk1"/>
+          </a:fontRef>
+        </p:style>
+        <p:txBody>
+          <a:bodyPr wrap="square" rtlCol="0">
+            <a:spAutoFit/>
+          </a:bodyPr>
+          <a:lstStyle/>
+          <a:p>
+            <a:r>
+              <a:rPr lang="zh-CN" altLang="en-US" sz="1000" dirty="0" smtClean="0">
+                <a:latin typeface="Times New Roman" panose="02020603050405020304" pitchFamily="18" charset="0"/>
+                <a:cs typeface="Times New Roman" panose="02020603050405020304" pitchFamily="18" charset="0"/>
+              </a:rPr>
+              <a:t>一级</a:t>
+            </a:r>
+            <a:r>
+              <a:rPr lang="en-US" altLang="zh-CN" sz="1000" dirty="0" err="1" smtClean="0">
+                <a:latin typeface="Times New Roman" panose="02020603050405020304" pitchFamily="18" charset="0"/>
+                <a:cs typeface="Times New Roman" panose="02020603050405020304" pitchFamily="18" charset="0"/>
+              </a:rPr>
+              <a:t>ftyp</a:t>
+            </a:r>
+            <a:endParaRPr lang="en-US" altLang="zh-CN" sz="1000" dirty="0">
+              <a:latin typeface="Times New Roman" panose="02020603050405020304" pitchFamily="18" charset="0"/>
+              <a:cs typeface="Times New Roman" panose="02020603050405020304" pitchFamily="18" charset="0"/>
+            </a:endParaRPr>
+          </a:p>
+          <a:p>
+            <a:r>
+              <a:rPr lang="en-US" altLang="zh-CN" sz="1000" dirty="0" smtClean="0">
+                <a:latin typeface="Times New Roman" panose="02020603050405020304" pitchFamily="18" charset="0"/>
+                <a:cs typeface="Times New Roman" panose="02020603050405020304" pitchFamily="18" charset="0"/>
+              </a:rPr>
+              <a:t>type=0x66747970</a:t>
+            </a:r>
+          </a:p>
+          <a:p>
+            <a:r>
+              <a:rPr lang="en-US" altLang="zh-CN" sz="1000" dirty="0">
+                <a:latin typeface="Times New Roman" panose="02020603050405020304" pitchFamily="18" charset="0"/>
+                <a:cs typeface="Times New Roman" panose="02020603050405020304" pitchFamily="18" charset="0"/>
+              </a:rPr>
+              <a:t>size=0x00000020=32</a:t>
+            </a:r>
+            <a:endParaRPr lang="zh-CN" altLang="en-US" sz="1000" dirty="0">
+              <a:latin typeface="Times New Roman" panose="02020603050405020304" pitchFamily="18" charset="0"/>
+              <a:cs typeface="Times New Roman" panose="02020603050405020304" pitchFamily="18" charset="0"/>
+            </a:endParaRPr>
+          </a:p>
+        </p:txBody>
+      </p:sp>
+      <p:sp>
+        <p:nvSpPr>
+          <p:cNvPr id="6" name="文本框 5"/>
+          <p:cNvSpPr txBox="1"/>
+          <p:nvPr/>
+        </p:nvSpPr>
+        <p:spPr>
+          <a:xfrm>
+            <a:off x="1655896" y="556597"/>
+            <a:ext cx="1765483" cy="553998"/>
+          </a:xfrm>
+          <a:prstGeom prst="rect">
+            <a:avLst/>
+          </a:prstGeom>
+          <a:ln>
+            <a:prstDash val="sysDot"/>
+          </a:ln>
+        </p:spPr>
+        <p:style>
+          <a:lnRef idx="2">
+            <a:schemeClr val="accent2"/>
+          </a:lnRef>
+          <a:fillRef idx="1">
+            <a:schemeClr val="lt1"/>
+          </a:fillRef>
+          <a:effectRef idx="0">
+            <a:schemeClr val="accent2"/>
+          </a:effectRef>
+          <a:fontRef idx="minor">
+            <a:schemeClr val="dk1"/>
+          </a:fontRef>
+        </p:style>
+        <p:txBody>
+          <a:bodyPr wrap="square" rtlCol="0">
+            <a:spAutoFit/>
+          </a:bodyPr>
+          <a:lstStyle/>
+          <a:p>
+            <a:r>
+              <a:rPr lang="zh-CN" altLang="en-US" sz="1000" dirty="0" smtClean="0">
+                <a:latin typeface="Times New Roman" panose="02020603050405020304" pitchFamily="18" charset="0"/>
+                <a:cs typeface="Times New Roman" panose="02020603050405020304" pitchFamily="18" charset="0"/>
+              </a:rPr>
+              <a:t>一级</a:t>
+            </a:r>
+            <a:r>
+              <a:rPr lang="en-US" altLang="zh-CN" sz="1000" dirty="0" err="1">
+                <a:latin typeface="Times New Roman" panose="02020603050405020304" pitchFamily="18" charset="0"/>
+                <a:cs typeface="Times New Roman" panose="02020603050405020304" pitchFamily="18" charset="0"/>
+              </a:rPr>
+              <a:t>m</a:t>
+            </a:r>
+            <a:r>
+              <a:rPr lang="en-US" altLang="zh-CN" sz="1000" dirty="0" err="1" smtClean="0">
+                <a:latin typeface="Times New Roman" panose="02020603050405020304" pitchFamily="18" charset="0"/>
+                <a:cs typeface="Times New Roman" panose="02020603050405020304" pitchFamily="18" charset="0"/>
+              </a:rPr>
+              <a:t>dat</a:t>
+            </a:r>
+            <a:endParaRPr lang="en-US" altLang="zh-CN" sz="1000" dirty="0">
+              <a:latin typeface="Times New Roman" panose="02020603050405020304" pitchFamily="18" charset="0"/>
+              <a:cs typeface="Times New Roman" panose="02020603050405020304" pitchFamily="18" charset="0"/>
+            </a:endParaRPr>
+          </a:p>
+          <a:p>
+            <a:r>
+              <a:rPr lang="en-US" altLang="zh-CN" sz="1000" dirty="0">
+                <a:latin typeface="Times New Roman" panose="02020603050405020304" pitchFamily="18" charset="0"/>
+                <a:cs typeface="Times New Roman" panose="02020603050405020304" pitchFamily="18" charset="0"/>
+              </a:rPr>
+              <a:t>type=0x6D646174</a:t>
+            </a:r>
+            <a:endParaRPr lang="en-US" altLang="zh-CN" sz="1000" dirty="0" smtClean="0">
+              <a:latin typeface="Times New Roman" panose="02020603050405020304" pitchFamily="18" charset="0"/>
+              <a:cs typeface="Times New Roman" panose="02020603050405020304" pitchFamily="18" charset="0"/>
+            </a:endParaRPr>
+          </a:p>
+          <a:p>
+            <a:r>
+              <a:rPr lang="en-US" altLang="zh-CN" sz="1000">
+                <a:latin typeface="Times New Roman" panose="02020603050405020304" pitchFamily="18" charset="0"/>
+                <a:cs typeface="Times New Roman" panose="02020603050405020304" pitchFamily="18" charset="0"/>
+              </a:rPr>
+              <a:t>size=0x000169C4A=1481802</a:t>
+            </a:r>
+            <a:endParaRPr lang="zh-CN" altLang="en-US" sz="1000" dirty="0">
+              <a:latin typeface="Times New Roman" panose="02020603050405020304" pitchFamily="18" charset="0"/>
+              <a:cs typeface="Times New Roman" panose="02020603050405020304" pitchFamily="18" charset="0"/>
+            </a:endParaRPr>
+          </a:p>
+        </p:txBody>
+      </p:sp>
+      <p:sp>
+        <p:nvSpPr>
+          <p:cNvPr id="7" name="文本框 6"/>
+          <p:cNvSpPr txBox="1"/>
+          <p:nvPr/>
+        </p:nvSpPr>
+        <p:spPr>
+          <a:xfrm>
+            <a:off x="3555456" y="565522"/>
+            <a:ext cx="1542323" cy="553998"/>
+          </a:xfrm>
+          <a:prstGeom prst="rect">
+            <a:avLst/>
+          </a:prstGeom>
+          <a:ln>
+            <a:prstDash val="sysDot"/>
+          </a:ln>
+        </p:spPr>
+        <p:style>
+          <a:lnRef idx="2">
+            <a:schemeClr val="accent2"/>
+          </a:lnRef>
+          <a:fillRef idx="1">
+            <a:schemeClr val="lt1"/>
+          </a:fillRef>
+          <a:effectRef idx="0">
+            <a:schemeClr val="accent2"/>
+          </a:effectRef>
+          <a:fontRef idx="minor">
+            <a:schemeClr val="dk1"/>
+          </a:fontRef>
+        </p:style>
+        <p:txBody>
+          <a:bodyPr wrap="square" rtlCol="0">
+            <a:spAutoFit/>
+          </a:bodyPr>
+          <a:lstStyle/>
+          <a:p>
+            <a:r>
+              <a:rPr lang="zh-CN" altLang="en-US" sz="1000" dirty="0" smtClean="0">
+                <a:latin typeface="Times New Roman" panose="02020603050405020304" pitchFamily="18" charset="0"/>
+                <a:cs typeface="Times New Roman" panose="02020603050405020304" pitchFamily="18" charset="0"/>
+              </a:rPr>
+              <a:t>一级</a:t>
+            </a:r>
+            <a:r>
+              <a:rPr lang="en-US" altLang="zh-CN" sz="1000" dirty="0" err="1" smtClean="0">
+                <a:latin typeface="Times New Roman" panose="02020603050405020304" pitchFamily="18" charset="0"/>
+                <a:cs typeface="Times New Roman" panose="02020603050405020304" pitchFamily="18" charset="0"/>
+              </a:rPr>
+              <a:t>moov</a:t>
+            </a:r>
+            <a:endParaRPr lang="en-US" altLang="zh-CN" sz="1000" dirty="0">
+              <a:latin typeface="Times New Roman" panose="02020603050405020304" pitchFamily="18" charset="0"/>
+              <a:cs typeface="Times New Roman" panose="02020603050405020304" pitchFamily="18" charset="0"/>
+            </a:endParaRPr>
+          </a:p>
+          <a:p>
+            <a:r>
+              <a:rPr lang="en-US" altLang="zh-CN" sz="1000" dirty="0" smtClean="0">
+                <a:latin typeface="Times New Roman" panose="02020603050405020304" pitchFamily="18" charset="0"/>
+                <a:cs typeface="Times New Roman" panose="02020603050405020304" pitchFamily="18" charset="0"/>
+              </a:rPr>
+              <a:t>type=0x6D6F6F76</a:t>
+            </a:r>
+          </a:p>
+          <a:p>
+            <a:r>
+              <a:rPr lang="en-US" altLang="zh-CN" sz="1000">
+                <a:latin typeface="Times New Roman" panose="02020603050405020304" pitchFamily="18" charset="0"/>
+                <a:cs typeface="Times New Roman" panose="02020603050405020304" pitchFamily="18" charset="0"/>
+              </a:rPr>
+              <a:t>size=0x000039C5=14789</a:t>
+            </a:r>
+            <a:endParaRPr lang="zh-CN" altLang="en-US" sz="1000" dirty="0">
+              <a:latin typeface="Times New Roman" panose="02020603050405020304" pitchFamily="18" charset="0"/>
+              <a:cs typeface="Times New Roman" panose="02020603050405020304" pitchFamily="18" charset="0"/>
+            </a:endParaRPr>
+          </a:p>
+        </p:txBody>
+      </p:sp>
+      <p:sp>
+        <p:nvSpPr>
+          <p:cNvPr id="8" name="文本框 7"/>
+          <p:cNvSpPr txBox="1"/>
+          <p:nvPr/>
+        </p:nvSpPr>
+        <p:spPr>
+          <a:xfrm>
+            <a:off x="704335" y="1355333"/>
+            <a:ext cx="1443518" cy="553998"/>
+          </a:xfrm>
+          <a:prstGeom prst="rect">
+            <a:avLst/>
+          </a:prstGeom>
+          <a:ln>
+            <a:prstDash val="sysDot"/>
+          </a:ln>
+        </p:spPr>
+        <p:style>
+          <a:lnRef idx="2">
+            <a:schemeClr val="accent2"/>
+          </a:lnRef>
+          <a:fillRef idx="1">
+            <a:schemeClr val="lt1"/>
+          </a:fillRef>
+          <a:effectRef idx="0">
+            <a:schemeClr val="accent2"/>
+          </a:effectRef>
+          <a:fontRef idx="minor">
+            <a:schemeClr val="dk1"/>
+          </a:fontRef>
+        </p:style>
+        <p:txBody>
+          <a:bodyPr wrap="square" rtlCol="0">
+            <a:spAutoFit/>
+          </a:bodyPr>
+          <a:lstStyle/>
+          <a:p>
+            <a:r>
+              <a:rPr lang="zh-CN" altLang="en-US" sz="1000" dirty="0" smtClean="0">
+                <a:latin typeface="Times New Roman" panose="02020603050405020304" pitchFamily="18" charset="0"/>
+                <a:cs typeface="Times New Roman" panose="02020603050405020304" pitchFamily="18" charset="0"/>
+              </a:rPr>
+              <a:t>二级</a:t>
+            </a:r>
+            <a:r>
+              <a:rPr lang="en-US" altLang="zh-CN" sz="1000" dirty="0" err="1" smtClean="0">
+                <a:latin typeface="Times New Roman" panose="02020603050405020304" pitchFamily="18" charset="0"/>
+                <a:cs typeface="Times New Roman" panose="02020603050405020304" pitchFamily="18" charset="0"/>
+              </a:rPr>
+              <a:t>mvhd</a:t>
+            </a:r>
+            <a:endParaRPr lang="en-US" altLang="zh-CN" sz="1000" dirty="0">
+              <a:latin typeface="Times New Roman" panose="02020603050405020304" pitchFamily="18" charset="0"/>
+              <a:cs typeface="Times New Roman" panose="02020603050405020304" pitchFamily="18" charset="0"/>
+            </a:endParaRPr>
+          </a:p>
+          <a:p>
+            <a:r>
+              <a:rPr lang="en-US" altLang="zh-CN" sz="1000" dirty="0">
+                <a:latin typeface="Times New Roman" panose="02020603050405020304" pitchFamily="18" charset="0"/>
+                <a:cs typeface="Times New Roman" panose="02020603050405020304" pitchFamily="18" charset="0"/>
+              </a:rPr>
+              <a:t>type= </a:t>
+            </a:r>
+            <a:r>
+              <a:rPr lang="en-US" altLang="zh-CN" sz="1000" dirty="0" smtClean="0">
+                <a:latin typeface="Times New Roman" panose="02020603050405020304" pitchFamily="18" charset="0"/>
+                <a:cs typeface="Times New Roman" panose="02020603050405020304" pitchFamily="18" charset="0"/>
+              </a:rPr>
+              <a:t>0x6D766864</a:t>
+            </a:r>
+          </a:p>
+          <a:p>
+            <a:r>
+              <a:rPr lang="en-US" altLang="zh-CN" sz="1000" dirty="0" smtClean="0">
+                <a:latin typeface="Times New Roman" panose="02020603050405020304" pitchFamily="18" charset="0"/>
+                <a:cs typeface="Times New Roman" panose="02020603050405020304" pitchFamily="18" charset="0"/>
+              </a:rPr>
+              <a:t>size=0x0000006C=108</a:t>
+            </a:r>
+            <a:endParaRPr lang="zh-CN" altLang="en-US" sz="1000" dirty="0">
+              <a:latin typeface="Times New Roman" panose="02020603050405020304" pitchFamily="18" charset="0"/>
+              <a:cs typeface="Times New Roman" panose="02020603050405020304" pitchFamily="18" charset="0"/>
+            </a:endParaRPr>
+          </a:p>
+        </p:txBody>
+      </p:sp>
+      <p:sp>
+        <p:nvSpPr>
+          <p:cNvPr id="9" name="文本框 8"/>
+          <p:cNvSpPr txBox="1"/>
+          <p:nvPr/>
+        </p:nvSpPr>
+        <p:spPr>
+          <a:xfrm>
+            <a:off x="2795241" y="1370984"/>
+            <a:ext cx="1451565" cy="553998"/>
+          </a:xfrm>
+          <a:prstGeom prst="rect">
+            <a:avLst/>
+          </a:prstGeom>
+          <a:ln>
+            <a:prstDash val="sysDot"/>
+          </a:ln>
+        </p:spPr>
+        <p:style>
+          <a:lnRef idx="2">
+            <a:schemeClr val="accent2"/>
+          </a:lnRef>
+          <a:fillRef idx="1">
+            <a:schemeClr val="lt1"/>
+          </a:fillRef>
+          <a:effectRef idx="0">
+            <a:schemeClr val="accent2"/>
+          </a:effectRef>
+          <a:fontRef idx="minor">
+            <a:schemeClr val="dk1"/>
+          </a:fontRef>
+        </p:style>
+        <p:txBody>
+          <a:bodyPr wrap="square" rtlCol="0">
+            <a:spAutoFit/>
+          </a:bodyPr>
+          <a:lstStyle/>
+          <a:p>
+            <a:r>
+              <a:rPr lang="zh-CN" altLang="en-US" sz="1000" dirty="0">
+                <a:latin typeface="Times New Roman" panose="02020603050405020304" pitchFamily="18" charset="0"/>
+                <a:cs typeface="Times New Roman" panose="02020603050405020304" pitchFamily="18" charset="0"/>
+              </a:rPr>
+              <a:t>二</a:t>
+            </a:r>
+            <a:r>
+              <a:rPr lang="zh-CN" altLang="en-US" sz="1000" dirty="0" smtClean="0">
+                <a:latin typeface="Times New Roman" panose="02020603050405020304" pitchFamily="18" charset="0"/>
+                <a:cs typeface="Times New Roman" panose="02020603050405020304" pitchFamily="18" charset="0"/>
+              </a:rPr>
+              <a:t>级</a:t>
+            </a:r>
+            <a:r>
+              <a:rPr lang="en-US" altLang="zh-CN" sz="1000" dirty="0" err="1" smtClean="0">
+                <a:latin typeface="Times New Roman" panose="02020603050405020304" pitchFamily="18" charset="0"/>
+                <a:cs typeface="Times New Roman" panose="02020603050405020304" pitchFamily="18" charset="0"/>
+              </a:rPr>
+              <a:t>trak</a:t>
+            </a:r>
+            <a:endParaRPr lang="en-US" altLang="zh-CN" sz="1000" dirty="0">
+              <a:latin typeface="Times New Roman" panose="02020603050405020304" pitchFamily="18" charset="0"/>
+              <a:cs typeface="Times New Roman" panose="02020603050405020304" pitchFamily="18" charset="0"/>
+            </a:endParaRPr>
+          </a:p>
+          <a:p>
+            <a:r>
+              <a:rPr lang="en-US" altLang="zh-CN" sz="1000" dirty="0">
+                <a:latin typeface="Times New Roman" panose="02020603050405020304" pitchFamily="18" charset="0"/>
+                <a:cs typeface="Times New Roman" panose="02020603050405020304" pitchFamily="18" charset="0"/>
+              </a:rPr>
+              <a:t>type= </a:t>
+            </a:r>
+            <a:r>
+              <a:rPr lang="en-US" altLang="zh-CN" sz="1000" dirty="0" smtClean="0">
+                <a:latin typeface="Times New Roman" panose="02020603050405020304" pitchFamily="18" charset="0"/>
+                <a:cs typeface="Times New Roman" panose="02020603050405020304" pitchFamily="18" charset="0"/>
+              </a:rPr>
+              <a:t>0x7472616B</a:t>
+            </a:r>
+          </a:p>
+          <a:p>
+            <a:r>
+              <a:rPr lang="en-US" altLang="zh-CN" sz="1000">
+                <a:latin typeface="Times New Roman" panose="02020603050405020304" pitchFamily="18" charset="0"/>
+                <a:cs typeface="Times New Roman" panose="02020603050405020304" pitchFamily="18" charset="0"/>
+              </a:rPr>
+              <a:t>size=0x00001B62=7010</a:t>
+            </a:r>
+            <a:endParaRPr lang="zh-CN" altLang="en-US" sz="1000" dirty="0">
+              <a:latin typeface="Times New Roman" panose="02020603050405020304" pitchFamily="18" charset="0"/>
+              <a:cs typeface="Times New Roman" panose="02020603050405020304" pitchFamily="18" charset="0"/>
+            </a:endParaRPr>
+          </a:p>
+        </p:txBody>
+      </p:sp>
+      <p:sp>
+        <p:nvSpPr>
+          <p:cNvPr id="10" name="文本框 9"/>
+          <p:cNvSpPr txBox="1"/>
+          <p:nvPr/>
+        </p:nvSpPr>
+        <p:spPr>
+          <a:xfrm>
+            <a:off x="4504758" y="1350031"/>
+            <a:ext cx="1538292" cy="553998"/>
+          </a:xfrm>
+          <a:prstGeom prst="rect">
+            <a:avLst/>
+          </a:prstGeom>
+          <a:ln>
+            <a:prstDash val="sysDot"/>
+          </a:ln>
+        </p:spPr>
+        <p:style>
+          <a:lnRef idx="2">
+            <a:schemeClr val="accent2"/>
+          </a:lnRef>
+          <a:fillRef idx="1">
+            <a:schemeClr val="lt1"/>
+          </a:fillRef>
+          <a:effectRef idx="0">
+            <a:schemeClr val="accent2"/>
+          </a:effectRef>
+          <a:fontRef idx="minor">
+            <a:schemeClr val="dk1"/>
+          </a:fontRef>
+        </p:style>
+        <p:txBody>
+          <a:bodyPr wrap="square" rtlCol="0">
+            <a:spAutoFit/>
+          </a:bodyPr>
+          <a:lstStyle/>
+          <a:p>
+            <a:r>
+              <a:rPr lang="zh-CN" altLang="en-US" sz="1000" dirty="0">
+                <a:latin typeface="Times New Roman" panose="02020603050405020304" pitchFamily="18" charset="0"/>
+                <a:cs typeface="Times New Roman" panose="02020603050405020304" pitchFamily="18" charset="0"/>
+              </a:rPr>
+              <a:t>二</a:t>
+            </a:r>
+            <a:r>
+              <a:rPr lang="zh-CN" altLang="en-US" sz="1000" dirty="0" smtClean="0">
+                <a:latin typeface="Times New Roman" panose="02020603050405020304" pitchFamily="18" charset="0"/>
+                <a:cs typeface="Times New Roman" panose="02020603050405020304" pitchFamily="18" charset="0"/>
+              </a:rPr>
+              <a:t>级</a:t>
+            </a:r>
+            <a:r>
+              <a:rPr lang="en-US" altLang="zh-CN" sz="1000" dirty="0" err="1" smtClean="0">
+                <a:latin typeface="Times New Roman" panose="02020603050405020304" pitchFamily="18" charset="0"/>
+                <a:cs typeface="Times New Roman" panose="02020603050405020304" pitchFamily="18" charset="0"/>
+              </a:rPr>
+              <a:t>trak</a:t>
+            </a:r>
+            <a:endParaRPr lang="en-US" altLang="zh-CN" sz="1000" dirty="0" smtClean="0">
+              <a:latin typeface="Times New Roman" panose="02020603050405020304" pitchFamily="18" charset="0"/>
+              <a:cs typeface="Times New Roman" panose="02020603050405020304" pitchFamily="18" charset="0"/>
+            </a:endParaRPr>
+          </a:p>
+          <a:p>
+            <a:r>
+              <a:rPr lang="en-US" altLang="zh-CN" sz="1000" dirty="0" smtClean="0">
+                <a:latin typeface="Times New Roman" panose="02020603050405020304" pitchFamily="18" charset="0"/>
+                <a:cs typeface="Times New Roman" panose="02020603050405020304" pitchFamily="18" charset="0"/>
+              </a:rPr>
+              <a:t>type=0x7472616B</a:t>
+            </a:r>
+          </a:p>
+          <a:p>
+            <a:r>
+              <a:rPr lang="en-US" altLang="zh-CN" sz="1000">
+                <a:latin typeface="Times New Roman" panose="02020603050405020304" pitchFamily="18" charset="0"/>
+                <a:cs typeface="Times New Roman" panose="02020603050405020304" pitchFamily="18" charset="0"/>
+              </a:rPr>
+              <a:t>size=0x00001D8D=7565</a:t>
+            </a:r>
+            <a:endParaRPr lang="en-US" altLang="zh-CN" sz="1000" dirty="0">
+              <a:latin typeface="Times New Roman" panose="02020603050405020304" pitchFamily="18" charset="0"/>
+              <a:cs typeface="Times New Roman" panose="02020603050405020304" pitchFamily="18" charset="0"/>
+            </a:endParaRPr>
+          </a:p>
+        </p:txBody>
+      </p:sp>
+      <p:sp>
+        <p:nvSpPr>
+          <p:cNvPr id="11" name="文本框 10"/>
+          <p:cNvSpPr txBox="1"/>
+          <p:nvPr/>
+        </p:nvSpPr>
+        <p:spPr>
+          <a:xfrm>
+            <a:off x="6848352" y="1352781"/>
+            <a:ext cx="1308838" cy="553998"/>
+          </a:xfrm>
+          <a:prstGeom prst="rect">
+            <a:avLst/>
+          </a:prstGeom>
+          <a:ln>
+            <a:prstDash val="sysDot"/>
+          </a:ln>
+        </p:spPr>
+        <p:style>
+          <a:lnRef idx="2">
+            <a:schemeClr val="accent2"/>
+          </a:lnRef>
+          <a:fillRef idx="1">
+            <a:schemeClr val="lt1"/>
+          </a:fillRef>
+          <a:effectRef idx="0">
+            <a:schemeClr val="accent2"/>
+          </a:effectRef>
+          <a:fontRef idx="minor">
+            <a:schemeClr val="dk1"/>
+          </a:fontRef>
+        </p:style>
+        <p:txBody>
+          <a:bodyPr wrap="square" rtlCol="0">
+            <a:spAutoFit/>
+          </a:bodyPr>
+          <a:lstStyle/>
+          <a:p>
+            <a:r>
+              <a:rPr lang="zh-CN" altLang="en-US" sz="1000" dirty="0">
+                <a:latin typeface="Times New Roman" panose="02020603050405020304" pitchFamily="18" charset="0"/>
+                <a:cs typeface="Times New Roman" panose="02020603050405020304" pitchFamily="18" charset="0"/>
+              </a:rPr>
+              <a:t>二</a:t>
+            </a:r>
+            <a:r>
+              <a:rPr lang="zh-CN" altLang="en-US" sz="1000" dirty="0" smtClean="0">
+                <a:latin typeface="Times New Roman" panose="02020603050405020304" pitchFamily="18" charset="0"/>
+                <a:cs typeface="Times New Roman" panose="02020603050405020304" pitchFamily="18" charset="0"/>
+              </a:rPr>
+              <a:t>级</a:t>
+            </a:r>
+            <a:r>
+              <a:rPr lang="en-US" altLang="zh-CN" sz="1000" dirty="0" err="1" smtClean="0">
+                <a:latin typeface="Times New Roman" panose="02020603050405020304" pitchFamily="18" charset="0"/>
+                <a:cs typeface="Times New Roman" panose="02020603050405020304" pitchFamily="18" charset="0"/>
+              </a:rPr>
+              <a:t>udat</a:t>
+            </a:r>
+            <a:endParaRPr lang="en-US" altLang="zh-CN" sz="1000" dirty="0">
+              <a:latin typeface="Times New Roman" panose="02020603050405020304" pitchFamily="18" charset="0"/>
+              <a:cs typeface="Times New Roman" panose="02020603050405020304" pitchFamily="18" charset="0"/>
+            </a:endParaRPr>
+          </a:p>
+          <a:p>
+            <a:r>
+              <a:rPr lang="en-US" altLang="zh-CN" sz="1000" dirty="0" smtClean="0">
+                <a:latin typeface="Times New Roman" panose="02020603050405020304" pitchFamily="18" charset="0"/>
+                <a:cs typeface="Times New Roman" panose="02020603050405020304" pitchFamily="18" charset="0"/>
+              </a:rPr>
+              <a:t>type=0x75647461</a:t>
+            </a:r>
+          </a:p>
+          <a:p>
+            <a:r>
+              <a:rPr lang="en-US" altLang="zh-CN" sz="1000" dirty="0" smtClean="0">
+                <a:latin typeface="Times New Roman" panose="02020603050405020304" pitchFamily="18" charset="0"/>
+                <a:cs typeface="Times New Roman" panose="02020603050405020304" pitchFamily="18" charset="0"/>
+              </a:rPr>
+              <a:t>size=0x00000062=98</a:t>
+            </a:r>
+            <a:endParaRPr lang="zh-CN" altLang="en-US" sz="1000" dirty="0">
+              <a:latin typeface="Times New Roman" panose="02020603050405020304" pitchFamily="18" charset="0"/>
+              <a:cs typeface="Times New Roman" panose="02020603050405020304" pitchFamily="18" charset="0"/>
+            </a:endParaRPr>
+          </a:p>
+        </p:txBody>
+      </p:sp>
+      <p:sp>
+        <p:nvSpPr>
+          <p:cNvPr id="12" name="文本框 11"/>
+          <p:cNvSpPr txBox="1"/>
+          <p:nvPr/>
+        </p:nvSpPr>
+        <p:spPr>
+          <a:xfrm>
+            <a:off x="6848352" y="2215024"/>
+            <a:ext cx="1319853" cy="553998"/>
+          </a:xfrm>
+          <a:prstGeom prst="rect">
+            <a:avLst/>
+          </a:prstGeom>
+          <a:ln>
+            <a:prstDash val="sysDot"/>
+          </a:ln>
+        </p:spPr>
+        <p:style>
+          <a:lnRef idx="2">
+            <a:schemeClr val="accent2"/>
+          </a:lnRef>
+          <a:fillRef idx="1">
+            <a:schemeClr val="lt1"/>
+          </a:fillRef>
+          <a:effectRef idx="0">
+            <a:schemeClr val="accent2"/>
+          </a:effectRef>
+          <a:fontRef idx="minor">
+            <a:schemeClr val="dk1"/>
+          </a:fontRef>
+        </p:style>
+        <p:txBody>
+          <a:bodyPr wrap="square" rtlCol="0">
+            <a:spAutoFit/>
+          </a:bodyPr>
+          <a:lstStyle/>
+          <a:p>
+            <a:r>
+              <a:rPr lang="zh-CN" altLang="en-US" sz="1000" dirty="0" smtClean="0">
+                <a:latin typeface="Times New Roman" panose="02020603050405020304" pitchFamily="18" charset="0"/>
+                <a:cs typeface="Times New Roman" panose="02020603050405020304" pitchFamily="18" charset="0"/>
+              </a:rPr>
+              <a:t>三级</a:t>
+            </a:r>
+            <a:r>
+              <a:rPr lang="en-US" altLang="zh-CN" sz="1000" dirty="0" smtClean="0">
+                <a:latin typeface="Times New Roman" panose="02020603050405020304" pitchFamily="18" charset="0"/>
+                <a:cs typeface="Times New Roman" panose="02020603050405020304" pitchFamily="18" charset="0"/>
+              </a:rPr>
+              <a:t>meta</a:t>
+            </a:r>
+            <a:endParaRPr lang="en-US" altLang="zh-CN" sz="1000" dirty="0">
+              <a:latin typeface="Times New Roman" panose="02020603050405020304" pitchFamily="18" charset="0"/>
+              <a:cs typeface="Times New Roman" panose="02020603050405020304" pitchFamily="18" charset="0"/>
+            </a:endParaRPr>
+          </a:p>
+          <a:p>
+            <a:r>
+              <a:rPr lang="en-US" altLang="zh-CN" sz="1000" dirty="0" smtClean="0">
+                <a:latin typeface="Times New Roman" panose="02020603050405020304" pitchFamily="18" charset="0"/>
+                <a:cs typeface="Times New Roman" panose="02020603050405020304" pitchFamily="18" charset="0"/>
+              </a:rPr>
+              <a:t>type=0x6D657461</a:t>
+            </a:r>
+          </a:p>
+          <a:p>
+            <a:r>
+              <a:rPr lang="en-US" altLang="zh-CN" sz="1000" dirty="0" smtClean="0">
+                <a:latin typeface="Times New Roman" panose="02020603050405020304" pitchFamily="18" charset="0"/>
+                <a:cs typeface="Times New Roman" panose="02020603050405020304" pitchFamily="18" charset="0"/>
+              </a:rPr>
+              <a:t>size=0x0000005A=90</a:t>
+            </a:r>
+            <a:endParaRPr lang="zh-CN" altLang="en-US" sz="1000" dirty="0">
+              <a:latin typeface="Times New Roman" panose="02020603050405020304" pitchFamily="18" charset="0"/>
+              <a:cs typeface="Times New Roman" panose="02020603050405020304" pitchFamily="18" charset="0"/>
+            </a:endParaRPr>
+          </a:p>
+        </p:txBody>
+      </p:sp>
+      <p:sp>
+        <p:nvSpPr>
+          <p:cNvPr id="13" name="文本框 12"/>
+          <p:cNvSpPr txBox="1"/>
+          <p:nvPr/>
+        </p:nvSpPr>
+        <p:spPr>
+          <a:xfrm>
+            <a:off x="440138" y="2198219"/>
+            <a:ext cx="1325230" cy="553998"/>
+          </a:xfrm>
+          <a:prstGeom prst="rect">
+            <a:avLst/>
+          </a:prstGeom>
+          <a:ln>
+            <a:prstDash val="sysDot"/>
+          </a:ln>
+        </p:spPr>
+        <p:style>
+          <a:lnRef idx="2">
+            <a:schemeClr val="accent2"/>
+          </a:lnRef>
+          <a:fillRef idx="1">
+            <a:schemeClr val="lt1"/>
+          </a:fillRef>
+          <a:effectRef idx="0">
+            <a:schemeClr val="accent2"/>
+          </a:effectRef>
+          <a:fontRef idx="minor">
+            <a:schemeClr val="dk1"/>
+          </a:fontRef>
+        </p:style>
+        <p:txBody>
+          <a:bodyPr wrap="square" rtlCol="0">
+            <a:spAutoFit/>
+          </a:bodyPr>
+          <a:lstStyle/>
+          <a:p>
+            <a:r>
+              <a:rPr lang="zh-CN" altLang="en-US" sz="1000" dirty="0" smtClean="0">
+                <a:latin typeface="Times New Roman" panose="02020603050405020304" pitchFamily="18" charset="0"/>
+                <a:cs typeface="Times New Roman" panose="02020603050405020304" pitchFamily="18" charset="0"/>
+              </a:rPr>
+              <a:t>三级</a:t>
+            </a:r>
+            <a:r>
+              <a:rPr lang="en-US" altLang="zh-CN" sz="1000" dirty="0" err="1" smtClean="0">
+                <a:latin typeface="Times New Roman" panose="02020603050405020304" pitchFamily="18" charset="0"/>
+                <a:cs typeface="Times New Roman" panose="02020603050405020304" pitchFamily="18" charset="0"/>
+              </a:rPr>
+              <a:t>tkhd</a:t>
+            </a:r>
+            <a:endParaRPr lang="en-US" altLang="zh-CN" sz="1000" dirty="0">
+              <a:latin typeface="Times New Roman" panose="02020603050405020304" pitchFamily="18" charset="0"/>
+              <a:cs typeface="Times New Roman" panose="02020603050405020304" pitchFamily="18" charset="0"/>
+            </a:endParaRPr>
+          </a:p>
+          <a:p>
+            <a:r>
+              <a:rPr lang="en-US" altLang="zh-CN" sz="1000" dirty="0" smtClean="0">
+                <a:latin typeface="Times New Roman" panose="02020603050405020304" pitchFamily="18" charset="0"/>
+                <a:cs typeface="Times New Roman" panose="02020603050405020304" pitchFamily="18" charset="0"/>
+              </a:rPr>
+              <a:t>type=0x746B6864</a:t>
+            </a:r>
+          </a:p>
+          <a:p>
+            <a:r>
+              <a:rPr lang="en-US" altLang="zh-CN" sz="1000" dirty="0" smtClean="0">
+                <a:latin typeface="Times New Roman" panose="02020603050405020304" pitchFamily="18" charset="0"/>
+                <a:cs typeface="Times New Roman" panose="02020603050405020304" pitchFamily="18" charset="0"/>
+              </a:rPr>
+              <a:t>size=0x0000005C=92</a:t>
+            </a:r>
+            <a:endParaRPr lang="zh-CN" altLang="en-US" sz="1000" dirty="0">
+              <a:latin typeface="Times New Roman" panose="02020603050405020304" pitchFamily="18" charset="0"/>
+              <a:cs typeface="Times New Roman" panose="02020603050405020304" pitchFamily="18" charset="0"/>
+            </a:endParaRPr>
+          </a:p>
+        </p:txBody>
+      </p:sp>
+      <p:sp>
+        <p:nvSpPr>
+          <p:cNvPr id="14" name="文本框 13"/>
+          <p:cNvSpPr txBox="1"/>
+          <p:nvPr/>
+        </p:nvSpPr>
+        <p:spPr>
+          <a:xfrm>
+            <a:off x="3538117" y="2216222"/>
+            <a:ext cx="1554579" cy="553998"/>
+          </a:xfrm>
+          <a:prstGeom prst="rect">
+            <a:avLst/>
+          </a:prstGeom>
+          <a:ln>
+            <a:prstDash val="sysDot"/>
+          </a:ln>
+        </p:spPr>
+        <p:style>
+          <a:lnRef idx="2">
+            <a:schemeClr val="accent2"/>
+          </a:lnRef>
+          <a:fillRef idx="1">
+            <a:schemeClr val="lt1"/>
+          </a:fillRef>
+          <a:effectRef idx="0">
+            <a:schemeClr val="accent2"/>
+          </a:effectRef>
+          <a:fontRef idx="minor">
+            <a:schemeClr val="dk1"/>
+          </a:fontRef>
+        </p:style>
+        <p:txBody>
+          <a:bodyPr wrap="square" rtlCol="0">
+            <a:spAutoFit/>
+          </a:bodyPr>
+          <a:lstStyle/>
+          <a:p>
+            <a:r>
+              <a:rPr lang="zh-CN" altLang="en-US" sz="1000" dirty="0" smtClean="0">
+                <a:latin typeface="Times New Roman" panose="02020603050405020304" pitchFamily="18" charset="0"/>
+                <a:cs typeface="Times New Roman" panose="02020603050405020304" pitchFamily="18" charset="0"/>
+              </a:rPr>
+              <a:t>三级</a:t>
+            </a:r>
+            <a:r>
+              <a:rPr lang="en-US" altLang="zh-CN" sz="1000" dirty="0" err="1" smtClean="0">
+                <a:latin typeface="Times New Roman" panose="02020603050405020304" pitchFamily="18" charset="0"/>
+                <a:cs typeface="Times New Roman" panose="02020603050405020304" pitchFamily="18" charset="0"/>
+              </a:rPr>
+              <a:t>mdia</a:t>
+            </a:r>
+            <a:endParaRPr lang="en-US" altLang="zh-CN" sz="1000" dirty="0">
+              <a:latin typeface="Times New Roman" panose="02020603050405020304" pitchFamily="18" charset="0"/>
+              <a:cs typeface="Times New Roman" panose="02020603050405020304" pitchFamily="18" charset="0"/>
+            </a:endParaRPr>
+          </a:p>
+          <a:p>
+            <a:r>
+              <a:rPr lang="en-US" altLang="zh-CN" sz="1000" dirty="0" smtClean="0">
+                <a:latin typeface="Times New Roman" panose="02020603050405020304" pitchFamily="18" charset="0"/>
+                <a:cs typeface="Times New Roman" panose="02020603050405020304" pitchFamily="18" charset="0"/>
+              </a:rPr>
+              <a:t>type=0x6D646961</a:t>
+            </a:r>
+          </a:p>
+          <a:p>
+            <a:r>
+              <a:rPr lang="en-US" altLang="zh-CN" sz="1000" smtClean="0">
+                <a:latin typeface="Times New Roman" panose="02020603050405020304" pitchFamily="18" charset="0"/>
+                <a:cs typeface="Times New Roman" panose="02020603050405020304" pitchFamily="18" charset="0"/>
+              </a:rPr>
+              <a:t>size=0x00001ADA=6874</a:t>
+            </a:r>
+            <a:endParaRPr lang="zh-CN" altLang="en-US" sz="1000" dirty="0">
+              <a:latin typeface="Times New Roman" panose="02020603050405020304" pitchFamily="18" charset="0"/>
+              <a:cs typeface="Times New Roman" panose="02020603050405020304" pitchFamily="18" charset="0"/>
+            </a:endParaRPr>
+          </a:p>
+        </p:txBody>
+      </p:sp>
+      <p:sp>
+        <p:nvSpPr>
+          <p:cNvPr id="15" name="文本框 14"/>
+          <p:cNvSpPr txBox="1"/>
+          <p:nvPr/>
+        </p:nvSpPr>
+        <p:spPr>
+          <a:xfrm>
+            <a:off x="2056501" y="2216222"/>
+            <a:ext cx="1311386" cy="553998"/>
+          </a:xfrm>
+          <a:prstGeom prst="rect">
+            <a:avLst/>
+          </a:prstGeom>
+          <a:ln>
+            <a:prstDash val="sysDot"/>
+          </a:ln>
+        </p:spPr>
+        <p:style>
+          <a:lnRef idx="2">
+            <a:schemeClr val="accent2"/>
+          </a:lnRef>
+          <a:fillRef idx="1">
+            <a:schemeClr val="lt1"/>
+          </a:fillRef>
+          <a:effectRef idx="0">
+            <a:schemeClr val="accent2"/>
+          </a:effectRef>
+          <a:fontRef idx="minor">
+            <a:schemeClr val="dk1"/>
+          </a:fontRef>
+        </p:style>
+        <p:txBody>
+          <a:bodyPr wrap="square" rtlCol="0">
+            <a:spAutoFit/>
+          </a:bodyPr>
+          <a:lstStyle/>
+          <a:p>
+            <a:r>
+              <a:rPr lang="zh-CN" altLang="en-US" sz="1000" dirty="0" smtClean="0">
+                <a:latin typeface="Times New Roman" panose="02020603050405020304" pitchFamily="18" charset="0"/>
+                <a:cs typeface="Times New Roman" panose="02020603050405020304" pitchFamily="18" charset="0"/>
+              </a:rPr>
+              <a:t>三级</a:t>
+            </a:r>
+            <a:r>
+              <a:rPr lang="en-US" altLang="zh-CN" sz="1000" dirty="0" err="1">
+                <a:latin typeface="Times New Roman" panose="02020603050405020304" pitchFamily="18" charset="0"/>
+                <a:cs typeface="Times New Roman" panose="02020603050405020304" pitchFamily="18" charset="0"/>
+              </a:rPr>
+              <a:t>edts</a:t>
+            </a:r>
+            <a:endParaRPr lang="en-US" altLang="zh-CN" sz="1000" dirty="0">
+              <a:latin typeface="Times New Roman" panose="02020603050405020304" pitchFamily="18" charset="0"/>
+              <a:cs typeface="Times New Roman" panose="02020603050405020304" pitchFamily="18" charset="0"/>
+            </a:endParaRPr>
+          </a:p>
+          <a:p>
+            <a:r>
+              <a:rPr lang="en-US" altLang="zh-CN" sz="1000" dirty="0" smtClean="0">
+                <a:latin typeface="Times New Roman" panose="02020603050405020304" pitchFamily="18" charset="0"/>
+                <a:cs typeface="Times New Roman" panose="02020603050405020304" pitchFamily="18" charset="0"/>
+              </a:rPr>
+              <a:t>type=0x65647473</a:t>
+            </a:r>
+          </a:p>
+          <a:p>
+            <a:r>
+              <a:rPr lang="en-US" altLang="zh-CN" sz="1000" dirty="0" smtClean="0">
+                <a:latin typeface="Times New Roman" panose="02020603050405020304" pitchFamily="18" charset="0"/>
+                <a:cs typeface="Times New Roman" panose="02020603050405020304" pitchFamily="18" charset="0"/>
+              </a:rPr>
+              <a:t>size=0x00000024=36</a:t>
+            </a:r>
+            <a:endParaRPr lang="zh-CN" altLang="en-US" sz="1000" dirty="0">
+              <a:latin typeface="Times New Roman" panose="02020603050405020304" pitchFamily="18" charset="0"/>
+              <a:cs typeface="Times New Roman" panose="02020603050405020304" pitchFamily="18" charset="0"/>
+            </a:endParaRPr>
+          </a:p>
+        </p:txBody>
+      </p:sp>
+      <p:sp>
+        <p:nvSpPr>
+          <p:cNvPr id="16" name="文本框 15"/>
+          <p:cNvSpPr txBox="1"/>
+          <p:nvPr/>
+        </p:nvSpPr>
+        <p:spPr>
+          <a:xfrm>
+            <a:off x="676874" y="3025454"/>
+            <a:ext cx="1317810" cy="553998"/>
+          </a:xfrm>
+          <a:prstGeom prst="rect">
+            <a:avLst/>
+          </a:prstGeom>
+          <a:ln>
+            <a:prstDash val="sysDot"/>
+          </a:ln>
+        </p:spPr>
+        <p:style>
+          <a:lnRef idx="2">
+            <a:schemeClr val="accent2"/>
+          </a:lnRef>
+          <a:fillRef idx="1">
+            <a:schemeClr val="lt1"/>
+          </a:fillRef>
+          <a:effectRef idx="0">
+            <a:schemeClr val="accent2"/>
+          </a:effectRef>
+          <a:fontRef idx="minor">
+            <a:schemeClr val="dk1"/>
+          </a:fontRef>
+        </p:style>
+        <p:txBody>
+          <a:bodyPr wrap="square" rtlCol="0">
+            <a:spAutoFit/>
+          </a:bodyPr>
+          <a:lstStyle/>
+          <a:p>
+            <a:r>
+              <a:rPr lang="zh-CN" altLang="en-US" sz="1000" dirty="0">
+                <a:latin typeface="Times New Roman" panose="02020603050405020304" pitchFamily="18" charset="0"/>
+                <a:cs typeface="Times New Roman" panose="02020603050405020304" pitchFamily="18" charset="0"/>
+              </a:rPr>
+              <a:t>四级</a:t>
+            </a:r>
+            <a:r>
+              <a:rPr lang="en-US" altLang="zh-CN" sz="1000" dirty="0" err="1" smtClean="0">
+                <a:latin typeface="Times New Roman" panose="02020603050405020304" pitchFamily="18" charset="0"/>
+                <a:cs typeface="Times New Roman" panose="02020603050405020304" pitchFamily="18" charset="0"/>
+              </a:rPr>
+              <a:t>elst</a:t>
+            </a:r>
+            <a:endParaRPr lang="en-US" altLang="zh-CN" sz="1000" dirty="0" smtClean="0">
+              <a:latin typeface="Times New Roman" panose="02020603050405020304" pitchFamily="18" charset="0"/>
+              <a:cs typeface="Times New Roman" panose="02020603050405020304" pitchFamily="18" charset="0"/>
+            </a:endParaRPr>
+          </a:p>
+          <a:p>
+            <a:r>
+              <a:rPr lang="en-US" altLang="zh-CN" sz="1000" dirty="0" smtClean="0">
+                <a:latin typeface="Times New Roman" panose="02020603050405020304" pitchFamily="18" charset="0"/>
+                <a:cs typeface="Times New Roman" panose="02020603050405020304" pitchFamily="18" charset="0"/>
+              </a:rPr>
+              <a:t>type=0x656C7374</a:t>
+            </a:r>
+          </a:p>
+          <a:p>
+            <a:r>
+              <a:rPr lang="en-US" altLang="zh-CN" sz="1000" dirty="0" smtClean="0">
+                <a:latin typeface="Times New Roman" panose="02020603050405020304" pitchFamily="18" charset="0"/>
+                <a:cs typeface="Times New Roman" panose="02020603050405020304" pitchFamily="18" charset="0"/>
+              </a:rPr>
+              <a:t>size=0x0000001C=28</a:t>
+            </a:r>
+            <a:endParaRPr lang="zh-CN" altLang="en-US" sz="1000" dirty="0">
+              <a:latin typeface="Times New Roman" panose="02020603050405020304" pitchFamily="18" charset="0"/>
+              <a:cs typeface="Times New Roman" panose="02020603050405020304" pitchFamily="18" charset="0"/>
+            </a:endParaRPr>
+          </a:p>
+        </p:txBody>
+      </p:sp>
+      <p:sp>
+        <p:nvSpPr>
+          <p:cNvPr id="17" name="文本框 16"/>
+          <p:cNvSpPr txBox="1"/>
+          <p:nvPr/>
+        </p:nvSpPr>
+        <p:spPr>
+          <a:xfrm>
+            <a:off x="2352868" y="3047219"/>
+            <a:ext cx="1333832" cy="553998"/>
+          </a:xfrm>
+          <a:prstGeom prst="rect">
+            <a:avLst/>
+          </a:prstGeom>
+          <a:ln>
+            <a:prstDash val="sysDot"/>
+          </a:ln>
+        </p:spPr>
+        <p:style>
+          <a:lnRef idx="2">
+            <a:schemeClr val="accent2"/>
+          </a:lnRef>
+          <a:fillRef idx="1">
+            <a:schemeClr val="lt1"/>
+          </a:fillRef>
+          <a:effectRef idx="0">
+            <a:schemeClr val="accent2"/>
+          </a:effectRef>
+          <a:fontRef idx="minor">
+            <a:schemeClr val="dk1"/>
+          </a:fontRef>
+        </p:style>
+        <p:txBody>
+          <a:bodyPr wrap="square" rtlCol="0">
+            <a:spAutoFit/>
+          </a:bodyPr>
+          <a:lstStyle/>
+          <a:p>
+            <a:r>
+              <a:rPr lang="zh-CN" altLang="en-US" sz="1000" dirty="0">
+                <a:latin typeface="Times New Roman" panose="02020603050405020304" pitchFamily="18" charset="0"/>
+                <a:cs typeface="Times New Roman" panose="02020603050405020304" pitchFamily="18" charset="0"/>
+              </a:rPr>
+              <a:t>四级</a:t>
+            </a:r>
+            <a:r>
+              <a:rPr lang="en-US" altLang="zh-CN" sz="1000" dirty="0" err="1" smtClean="0">
+                <a:latin typeface="Times New Roman" panose="02020603050405020304" pitchFamily="18" charset="0"/>
+                <a:cs typeface="Times New Roman" panose="02020603050405020304" pitchFamily="18" charset="0"/>
+              </a:rPr>
+              <a:t>mdhd</a:t>
+            </a:r>
+            <a:endParaRPr lang="en-US" altLang="zh-CN" sz="1000" dirty="0" smtClean="0">
+              <a:latin typeface="Times New Roman" panose="02020603050405020304" pitchFamily="18" charset="0"/>
+              <a:cs typeface="Times New Roman" panose="02020603050405020304" pitchFamily="18" charset="0"/>
+            </a:endParaRPr>
+          </a:p>
+          <a:p>
+            <a:r>
+              <a:rPr lang="en-US" altLang="zh-CN" sz="1000" dirty="0" smtClean="0">
+                <a:latin typeface="Times New Roman" panose="02020603050405020304" pitchFamily="18" charset="0"/>
+                <a:cs typeface="Times New Roman" panose="02020603050405020304" pitchFamily="18" charset="0"/>
+              </a:rPr>
+              <a:t>type=0x6D646864</a:t>
+            </a:r>
+          </a:p>
+          <a:p>
+            <a:r>
+              <a:rPr lang="en-US" altLang="zh-CN" sz="1000" dirty="0" smtClean="0">
+                <a:latin typeface="Times New Roman" panose="02020603050405020304" pitchFamily="18" charset="0"/>
+                <a:cs typeface="Times New Roman" panose="02020603050405020304" pitchFamily="18" charset="0"/>
+              </a:rPr>
+              <a:t>size=0x00000020=32</a:t>
+            </a:r>
+            <a:endParaRPr lang="zh-CN" altLang="en-US" sz="1000" dirty="0">
+              <a:latin typeface="Times New Roman" panose="02020603050405020304" pitchFamily="18" charset="0"/>
+              <a:cs typeface="Times New Roman" panose="02020603050405020304" pitchFamily="18" charset="0"/>
+            </a:endParaRPr>
+          </a:p>
+        </p:txBody>
+      </p:sp>
+      <p:sp>
+        <p:nvSpPr>
+          <p:cNvPr id="18" name="文本框 17"/>
+          <p:cNvSpPr txBox="1"/>
+          <p:nvPr/>
+        </p:nvSpPr>
+        <p:spPr>
+          <a:xfrm>
+            <a:off x="3772960" y="3039771"/>
+            <a:ext cx="1402056" cy="553998"/>
+          </a:xfrm>
+          <a:prstGeom prst="rect">
+            <a:avLst/>
+          </a:prstGeom>
+          <a:ln>
+            <a:prstDash val="sysDot"/>
+          </a:ln>
+        </p:spPr>
+        <p:style>
+          <a:lnRef idx="2">
+            <a:schemeClr val="accent2"/>
+          </a:lnRef>
+          <a:fillRef idx="1">
+            <a:schemeClr val="lt1"/>
+          </a:fillRef>
+          <a:effectRef idx="0">
+            <a:schemeClr val="accent2"/>
+          </a:effectRef>
+          <a:fontRef idx="minor">
+            <a:schemeClr val="dk1"/>
+          </a:fontRef>
+        </p:style>
+        <p:txBody>
+          <a:bodyPr wrap="square" rtlCol="0">
+            <a:spAutoFit/>
+          </a:bodyPr>
+          <a:lstStyle/>
+          <a:p>
+            <a:r>
+              <a:rPr lang="zh-CN" altLang="en-US" sz="1000" dirty="0">
+                <a:latin typeface="Times New Roman" panose="02020603050405020304" pitchFamily="18" charset="0"/>
+                <a:cs typeface="Times New Roman" panose="02020603050405020304" pitchFamily="18" charset="0"/>
+              </a:rPr>
+              <a:t>四级</a:t>
+            </a:r>
+            <a:r>
+              <a:rPr lang="en-US" altLang="zh-CN" sz="1000" dirty="0" err="1" smtClean="0">
+                <a:latin typeface="Times New Roman" panose="02020603050405020304" pitchFamily="18" charset="0"/>
+                <a:cs typeface="Times New Roman" panose="02020603050405020304" pitchFamily="18" charset="0"/>
+              </a:rPr>
+              <a:t>hdlr</a:t>
+            </a:r>
+            <a:endParaRPr lang="en-US" altLang="zh-CN" sz="1000" dirty="0" smtClean="0">
+              <a:latin typeface="Times New Roman" panose="02020603050405020304" pitchFamily="18" charset="0"/>
+              <a:cs typeface="Times New Roman" panose="02020603050405020304" pitchFamily="18" charset="0"/>
+            </a:endParaRPr>
+          </a:p>
+          <a:p>
+            <a:r>
+              <a:rPr lang="en-US" altLang="zh-CN" sz="1000" dirty="0" smtClean="0">
+                <a:latin typeface="Times New Roman" panose="02020603050405020304" pitchFamily="18" charset="0"/>
+                <a:cs typeface="Times New Roman" panose="02020603050405020304" pitchFamily="18" charset="0"/>
+              </a:rPr>
+              <a:t>type=0x6D646C72</a:t>
+            </a:r>
+          </a:p>
+          <a:p>
+            <a:r>
+              <a:rPr lang="en-US" altLang="zh-CN" sz="1000" dirty="0" smtClean="0">
+                <a:latin typeface="Times New Roman" panose="02020603050405020304" pitchFamily="18" charset="0"/>
+                <a:cs typeface="Times New Roman" panose="02020603050405020304" pitchFamily="18" charset="0"/>
+              </a:rPr>
+              <a:t>size=0x0000002D=45</a:t>
+            </a:r>
+            <a:endParaRPr lang="zh-CN" altLang="en-US" sz="1000" dirty="0">
+              <a:latin typeface="Times New Roman" panose="02020603050405020304" pitchFamily="18" charset="0"/>
+              <a:cs typeface="Times New Roman" panose="02020603050405020304" pitchFamily="18" charset="0"/>
+            </a:endParaRPr>
+          </a:p>
+        </p:txBody>
+      </p:sp>
+      <p:sp>
+        <p:nvSpPr>
+          <p:cNvPr id="19" name="文本框 18"/>
+          <p:cNvSpPr txBox="1"/>
+          <p:nvPr/>
+        </p:nvSpPr>
+        <p:spPr>
+          <a:xfrm>
+            <a:off x="5274402" y="3039771"/>
+            <a:ext cx="1537293" cy="553998"/>
+          </a:xfrm>
+          <a:prstGeom prst="rect">
+            <a:avLst/>
+          </a:prstGeom>
+          <a:ln>
+            <a:prstDash val="sysDot"/>
+          </a:ln>
+        </p:spPr>
+        <p:style>
+          <a:lnRef idx="2">
+            <a:schemeClr val="accent2"/>
+          </a:lnRef>
+          <a:fillRef idx="1">
+            <a:schemeClr val="lt1"/>
+          </a:fillRef>
+          <a:effectRef idx="0">
+            <a:schemeClr val="accent2"/>
+          </a:effectRef>
+          <a:fontRef idx="minor">
+            <a:schemeClr val="dk1"/>
+          </a:fontRef>
+        </p:style>
+        <p:txBody>
+          <a:bodyPr wrap="square" rtlCol="0">
+            <a:spAutoFit/>
+          </a:bodyPr>
+          <a:lstStyle/>
+          <a:p>
+            <a:r>
+              <a:rPr lang="zh-CN" altLang="en-US" sz="1000" dirty="0">
+                <a:latin typeface="Times New Roman" panose="02020603050405020304" pitchFamily="18" charset="0"/>
+                <a:cs typeface="Times New Roman" panose="02020603050405020304" pitchFamily="18" charset="0"/>
+              </a:rPr>
+              <a:t>四级</a:t>
+            </a:r>
+            <a:r>
+              <a:rPr lang="en-US" altLang="zh-CN" sz="1000" dirty="0" err="1" smtClean="0">
+                <a:latin typeface="Times New Roman" panose="02020603050405020304" pitchFamily="18" charset="0"/>
+                <a:cs typeface="Times New Roman" panose="02020603050405020304" pitchFamily="18" charset="0"/>
+              </a:rPr>
+              <a:t>minf</a:t>
+            </a:r>
+            <a:endParaRPr lang="en-US" altLang="zh-CN" sz="1000" dirty="0" smtClean="0">
+              <a:latin typeface="Times New Roman" panose="02020603050405020304" pitchFamily="18" charset="0"/>
+              <a:cs typeface="Times New Roman" panose="02020603050405020304" pitchFamily="18" charset="0"/>
+            </a:endParaRPr>
+          </a:p>
+          <a:p>
+            <a:r>
+              <a:rPr lang="en-US" altLang="zh-CN" sz="1000" dirty="0" smtClean="0">
+                <a:latin typeface="Times New Roman" panose="02020603050405020304" pitchFamily="18" charset="0"/>
+                <a:cs typeface="Times New Roman" panose="02020603050405020304" pitchFamily="18" charset="0"/>
+              </a:rPr>
+              <a:t>type=0x6D696E66</a:t>
+            </a:r>
+          </a:p>
+          <a:p>
+            <a:r>
+              <a:rPr lang="en-US" altLang="zh-CN" sz="1000" smtClean="0">
+                <a:latin typeface="Times New Roman" panose="02020603050405020304" pitchFamily="18" charset="0"/>
+                <a:cs typeface="Times New Roman" panose="02020603050405020304" pitchFamily="18" charset="0"/>
+              </a:rPr>
+              <a:t>size=0x00001A85=6789</a:t>
+            </a:r>
+            <a:endParaRPr lang="zh-CN" altLang="en-US" sz="1000" dirty="0">
+              <a:latin typeface="Times New Roman" panose="02020603050405020304" pitchFamily="18" charset="0"/>
+              <a:cs typeface="Times New Roman" panose="02020603050405020304" pitchFamily="18" charset="0"/>
+            </a:endParaRPr>
+          </a:p>
+        </p:txBody>
+      </p:sp>
+      <p:sp>
+        <p:nvSpPr>
+          <p:cNvPr id="20" name="文本框 19"/>
+          <p:cNvSpPr txBox="1"/>
+          <p:nvPr/>
+        </p:nvSpPr>
+        <p:spPr>
+          <a:xfrm>
+            <a:off x="1928847" y="3888498"/>
+            <a:ext cx="1366285" cy="553998"/>
+          </a:xfrm>
+          <a:prstGeom prst="rect">
+            <a:avLst/>
+          </a:prstGeom>
+          <a:ln>
+            <a:prstDash val="sysDot"/>
+          </a:ln>
+        </p:spPr>
+        <p:style>
+          <a:lnRef idx="2">
+            <a:schemeClr val="accent2"/>
+          </a:lnRef>
+          <a:fillRef idx="1">
+            <a:schemeClr val="lt1"/>
+          </a:fillRef>
+          <a:effectRef idx="0">
+            <a:schemeClr val="accent2"/>
+          </a:effectRef>
+          <a:fontRef idx="minor">
+            <a:schemeClr val="dk1"/>
+          </a:fontRef>
+        </p:style>
+        <p:txBody>
+          <a:bodyPr wrap="square" rtlCol="0">
+            <a:spAutoFit/>
+          </a:bodyPr>
+          <a:lstStyle/>
+          <a:p>
+            <a:r>
+              <a:rPr lang="zh-CN" altLang="en-US" sz="1000" dirty="0">
+                <a:latin typeface="Times New Roman" panose="02020603050405020304" pitchFamily="18" charset="0"/>
+                <a:cs typeface="Times New Roman" panose="02020603050405020304" pitchFamily="18" charset="0"/>
+              </a:rPr>
+              <a:t>五级</a:t>
+            </a:r>
+            <a:r>
+              <a:rPr lang="en-US" altLang="zh-CN" sz="1000" dirty="0" err="1" smtClean="0">
+                <a:latin typeface="Times New Roman" panose="02020603050405020304" pitchFamily="18" charset="0"/>
+                <a:cs typeface="Times New Roman" panose="02020603050405020304" pitchFamily="18" charset="0"/>
+              </a:rPr>
+              <a:t>vmhd</a:t>
+            </a:r>
+            <a:endParaRPr lang="en-US" altLang="zh-CN" sz="1000" dirty="0" smtClean="0">
+              <a:latin typeface="Times New Roman" panose="02020603050405020304" pitchFamily="18" charset="0"/>
+              <a:cs typeface="Times New Roman" panose="02020603050405020304" pitchFamily="18" charset="0"/>
+            </a:endParaRPr>
+          </a:p>
+          <a:p>
+            <a:r>
+              <a:rPr lang="en-US" altLang="zh-CN" sz="1000" dirty="0" smtClean="0">
+                <a:latin typeface="Times New Roman" panose="02020603050405020304" pitchFamily="18" charset="0"/>
+                <a:cs typeface="Times New Roman" panose="02020603050405020304" pitchFamily="18" charset="0"/>
+              </a:rPr>
+              <a:t>type=0x766D6864</a:t>
+            </a:r>
+          </a:p>
+          <a:p>
+            <a:r>
+              <a:rPr lang="en-US" altLang="zh-CN" sz="1000" dirty="0" smtClean="0">
+                <a:latin typeface="Times New Roman" panose="02020603050405020304" pitchFamily="18" charset="0"/>
+                <a:cs typeface="Times New Roman" panose="02020603050405020304" pitchFamily="18" charset="0"/>
+              </a:rPr>
+              <a:t>size=0x00000014=20</a:t>
+            </a:r>
+            <a:endParaRPr lang="zh-CN" altLang="en-US" sz="1000" dirty="0">
+              <a:latin typeface="Times New Roman" panose="02020603050405020304" pitchFamily="18" charset="0"/>
+              <a:cs typeface="Times New Roman" panose="02020603050405020304" pitchFamily="18" charset="0"/>
+            </a:endParaRPr>
+          </a:p>
+        </p:txBody>
+      </p:sp>
+      <p:sp>
+        <p:nvSpPr>
+          <p:cNvPr id="21" name="文本框 20"/>
+          <p:cNvSpPr txBox="1"/>
+          <p:nvPr/>
+        </p:nvSpPr>
+        <p:spPr>
+          <a:xfrm>
+            <a:off x="3705757" y="3887095"/>
+            <a:ext cx="1322900" cy="553998"/>
+          </a:xfrm>
+          <a:prstGeom prst="rect">
+            <a:avLst/>
+          </a:prstGeom>
+          <a:ln>
+            <a:prstDash val="sysDot"/>
+          </a:ln>
+        </p:spPr>
+        <p:style>
+          <a:lnRef idx="2">
+            <a:schemeClr val="accent2"/>
+          </a:lnRef>
+          <a:fillRef idx="1">
+            <a:schemeClr val="lt1"/>
+          </a:fillRef>
+          <a:effectRef idx="0">
+            <a:schemeClr val="accent2"/>
+          </a:effectRef>
+          <a:fontRef idx="minor">
+            <a:schemeClr val="dk1"/>
+          </a:fontRef>
+        </p:style>
+        <p:txBody>
+          <a:bodyPr wrap="square" rtlCol="0">
+            <a:spAutoFit/>
+          </a:bodyPr>
+          <a:lstStyle/>
+          <a:p>
+            <a:r>
+              <a:rPr lang="zh-CN" altLang="en-US" sz="1000" dirty="0">
+                <a:latin typeface="Times New Roman" panose="02020603050405020304" pitchFamily="18" charset="0"/>
+                <a:cs typeface="Times New Roman" panose="02020603050405020304" pitchFamily="18" charset="0"/>
+              </a:rPr>
+              <a:t>五级</a:t>
+            </a:r>
+            <a:r>
+              <a:rPr lang="en-US" altLang="zh-CN" sz="1000" dirty="0" err="1" smtClean="0">
+                <a:latin typeface="Times New Roman" panose="02020603050405020304" pitchFamily="18" charset="0"/>
+                <a:cs typeface="Times New Roman" panose="02020603050405020304" pitchFamily="18" charset="0"/>
+              </a:rPr>
+              <a:t>dinf</a:t>
+            </a:r>
+            <a:endParaRPr lang="en-US" altLang="zh-CN" sz="1000" dirty="0" smtClean="0">
+              <a:latin typeface="Times New Roman" panose="02020603050405020304" pitchFamily="18" charset="0"/>
+              <a:cs typeface="Times New Roman" panose="02020603050405020304" pitchFamily="18" charset="0"/>
+            </a:endParaRPr>
+          </a:p>
+          <a:p>
+            <a:r>
+              <a:rPr lang="en-US" altLang="zh-CN" sz="1000" dirty="0" smtClean="0">
+                <a:latin typeface="Times New Roman" panose="02020603050405020304" pitchFamily="18" charset="0"/>
+                <a:cs typeface="Times New Roman" panose="02020603050405020304" pitchFamily="18" charset="0"/>
+              </a:rPr>
+              <a:t>type=0x64696E66</a:t>
+            </a:r>
+          </a:p>
+          <a:p>
+            <a:r>
+              <a:rPr lang="en-US" altLang="zh-CN" sz="1000" dirty="0" smtClean="0">
+                <a:latin typeface="Times New Roman" panose="02020603050405020304" pitchFamily="18" charset="0"/>
+                <a:cs typeface="Times New Roman" panose="02020603050405020304" pitchFamily="18" charset="0"/>
+              </a:rPr>
+              <a:t>size=0x00000024=36</a:t>
+            </a:r>
+            <a:endParaRPr lang="zh-CN" altLang="en-US" sz="1000" dirty="0">
+              <a:latin typeface="Times New Roman" panose="02020603050405020304" pitchFamily="18" charset="0"/>
+              <a:cs typeface="Times New Roman" panose="02020603050405020304" pitchFamily="18" charset="0"/>
+            </a:endParaRPr>
+          </a:p>
+        </p:txBody>
+      </p:sp>
+      <p:sp>
+        <p:nvSpPr>
+          <p:cNvPr id="22" name="文本框 21"/>
+          <p:cNvSpPr txBox="1"/>
+          <p:nvPr/>
+        </p:nvSpPr>
+        <p:spPr>
+          <a:xfrm>
+            <a:off x="5789196" y="3927381"/>
+            <a:ext cx="1553571" cy="553998"/>
+          </a:xfrm>
+          <a:prstGeom prst="rect">
+            <a:avLst/>
+          </a:prstGeom>
+          <a:ln>
+            <a:prstDash val="sysDot"/>
+          </a:ln>
+        </p:spPr>
+        <p:style>
+          <a:lnRef idx="2">
+            <a:schemeClr val="accent2"/>
+          </a:lnRef>
+          <a:fillRef idx="1">
+            <a:schemeClr val="lt1"/>
+          </a:fillRef>
+          <a:effectRef idx="0">
+            <a:schemeClr val="accent2"/>
+          </a:effectRef>
+          <a:fontRef idx="minor">
+            <a:schemeClr val="dk1"/>
+          </a:fontRef>
+        </p:style>
+        <p:txBody>
+          <a:bodyPr wrap="square" rtlCol="0">
+            <a:spAutoFit/>
+          </a:bodyPr>
+          <a:lstStyle/>
+          <a:p>
+            <a:r>
+              <a:rPr lang="zh-CN" altLang="en-US" sz="1000" dirty="0">
+                <a:latin typeface="Times New Roman" panose="02020603050405020304" pitchFamily="18" charset="0"/>
+                <a:cs typeface="Times New Roman" panose="02020603050405020304" pitchFamily="18" charset="0"/>
+              </a:rPr>
+              <a:t>五级</a:t>
+            </a:r>
+            <a:r>
+              <a:rPr lang="en-US" altLang="zh-CN" sz="1000" dirty="0" err="1" smtClean="0">
+                <a:latin typeface="Times New Roman" panose="02020603050405020304" pitchFamily="18" charset="0"/>
+                <a:cs typeface="Times New Roman" panose="02020603050405020304" pitchFamily="18" charset="0"/>
+              </a:rPr>
+              <a:t>stbl</a:t>
+            </a:r>
+            <a:endParaRPr lang="en-US" altLang="zh-CN" sz="1000" dirty="0" smtClean="0">
+              <a:latin typeface="Times New Roman" panose="02020603050405020304" pitchFamily="18" charset="0"/>
+              <a:cs typeface="Times New Roman" panose="02020603050405020304" pitchFamily="18" charset="0"/>
+            </a:endParaRPr>
+          </a:p>
+          <a:p>
+            <a:r>
+              <a:rPr lang="en-US" altLang="zh-CN" sz="1000" dirty="0" smtClean="0">
+                <a:latin typeface="Times New Roman" panose="02020603050405020304" pitchFamily="18" charset="0"/>
+                <a:cs typeface="Times New Roman" panose="02020603050405020304" pitchFamily="18" charset="0"/>
+              </a:rPr>
+              <a:t>type=0x7374626C</a:t>
+            </a:r>
+          </a:p>
+          <a:p>
+            <a:r>
+              <a:rPr lang="en-US" altLang="zh-CN" sz="1000" smtClean="0">
+                <a:latin typeface="Times New Roman" panose="02020603050405020304" pitchFamily="18" charset="0"/>
+                <a:cs typeface="Times New Roman" panose="02020603050405020304" pitchFamily="18" charset="0"/>
+              </a:rPr>
+              <a:t>size=0x00001A45=6725</a:t>
+            </a:r>
+            <a:endParaRPr lang="zh-CN" altLang="en-US" sz="1000" dirty="0">
+              <a:latin typeface="Times New Roman" panose="02020603050405020304" pitchFamily="18" charset="0"/>
+              <a:cs typeface="Times New Roman" panose="02020603050405020304" pitchFamily="18" charset="0"/>
+            </a:endParaRPr>
+          </a:p>
+        </p:txBody>
+      </p:sp>
+      <p:sp>
+        <p:nvSpPr>
+          <p:cNvPr id="23" name="文本框 22"/>
+          <p:cNvSpPr txBox="1"/>
+          <p:nvPr/>
+        </p:nvSpPr>
+        <p:spPr>
+          <a:xfrm>
+            <a:off x="2174774" y="5469787"/>
+            <a:ext cx="1380683" cy="553998"/>
+          </a:xfrm>
+          <a:prstGeom prst="rect">
+            <a:avLst/>
+          </a:prstGeom>
+          <a:ln>
+            <a:prstDash val="sysDot"/>
+          </a:ln>
+        </p:spPr>
+        <p:style>
+          <a:lnRef idx="2">
+            <a:schemeClr val="accent2"/>
+          </a:lnRef>
+          <a:fillRef idx="1">
+            <a:schemeClr val="lt1"/>
+          </a:fillRef>
+          <a:effectRef idx="0">
+            <a:schemeClr val="accent2"/>
+          </a:effectRef>
+          <a:fontRef idx="minor">
+            <a:schemeClr val="dk1"/>
+          </a:fontRef>
+        </p:style>
+        <p:txBody>
+          <a:bodyPr wrap="square" rtlCol="0">
+            <a:spAutoFit/>
+          </a:bodyPr>
+          <a:lstStyle/>
+          <a:p>
+            <a:r>
+              <a:rPr lang="zh-CN" altLang="en-US" sz="1000" dirty="0">
+                <a:latin typeface="Times New Roman" panose="02020603050405020304" pitchFamily="18" charset="0"/>
+                <a:cs typeface="Times New Roman" panose="02020603050405020304" pitchFamily="18" charset="0"/>
+              </a:rPr>
+              <a:t>六级</a:t>
+            </a:r>
+            <a:r>
+              <a:rPr lang="en-US" altLang="zh-CN" sz="1000" dirty="0" err="1" smtClean="0">
+                <a:latin typeface="Times New Roman" panose="02020603050405020304" pitchFamily="18" charset="0"/>
+                <a:cs typeface="Times New Roman" panose="02020603050405020304" pitchFamily="18" charset="0"/>
+              </a:rPr>
+              <a:t>dref</a:t>
+            </a:r>
+            <a:endParaRPr lang="en-US" altLang="zh-CN" sz="1000" dirty="0" smtClean="0">
+              <a:latin typeface="Times New Roman" panose="02020603050405020304" pitchFamily="18" charset="0"/>
+              <a:cs typeface="Times New Roman" panose="02020603050405020304" pitchFamily="18" charset="0"/>
+            </a:endParaRPr>
+          </a:p>
+          <a:p>
+            <a:r>
+              <a:rPr lang="en-US" altLang="zh-CN" sz="1000" dirty="0" smtClean="0">
+                <a:latin typeface="Times New Roman" panose="02020603050405020304" pitchFamily="18" charset="0"/>
+                <a:cs typeface="Times New Roman" panose="02020603050405020304" pitchFamily="18" charset="0"/>
+              </a:rPr>
+              <a:t>type=0x64726566</a:t>
+            </a:r>
+          </a:p>
+          <a:p>
+            <a:r>
+              <a:rPr lang="en-US" altLang="zh-CN" sz="1000" dirty="0" smtClean="0">
+                <a:latin typeface="Times New Roman" panose="02020603050405020304" pitchFamily="18" charset="0"/>
+                <a:cs typeface="Times New Roman" panose="02020603050405020304" pitchFamily="18" charset="0"/>
+              </a:rPr>
+              <a:t>type=0x0000001C=28</a:t>
+            </a:r>
+            <a:endParaRPr lang="zh-CN" altLang="en-US" sz="1000" dirty="0">
+              <a:latin typeface="Times New Roman" panose="02020603050405020304" pitchFamily="18" charset="0"/>
+              <a:cs typeface="Times New Roman" panose="02020603050405020304" pitchFamily="18" charset="0"/>
+            </a:endParaRPr>
+          </a:p>
+        </p:txBody>
+      </p:sp>
+      <p:cxnSp>
+        <p:nvCxnSpPr>
+          <p:cNvPr id="32" name="直接箭头连接符 31"/>
+          <p:cNvCxnSpPr>
+            <a:stCxn id="4" idx="2"/>
+            <a:endCxn id="5" idx="0"/>
+          </p:cNvCxnSpPr>
+          <p:nvPr/>
+        </p:nvCxnSpPr>
+        <p:spPr>
+          <a:xfrm flipH="1">
+            <a:off x="717733" y="285471"/>
+            <a:ext cx="2101617" cy="273359"/>
+          </a:xfrm>
+          <a:prstGeom prst="straightConnector1">
+            <a:avLst/>
+          </a:prstGeom>
+          <a:ln>
+            <a:tailEnd type="triangle"/>
+          </a:ln>
+        </p:spPr>
+        <p:style>
+          <a:lnRef idx="1">
+            <a:schemeClr val="accent1"/>
+          </a:lnRef>
+          <a:fillRef idx="0">
+            <a:schemeClr val="accent1"/>
+          </a:fillRef>
+          <a:effectRef idx="0">
+            <a:schemeClr val="accent1"/>
+          </a:effectRef>
+          <a:fontRef idx="minor">
+            <a:schemeClr val="tx1"/>
+          </a:fontRef>
+        </p:style>
+      </p:cxnSp>
+      <p:cxnSp>
+        <p:nvCxnSpPr>
+          <p:cNvPr id="34" name="直接箭头连接符 33"/>
+          <p:cNvCxnSpPr>
+            <a:stCxn id="4" idx="2"/>
+            <a:endCxn id="6" idx="0"/>
+          </p:cNvCxnSpPr>
+          <p:nvPr/>
+        </p:nvCxnSpPr>
+        <p:spPr>
+          <a:xfrm flipH="1">
+            <a:off x="2538638" y="285471"/>
+            <a:ext cx="280712" cy="271126"/>
+          </a:xfrm>
+          <a:prstGeom prst="straightConnector1">
+            <a:avLst/>
+          </a:prstGeom>
+          <a:ln>
+            <a:tailEnd type="triangle"/>
+          </a:ln>
+        </p:spPr>
+        <p:style>
+          <a:lnRef idx="1">
+            <a:schemeClr val="accent1"/>
+          </a:lnRef>
+          <a:fillRef idx="0">
+            <a:schemeClr val="accent1"/>
+          </a:fillRef>
+          <a:effectRef idx="0">
+            <a:schemeClr val="accent1"/>
+          </a:effectRef>
+          <a:fontRef idx="minor">
+            <a:schemeClr val="tx1"/>
+          </a:fontRef>
+        </p:style>
+      </p:cxnSp>
+      <p:cxnSp>
+        <p:nvCxnSpPr>
+          <p:cNvPr id="36" name="直接箭头连接符 35"/>
+          <p:cNvCxnSpPr>
+            <a:stCxn id="4" idx="2"/>
+            <a:endCxn id="7" idx="0"/>
+          </p:cNvCxnSpPr>
+          <p:nvPr/>
+        </p:nvCxnSpPr>
+        <p:spPr>
+          <a:xfrm>
+            <a:off x="2819350" y="285471"/>
+            <a:ext cx="1507268" cy="280051"/>
+          </a:xfrm>
+          <a:prstGeom prst="straightConnector1">
+            <a:avLst/>
+          </a:prstGeom>
+          <a:ln>
+            <a:tailEnd type="triangle"/>
+          </a:ln>
+        </p:spPr>
+        <p:style>
+          <a:lnRef idx="1">
+            <a:schemeClr val="accent1"/>
+          </a:lnRef>
+          <a:fillRef idx="0">
+            <a:schemeClr val="accent1"/>
+          </a:fillRef>
+          <a:effectRef idx="0">
+            <a:schemeClr val="accent1"/>
+          </a:effectRef>
+          <a:fontRef idx="minor">
+            <a:schemeClr val="tx1"/>
+          </a:fontRef>
+        </p:style>
+      </p:cxnSp>
+      <p:cxnSp>
+        <p:nvCxnSpPr>
+          <p:cNvPr id="49" name="直接箭头连接符 48"/>
+          <p:cNvCxnSpPr>
+            <a:stCxn id="7" idx="2"/>
+            <a:endCxn id="8" idx="0"/>
+          </p:cNvCxnSpPr>
+          <p:nvPr/>
+        </p:nvCxnSpPr>
+        <p:spPr>
+          <a:xfrm flipH="1">
+            <a:off x="1426094" y="1119520"/>
+            <a:ext cx="2900524" cy="235813"/>
+          </a:xfrm>
+          <a:prstGeom prst="straightConnector1">
+            <a:avLst/>
+          </a:prstGeom>
+          <a:ln>
+            <a:tailEnd type="triangle"/>
+          </a:ln>
+        </p:spPr>
+        <p:style>
+          <a:lnRef idx="1">
+            <a:schemeClr val="accent1"/>
+          </a:lnRef>
+          <a:fillRef idx="0">
+            <a:schemeClr val="accent1"/>
+          </a:fillRef>
+          <a:effectRef idx="0">
+            <a:schemeClr val="accent1"/>
+          </a:effectRef>
+          <a:fontRef idx="minor">
+            <a:schemeClr val="tx1"/>
+          </a:fontRef>
+        </p:style>
+      </p:cxnSp>
+      <p:cxnSp>
+        <p:nvCxnSpPr>
+          <p:cNvPr id="51" name="直接箭头连接符 50"/>
+          <p:cNvCxnSpPr>
+            <a:stCxn id="7" idx="2"/>
+            <a:endCxn id="9" idx="0"/>
+          </p:cNvCxnSpPr>
+          <p:nvPr/>
+        </p:nvCxnSpPr>
+        <p:spPr>
+          <a:xfrm flipH="1">
+            <a:off x="3521024" y="1119520"/>
+            <a:ext cx="805594" cy="251464"/>
+          </a:xfrm>
+          <a:prstGeom prst="straightConnector1">
+            <a:avLst/>
+          </a:prstGeom>
+          <a:ln>
+            <a:tailEnd type="triangle"/>
+          </a:ln>
+        </p:spPr>
+        <p:style>
+          <a:lnRef idx="1">
+            <a:schemeClr val="accent1"/>
+          </a:lnRef>
+          <a:fillRef idx="0">
+            <a:schemeClr val="accent1"/>
+          </a:fillRef>
+          <a:effectRef idx="0">
+            <a:schemeClr val="accent1"/>
+          </a:effectRef>
+          <a:fontRef idx="minor">
+            <a:schemeClr val="tx1"/>
+          </a:fontRef>
+        </p:style>
+      </p:cxnSp>
+      <p:cxnSp>
+        <p:nvCxnSpPr>
+          <p:cNvPr id="53" name="直接箭头连接符 52"/>
+          <p:cNvCxnSpPr>
+            <a:stCxn id="7" idx="2"/>
+            <a:endCxn id="10" idx="0"/>
+          </p:cNvCxnSpPr>
+          <p:nvPr/>
+        </p:nvCxnSpPr>
+        <p:spPr>
+          <a:xfrm>
+            <a:off x="4326618" y="1119520"/>
+            <a:ext cx="947286" cy="230511"/>
+          </a:xfrm>
+          <a:prstGeom prst="straightConnector1">
+            <a:avLst/>
+          </a:prstGeom>
+          <a:ln>
+            <a:tailEnd type="triangle"/>
+          </a:ln>
+        </p:spPr>
+        <p:style>
+          <a:lnRef idx="1">
+            <a:schemeClr val="accent1"/>
+          </a:lnRef>
+          <a:fillRef idx="0">
+            <a:schemeClr val="accent1"/>
+          </a:fillRef>
+          <a:effectRef idx="0">
+            <a:schemeClr val="accent1"/>
+          </a:effectRef>
+          <a:fontRef idx="minor">
+            <a:schemeClr val="tx1"/>
+          </a:fontRef>
+        </p:style>
+      </p:cxnSp>
+      <p:cxnSp>
+        <p:nvCxnSpPr>
+          <p:cNvPr id="55" name="直接箭头连接符 54"/>
+          <p:cNvCxnSpPr>
+            <a:stCxn id="7" idx="2"/>
+            <a:endCxn id="11" idx="0"/>
+          </p:cNvCxnSpPr>
+          <p:nvPr/>
+        </p:nvCxnSpPr>
+        <p:spPr>
+          <a:xfrm>
+            <a:off x="4326618" y="1119520"/>
+            <a:ext cx="3176153" cy="233261"/>
+          </a:xfrm>
+          <a:prstGeom prst="straightConnector1">
+            <a:avLst/>
+          </a:prstGeom>
+          <a:ln>
+            <a:tailEnd type="triangle"/>
+          </a:ln>
+        </p:spPr>
+        <p:style>
+          <a:lnRef idx="1">
+            <a:schemeClr val="accent1"/>
+          </a:lnRef>
+          <a:fillRef idx="0">
+            <a:schemeClr val="accent1"/>
+          </a:fillRef>
+          <a:effectRef idx="0">
+            <a:schemeClr val="accent1"/>
+          </a:effectRef>
+          <a:fontRef idx="minor">
+            <a:schemeClr val="tx1"/>
+          </a:fontRef>
+        </p:style>
+      </p:cxnSp>
+      <p:cxnSp>
+        <p:nvCxnSpPr>
+          <p:cNvPr id="61" name="直接箭头连接符 60"/>
+          <p:cNvCxnSpPr>
+            <a:stCxn id="11" idx="2"/>
+            <a:endCxn id="12" idx="0"/>
+          </p:cNvCxnSpPr>
+          <p:nvPr/>
+        </p:nvCxnSpPr>
+        <p:spPr>
+          <a:xfrm>
+            <a:off x="7502771" y="1906779"/>
+            <a:ext cx="5508" cy="308245"/>
+          </a:xfrm>
+          <a:prstGeom prst="straightConnector1">
+            <a:avLst/>
+          </a:prstGeom>
+          <a:ln>
+            <a:tailEnd type="triangle"/>
+          </a:ln>
+        </p:spPr>
+        <p:style>
+          <a:lnRef idx="1">
+            <a:schemeClr val="accent1"/>
+          </a:lnRef>
+          <a:fillRef idx="0">
+            <a:schemeClr val="accent1"/>
+          </a:fillRef>
+          <a:effectRef idx="0">
+            <a:schemeClr val="accent1"/>
+          </a:effectRef>
+          <a:fontRef idx="minor">
+            <a:schemeClr val="tx1"/>
+          </a:fontRef>
+        </p:style>
+      </p:cxnSp>
+      <p:cxnSp>
+        <p:nvCxnSpPr>
+          <p:cNvPr id="80" name="直接箭头连接符 79"/>
+          <p:cNvCxnSpPr>
+            <a:stCxn id="9" idx="2"/>
+            <a:endCxn id="13" idx="0"/>
+          </p:cNvCxnSpPr>
+          <p:nvPr/>
+        </p:nvCxnSpPr>
+        <p:spPr>
+          <a:xfrm flipH="1">
+            <a:off x="1102753" y="1924982"/>
+            <a:ext cx="2418271" cy="273237"/>
+          </a:xfrm>
+          <a:prstGeom prst="straightConnector1">
+            <a:avLst/>
+          </a:prstGeom>
+          <a:ln>
+            <a:tailEnd type="triangle"/>
+          </a:ln>
+        </p:spPr>
+        <p:style>
+          <a:lnRef idx="1">
+            <a:schemeClr val="accent1"/>
+          </a:lnRef>
+          <a:fillRef idx="0">
+            <a:schemeClr val="accent1"/>
+          </a:fillRef>
+          <a:effectRef idx="0">
+            <a:schemeClr val="accent1"/>
+          </a:effectRef>
+          <a:fontRef idx="minor">
+            <a:schemeClr val="tx1"/>
+          </a:fontRef>
+        </p:style>
+      </p:cxnSp>
+      <p:cxnSp>
+        <p:nvCxnSpPr>
+          <p:cNvPr id="82" name="直接箭头连接符 81"/>
+          <p:cNvCxnSpPr>
+            <a:stCxn id="9" idx="2"/>
+            <a:endCxn id="15" idx="0"/>
+          </p:cNvCxnSpPr>
+          <p:nvPr/>
+        </p:nvCxnSpPr>
+        <p:spPr>
+          <a:xfrm flipH="1">
+            <a:off x="2712194" y="1924982"/>
+            <a:ext cx="808830" cy="291240"/>
+          </a:xfrm>
+          <a:prstGeom prst="straightConnector1">
+            <a:avLst/>
+          </a:prstGeom>
+          <a:ln>
+            <a:tailEnd type="triangle"/>
+          </a:ln>
+        </p:spPr>
+        <p:style>
+          <a:lnRef idx="1">
+            <a:schemeClr val="accent1"/>
+          </a:lnRef>
+          <a:fillRef idx="0">
+            <a:schemeClr val="accent1"/>
+          </a:fillRef>
+          <a:effectRef idx="0">
+            <a:schemeClr val="accent1"/>
+          </a:effectRef>
+          <a:fontRef idx="minor">
+            <a:schemeClr val="tx1"/>
+          </a:fontRef>
+        </p:style>
+      </p:cxnSp>
+      <p:cxnSp>
+        <p:nvCxnSpPr>
+          <p:cNvPr id="84" name="直接箭头连接符 83"/>
+          <p:cNvCxnSpPr>
+            <a:stCxn id="9" idx="2"/>
+            <a:endCxn id="14" idx="0"/>
+          </p:cNvCxnSpPr>
+          <p:nvPr/>
+        </p:nvCxnSpPr>
+        <p:spPr>
+          <a:xfrm>
+            <a:off x="3521024" y="1924982"/>
+            <a:ext cx="794383" cy="291240"/>
+          </a:xfrm>
+          <a:prstGeom prst="straightConnector1">
+            <a:avLst/>
+          </a:prstGeom>
+          <a:ln>
+            <a:tailEnd type="triangle"/>
+          </a:ln>
+        </p:spPr>
+        <p:style>
+          <a:lnRef idx="1">
+            <a:schemeClr val="accent1"/>
+          </a:lnRef>
+          <a:fillRef idx="0">
+            <a:schemeClr val="accent1"/>
+          </a:fillRef>
+          <a:effectRef idx="0">
+            <a:schemeClr val="accent1"/>
+          </a:effectRef>
+          <a:fontRef idx="minor">
+            <a:schemeClr val="tx1"/>
+          </a:fontRef>
+        </p:style>
+      </p:cxnSp>
+      <p:cxnSp>
+        <p:nvCxnSpPr>
+          <p:cNvPr id="86" name="直接箭头连接符 85"/>
+          <p:cNvCxnSpPr>
+            <a:stCxn id="15" idx="2"/>
+            <a:endCxn id="16" idx="0"/>
+          </p:cNvCxnSpPr>
+          <p:nvPr/>
+        </p:nvCxnSpPr>
+        <p:spPr>
+          <a:xfrm flipH="1">
+            <a:off x="1335779" y="2770220"/>
+            <a:ext cx="1376415" cy="255234"/>
+          </a:xfrm>
+          <a:prstGeom prst="straightConnector1">
+            <a:avLst/>
+          </a:prstGeom>
+          <a:ln>
+            <a:tailEnd type="triangle"/>
+          </a:ln>
+        </p:spPr>
+        <p:style>
+          <a:lnRef idx="1">
+            <a:schemeClr val="accent1"/>
+          </a:lnRef>
+          <a:fillRef idx="0">
+            <a:schemeClr val="accent1"/>
+          </a:fillRef>
+          <a:effectRef idx="0">
+            <a:schemeClr val="accent1"/>
+          </a:effectRef>
+          <a:fontRef idx="minor">
+            <a:schemeClr val="tx1"/>
+          </a:fontRef>
+        </p:style>
+      </p:cxnSp>
+      <p:cxnSp>
+        <p:nvCxnSpPr>
+          <p:cNvPr id="97" name="直接箭头连接符 96"/>
+          <p:cNvCxnSpPr>
+            <a:stCxn id="14" idx="2"/>
+            <a:endCxn id="17" idx="0"/>
+          </p:cNvCxnSpPr>
+          <p:nvPr/>
+        </p:nvCxnSpPr>
+        <p:spPr>
+          <a:xfrm flipH="1">
+            <a:off x="3019784" y="2770220"/>
+            <a:ext cx="1295623" cy="276999"/>
+          </a:xfrm>
+          <a:prstGeom prst="straightConnector1">
+            <a:avLst/>
+          </a:prstGeom>
+          <a:ln>
+            <a:tailEnd type="triangle"/>
+          </a:ln>
+        </p:spPr>
+        <p:style>
+          <a:lnRef idx="1">
+            <a:schemeClr val="accent1"/>
+          </a:lnRef>
+          <a:fillRef idx="0">
+            <a:schemeClr val="accent1"/>
+          </a:fillRef>
+          <a:effectRef idx="0">
+            <a:schemeClr val="accent1"/>
+          </a:effectRef>
+          <a:fontRef idx="minor">
+            <a:schemeClr val="tx1"/>
+          </a:fontRef>
+        </p:style>
+      </p:cxnSp>
+      <p:cxnSp>
+        <p:nvCxnSpPr>
+          <p:cNvPr id="99" name="直接箭头连接符 98"/>
+          <p:cNvCxnSpPr>
+            <a:stCxn id="14" idx="2"/>
+            <a:endCxn id="18" idx="0"/>
+          </p:cNvCxnSpPr>
+          <p:nvPr/>
+        </p:nvCxnSpPr>
+        <p:spPr>
+          <a:xfrm>
+            <a:off x="4315407" y="2770220"/>
+            <a:ext cx="158581" cy="269551"/>
+          </a:xfrm>
+          <a:prstGeom prst="straightConnector1">
+            <a:avLst/>
+          </a:prstGeom>
+          <a:ln>
+            <a:tailEnd type="triangle"/>
+          </a:ln>
+        </p:spPr>
+        <p:style>
+          <a:lnRef idx="1">
+            <a:schemeClr val="accent1"/>
+          </a:lnRef>
+          <a:fillRef idx="0">
+            <a:schemeClr val="accent1"/>
+          </a:fillRef>
+          <a:effectRef idx="0">
+            <a:schemeClr val="accent1"/>
+          </a:effectRef>
+          <a:fontRef idx="minor">
+            <a:schemeClr val="tx1"/>
+          </a:fontRef>
+        </p:style>
+      </p:cxnSp>
+      <p:cxnSp>
+        <p:nvCxnSpPr>
+          <p:cNvPr id="101" name="直接箭头连接符 100"/>
+          <p:cNvCxnSpPr>
+            <a:stCxn id="14" idx="2"/>
+            <a:endCxn id="19" idx="0"/>
+          </p:cNvCxnSpPr>
+          <p:nvPr/>
+        </p:nvCxnSpPr>
+        <p:spPr>
+          <a:xfrm>
+            <a:off x="4315407" y="2770220"/>
+            <a:ext cx="1727642" cy="269551"/>
+          </a:xfrm>
+          <a:prstGeom prst="straightConnector1">
+            <a:avLst/>
+          </a:prstGeom>
+          <a:ln>
+            <a:tailEnd type="triangle"/>
+          </a:ln>
+        </p:spPr>
+        <p:style>
+          <a:lnRef idx="1">
+            <a:schemeClr val="accent1"/>
+          </a:lnRef>
+          <a:fillRef idx="0">
+            <a:schemeClr val="accent1"/>
+          </a:fillRef>
+          <a:effectRef idx="0">
+            <a:schemeClr val="accent1"/>
+          </a:effectRef>
+          <a:fontRef idx="minor">
+            <a:schemeClr val="tx1"/>
+          </a:fontRef>
+        </p:style>
+      </p:cxnSp>
+      <p:cxnSp>
+        <p:nvCxnSpPr>
+          <p:cNvPr id="103" name="直接箭头连接符 102"/>
+          <p:cNvCxnSpPr>
+            <a:stCxn id="19" idx="2"/>
+            <a:endCxn id="20" idx="0"/>
+          </p:cNvCxnSpPr>
+          <p:nvPr/>
+        </p:nvCxnSpPr>
+        <p:spPr>
+          <a:xfrm flipH="1">
+            <a:off x="2611990" y="3593769"/>
+            <a:ext cx="3431059" cy="294729"/>
+          </a:xfrm>
+          <a:prstGeom prst="straightConnector1">
+            <a:avLst/>
+          </a:prstGeom>
+          <a:ln>
+            <a:tailEnd type="triangle"/>
+          </a:ln>
+        </p:spPr>
+        <p:style>
+          <a:lnRef idx="1">
+            <a:schemeClr val="accent1"/>
+          </a:lnRef>
+          <a:fillRef idx="0">
+            <a:schemeClr val="accent1"/>
+          </a:fillRef>
+          <a:effectRef idx="0">
+            <a:schemeClr val="accent1"/>
+          </a:effectRef>
+          <a:fontRef idx="minor">
+            <a:schemeClr val="tx1"/>
+          </a:fontRef>
+        </p:style>
+      </p:cxnSp>
+      <p:cxnSp>
+        <p:nvCxnSpPr>
+          <p:cNvPr id="105" name="直接箭头连接符 104"/>
+          <p:cNvCxnSpPr>
+            <a:stCxn id="19" idx="2"/>
+            <a:endCxn id="21" idx="0"/>
+          </p:cNvCxnSpPr>
+          <p:nvPr/>
+        </p:nvCxnSpPr>
+        <p:spPr>
+          <a:xfrm flipH="1">
+            <a:off x="4367207" y="3593769"/>
+            <a:ext cx="1675842" cy="293326"/>
+          </a:xfrm>
+          <a:prstGeom prst="straightConnector1">
+            <a:avLst/>
+          </a:prstGeom>
+          <a:ln>
+            <a:tailEnd type="triangle"/>
+          </a:ln>
+        </p:spPr>
+        <p:style>
+          <a:lnRef idx="1">
+            <a:schemeClr val="accent1"/>
+          </a:lnRef>
+          <a:fillRef idx="0">
+            <a:schemeClr val="accent1"/>
+          </a:fillRef>
+          <a:effectRef idx="0">
+            <a:schemeClr val="accent1"/>
+          </a:effectRef>
+          <a:fontRef idx="minor">
+            <a:schemeClr val="tx1"/>
+          </a:fontRef>
+        </p:style>
+      </p:cxnSp>
+      <p:cxnSp>
+        <p:nvCxnSpPr>
+          <p:cNvPr id="108" name="直接箭头连接符 107"/>
+          <p:cNvCxnSpPr>
+            <a:stCxn id="19" idx="2"/>
+            <a:endCxn id="22" idx="0"/>
+          </p:cNvCxnSpPr>
+          <p:nvPr/>
+        </p:nvCxnSpPr>
+        <p:spPr>
+          <a:xfrm>
+            <a:off x="6043049" y="3593769"/>
+            <a:ext cx="522933" cy="333612"/>
+          </a:xfrm>
+          <a:prstGeom prst="straightConnector1">
+            <a:avLst/>
+          </a:prstGeom>
+          <a:ln>
+            <a:tailEnd type="triangle"/>
+          </a:ln>
+        </p:spPr>
+        <p:style>
+          <a:lnRef idx="1">
+            <a:schemeClr val="accent1"/>
+          </a:lnRef>
+          <a:fillRef idx="0">
+            <a:schemeClr val="accent1"/>
+          </a:fillRef>
+          <a:effectRef idx="0">
+            <a:schemeClr val="accent1"/>
+          </a:effectRef>
+          <a:fontRef idx="minor">
+            <a:schemeClr val="tx1"/>
+          </a:fontRef>
+        </p:style>
+      </p:cxnSp>
+      <p:grpSp>
+        <p:nvGrpSpPr>
+          <p:cNvPr id="222" name="组合 221"/>
+          <p:cNvGrpSpPr/>
+          <p:nvPr/>
+        </p:nvGrpSpPr>
+        <p:grpSpPr>
+          <a:xfrm>
+            <a:off x="3906540" y="4819255"/>
+            <a:ext cx="4406880" cy="2006302"/>
+            <a:chOff x="7789025" y="4677132"/>
+            <a:chExt cx="4406880" cy="2006302"/>
+          </a:xfrm>
+        </p:grpSpPr>
+        <p:sp>
+          <p:nvSpPr>
+            <p:cNvPr id="24" name="文本框 23"/>
+            <p:cNvSpPr txBox="1"/>
+            <p:nvPr/>
+          </p:nvSpPr>
+          <p:spPr>
+            <a:xfrm>
+              <a:off x="7867660" y="4773840"/>
+              <a:ext cx="1421120" cy="553998"/>
+            </a:xfrm>
+            <a:prstGeom prst="rect">
+              <a:avLst/>
+            </a:prstGeom>
+            <a:ln>
+              <a:prstDash val="sysDot"/>
+            </a:ln>
+          </p:spPr>
+          <p:style>
+            <a:lnRef idx="2">
+              <a:schemeClr val="accent2"/>
+            </a:lnRef>
+            <a:fillRef idx="1">
+              <a:schemeClr val="lt1"/>
+            </a:fillRef>
+            <a:effectRef idx="0">
+              <a:schemeClr val="accent2"/>
+            </a:effectRef>
+            <a:fontRef idx="minor">
+              <a:schemeClr val="dk1"/>
+            </a:fontRef>
+          </p:style>
+          <p:txBody>
+            <a:bodyPr wrap="square" rtlCol="0">
+              <a:spAutoFit/>
+            </a:bodyPr>
+            <a:lstStyle/>
+            <a:p>
+              <a:r>
+                <a:rPr lang="zh-CN" altLang="en-US" sz="1000" dirty="0">
+                  <a:latin typeface="Times New Roman" panose="02020603050405020304" pitchFamily="18" charset="0"/>
+                  <a:cs typeface="Times New Roman" panose="02020603050405020304" pitchFamily="18" charset="0"/>
+                </a:rPr>
+                <a:t>六级</a:t>
+              </a:r>
+              <a:r>
+                <a:rPr lang="en-US" altLang="zh-CN" sz="1000" dirty="0" err="1" smtClean="0">
+                  <a:latin typeface="Times New Roman" panose="02020603050405020304" pitchFamily="18" charset="0"/>
+                  <a:cs typeface="Times New Roman" panose="02020603050405020304" pitchFamily="18" charset="0"/>
+                </a:rPr>
+                <a:t>stsd</a:t>
+              </a:r>
+              <a:endParaRPr lang="en-US" altLang="zh-CN" sz="1000" dirty="0" smtClean="0">
+                <a:latin typeface="Times New Roman" panose="02020603050405020304" pitchFamily="18" charset="0"/>
+                <a:cs typeface="Times New Roman" panose="02020603050405020304" pitchFamily="18" charset="0"/>
+              </a:endParaRPr>
+            </a:p>
+            <a:p>
+              <a:r>
+                <a:rPr lang="en-US" altLang="zh-CN" sz="1000" dirty="0" smtClean="0">
+                  <a:latin typeface="Times New Roman" panose="02020603050405020304" pitchFamily="18" charset="0"/>
+                  <a:cs typeface="Times New Roman" panose="02020603050405020304" pitchFamily="18" charset="0"/>
+                </a:rPr>
+                <a:t>type=0x73747364</a:t>
+              </a:r>
+            </a:p>
+            <a:p>
+              <a:r>
+                <a:rPr lang="en-US" altLang="zh-CN" sz="1000" dirty="0" smtClean="0">
+                  <a:latin typeface="Times New Roman" panose="02020603050405020304" pitchFamily="18" charset="0"/>
+                  <a:cs typeface="Times New Roman" panose="02020603050405020304" pitchFamily="18" charset="0"/>
+                </a:rPr>
+                <a:t>size=0x000000A9=169</a:t>
+              </a:r>
+              <a:endParaRPr lang="zh-CN" altLang="en-US" sz="1000" dirty="0">
+                <a:latin typeface="Times New Roman" panose="02020603050405020304" pitchFamily="18" charset="0"/>
+                <a:cs typeface="Times New Roman" panose="02020603050405020304" pitchFamily="18" charset="0"/>
+              </a:endParaRPr>
+            </a:p>
+          </p:txBody>
+        </p:sp>
+        <p:sp>
+          <p:nvSpPr>
+            <p:cNvPr id="25" name="文本框 24"/>
+            <p:cNvSpPr txBox="1"/>
+            <p:nvPr/>
+          </p:nvSpPr>
+          <p:spPr>
+            <a:xfrm>
+              <a:off x="9367415" y="4750736"/>
+              <a:ext cx="1300635" cy="553998"/>
+            </a:xfrm>
+            <a:prstGeom prst="rect">
+              <a:avLst/>
+            </a:prstGeom>
+            <a:ln>
+              <a:prstDash val="sysDot"/>
+            </a:ln>
+          </p:spPr>
+          <p:style>
+            <a:lnRef idx="2">
+              <a:schemeClr val="accent2"/>
+            </a:lnRef>
+            <a:fillRef idx="1">
+              <a:schemeClr val="lt1"/>
+            </a:fillRef>
+            <a:effectRef idx="0">
+              <a:schemeClr val="accent2"/>
+            </a:effectRef>
+            <a:fontRef idx="minor">
+              <a:schemeClr val="dk1"/>
+            </a:fontRef>
+          </p:style>
+          <p:txBody>
+            <a:bodyPr wrap="square" rtlCol="0">
+              <a:spAutoFit/>
+            </a:bodyPr>
+            <a:lstStyle/>
+            <a:p>
+              <a:r>
+                <a:rPr lang="zh-CN" altLang="en-US" sz="1000" dirty="0">
+                  <a:latin typeface="Times New Roman" panose="02020603050405020304" pitchFamily="18" charset="0"/>
+                  <a:cs typeface="Times New Roman" panose="02020603050405020304" pitchFamily="18" charset="0"/>
+                </a:rPr>
+                <a:t>六级</a:t>
+              </a:r>
+              <a:r>
+                <a:rPr lang="en-US" altLang="zh-CN" sz="1000" dirty="0" err="1" smtClean="0">
+                  <a:latin typeface="Times New Roman" panose="02020603050405020304" pitchFamily="18" charset="0"/>
+                  <a:cs typeface="Times New Roman" panose="02020603050405020304" pitchFamily="18" charset="0"/>
+                </a:rPr>
+                <a:t>stts</a:t>
+              </a:r>
+              <a:endParaRPr lang="en-US" altLang="zh-CN" sz="1000" dirty="0" smtClean="0">
+                <a:latin typeface="Times New Roman" panose="02020603050405020304" pitchFamily="18" charset="0"/>
+                <a:cs typeface="Times New Roman" panose="02020603050405020304" pitchFamily="18" charset="0"/>
+              </a:endParaRPr>
+            </a:p>
+            <a:p>
+              <a:r>
+                <a:rPr lang="en-US" altLang="zh-CN" sz="1000" dirty="0" smtClean="0">
+                  <a:latin typeface="Times New Roman" panose="02020603050405020304" pitchFamily="18" charset="0"/>
+                  <a:cs typeface="Times New Roman" panose="02020603050405020304" pitchFamily="18" charset="0"/>
+                </a:rPr>
+                <a:t>type=0x73747473</a:t>
+              </a:r>
+            </a:p>
+            <a:p>
+              <a:r>
+                <a:rPr lang="en-US" altLang="zh-CN" sz="1000" dirty="0" smtClean="0">
+                  <a:latin typeface="Times New Roman" panose="02020603050405020304" pitchFamily="18" charset="0"/>
+                  <a:cs typeface="Times New Roman" panose="02020603050405020304" pitchFamily="18" charset="0"/>
+                </a:rPr>
+                <a:t>size=0x00000018=24</a:t>
+              </a:r>
+              <a:endParaRPr lang="zh-CN" altLang="en-US" sz="1000" dirty="0">
+                <a:latin typeface="Times New Roman" panose="02020603050405020304" pitchFamily="18" charset="0"/>
+                <a:cs typeface="Times New Roman" panose="02020603050405020304" pitchFamily="18" charset="0"/>
+              </a:endParaRPr>
+            </a:p>
+          </p:txBody>
+        </p:sp>
+        <p:sp>
+          <p:nvSpPr>
+            <p:cNvPr id="26" name="文本框 25"/>
+            <p:cNvSpPr txBox="1"/>
+            <p:nvPr/>
+          </p:nvSpPr>
+          <p:spPr>
+            <a:xfrm>
+              <a:off x="7867659" y="5375569"/>
+              <a:ext cx="1457983" cy="553998"/>
+            </a:xfrm>
+            <a:prstGeom prst="rect">
+              <a:avLst/>
+            </a:prstGeom>
+            <a:ln>
+              <a:prstDash val="sysDot"/>
+            </a:ln>
+          </p:spPr>
+          <p:style>
+            <a:lnRef idx="2">
+              <a:schemeClr val="accent2"/>
+            </a:lnRef>
+            <a:fillRef idx="1">
+              <a:schemeClr val="lt1"/>
+            </a:fillRef>
+            <a:effectRef idx="0">
+              <a:schemeClr val="accent2"/>
+            </a:effectRef>
+            <a:fontRef idx="minor">
+              <a:schemeClr val="dk1"/>
+            </a:fontRef>
+          </p:style>
+          <p:txBody>
+            <a:bodyPr wrap="square" rtlCol="0">
+              <a:spAutoFit/>
+            </a:bodyPr>
+            <a:lstStyle/>
+            <a:p>
+              <a:r>
+                <a:rPr lang="zh-CN" altLang="en-US" sz="1000" dirty="0">
+                  <a:latin typeface="Times New Roman" panose="02020603050405020304" pitchFamily="18" charset="0"/>
+                  <a:cs typeface="Times New Roman" panose="02020603050405020304" pitchFamily="18" charset="0"/>
+                </a:rPr>
+                <a:t>六级</a:t>
+              </a:r>
+              <a:r>
+                <a:rPr lang="en-US" altLang="zh-CN" sz="1000" dirty="0" err="1" smtClean="0">
+                  <a:latin typeface="Times New Roman" panose="02020603050405020304" pitchFamily="18" charset="0"/>
+                  <a:cs typeface="Times New Roman" panose="02020603050405020304" pitchFamily="18" charset="0"/>
+                </a:rPr>
+                <a:t>ctts</a:t>
+              </a:r>
+              <a:endParaRPr lang="en-US" altLang="zh-CN" sz="1000" dirty="0" smtClean="0">
+                <a:latin typeface="Times New Roman" panose="02020603050405020304" pitchFamily="18" charset="0"/>
+                <a:cs typeface="Times New Roman" panose="02020603050405020304" pitchFamily="18" charset="0"/>
+              </a:endParaRPr>
+            </a:p>
+            <a:p>
+              <a:r>
+                <a:rPr lang="en-US" altLang="zh-CN" sz="1000" dirty="0" smtClean="0">
+                  <a:latin typeface="Times New Roman" panose="02020603050405020304" pitchFamily="18" charset="0"/>
+                  <a:cs typeface="Times New Roman" panose="02020603050405020304" pitchFamily="18" charset="0"/>
+                </a:rPr>
+                <a:t>type=0x63747473</a:t>
+              </a:r>
+            </a:p>
+            <a:p>
+              <a:r>
+                <a:rPr lang="en-US" altLang="zh-CN" sz="1000">
+                  <a:latin typeface="Times New Roman" panose="02020603050405020304" pitchFamily="18" charset="0"/>
+                  <a:cs typeface="Times New Roman" panose="02020603050405020304" pitchFamily="18" charset="0"/>
+                </a:rPr>
+                <a:t>size=0x00000C88=3208</a:t>
+              </a:r>
+              <a:endParaRPr lang="zh-CN" altLang="en-US" sz="1000" dirty="0">
+                <a:latin typeface="Times New Roman" panose="02020603050405020304" pitchFamily="18" charset="0"/>
+                <a:cs typeface="Times New Roman" panose="02020603050405020304" pitchFamily="18" charset="0"/>
+              </a:endParaRPr>
+            </a:p>
+          </p:txBody>
+        </p:sp>
+        <p:sp>
+          <p:nvSpPr>
+            <p:cNvPr id="27" name="文本框 26"/>
+            <p:cNvSpPr txBox="1"/>
+            <p:nvPr/>
+          </p:nvSpPr>
+          <p:spPr>
+            <a:xfrm>
+              <a:off x="9367750" y="5365611"/>
+              <a:ext cx="1299963" cy="553998"/>
+            </a:xfrm>
+            <a:prstGeom prst="rect">
+              <a:avLst/>
+            </a:prstGeom>
+            <a:ln>
+              <a:prstDash val="sysDot"/>
+            </a:ln>
+          </p:spPr>
+          <p:style>
+            <a:lnRef idx="2">
+              <a:schemeClr val="accent2"/>
+            </a:lnRef>
+            <a:fillRef idx="1">
+              <a:schemeClr val="lt1"/>
+            </a:fillRef>
+            <a:effectRef idx="0">
+              <a:schemeClr val="accent2"/>
+            </a:effectRef>
+            <a:fontRef idx="minor">
+              <a:schemeClr val="dk1"/>
+            </a:fontRef>
+          </p:style>
+          <p:txBody>
+            <a:bodyPr wrap="square" rtlCol="0">
+              <a:spAutoFit/>
+            </a:bodyPr>
+            <a:lstStyle/>
+            <a:p>
+              <a:r>
+                <a:rPr lang="zh-CN" altLang="en-US" sz="1000" dirty="0">
+                  <a:latin typeface="Times New Roman" panose="02020603050405020304" pitchFamily="18" charset="0"/>
+                  <a:cs typeface="Times New Roman" panose="02020603050405020304" pitchFamily="18" charset="0"/>
+                </a:rPr>
+                <a:t>六级</a:t>
+              </a:r>
+              <a:r>
+                <a:rPr lang="en-US" altLang="zh-CN" sz="1000" dirty="0" err="1" smtClean="0">
+                  <a:latin typeface="Times New Roman" panose="02020603050405020304" pitchFamily="18" charset="0"/>
+                  <a:cs typeface="Times New Roman" panose="02020603050405020304" pitchFamily="18" charset="0"/>
+                </a:rPr>
+                <a:t>stsc</a:t>
+              </a:r>
+              <a:endParaRPr lang="en-US" altLang="zh-CN" sz="1000" dirty="0" smtClean="0">
+                <a:latin typeface="Times New Roman" panose="02020603050405020304" pitchFamily="18" charset="0"/>
+                <a:cs typeface="Times New Roman" panose="02020603050405020304" pitchFamily="18" charset="0"/>
+              </a:endParaRPr>
+            </a:p>
+            <a:p>
+              <a:r>
+                <a:rPr lang="en-US" altLang="zh-CN" sz="1000" dirty="0" smtClean="0">
+                  <a:latin typeface="Times New Roman" panose="02020603050405020304" pitchFamily="18" charset="0"/>
+                  <a:cs typeface="Times New Roman" panose="02020603050405020304" pitchFamily="18" charset="0"/>
+                </a:rPr>
+                <a:t>type=0x73747363</a:t>
+              </a:r>
+            </a:p>
+            <a:p>
+              <a:r>
+                <a:rPr lang="en-US" altLang="zh-CN" sz="1000" dirty="0" smtClean="0">
+                  <a:latin typeface="Times New Roman" panose="02020603050405020304" pitchFamily="18" charset="0"/>
+                  <a:cs typeface="Times New Roman" panose="02020603050405020304" pitchFamily="18" charset="0"/>
+                </a:rPr>
+                <a:t>size=0x00000028=40</a:t>
+              </a:r>
+              <a:endParaRPr lang="zh-CN" altLang="en-US" sz="1000" dirty="0">
+                <a:latin typeface="Times New Roman" panose="02020603050405020304" pitchFamily="18" charset="0"/>
+                <a:cs typeface="Times New Roman" panose="02020603050405020304" pitchFamily="18" charset="0"/>
+              </a:endParaRPr>
+            </a:p>
+          </p:txBody>
+        </p:sp>
+        <p:sp>
+          <p:nvSpPr>
+            <p:cNvPr id="28" name="文本框 27"/>
+            <p:cNvSpPr txBox="1"/>
+            <p:nvPr/>
+          </p:nvSpPr>
+          <p:spPr>
+            <a:xfrm>
+              <a:off x="10694180" y="4737971"/>
+              <a:ext cx="1361485" cy="553998"/>
+            </a:xfrm>
+            <a:prstGeom prst="rect">
+              <a:avLst/>
+            </a:prstGeom>
+            <a:ln>
+              <a:prstDash val="sysDot"/>
+            </a:ln>
+          </p:spPr>
+          <p:style>
+            <a:lnRef idx="2">
+              <a:schemeClr val="accent2"/>
+            </a:lnRef>
+            <a:fillRef idx="1">
+              <a:schemeClr val="lt1"/>
+            </a:fillRef>
+            <a:effectRef idx="0">
+              <a:schemeClr val="accent2"/>
+            </a:effectRef>
+            <a:fontRef idx="minor">
+              <a:schemeClr val="dk1"/>
+            </a:fontRef>
+          </p:style>
+          <p:txBody>
+            <a:bodyPr wrap="square" rtlCol="0">
+              <a:spAutoFit/>
+            </a:bodyPr>
+            <a:lstStyle/>
+            <a:p>
+              <a:r>
+                <a:rPr lang="zh-CN" altLang="en-US" sz="1000" dirty="0">
+                  <a:latin typeface="Times New Roman" panose="02020603050405020304" pitchFamily="18" charset="0"/>
+                  <a:cs typeface="Times New Roman" panose="02020603050405020304" pitchFamily="18" charset="0"/>
+                </a:rPr>
+                <a:t>六级</a:t>
+              </a:r>
+              <a:r>
+                <a:rPr lang="en-US" altLang="zh-CN" sz="1000" dirty="0" err="1" smtClean="0">
+                  <a:latin typeface="Times New Roman" panose="02020603050405020304" pitchFamily="18" charset="0"/>
+                  <a:cs typeface="Times New Roman" panose="02020603050405020304" pitchFamily="18" charset="0"/>
+                </a:rPr>
+                <a:t>stss</a:t>
+              </a:r>
+              <a:endParaRPr lang="en-US" altLang="zh-CN" sz="1000" dirty="0" smtClean="0">
+                <a:latin typeface="Times New Roman" panose="02020603050405020304" pitchFamily="18" charset="0"/>
+                <a:cs typeface="Times New Roman" panose="02020603050405020304" pitchFamily="18" charset="0"/>
+              </a:endParaRPr>
+            </a:p>
+            <a:p>
+              <a:r>
+                <a:rPr lang="en-US" altLang="zh-CN" sz="1000" dirty="0" smtClean="0">
+                  <a:latin typeface="Times New Roman" panose="02020603050405020304" pitchFamily="18" charset="0"/>
+                  <a:cs typeface="Times New Roman" panose="02020603050405020304" pitchFamily="18" charset="0"/>
+                </a:rPr>
+                <a:t>type=0x73747373</a:t>
+              </a:r>
+            </a:p>
+            <a:p>
+              <a:r>
+                <a:rPr lang="en-US" altLang="zh-CN" sz="1000" smtClean="0">
+                  <a:latin typeface="Times New Roman" panose="02020603050405020304" pitchFamily="18" charset="0"/>
+                  <a:cs typeface="Times New Roman" panose="02020603050405020304" pitchFamily="18" charset="0"/>
+                </a:rPr>
+                <a:t>size=0x0000001C=28</a:t>
+              </a:r>
+              <a:endParaRPr lang="zh-CN" altLang="en-US" sz="1000" dirty="0">
+                <a:latin typeface="Times New Roman" panose="02020603050405020304" pitchFamily="18" charset="0"/>
+                <a:cs typeface="Times New Roman" panose="02020603050405020304" pitchFamily="18" charset="0"/>
+              </a:endParaRPr>
+            </a:p>
+          </p:txBody>
+        </p:sp>
+        <p:sp>
+          <p:nvSpPr>
+            <p:cNvPr id="29" name="文本框 28"/>
+            <p:cNvSpPr txBox="1"/>
+            <p:nvPr/>
+          </p:nvSpPr>
+          <p:spPr>
+            <a:xfrm>
+              <a:off x="10694181" y="5365611"/>
+              <a:ext cx="1442946" cy="553998"/>
+            </a:xfrm>
+            <a:prstGeom prst="rect">
+              <a:avLst/>
+            </a:prstGeom>
+            <a:ln>
+              <a:prstDash val="sysDot"/>
+            </a:ln>
+          </p:spPr>
+          <p:style>
+            <a:lnRef idx="2">
+              <a:schemeClr val="accent2"/>
+            </a:lnRef>
+            <a:fillRef idx="1">
+              <a:schemeClr val="lt1"/>
+            </a:fillRef>
+            <a:effectRef idx="0">
+              <a:schemeClr val="accent2"/>
+            </a:effectRef>
+            <a:fontRef idx="minor">
+              <a:schemeClr val="dk1"/>
+            </a:fontRef>
+          </p:style>
+          <p:txBody>
+            <a:bodyPr wrap="square" rtlCol="0">
+              <a:spAutoFit/>
+            </a:bodyPr>
+            <a:lstStyle/>
+            <a:p>
+              <a:r>
+                <a:rPr lang="zh-CN" altLang="en-US" sz="1000" dirty="0">
+                  <a:latin typeface="Times New Roman" panose="02020603050405020304" pitchFamily="18" charset="0"/>
+                  <a:cs typeface="Times New Roman" panose="02020603050405020304" pitchFamily="18" charset="0"/>
+                </a:rPr>
+                <a:t>六级</a:t>
+              </a:r>
+              <a:r>
+                <a:rPr lang="en-US" altLang="zh-CN" sz="1000" dirty="0" err="1" smtClean="0">
+                  <a:latin typeface="Times New Roman" panose="02020603050405020304" pitchFamily="18" charset="0"/>
+                  <a:cs typeface="Times New Roman" panose="02020603050405020304" pitchFamily="18" charset="0"/>
+                </a:rPr>
+                <a:t>stsz</a:t>
+              </a:r>
+              <a:endParaRPr lang="en-US" altLang="zh-CN" sz="1000" dirty="0" smtClean="0">
+                <a:latin typeface="Times New Roman" panose="02020603050405020304" pitchFamily="18" charset="0"/>
+                <a:cs typeface="Times New Roman" panose="02020603050405020304" pitchFamily="18" charset="0"/>
+              </a:endParaRPr>
+            </a:p>
+            <a:p>
+              <a:r>
+                <a:rPr lang="en-US" altLang="zh-CN" sz="1000" dirty="0" smtClean="0">
+                  <a:latin typeface="Times New Roman" panose="02020603050405020304" pitchFamily="18" charset="0"/>
+                  <a:cs typeface="Times New Roman" panose="02020603050405020304" pitchFamily="18" charset="0"/>
+                </a:rPr>
+                <a:t>type=0x7374737A</a:t>
+              </a:r>
+            </a:p>
+            <a:p>
+              <a:r>
+                <a:rPr lang="en-US" altLang="zh-CN" sz="1000" smtClean="0">
+                  <a:latin typeface="Times New Roman" panose="02020603050405020304" pitchFamily="18" charset="0"/>
+                  <a:cs typeface="Times New Roman" panose="02020603050405020304" pitchFamily="18" charset="0"/>
+                </a:rPr>
+                <a:t>size=0x0000065C=1628</a:t>
+              </a:r>
+              <a:endParaRPr lang="zh-CN" altLang="en-US" sz="1000" dirty="0">
+                <a:latin typeface="Times New Roman" panose="02020603050405020304" pitchFamily="18" charset="0"/>
+                <a:cs typeface="Times New Roman" panose="02020603050405020304" pitchFamily="18" charset="0"/>
+              </a:endParaRPr>
+            </a:p>
+          </p:txBody>
+        </p:sp>
+        <p:sp>
+          <p:nvSpPr>
+            <p:cNvPr id="30" name="文本框 29"/>
+            <p:cNvSpPr txBox="1"/>
+            <p:nvPr/>
+          </p:nvSpPr>
+          <p:spPr>
+            <a:xfrm>
+              <a:off x="9243134" y="6047111"/>
+              <a:ext cx="1465651" cy="553998"/>
+            </a:xfrm>
+            <a:prstGeom prst="rect">
+              <a:avLst/>
+            </a:prstGeom>
+            <a:ln>
+              <a:prstDash val="sysDot"/>
+            </a:ln>
+          </p:spPr>
+          <p:style>
+            <a:lnRef idx="2">
+              <a:schemeClr val="accent2"/>
+            </a:lnRef>
+            <a:fillRef idx="1">
+              <a:schemeClr val="lt1"/>
+            </a:fillRef>
+            <a:effectRef idx="0">
+              <a:schemeClr val="accent2"/>
+            </a:effectRef>
+            <a:fontRef idx="minor">
+              <a:schemeClr val="dk1"/>
+            </a:fontRef>
+          </p:style>
+          <p:txBody>
+            <a:bodyPr wrap="square" rtlCol="0">
+              <a:spAutoFit/>
+            </a:bodyPr>
+            <a:lstStyle/>
+            <a:p>
+              <a:r>
+                <a:rPr lang="zh-CN" altLang="en-US" sz="1000" dirty="0">
+                  <a:latin typeface="Times New Roman" panose="02020603050405020304" pitchFamily="18" charset="0"/>
+                  <a:cs typeface="Times New Roman" panose="02020603050405020304" pitchFamily="18" charset="0"/>
+                </a:rPr>
+                <a:t>六级</a:t>
+              </a:r>
+              <a:r>
+                <a:rPr lang="en-US" altLang="zh-CN" sz="1000" dirty="0" err="1" smtClean="0">
+                  <a:latin typeface="Times New Roman" panose="02020603050405020304" pitchFamily="18" charset="0"/>
+                  <a:cs typeface="Times New Roman" panose="02020603050405020304" pitchFamily="18" charset="0"/>
+                </a:rPr>
+                <a:t>stco</a:t>
+              </a:r>
+              <a:endParaRPr lang="en-US" altLang="zh-CN" sz="1000" dirty="0" smtClean="0">
+                <a:latin typeface="Times New Roman" panose="02020603050405020304" pitchFamily="18" charset="0"/>
+                <a:cs typeface="Times New Roman" panose="02020603050405020304" pitchFamily="18" charset="0"/>
+              </a:endParaRPr>
+            </a:p>
+            <a:p>
+              <a:r>
+                <a:rPr lang="en-US" altLang="zh-CN" sz="1000" dirty="0" smtClean="0">
+                  <a:latin typeface="Times New Roman" panose="02020603050405020304" pitchFamily="18" charset="0"/>
+                  <a:cs typeface="Times New Roman" panose="02020603050405020304" pitchFamily="18" charset="0"/>
+                </a:rPr>
+                <a:t>type=0x7374636F</a:t>
+              </a:r>
+            </a:p>
+            <a:p>
+              <a:r>
+                <a:rPr lang="en-US" altLang="zh-CN" sz="1000" smtClean="0">
+                  <a:latin typeface="Times New Roman" panose="02020603050405020304" pitchFamily="18" charset="0"/>
+                  <a:cs typeface="Times New Roman" panose="02020603050405020304" pitchFamily="18" charset="0"/>
+                </a:rPr>
+                <a:t>size=0x00000654=1620</a:t>
+              </a:r>
+              <a:endParaRPr lang="zh-CN" altLang="en-US" sz="1000" dirty="0">
+                <a:latin typeface="Times New Roman" panose="02020603050405020304" pitchFamily="18" charset="0"/>
+                <a:cs typeface="Times New Roman" panose="02020603050405020304" pitchFamily="18" charset="0"/>
+              </a:endParaRPr>
+            </a:p>
+          </p:txBody>
+        </p:sp>
+        <p:sp>
+          <p:nvSpPr>
+            <p:cNvPr id="115" name="矩形 114"/>
+            <p:cNvSpPr/>
+            <p:nvPr/>
+          </p:nvSpPr>
+          <p:spPr>
+            <a:xfrm>
+              <a:off x="7789025" y="4677132"/>
+              <a:ext cx="4406880" cy="2006302"/>
+            </a:xfrm>
+            <a:prstGeom prst="rect">
+              <a:avLst/>
+            </a:prstGeom>
+            <a:noFill/>
+            <a:ln>
+              <a:solidFill>
+                <a:srgbClr val="0070C0"/>
+              </a:solidFill>
+              <a:prstDash val="lgDash"/>
+            </a:ln>
+          </p:spPr>
+          <p:style>
+            <a:lnRef idx="2">
+              <a:schemeClr val="accent1">
+                <a:shade val="50000"/>
+              </a:schemeClr>
+            </a:lnRef>
+            <a:fillRef idx="1">
+              <a:schemeClr val="accent1"/>
+            </a:fillRef>
+            <a:effectRef idx="0">
+              <a:schemeClr val="accent1"/>
+            </a:effectRef>
+            <a:fontRef idx="minor">
+              <a:schemeClr val="lt1"/>
+            </a:fontRef>
+          </p:style>
+          <p:txBody>
+            <a:bodyPr rtlCol="0" anchor="ctr"/>
+            <a:lstStyle/>
+            <a:p>
+              <a:pPr algn="ctr"/>
+              <a:endParaRPr lang="zh-CN" altLang="en-US"/>
+            </a:p>
+          </p:txBody>
+        </p:sp>
+      </p:grpSp>
+      <p:cxnSp>
+        <p:nvCxnSpPr>
+          <p:cNvPr id="117" name="直接箭头连接符 116"/>
+          <p:cNvCxnSpPr>
+            <a:stCxn id="22" idx="2"/>
+            <a:endCxn id="115" idx="0"/>
+          </p:cNvCxnSpPr>
+          <p:nvPr/>
+        </p:nvCxnSpPr>
+        <p:spPr>
+          <a:xfrm flipH="1">
+            <a:off x="6109980" y="4481379"/>
+            <a:ext cx="456002" cy="337876"/>
+          </a:xfrm>
+          <a:prstGeom prst="straightConnector1">
+            <a:avLst/>
+          </a:prstGeom>
+          <a:ln>
+            <a:tailEnd type="triangle"/>
+          </a:ln>
+        </p:spPr>
+        <p:style>
+          <a:lnRef idx="1">
+            <a:schemeClr val="accent1"/>
+          </a:lnRef>
+          <a:fillRef idx="0">
+            <a:schemeClr val="accent1"/>
+          </a:fillRef>
+          <a:effectRef idx="0">
+            <a:schemeClr val="accent1"/>
+          </a:effectRef>
+          <a:fontRef idx="minor">
+            <a:schemeClr val="tx1"/>
+          </a:fontRef>
+        </p:style>
+      </p:cxnSp>
+      <p:cxnSp>
+        <p:nvCxnSpPr>
+          <p:cNvPr id="202" name="直接箭头连接符 201"/>
+          <p:cNvCxnSpPr>
+            <a:stCxn id="21" idx="2"/>
+            <a:endCxn id="23" idx="0"/>
+          </p:cNvCxnSpPr>
+          <p:nvPr/>
+        </p:nvCxnSpPr>
+        <p:spPr>
+          <a:xfrm flipH="1">
+            <a:off x="2865116" y="4441093"/>
+            <a:ext cx="1502091" cy="1028694"/>
+          </a:xfrm>
+          <a:prstGeom prst="straightConnector1">
+            <a:avLst/>
+          </a:prstGeom>
+          <a:ln>
+            <a:tailEnd type="triangle"/>
+          </a:ln>
+        </p:spPr>
+        <p:style>
+          <a:lnRef idx="1">
+            <a:schemeClr val="accent1"/>
+          </a:lnRef>
+          <a:fillRef idx="0">
+            <a:schemeClr val="accent1"/>
+          </a:fillRef>
+          <a:effectRef idx="0">
+            <a:schemeClr val="accent1"/>
+          </a:effectRef>
+          <a:fontRef idx="minor">
+            <a:schemeClr val="tx1"/>
+          </a:fontRef>
+        </p:style>
+      </p:cxnSp>
+      <p:sp>
+        <p:nvSpPr>
+          <p:cNvPr id="70" name="文本框 69"/>
+          <p:cNvSpPr txBox="1"/>
+          <p:nvPr/>
+        </p:nvSpPr>
+        <p:spPr>
+          <a:xfrm>
+            <a:off x="5289001" y="2209084"/>
+            <a:ext cx="876844" cy="553998"/>
+          </a:xfrm>
+          <a:prstGeom prst="rect">
+            <a:avLst/>
+          </a:prstGeom>
+          <a:ln>
+            <a:prstDash val="sysDot"/>
+          </a:ln>
+        </p:spPr>
+        <p:style>
+          <a:lnRef idx="2">
+            <a:schemeClr val="accent2"/>
+          </a:lnRef>
+          <a:fillRef idx="1">
+            <a:schemeClr val="lt1"/>
+          </a:fillRef>
+          <a:effectRef idx="0">
+            <a:schemeClr val="accent2"/>
+          </a:effectRef>
+          <a:fontRef idx="minor">
+            <a:schemeClr val="dk1"/>
+          </a:fontRef>
+        </p:style>
+        <p:txBody>
+          <a:bodyPr wrap="square" rtlCol="0">
+            <a:spAutoFit/>
+          </a:bodyPr>
+          <a:lstStyle/>
+          <a:p>
+            <a:r>
+              <a:rPr lang="zh-CN" altLang="en-US" sz="1000" smtClean="0">
+                <a:latin typeface="Times New Roman" panose="02020603050405020304" pitchFamily="18" charset="0"/>
+                <a:cs typeface="Times New Roman" panose="02020603050405020304" pitchFamily="18" charset="0"/>
+              </a:rPr>
+              <a:t>这里省略对音频</a:t>
+            </a:r>
+            <a:r>
+              <a:rPr lang="en-US" altLang="zh-CN" sz="1000" smtClean="0">
+                <a:latin typeface="Times New Roman" panose="02020603050405020304" pitchFamily="18" charset="0"/>
+                <a:cs typeface="Times New Roman" panose="02020603050405020304" pitchFamily="18" charset="0"/>
+              </a:rPr>
+              <a:t>trak</a:t>
+            </a:r>
+            <a:r>
+              <a:rPr lang="zh-CN" altLang="en-US" sz="1000" smtClean="0">
+                <a:latin typeface="Times New Roman" panose="02020603050405020304" pitchFamily="18" charset="0"/>
+                <a:cs typeface="Times New Roman" panose="02020603050405020304" pitchFamily="18" charset="0"/>
+              </a:rPr>
+              <a:t>的继续分析</a:t>
+            </a:r>
+            <a:endParaRPr lang="zh-CN" altLang="en-US" sz="1000" dirty="0">
+              <a:latin typeface="Times New Roman" panose="02020603050405020304" pitchFamily="18" charset="0"/>
+              <a:cs typeface="Times New Roman" panose="02020603050405020304" pitchFamily="18" charset="0"/>
+            </a:endParaRPr>
+          </a:p>
+        </p:txBody>
+      </p:sp>
+      <p:cxnSp>
+        <p:nvCxnSpPr>
+          <p:cNvPr id="56" name="直接箭头连接符 55"/>
+          <p:cNvCxnSpPr>
+            <a:stCxn id="10" idx="2"/>
+            <a:endCxn id="70" idx="0"/>
+          </p:cNvCxnSpPr>
+          <p:nvPr/>
+        </p:nvCxnSpPr>
+        <p:spPr>
+          <a:xfrm>
+            <a:off x="5273904" y="1904029"/>
+            <a:ext cx="453519" cy="305055"/>
+          </a:xfrm>
+          <a:prstGeom prst="straightConnector1">
+            <a:avLst/>
+          </a:prstGeom>
+          <a:ln>
+            <a:tailEnd type="triangle"/>
+          </a:ln>
+        </p:spPr>
+        <p:style>
+          <a:lnRef idx="1">
+            <a:schemeClr val="accent1"/>
+          </a:lnRef>
+          <a:fillRef idx="0">
+            <a:schemeClr val="accent1"/>
+          </a:fillRef>
+          <a:effectRef idx="0">
+            <a:schemeClr val="accent1"/>
+          </a:effectRef>
+          <a:fontRef idx="minor">
+            <a:schemeClr val="tx1"/>
+          </a:fontRef>
+        </p:style>
+      </p:cxnSp>
+    </p:spTree>
+    <p:extLst>
+      <p:ext uri="{BB962C8B-B14F-4D97-AF65-F5344CB8AC3E}">
+        <p14:creationId xmlns:p14="http://schemas.microsoft.com/office/powerpoint/2010/main" val="4206506031"/>
+      </p:ext>
+    </p:extLst>
+  </p:cSld>
+  <p:clrMapOvr>
+    <a:masterClrMapping/>
+  </p:clrMapOvr>
+</p:sld>
+</file>
+
 <file path=ppt/theme/theme1.xml><?xml version="1.0" encoding="utf-8"?>
 <a:theme xmlns:a="http://schemas.openxmlformats.org/drawingml/2006/main" name="Office 主题​​">
   <a:themeElements>

--- a/音视频编解码.pptx
+++ b/音视频编解码.pptx
@@ -11,6 +11,8 @@
     <p:sldId id="259" r:id="rId5"/>
     <p:sldId id="260" r:id="rId6"/>
     <p:sldId id="261" r:id="rId7"/>
+    <p:sldId id="262" r:id="rId8"/>
+    <p:sldId id="263" r:id="rId9"/>
   </p:sldIdLst>
   <p:sldSz cx="12192000" cy="6858000"/>
   <p:notesSz cx="6858000" cy="9144000"/>
@@ -248,7 +250,7 @@
           <a:p>
             <a:fld id="{EA80D996-CE9E-432A-86C4-A040E9078786}" type="datetimeFigureOut">
               <a:rPr lang="zh-CN" altLang="en-US" smtClean="0"/>
-              <a:t>2019/5/24</a:t>
+              <a:t>2019/6/29</a:t>
             </a:fld>
             <a:endParaRPr lang="zh-CN" altLang="en-US"/>
           </a:p>
@@ -418,7 +420,7 @@
           <a:p>
             <a:fld id="{EA80D996-CE9E-432A-86C4-A040E9078786}" type="datetimeFigureOut">
               <a:rPr lang="zh-CN" altLang="en-US" smtClean="0"/>
-              <a:t>2019/5/24</a:t>
+              <a:t>2019/6/29</a:t>
             </a:fld>
             <a:endParaRPr lang="zh-CN" altLang="en-US"/>
           </a:p>
@@ -598,7 +600,7 @@
           <a:p>
             <a:fld id="{EA80D996-CE9E-432A-86C4-A040E9078786}" type="datetimeFigureOut">
               <a:rPr lang="zh-CN" altLang="en-US" smtClean="0"/>
-              <a:t>2019/5/24</a:t>
+              <a:t>2019/6/29</a:t>
             </a:fld>
             <a:endParaRPr lang="zh-CN" altLang="en-US"/>
           </a:p>
@@ -768,7 +770,7 @@
           <a:p>
             <a:fld id="{EA80D996-CE9E-432A-86C4-A040E9078786}" type="datetimeFigureOut">
               <a:rPr lang="zh-CN" altLang="en-US" smtClean="0"/>
-              <a:t>2019/5/24</a:t>
+              <a:t>2019/6/29</a:t>
             </a:fld>
             <a:endParaRPr lang="zh-CN" altLang="en-US"/>
           </a:p>
@@ -1014,7 +1016,7 @@
           <a:p>
             <a:fld id="{EA80D996-CE9E-432A-86C4-A040E9078786}" type="datetimeFigureOut">
               <a:rPr lang="zh-CN" altLang="en-US" smtClean="0"/>
-              <a:t>2019/5/24</a:t>
+              <a:t>2019/6/29</a:t>
             </a:fld>
             <a:endParaRPr lang="zh-CN" altLang="en-US"/>
           </a:p>
@@ -1246,7 +1248,7 @@
           <a:p>
             <a:fld id="{EA80D996-CE9E-432A-86C4-A040E9078786}" type="datetimeFigureOut">
               <a:rPr lang="zh-CN" altLang="en-US" smtClean="0"/>
-              <a:t>2019/5/24</a:t>
+              <a:t>2019/6/29</a:t>
             </a:fld>
             <a:endParaRPr lang="zh-CN" altLang="en-US"/>
           </a:p>
@@ -1613,7 +1615,7 @@
           <a:p>
             <a:fld id="{EA80D996-CE9E-432A-86C4-A040E9078786}" type="datetimeFigureOut">
               <a:rPr lang="zh-CN" altLang="en-US" smtClean="0"/>
-              <a:t>2019/5/24</a:t>
+              <a:t>2019/6/29</a:t>
             </a:fld>
             <a:endParaRPr lang="zh-CN" altLang="en-US"/>
           </a:p>
@@ -1731,7 +1733,7 @@
           <a:p>
             <a:fld id="{EA80D996-CE9E-432A-86C4-A040E9078786}" type="datetimeFigureOut">
               <a:rPr lang="zh-CN" altLang="en-US" smtClean="0"/>
-              <a:t>2019/5/24</a:t>
+              <a:t>2019/6/29</a:t>
             </a:fld>
             <a:endParaRPr lang="zh-CN" altLang="en-US"/>
           </a:p>
@@ -1826,7 +1828,7 @@
           <a:p>
             <a:fld id="{EA80D996-CE9E-432A-86C4-A040E9078786}" type="datetimeFigureOut">
               <a:rPr lang="zh-CN" altLang="en-US" smtClean="0"/>
-              <a:t>2019/5/24</a:t>
+              <a:t>2019/6/29</a:t>
             </a:fld>
             <a:endParaRPr lang="zh-CN" altLang="en-US"/>
           </a:p>
@@ -2103,7 +2105,7 @@
           <a:p>
             <a:fld id="{EA80D996-CE9E-432A-86C4-A040E9078786}" type="datetimeFigureOut">
               <a:rPr lang="zh-CN" altLang="en-US" smtClean="0"/>
-              <a:t>2019/5/24</a:t>
+              <a:t>2019/6/29</a:t>
             </a:fld>
             <a:endParaRPr lang="zh-CN" altLang="en-US"/>
           </a:p>
@@ -2356,7 +2358,7 @@
           <a:p>
             <a:fld id="{EA80D996-CE9E-432A-86C4-A040E9078786}" type="datetimeFigureOut">
               <a:rPr lang="zh-CN" altLang="en-US" smtClean="0"/>
-              <a:t>2019/5/24</a:t>
+              <a:t>2019/6/29</a:t>
             </a:fld>
             <a:endParaRPr lang="zh-CN" altLang="en-US"/>
           </a:p>
@@ -2569,7 +2571,7 @@
           <a:p>
             <a:fld id="{EA80D996-CE9E-432A-86C4-A040E9078786}" type="datetimeFigureOut">
               <a:rPr lang="zh-CN" altLang="en-US" smtClean="0"/>
-              <a:t>2019/5/24</a:t>
+              <a:t>2019/6/29</a:t>
             </a:fld>
             <a:endParaRPr lang="zh-CN" altLang="en-US"/>
           </a:p>
@@ -14558,6 +14560,6682 @@
 </p:sld>
 </file>
 
+<file path=ppt/slides/slide7.xml><?xml version="1.0" encoding="utf-8"?>
+<p:sld xmlns:a="http://schemas.openxmlformats.org/drawingml/2006/main" xmlns:r="http://schemas.openxmlformats.org/officeDocument/2006/relationships" xmlns:p="http://schemas.openxmlformats.org/presentationml/2006/main">
+  <p:cSld>
+    <p:spTree>
+      <p:nvGrpSpPr>
+        <p:cNvPr id="1" name=""/>
+        <p:cNvGrpSpPr/>
+        <p:nvPr/>
+      </p:nvGrpSpPr>
+      <p:grpSpPr>
+        <a:xfrm>
+          <a:off x="0" y="0"/>
+          <a:ext cx="0" cy="0"/>
+          <a:chOff x="0" y="0"/>
+          <a:chExt cx="0" cy="0"/>
+        </a:xfrm>
+      </p:grpSpPr>
+      <p:sp>
+        <p:nvSpPr>
+          <p:cNvPr id="4" name="矩形 3"/>
+          <p:cNvSpPr/>
+          <p:nvPr/>
+        </p:nvSpPr>
+        <p:spPr>
+          <a:xfrm>
+            <a:off x="2677886" y="1163782"/>
+            <a:ext cx="1679510" cy="347777"/>
+          </a:xfrm>
+          <a:prstGeom prst="rect">
+            <a:avLst/>
+          </a:prstGeom>
+          <a:solidFill>
+            <a:schemeClr val="bg1"/>
+          </a:solidFill>
+          <a:ln>
+            <a:solidFill>
+              <a:schemeClr val="tx1"/>
+            </a:solidFill>
+          </a:ln>
+        </p:spPr>
+        <p:style>
+          <a:lnRef idx="2">
+            <a:schemeClr val="accent1">
+              <a:shade val="50000"/>
+            </a:schemeClr>
+          </a:lnRef>
+          <a:fillRef idx="1">
+            <a:schemeClr val="accent1"/>
+          </a:fillRef>
+          <a:effectRef idx="0">
+            <a:schemeClr val="accent1"/>
+          </a:effectRef>
+          <a:fontRef idx="minor">
+            <a:schemeClr val="lt1"/>
+          </a:fontRef>
+        </p:style>
+        <p:txBody>
+          <a:bodyPr rtlCol="0" anchor="ctr"/>
+          <a:lstStyle/>
+          <a:p>
+            <a:pPr algn="ctr"/>
+            <a:r>
+              <a:rPr lang="zh-CN" altLang="en-US" sz="1100" smtClean="0">
+                <a:solidFill>
+                  <a:schemeClr val="tx1"/>
+                </a:solidFill>
+                <a:latin typeface="Times New Roman" panose="02020603050405020304" pitchFamily="18" charset="0"/>
+                <a:cs typeface="Times New Roman" panose="02020603050405020304" pitchFamily="18" charset="0"/>
+              </a:rPr>
+              <a:t>音视频数据</a:t>
+            </a:r>
+            <a:endParaRPr lang="zh-CN" altLang="en-US" sz="1100">
+              <a:solidFill>
+                <a:schemeClr val="tx1"/>
+              </a:solidFill>
+              <a:latin typeface="Times New Roman" panose="02020603050405020304" pitchFamily="18" charset="0"/>
+              <a:cs typeface="Times New Roman" panose="02020603050405020304" pitchFamily="18" charset="0"/>
+            </a:endParaRPr>
+          </a:p>
+        </p:txBody>
+      </p:sp>
+      <p:sp>
+        <p:nvSpPr>
+          <p:cNvPr id="5" name="矩形 4"/>
+          <p:cNvSpPr/>
+          <p:nvPr/>
+        </p:nvSpPr>
+        <p:spPr>
+          <a:xfrm>
+            <a:off x="2677886" y="1779601"/>
+            <a:ext cx="1679510" cy="361350"/>
+          </a:xfrm>
+          <a:prstGeom prst="rect">
+            <a:avLst/>
+          </a:prstGeom>
+          <a:solidFill>
+            <a:schemeClr val="bg1"/>
+          </a:solidFill>
+          <a:ln>
+            <a:solidFill>
+              <a:schemeClr val="tx1"/>
+            </a:solidFill>
+          </a:ln>
+        </p:spPr>
+        <p:style>
+          <a:lnRef idx="2">
+            <a:schemeClr val="accent1">
+              <a:shade val="50000"/>
+            </a:schemeClr>
+          </a:lnRef>
+          <a:fillRef idx="1">
+            <a:schemeClr val="accent1"/>
+          </a:fillRef>
+          <a:effectRef idx="0">
+            <a:schemeClr val="accent1"/>
+          </a:effectRef>
+          <a:fontRef idx="minor">
+            <a:schemeClr val="lt1"/>
+          </a:fontRef>
+        </p:style>
+        <p:txBody>
+          <a:bodyPr rtlCol="0" anchor="ctr"/>
+          <a:lstStyle/>
+          <a:p>
+            <a:pPr algn="ctr"/>
+            <a:r>
+              <a:rPr lang="en-US" altLang="zh-CN" sz="1100">
+                <a:solidFill>
+                  <a:schemeClr val="tx1"/>
+                </a:solidFill>
+                <a:latin typeface="Times New Roman" panose="02020603050405020304" pitchFamily="18" charset="0"/>
+                <a:cs typeface="Times New Roman" panose="02020603050405020304" pitchFamily="18" charset="0"/>
+              </a:rPr>
+              <a:t>RTP Body</a:t>
+            </a:r>
+            <a:endParaRPr lang="zh-CN" altLang="en-US" sz="1100">
+              <a:solidFill>
+                <a:schemeClr val="tx1"/>
+              </a:solidFill>
+              <a:latin typeface="Times New Roman" panose="02020603050405020304" pitchFamily="18" charset="0"/>
+              <a:cs typeface="Times New Roman" panose="02020603050405020304" pitchFamily="18" charset="0"/>
+            </a:endParaRPr>
+          </a:p>
+        </p:txBody>
+      </p:sp>
+      <p:sp>
+        <p:nvSpPr>
+          <p:cNvPr id="6" name="矩形 5"/>
+          <p:cNvSpPr/>
+          <p:nvPr/>
+        </p:nvSpPr>
+        <p:spPr>
+          <a:xfrm>
+            <a:off x="1996751" y="2408992"/>
+            <a:ext cx="2360645" cy="350317"/>
+          </a:xfrm>
+          <a:prstGeom prst="rect">
+            <a:avLst/>
+          </a:prstGeom>
+          <a:solidFill>
+            <a:schemeClr val="bg1"/>
+          </a:solidFill>
+          <a:ln>
+            <a:solidFill>
+              <a:schemeClr val="tx1"/>
+            </a:solidFill>
+          </a:ln>
+        </p:spPr>
+        <p:style>
+          <a:lnRef idx="2">
+            <a:schemeClr val="accent1">
+              <a:shade val="50000"/>
+            </a:schemeClr>
+          </a:lnRef>
+          <a:fillRef idx="1">
+            <a:schemeClr val="accent1"/>
+          </a:fillRef>
+          <a:effectRef idx="0">
+            <a:schemeClr val="accent1"/>
+          </a:effectRef>
+          <a:fontRef idx="minor">
+            <a:schemeClr val="lt1"/>
+          </a:fontRef>
+        </p:style>
+        <p:txBody>
+          <a:bodyPr rtlCol="0" anchor="ctr"/>
+          <a:lstStyle/>
+          <a:p>
+            <a:pPr algn="ctr"/>
+            <a:r>
+              <a:rPr lang="en-US" altLang="zh-CN" sz="1100">
+                <a:solidFill>
+                  <a:schemeClr val="tx1"/>
+                </a:solidFill>
+                <a:latin typeface="Times New Roman" panose="02020603050405020304" pitchFamily="18" charset="0"/>
+                <a:cs typeface="Times New Roman" panose="02020603050405020304" pitchFamily="18" charset="0"/>
+              </a:rPr>
+              <a:t>UDP Body</a:t>
+            </a:r>
+            <a:endParaRPr lang="zh-CN" altLang="en-US" sz="1100">
+              <a:solidFill>
+                <a:schemeClr val="tx1"/>
+              </a:solidFill>
+              <a:latin typeface="Times New Roman" panose="02020603050405020304" pitchFamily="18" charset="0"/>
+              <a:cs typeface="Times New Roman" panose="02020603050405020304" pitchFamily="18" charset="0"/>
+            </a:endParaRPr>
+          </a:p>
+        </p:txBody>
+      </p:sp>
+      <p:sp>
+        <p:nvSpPr>
+          <p:cNvPr id="7" name="矩形 6"/>
+          <p:cNvSpPr/>
+          <p:nvPr/>
+        </p:nvSpPr>
+        <p:spPr>
+          <a:xfrm>
+            <a:off x="1996751" y="1779600"/>
+            <a:ext cx="681135" cy="361351"/>
+          </a:xfrm>
+          <a:prstGeom prst="rect">
+            <a:avLst/>
+          </a:prstGeom>
+          <a:solidFill>
+            <a:schemeClr val="bg1"/>
+          </a:solidFill>
+          <a:ln>
+            <a:solidFill>
+              <a:schemeClr val="tx1"/>
+            </a:solidFill>
+          </a:ln>
+        </p:spPr>
+        <p:style>
+          <a:lnRef idx="2">
+            <a:schemeClr val="accent1">
+              <a:shade val="50000"/>
+            </a:schemeClr>
+          </a:lnRef>
+          <a:fillRef idx="1">
+            <a:schemeClr val="accent1"/>
+          </a:fillRef>
+          <a:effectRef idx="0">
+            <a:schemeClr val="accent1"/>
+          </a:effectRef>
+          <a:fontRef idx="minor">
+            <a:schemeClr val="lt1"/>
+          </a:fontRef>
+        </p:style>
+        <p:txBody>
+          <a:bodyPr rtlCol="0" anchor="ctr"/>
+          <a:lstStyle/>
+          <a:p>
+            <a:pPr algn="ctr"/>
+            <a:r>
+              <a:rPr lang="en-US" altLang="zh-CN" sz="1100" smtClean="0">
+                <a:solidFill>
+                  <a:schemeClr val="tx1"/>
+                </a:solidFill>
+                <a:latin typeface="Times New Roman" panose="02020603050405020304" pitchFamily="18" charset="0"/>
+                <a:cs typeface="Times New Roman" panose="02020603050405020304" pitchFamily="18" charset="0"/>
+              </a:rPr>
+              <a:t>RTP Header</a:t>
+            </a:r>
+            <a:endParaRPr lang="zh-CN" altLang="en-US" sz="1100">
+              <a:solidFill>
+                <a:schemeClr val="tx1"/>
+              </a:solidFill>
+              <a:latin typeface="Times New Roman" panose="02020603050405020304" pitchFamily="18" charset="0"/>
+              <a:cs typeface="Times New Roman" panose="02020603050405020304" pitchFamily="18" charset="0"/>
+            </a:endParaRPr>
+          </a:p>
+        </p:txBody>
+      </p:sp>
+      <p:sp>
+        <p:nvSpPr>
+          <p:cNvPr id="8" name="矩形 7"/>
+          <p:cNvSpPr/>
+          <p:nvPr/>
+        </p:nvSpPr>
+        <p:spPr>
+          <a:xfrm>
+            <a:off x="1315616" y="2408992"/>
+            <a:ext cx="681135" cy="350317"/>
+          </a:xfrm>
+          <a:prstGeom prst="rect">
+            <a:avLst/>
+          </a:prstGeom>
+          <a:solidFill>
+            <a:schemeClr val="bg1"/>
+          </a:solidFill>
+          <a:ln>
+            <a:solidFill>
+              <a:schemeClr val="tx1"/>
+            </a:solidFill>
+          </a:ln>
+        </p:spPr>
+        <p:style>
+          <a:lnRef idx="2">
+            <a:schemeClr val="accent1">
+              <a:shade val="50000"/>
+            </a:schemeClr>
+          </a:lnRef>
+          <a:fillRef idx="1">
+            <a:schemeClr val="accent1"/>
+          </a:fillRef>
+          <a:effectRef idx="0">
+            <a:schemeClr val="accent1"/>
+          </a:effectRef>
+          <a:fontRef idx="minor">
+            <a:schemeClr val="lt1"/>
+          </a:fontRef>
+        </p:style>
+        <p:txBody>
+          <a:bodyPr rtlCol="0" anchor="ctr"/>
+          <a:lstStyle/>
+          <a:p>
+            <a:pPr algn="ctr"/>
+            <a:r>
+              <a:rPr lang="en-US" altLang="zh-CN" sz="1100" smtClean="0">
+                <a:solidFill>
+                  <a:schemeClr val="tx1"/>
+                </a:solidFill>
+                <a:latin typeface="Times New Roman" panose="02020603050405020304" pitchFamily="18" charset="0"/>
+                <a:cs typeface="Times New Roman" panose="02020603050405020304" pitchFamily="18" charset="0"/>
+              </a:rPr>
+              <a:t>UDP Header</a:t>
+            </a:r>
+            <a:endParaRPr lang="zh-CN" altLang="en-US" sz="1100">
+              <a:solidFill>
+                <a:schemeClr val="tx1"/>
+              </a:solidFill>
+              <a:latin typeface="Times New Roman" panose="02020603050405020304" pitchFamily="18" charset="0"/>
+              <a:cs typeface="Times New Roman" panose="02020603050405020304" pitchFamily="18" charset="0"/>
+            </a:endParaRPr>
+          </a:p>
+        </p:txBody>
+      </p:sp>
+      <p:sp>
+        <p:nvSpPr>
+          <p:cNvPr id="9" name="下箭头 8"/>
+          <p:cNvSpPr/>
+          <p:nvPr/>
+        </p:nvSpPr>
+        <p:spPr>
+          <a:xfrm>
+            <a:off x="3214397" y="1511559"/>
+            <a:ext cx="289248" cy="268041"/>
+          </a:xfrm>
+          <a:prstGeom prst="downArrow">
+            <a:avLst/>
+          </a:prstGeom>
+        </p:spPr>
+        <p:style>
+          <a:lnRef idx="1">
+            <a:schemeClr val="accent6"/>
+          </a:lnRef>
+          <a:fillRef idx="2">
+            <a:schemeClr val="accent6"/>
+          </a:fillRef>
+          <a:effectRef idx="1">
+            <a:schemeClr val="accent6"/>
+          </a:effectRef>
+          <a:fontRef idx="minor">
+            <a:schemeClr val="dk1"/>
+          </a:fontRef>
+        </p:style>
+        <p:txBody>
+          <a:bodyPr rtlCol="0" anchor="ctr"/>
+          <a:lstStyle/>
+          <a:p>
+            <a:pPr algn="ctr"/>
+            <a:endParaRPr lang="zh-CN" altLang="en-US"/>
+          </a:p>
+        </p:txBody>
+      </p:sp>
+      <p:sp>
+        <p:nvSpPr>
+          <p:cNvPr id="10" name="下箭头 9"/>
+          <p:cNvSpPr/>
+          <p:nvPr/>
+        </p:nvSpPr>
+        <p:spPr>
+          <a:xfrm>
+            <a:off x="3219063" y="2145714"/>
+            <a:ext cx="289248" cy="254467"/>
+          </a:xfrm>
+          <a:prstGeom prst="downArrow">
+            <a:avLst/>
+          </a:prstGeom>
+        </p:spPr>
+        <p:style>
+          <a:lnRef idx="1">
+            <a:schemeClr val="accent6"/>
+          </a:lnRef>
+          <a:fillRef idx="2">
+            <a:schemeClr val="accent6"/>
+          </a:fillRef>
+          <a:effectRef idx="1">
+            <a:schemeClr val="accent6"/>
+          </a:effectRef>
+          <a:fontRef idx="minor">
+            <a:schemeClr val="dk1"/>
+          </a:fontRef>
+        </p:style>
+        <p:txBody>
+          <a:bodyPr rtlCol="0" anchor="ctr"/>
+          <a:lstStyle/>
+          <a:p>
+            <a:pPr algn="ctr"/>
+            <a:endParaRPr lang="zh-CN" altLang="en-US"/>
+          </a:p>
+        </p:txBody>
+      </p:sp>
+      <p:sp>
+        <p:nvSpPr>
+          <p:cNvPr id="11" name="矩形 10"/>
+          <p:cNvSpPr/>
+          <p:nvPr/>
+        </p:nvSpPr>
+        <p:spPr>
+          <a:xfrm>
+            <a:off x="1996751" y="3878987"/>
+            <a:ext cx="242596" cy="263805"/>
+          </a:xfrm>
+          <a:prstGeom prst="rect">
+            <a:avLst/>
+          </a:prstGeom>
+          <a:solidFill>
+            <a:schemeClr val="bg1"/>
+          </a:solidFill>
+          <a:ln>
+            <a:solidFill>
+              <a:schemeClr val="tx1"/>
+            </a:solidFill>
+          </a:ln>
+        </p:spPr>
+        <p:style>
+          <a:lnRef idx="2">
+            <a:schemeClr val="accent1">
+              <a:shade val="50000"/>
+            </a:schemeClr>
+          </a:lnRef>
+          <a:fillRef idx="1">
+            <a:schemeClr val="accent1"/>
+          </a:fillRef>
+          <a:effectRef idx="0">
+            <a:schemeClr val="accent1"/>
+          </a:effectRef>
+          <a:fontRef idx="minor">
+            <a:schemeClr val="lt1"/>
+          </a:fontRef>
+        </p:style>
+        <p:txBody>
+          <a:bodyPr rtlCol="0" anchor="ctr"/>
+          <a:lstStyle/>
+          <a:p>
+            <a:pPr algn="ctr"/>
+            <a:r>
+              <a:rPr lang="en-US" altLang="zh-CN" sz="1100" smtClean="0">
+                <a:solidFill>
+                  <a:schemeClr val="tx1"/>
+                </a:solidFill>
+                <a:latin typeface="Times New Roman" panose="02020603050405020304" pitchFamily="18" charset="0"/>
+                <a:cs typeface="Times New Roman" panose="02020603050405020304" pitchFamily="18" charset="0"/>
+              </a:rPr>
+              <a:t>1</a:t>
+            </a:r>
+            <a:endParaRPr lang="zh-CN" altLang="en-US" sz="1100">
+              <a:solidFill>
+                <a:schemeClr val="tx1"/>
+              </a:solidFill>
+              <a:latin typeface="Times New Roman" panose="02020603050405020304" pitchFamily="18" charset="0"/>
+              <a:cs typeface="Times New Roman" panose="02020603050405020304" pitchFamily="18" charset="0"/>
+            </a:endParaRPr>
+          </a:p>
+        </p:txBody>
+      </p:sp>
+      <p:sp>
+        <p:nvSpPr>
+          <p:cNvPr id="12" name="矩形 11"/>
+          <p:cNvSpPr/>
+          <p:nvPr/>
+        </p:nvSpPr>
+        <p:spPr>
+          <a:xfrm>
+            <a:off x="2239347" y="3878987"/>
+            <a:ext cx="242596" cy="263805"/>
+          </a:xfrm>
+          <a:prstGeom prst="rect">
+            <a:avLst/>
+          </a:prstGeom>
+          <a:solidFill>
+            <a:schemeClr val="bg1"/>
+          </a:solidFill>
+          <a:ln>
+            <a:solidFill>
+              <a:schemeClr val="tx1"/>
+            </a:solidFill>
+          </a:ln>
+        </p:spPr>
+        <p:style>
+          <a:lnRef idx="2">
+            <a:schemeClr val="accent1">
+              <a:shade val="50000"/>
+            </a:schemeClr>
+          </a:lnRef>
+          <a:fillRef idx="1">
+            <a:schemeClr val="accent1"/>
+          </a:fillRef>
+          <a:effectRef idx="0">
+            <a:schemeClr val="accent1"/>
+          </a:effectRef>
+          <a:fontRef idx="minor">
+            <a:schemeClr val="lt1"/>
+          </a:fontRef>
+        </p:style>
+        <p:txBody>
+          <a:bodyPr rtlCol="0" anchor="ctr"/>
+          <a:lstStyle/>
+          <a:p>
+            <a:pPr algn="ctr"/>
+            <a:r>
+              <a:rPr lang="en-US" altLang="zh-CN" sz="1100" smtClean="0">
+                <a:solidFill>
+                  <a:schemeClr val="tx1"/>
+                </a:solidFill>
+                <a:latin typeface="Times New Roman" panose="02020603050405020304" pitchFamily="18" charset="0"/>
+                <a:cs typeface="Times New Roman" panose="02020603050405020304" pitchFamily="18" charset="0"/>
+              </a:rPr>
+              <a:t>0</a:t>
+            </a:r>
+            <a:endParaRPr lang="zh-CN" altLang="en-US" sz="1100">
+              <a:solidFill>
+                <a:schemeClr val="tx1"/>
+              </a:solidFill>
+              <a:latin typeface="Times New Roman" panose="02020603050405020304" pitchFamily="18" charset="0"/>
+              <a:cs typeface="Times New Roman" panose="02020603050405020304" pitchFamily="18" charset="0"/>
+            </a:endParaRPr>
+          </a:p>
+        </p:txBody>
+      </p:sp>
+      <p:sp>
+        <p:nvSpPr>
+          <p:cNvPr id="13" name="矩形 12"/>
+          <p:cNvSpPr/>
+          <p:nvPr/>
+        </p:nvSpPr>
+        <p:spPr>
+          <a:xfrm>
+            <a:off x="2481943" y="3878986"/>
+            <a:ext cx="242596" cy="263805"/>
+          </a:xfrm>
+          <a:prstGeom prst="rect">
+            <a:avLst/>
+          </a:prstGeom>
+          <a:solidFill>
+            <a:schemeClr val="bg1"/>
+          </a:solidFill>
+          <a:ln>
+            <a:solidFill>
+              <a:schemeClr val="tx1"/>
+            </a:solidFill>
+          </a:ln>
+        </p:spPr>
+        <p:style>
+          <a:lnRef idx="2">
+            <a:schemeClr val="accent1">
+              <a:shade val="50000"/>
+            </a:schemeClr>
+          </a:lnRef>
+          <a:fillRef idx="1">
+            <a:schemeClr val="accent1"/>
+          </a:fillRef>
+          <a:effectRef idx="0">
+            <a:schemeClr val="accent1"/>
+          </a:effectRef>
+          <a:fontRef idx="minor">
+            <a:schemeClr val="lt1"/>
+          </a:fontRef>
+        </p:style>
+        <p:txBody>
+          <a:bodyPr rtlCol="0" anchor="ctr"/>
+          <a:lstStyle/>
+          <a:p>
+            <a:pPr algn="ctr"/>
+            <a:r>
+              <a:rPr lang="en-US" altLang="zh-CN" sz="1100" smtClean="0">
+                <a:solidFill>
+                  <a:schemeClr val="tx1"/>
+                </a:solidFill>
+                <a:latin typeface="Times New Roman" panose="02020603050405020304" pitchFamily="18" charset="0"/>
+                <a:cs typeface="Times New Roman" panose="02020603050405020304" pitchFamily="18" charset="0"/>
+              </a:rPr>
+              <a:t>0</a:t>
+            </a:r>
+            <a:endParaRPr lang="zh-CN" altLang="en-US" sz="1100">
+              <a:solidFill>
+                <a:schemeClr val="tx1"/>
+              </a:solidFill>
+              <a:latin typeface="Times New Roman" panose="02020603050405020304" pitchFamily="18" charset="0"/>
+              <a:cs typeface="Times New Roman" panose="02020603050405020304" pitchFamily="18" charset="0"/>
+            </a:endParaRPr>
+          </a:p>
+        </p:txBody>
+      </p:sp>
+      <p:sp>
+        <p:nvSpPr>
+          <p:cNvPr id="14" name="矩形 13"/>
+          <p:cNvSpPr/>
+          <p:nvPr/>
+        </p:nvSpPr>
+        <p:spPr>
+          <a:xfrm>
+            <a:off x="2724539" y="3878986"/>
+            <a:ext cx="242596" cy="263805"/>
+          </a:xfrm>
+          <a:prstGeom prst="rect">
+            <a:avLst/>
+          </a:prstGeom>
+          <a:solidFill>
+            <a:schemeClr val="bg1"/>
+          </a:solidFill>
+          <a:ln>
+            <a:solidFill>
+              <a:schemeClr val="tx1"/>
+            </a:solidFill>
+          </a:ln>
+        </p:spPr>
+        <p:style>
+          <a:lnRef idx="2">
+            <a:schemeClr val="accent1">
+              <a:shade val="50000"/>
+            </a:schemeClr>
+          </a:lnRef>
+          <a:fillRef idx="1">
+            <a:schemeClr val="accent1"/>
+          </a:fillRef>
+          <a:effectRef idx="0">
+            <a:schemeClr val="accent1"/>
+          </a:effectRef>
+          <a:fontRef idx="minor">
+            <a:schemeClr val="lt1"/>
+          </a:fontRef>
+        </p:style>
+        <p:txBody>
+          <a:bodyPr rtlCol="0" anchor="ctr"/>
+          <a:lstStyle/>
+          <a:p>
+            <a:pPr algn="ctr"/>
+            <a:r>
+              <a:rPr lang="en-US" altLang="zh-CN" sz="1100" smtClean="0">
+                <a:solidFill>
+                  <a:schemeClr val="tx1"/>
+                </a:solidFill>
+                <a:latin typeface="Times New Roman" panose="02020603050405020304" pitchFamily="18" charset="0"/>
+                <a:cs typeface="Times New Roman" panose="02020603050405020304" pitchFamily="18" charset="0"/>
+              </a:rPr>
+              <a:t>0</a:t>
+            </a:r>
+            <a:endParaRPr lang="zh-CN" altLang="en-US" sz="1100">
+              <a:solidFill>
+                <a:schemeClr val="tx1"/>
+              </a:solidFill>
+              <a:latin typeface="Times New Roman" panose="02020603050405020304" pitchFamily="18" charset="0"/>
+              <a:cs typeface="Times New Roman" panose="02020603050405020304" pitchFamily="18" charset="0"/>
+            </a:endParaRPr>
+          </a:p>
+        </p:txBody>
+      </p:sp>
+      <p:sp>
+        <p:nvSpPr>
+          <p:cNvPr id="15" name="矩形 14"/>
+          <p:cNvSpPr/>
+          <p:nvPr/>
+        </p:nvSpPr>
+        <p:spPr>
+          <a:xfrm>
+            <a:off x="2967135" y="3878985"/>
+            <a:ext cx="242596" cy="263805"/>
+          </a:xfrm>
+          <a:prstGeom prst="rect">
+            <a:avLst/>
+          </a:prstGeom>
+          <a:solidFill>
+            <a:schemeClr val="bg1"/>
+          </a:solidFill>
+          <a:ln>
+            <a:solidFill>
+              <a:schemeClr val="tx1"/>
+            </a:solidFill>
+          </a:ln>
+        </p:spPr>
+        <p:style>
+          <a:lnRef idx="2">
+            <a:schemeClr val="accent1">
+              <a:shade val="50000"/>
+            </a:schemeClr>
+          </a:lnRef>
+          <a:fillRef idx="1">
+            <a:schemeClr val="accent1"/>
+          </a:fillRef>
+          <a:effectRef idx="0">
+            <a:schemeClr val="accent1"/>
+          </a:effectRef>
+          <a:fontRef idx="minor">
+            <a:schemeClr val="lt1"/>
+          </a:fontRef>
+        </p:style>
+        <p:txBody>
+          <a:bodyPr rtlCol="0" anchor="ctr"/>
+          <a:lstStyle/>
+          <a:p>
+            <a:pPr algn="ctr"/>
+            <a:r>
+              <a:rPr lang="en-US" altLang="zh-CN" sz="1100" smtClean="0">
+                <a:solidFill>
+                  <a:schemeClr val="tx1"/>
+                </a:solidFill>
+                <a:latin typeface="Times New Roman" panose="02020603050405020304" pitchFamily="18" charset="0"/>
+                <a:cs typeface="Times New Roman" panose="02020603050405020304" pitchFamily="18" charset="0"/>
+              </a:rPr>
+              <a:t>1</a:t>
+            </a:r>
+            <a:endParaRPr lang="zh-CN" altLang="en-US" sz="1100">
+              <a:solidFill>
+                <a:schemeClr val="tx1"/>
+              </a:solidFill>
+              <a:latin typeface="Times New Roman" panose="02020603050405020304" pitchFamily="18" charset="0"/>
+              <a:cs typeface="Times New Roman" panose="02020603050405020304" pitchFamily="18" charset="0"/>
+            </a:endParaRPr>
+          </a:p>
+        </p:txBody>
+      </p:sp>
+      <p:sp>
+        <p:nvSpPr>
+          <p:cNvPr id="16" name="矩形 15"/>
+          <p:cNvSpPr/>
+          <p:nvPr/>
+        </p:nvSpPr>
+        <p:spPr>
+          <a:xfrm>
+            <a:off x="3209731" y="3878985"/>
+            <a:ext cx="242596" cy="263805"/>
+          </a:xfrm>
+          <a:prstGeom prst="rect">
+            <a:avLst/>
+          </a:prstGeom>
+          <a:solidFill>
+            <a:schemeClr val="bg1"/>
+          </a:solidFill>
+          <a:ln>
+            <a:solidFill>
+              <a:schemeClr val="tx1"/>
+            </a:solidFill>
+          </a:ln>
+        </p:spPr>
+        <p:style>
+          <a:lnRef idx="2">
+            <a:schemeClr val="accent1">
+              <a:shade val="50000"/>
+            </a:schemeClr>
+          </a:lnRef>
+          <a:fillRef idx="1">
+            <a:schemeClr val="accent1"/>
+          </a:fillRef>
+          <a:effectRef idx="0">
+            <a:schemeClr val="accent1"/>
+          </a:effectRef>
+          <a:fontRef idx="minor">
+            <a:schemeClr val="lt1"/>
+          </a:fontRef>
+        </p:style>
+        <p:txBody>
+          <a:bodyPr rtlCol="0" anchor="ctr"/>
+          <a:lstStyle/>
+          <a:p>
+            <a:pPr algn="ctr"/>
+            <a:r>
+              <a:rPr lang="en-US" altLang="zh-CN" sz="1100" smtClean="0">
+                <a:solidFill>
+                  <a:schemeClr val="tx1"/>
+                </a:solidFill>
+                <a:latin typeface="Times New Roman" panose="02020603050405020304" pitchFamily="18" charset="0"/>
+                <a:cs typeface="Times New Roman" panose="02020603050405020304" pitchFamily="18" charset="0"/>
+              </a:rPr>
+              <a:t>1</a:t>
+            </a:r>
+            <a:endParaRPr lang="zh-CN" altLang="en-US" sz="1100">
+              <a:solidFill>
+                <a:schemeClr val="tx1"/>
+              </a:solidFill>
+              <a:latin typeface="Times New Roman" panose="02020603050405020304" pitchFamily="18" charset="0"/>
+              <a:cs typeface="Times New Roman" panose="02020603050405020304" pitchFamily="18" charset="0"/>
+            </a:endParaRPr>
+          </a:p>
+        </p:txBody>
+      </p:sp>
+      <p:sp>
+        <p:nvSpPr>
+          <p:cNvPr id="17" name="矩形 16"/>
+          <p:cNvSpPr/>
+          <p:nvPr/>
+        </p:nvSpPr>
+        <p:spPr>
+          <a:xfrm>
+            <a:off x="3452327" y="3878984"/>
+            <a:ext cx="242596" cy="263805"/>
+          </a:xfrm>
+          <a:prstGeom prst="rect">
+            <a:avLst/>
+          </a:prstGeom>
+          <a:solidFill>
+            <a:schemeClr val="bg1"/>
+          </a:solidFill>
+          <a:ln>
+            <a:solidFill>
+              <a:schemeClr val="tx1"/>
+            </a:solidFill>
+          </a:ln>
+        </p:spPr>
+        <p:style>
+          <a:lnRef idx="2">
+            <a:schemeClr val="accent1">
+              <a:shade val="50000"/>
+            </a:schemeClr>
+          </a:lnRef>
+          <a:fillRef idx="1">
+            <a:schemeClr val="accent1"/>
+          </a:fillRef>
+          <a:effectRef idx="0">
+            <a:schemeClr val="accent1"/>
+          </a:effectRef>
+          <a:fontRef idx="minor">
+            <a:schemeClr val="lt1"/>
+          </a:fontRef>
+        </p:style>
+        <p:txBody>
+          <a:bodyPr rtlCol="0" anchor="ctr"/>
+          <a:lstStyle/>
+          <a:p>
+            <a:pPr algn="ctr"/>
+            <a:r>
+              <a:rPr lang="en-US" altLang="zh-CN" sz="1100" smtClean="0">
+                <a:solidFill>
+                  <a:schemeClr val="tx1"/>
+                </a:solidFill>
+                <a:latin typeface="Times New Roman" panose="02020603050405020304" pitchFamily="18" charset="0"/>
+                <a:cs typeface="Times New Roman" panose="02020603050405020304" pitchFamily="18" charset="0"/>
+              </a:rPr>
+              <a:t>1</a:t>
+            </a:r>
+            <a:endParaRPr lang="zh-CN" altLang="en-US" sz="1100">
+              <a:solidFill>
+                <a:schemeClr val="tx1"/>
+              </a:solidFill>
+              <a:latin typeface="Times New Roman" panose="02020603050405020304" pitchFamily="18" charset="0"/>
+              <a:cs typeface="Times New Roman" panose="02020603050405020304" pitchFamily="18" charset="0"/>
+            </a:endParaRPr>
+          </a:p>
+        </p:txBody>
+      </p:sp>
+      <p:sp>
+        <p:nvSpPr>
+          <p:cNvPr id="18" name="矩形 17"/>
+          <p:cNvSpPr/>
+          <p:nvPr/>
+        </p:nvSpPr>
+        <p:spPr>
+          <a:xfrm>
+            <a:off x="3694923" y="3878983"/>
+            <a:ext cx="242596" cy="263805"/>
+          </a:xfrm>
+          <a:prstGeom prst="rect">
+            <a:avLst/>
+          </a:prstGeom>
+          <a:solidFill>
+            <a:schemeClr val="bg1"/>
+          </a:solidFill>
+          <a:ln>
+            <a:solidFill>
+              <a:schemeClr val="tx1"/>
+            </a:solidFill>
+          </a:ln>
+        </p:spPr>
+        <p:style>
+          <a:lnRef idx="2">
+            <a:schemeClr val="accent1">
+              <a:shade val="50000"/>
+            </a:schemeClr>
+          </a:lnRef>
+          <a:fillRef idx="1">
+            <a:schemeClr val="accent1"/>
+          </a:fillRef>
+          <a:effectRef idx="0">
+            <a:schemeClr val="accent1"/>
+          </a:effectRef>
+          <a:fontRef idx="minor">
+            <a:schemeClr val="lt1"/>
+          </a:fontRef>
+        </p:style>
+        <p:txBody>
+          <a:bodyPr rtlCol="0" anchor="ctr"/>
+          <a:lstStyle/>
+          <a:p>
+            <a:pPr algn="ctr"/>
+            <a:r>
+              <a:rPr lang="en-US" altLang="zh-CN" sz="1100" smtClean="0">
+                <a:solidFill>
+                  <a:schemeClr val="tx1"/>
+                </a:solidFill>
+                <a:latin typeface="Times New Roman" panose="02020603050405020304" pitchFamily="18" charset="0"/>
+                <a:cs typeface="Times New Roman" panose="02020603050405020304" pitchFamily="18" charset="0"/>
+              </a:rPr>
+              <a:t>0</a:t>
+            </a:r>
+            <a:endParaRPr lang="zh-CN" altLang="en-US" sz="1100">
+              <a:solidFill>
+                <a:schemeClr val="tx1"/>
+              </a:solidFill>
+              <a:latin typeface="Times New Roman" panose="02020603050405020304" pitchFamily="18" charset="0"/>
+              <a:cs typeface="Times New Roman" panose="02020603050405020304" pitchFamily="18" charset="0"/>
+            </a:endParaRPr>
+          </a:p>
+        </p:txBody>
+      </p:sp>
+      <p:sp>
+        <p:nvSpPr>
+          <p:cNvPr id="19" name="矩形 18"/>
+          <p:cNvSpPr/>
+          <p:nvPr/>
+        </p:nvSpPr>
+        <p:spPr>
+          <a:xfrm>
+            <a:off x="3966868" y="3878987"/>
+            <a:ext cx="242596" cy="263805"/>
+          </a:xfrm>
+          <a:prstGeom prst="rect">
+            <a:avLst/>
+          </a:prstGeom>
+          <a:solidFill>
+            <a:schemeClr val="bg1"/>
+          </a:solidFill>
+          <a:ln>
+            <a:solidFill>
+              <a:schemeClr val="tx1"/>
+            </a:solidFill>
+          </a:ln>
+        </p:spPr>
+        <p:style>
+          <a:lnRef idx="2">
+            <a:schemeClr val="accent1">
+              <a:shade val="50000"/>
+            </a:schemeClr>
+          </a:lnRef>
+          <a:fillRef idx="1">
+            <a:schemeClr val="accent1"/>
+          </a:fillRef>
+          <a:effectRef idx="0">
+            <a:schemeClr val="accent1"/>
+          </a:effectRef>
+          <a:fontRef idx="minor">
+            <a:schemeClr val="lt1"/>
+          </a:fontRef>
+        </p:style>
+        <p:txBody>
+          <a:bodyPr rtlCol="0" anchor="ctr"/>
+          <a:lstStyle/>
+          <a:p>
+            <a:pPr algn="ctr"/>
+            <a:r>
+              <a:rPr lang="en-US" altLang="zh-CN" sz="1100" smtClean="0">
+                <a:solidFill>
+                  <a:schemeClr val="tx1"/>
+                </a:solidFill>
+                <a:latin typeface="Times New Roman" panose="02020603050405020304" pitchFamily="18" charset="0"/>
+                <a:cs typeface="Times New Roman" panose="02020603050405020304" pitchFamily="18" charset="0"/>
+              </a:rPr>
+              <a:t>0</a:t>
+            </a:r>
+            <a:endParaRPr lang="zh-CN" altLang="en-US" sz="1100">
+              <a:solidFill>
+                <a:schemeClr val="tx1"/>
+              </a:solidFill>
+              <a:latin typeface="Times New Roman" panose="02020603050405020304" pitchFamily="18" charset="0"/>
+              <a:cs typeface="Times New Roman" panose="02020603050405020304" pitchFamily="18" charset="0"/>
+            </a:endParaRPr>
+          </a:p>
+        </p:txBody>
+      </p:sp>
+      <p:sp>
+        <p:nvSpPr>
+          <p:cNvPr id="20" name="矩形 19"/>
+          <p:cNvSpPr/>
+          <p:nvPr/>
+        </p:nvSpPr>
+        <p:spPr>
+          <a:xfrm>
+            <a:off x="4209464" y="3878987"/>
+            <a:ext cx="242596" cy="263805"/>
+          </a:xfrm>
+          <a:prstGeom prst="rect">
+            <a:avLst/>
+          </a:prstGeom>
+          <a:solidFill>
+            <a:schemeClr val="bg1"/>
+          </a:solidFill>
+          <a:ln>
+            <a:solidFill>
+              <a:schemeClr val="tx1"/>
+            </a:solidFill>
+          </a:ln>
+        </p:spPr>
+        <p:style>
+          <a:lnRef idx="2">
+            <a:schemeClr val="accent1">
+              <a:shade val="50000"/>
+            </a:schemeClr>
+          </a:lnRef>
+          <a:fillRef idx="1">
+            <a:schemeClr val="accent1"/>
+          </a:fillRef>
+          <a:effectRef idx="0">
+            <a:schemeClr val="accent1"/>
+          </a:effectRef>
+          <a:fontRef idx="minor">
+            <a:schemeClr val="lt1"/>
+          </a:fontRef>
+        </p:style>
+        <p:txBody>
+          <a:bodyPr rtlCol="0" anchor="ctr"/>
+          <a:lstStyle/>
+          <a:p>
+            <a:pPr algn="ctr"/>
+            <a:r>
+              <a:rPr lang="en-US" altLang="zh-CN" sz="1100" smtClean="0">
+                <a:solidFill>
+                  <a:schemeClr val="tx1"/>
+                </a:solidFill>
+                <a:latin typeface="Times New Roman" panose="02020603050405020304" pitchFamily="18" charset="0"/>
+                <a:cs typeface="Times New Roman" panose="02020603050405020304" pitchFamily="18" charset="0"/>
+              </a:rPr>
+              <a:t>0</a:t>
+            </a:r>
+            <a:endParaRPr lang="zh-CN" altLang="en-US" sz="1100">
+              <a:solidFill>
+                <a:schemeClr val="tx1"/>
+              </a:solidFill>
+              <a:latin typeface="Times New Roman" panose="02020603050405020304" pitchFamily="18" charset="0"/>
+              <a:cs typeface="Times New Roman" panose="02020603050405020304" pitchFamily="18" charset="0"/>
+            </a:endParaRPr>
+          </a:p>
+        </p:txBody>
+      </p:sp>
+      <p:sp>
+        <p:nvSpPr>
+          <p:cNvPr id="21" name="矩形 20"/>
+          <p:cNvSpPr/>
+          <p:nvPr/>
+        </p:nvSpPr>
+        <p:spPr>
+          <a:xfrm>
+            <a:off x="4452060" y="3878986"/>
+            <a:ext cx="242596" cy="263805"/>
+          </a:xfrm>
+          <a:prstGeom prst="rect">
+            <a:avLst/>
+          </a:prstGeom>
+          <a:solidFill>
+            <a:schemeClr val="bg1"/>
+          </a:solidFill>
+          <a:ln>
+            <a:solidFill>
+              <a:schemeClr val="tx1"/>
+            </a:solidFill>
+          </a:ln>
+        </p:spPr>
+        <p:style>
+          <a:lnRef idx="2">
+            <a:schemeClr val="accent1">
+              <a:shade val="50000"/>
+            </a:schemeClr>
+          </a:lnRef>
+          <a:fillRef idx="1">
+            <a:schemeClr val="accent1"/>
+          </a:fillRef>
+          <a:effectRef idx="0">
+            <a:schemeClr val="accent1"/>
+          </a:effectRef>
+          <a:fontRef idx="minor">
+            <a:schemeClr val="lt1"/>
+          </a:fontRef>
+        </p:style>
+        <p:txBody>
+          <a:bodyPr rtlCol="0" anchor="ctr"/>
+          <a:lstStyle/>
+          <a:p>
+            <a:pPr algn="ctr"/>
+            <a:r>
+              <a:rPr lang="en-US" altLang="zh-CN" sz="1100" smtClean="0">
+                <a:solidFill>
+                  <a:schemeClr val="tx1"/>
+                </a:solidFill>
+                <a:latin typeface="Times New Roman" panose="02020603050405020304" pitchFamily="18" charset="0"/>
+                <a:cs typeface="Times New Roman" panose="02020603050405020304" pitchFamily="18" charset="0"/>
+              </a:rPr>
+              <a:t>0</a:t>
+            </a:r>
+            <a:endParaRPr lang="zh-CN" altLang="en-US" sz="1100">
+              <a:solidFill>
+                <a:schemeClr val="tx1"/>
+              </a:solidFill>
+              <a:latin typeface="Times New Roman" panose="02020603050405020304" pitchFamily="18" charset="0"/>
+              <a:cs typeface="Times New Roman" panose="02020603050405020304" pitchFamily="18" charset="0"/>
+            </a:endParaRPr>
+          </a:p>
+        </p:txBody>
+      </p:sp>
+      <p:sp>
+        <p:nvSpPr>
+          <p:cNvPr id="22" name="矩形 21"/>
+          <p:cNvSpPr/>
+          <p:nvPr/>
+        </p:nvSpPr>
+        <p:spPr>
+          <a:xfrm>
+            <a:off x="4694656" y="3878986"/>
+            <a:ext cx="242596" cy="263805"/>
+          </a:xfrm>
+          <a:prstGeom prst="rect">
+            <a:avLst/>
+          </a:prstGeom>
+          <a:solidFill>
+            <a:schemeClr val="bg1"/>
+          </a:solidFill>
+          <a:ln>
+            <a:solidFill>
+              <a:schemeClr val="tx1"/>
+            </a:solidFill>
+          </a:ln>
+        </p:spPr>
+        <p:style>
+          <a:lnRef idx="2">
+            <a:schemeClr val="accent1">
+              <a:shade val="50000"/>
+            </a:schemeClr>
+          </a:lnRef>
+          <a:fillRef idx="1">
+            <a:schemeClr val="accent1"/>
+          </a:fillRef>
+          <a:effectRef idx="0">
+            <a:schemeClr val="accent1"/>
+          </a:effectRef>
+          <a:fontRef idx="minor">
+            <a:schemeClr val="lt1"/>
+          </a:fontRef>
+        </p:style>
+        <p:txBody>
+          <a:bodyPr rtlCol="0" anchor="ctr"/>
+          <a:lstStyle/>
+          <a:p>
+            <a:pPr algn="ctr"/>
+            <a:r>
+              <a:rPr lang="en-US" altLang="zh-CN" sz="1100" smtClean="0">
+                <a:solidFill>
+                  <a:schemeClr val="tx1"/>
+                </a:solidFill>
+                <a:latin typeface="Times New Roman" panose="02020603050405020304" pitchFamily="18" charset="0"/>
+                <a:cs typeface="Times New Roman" panose="02020603050405020304" pitchFamily="18" charset="0"/>
+              </a:rPr>
+              <a:t>0</a:t>
+            </a:r>
+            <a:endParaRPr lang="zh-CN" altLang="en-US" sz="1100">
+              <a:solidFill>
+                <a:schemeClr val="tx1"/>
+              </a:solidFill>
+              <a:latin typeface="Times New Roman" panose="02020603050405020304" pitchFamily="18" charset="0"/>
+              <a:cs typeface="Times New Roman" panose="02020603050405020304" pitchFamily="18" charset="0"/>
+            </a:endParaRPr>
+          </a:p>
+        </p:txBody>
+      </p:sp>
+      <p:sp>
+        <p:nvSpPr>
+          <p:cNvPr id="23" name="矩形 22"/>
+          <p:cNvSpPr/>
+          <p:nvPr/>
+        </p:nvSpPr>
+        <p:spPr>
+          <a:xfrm>
+            <a:off x="4937252" y="3878985"/>
+            <a:ext cx="242596" cy="263805"/>
+          </a:xfrm>
+          <a:prstGeom prst="rect">
+            <a:avLst/>
+          </a:prstGeom>
+          <a:solidFill>
+            <a:schemeClr val="bg1"/>
+          </a:solidFill>
+          <a:ln>
+            <a:solidFill>
+              <a:schemeClr val="tx1"/>
+            </a:solidFill>
+          </a:ln>
+        </p:spPr>
+        <p:style>
+          <a:lnRef idx="2">
+            <a:schemeClr val="accent1">
+              <a:shade val="50000"/>
+            </a:schemeClr>
+          </a:lnRef>
+          <a:fillRef idx="1">
+            <a:schemeClr val="accent1"/>
+          </a:fillRef>
+          <a:effectRef idx="0">
+            <a:schemeClr val="accent1"/>
+          </a:effectRef>
+          <a:fontRef idx="minor">
+            <a:schemeClr val="lt1"/>
+          </a:fontRef>
+        </p:style>
+        <p:txBody>
+          <a:bodyPr rtlCol="0" anchor="ctr"/>
+          <a:lstStyle/>
+          <a:p>
+            <a:pPr algn="ctr"/>
+            <a:r>
+              <a:rPr lang="en-US" altLang="zh-CN" sz="1100" smtClean="0">
+                <a:solidFill>
+                  <a:schemeClr val="tx1"/>
+                </a:solidFill>
+                <a:latin typeface="Times New Roman" panose="02020603050405020304" pitchFamily="18" charset="0"/>
+                <a:cs typeface="Times New Roman" panose="02020603050405020304" pitchFamily="18" charset="0"/>
+              </a:rPr>
+              <a:t>0</a:t>
+            </a:r>
+            <a:endParaRPr lang="zh-CN" altLang="en-US" sz="1100">
+              <a:solidFill>
+                <a:schemeClr val="tx1"/>
+              </a:solidFill>
+              <a:latin typeface="Times New Roman" panose="02020603050405020304" pitchFamily="18" charset="0"/>
+              <a:cs typeface="Times New Roman" panose="02020603050405020304" pitchFamily="18" charset="0"/>
+            </a:endParaRPr>
+          </a:p>
+        </p:txBody>
+      </p:sp>
+      <p:sp>
+        <p:nvSpPr>
+          <p:cNvPr id="24" name="矩形 23"/>
+          <p:cNvSpPr/>
+          <p:nvPr/>
+        </p:nvSpPr>
+        <p:spPr>
+          <a:xfrm>
+            <a:off x="5179848" y="3878985"/>
+            <a:ext cx="242596" cy="263805"/>
+          </a:xfrm>
+          <a:prstGeom prst="rect">
+            <a:avLst/>
+          </a:prstGeom>
+          <a:solidFill>
+            <a:schemeClr val="bg1"/>
+          </a:solidFill>
+          <a:ln>
+            <a:solidFill>
+              <a:schemeClr val="tx1"/>
+            </a:solidFill>
+          </a:ln>
+        </p:spPr>
+        <p:style>
+          <a:lnRef idx="2">
+            <a:schemeClr val="accent1">
+              <a:shade val="50000"/>
+            </a:schemeClr>
+          </a:lnRef>
+          <a:fillRef idx="1">
+            <a:schemeClr val="accent1"/>
+          </a:fillRef>
+          <a:effectRef idx="0">
+            <a:schemeClr val="accent1"/>
+          </a:effectRef>
+          <a:fontRef idx="minor">
+            <a:schemeClr val="lt1"/>
+          </a:fontRef>
+        </p:style>
+        <p:txBody>
+          <a:bodyPr rtlCol="0" anchor="ctr"/>
+          <a:lstStyle/>
+          <a:p>
+            <a:pPr algn="ctr"/>
+            <a:r>
+              <a:rPr lang="en-US" altLang="zh-CN" sz="1100" smtClean="0">
+                <a:solidFill>
+                  <a:schemeClr val="tx1"/>
+                </a:solidFill>
+                <a:latin typeface="Times New Roman" panose="02020603050405020304" pitchFamily="18" charset="0"/>
+                <a:cs typeface="Times New Roman" panose="02020603050405020304" pitchFamily="18" charset="0"/>
+              </a:rPr>
+              <a:t>0</a:t>
+            </a:r>
+            <a:endParaRPr lang="zh-CN" altLang="en-US" sz="1100">
+              <a:solidFill>
+                <a:schemeClr val="tx1"/>
+              </a:solidFill>
+              <a:latin typeface="Times New Roman" panose="02020603050405020304" pitchFamily="18" charset="0"/>
+              <a:cs typeface="Times New Roman" panose="02020603050405020304" pitchFamily="18" charset="0"/>
+            </a:endParaRPr>
+          </a:p>
+        </p:txBody>
+      </p:sp>
+      <p:sp>
+        <p:nvSpPr>
+          <p:cNvPr id="25" name="矩形 24"/>
+          <p:cNvSpPr/>
+          <p:nvPr/>
+        </p:nvSpPr>
+        <p:spPr>
+          <a:xfrm>
+            <a:off x="5422444" y="3878984"/>
+            <a:ext cx="242596" cy="263805"/>
+          </a:xfrm>
+          <a:prstGeom prst="rect">
+            <a:avLst/>
+          </a:prstGeom>
+          <a:solidFill>
+            <a:schemeClr val="bg1"/>
+          </a:solidFill>
+          <a:ln>
+            <a:solidFill>
+              <a:schemeClr val="tx1"/>
+            </a:solidFill>
+          </a:ln>
+        </p:spPr>
+        <p:style>
+          <a:lnRef idx="2">
+            <a:schemeClr val="accent1">
+              <a:shade val="50000"/>
+            </a:schemeClr>
+          </a:lnRef>
+          <a:fillRef idx="1">
+            <a:schemeClr val="accent1"/>
+          </a:fillRef>
+          <a:effectRef idx="0">
+            <a:schemeClr val="accent1"/>
+          </a:effectRef>
+          <a:fontRef idx="minor">
+            <a:schemeClr val="lt1"/>
+          </a:fontRef>
+        </p:style>
+        <p:txBody>
+          <a:bodyPr rtlCol="0" anchor="ctr"/>
+          <a:lstStyle/>
+          <a:p>
+            <a:pPr algn="ctr"/>
+            <a:r>
+              <a:rPr lang="en-US" altLang="zh-CN" sz="1100" smtClean="0">
+                <a:solidFill>
+                  <a:schemeClr val="tx1"/>
+                </a:solidFill>
+                <a:latin typeface="Times New Roman" panose="02020603050405020304" pitchFamily="18" charset="0"/>
+                <a:cs typeface="Times New Roman" panose="02020603050405020304" pitchFamily="18" charset="0"/>
+              </a:rPr>
+              <a:t>0</a:t>
+            </a:r>
+            <a:endParaRPr lang="zh-CN" altLang="en-US" sz="1100">
+              <a:solidFill>
+                <a:schemeClr val="tx1"/>
+              </a:solidFill>
+              <a:latin typeface="Times New Roman" panose="02020603050405020304" pitchFamily="18" charset="0"/>
+              <a:cs typeface="Times New Roman" panose="02020603050405020304" pitchFamily="18" charset="0"/>
+            </a:endParaRPr>
+          </a:p>
+        </p:txBody>
+      </p:sp>
+      <p:sp>
+        <p:nvSpPr>
+          <p:cNvPr id="26" name="矩形 25"/>
+          <p:cNvSpPr/>
+          <p:nvPr/>
+        </p:nvSpPr>
+        <p:spPr>
+          <a:xfrm>
+            <a:off x="5665040" y="3878983"/>
+            <a:ext cx="242596" cy="263805"/>
+          </a:xfrm>
+          <a:prstGeom prst="rect">
+            <a:avLst/>
+          </a:prstGeom>
+          <a:solidFill>
+            <a:schemeClr val="bg1"/>
+          </a:solidFill>
+          <a:ln>
+            <a:solidFill>
+              <a:schemeClr val="tx1"/>
+            </a:solidFill>
+          </a:ln>
+        </p:spPr>
+        <p:style>
+          <a:lnRef idx="2">
+            <a:schemeClr val="accent1">
+              <a:shade val="50000"/>
+            </a:schemeClr>
+          </a:lnRef>
+          <a:fillRef idx="1">
+            <a:schemeClr val="accent1"/>
+          </a:fillRef>
+          <a:effectRef idx="0">
+            <a:schemeClr val="accent1"/>
+          </a:effectRef>
+          <a:fontRef idx="minor">
+            <a:schemeClr val="lt1"/>
+          </a:fontRef>
+        </p:style>
+        <p:txBody>
+          <a:bodyPr rtlCol="0" anchor="ctr"/>
+          <a:lstStyle/>
+          <a:p>
+            <a:pPr algn="ctr"/>
+            <a:r>
+              <a:rPr lang="en-US" altLang="zh-CN" sz="1100" smtClean="0">
+                <a:solidFill>
+                  <a:schemeClr val="tx1"/>
+                </a:solidFill>
+                <a:latin typeface="Times New Roman" panose="02020603050405020304" pitchFamily="18" charset="0"/>
+                <a:cs typeface="Times New Roman" panose="02020603050405020304" pitchFamily="18" charset="0"/>
+              </a:rPr>
+              <a:t>0</a:t>
+            </a:r>
+            <a:endParaRPr lang="zh-CN" altLang="en-US" sz="1100">
+              <a:solidFill>
+                <a:schemeClr val="tx1"/>
+              </a:solidFill>
+              <a:latin typeface="Times New Roman" panose="02020603050405020304" pitchFamily="18" charset="0"/>
+              <a:cs typeface="Times New Roman" panose="02020603050405020304" pitchFamily="18" charset="0"/>
+            </a:endParaRPr>
+          </a:p>
+        </p:txBody>
+      </p:sp>
+      <p:sp>
+        <p:nvSpPr>
+          <p:cNvPr id="27" name="矩形 26"/>
+          <p:cNvSpPr/>
+          <p:nvPr/>
+        </p:nvSpPr>
+        <p:spPr>
+          <a:xfrm>
+            <a:off x="5936985" y="3878985"/>
+            <a:ext cx="242596" cy="263805"/>
+          </a:xfrm>
+          <a:prstGeom prst="rect">
+            <a:avLst/>
+          </a:prstGeom>
+          <a:solidFill>
+            <a:schemeClr val="bg1"/>
+          </a:solidFill>
+          <a:ln>
+            <a:solidFill>
+              <a:schemeClr val="tx1"/>
+            </a:solidFill>
+          </a:ln>
+        </p:spPr>
+        <p:style>
+          <a:lnRef idx="2">
+            <a:schemeClr val="accent1">
+              <a:shade val="50000"/>
+            </a:schemeClr>
+          </a:lnRef>
+          <a:fillRef idx="1">
+            <a:schemeClr val="accent1"/>
+          </a:fillRef>
+          <a:effectRef idx="0">
+            <a:schemeClr val="accent1"/>
+          </a:effectRef>
+          <a:fontRef idx="minor">
+            <a:schemeClr val="lt1"/>
+          </a:fontRef>
+        </p:style>
+        <p:txBody>
+          <a:bodyPr rtlCol="0" anchor="ctr"/>
+          <a:lstStyle/>
+          <a:p>
+            <a:pPr algn="ctr"/>
+            <a:r>
+              <a:rPr lang="en-US" altLang="zh-CN" sz="1100" smtClean="0">
+                <a:solidFill>
+                  <a:schemeClr val="tx1"/>
+                </a:solidFill>
+                <a:latin typeface="Times New Roman" panose="02020603050405020304" pitchFamily="18" charset="0"/>
+                <a:cs typeface="Times New Roman" panose="02020603050405020304" pitchFamily="18" charset="0"/>
+              </a:rPr>
+              <a:t>1</a:t>
+            </a:r>
+            <a:endParaRPr lang="zh-CN" altLang="en-US" sz="1100">
+              <a:solidFill>
+                <a:schemeClr val="tx1"/>
+              </a:solidFill>
+              <a:latin typeface="Times New Roman" panose="02020603050405020304" pitchFamily="18" charset="0"/>
+              <a:cs typeface="Times New Roman" panose="02020603050405020304" pitchFamily="18" charset="0"/>
+            </a:endParaRPr>
+          </a:p>
+        </p:txBody>
+      </p:sp>
+      <p:sp>
+        <p:nvSpPr>
+          <p:cNvPr id="28" name="矩形 27"/>
+          <p:cNvSpPr/>
+          <p:nvPr/>
+        </p:nvSpPr>
+        <p:spPr>
+          <a:xfrm>
+            <a:off x="6179581" y="3878985"/>
+            <a:ext cx="242596" cy="263805"/>
+          </a:xfrm>
+          <a:prstGeom prst="rect">
+            <a:avLst/>
+          </a:prstGeom>
+          <a:solidFill>
+            <a:schemeClr val="bg1"/>
+          </a:solidFill>
+          <a:ln>
+            <a:solidFill>
+              <a:schemeClr val="tx1"/>
+            </a:solidFill>
+          </a:ln>
+        </p:spPr>
+        <p:style>
+          <a:lnRef idx="2">
+            <a:schemeClr val="accent1">
+              <a:shade val="50000"/>
+            </a:schemeClr>
+          </a:lnRef>
+          <a:fillRef idx="1">
+            <a:schemeClr val="accent1"/>
+          </a:fillRef>
+          <a:effectRef idx="0">
+            <a:schemeClr val="accent1"/>
+          </a:effectRef>
+          <a:fontRef idx="minor">
+            <a:schemeClr val="lt1"/>
+          </a:fontRef>
+        </p:style>
+        <p:txBody>
+          <a:bodyPr rtlCol="0" anchor="ctr"/>
+          <a:lstStyle/>
+          <a:p>
+            <a:pPr algn="ctr"/>
+            <a:r>
+              <a:rPr lang="en-US" altLang="zh-CN" sz="1100" smtClean="0">
+                <a:solidFill>
+                  <a:schemeClr val="tx1"/>
+                </a:solidFill>
+                <a:latin typeface="Times New Roman" panose="02020603050405020304" pitchFamily="18" charset="0"/>
+                <a:cs typeface="Times New Roman" panose="02020603050405020304" pitchFamily="18" charset="0"/>
+              </a:rPr>
+              <a:t>0</a:t>
+            </a:r>
+            <a:endParaRPr lang="zh-CN" altLang="en-US" sz="1100">
+              <a:solidFill>
+                <a:schemeClr val="tx1"/>
+              </a:solidFill>
+              <a:latin typeface="Times New Roman" panose="02020603050405020304" pitchFamily="18" charset="0"/>
+              <a:cs typeface="Times New Roman" panose="02020603050405020304" pitchFamily="18" charset="0"/>
+            </a:endParaRPr>
+          </a:p>
+        </p:txBody>
+      </p:sp>
+      <p:sp>
+        <p:nvSpPr>
+          <p:cNvPr id="29" name="矩形 28"/>
+          <p:cNvSpPr/>
+          <p:nvPr/>
+        </p:nvSpPr>
+        <p:spPr>
+          <a:xfrm>
+            <a:off x="6422177" y="3878984"/>
+            <a:ext cx="242596" cy="263805"/>
+          </a:xfrm>
+          <a:prstGeom prst="rect">
+            <a:avLst/>
+          </a:prstGeom>
+          <a:solidFill>
+            <a:schemeClr val="bg1"/>
+          </a:solidFill>
+          <a:ln>
+            <a:solidFill>
+              <a:schemeClr val="tx1"/>
+            </a:solidFill>
+          </a:ln>
+        </p:spPr>
+        <p:style>
+          <a:lnRef idx="2">
+            <a:schemeClr val="accent1">
+              <a:shade val="50000"/>
+            </a:schemeClr>
+          </a:lnRef>
+          <a:fillRef idx="1">
+            <a:schemeClr val="accent1"/>
+          </a:fillRef>
+          <a:effectRef idx="0">
+            <a:schemeClr val="accent1"/>
+          </a:effectRef>
+          <a:fontRef idx="minor">
+            <a:schemeClr val="lt1"/>
+          </a:fontRef>
+        </p:style>
+        <p:txBody>
+          <a:bodyPr rtlCol="0" anchor="ctr"/>
+          <a:lstStyle/>
+          <a:p>
+            <a:pPr algn="ctr"/>
+            <a:r>
+              <a:rPr lang="en-US" altLang="zh-CN" sz="1100" smtClean="0">
+                <a:solidFill>
+                  <a:schemeClr val="tx1"/>
+                </a:solidFill>
+                <a:latin typeface="Times New Roman" panose="02020603050405020304" pitchFamily="18" charset="0"/>
+                <a:cs typeface="Times New Roman" panose="02020603050405020304" pitchFamily="18" charset="0"/>
+              </a:rPr>
+              <a:t>1</a:t>
+            </a:r>
+            <a:endParaRPr lang="zh-CN" altLang="en-US" sz="1100">
+              <a:solidFill>
+                <a:schemeClr val="tx1"/>
+              </a:solidFill>
+              <a:latin typeface="Times New Roman" panose="02020603050405020304" pitchFamily="18" charset="0"/>
+              <a:cs typeface="Times New Roman" panose="02020603050405020304" pitchFamily="18" charset="0"/>
+            </a:endParaRPr>
+          </a:p>
+        </p:txBody>
+      </p:sp>
+      <p:sp>
+        <p:nvSpPr>
+          <p:cNvPr id="30" name="矩形 29"/>
+          <p:cNvSpPr/>
+          <p:nvPr/>
+        </p:nvSpPr>
+        <p:spPr>
+          <a:xfrm>
+            <a:off x="6664773" y="3878984"/>
+            <a:ext cx="242596" cy="263805"/>
+          </a:xfrm>
+          <a:prstGeom prst="rect">
+            <a:avLst/>
+          </a:prstGeom>
+          <a:solidFill>
+            <a:schemeClr val="bg1"/>
+          </a:solidFill>
+          <a:ln>
+            <a:solidFill>
+              <a:schemeClr val="tx1"/>
+            </a:solidFill>
+          </a:ln>
+        </p:spPr>
+        <p:style>
+          <a:lnRef idx="2">
+            <a:schemeClr val="accent1">
+              <a:shade val="50000"/>
+            </a:schemeClr>
+          </a:lnRef>
+          <a:fillRef idx="1">
+            <a:schemeClr val="accent1"/>
+          </a:fillRef>
+          <a:effectRef idx="0">
+            <a:schemeClr val="accent1"/>
+          </a:effectRef>
+          <a:fontRef idx="minor">
+            <a:schemeClr val="lt1"/>
+          </a:fontRef>
+        </p:style>
+        <p:txBody>
+          <a:bodyPr rtlCol="0" anchor="ctr"/>
+          <a:lstStyle/>
+          <a:p>
+            <a:pPr algn="ctr"/>
+            <a:r>
+              <a:rPr lang="en-US" altLang="zh-CN" sz="1100" smtClean="0">
+                <a:solidFill>
+                  <a:schemeClr val="tx1"/>
+                </a:solidFill>
+                <a:latin typeface="Times New Roman" panose="02020603050405020304" pitchFamily="18" charset="0"/>
+                <a:cs typeface="Times New Roman" panose="02020603050405020304" pitchFamily="18" charset="0"/>
+              </a:rPr>
+              <a:t>0</a:t>
+            </a:r>
+            <a:endParaRPr lang="zh-CN" altLang="en-US" sz="1100">
+              <a:solidFill>
+                <a:schemeClr val="tx1"/>
+              </a:solidFill>
+              <a:latin typeface="Times New Roman" panose="02020603050405020304" pitchFamily="18" charset="0"/>
+              <a:cs typeface="Times New Roman" panose="02020603050405020304" pitchFamily="18" charset="0"/>
+            </a:endParaRPr>
+          </a:p>
+        </p:txBody>
+      </p:sp>
+      <p:sp>
+        <p:nvSpPr>
+          <p:cNvPr id="31" name="矩形 30"/>
+          <p:cNvSpPr/>
+          <p:nvPr/>
+        </p:nvSpPr>
+        <p:spPr>
+          <a:xfrm>
+            <a:off x="6907369" y="3878983"/>
+            <a:ext cx="242596" cy="263805"/>
+          </a:xfrm>
+          <a:prstGeom prst="rect">
+            <a:avLst/>
+          </a:prstGeom>
+          <a:solidFill>
+            <a:schemeClr val="bg1"/>
+          </a:solidFill>
+          <a:ln>
+            <a:solidFill>
+              <a:schemeClr val="tx1"/>
+            </a:solidFill>
+          </a:ln>
+        </p:spPr>
+        <p:style>
+          <a:lnRef idx="2">
+            <a:schemeClr val="accent1">
+              <a:shade val="50000"/>
+            </a:schemeClr>
+          </a:lnRef>
+          <a:fillRef idx="1">
+            <a:schemeClr val="accent1"/>
+          </a:fillRef>
+          <a:effectRef idx="0">
+            <a:schemeClr val="accent1"/>
+          </a:effectRef>
+          <a:fontRef idx="minor">
+            <a:schemeClr val="lt1"/>
+          </a:fontRef>
+        </p:style>
+        <p:txBody>
+          <a:bodyPr rtlCol="0" anchor="ctr"/>
+          <a:lstStyle/>
+          <a:p>
+            <a:pPr algn="ctr"/>
+            <a:r>
+              <a:rPr lang="en-US" altLang="zh-CN" sz="1100" smtClean="0">
+                <a:solidFill>
+                  <a:schemeClr val="tx1"/>
+                </a:solidFill>
+                <a:latin typeface="Times New Roman" panose="02020603050405020304" pitchFamily="18" charset="0"/>
+                <a:cs typeface="Times New Roman" panose="02020603050405020304" pitchFamily="18" charset="0"/>
+              </a:rPr>
+              <a:t>0</a:t>
+            </a:r>
+            <a:endParaRPr lang="zh-CN" altLang="en-US" sz="1100">
+              <a:solidFill>
+                <a:schemeClr val="tx1"/>
+              </a:solidFill>
+              <a:latin typeface="Times New Roman" panose="02020603050405020304" pitchFamily="18" charset="0"/>
+              <a:cs typeface="Times New Roman" panose="02020603050405020304" pitchFamily="18" charset="0"/>
+            </a:endParaRPr>
+          </a:p>
+        </p:txBody>
+      </p:sp>
+      <p:sp>
+        <p:nvSpPr>
+          <p:cNvPr id="32" name="矩形 31"/>
+          <p:cNvSpPr/>
+          <p:nvPr/>
+        </p:nvSpPr>
+        <p:spPr>
+          <a:xfrm>
+            <a:off x="7149965" y="3878983"/>
+            <a:ext cx="242596" cy="263805"/>
+          </a:xfrm>
+          <a:prstGeom prst="rect">
+            <a:avLst/>
+          </a:prstGeom>
+          <a:solidFill>
+            <a:schemeClr val="bg1"/>
+          </a:solidFill>
+          <a:ln>
+            <a:solidFill>
+              <a:schemeClr val="tx1"/>
+            </a:solidFill>
+          </a:ln>
+        </p:spPr>
+        <p:style>
+          <a:lnRef idx="2">
+            <a:schemeClr val="accent1">
+              <a:shade val="50000"/>
+            </a:schemeClr>
+          </a:lnRef>
+          <a:fillRef idx="1">
+            <a:schemeClr val="accent1"/>
+          </a:fillRef>
+          <a:effectRef idx="0">
+            <a:schemeClr val="accent1"/>
+          </a:effectRef>
+          <a:fontRef idx="minor">
+            <a:schemeClr val="lt1"/>
+          </a:fontRef>
+        </p:style>
+        <p:txBody>
+          <a:bodyPr rtlCol="0" anchor="ctr"/>
+          <a:lstStyle/>
+          <a:p>
+            <a:pPr algn="ctr"/>
+            <a:r>
+              <a:rPr lang="en-US" altLang="zh-CN" sz="1100" smtClean="0">
+                <a:solidFill>
+                  <a:schemeClr val="tx1"/>
+                </a:solidFill>
+                <a:latin typeface="Times New Roman" panose="02020603050405020304" pitchFamily="18" charset="0"/>
+                <a:cs typeface="Times New Roman" panose="02020603050405020304" pitchFamily="18" charset="0"/>
+              </a:rPr>
+              <a:t>1</a:t>
+            </a:r>
+            <a:endParaRPr lang="zh-CN" altLang="en-US" sz="1100">
+              <a:solidFill>
+                <a:schemeClr val="tx1"/>
+              </a:solidFill>
+              <a:latin typeface="Times New Roman" panose="02020603050405020304" pitchFamily="18" charset="0"/>
+              <a:cs typeface="Times New Roman" panose="02020603050405020304" pitchFamily="18" charset="0"/>
+            </a:endParaRPr>
+          </a:p>
+        </p:txBody>
+      </p:sp>
+      <p:sp>
+        <p:nvSpPr>
+          <p:cNvPr id="33" name="矩形 32"/>
+          <p:cNvSpPr/>
+          <p:nvPr/>
+        </p:nvSpPr>
+        <p:spPr>
+          <a:xfrm>
+            <a:off x="7392561" y="3878982"/>
+            <a:ext cx="242596" cy="263805"/>
+          </a:xfrm>
+          <a:prstGeom prst="rect">
+            <a:avLst/>
+          </a:prstGeom>
+          <a:solidFill>
+            <a:schemeClr val="bg1"/>
+          </a:solidFill>
+          <a:ln>
+            <a:solidFill>
+              <a:schemeClr val="tx1"/>
+            </a:solidFill>
+          </a:ln>
+        </p:spPr>
+        <p:style>
+          <a:lnRef idx="2">
+            <a:schemeClr val="accent1">
+              <a:shade val="50000"/>
+            </a:schemeClr>
+          </a:lnRef>
+          <a:fillRef idx="1">
+            <a:schemeClr val="accent1"/>
+          </a:fillRef>
+          <a:effectRef idx="0">
+            <a:schemeClr val="accent1"/>
+          </a:effectRef>
+          <a:fontRef idx="minor">
+            <a:schemeClr val="lt1"/>
+          </a:fontRef>
+        </p:style>
+        <p:txBody>
+          <a:bodyPr rtlCol="0" anchor="ctr"/>
+          <a:lstStyle/>
+          <a:p>
+            <a:pPr algn="ctr"/>
+            <a:r>
+              <a:rPr lang="en-US" altLang="zh-CN" sz="1100" smtClean="0">
+                <a:solidFill>
+                  <a:schemeClr val="tx1"/>
+                </a:solidFill>
+                <a:latin typeface="Times New Roman" panose="02020603050405020304" pitchFamily="18" charset="0"/>
+                <a:cs typeface="Times New Roman" panose="02020603050405020304" pitchFamily="18" charset="0"/>
+              </a:rPr>
+              <a:t>1</a:t>
+            </a:r>
+            <a:endParaRPr lang="zh-CN" altLang="en-US" sz="1100">
+              <a:solidFill>
+                <a:schemeClr val="tx1"/>
+              </a:solidFill>
+              <a:latin typeface="Times New Roman" panose="02020603050405020304" pitchFamily="18" charset="0"/>
+              <a:cs typeface="Times New Roman" panose="02020603050405020304" pitchFamily="18" charset="0"/>
+            </a:endParaRPr>
+          </a:p>
+        </p:txBody>
+      </p:sp>
+      <p:sp>
+        <p:nvSpPr>
+          <p:cNvPr id="34" name="矩形 33"/>
+          <p:cNvSpPr/>
+          <p:nvPr/>
+        </p:nvSpPr>
+        <p:spPr>
+          <a:xfrm>
+            <a:off x="7635157" y="3878981"/>
+            <a:ext cx="242596" cy="263805"/>
+          </a:xfrm>
+          <a:prstGeom prst="rect">
+            <a:avLst/>
+          </a:prstGeom>
+          <a:solidFill>
+            <a:schemeClr val="bg1"/>
+          </a:solidFill>
+          <a:ln>
+            <a:solidFill>
+              <a:schemeClr val="tx1"/>
+            </a:solidFill>
+          </a:ln>
+        </p:spPr>
+        <p:style>
+          <a:lnRef idx="2">
+            <a:schemeClr val="accent1">
+              <a:shade val="50000"/>
+            </a:schemeClr>
+          </a:lnRef>
+          <a:fillRef idx="1">
+            <a:schemeClr val="accent1"/>
+          </a:fillRef>
+          <a:effectRef idx="0">
+            <a:schemeClr val="accent1"/>
+          </a:effectRef>
+          <a:fontRef idx="minor">
+            <a:schemeClr val="lt1"/>
+          </a:fontRef>
+        </p:style>
+        <p:txBody>
+          <a:bodyPr rtlCol="0" anchor="ctr"/>
+          <a:lstStyle/>
+          <a:p>
+            <a:pPr algn="ctr"/>
+            <a:r>
+              <a:rPr lang="en-US" altLang="zh-CN" sz="1100" smtClean="0">
+                <a:solidFill>
+                  <a:schemeClr val="tx1"/>
+                </a:solidFill>
+                <a:latin typeface="Times New Roman" panose="02020603050405020304" pitchFamily="18" charset="0"/>
+                <a:cs typeface="Times New Roman" panose="02020603050405020304" pitchFamily="18" charset="0"/>
+              </a:rPr>
+              <a:t>1</a:t>
+            </a:r>
+            <a:endParaRPr lang="zh-CN" altLang="en-US" sz="1100">
+              <a:solidFill>
+                <a:schemeClr val="tx1"/>
+              </a:solidFill>
+              <a:latin typeface="Times New Roman" panose="02020603050405020304" pitchFamily="18" charset="0"/>
+              <a:cs typeface="Times New Roman" panose="02020603050405020304" pitchFamily="18" charset="0"/>
+            </a:endParaRPr>
+          </a:p>
+        </p:txBody>
+      </p:sp>
+      <p:sp>
+        <p:nvSpPr>
+          <p:cNvPr id="35" name="矩形 34"/>
+          <p:cNvSpPr/>
+          <p:nvPr/>
+        </p:nvSpPr>
+        <p:spPr>
+          <a:xfrm>
+            <a:off x="7907102" y="3878985"/>
+            <a:ext cx="242596" cy="263805"/>
+          </a:xfrm>
+          <a:prstGeom prst="rect">
+            <a:avLst/>
+          </a:prstGeom>
+          <a:solidFill>
+            <a:schemeClr val="bg1"/>
+          </a:solidFill>
+          <a:ln>
+            <a:solidFill>
+              <a:schemeClr val="tx1"/>
+            </a:solidFill>
+          </a:ln>
+        </p:spPr>
+        <p:style>
+          <a:lnRef idx="2">
+            <a:schemeClr val="accent1">
+              <a:shade val="50000"/>
+            </a:schemeClr>
+          </a:lnRef>
+          <a:fillRef idx="1">
+            <a:schemeClr val="accent1"/>
+          </a:fillRef>
+          <a:effectRef idx="0">
+            <a:schemeClr val="accent1"/>
+          </a:effectRef>
+          <a:fontRef idx="minor">
+            <a:schemeClr val="lt1"/>
+          </a:fontRef>
+        </p:style>
+        <p:txBody>
+          <a:bodyPr rtlCol="0" anchor="ctr"/>
+          <a:lstStyle/>
+          <a:p>
+            <a:pPr algn="ctr"/>
+            <a:r>
+              <a:rPr lang="en-US" altLang="zh-CN" sz="1100" smtClean="0">
+                <a:solidFill>
+                  <a:schemeClr val="tx1"/>
+                </a:solidFill>
+                <a:latin typeface="Times New Roman" panose="02020603050405020304" pitchFamily="18" charset="0"/>
+                <a:cs typeface="Times New Roman" panose="02020603050405020304" pitchFamily="18" charset="0"/>
+              </a:rPr>
+              <a:t>1</a:t>
+            </a:r>
+            <a:endParaRPr lang="zh-CN" altLang="en-US" sz="1100">
+              <a:solidFill>
+                <a:schemeClr val="tx1"/>
+              </a:solidFill>
+              <a:latin typeface="Times New Roman" panose="02020603050405020304" pitchFamily="18" charset="0"/>
+              <a:cs typeface="Times New Roman" panose="02020603050405020304" pitchFamily="18" charset="0"/>
+            </a:endParaRPr>
+          </a:p>
+        </p:txBody>
+      </p:sp>
+      <p:sp>
+        <p:nvSpPr>
+          <p:cNvPr id="36" name="矩形 35"/>
+          <p:cNvSpPr/>
+          <p:nvPr/>
+        </p:nvSpPr>
+        <p:spPr>
+          <a:xfrm>
+            <a:off x="8149698" y="3878985"/>
+            <a:ext cx="242596" cy="263805"/>
+          </a:xfrm>
+          <a:prstGeom prst="rect">
+            <a:avLst/>
+          </a:prstGeom>
+          <a:solidFill>
+            <a:schemeClr val="bg1"/>
+          </a:solidFill>
+          <a:ln>
+            <a:solidFill>
+              <a:schemeClr val="tx1"/>
+            </a:solidFill>
+          </a:ln>
+        </p:spPr>
+        <p:style>
+          <a:lnRef idx="2">
+            <a:schemeClr val="accent1">
+              <a:shade val="50000"/>
+            </a:schemeClr>
+          </a:lnRef>
+          <a:fillRef idx="1">
+            <a:schemeClr val="accent1"/>
+          </a:fillRef>
+          <a:effectRef idx="0">
+            <a:schemeClr val="accent1"/>
+          </a:effectRef>
+          <a:fontRef idx="minor">
+            <a:schemeClr val="lt1"/>
+          </a:fontRef>
+        </p:style>
+        <p:txBody>
+          <a:bodyPr rtlCol="0" anchor="ctr"/>
+          <a:lstStyle/>
+          <a:p>
+            <a:pPr algn="ctr"/>
+            <a:r>
+              <a:rPr lang="en-US" altLang="zh-CN" sz="1100" smtClean="0">
+                <a:solidFill>
+                  <a:schemeClr val="tx1"/>
+                </a:solidFill>
+                <a:latin typeface="Times New Roman" panose="02020603050405020304" pitchFamily="18" charset="0"/>
+                <a:cs typeface="Times New Roman" panose="02020603050405020304" pitchFamily="18" charset="0"/>
+              </a:rPr>
+              <a:t>1</a:t>
+            </a:r>
+            <a:endParaRPr lang="zh-CN" altLang="en-US" sz="1100">
+              <a:solidFill>
+                <a:schemeClr val="tx1"/>
+              </a:solidFill>
+              <a:latin typeface="Times New Roman" panose="02020603050405020304" pitchFamily="18" charset="0"/>
+              <a:cs typeface="Times New Roman" panose="02020603050405020304" pitchFamily="18" charset="0"/>
+            </a:endParaRPr>
+          </a:p>
+        </p:txBody>
+      </p:sp>
+      <p:sp>
+        <p:nvSpPr>
+          <p:cNvPr id="37" name="矩形 36"/>
+          <p:cNvSpPr/>
+          <p:nvPr/>
+        </p:nvSpPr>
+        <p:spPr>
+          <a:xfrm>
+            <a:off x="8392294" y="3878984"/>
+            <a:ext cx="242596" cy="263805"/>
+          </a:xfrm>
+          <a:prstGeom prst="rect">
+            <a:avLst/>
+          </a:prstGeom>
+          <a:solidFill>
+            <a:schemeClr val="bg1"/>
+          </a:solidFill>
+          <a:ln>
+            <a:solidFill>
+              <a:schemeClr val="tx1"/>
+            </a:solidFill>
+          </a:ln>
+        </p:spPr>
+        <p:style>
+          <a:lnRef idx="2">
+            <a:schemeClr val="accent1">
+              <a:shade val="50000"/>
+            </a:schemeClr>
+          </a:lnRef>
+          <a:fillRef idx="1">
+            <a:schemeClr val="accent1"/>
+          </a:fillRef>
+          <a:effectRef idx="0">
+            <a:schemeClr val="accent1"/>
+          </a:effectRef>
+          <a:fontRef idx="minor">
+            <a:schemeClr val="lt1"/>
+          </a:fontRef>
+        </p:style>
+        <p:txBody>
+          <a:bodyPr rtlCol="0" anchor="ctr"/>
+          <a:lstStyle/>
+          <a:p>
+            <a:pPr algn="ctr"/>
+            <a:r>
+              <a:rPr lang="en-US" altLang="zh-CN" sz="1100" smtClean="0">
+                <a:solidFill>
+                  <a:schemeClr val="tx1"/>
+                </a:solidFill>
+                <a:latin typeface="Times New Roman" panose="02020603050405020304" pitchFamily="18" charset="0"/>
+                <a:cs typeface="Times New Roman" panose="02020603050405020304" pitchFamily="18" charset="0"/>
+              </a:rPr>
+              <a:t>0</a:t>
+            </a:r>
+            <a:endParaRPr lang="zh-CN" altLang="en-US" sz="1100">
+              <a:solidFill>
+                <a:schemeClr val="tx1"/>
+              </a:solidFill>
+              <a:latin typeface="Times New Roman" panose="02020603050405020304" pitchFamily="18" charset="0"/>
+              <a:cs typeface="Times New Roman" panose="02020603050405020304" pitchFamily="18" charset="0"/>
+            </a:endParaRPr>
+          </a:p>
+        </p:txBody>
+      </p:sp>
+      <p:sp>
+        <p:nvSpPr>
+          <p:cNvPr id="38" name="矩形 37"/>
+          <p:cNvSpPr/>
+          <p:nvPr/>
+        </p:nvSpPr>
+        <p:spPr>
+          <a:xfrm>
+            <a:off x="8634890" y="3878984"/>
+            <a:ext cx="242596" cy="263805"/>
+          </a:xfrm>
+          <a:prstGeom prst="rect">
+            <a:avLst/>
+          </a:prstGeom>
+          <a:solidFill>
+            <a:schemeClr val="bg1"/>
+          </a:solidFill>
+          <a:ln>
+            <a:solidFill>
+              <a:schemeClr val="tx1"/>
+            </a:solidFill>
+          </a:ln>
+        </p:spPr>
+        <p:style>
+          <a:lnRef idx="2">
+            <a:schemeClr val="accent1">
+              <a:shade val="50000"/>
+            </a:schemeClr>
+          </a:lnRef>
+          <a:fillRef idx="1">
+            <a:schemeClr val="accent1"/>
+          </a:fillRef>
+          <a:effectRef idx="0">
+            <a:schemeClr val="accent1"/>
+          </a:effectRef>
+          <a:fontRef idx="minor">
+            <a:schemeClr val="lt1"/>
+          </a:fontRef>
+        </p:style>
+        <p:txBody>
+          <a:bodyPr rtlCol="0" anchor="ctr"/>
+          <a:lstStyle/>
+          <a:p>
+            <a:pPr algn="ctr"/>
+            <a:r>
+              <a:rPr lang="en-US" altLang="zh-CN" sz="1100" smtClean="0">
+                <a:solidFill>
+                  <a:schemeClr val="tx1"/>
+                </a:solidFill>
+                <a:latin typeface="Times New Roman" panose="02020603050405020304" pitchFamily="18" charset="0"/>
+                <a:cs typeface="Times New Roman" panose="02020603050405020304" pitchFamily="18" charset="0"/>
+              </a:rPr>
+              <a:t>0</a:t>
+            </a:r>
+            <a:endParaRPr lang="zh-CN" altLang="en-US" sz="1100">
+              <a:solidFill>
+                <a:schemeClr val="tx1"/>
+              </a:solidFill>
+              <a:latin typeface="Times New Roman" panose="02020603050405020304" pitchFamily="18" charset="0"/>
+              <a:cs typeface="Times New Roman" panose="02020603050405020304" pitchFamily="18" charset="0"/>
+            </a:endParaRPr>
+          </a:p>
+        </p:txBody>
+      </p:sp>
+      <p:sp>
+        <p:nvSpPr>
+          <p:cNvPr id="39" name="矩形 38"/>
+          <p:cNvSpPr/>
+          <p:nvPr/>
+        </p:nvSpPr>
+        <p:spPr>
+          <a:xfrm>
+            <a:off x="8877486" y="3878983"/>
+            <a:ext cx="242596" cy="263805"/>
+          </a:xfrm>
+          <a:prstGeom prst="rect">
+            <a:avLst/>
+          </a:prstGeom>
+          <a:solidFill>
+            <a:schemeClr val="bg1"/>
+          </a:solidFill>
+          <a:ln>
+            <a:solidFill>
+              <a:schemeClr val="tx1"/>
+            </a:solidFill>
+          </a:ln>
+        </p:spPr>
+        <p:style>
+          <a:lnRef idx="2">
+            <a:schemeClr val="accent1">
+              <a:shade val="50000"/>
+            </a:schemeClr>
+          </a:lnRef>
+          <a:fillRef idx="1">
+            <a:schemeClr val="accent1"/>
+          </a:fillRef>
+          <a:effectRef idx="0">
+            <a:schemeClr val="accent1"/>
+          </a:effectRef>
+          <a:fontRef idx="minor">
+            <a:schemeClr val="lt1"/>
+          </a:fontRef>
+        </p:style>
+        <p:txBody>
+          <a:bodyPr rtlCol="0" anchor="ctr"/>
+          <a:lstStyle/>
+          <a:p>
+            <a:pPr algn="ctr"/>
+            <a:r>
+              <a:rPr lang="en-US" altLang="zh-CN" sz="1100" smtClean="0">
+                <a:solidFill>
+                  <a:schemeClr val="tx1"/>
+                </a:solidFill>
+                <a:latin typeface="Times New Roman" panose="02020603050405020304" pitchFamily="18" charset="0"/>
+                <a:cs typeface="Times New Roman" panose="02020603050405020304" pitchFamily="18" charset="0"/>
+              </a:rPr>
+              <a:t>0</a:t>
+            </a:r>
+            <a:endParaRPr lang="zh-CN" altLang="en-US" sz="1100">
+              <a:solidFill>
+                <a:schemeClr val="tx1"/>
+              </a:solidFill>
+              <a:latin typeface="Times New Roman" panose="02020603050405020304" pitchFamily="18" charset="0"/>
+              <a:cs typeface="Times New Roman" panose="02020603050405020304" pitchFamily="18" charset="0"/>
+            </a:endParaRPr>
+          </a:p>
+        </p:txBody>
+      </p:sp>
+      <p:sp>
+        <p:nvSpPr>
+          <p:cNvPr id="40" name="矩形 39"/>
+          <p:cNvSpPr/>
+          <p:nvPr/>
+        </p:nvSpPr>
+        <p:spPr>
+          <a:xfrm>
+            <a:off x="9120082" y="3878983"/>
+            <a:ext cx="242596" cy="263805"/>
+          </a:xfrm>
+          <a:prstGeom prst="rect">
+            <a:avLst/>
+          </a:prstGeom>
+          <a:solidFill>
+            <a:schemeClr val="bg1"/>
+          </a:solidFill>
+          <a:ln>
+            <a:solidFill>
+              <a:schemeClr val="tx1"/>
+            </a:solidFill>
+          </a:ln>
+        </p:spPr>
+        <p:style>
+          <a:lnRef idx="2">
+            <a:schemeClr val="accent1">
+              <a:shade val="50000"/>
+            </a:schemeClr>
+          </a:lnRef>
+          <a:fillRef idx="1">
+            <a:schemeClr val="accent1"/>
+          </a:fillRef>
+          <a:effectRef idx="0">
+            <a:schemeClr val="accent1"/>
+          </a:effectRef>
+          <a:fontRef idx="minor">
+            <a:schemeClr val="lt1"/>
+          </a:fontRef>
+        </p:style>
+        <p:txBody>
+          <a:bodyPr rtlCol="0" anchor="ctr"/>
+          <a:lstStyle/>
+          <a:p>
+            <a:pPr algn="ctr"/>
+            <a:r>
+              <a:rPr lang="en-US" altLang="zh-CN" sz="1100" smtClean="0">
+                <a:solidFill>
+                  <a:schemeClr val="tx1"/>
+                </a:solidFill>
+                <a:latin typeface="Times New Roman" panose="02020603050405020304" pitchFamily="18" charset="0"/>
+                <a:cs typeface="Times New Roman" panose="02020603050405020304" pitchFamily="18" charset="0"/>
+              </a:rPr>
+              <a:t>0</a:t>
+            </a:r>
+            <a:endParaRPr lang="zh-CN" altLang="en-US" sz="1100">
+              <a:solidFill>
+                <a:schemeClr val="tx1"/>
+              </a:solidFill>
+              <a:latin typeface="Times New Roman" panose="02020603050405020304" pitchFamily="18" charset="0"/>
+              <a:cs typeface="Times New Roman" panose="02020603050405020304" pitchFamily="18" charset="0"/>
+            </a:endParaRPr>
+          </a:p>
+        </p:txBody>
+      </p:sp>
+      <p:sp>
+        <p:nvSpPr>
+          <p:cNvPr id="41" name="矩形 40"/>
+          <p:cNvSpPr/>
+          <p:nvPr/>
+        </p:nvSpPr>
+        <p:spPr>
+          <a:xfrm>
+            <a:off x="9362678" y="3878982"/>
+            <a:ext cx="242596" cy="263805"/>
+          </a:xfrm>
+          <a:prstGeom prst="rect">
+            <a:avLst/>
+          </a:prstGeom>
+          <a:solidFill>
+            <a:schemeClr val="bg1"/>
+          </a:solidFill>
+          <a:ln>
+            <a:solidFill>
+              <a:schemeClr val="tx1"/>
+            </a:solidFill>
+          </a:ln>
+        </p:spPr>
+        <p:style>
+          <a:lnRef idx="2">
+            <a:schemeClr val="accent1">
+              <a:shade val="50000"/>
+            </a:schemeClr>
+          </a:lnRef>
+          <a:fillRef idx="1">
+            <a:schemeClr val="accent1"/>
+          </a:fillRef>
+          <a:effectRef idx="0">
+            <a:schemeClr val="accent1"/>
+          </a:effectRef>
+          <a:fontRef idx="minor">
+            <a:schemeClr val="lt1"/>
+          </a:fontRef>
+        </p:style>
+        <p:txBody>
+          <a:bodyPr rtlCol="0" anchor="ctr"/>
+          <a:lstStyle/>
+          <a:p>
+            <a:pPr algn="ctr"/>
+            <a:r>
+              <a:rPr lang="en-US" altLang="zh-CN" sz="1100" smtClean="0">
+                <a:solidFill>
+                  <a:schemeClr val="tx1"/>
+                </a:solidFill>
+                <a:latin typeface="Times New Roman" panose="02020603050405020304" pitchFamily="18" charset="0"/>
+                <a:cs typeface="Times New Roman" panose="02020603050405020304" pitchFamily="18" charset="0"/>
+              </a:rPr>
+              <a:t>0</a:t>
+            </a:r>
+            <a:endParaRPr lang="zh-CN" altLang="en-US" sz="1100">
+              <a:solidFill>
+                <a:schemeClr val="tx1"/>
+              </a:solidFill>
+              <a:latin typeface="Times New Roman" panose="02020603050405020304" pitchFamily="18" charset="0"/>
+              <a:cs typeface="Times New Roman" panose="02020603050405020304" pitchFamily="18" charset="0"/>
+            </a:endParaRPr>
+          </a:p>
+        </p:txBody>
+      </p:sp>
+      <p:sp>
+        <p:nvSpPr>
+          <p:cNvPr id="42" name="矩形 41"/>
+          <p:cNvSpPr/>
+          <p:nvPr/>
+        </p:nvSpPr>
+        <p:spPr>
+          <a:xfrm>
+            <a:off x="9605274" y="3878981"/>
+            <a:ext cx="242596" cy="263805"/>
+          </a:xfrm>
+          <a:prstGeom prst="rect">
+            <a:avLst/>
+          </a:prstGeom>
+          <a:solidFill>
+            <a:schemeClr val="bg1"/>
+          </a:solidFill>
+          <a:ln>
+            <a:solidFill>
+              <a:schemeClr val="tx1"/>
+            </a:solidFill>
+          </a:ln>
+        </p:spPr>
+        <p:style>
+          <a:lnRef idx="2">
+            <a:schemeClr val="accent1">
+              <a:shade val="50000"/>
+            </a:schemeClr>
+          </a:lnRef>
+          <a:fillRef idx="1">
+            <a:schemeClr val="accent1"/>
+          </a:fillRef>
+          <a:effectRef idx="0">
+            <a:schemeClr val="accent1"/>
+          </a:effectRef>
+          <a:fontRef idx="minor">
+            <a:schemeClr val="lt1"/>
+          </a:fontRef>
+        </p:style>
+        <p:txBody>
+          <a:bodyPr rtlCol="0" anchor="ctr"/>
+          <a:lstStyle/>
+          <a:p>
+            <a:pPr algn="ctr"/>
+            <a:r>
+              <a:rPr lang="en-US" altLang="zh-CN" sz="1100" smtClean="0">
+                <a:solidFill>
+                  <a:schemeClr val="tx1"/>
+                </a:solidFill>
+                <a:latin typeface="Times New Roman" panose="02020603050405020304" pitchFamily="18" charset="0"/>
+                <a:cs typeface="Times New Roman" panose="02020603050405020304" pitchFamily="18" charset="0"/>
+              </a:rPr>
+              <a:t>0</a:t>
+            </a:r>
+            <a:endParaRPr lang="zh-CN" altLang="en-US" sz="1100">
+              <a:solidFill>
+                <a:schemeClr val="tx1"/>
+              </a:solidFill>
+              <a:latin typeface="Times New Roman" panose="02020603050405020304" pitchFamily="18" charset="0"/>
+              <a:cs typeface="Times New Roman" panose="02020603050405020304" pitchFamily="18" charset="0"/>
+            </a:endParaRPr>
+          </a:p>
+        </p:txBody>
+      </p:sp>
+      <p:sp>
+        <p:nvSpPr>
+          <p:cNvPr id="2" name="文本框 1"/>
+          <p:cNvSpPr txBox="1"/>
+          <p:nvPr/>
+        </p:nvSpPr>
+        <p:spPr>
+          <a:xfrm>
+            <a:off x="1903615" y="3507971"/>
+            <a:ext cx="714894" cy="261610"/>
+          </a:xfrm>
+          <a:prstGeom prst="rect">
+            <a:avLst/>
+          </a:prstGeom>
+          <a:noFill/>
+        </p:spPr>
+        <p:txBody>
+          <a:bodyPr wrap="square" rtlCol="0">
+            <a:spAutoFit/>
+          </a:bodyPr>
+          <a:lstStyle/>
+          <a:p>
+            <a:r>
+              <a:rPr lang="zh-CN" altLang="en-US" sz="1100" smtClean="0"/>
+              <a:t>低地址</a:t>
+            </a:r>
+            <a:endParaRPr lang="zh-CN" altLang="en-US" sz="1100"/>
+          </a:p>
+        </p:txBody>
+      </p:sp>
+      <p:sp>
+        <p:nvSpPr>
+          <p:cNvPr id="43" name="文本框 42"/>
+          <p:cNvSpPr txBox="1"/>
+          <p:nvPr/>
+        </p:nvSpPr>
+        <p:spPr>
+          <a:xfrm>
+            <a:off x="4048469" y="4795669"/>
+            <a:ext cx="617853" cy="261610"/>
+          </a:xfrm>
+          <a:prstGeom prst="rect">
+            <a:avLst/>
+          </a:prstGeom>
+          <a:noFill/>
+        </p:spPr>
+        <p:txBody>
+          <a:bodyPr wrap="square" rtlCol="0">
+            <a:spAutoFit/>
+          </a:bodyPr>
+          <a:lstStyle/>
+          <a:p>
+            <a:r>
+              <a:rPr lang="zh-CN" altLang="en-US" sz="1100" smtClean="0"/>
+              <a:t>高地址</a:t>
+            </a:r>
+            <a:endParaRPr lang="zh-CN" altLang="en-US" sz="1100"/>
+          </a:p>
+        </p:txBody>
+      </p:sp>
+      <p:sp>
+        <p:nvSpPr>
+          <p:cNvPr id="3" name="右箭头 2"/>
+          <p:cNvSpPr/>
+          <p:nvPr/>
+        </p:nvSpPr>
+        <p:spPr>
+          <a:xfrm>
+            <a:off x="2481942" y="3587366"/>
+            <a:ext cx="6759437" cy="173038"/>
+          </a:xfrm>
+          <a:prstGeom prst="rightArrow">
+            <a:avLst/>
+          </a:prstGeom>
+          <a:noFill/>
+          <a:ln>
+            <a:solidFill>
+              <a:srgbClr val="92D050"/>
+            </a:solidFill>
+          </a:ln>
+        </p:spPr>
+        <p:style>
+          <a:lnRef idx="2">
+            <a:schemeClr val="accent6">
+              <a:shade val="50000"/>
+            </a:schemeClr>
+          </a:lnRef>
+          <a:fillRef idx="1">
+            <a:schemeClr val="accent6"/>
+          </a:fillRef>
+          <a:effectRef idx="0">
+            <a:schemeClr val="accent6"/>
+          </a:effectRef>
+          <a:fontRef idx="minor">
+            <a:schemeClr val="lt1"/>
+          </a:fontRef>
+        </p:style>
+        <p:txBody>
+          <a:bodyPr rtlCol="0" anchor="ctr"/>
+          <a:lstStyle/>
+          <a:p>
+            <a:pPr algn="ctr"/>
+            <a:endParaRPr lang="zh-CN" altLang="en-US"/>
+          </a:p>
+        </p:txBody>
+      </p:sp>
+      <p:sp>
+        <p:nvSpPr>
+          <p:cNvPr id="44" name="左大括号 43"/>
+          <p:cNvSpPr/>
+          <p:nvPr/>
+        </p:nvSpPr>
+        <p:spPr>
+          <a:xfrm rot="16200000">
+            <a:off x="2720807" y="3614000"/>
+            <a:ext cx="242596" cy="1448111"/>
+          </a:xfrm>
+          <a:prstGeom prst="leftBrace">
+            <a:avLst>
+              <a:gd name="adj1" fmla="val 36602"/>
+              <a:gd name="adj2" fmla="val 50000"/>
+            </a:avLst>
+          </a:prstGeom>
+        </p:spPr>
+        <p:style>
+          <a:lnRef idx="1">
+            <a:schemeClr val="dk1"/>
+          </a:lnRef>
+          <a:fillRef idx="0">
+            <a:schemeClr val="dk1"/>
+          </a:fillRef>
+          <a:effectRef idx="0">
+            <a:schemeClr val="dk1"/>
+          </a:effectRef>
+          <a:fontRef idx="minor">
+            <a:schemeClr val="tx1"/>
+          </a:fontRef>
+        </p:style>
+        <p:txBody>
+          <a:bodyPr rtlCol="0" anchor="ctr"/>
+          <a:lstStyle/>
+          <a:p>
+            <a:pPr algn="ctr"/>
+            <a:endParaRPr lang="zh-CN" altLang="en-US"/>
+          </a:p>
+        </p:txBody>
+      </p:sp>
+      <p:sp>
+        <p:nvSpPr>
+          <p:cNvPr id="45" name="文本框 44"/>
+          <p:cNvSpPr txBox="1"/>
+          <p:nvPr/>
+        </p:nvSpPr>
+        <p:spPr>
+          <a:xfrm>
+            <a:off x="2638769" y="4457656"/>
+            <a:ext cx="406671" cy="261610"/>
+          </a:xfrm>
+          <a:prstGeom prst="rect">
+            <a:avLst/>
+          </a:prstGeom>
+          <a:noFill/>
+        </p:spPr>
+        <p:txBody>
+          <a:bodyPr wrap="square" rtlCol="0">
+            <a:spAutoFit/>
+          </a:bodyPr>
+          <a:lstStyle/>
+          <a:p>
+            <a:r>
+              <a:rPr lang="en-US" altLang="zh-CN" sz="1100" smtClean="0"/>
+              <a:t>s.a</a:t>
+            </a:r>
+            <a:endParaRPr lang="zh-CN" altLang="en-US" sz="1100"/>
+          </a:p>
+        </p:txBody>
+      </p:sp>
+      <p:sp>
+        <p:nvSpPr>
+          <p:cNvPr id="46" name="左大括号 45"/>
+          <p:cNvSpPr/>
+          <p:nvPr/>
+        </p:nvSpPr>
+        <p:spPr>
+          <a:xfrm rot="16200000">
+            <a:off x="7028667" y="3240961"/>
+            <a:ext cx="242596" cy="2194179"/>
+          </a:xfrm>
+          <a:prstGeom prst="leftBrace">
+            <a:avLst>
+              <a:gd name="adj1" fmla="val 36602"/>
+              <a:gd name="adj2" fmla="val 50000"/>
+            </a:avLst>
+          </a:prstGeom>
+        </p:spPr>
+        <p:style>
+          <a:lnRef idx="1">
+            <a:schemeClr val="dk1"/>
+          </a:lnRef>
+          <a:fillRef idx="0">
+            <a:schemeClr val="dk1"/>
+          </a:fillRef>
+          <a:effectRef idx="0">
+            <a:schemeClr val="dk1"/>
+          </a:effectRef>
+          <a:fontRef idx="minor">
+            <a:schemeClr val="tx1"/>
+          </a:fontRef>
+        </p:style>
+        <p:txBody>
+          <a:bodyPr rtlCol="0" anchor="ctr"/>
+          <a:lstStyle/>
+          <a:p>
+            <a:pPr algn="ctr"/>
+            <a:endParaRPr lang="zh-CN" altLang="en-US"/>
+          </a:p>
+        </p:txBody>
+      </p:sp>
+      <p:sp>
+        <p:nvSpPr>
+          <p:cNvPr id="47" name="文本框 46"/>
+          <p:cNvSpPr txBox="1"/>
+          <p:nvPr/>
+        </p:nvSpPr>
+        <p:spPr>
+          <a:xfrm>
+            <a:off x="6985890" y="4457656"/>
+            <a:ext cx="406671" cy="261610"/>
+          </a:xfrm>
+          <a:prstGeom prst="rect">
+            <a:avLst/>
+          </a:prstGeom>
+          <a:noFill/>
+        </p:spPr>
+        <p:txBody>
+          <a:bodyPr wrap="square" rtlCol="0">
+            <a:spAutoFit/>
+          </a:bodyPr>
+          <a:lstStyle/>
+          <a:p>
+            <a:r>
+              <a:rPr lang="en-US" altLang="zh-CN" sz="1100" smtClean="0"/>
+              <a:t>s.b</a:t>
+            </a:r>
+            <a:endParaRPr lang="zh-CN" altLang="en-US" sz="1100"/>
+          </a:p>
+        </p:txBody>
+      </p:sp>
+      <p:sp>
+        <p:nvSpPr>
+          <p:cNvPr id="48" name="矩形 47"/>
+          <p:cNvSpPr/>
+          <p:nvPr/>
+        </p:nvSpPr>
+        <p:spPr>
+          <a:xfrm>
+            <a:off x="1926771" y="5074919"/>
+            <a:ext cx="242596" cy="263805"/>
+          </a:xfrm>
+          <a:prstGeom prst="rect">
+            <a:avLst/>
+          </a:prstGeom>
+          <a:solidFill>
+            <a:schemeClr val="bg1"/>
+          </a:solidFill>
+          <a:ln>
+            <a:solidFill>
+              <a:schemeClr val="tx1"/>
+            </a:solidFill>
+          </a:ln>
+        </p:spPr>
+        <p:style>
+          <a:lnRef idx="2">
+            <a:schemeClr val="accent1">
+              <a:shade val="50000"/>
+            </a:schemeClr>
+          </a:lnRef>
+          <a:fillRef idx="1">
+            <a:schemeClr val="accent1"/>
+          </a:fillRef>
+          <a:effectRef idx="0">
+            <a:schemeClr val="accent1"/>
+          </a:effectRef>
+          <a:fontRef idx="minor">
+            <a:schemeClr val="lt1"/>
+          </a:fontRef>
+        </p:style>
+        <p:txBody>
+          <a:bodyPr rtlCol="0" anchor="ctr"/>
+          <a:lstStyle/>
+          <a:p>
+            <a:pPr algn="ctr"/>
+            <a:r>
+              <a:rPr lang="en-US" altLang="zh-CN" sz="1100">
+                <a:solidFill>
+                  <a:schemeClr val="tx1"/>
+                </a:solidFill>
+                <a:latin typeface="Times New Roman" panose="02020603050405020304" pitchFamily="18" charset="0"/>
+                <a:cs typeface="Times New Roman" panose="02020603050405020304" pitchFamily="18" charset="0"/>
+              </a:rPr>
+              <a:t>0</a:t>
+            </a:r>
+            <a:endParaRPr lang="zh-CN" altLang="en-US" sz="1100">
+              <a:solidFill>
+                <a:schemeClr val="tx1"/>
+              </a:solidFill>
+              <a:latin typeface="Times New Roman" panose="02020603050405020304" pitchFamily="18" charset="0"/>
+              <a:cs typeface="Times New Roman" panose="02020603050405020304" pitchFamily="18" charset="0"/>
+            </a:endParaRPr>
+          </a:p>
+        </p:txBody>
+      </p:sp>
+      <p:sp>
+        <p:nvSpPr>
+          <p:cNvPr id="49" name="矩形 48"/>
+          <p:cNvSpPr/>
+          <p:nvPr/>
+        </p:nvSpPr>
+        <p:spPr>
+          <a:xfrm>
+            <a:off x="2169367" y="5074919"/>
+            <a:ext cx="242596" cy="263805"/>
+          </a:xfrm>
+          <a:prstGeom prst="rect">
+            <a:avLst/>
+          </a:prstGeom>
+          <a:solidFill>
+            <a:schemeClr val="bg1"/>
+          </a:solidFill>
+          <a:ln>
+            <a:solidFill>
+              <a:schemeClr val="tx1"/>
+            </a:solidFill>
+          </a:ln>
+        </p:spPr>
+        <p:style>
+          <a:lnRef idx="2">
+            <a:schemeClr val="accent1">
+              <a:shade val="50000"/>
+            </a:schemeClr>
+          </a:lnRef>
+          <a:fillRef idx="1">
+            <a:schemeClr val="accent1"/>
+          </a:fillRef>
+          <a:effectRef idx="0">
+            <a:schemeClr val="accent1"/>
+          </a:effectRef>
+          <a:fontRef idx="minor">
+            <a:schemeClr val="lt1"/>
+          </a:fontRef>
+        </p:style>
+        <p:txBody>
+          <a:bodyPr rtlCol="0" anchor="ctr"/>
+          <a:lstStyle/>
+          <a:p>
+            <a:pPr algn="ctr"/>
+            <a:r>
+              <a:rPr lang="en-US" altLang="zh-CN" sz="1100">
+                <a:solidFill>
+                  <a:schemeClr val="tx1"/>
+                </a:solidFill>
+                <a:latin typeface="Times New Roman" panose="02020603050405020304" pitchFamily="18" charset="0"/>
+                <a:cs typeface="Times New Roman" panose="02020603050405020304" pitchFamily="18" charset="0"/>
+              </a:rPr>
+              <a:t>1</a:t>
+            </a:r>
+            <a:endParaRPr lang="zh-CN" altLang="en-US" sz="1100">
+              <a:solidFill>
+                <a:schemeClr val="tx1"/>
+              </a:solidFill>
+              <a:latin typeface="Times New Roman" panose="02020603050405020304" pitchFamily="18" charset="0"/>
+              <a:cs typeface="Times New Roman" panose="02020603050405020304" pitchFamily="18" charset="0"/>
+            </a:endParaRPr>
+          </a:p>
+        </p:txBody>
+      </p:sp>
+      <p:sp>
+        <p:nvSpPr>
+          <p:cNvPr id="50" name="矩形 49"/>
+          <p:cNvSpPr/>
+          <p:nvPr/>
+        </p:nvSpPr>
+        <p:spPr>
+          <a:xfrm>
+            <a:off x="2411963" y="5074918"/>
+            <a:ext cx="242596" cy="263805"/>
+          </a:xfrm>
+          <a:prstGeom prst="rect">
+            <a:avLst/>
+          </a:prstGeom>
+          <a:solidFill>
+            <a:schemeClr val="bg1"/>
+          </a:solidFill>
+          <a:ln>
+            <a:solidFill>
+              <a:schemeClr val="tx1"/>
+            </a:solidFill>
+          </a:ln>
+        </p:spPr>
+        <p:style>
+          <a:lnRef idx="2">
+            <a:schemeClr val="accent1">
+              <a:shade val="50000"/>
+            </a:schemeClr>
+          </a:lnRef>
+          <a:fillRef idx="1">
+            <a:schemeClr val="accent1"/>
+          </a:fillRef>
+          <a:effectRef idx="0">
+            <a:schemeClr val="accent1"/>
+          </a:effectRef>
+          <a:fontRef idx="minor">
+            <a:schemeClr val="lt1"/>
+          </a:fontRef>
+        </p:style>
+        <p:txBody>
+          <a:bodyPr rtlCol="0" anchor="ctr"/>
+          <a:lstStyle/>
+          <a:p>
+            <a:pPr algn="ctr"/>
+            <a:r>
+              <a:rPr lang="en-US" altLang="zh-CN" sz="1100" smtClean="0">
+                <a:solidFill>
+                  <a:schemeClr val="tx1"/>
+                </a:solidFill>
+                <a:latin typeface="Times New Roman" panose="02020603050405020304" pitchFamily="18" charset="0"/>
+                <a:cs typeface="Times New Roman" panose="02020603050405020304" pitchFamily="18" charset="0"/>
+              </a:rPr>
+              <a:t>0</a:t>
+            </a:r>
+            <a:endParaRPr lang="zh-CN" altLang="en-US" sz="1100">
+              <a:solidFill>
+                <a:schemeClr val="tx1"/>
+              </a:solidFill>
+              <a:latin typeface="Times New Roman" panose="02020603050405020304" pitchFamily="18" charset="0"/>
+              <a:cs typeface="Times New Roman" panose="02020603050405020304" pitchFamily="18" charset="0"/>
+            </a:endParaRPr>
+          </a:p>
+        </p:txBody>
+      </p:sp>
+      <p:sp>
+        <p:nvSpPr>
+          <p:cNvPr id="51" name="矩形 50"/>
+          <p:cNvSpPr/>
+          <p:nvPr/>
+        </p:nvSpPr>
+        <p:spPr>
+          <a:xfrm>
+            <a:off x="2654559" y="5074918"/>
+            <a:ext cx="242596" cy="263805"/>
+          </a:xfrm>
+          <a:prstGeom prst="rect">
+            <a:avLst/>
+          </a:prstGeom>
+          <a:solidFill>
+            <a:schemeClr val="bg1"/>
+          </a:solidFill>
+          <a:ln>
+            <a:solidFill>
+              <a:schemeClr val="tx1"/>
+            </a:solidFill>
+          </a:ln>
+        </p:spPr>
+        <p:style>
+          <a:lnRef idx="2">
+            <a:schemeClr val="accent1">
+              <a:shade val="50000"/>
+            </a:schemeClr>
+          </a:lnRef>
+          <a:fillRef idx="1">
+            <a:schemeClr val="accent1"/>
+          </a:fillRef>
+          <a:effectRef idx="0">
+            <a:schemeClr val="accent1"/>
+          </a:effectRef>
+          <a:fontRef idx="minor">
+            <a:schemeClr val="lt1"/>
+          </a:fontRef>
+        </p:style>
+        <p:txBody>
+          <a:bodyPr rtlCol="0" anchor="ctr"/>
+          <a:lstStyle/>
+          <a:p>
+            <a:pPr algn="ctr"/>
+            <a:r>
+              <a:rPr lang="en-US" altLang="zh-CN" sz="1100" smtClean="0">
+                <a:solidFill>
+                  <a:schemeClr val="tx1"/>
+                </a:solidFill>
+                <a:latin typeface="Times New Roman" panose="02020603050405020304" pitchFamily="18" charset="0"/>
+                <a:cs typeface="Times New Roman" panose="02020603050405020304" pitchFamily="18" charset="0"/>
+              </a:rPr>
+              <a:t>0</a:t>
+            </a:r>
+            <a:endParaRPr lang="zh-CN" altLang="en-US" sz="1100">
+              <a:solidFill>
+                <a:schemeClr val="tx1"/>
+              </a:solidFill>
+              <a:latin typeface="Times New Roman" panose="02020603050405020304" pitchFamily="18" charset="0"/>
+              <a:cs typeface="Times New Roman" panose="02020603050405020304" pitchFamily="18" charset="0"/>
+            </a:endParaRPr>
+          </a:p>
+        </p:txBody>
+      </p:sp>
+      <p:sp>
+        <p:nvSpPr>
+          <p:cNvPr id="52" name="矩形 51"/>
+          <p:cNvSpPr/>
+          <p:nvPr/>
+        </p:nvSpPr>
+        <p:spPr>
+          <a:xfrm>
+            <a:off x="2897155" y="5074917"/>
+            <a:ext cx="242596" cy="263805"/>
+          </a:xfrm>
+          <a:prstGeom prst="rect">
+            <a:avLst/>
+          </a:prstGeom>
+          <a:solidFill>
+            <a:schemeClr val="bg1"/>
+          </a:solidFill>
+          <a:ln>
+            <a:solidFill>
+              <a:schemeClr val="tx1"/>
+            </a:solidFill>
+          </a:ln>
+        </p:spPr>
+        <p:style>
+          <a:lnRef idx="2">
+            <a:schemeClr val="accent1">
+              <a:shade val="50000"/>
+            </a:schemeClr>
+          </a:lnRef>
+          <a:fillRef idx="1">
+            <a:schemeClr val="accent1"/>
+          </a:fillRef>
+          <a:effectRef idx="0">
+            <a:schemeClr val="accent1"/>
+          </a:effectRef>
+          <a:fontRef idx="minor">
+            <a:schemeClr val="lt1"/>
+          </a:fontRef>
+        </p:style>
+        <p:txBody>
+          <a:bodyPr rtlCol="0" anchor="ctr"/>
+          <a:lstStyle/>
+          <a:p>
+            <a:pPr algn="ctr"/>
+            <a:r>
+              <a:rPr lang="en-US" altLang="zh-CN" sz="1100">
+                <a:solidFill>
+                  <a:schemeClr val="tx1"/>
+                </a:solidFill>
+                <a:latin typeface="Times New Roman" panose="02020603050405020304" pitchFamily="18" charset="0"/>
+                <a:cs typeface="Times New Roman" panose="02020603050405020304" pitchFamily="18" charset="0"/>
+              </a:rPr>
+              <a:t>0</a:t>
+            </a:r>
+            <a:endParaRPr lang="zh-CN" altLang="en-US" sz="1100">
+              <a:solidFill>
+                <a:schemeClr val="tx1"/>
+              </a:solidFill>
+              <a:latin typeface="Times New Roman" panose="02020603050405020304" pitchFamily="18" charset="0"/>
+              <a:cs typeface="Times New Roman" panose="02020603050405020304" pitchFamily="18" charset="0"/>
+            </a:endParaRPr>
+          </a:p>
+        </p:txBody>
+      </p:sp>
+      <p:sp>
+        <p:nvSpPr>
+          <p:cNvPr id="53" name="矩形 52"/>
+          <p:cNvSpPr/>
+          <p:nvPr/>
+        </p:nvSpPr>
+        <p:spPr>
+          <a:xfrm>
+            <a:off x="3139751" y="5074917"/>
+            <a:ext cx="242596" cy="263805"/>
+          </a:xfrm>
+          <a:prstGeom prst="rect">
+            <a:avLst/>
+          </a:prstGeom>
+          <a:solidFill>
+            <a:schemeClr val="bg1"/>
+          </a:solidFill>
+          <a:ln>
+            <a:solidFill>
+              <a:schemeClr val="tx1"/>
+            </a:solidFill>
+          </a:ln>
+        </p:spPr>
+        <p:style>
+          <a:lnRef idx="2">
+            <a:schemeClr val="accent1">
+              <a:shade val="50000"/>
+            </a:schemeClr>
+          </a:lnRef>
+          <a:fillRef idx="1">
+            <a:schemeClr val="accent1"/>
+          </a:fillRef>
+          <a:effectRef idx="0">
+            <a:schemeClr val="accent1"/>
+          </a:effectRef>
+          <a:fontRef idx="minor">
+            <a:schemeClr val="lt1"/>
+          </a:fontRef>
+        </p:style>
+        <p:txBody>
+          <a:bodyPr rtlCol="0" anchor="ctr"/>
+          <a:lstStyle/>
+          <a:p>
+            <a:pPr algn="ctr"/>
+            <a:r>
+              <a:rPr lang="en-US" altLang="zh-CN" sz="1100">
+                <a:solidFill>
+                  <a:schemeClr val="tx1"/>
+                </a:solidFill>
+                <a:latin typeface="Times New Roman" panose="02020603050405020304" pitchFamily="18" charset="0"/>
+                <a:cs typeface="Times New Roman" panose="02020603050405020304" pitchFamily="18" charset="0"/>
+              </a:rPr>
+              <a:t>0</a:t>
+            </a:r>
+            <a:endParaRPr lang="zh-CN" altLang="en-US" sz="1100">
+              <a:solidFill>
+                <a:schemeClr val="tx1"/>
+              </a:solidFill>
+              <a:latin typeface="Times New Roman" panose="02020603050405020304" pitchFamily="18" charset="0"/>
+              <a:cs typeface="Times New Roman" panose="02020603050405020304" pitchFamily="18" charset="0"/>
+            </a:endParaRPr>
+          </a:p>
+        </p:txBody>
+      </p:sp>
+      <p:sp>
+        <p:nvSpPr>
+          <p:cNvPr id="54" name="矩形 53"/>
+          <p:cNvSpPr/>
+          <p:nvPr/>
+        </p:nvSpPr>
+        <p:spPr>
+          <a:xfrm>
+            <a:off x="3382347" y="5074916"/>
+            <a:ext cx="242596" cy="263805"/>
+          </a:xfrm>
+          <a:prstGeom prst="rect">
+            <a:avLst/>
+          </a:prstGeom>
+          <a:solidFill>
+            <a:schemeClr val="bg1"/>
+          </a:solidFill>
+          <a:ln>
+            <a:solidFill>
+              <a:schemeClr val="tx1"/>
+            </a:solidFill>
+          </a:ln>
+        </p:spPr>
+        <p:style>
+          <a:lnRef idx="2">
+            <a:schemeClr val="accent1">
+              <a:shade val="50000"/>
+            </a:schemeClr>
+          </a:lnRef>
+          <a:fillRef idx="1">
+            <a:schemeClr val="accent1"/>
+          </a:fillRef>
+          <a:effectRef idx="0">
+            <a:schemeClr val="accent1"/>
+          </a:effectRef>
+          <a:fontRef idx="minor">
+            <a:schemeClr val="lt1"/>
+          </a:fontRef>
+        </p:style>
+        <p:txBody>
+          <a:bodyPr rtlCol="0" anchor="ctr"/>
+          <a:lstStyle/>
+          <a:p>
+            <a:pPr algn="ctr"/>
+            <a:r>
+              <a:rPr lang="en-US" altLang="zh-CN" sz="1100" smtClean="0">
+                <a:solidFill>
+                  <a:schemeClr val="tx1"/>
+                </a:solidFill>
+                <a:latin typeface="Times New Roman" panose="02020603050405020304" pitchFamily="18" charset="0"/>
+                <a:cs typeface="Times New Roman" panose="02020603050405020304" pitchFamily="18" charset="0"/>
+              </a:rPr>
+              <a:t>1</a:t>
+            </a:r>
+            <a:endParaRPr lang="zh-CN" altLang="en-US" sz="1100">
+              <a:solidFill>
+                <a:schemeClr val="tx1"/>
+              </a:solidFill>
+              <a:latin typeface="Times New Roman" panose="02020603050405020304" pitchFamily="18" charset="0"/>
+              <a:cs typeface="Times New Roman" panose="02020603050405020304" pitchFamily="18" charset="0"/>
+            </a:endParaRPr>
+          </a:p>
+        </p:txBody>
+      </p:sp>
+      <p:sp>
+        <p:nvSpPr>
+          <p:cNvPr id="55" name="矩形 54"/>
+          <p:cNvSpPr/>
+          <p:nvPr/>
+        </p:nvSpPr>
+        <p:spPr>
+          <a:xfrm>
+            <a:off x="3624943" y="5074915"/>
+            <a:ext cx="242596" cy="263805"/>
+          </a:xfrm>
+          <a:prstGeom prst="rect">
+            <a:avLst/>
+          </a:prstGeom>
+          <a:solidFill>
+            <a:schemeClr val="bg1"/>
+          </a:solidFill>
+          <a:ln>
+            <a:solidFill>
+              <a:schemeClr val="tx1"/>
+            </a:solidFill>
+          </a:ln>
+        </p:spPr>
+        <p:style>
+          <a:lnRef idx="2">
+            <a:schemeClr val="accent1">
+              <a:shade val="50000"/>
+            </a:schemeClr>
+          </a:lnRef>
+          <a:fillRef idx="1">
+            <a:schemeClr val="accent1"/>
+          </a:fillRef>
+          <a:effectRef idx="0">
+            <a:schemeClr val="accent1"/>
+          </a:effectRef>
+          <a:fontRef idx="minor">
+            <a:schemeClr val="lt1"/>
+          </a:fontRef>
+        </p:style>
+        <p:txBody>
+          <a:bodyPr rtlCol="0" anchor="ctr"/>
+          <a:lstStyle/>
+          <a:p>
+            <a:pPr algn="ctr"/>
+            <a:r>
+              <a:rPr lang="en-US" altLang="zh-CN" sz="1100" smtClean="0">
+                <a:solidFill>
+                  <a:schemeClr val="tx1"/>
+                </a:solidFill>
+                <a:latin typeface="Times New Roman" panose="02020603050405020304" pitchFamily="18" charset="0"/>
+                <a:cs typeface="Times New Roman" panose="02020603050405020304" pitchFamily="18" charset="0"/>
+              </a:rPr>
+              <a:t>0</a:t>
+            </a:r>
+            <a:endParaRPr lang="zh-CN" altLang="en-US" sz="1100">
+              <a:solidFill>
+                <a:schemeClr val="tx1"/>
+              </a:solidFill>
+              <a:latin typeface="Times New Roman" panose="02020603050405020304" pitchFamily="18" charset="0"/>
+              <a:cs typeface="Times New Roman" panose="02020603050405020304" pitchFamily="18" charset="0"/>
+            </a:endParaRPr>
+          </a:p>
+        </p:txBody>
+      </p:sp>
+      <p:sp>
+        <p:nvSpPr>
+          <p:cNvPr id="56" name="文本框 55"/>
+          <p:cNvSpPr txBox="1"/>
+          <p:nvPr/>
+        </p:nvSpPr>
+        <p:spPr>
+          <a:xfrm>
+            <a:off x="1340292" y="4810624"/>
+            <a:ext cx="714894" cy="261610"/>
+          </a:xfrm>
+          <a:prstGeom prst="rect">
+            <a:avLst/>
+          </a:prstGeom>
+          <a:noFill/>
+        </p:spPr>
+        <p:txBody>
+          <a:bodyPr wrap="square" rtlCol="0">
+            <a:spAutoFit/>
+          </a:bodyPr>
+          <a:lstStyle/>
+          <a:p>
+            <a:r>
+              <a:rPr lang="zh-CN" altLang="en-US" sz="1100" smtClean="0"/>
+              <a:t>低地址</a:t>
+            </a:r>
+            <a:endParaRPr lang="zh-CN" altLang="en-US" sz="1100"/>
+          </a:p>
+        </p:txBody>
+      </p:sp>
+      <p:sp>
+        <p:nvSpPr>
+          <p:cNvPr id="57" name="左大括号 56"/>
+          <p:cNvSpPr/>
+          <p:nvPr/>
+        </p:nvSpPr>
+        <p:spPr>
+          <a:xfrm rot="16200000">
+            <a:off x="3548120" y="5342002"/>
+            <a:ext cx="153646" cy="304491"/>
+          </a:xfrm>
+          <a:prstGeom prst="leftBrace">
+            <a:avLst>
+              <a:gd name="adj1" fmla="val 36602"/>
+              <a:gd name="adj2" fmla="val 47497"/>
+            </a:avLst>
+          </a:prstGeom>
+        </p:spPr>
+        <p:style>
+          <a:lnRef idx="1">
+            <a:schemeClr val="dk1"/>
+          </a:lnRef>
+          <a:fillRef idx="0">
+            <a:schemeClr val="dk1"/>
+          </a:fillRef>
+          <a:effectRef idx="0">
+            <a:schemeClr val="dk1"/>
+          </a:effectRef>
+          <a:fontRef idx="minor">
+            <a:schemeClr val="tx1"/>
+          </a:fontRef>
+        </p:style>
+        <p:txBody>
+          <a:bodyPr rtlCol="0" anchor="ctr"/>
+          <a:lstStyle/>
+          <a:p>
+            <a:pPr algn="ctr"/>
+            <a:endParaRPr lang="zh-CN" altLang="en-US"/>
+          </a:p>
+        </p:txBody>
+      </p:sp>
+      <p:sp>
+        <p:nvSpPr>
+          <p:cNvPr id="58" name="文本框 57"/>
+          <p:cNvSpPr txBox="1"/>
+          <p:nvPr/>
+        </p:nvSpPr>
+        <p:spPr>
+          <a:xfrm>
+            <a:off x="2197081" y="5571072"/>
+            <a:ext cx="335731" cy="261610"/>
+          </a:xfrm>
+          <a:prstGeom prst="rect">
+            <a:avLst/>
+          </a:prstGeom>
+          <a:noFill/>
+        </p:spPr>
+        <p:txBody>
+          <a:bodyPr wrap="square" rtlCol="0">
+            <a:spAutoFit/>
+          </a:bodyPr>
+          <a:lstStyle/>
+          <a:p>
+            <a:r>
+              <a:rPr lang="en-US" altLang="zh-CN" sz="1100" smtClean="0">
+                <a:latin typeface="Times New Roman" panose="02020603050405020304" pitchFamily="18" charset="0"/>
+                <a:cs typeface="Times New Roman" panose="02020603050405020304" pitchFamily="18" charset="0"/>
+              </a:rPr>
+              <a:t>cc</a:t>
+            </a:r>
+            <a:endParaRPr lang="zh-CN" altLang="en-US" sz="1100">
+              <a:latin typeface="Times New Roman" panose="02020603050405020304" pitchFamily="18" charset="0"/>
+              <a:cs typeface="Times New Roman" panose="02020603050405020304" pitchFamily="18" charset="0"/>
+            </a:endParaRPr>
+          </a:p>
+        </p:txBody>
+      </p:sp>
+      <p:sp>
+        <p:nvSpPr>
+          <p:cNvPr id="59" name="右箭头 58"/>
+          <p:cNvSpPr/>
+          <p:nvPr/>
+        </p:nvSpPr>
+        <p:spPr>
+          <a:xfrm>
+            <a:off x="1858564" y="4841312"/>
+            <a:ext cx="2238471" cy="194156"/>
+          </a:xfrm>
+          <a:prstGeom prst="rightArrow">
+            <a:avLst/>
+          </a:prstGeom>
+          <a:noFill/>
+          <a:ln>
+            <a:solidFill>
+              <a:srgbClr val="92D050"/>
+            </a:solidFill>
+          </a:ln>
+        </p:spPr>
+        <p:style>
+          <a:lnRef idx="2">
+            <a:schemeClr val="accent6">
+              <a:shade val="50000"/>
+            </a:schemeClr>
+          </a:lnRef>
+          <a:fillRef idx="1">
+            <a:schemeClr val="accent6"/>
+          </a:fillRef>
+          <a:effectRef idx="0">
+            <a:schemeClr val="accent6"/>
+          </a:effectRef>
+          <a:fontRef idx="minor">
+            <a:schemeClr val="lt1"/>
+          </a:fontRef>
+        </p:style>
+        <p:txBody>
+          <a:bodyPr rtlCol="0" anchor="ctr"/>
+          <a:lstStyle/>
+          <a:p>
+            <a:pPr algn="ctr"/>
+            <a:endParaRPr lang="zh-CN" altLang="en-US"/>
+          </a:p>
+        </p:txBody>
+      </p:sp>
+      <p:sp>
+        <p:nvSpPr>
+          <p:cNvPr id="60" name="文本框 59"/>
+          <p:cNvSpPr txBox="1"/>
+          <p:nvPr/>
+        </p:nvSpPr>
+        <p:spPr>
+          <a:xfrm>
+            <a:off x="2882624" y="5564302"/>
+            <a:ext cx="258216" cy="261610"/>
+          </a:xfrm>
+          <a:prstGeom prst="rect">
+            <a:avLst/>
+          </a:prstGeom>
+          <a:noFill/>
+        </p:spPr>
+        <p:txBody>
+          <a:bodyPr wrap="square" rtlCol="0">
+            <a:spAutoFit/>
+          </a:bodyPr>
+          <a:lstStyle/>
+          <a:p>
+            <a:r>
+              <a:rPr lang="en-US" altLang="zh-CN" sz="1100" smtClean="0">
+                <a:latin typeface="Times New Roman" panose="02020603050405020304" pitchFamily="18" charset="0"/>
+                <a:cs typeface="Times New Roman" panose="02020603050405020304" pitchFamily="18" charset="0"/>
+              </a:rPr>
+              <a:t>x</a:t>
+            </a:r>
+            <a:endParaRPr lang="zh-CN" altLang="en-US" sz="1100">
+              <a:latin typeface="Times New Roman" panose="02020603050405020304" pitchFamily="18" charset="0"/>
+              <a:cs typeface="Times New Roman" panose="02020603050405020304" pitchFamily="18" charset="0"/>
+            </a:endParaRPr>
+          </a:p>
+        </p:txBody>
+      </p:sp>
+      <p:sp>
+        <p:nvSpPr>
+          <p:cNvPr id="61" name="文本框 60"/>
+          <p:cNvSpPr txBox="1"/>
+          <p:nvPr/>
+        </p:nvSpPr>
+        <p:spPr>
+          <a:xfrm>
+            <a:off x="3124277" y="5556682"/>
+            <a:ext cx="289164" cy="261610"/>
+          </a:xfrm>
+          <a:prstGeom prst="rect">
+            <a:avLst/>
+          </a:prstGeom>
+          <a:noFill/>
+        </p:spPr>
+        <p:txBody>
+          <a:bodyPr wrap="square" rtlCol="0">
+            <a:spAutoFit/>
+          </a:bodyPr>
+          <a:lstStyle/>
+          <a:p>
+            <a:r>
+              <a:rPr lang="en-US" altLang="zh-CN" sz="1100" smtClean="0">
+                <a:latin typeface="Times New Roman" panose="02020603050405020304" pitchFamily="18" charset="0"/>
+                <a:cs typeface="Times New Roman" panose="02020603050405020304" pitchFamily="18" charset="0"/>
+              </a:rPr>
+              <a:t>p</a:t>
+            </a:r>
+            <a:endParaRPr lang="zh-CN" altLang="en-US" sz="1100">
+              <a:latin typeface="Times New Roman" panose="02020603050405020304" pitchFamily="18" charset="0"/>
+              <a:cs typeface="Times New Roman" panose="02020603050405020304" pitchFamily="18" charset="0"/>
+            </a:endParaRPr>
+          </a:p>
+        </p:txBody>
+      </p:sp>
+      <p:sp>
+        <p:nvSpPr>
+          <p:cNvPr id="62" name="左大括号 61"/>
+          <p:cNvSpPr/>
+          <p:nvPr/>
+        </p:nvSpPr>
+        <p:spPr>
+          <a:xfrm rot="16200000">
+            <a:off x="2300698" y="5113480"/>
+            <a:ext cx="153644" cy="761537"/>
+          </a:xfrm>
+          <a:prstGeom prst="leftBrace">
+            <a:avLst>
+              <a:gd name="adj1" fmla="val 36602"/>
+              <a:gd name="adj2" fmla="val 47497"/>
+            </a:avLst>
+          </a:prstGeom>
+        </p:spPr>
+        <p:style>
+          <a:lnRef idx="1">
+            <a:schemeClr val="dk1"/>
+          </a:lnRef>
+          <a:fillRef idx="0">
+            <a:schemeClr val="dk1"/>
+          </a:fillRef>
+          <a:effectRef idx="0">
+            <a:schemeClr val="dk1"/>
+          </a:effectRef>
+          <a:fontRef idx="minor">
+            <a:schemeClr val="tx1"/>
+          </a:fontRef>
+        </p:style>
+        <p:txBody>
+          <a:bodyPr rtlCol="0" anchor="ctr"/>
+          <a:lstStyle/>
+          <a:p>
+            <a:pPr algn="ctr"/>
+            <a:endParaRPr lang="zh-CN" altLang="en-US"/>
+          </a:p>
+        </p:txBody>
+      </p:sp>
+      <p:sp>
+        <p:nvSpPr>
+          <p:cNvPr id="63" name="文本框 62"/>
+          <p:cNvSpPr txBox="1"/>
+          <p:nvPr/>
+        </p:nvSpPr>
+        <p:spPr>
+          <a:xfrm>
+            <a:off x="3488024" y="5571072"/>
+            <a:ext cx="289164" cy="261610"/>
+          </a:xfrm>
+          <a:prstGeom prst="rect">
+            <a:avLst/>
+          </a:prstGeom>
+          <a:noFill/>
+        </p:spPr>
+        <p:txBody>
+          <a:bodyPr wrap="square" rtlCol="0">
+            <a:spAutoFit/>
+          </a:bodyPr>
+          <a:lstStyle/>
+          <a:p>
+            <a:r>
+              <a:rPr lang="en-US" altLang="zh-CN" sz="1100" smtClean="0">
+                <a:latin typeface="Times New Roman" panose="02020603050405020304" pitchFamily="18" charset="0"/>
+                <a:cs typeface="Times New Roman" panose="02020603050405020304" pitchFamily="18" charset="0"/>
+              </a:rPr>
+              <a:t>v</a:t>
+            </a:r>
+            <a:endParaRPr lang="zh-CN" altLang="en-US" sz="1100">
+              <a:latin typeface="Times New Roman" panose="02020603050405020304" pitchFamily="18" charset="0"/>
+              <a:cs typeface="Times New Roman" panose="02020603050405020304" pitchFamily="18" charset="0"/>
+            </a:endParaRPr>
+          </a:p>
+        </p:txBody>
+      </p:sp>
+      <p:cxnSp>
+        <p:nvCxnSpPr>
+          <p:cNvPr id="65" name="直接箭头连接符 64"/>
+          <p:cNvCxnSpPr/>
+          <p:nvPr/>
+        </p:nvCxnSpPr>
+        <p:spPr>
+          <a:xfrm>
+            <a:off x="3018453" y="5338722"/>
+            <a:ext cx="0" cy="232349"/>
+          </a:xfrm>
+          <a:prstGeom prst="straightConnector1">
+            <a:avLst/>
+          </a:prstGeom>
+          <a:ln>
+            <a:tailEnd type="triangle"/>
+          </a:ln>
+        </p:spPr>
+        <p:style>
+          <a:lnRef idx="1">
+            <a:schemeClr val="dk1"/>
+          </a:lnRef>
+          <a:fillRef idx="0">
+            <a:schemeClr val="dk1"/>
+          </a:fillRef>
+          <a:effectRef idx="0">
+            <a:schemeClr val="dk1"/>
+          </a:effectRef>
+          <a:fontRef idx="minor">
+            <a:schemeClr val="tx1"/>
+          </a:fontRef>
+        </p:style>
+      </p:cxnSp>
+      <p:cxnSp>
+        <p:nvCxnSpPr>
+          <p:cNvPr id="67" name="直接箭头连接符 66"/>
+          <p:cNvCxnSpPr/>
+          <p:nvPr/>
+        </p:nvCxnSpPr>
+        <p:spPr>
+          <a:xfrm>
+            <a:off x="3263226" y="5338722"/>
+            <a:ext cx="0" cy="232349"/>
+          </a:xfrm>
+          <a:prstGeom prst="straightConnector1">
+            <a:avLst/>
+          </a:prstGeom>
+          <a:ln>
+            <a:tailEnd type="triangle"/>
+          </a:ln>
+        </p:spPr>
+        <p:style>
+          <a:lnRef idx="1">
+            <a:schemeClr val="dk1"/>
+          </a:lnRef>
+          <a:fillRef idx="0">
+            <a:schemeClr val="dk1"/>
+          </a:fillRef>
+          <a:effectRef idx="0">
+            <a:schemeClr val="dk1"/>
+          </a:effectRef>
+          <a:fontRef idx="minor">
+            <a:schemeClr val="tx1"/>
+          </a:fontRef>
+        </p:style>
+      </p:cxnSp>
+      <p:sp>
+        <p:nvSpPr>
+          <p:cNvPr id="73" name="文本框 72"/>
+          <p:cNvSpPr txBox="1"/>
+          <p:nvPr/>
+        </p:nvSpPr>
+        <p:spPr>
+          <a:xfrm>
+            <a:off x="8056559" y="4945722"/>
+            <a:ext cx="617853" cy="261610"/>
+          </a:xfrm>
+          <a:prstGeom prst="rect">
+            <a:avLst/>
+          </a:prstGeom>
+          <a:noFill/>
+        </p:spPr>
+        <p:txBody>
+          <a:bodyPr wrap="square" rtlCol="0">
+            <a:spAutoFit/>
+          </a:bodyPr>
+          <a:lstStyle/>
+          <a:p>
+            <a:r>
+              <a:rPr lang="zh-CN" altLang="en-US" sz="1100" smtClean="0"/>
+              <a:t>高地址</a:t>
+            </a:r>
+            <a:endParaRPr lang="zh-CN" altLang="en-US" sz="1100"/>
+          </a:p>
+        </p:txBody>
+      </p:sp>
+      <p:sp>
+        <p:nvSpPr>
+          <p:cNvPr id="74" name="矩形 73"/>
+          <p:cNvSpPr/>
+          <p:nvPr/>
+        </p:nvSpPr>
+        <p:spPr>
+          <a:xfrm>
+            <a:off x="5934861" y="5224972"/>
+            <a:ext cx="242596" cy="263805"/>
+          </a:xfrm>
+          <a:prstGeom prst="rect">
+            <a:avLst/>
+          </a:prstGeom>
+          <a:solidFill>
+            <a:schemeClr val="bg1"/>
+          </a:solidFill>
+          <a:ln>
+            <a:solidFill>
+              <a:schemeClr val="tx1"/>
+            </a:solidFill>
+          </a:ln>
+        </p:spPr>
+        <p:style>
+          <a:lnRef idx="2">
+            <a:schemeClr val="accent1">
+              <a:shade val="50000"/>
+            </a:schemeClr>
+          </a:lnRef>
+          <a:fillRef idx="1">
+            <a:schemeClr val="accent1"/>
+          </a:fillRef>
+          <a:effectRef idx="0">
+            <a:schemeClr val="accent1"/>
+          </a:effectRef>
+          <a:fontRef idx="minor">
+            <a:schemeClr val="lt1"/>
+          </a:fontRef>
+        </p:style>
+        <p:txBody>
+          <a:bodyPr rtlCol="0" anchor="ctr"/>
+          <a:lstStyle/>
+          <a:p>
+            <a:pPr algn="ctr"/>
+            <a:r>
+              <a:rPr lang="en-US" altLang="zh-CN" sz="1100">
+                <a:solidFill>
+                  <a:schemeClr val="tx1"/>
+                </a:solidFill>
+                <a:latin typeface="Times New Roman" panose="02020603050405020304" pitchFamily="18" charset="0"/>
+                <a:cs typeface="Times New Roman" panose="02020603050405020304" pitchFamily="18" charset="0"/>
+              </a:rPr>
+              <a:t>0</a:t>
+            </a:r>
+            <a:endParaRPr lang="zh-CN" altLang="en-US" sz="1100">
+              <a:solidFill>
+                <a:schemeClr val="tx1"/>
+              </a:solidFill>
+              <a:latin typeface="Times New Roman" panose="02020603050405020304" pitchFamily="18" charset="0"/>
+              <a:cs typeface="Times New Roman" panose="02020603050405020304" pitchFamily="18" charset="0"/>
+            </a:endParaRPr>
+          </a:p>
+        </p:txBody>
+      </p:sp>
+      <p:sp>
+        <p:nvSpPr>
+          <p:cNvPr id="75" name="矩形 74"/>
+          <p:cNvSpPr/>
+          <p:nvPr/>
+        </p:nvSpPr>
+        <p:spPr>
+          <a:xfrm>
+            <a:off x="6177457" y="5224972"/>
+            <a:ext cx="242596" cy="263805"/>
+          </a:xfrm>
+          <a:prstGeom prst="rect">
+            <a:avLst/>
+          </a:prstGeom>
+          <a:solidFill>
+            <a:schemeClr val="bg1"/>
+          </a:solidFill>
+          <a:ln>
+            <a:solidFill>
+              <a:schemeClr val="tx1"/>
+            </a:solidFill>
+          </a:ln>
+        </p:spPr>
+        <p:style>
+          <a:lnRef idx="2">
+            <a:schemeClr val="accent1">
+              <a:shade val="50000"/>
+            </a:schemeClr>
+          </a:lnRef>
+          <a:fillRef idx="1">
+            <a:schemeClr val="accent1"/>
+          </a:fillRef>
+          <a:effectRef idx="0">
+            <a:schemeClr val="accent1"/>
+          </a:effectRef>
+          <a:fontRef idx="minor">
+            <a:schemeClr val="lt1"/>
+          </a:fontRef>
+        </p:style>
+        <p:txBody>
+          <a:bodyPr rtlCol="0" anchor="ctr"/>
+          <a:lstStyle/>
+          <a:p>
+            <a:pPr algn="ctr"/>
+            <a:r>
+              <a:rPr lang="en-US" altLang="zh-CN" sz="1100">
+                <a:solidFill>
+                  <a:schemeClr val="tx1"/>
+                </a:solidFill>
+                <a:latin typeface="Times New Roman" panose="02020603050405020304" pitchFamily="18" charset="0"/>
+                <a:cs typeface="Times New Roman" panose="02020603050405020304" pitchFamily="18" charset="0"/>
+              </a:rPr>
+              <a:t>1</a:t>
+            </a:r>
+            <a:endParaRPr lang="zh-CN" altLang="en-US" sz="1100">
+              <a:solidFill>
+                <a:schemeClr val="tx1"/>
+              </a:solidFill>
+              <a:latin typeface="Times New Roman" panose="02020603050405020304" pitchFamily="18" charset="0"/>
+              <a:cs typeface="Times New Roman" panose="02020603050405020304" pitchFamily="18" charset="0"/>
+            </a:endParaRPr>
+          </a:p>
+        </p:txBody>
+      </p:sp>
+      <p:sp>
+        <p:nvSpPr>
+          <p:cNvPr id="76" name="矩形 75"/>
+          <p:cNvSpPr/>
+          <p:nvPr/>
+        </p:nvSpPr>
+        <p:spPr>
+          <a:xfrm>
+            <a:off x="6420053" y="5224971"/>
+            <a:ext cx="242596" cy="263805"/>
+          </a:xfrm>
+          <a:prstGeom prst="rect">
+            <a:avLst/>
+          </a:prstGeom>
+          <a:solidFill>
+            <a:schemeClr val="bg1"/>
+          </a:solidFill>
+          <a:ln>
+            <a:solidFill>
+              <a:schemeClr val="tx1"/>
+            </a:solidFill>
+          </a:ln>
+        </p:spPr>
+        <p:style>
+          <a:lnRef idx="2">
+            <a:schemeClr val="accent1">
+              <a:shade val="50000"/>
+            </a:schemeClr>
+          </a:lnRef>
+          <a:fillRef idx="1">
+            <a:schemeClr val="accent1"/>
+          </a:fillRef>
+          <a:effectRef idx="0">
+            <a:schemeClr val="accent1"/>
+          </a:effectRef>
+          <a:fontRef idx="minor">
+            <a:schemeClr val="lt1"/>
+          </a:fontRef>
+        </p:style>
+        <p:txBody>
+          <a:bodyPr rtlCol="0" anchor="ctr"/>
+          <a:lstStyle/>
+          <a:p>
+            <a:pPr algn="ctr"/>
+            <a:r>
+              <a:rPr lang="en-US" altLang="zh-CN" sz="1100" smtClean="0">
+                <a:solidFill>
+                  <a:schemeClr val="tx1"/>
+                </a:solidFill>
+                <a:latin typeface="Times New Roman" panose="02020603050405020304" pitchFamily="18" charset="0"/>
+                <a:cs typeface="Times New Roman" panose="02020603050405020304" pitchFamily="18" charset="0"/>
+              </a:rPr>
+              <a:t>0</a:t>
+            </a:r>
+            <a:endParaRPr lang="zh-CN" altLang="en-US" sz="1100">
+              <a:solidFill>
+                <a:schemeClr val="tx1"/>
+              </a:solidFill>
+              <a:latin typeface="Times New Roman" panose="02020603050405020304" pitchFamily="18" charset="0"/>
+              <a:cs typeface="Times New Roman" panose="02020603050405020304" pitchFamily="18" charset="0"/>
+            </a:endParaRPr>
+          </a:p>
+        </p:txBody>
+      </p:sp>
+      <p:sp>
+        <p:nvSpPr>
+          <p:cNvPr id="77" name="矩形 76"/>
+          <p:cNvSpPr/>
+          <p:nvPr/>
+        </p:nvSpPr>
+        <p:spPr>
+          <a:xfrm>
+            <a:off x="6662649" y="5224971"/>
+            <a:ext cx="242596" cy="263805"/>
+          </a:xfrm>
+          <a:prstGeom prst="rect">
+            <a:avLst/>
+          </a:prstGeom>
+          <a:solidFill>
+            <a:schemeClr val="bg1"/>
+          </a:solidFill>
+          <a:ln>
+            <a:solidFill>
+              <a:schemeClr val="tx1"/>
+            </a:solidFill>
+          </a:ln>
+        </p:spPr>
+        <p:style>
+          <a:lnRef idx="2">
+            <a:schemeClr val="accent1">
+              <a:shade val="50000"/>
+            </a:schemeClr>
+          </a:lnRef>
+          <a:fillRef idx="1">
+            <a:schemeClr val="accent1"/>
+          </a:fillRef>
+          <a:effectRef idx="0">
+            <a:schemeClr val="accent1"/>
+          </a:effectRef>
+          <a:fontRef idx="minor">
+            <a:schemeClr val="lt1"/>
+          </a:fontRef>
+        </p:style>
+        <p:txBody>
+          <a:bodyPr rtlCol="0" anchor="ctr"/>
+          <a:lstStyle/>
+          <a:p>
+            <a:pPr algn="ctr"/>
+            <a:r>
+              <a:rPr lang="en-US" altLang="zh-CN" sz="1100" smtClean="0">
+                <a:solidFill>
+                  <a:schemeClr val="tx1"/>
+                </a:solidFill>
+                <a:latin typeface="Times New Roman" panose="02020603050405020304" pitchFamily="18" charset="0"/>
+                <a:cs typeface="Times New Roman" panose="02020603050405020304" pitchFamily="18" charset="0"/>
+              </a:rPr>
+              <a:t>0</a:t>
+            </a:r>
+            <a:endParaRPr lang="zh-CN" altLang="en-US" sz="1100">
+              <a:solidFill>
+                <a:schemeClr val="tx1"/>
+              </a:solidFill>
+              <a:latin typeface="Times New Roman" panose="02020603050405020304" pitchFamily="18" charset="0"/>
+              <a:cs typeface="Times New Roman" panose="02020603050405020304" pitchFamily="18" charset="0"/>
+            </a:endParaRPr>
+          </a:p>
+        </p:txBody>
+      </p:sp>
+      <p:sp>
+        <p:nvSpPr>
+          <p:cNvPr id="78" name="矩形 77"/>
+          <p:cNvSpPr/>
+          <p:nvPr/>
+        </p:nvSpPr>
+        <p:spPr>
+          <a:xfrm>
+            <a:off x="6905245" y="5224970"/>
+            <a:ext cx="242596" cy="263805"/>
+          </a:xfrm>
+          <a:prstGeom prst="rect">
+            <a:avLst/>
+          </a:prstGeom>
+          <a:solidFill>
+            <a:schemeClr val="bg1"/>
+          </a:solidFill>
+          <a:ln>
+            <a:solidFill>
+              <a:schemeClr val="tx1"/>
+            </a:solidFill>
+          </a:ln>
+        </p:spPr>
+        <p:style>
+          <a:lnRef idx="2">
+            <a:schemeClr val="accent1">
+              <a:shade val="50000"/>
+            </a:schemeClr>
+          </a:lnRef>
+          <a:fillRef idx="1">
+            <a:schemeClr val="accent1"/>
+          </a:fillRef>
+          <a:effectRef idx="0">
+            <a:schemeClr val="accent1"/>
+          </a:effectRef>
+          <a:fontRef idx="minor">
+            <a:schemeClr val="lt1"/>
+          </a:fontRef>
+        </p:style>
+        <p:txBody>
+          <a:bodyPr rtlCol="0" anchor="ctr"/>
+          <a:lstStyle/>
+          <a:p>
+            <a:pPr algn="ctr"/>
+            <a:r>
+              <a:rPr lang="en-US" altLang="zh-CN" sz="1100">
+                <a:solidFill>
+                  <a:schemeClr val="tx1"/>
+                </a:solidFill>
+                <a:latin typeface="Times New Roman" panose="02020603050405020304" pitchFamily="18" charset="0"/>
+                <a:cs typeface="Times New Roman" panose="02020603050405020304" pitchFamily="18" charset="0"/>
+              </a:rPr>
+              <a:t>0</a:t>
+            </a:r>
+            <a:endParaRPr lang="zh-CN" altLang="en-US" sz="1100">
+              <a:solidFill>
+                <a:schemeClr val="tx1"/>
+              </a:solidFill>
+              <a:latin typeface="Times New Roman" panose="02020603050405020304" pitchFamily="18" charset="0"/>
+              <a:cs typeface="Times New Roman" panose="02020603050405020304" pitchFamily="18" charset="0"/>
+            </a:endParaRPr>
+          </a:p>
+        </p:txBody>
+      </p:sp>
+      <p:sp>
+        <p:nvSpPr>
+          <p:cNvPr id="79" name="矩形 78"/>
+          <p:cNvSpPr/>
+          <p:nvPr/>
+        </p:nvSpPr>
+        <p:spPr>
+          <a:xfrm>
+            <a:off x="7147841" y="5224970"/>
+            <a:ext cx="242596" cy="263805"/>
+          </a:xfrm>
+          <a:prstGeom prst="rect">
+            <a:avLst/>
+          </a:prstGeom>
+          <a:solidFill>
+            <a:schemeClr val="bg1"/>
+          </a:solidFill>
+          <a:ln>
+            <a:solidFill>
+              <a:schemeClr val="tx1"/>
+            </a:solidFill>
+          </a:ln>
+        </p:spPr>
+        <p:style>
+          <a:lnRef idx="2">
+            <a:schemeClr val="accent1">
+              <a:shade val="50000"/>
+            </a:schemeClr>
+          </a:lnRef>
+          <a:fillRef idx="1">
+            <a:schemeClr val="accent1"/>
+          </a:fillRef>
+          <a:effectRef idx="0">
+            <a:schemeClr val="accent1"/>
+          </a:effectRef>
+          <a:fontRef idx="minor">
+            <a:schemeClr val="lt1"/>
+          </a:fontRef>
+        </p:style>
+        <p:txBody>
+          <a:bodyPr rtlCol="0" anchor="ctr"/>
+          <a:lstStyle/>
+          <a:p>
+            <a:pPr algn="ctr"/>
+            <a:r>
+              <a:rPr lang="en-US" altLang="zh-CN" sz="1100">
+                <a:solidFill>
+                  <a:schemeClr val="tx1"/>
+                </a:solidFill>
+                <a:latin typeface="Times New Roman" panose="02020603050405020304" pitchFamily="18" charset="0"/>
+                <a:cs typeface="Times New Roman" panose="02020603050405020304" pitchFamily="18" charset="0"/>
+              </a:rPr>
+              <a:t>0</a:t>
+            </a:r>
+            <a:endParaRPr lang="zh-CN" altLang="en-US" sz="1100">
+              <a:solidFill>
+                <a:schemeClr val="tx1"/>
+              </a:solidFill>
+              <a:latin typeface="Times New Roman" panose="02020603050405020304" pitchFamily="18" charset="0"/>
+              <a:cs typeface="Times New Roman" panose="02020603050405020304" pitchFamily="18" charset="0"/>
+            </a:endParaRPr>
+          </a:p>
+        </p:txBody>
+      </p:sp>
+      <p:sp>
+        <p:nvSpPr>
+          <p:cNvPr id="80" name="矩形 79"/>
+          <p:cNvSpPr/>
+          <p:nvPr/>
+        </p:nvSpPr>
+        <p:spPr>
+          <a:xfrm>
+            <a:off x="7390437" y="5224969"/>
+            <a:ext cx="242596" cy="263805"/>
+          </a:xfrm>
+          <a:prstGeom prst="rect">
+            <a:avLst/>
+          </a:prstGeom>
+          <a:solidFill>
+            <a:schemeClr val="bg1"/>
+          </a:solidFill>
+          <a:ln>
+            <a:solidFill>
+              <a:schemeClr val="tx1"/>
+            </a:solidFill>
+          </a:ln>
+        </p:spPr>
+        <p:style>
+          <a:lnRef idx="2">
+            <a:schemeClr val="accent1">
+              <a:shade val="50000"/>
+            </a:schemeClr>
+          </a:lnRef>
+          <a:fillRef idx="1">
+            <a:schemeClr val="accent1"/>
+          </a:fillRef>
+          <a:effectRef idx="0">
+            <a:schemeClr val="accent1"/>
+          </a:effectRef>
+          <a:fontRef idx="minor">
+            <a:schemeClr val="lt1"/>
+          </a:fontRef>
+        </p:style>
+        <p:txBody>
+          <a:bodyPr rtlCol="0" anchor="ctr"/>
+          <a:lstStyle/>
+          <a:p>
+            <a:pPr algn="ctr"/>
+            <a:r>
+              <a:rPr lang="en-US" altLang="zh-CN" sz="1100" smtClean="0">
+                <a:solidFill>
+                  <a:schemeClr val="tx1"/>
+                </a:solidFill>
+                <a:latin typeface="Times New Roman" panose="02020603050405020304" pitchFamily="18" charset="0"/>
+                <a:cs typeface="Times New Roman" panose="02020603050405020304" pitchFamily="18" charset="0"/>
+              </a:rPr>
+              <a:t>1</a:t>
+            </a:r>
+            <a:endParaRPr lang="zh-CN" altLang="en-US" sz="1100">
+              <a:solidFill>
+                <a:schemeClr val="tx1"/>
+              </a:solidFill>
+              <a:latin typeface="Times New Roman" panose="02020603050405020304" pitchFamily="18" charset="0"/>
+              <a:cs typeface="Times New Roman" panose="02020603050405020304" pitchFamily="18" charset="0"/>
+            </a:endParaRPr>
+          </a:p>
+        </p:txBody>
+      </p:sp>
+      <p:sp>
+        <p:nvSpPr>
+          <p:cNvPr id="81" name="矩形 80"/>
+          <p:cNvSpPr/>
+          <p:nvPr/>
+        </p:nvSpPr>
+        <p:spPr>
+          <a:xfrm>
+            <a:off x="7633033" y="5224968"/>
+            <a:ext cx="242596" cy="263805"/>
+          </a:xfrm>
+          <a:prstGeom prst="rect">
+            <a:avLst/>
+          </a:prstGeom>
+          <a:solidFill>
+            <a:schemeClr val="bg1"/>
+          </a:solidFill>
+          <a:ln>
+            <a:solidFill>
+              <a:schemeClr val="tx1"/>
+            </a:solidFill>
+          </a:ln>
+        </p:spPr>
+        <p:style>
+          <a:lnRef idx="2">
+            <a:schemeClr val="accent1">
+              <a:shade val="50000"/>
+            </a:schemeClr>
+          </a:lnRef>
+          <a:fillRef idx="1">
+            <a:schemeClr val="accent1"/>
+          </a:fillRef>
+          <a:effectRef idx="0">
+            <a:schemeClr val="accent1"/>
+          </a:effectRef>
+          <a:fontRef idx="minor">
+            <a:schemeClr val="lt1"/>
+          </a:fontRef>
+        </p:style>
+        <p:txBody>
+          <a:bodyPr rtlCol="0" anchor="ctr"/>
+          <a:lstStyle/>
+          <a:p>
+            <a:pPr algn="ctr"/>
+            <a:r>
+              <a:rPr lang="en-US" altLang="zh-CN" sz="1100" smtClean="0">
+                <a:solidFill>
+                  <a:schemeClr val="tx1"/>
+                </a:solidFill>
+                <a:latin typeface="Times New Roman" panose="02020603050405020304" pitchFamily="18" charset="0"/>
+                <a:cs typeface="Times New Roman" panose="02020603050405020304" pitchFamily="18" charset="0"/>
+              </a:rPr>
+              <a:t>0</a:t>
+            </a:r>
+            <a:endParaRPr lang="zh-CN" altLang="en-US" sz="1100">
+              <a:solidFill>
+                <a:schemeClr val="tx1"/>
+              </a:solidFill>
+              <a:latin typeface="Times New Roman" panose="02020603050405020304" pitchFamily="18" charset="0"/>
+              <a:cs typeface="Times New Roman" panose="02020603050405020304" pitchFamily="18" charset="0"/>
+            </a:endParaRPr>
+          </a:p>
+        </p:txBody>
+      </p:sp>
+      <p:sp>
+        <p:nvSpPr>
+          <p:cNvPr id="82" name="文本框 81"/>
+          <p:cNvSpPr txBox="1"/>
+          <p:nvPr/>
+        </p:nvSpPr>
+        <p:spPr>
+          <a:xfrm>
+            <a:off x="5348382" y="4960677"/>
+            <a:ext cx="714894" cy="261610"/>
+          </a:xfrm>
+          <a:prstGeom prst="rect">
+            <a:avLst/>
+          </a:prstGeom>
+          <a:noFill/>
+        </p:spPr>
+        <p:txBody>
+          <a:bodyPr wrap="square" rtlCol="0">
+            <a:spAutoFit/>
+          </a:bodyPr>
+          <a:lstStyle/>
+          <a:p>
+            <a:r>
+              <a:rPr lang="zh-CN" altLang="en-US" sz="1100" smtClean="0"/>
+              <a:t>低地址</a:t>
+            </a:r>
+            <a:endParaRPr lang="zh-CN" altLang="en-US" sz="1100"/>
+          </a:p>
+        </p:txBody>
+      </p:sp>
+      <p:sp>
+        <p:nvSpPr>
+          <p:cNvPr id="85" name="右箭头 84"/>
+          <p:cNvSpPr/>
+          <p:nvPr/>
+        </p:nvSpPr>
+        <p:spPr>
+          <a:xfrm>
+            <a:off x="5866654" y="4991365"/>
+            <a:ext cx="2238471" cy="194156"/>
+          </a:xfrm>
+          <a:prstGeom prst="rightArrow">
+            <a:avLst/>
+          </a:prstGeom>
+          <a:noFill/>
+          <a:ln>
+            <a:solidFill>
+              <a:srgbClr val="92D050"/>
+            </a:solidFill>
+          </a:ln>
+        </p:spPr>
+        <p:style>
+          <a:lnRef idx="2">
+            <a:schemeClr val="accent6">
+              <a:shade val="50000"/>
+            </a:schemeClr>
+          </a:lnRef>
+          <a:fillRef idx="1">
+            <a:schemeClr val="accent6"/>
+          </a:fillRef>
+          <a:effectRef idx="0">
+            <a:schemeClr val="accent6"/>
+          </a:effectRef>
+          <a:fontRef idx="minor">
+            <a:schemeClr val="lt1"/>
+          </a:fontRef>
+        </p:style>
+        <p:txBody>
+          <a:bodyPr rtlCol="0" anchor="ctr"/>
+          <a:lstStyle/>
+          <a:p>
+            <a:pPr algn="ctr"/>
+            <a:endParaRPr lang="zh-CN" altLang="en-US"/>
+          </a:p>
+        </p:txBody>
+      </p:sp>
+    </p:spTree>
+    <p:extLst>
+      <p:ext uri="{BB962C8B-B14F-4D97-AF65-F5344CB8AC3E}">
+        <p14:creationId xmlns:p14="http://schemas.microsoft.com/office/powerpoint/2010/main" val="749619886"/>
+      </p:ext>
+    </p:extLst>
+  </p:cSld>
+  <p:clrMapOvr>
+    <a:masterClrMapping/>
+  </p:clrMapOvr>
+</p:sld>
+</file>
+
+<file path=ppt/slides/slide8.xml><?xml version="1.0" encoding="utf-8"?>
+<p:sld xmlns:a="http://schemas.openxmlformats.org/drawingml/2006/main" xmlns:r="http://schemas.openxmlformats.org/officeDocument/2006/relationships" xmlns:p="http://schemas.openxmlformats.org/presentationml/2006/main">
+  <p:cSld>
+    <p:spTree>
+      <p:nvGrpSpPr>
+        <p:cNvPr id="1" name=""/>
+        <p:cNvGrpSpPr/>
+        <p:nvPr/>
+      </p:nvGrpSpPr>
+      <p:grpSpPr>
+        <a:xfrm>
+          <a:off x="0" y="0"/>
+          <a:ext cx="0" cy="0"/>
+          <a:chOff x="0" y="0"/>
+          <a:chExt cx="0" cy="0"/>
+        </a:xfrm>
+      </p:grpSpPr>
+      <p:graphicFrame>
+        <p:nvGraphicFramePr>
+          <p:cNvPr id="4" name="表格 3"/>
+          <p:cNvGraphicFramePr>
+            <a:graphicFrameLocks noGrp="1"/>
+          </p:cNvGraphicFramePr>
+          <p:nvPr>
+            <p:extLst>
+              <p:ext uri="{D42A27DB-BD31-4B8C-83A1-F6EECF244321}">
+                <p14:modId xmlns:p14="http://schemas.microsoft.com/office/powerpoint/2010/main" val="3762587549"/>
+              </p:ext>
+            </p:extLst>
+          </p:nvPr>
+        </p:nvGraphicFramePr>
+        <p:xfrm>
+          <a:off x="1239520" y="727286"/>
+          <a:ext cx="4033520" cy="1688255"/>
+        </p:xfrm>
+        <a:graphic>
+          <a:graphicData uri="http://schemas.openxmlformats.org/drawingml/2006/table">
+            <a:tbl>
+              <a:tblPr firstRow="1" bandRow="1">
+                <a:tableStyleId>{5C22544A-7EE6-4342-B048-85BDC9FD1C3A}</a:tableStyleId>
+              </a:tblPr>
+              <a:tblGrid>
+                <a:gridCol w="1008380">
+                  <a:extLst>
+                    <a:ext uri="{9D8B030D-6E8A-4147-A177-3AD203B41FA5}">
+                      <a16:colId xmlns:a16="http://schemas.microsoft.com/office/drawing/2014/main" val="999857592"/>
+                    </a:ext>
+                  </a:extLst>
+                </a:gridCol>
+                <a:gridCol w="1008380">
+                  <a:extLst>
+                    <a:ext uri="{9D8B030D-6E8A-4147-A177-3AD203B41FA5}">
+                      <a16:colId xmlns:a16="http://schemas.microsoft.com/office/drawing/2014/main" val="3231713072"/>
+                    </a:ext>
+                  </a:extLst>
+                </a:gridCol>
+                <a:gridCol w="1008380">
+                  <a:extLst>
+                    <a:ext uri="{9D8B030D-6E8A-4147-A177-3AD203B41FA5}">
+                      <a16:colId xmlns:a16="http://schemas.microsoft.com/office/drawing/2014/main" val="1263934671"/>
+                    </a:ext>
+                  </a:extLst>
+                </a:gridCol>
+                <a:gridCol w="1008380">
+                  <a:extLst>
+                    <a:ext uri="{9D8B030D-6E8A-4147-A177-3AD203B41FA5}">
+                      <a16:colId xmlns:a16="http://schemas.microsoft.com/office/drawing/2014/main" val="1782657733"/>
+                    </a:ext>
+                  </a:extLst>
+                </a:gridCol>
+              </a:tblGrid>
+              <a:tr h="337651">
+                <a:tc>
+                  <a:txBody>
+                    <a:bodyPr/>
+                    <a:lstStyle/>
+                    <a:p>
+                      <a:pPr algn="ctr"/>
+                      <a:r>
+                        <a:rPr lang="en-US" altLang="zh-CN" sz="1200" smtClean="0"/>
+                        <a:t>0</a:t>
+                      </a:r>
+                      <a:endParaRPr lang="zh-CN" altLang="en-US" sz="1200"/>
+                    </a:p>
+                  </a:txBody>
+                  <a:tcPr/>
+                </a:tc>
+                <a:tc>
+                  <a:txBody>
+                    <a:bodyPr/>
+                    <a:lstStyle/>
+                    <a:p>
+                      <a:pPr algn="ctr"/>
+                      <a:r>
+                        <a:rPr lang="en-US" altLang="zh-CN" sz="1200" smtClean="0"/>
+                        <a:t>1</a:t>
+                      </a:r>
+                      <a:endParaRPr lang="zh-CN" altLang="en-US" sz="1200"/>
+                    </a:p>
+                  </a:txBody>
+                  <a:tcPr/>
+                </a:tc>
+                <a:tc>
+                  <a:txBody>
+                    <a:bodyPr/>
+                    <a:lstStyle/>
+                    <a:p>
+                      <a:pPr algn="ctr"/>
+                      <a:r>
+                        <a:rPr lang="en-US" altLang="zh-CN" sz="1200" smtClean="0"/>
+                        <a:t>2</a:t>
+                      </a:r>
+                      <a:endParaRPr lang="zh-CN" altLang="en-US" sz="1200"/>
+                    </a:p>
+                  </a:txBody>
+                  <a:tcPr/>
+                </a:tc>
+                <a:tc>
+                  <a:txBody>
+                    <a:bodyPr/>
+                    <a:lstStyle/>
+                    <a:p>
+                      <a:pPr algn="ctr"/>
+                      <a:r>
+                        <a:rPr lang="en-US" altLang="zh-CN" sz="1200" smtClean="0"/>
+                        <a:t>3</a:t>
+                      </a:r>
+                      <a:endParaRPr lang="zh-CN" altLang="en-US" sz="1200"/>
+                    </a:p>
+                  </a:txBody>
+                  <a:tcPr/>
+                </a:tc>
+                <a:extLst>
+                  <a:ext uri="{0D108BD9-81ED-4DB2-BD59-A6C34878D82A}">
+                    <a16:rowId xmlns:a16="http://schemas.microsoft.com/office/drawing/2014/main" val="2383739247"/>
+                  </a:ext>
+                </a:extLst>
+              </a:tr>
+              <a:tr h="337651">
+                <a:tc>
+                  <a:txBody>
+                    <a:bodyPr/>
+                    <a:lstStyle/>
+                    <a:p>
+                      <a:pPr algn="ctr"/>
+                      <a:r>
+                        <a:rPr lang="en-US" altLang="zh-CN" sz="1200" smtClean="0"/>
+                        <a:t>0x78</a:t>
+                      </a:r>
+                      <a:endParaRPr lang="zh-CN" altLang="en-US" sz="1200"/>
+                    </a:p>
+                  </a:txBody>
+                  <a:tcPr/>
+                </a:tc>
+                <a:tc>
+                  <a:txBody>
+                    <a:bodyPr/>
+                    <a:lstStyle/>
+                    <a:p>
+                      <a:pPr algn="ctr"/>
+                      <a:r>
+                        <a:rPr lang="en-US" altLang="zh-CN" sz="1200" smtClean="0"/>
+                        <a:t>0x56</a:t>
+                      </a:r>
+                      <a:endParaRPr lang="zh-CN" altLang="en-US" sz="1200"/>
+                    </a:p>
+                  </a:txBody>
+                  <a:tcPr/>
+                </a:tc>
+                <a:tc>
+                  <a:txBody>
+                    <a:bodyPr/>
+                    <a:lstStyle/>
+                    <a:p>
+                      <a:pPr algn="ctr"/>
+                      <a:r>
+                        <a:rPr lang="en-US" altLang="zh-CN" sz="1200" smtClean="0"/>
+                        <a:t>0x34</a:t>
+                      </a:r>
+                      <a:endParaRPr lang="zh-CN" altLang="en-US" sz="1200"/>
+                    </a:p>
+                  </a:txBody>
+                  <a:tcPr/>
+                </a:tc>
+                <a:tc>
+                  <a:txBody>
+                    <a:bodyPr/>
+                    <a:lstStyle/>
+                    <a:p>
+                      <a:pPr algn="ctr"/>
+                      <a:r>
+                        <a:rPr lang="en-US" altLang="zh-CN" sz="1200" smtClean="0"/>
+                        <a:t>0x12</a:t>
+                      </a:r>
+                      <a:endParaRPr lang="zh-CN" altLang="en-US" sz="1200"/>
+                    </a:p>
+                  </a:txBody>
+                  <a:tcPr/>
+                </a:tc>
+                <a:extLst>
+                  <a:ext uri="{0D108BD9-81ED-4DB2-BD59-A6C34878D82A}">
+                    <a16:rowId xmlns:a16="http://schemas.microsoft.com/office/drawing/2014/main" val="799255484"/>
+                  </a:ext>
+                </a:extLst>
+              </a:tr>
+              <a:tr h="337651">
+                <a:tc>
+                  <a:txBody>
+                    <a:bodyPr/>
+                    <a:lstStyle/>
+                    <a:p>
+                      <a:pPr algn="ctr"/>
+                      <a:r>
+                        <a:rPr lang="en-US" altLang="zh-CN" sz="1200" smtClean="0"/>
+                        <a:t>0001 1110</a:t>
+                      </a:r>
+                      <a:endParaRPr lang="zh-CN" altLang="en-US" sz="1200"/>
+                    </a:p>
+                  </a:txBody>
+                  <a:tcPr/>
+                </a:tc>
+                <a:tc>
+                  <a:txBody>
+                    <a:bodyPr/>
+                    <a:lstStyle/>
+                    <a:p>
+                      <a:pPr algn="ctr"/>
+                      <a:r>
+                        <a:rPr lang="en-US" altLang="zh-CN" sz="1200" smtClean="0"/>
+                        <a:t>0110 1010</a:t>
+                      </a:r>
+                      <a:endParaRPr lang="zh-CN" altLang="en-US" sz="1200"/>
+                    </a:p>
+                  </a:txBody>
+                  <a:tcPr/>
+                </a:tc>
+                <a:tc>
+                  <a:txBody>
+                    <a:bodyPr/>
+                    <a:lstStyle/>
+                    <a:p>
+                      <a:pPr algn="ctr"/>
+                      <a:r>
+                        <a:rPr lang="en-US" altLang="zh-CN" sz="1200" smtClean="0"/>
+                        <a:t>0010 1100</a:t>
+                      </a:r>
+                      <a:endParaRPr lang="zh-CN" altLang="en-US" sz="1200"/>
+                    </a:p>
+                  </a:txBody>
+                  <a:tcPr/>
+                </a:tc>
+                <a:tc>
+                  <a:txBody>
+                    <a:bodyPr/>
+                    <a:lstStyle/>
+                    <a:p>
+                      <a:pPr algn="ctr"/>
+                      <a:r>
+                        <a:rPr lang="en-US" altLang="zh-CN" sz="1200" smtClean="0"/>
+                        <a:t>0100 1000</a:t>
+                      </a:r>
+                      <a:endParaRPr lang="zh-CN" altLang="en-US" sz="1200"/>
+                    </a:p>
+                  </a:txBody>
+                  <a:tcPr/>
+                </a:tc>
+                <a:extLst>
+                  <a:ext uri="{0D108BD9-81ED-4DB2-BD59-A6C34878D82A}">
+                    <a16:rowId xmlns:a16="http://schemas.microsoft.com/office/drawing/2014/main" val="3489875786"/>
+                  </a:ext>
+                </a:extLst>
+              </a:tr>
+              <a:tr h="337651">
+                <a:tc>
+                  <a:txBody>
+                    <a:bodyPr/>
+                    <a:lstStyle/>
+                    <a:p>
+                      <a:pPr algn="ctr"/>
+                      <a:r>
+                        <a:rPr lang="en-US" altLang="zh-CN" sz="1200" smtClean="0"/>
+                        <a:t>0x12</a:t>
+                      </a:r>
+                      <a:endParaRPr lang="zh-CN" altLang="en-US" sz="1200"/>
+                    </a:p>
+                  </a:txBody>
+                  <a:tcPr/>
+                </a:tc>
+                <a:tc>
+                  <a:txBody>
+                    <a:bodyPr/>
+                    <a:lstStyle/>
+                    <a:p>
+                      <a:pPr algn="ctr"/>
+                      <a:r>
+                        <a:rPr lang="en-US" altLang="zh-CN" sz="1200" smtClean="0"/>
+                        <a:t>0x34</a:t>
+                      </a:r>
+                      <a:endParaRPr lang="zh-CN" altLang="en-US" sz="1200"/>
+                    </a:p>
+                  </a:txBody>
+                  <a:tcPr/>
+                </a:tc>
+                <a:tc>
+                  <a:txBody>
+                    <a:bodyPr/>
+                    <a:lstStyle/>
+                    <a:p>
+                      <a:pPr algn="ctr"/>
+                      <a:r>
+                        <a:rPr lang="en-US" altLang="zh-CN" sz="1200" smtClean="0"/>
+                        <a:t>0x56</a:t>
+                      </a:r>
+                      <a:endParaRPr lang="zh-CN" altLang="en-US" sz="1200"/>
+                    </a:p>
+                  </a:txBody>
+                  <a:tcPr/>
+                </a:tc>
+                <a:tc>
+                  <a:txBody>
+                    <a:bodyPr/>
+                    <a:lstStyle/>
+                    <a:p>
+                      <a:pPr algn="ctr"/>
+                      <a:r>
+                        <a:rPr lang="en-US" altLang="zh-CN" sz="1200" smtClean="0"/>
+                        <a:t>0x78</a:t>
+                      </a:r>
+                      <a:endParaRPr lang="zh-CN" altLang="en-US" sz="1200"/>
+                    </a:p>
+                  </a:txBody>
+                  <a:tcPr/>
+                </a:tc>
+                <a:extLst>
+                  <a:ext uri="{0D108BD9-81ED-4DB2-BD59-A6C34878D82A}">
+                    <a16:rowId xmlns:a16="http://schemas.microsoft.com/office/drawing/2014/main" val="159314956"/>
+                  </a:ext>
+                </a:extLst>
+              </a:tr>
+              <a:tr h="337651">
+                <a:tc>
+                  <a:txBody>
+                    <a:bodyPr/>
+                    <a:lstStyle/>
+                    <a:p>
+                      <a:pPr marL="0" marR="0" indent="0" algn="ctr" defTabSz="914400" rtl="0" eaLnBrk="1" fontAlgn="auto" latinLnBrk="0" hangingPunct="1">
+                        <a:lnSpc>
+                          <a:spcPct val="100000"/>
+                        </a:lnSpc>
+                        <a:spcBef>
+                          <a:spcPts val="0"/>
+                        </a:spcBef>
+                        <a:spcAft>
+                          <a:spcPts val="0"/>
+                        </a:spcAft>
+                        <a:buClrTx/>
+                        <a:buSzTx/>
+                        <a:buFontTx/>
+                        <a:buNone/>
+                        <a:tabLst/>
+                        <a:defRPr/>
+                      </a:pPr>
+                      <a:r>
+                        <a:rPr lang="en-US" altLang="zh-CN" sz="1200" smtClean="0"/>
+                        <a:t>0100 1000</a:t>
+                      </a:r>
+                      <a:endParaRPr lang="zh-CN" altLang="en-US" sz="1200" smtClean="0"/>
+                    </a:p>
+                  </a:txBody>
+                  <a:tcPr/>
+                </a:tc>
+                <a:tc>
+                  <a:txBody>
+                    <a:bodyPr/>
+                    <a:lstStyle/>
+                    <a:p>
+                      <a:pPr marL="0" marR="0" indent="0" algn="ctr" defTabSz="914400" rtl="0" eaLnBrk="1" fontAlgn="auto" latinLnBrk="0" hangingPunct="1">
+                        <a:lnSpc>
+                          <a:spcPct val="100000"/>
+                        </a:lnSpc>
+                        <a:spcBef>
+                          <a:spcPts val="0"/>
+                        </a:spcBef>
+                        <a:spcAft>
+                          <a:spcPts val="0"/>
+                        </a:spcAft>
+                        <a:buClrTx/>
+                        <a:buSzTx/>
+                        <a:buFontTx/>
+                        <a:buNone/>
+                        <a:tabLst/>
+                        <a:defRPr/>
+                      </a:pPr>
+                      <a:r>
+                        <a:rPr lang="en-US" altLang="zh-CN" sz="1200" smtClean="0"/>
+                        <a:t>0010 1100</a:t>
+                      </a:r>
+                      <a:endParaRPr lang="zh-CN" altLang="en-US" sz="1200" smtClean="0"/>
+                    </a:p>
+                  </a:txBody>
+                  <a:tcPr/>
+                </a:tc>
+                <a:tc>
+                  <a:txBody>
+                    <a:bodyPr/>
+                    <a:lstStyle/>
+                    <a:p>
+                      <a:pPr marL="0" marR="0" indent="0" algn="ctr" defTabSz="914400" rtl="0" eaLnBrk="1" fontAlgn="auto" latinLnBrk="0" hangingPunct="1">
+                        <a:lnSpc>
+                          <a:spcPct val="100000"/>
+                        </a:lnSpc>
+                        <a:spcBef>
+                          <a:spcPts val="0"/>
+                        </a:spcBef>
+                        <a:spcAft>
+                          <a:spcPts val="0"/>
+                        </a:spcAft>
+                        <a:buClrTx/>
+                        <a:buSzTx/>
+                        <a:buFontTx/>
+                        <a:buNone/>
+                        <a:tabLst/>
+                        <a:defRPr/>
+                      </a:pPr>
+                      <a:r>
+                        <a:rPr lang="en-US" altLang="zh-CN" sz="1200" smtClean="0"/>
+                        <a:t>0110 1010</a:t>
+                      </a:r>
+                      <a:endParaRPr lang="zh-CN" altLang="en-US" sz="1200" smtClean="0"/>
+                    </a:p>
+                  </a:txBody>
+                  <a:tcPr/>
+                </a:tc>
+                <a:tc>
+                  <a:txBody>
+                    <a:bodyPr/>
+                    <a:lstStyle/>
+                    <a:p>
+                      <a:pPr marL="0" marR="0" indent="0" algn="ctr" defTabSz="914400" rtl="0" eaLnBrk="1" fontAlgn="auto" latinLnBrk="0" hangingPunct="1">
+                        <a:lnSpc>
+                          <a:spcPct val="100000"/>
+                        </a:lnSpc>
+                        <a:spcBef>
+                          <a:spcPts val="0"/>
+                        </a:spcBef>
+                        <a:spcAft>
+                          <a:spcPts val="0"/>
+                        </a:spcAft>
+                        <a:buClrTx/>
+                        <a:buSzTx/>
+                        <a:buFontTx/>
+                        <a:buNone/>
+                        <a:tabLst/>
+                        <a:defRPr/>
+                      </a:pPr>
+                      <a:r>
+                        <a:rPr lang="en-US" altLang="zh-CN" sz="1200" smtClean="0"/>
+                        <a:t>0001 1110</a:t>
+                      </a:r>
+                      <a:endParaRPr lang="zh-CN" altLang="en-US" sz="1200" smtClean="0"/>
+                    </a:p>
+                  </a:txBody>
+                  <a:tcPr/>
+                </a:tc>
+                <a:extLst>
+                  <a:ext uri="{0D108BD9-81ED-4DB2-BD59-A6C34878D82A}">
+                    <a16:rowId xmlns:a16="http://schemas.microsoft.com/office/drawing/2014/main" val="2980113822"/>
+                  </a:ext>
+                </a:extLst>
+              </a:tr>
+            </a:tbl>
+          </a:graphicData>
+        </a:graphic>
+      </p:graphicFrame>
+      <p:sp>
+        <p:nvSpPr>
+          <p:cNvPr id="5" name="文本框 4"/>
+          <p:cNvSpPr txBox="1"/>
+          <p:nvPr/>
+        </p:nvSpPr>
+        <p:spPr>
+          <a:xfrm>
+            <a:off x="1239520" y="57872"/>
+            <a:ext cx="4033520" cy="646331"/>
+          </a:xfrm>
+          <a:prstGeom prst="rect">
+            <a:avLst/>
+          </a:prstGeom>
+          <a:noFill/>
+        </p:spPr>
+        <p:txBody>
+          <a:bodyPr wrap="square" rtlCol="0">
+            <a:spAutoFit/>
+          </a:bodyPr>
+          <a:lstStyle/>
+          <a:p>
+            <a:r>
+              <a:rPr lang="zh-CN" altLang="en-US" sz="1200" smtClean="0"/>
+              <a:t>发送方：小端字节序</a:t>
+            </a:r>
+            <a:r>
+              <a:rPr lang="en-US" altLang="zh-CN" sz="1200" smtClean="0"/>
+              <a:t>/</a:t>
+            </a:r>
+            <a:r>
+              <a:rPr lang="zh-CN" altLang="en-US" sz="1200" smtClean="0"/>
+              <a:t>比特序，发送</a:t>
+            </a:r>
+            <a:r>
+              <a:rPr lang="en-US" altLang="zh-CN" sz="1200" smtClean="0"/>
+              <a:t>int</a:t>
+            </a:r>
+            <a:r>
+              <a:rPr lang="zh-CN" altLang="en-US" sz="1200" smtClean="0"/>
+              <a:t>型整数</a:t>
+            </a:r>
+            <a:r>
+              <a:rPr lang="en-US" altLang="zh-CN" sz="1200" smtClean="0"/>
+              <a:t>305419896</a:t>
+            </a:r>
+            <a:endParaRPr lang="en-US" altLang="zh-CN" sz="1200"/>
+          </a:p>
+          <a:p>
+            <a:r>
+              <a:rPr lang="en-US" altLang="zh-CN" sz="1200" smtClean="0"/>
+              <a:t>305419896=0x12345678</a:t>
+            </a:r>
+          </a:p>
+          <a:p>
+            <a:r>
+              <a:rPr lang="en-US" altLang="zh-CN" sz="1200" smtClean="0"/>
+              <a:t>    =0001 0010 0011 0100 0101 0110 0111 1000</a:t>
+            </a:r>
+            <a:r>
+              <a:rPr lang="zh-CN" altLang="en-US" sz="1200" smtClean="0"/>
+              <a:t>（二进制）</a:t>
+            </a:r>
+            <a:endParaRPr lang="zh-CN" altLang="en-US" sz="1200"/>
+          </a:p>
+        </p:txBody>
+      </p:sp>
+      <p:sp>
+        <p:nvSpPr>
+          <p:cNvPr id="7" name="文本框 6"/>
+          <p:cNvSpPr txBox="1"/>
+          <p:nvPr/>
+        </p:nvSpPr>
+        <p:spPr>
+          <a:xfrm>
+            <a:off x="426720" y="727286"/>
+            <a:ext cx="812800" cy="276999"/>
+          </a:xfrm>
+          <a:prstGeom prst="rect">
+            <a:avLst/>
+          </a:prstGeom>
+          <a:noFill/>
+        </p:spPr>
+        <p:txBody>
+          <a:bodyPr wrap="square" rtlCol="0">
+            <a:spAutoFit/>
+          </a:bodyPr>
+          <a:lstStyle/>
+          <a:p>
+            <a:pPr algn="r"/>
+            <a:r>
+              <a:rPr lang="zh-CN" altLang="en-US" sz="1200" smtClean="0"/>
+              <a:t>内存地址</a:t>
+            </a:r>
+            <a:endParaRPr lang="zh-CN" altLang="en-US" sz="1200"/>
+          </a:p>
+        </p:txBody>
+      </p:sp>
+      <p:sp>
+        <p:nvSpPr>
+          <p:cNvPr id="8" name="文本框 7"/>
+          <p:cNvSpPr txBox="1"/>
+          <p:nvPr/>
+        </p:nvSpPr>
+        <p:spPr>
+          <a:xfrm>
+            <a:off x="609600" y="1050451"/>
+            <a:ext cx="629920" cy="276999"/>
+          </a:xfrm>
+          <a:prstGeom prst="rect">
+            <a:avLst/>
+          </a:prstGeom>
+          <a:noFill/>
+        </p:spPr>
+        <p:txBody>
+          <a:bodyPr wrap="square" rtlCol="0">
+            <a:spAutoFit/>
+          </a:bodyPr>
+          <a:lstStyle/>
+          <a:p>
+            <a:r>
+              <a:rPr lang="en-US" altLang="zh-CN" sz="1200" smtClean="0"/>
+              <a:t>hex</a:t>
+            </a:r>
+            <a:endParaRPr lang="zh-CN" altLang="en-US" sz="1200"/>
+          </a:p>
+        </p:txBody>
+      </p:sp>
+      <p:sp>
+        <p:nvSpPr>
+          <p:cNvPr id="9" name="文本框 8"/>
+          <p:cNvSpPr txBox="1"/>
+          <p:nvPr/>
+        </p:nvSpPr>
+        <p:spPr>
+          <a:xfrm>
+            <a:off x="609600" y="1432913"/>
+            <a:ext cx="629920" cy="276999"/>
+          </a:xfrm>
+          <a:prstGeom prst="rect">
+            <a:avLst/>
+          </a:prstGeom>
+          <a:noFill/>
+        </p:spPr>
+        <p:txBody>
+          <a:bodyPr wrap="square" rtlCol="0">
+            <a:spAutoFit/>
+          </a:bodyPr>
+          <a:lstStyle/>
+          <a:p>
+            <a:r>
+              <a:rPr lang="en-US" altLang="zh-CN" sz="1200" smtClean="0"/>
+              <a:t>bit</a:t>
+            </a:r>
+            <a:endParaRPr lang="zh-CN" altLang="en-US" sz="1200"/>
+          </a:p>
+        </p:txBody>
+      </p:sp>
+      <p:sp>
+        <p:nvSpPr>
+          <p:cNvPr id="10" name="文本框 9"/>
+          <p:cNvSpPr txBox="1"/>
+          <p:nvPr/>
+        </p:nvSpPr>
+        <p:spPr>
+          <a:xfrm>
+            <a:off x="144780" y="1776907"/>
+            <a:ext cx="1094740" cy="276999"/>
+          </a:xfrm>
+          <a:prstGeom prst="rect">
+            <a:avLst/>
+          </a:prstGeom>
+          <a:noFill/>
+        </p:spPr>
+        <p:txBody>
+          <a:bodyPr wrap="square" rtlCol="0">
+            <a:spAutoFit/>
+          </a:bodyPr>
+          <a:lstStyle/>
+          <a:p>
+            <a:pPr algn="r"/>
+            <a:r>
+              <a:rPr lang="en-US" altLang="zh-CN" sz="1200" smtClean="0"/>
+              <a:t>htonl</a:t>
+            </a:r>
+            <a:r>
+              <a:rPr lang="zh-CN" altLang="en-US" sz="1200" smtClean="0"/>
+              <a:t>后的</a:t>
+            </a:r>
+            <a:r>
+              <a:rPr lang="en-US" altLang="zh-CN" sz="1200" smtClean="0"/>
+              <a:t>hex</a:t>
+            </a:r>
+            <a:endParaRPr lang="zh-CN" altLang="en-US" sz="1200"/>
+          </a:p>
+        </p:txBody>
+      </p:sp>
+      <p:sp>
+        <p:nvSpPr>
+          <p:cNvPr id="11" name="文本框 10"/>
+          <p:cNvSpPr txBox="1"/>
+          <p:nvPr/>
+        </p:nvSpPr>
+        <p:spPr>
+          <a:xfrm>
+            <a:off x="198120" y="2096224"/>
+            <a:ext cx="1041400" cy="276999"/>
+          </a:xfrm>
+          <a:prstGeom prst="rect">
+            <a:avLst/>
+          </a:prstGeom>
+          <a:noFill/>
+        </p:spPr>
+        <p:txBody>
+          <a:bodyPr wrap="square" rtlCol="0">
+            <a:spAutoFit/>
+          </a:bodyPr>
+          <a:lstStyle/>
+          <a:p>
+            <a:r>
+              <a:rPr lang="en-US" altLang="zh-CN" sz="1200" smtClean="0"/>
+              <a:t>htonl</a:t>
+            </a:r>
+            <a:r>
+              <a:rPr lang="zh-CN" altLang="en-US" sz="1200" smtClean="0"/>
+              <a:t>后的</a:t>
+            </a:r>
+            <a:r>
+              <a:rPr lang="en-US" altLang="zh-CN" sz="1200" smtClean="0"/>
+              <a:t>bit</a:t>
+            </a:r>
+            <a:endParaRPr lang="zh-CN" altLang="en-US" sz="1200"/>
+          </a:p>
+        </p:txBody>
+      </p:sp>
+      <p:sp>
+        <p:nvSpPr>
+          <p:cNvPr id="12" name="下箭头 11"/>
+          <p:cNvSpPr/>
+          <p:nvPr/>
+        </p:nvSpPr>
+        <p:spPr>
+          <a:xfrm>
+            <a:off x="3009900" y="2415541"/>
+            <a:ext cx="236220" cy="701039"/>
+          </a:xfrm>
+          <a:prstGeom prst="downArrow">
+            <a:avLst/>
+          </a:prstGeom>
+          <a:ln>
+            <a:noFill/>
+          </a:ln>
+        </p:spPr>
+        <p:style>
+          <a:lnRef idx="2">
+            <a:schemeClr val="accent1">
+              <a:shade val="50000"/>
+            </a:schemeClr>
+          </a:lnRef>
+          <a:fillRef idx="1">
+            <a:schemeClr val="accent1"/>
+          </a:fillRef>
+          <a:effectRef idx="0">
+            <a:schemeClr val="accent1"/>
+          </a:effectRef>
+          <a:fontRef idx="minor">
+            <a:schemeClr val="lt1"/>
+          </a:fontRef>
+        </p:style>
+        <p:txBody>
+          <a:bodyPr rtlCol="0" anchor="ctr"/>
+          <a:lstStyle/>
+          <a:p>
+            <a:pPr algn="ctr"/>
+            <a:endParaRPr lang="zh-CN" altLang="en-US"/>
+          </a:p>
+        </p:txBody>
+      </p:sp>
+      <p:graphicFrame>
+        <p:nvGraphicFramePr>
+          <p:cNvPr id="13" name="表格 12"/>
+          <p:cNvGraphicFramePr>
+            <a:graphicFrameLocks noGrp="1"/>
+          </p:cNvGraphicFramePr>
+          <p:nvPr>
+            <p:extLst>
+              <p:ext uri="{D42A27DB-BD31-4B8C-83A1-F6EECF244321}">
+                <p14:modId xmlns:p14="http://schemas.microsoft.com/office/powerpoint/2010/main" val="2269088428"/>
+              </p:ext>
+            </p:extLst>
+          </p:nvPr>
+        </p:nvGraphicFramePr>
+        <p:xfrm>
+          <a:off x="1170940" y="3116580"/>
+          <a:ext cx="4033520" cy="1012953"/>
+        </p:xfrm>
+        <a:graphic>
+          <a:graphicData uri="http://schemas.openxmlformats.org/drawingml/2006/table">
+            <a:tbl>
+              <a:tblPr firstRow="1" bandRow="1">
+                <a:tableStyleId>{5C22544A-7EE6-4342-B048-85BDC9FD1C3A}</a:tableStyleId>
+              </a:tblPr>
+              <a:tblGrid>
+                <a:gridCol w="1008380">
+                  <a:extLst>
+                    <a:ext uri="{9D8B030D-6E8A-4147-A177-3AD203B41FA5}">
+                      <a16:colId xmlns:a16="http://schemas.microsoft.com/office/drawing/2014/main" val="999857592"/>
+                    </a:ext>
+                  </a:extLst>
+                </a:gridCol>
+                <a:gridCol w="1008380">
+                  <a:extLst>
+                    <a:ext uri="{9D8B030D-6E8A-4147-A177-3AD203B41FA5}">
+                      <a16:colId xmlns:a16="http://schemas.microsoft.com/office/drawing/2014/main" val="3231713072"/>
+                    </a:ext>
+                  </a:extLst>
+                </a:gridCol>
+                <a:gridCol w="1008380">
+                  <a:extLst>
+                    <a:ext uri="{9D8B030D-6E8A-4147-A177-3AD203B41FA5}">
+                      <a16:colId xmlns:a16="http://schemas.microsoft.com/office/drawing/2014/main" val="1263934671"/>
+                    </a:ext>
+                  </a:extLst>
+                </a:gridCol>
+                <a:gridCol w="1008380">
+                  <a:extLst>
+                    <a:ext uri="{9D8B030D-6E8A-4147-A177-3AD203B41FA5}">
+                      <a16:colId xmlns:a16="http://schemas.microsoft.com/office/drawing/2014/main" val="1782657733"/>
+                    </a:ext>
+                  </a:extLst>
+                </a:gridCol>
+              </a:tblGrid>
+              <a:tr h="337651">
+                <a:tc>
+                  <a:txBody>
+                    <a:bodyPr/>
+                    <a:lstStyle/>
+                    <a:p>
+                      <a:pPr algn="ctr"/>
+                      <a:r>
+                        <a:rPr lang="en-US" altLang="zh-CN" sz="1200" smtClean="0"/>
+                        <a:t>0</a:t>
+                      </a:r>
+                      <a:endParaRPr lang="zh-CN" altLang="en-US" sz="1200"/>
+                    </a:p>
+                  </a:txBody>
+                  <a:tcPr/>
+                </a:tc>
+                <a:tc>
+                  <a:txBody>
+                    <a:bodyPr/>
+                    <a:lstStyle/>
+                    <a:p>
+                      <a:pPr algn="ctr"/>
+                      <a:r>
+                        <a:rPr lang="en-US" altLang="zh-CN" sz="1200" smtClean="0"/>
+                        <a:t>1</a:t>
+                      </a:r>
+                      <a:endParaRPr lang="zh-CN" altLang="en-US" sz="1200"/>
+                    </a:p>
+                  </a:txBody>
+                  <a:tcPr/>
+                </a:tc>
+                <a:tc>
+                  <a:txBody>
+                    <a:bodyPr/>
+                    <a:lstStyle/>
+                    <a:p>
+                      <a:pPr algn="ctr"/>
+                      <a:r>
+                        <a:rPr lang="en-US" altLang="zh-CN" sz="1200" smtClean="0"/>
+                        <a:t>2</a:t>
+                      </a:r>
+                      <a:endParaRPr lang="zh-CN" altLang="en-US" sz="1200"/>
+                    </a:p>
+                  </a:txBody>
+                  <a:tcPr/>
+                </a:tc>
+                <a:tc>
+                  <a:txBody>
+                    <a:bodyPr/>
+                    <a:lstStyle/>
+                    <a:p>
+                      <a:pPr algn="ctr"/>
+                      <a:r>
+                        <a:rPr lang="en-US" altLang="zh-CN" sz="1200" smtClean="0"/>
+                        <a:t>3</a:t>
+                      </a:r>
+                      <a:endParaRPr lang="zh-CN" altLang="en-US" sz="1200"/>
+                    </a:p>
+                  </a:txBody>
+                  <a:tcPr/>
+                </a:tc>
+                <a:extLst>
+                  <a:ext uri="{0D108BD9-81ED-4DB2-BD59-A6C34878D82A}">
+                    <a16:rowId xmlns:a16="http://schemas.microsoft.com/office/drawing/2014/main" val="2383739247"/>
+                  </a:ext>
+                </a:extLst>
+              </a:tr>
+              <a:tr h="337651">
+                <a:tc>
+                  <a:txBody>
+                    <a:bodyPr/>
+                    <a:lstStyle/>
+                    <a:p>
+                      <a:pPr algn="ctr"/>
+                      <a:r>
+                        <a:rPr lang="en-US" altLang="zh-CN" sz="1200" smtClean="0"/>
+                        <a:t>0x12</a:t>
+                      </a:r>
+                      <a:endParaRPr lang="zh-CN" altLang="en-US" sz="1200"/>
+                    </a:p>
+                  </a:txBody>
+                  <a:tcPr/>
+                </a:tc>
+                <a:tc>
+                  <a:txBody>
+                    <a:bodyPr/>
+                    <a:lstStyle/>
+                    <a:p>
+                      <a:pPr algn="ctr"/>
+                      <a:r>
+                        <a:rPr lang="en-US" altLang="zh-CN" sz="1200" smtClean="0"/>
+                        <a:t>0x34</a:t>
+                      </a:r>
+                      <a:endParaRPr lang="zh-CN" altLang="en-US" sz="1200"/>
+                    </a:p>
+                  </a:txBody>
+                  <a:tcPr/>
+                </a:tc>
+                <a:tc>
+                  <a:txBody>
+                    <a:bodyPr/>
+                    <a:lstStyle/>
+                    <a:p>
+                      <a:pPr algn="ctr"/>
+                      <a:r>
+                        <a:rPr lang="en-US" altLang="zh-CN" sz="1200" smtClean="0"/>
+                        <a:t>0x56</a:t>
+                      </a:r>
+                      <a:endParaRPr lang="zh-CN" altLang="en-US" sz="1200"/>
+                    </a:p>
+                  </a:txBody>
+                  <a:tcPr/>
+                </a:tc>
+                <a:tc>
+                  <a:txBody>
+                    <a:bodyPr/>
+                    <a:lstStyle/>
+                    <a:p>
+                      <a:pPr algn="ctr"/>
+                      <a:r>
+                        <a:rPr lang="en-US" altLang="zh-CN" sz="1200" smtClean="0"/>
+                        <a:t>0x78</a:t>
+                      </a:r>
+                      <a:endParaRPr lang="zh-CN" altLang="en-US" sz="1200"/>
+                    </a:p>
+                  </a:txBody>
+                  <a:tcPr/>
+                </a:tc>
+                <a:extLst>
+                  <a:ext uri="{0D108BD9-81ED-4DB2-BD59-A6C34878D82A}">
+                    <a16:rowId xmlns:a16="http://schemas.microsoft.com/office/drawing/2014/main" val="799255484"/>
+                  </a:ext>
+                </a:extLst>
+              </a:tr>
+              <a:tr h="337651">
+                <a:tc>
+                  <a:txBody>
+                    <a:bodyPr/>
+                    <a:lstStyle/>
+                    <a:p>
+                      <a:pPr marL="0" marR="0" indent="0" algn="ctr" defTabSz="914400" rtl="0" eaLnBrk="1" fontAlgn="auto" latinLnBrk="0" hangingPunct="1">
+                        <a:lnSpc>
+                          <a:spcPct val="100000"/>
+                        </a:lnSpc>
+                        <a:spcBef>
+                          <a:spcPts val="0"/>
+                        </a:spcBef>
+                        <a:spcAft>
+                          <a:spcPts val="0"/>
+                        </a:spcAft>
+                        <a:buClrTx/>
+                        <a:buSzTx/>
+                        <a:buFontTx/>
+                        <a:buNone/>
+                        <a:tabLst/>
+                        <a:defRPr/>
+                      </a:pPr>
+                      <a:r>
+                        <a:rPr lang="en-US" altLang="zh-CN" sz="1200" smtClean="0"/>
+                        <a:t>0100 1000</a:t>
+                      </a:r>
+                      <a:endParaRPr lang="zh-CN" altLang="en-US" sz="1200" smtClean="0"/>
+                    </a:p>
+                  </a:txBody>
+                  <a:tcPr/>
+                </a:tc>
+                <a:tc>
+                  <a:txBody>
+                    <a:bodyPr/>
+                    <a:lstStyle/>
+                    <a:p>
+                      <a:pPr marL="0" marR="0" indent="0" algn="ctr" defTabSz="914400" rtl="0" eaLnBrk="1" fontAlgn="auto" latinLnBrk="0" hangingPunct="1">
+                        <a:lnSpc>
+                          <a:spcPct val="100000"/>
+                        </a:lnSpc>
+                        <a:spcBef>
+                          <a:spcPts val="0"/>
+                        </a:spcBef>
+                        <a:spcAft>
+                          <a:spcPts val="0"/>
+                        </a:spcAft>
+                        <a:buClrTx/>
+                        <a:buSzTx/>
+                        <a:buFontTx/>
+                        <a:buNone/>
+                        <a:tabLst/>
+                        <a:defRPr/>
+                      </a:pPr>
+                      <a:r>
+                        <a:rPr lang="en-US" altLang="zh-CN" sz="1200" smtClean="0"/>
+                        <a:t>0010 1100</a:t>
+                      </a:r>
+                      <a:endParaRPr lang="zh-CN" altLang="en-US" sz="1200" smtClean="0"/>
+                    </a:p>
+                  </a:txBody>
+                  <a:tcPr/>
+                </a:tc>
+                <a:tc>
+                  <a:txBody>
+                    <a:bodyPr/>
+                    <a:lstStyle/>
+                    <a:p>
+                      <a:pPr marL="0" marR="0" indent="0" algn="ctr" defTabSz="914400" rtl="0" eaLnBrk="1" fontAlgn="auto" latinLnBrk="0" hangingPunct="1">
+                        <a:lnSpc>
+                          <a:spcPct val="100000"/>
+                        </a:lnSpc>
+                        <a:spcBef>
+                          <a:spcPts val="0"/>
+                        </a:spcBef>
+                        <a:spcAft>
+                          <a:spcPts val="0"/>
+                        </a:spcAft>
+                        <a:buClrTx/>
+                        <a:buSzTx/>
+                        <a:buFontTx/>
+                        <a:buNone/>
+                        <a:tabLst/>
+                        <a:defRPr/>
+                      </a:pPr>
+                      <a:r>
+                        <a:rPr lang="en-US" altLang="zh-CN" sz="1200" smtClean="0"/>
+                        <a:t>0110 1010</a:t>
+                      </a:r>
+                      <a:endParaRPr lang="zh-CN" altLang="en-US" sz="1200" smtClean="0"/>
+                    </a:p>
+                  </a:txBody>
+                  <a:tcPr/>
+                </a:tc>
+                <a:tc>
+                  <a:txBody>
+                    <a:bodyPr/>
+                    <a:lstStyle/>
+                    <a:p>
+                      <a:pPr marL="0" marR="0" indent="0" algn="ctr" defTabSz="914400" rtl="0" eaLnBrk="1" fontAlgn="auto" latinLnBrk="0" hangingPunct="1">
+                        <a:lnSpc>
+                          <a:spcPct val="100000"/>
+                        </a:lnSpc>
+                        <a:spcBef>
+                          <a:spcPts val="0"/>
+                        </a:spcBef>
+                        <a:spcAft>
+                          <a:spcPts val="0"/>
+                        </a:spcAft>
+                        <a:buClrTx/>
+                        <a:buSzTx/>
+                        <a:buFontTx/>
+                        <a:buNone/>
+                        <a:tabLst/>
+                        <a:defRPr/>
+                      </a:pPr>
+                      <a:r>
+                        <a:rPr lang="en-US" altLang="zh-CN" sz="1200" smtClean="0"/>
+                        <a:t>0001 1110</a:t>
+                      </a:r>
+                      <a:endParaRPr lang="zh-CN" altLang="en-US" sz="1200" smtClean="0"/>
+                    </a:p>
+                  </a:txBody>
+                  <a:tcPr/>
+                </a:tc>
+                <a:extLst>
+                  <a:ext uri="{0D108BD9-81ED-4DB2-BD59-A6C34878D82A}">
+                    <a16:rowId xmlns:a16="http://schemas.microsoft.com/office/drawing/2014/main" val="3489875786"/>
+                  </a:ext>
+                </a:extLst>
+              </a:tr>
+            </a:tbl>
+          </a:graphicData>
+        </a:graphic>
+      </p:graphicFrame>
+      <p:sp>
+        <p:nvSpPr>
+          <p:cNvPr id="14" name="文本框 13"/>
+          <p:cNvSpPr txBox="1"/>
+          <p:nvPr/>
+        </p:nvSpPr>
+        <p:spPr>
+          <a:xfrm>
+            <a:off x="438150" y="3772624"/>
+            <a:ext cx="732790" cy="276999"/>
+          </a:xfrm>
+          <a:prstGeom prst="rect">
+            <a:avLst/>
+          </a:prstGeom>
+          <a:noFill/>
+        </p:spPr>
+        <p:txBody>
+          <a:bodyPr wrap="square" rtlCol="0">
+            <a:spAutoFit/>
+          </a:bodyPr>
+          <a:lstStyle/>
+          <a:p>
+            <a:r>
+              <a:rPr lang="zh-CN" altLang="en-US" sz="1200" smtClean="0"/>
+              <a:t>发送</a:t>
+            </a:r>
+            <a:r>
+              <a:rPr lang="en-US" altLang="zh-CN" sz="1200" smtClean="0"/>
+              <a:t>bit</a:t>
+            </a:r>
+            <a:endParaRPr lang="zh-CN" altLang="en-US" sz="1200"/>
+          </a:p>
+        </p:txBody>
+      </p:sp>
+      <p:sp>
+        <p:nvSpPr>
+          <p:cNvPr id="15" name="下箭头 14"/>
+          <p:cNvSpPr/>
+          <p:nvPr/>
+        </p:nvSpPr>
+        <p:spPr>
+          <a:xfrm rot="10800000">
+            <a:off x="8328660" y="2391466"/>
+            <a:ext cx="236220" cy="701039"/>
+          </a:xfrm>
+          <a:prstGeom prst="downArrow">
+            <a:avLst/>
+          </a:prstGeom>
+          <a:ln>
+            <a:noFill/>
+          </a:ln>
+        </p:spPr>
+        <p:style>
+          <a:lnRef idx="2">
+            <a:schemeClr val="accent1">
+              <a:shade val="50000"/>
+            </a:schemeClr>
+          </a:lnRef>
+          <a:fillRef idx="1">
+            <a:schemeClr val="accent1"/>
+          </a:fillRef>
+          <a:effectRef idx="0">
+            <a:schemeClr val="accent1"/>
+          </a:effectRef>
+          <a:fontRef idx="minor">
+            <a:schemeClr val="lt1"/>
+          </a:fontRef>
+        </p:style>
+        <p:txBody>
+          <a:bodyPr rtlCol="0" anchor="ctr"/>
+          <a:lstStyle/>
+          <a:p>
+            <a:pPr algn="ctr"/>
+            <a:endParaRPr lang="zh-CN" altLang="en-US"/>
+          </a:p>
+        </p:txBody>
+      </p:sp>
+      <p:graphicFrame>
+        <p:nvGraphicFramePr>
+          <p:cNvPr id="16" name="表格 15"/>
+          <p:cNvGraphicFramePr>
+            <a:graphicFrameLocks noGrp="1"/>
+          </p:cNvGraphicFramePr>
+          <p:nvPr>
+            <p:extLst>
+              <p:ext uri="{D42A27DB-BD31-4B8C-83A1-F6EECF244321}">
+                <p14:modId xmlns:p14="http://schemas.microsoft.com/office/powerpoint/2010/main" val="2269088428"/>
+              </p:ext>
+            </p:extLst>
+          </p:nvPr>
+        </p:nvGraphicFramePr>
+        <p:xfrm>
+          <a:off x="6489700" y="3092505"/>
+          <a:ext cx="4033520" cy="1012953"/>
+        </p:xfrm>
+        <a:graphic>
+          <a:graphicData uri="http://schemas.openxmlformats.org/drawingml/2006/table">
+            <a:tbl>
+              <a:tblPr firstRow="1" bandRow="1">
+                <a:tableStyleId>{5C22544A-7EE6-4342-B048-85BDC9FD1C3A}</a:tableStyleId>
+              </a:tblPr>
+              <a:tblGrid>
+                <a:gridCol w="1008380">
+                  <a:extLst>
+                    <a:ext uri="{9D8B030D-6E8A-4147-A177-3AD203B41FA5}">
+                      <a16:colId xmlns:a16="http://schemas.microsoft.com/office/drawing/2014/main" val="999857592"/>
+                    </a:ext>
+                  </a:extLst>
+                </a:gridCol>
+                <a:gridCol w="1008380">
+                  <a:extLst>
+                    <a:ext uri="{9D8B030D-6E8A-4147-A177-3AD203B41FA5}">
+                      <a16:colId xmlns:a16="http://schemas.microsoft.com/office/drawing/2014/main" val="3231713072"/>
+                    </a:ext>
+                  </a:extLst>
+                </a:gridCol>
+                <a:gridCol w="1008380">
+                  <a:extLst>
+                    <a:ext uri="{9D8B030D-6E8A-4147-A177-3AD203B41FA5}">
+                      <a16:colId xmlns:a16="http://schemas.microsoft.com/office/drawing/2014/main" val="1263934671"/>
+                    </a:ext>
+                  </a:extLst>
+                </a:gridCol>
+                <a:gridCol w="1008380">
+                  <a:extLst>
+                    <a:ext uri="{9D8B030D-6E8A-4147-A177-3AD203B41FA5}">
+                      <a16:colId xmlns:a16="http://schemas.microsoft.com/office/drawing/2014/main" val="1782657733"/>
+                    </a:ext>
+                  </a:extLst>
+                </a:gridCol>
+              </a:tblGrid>
+              <a:tr h="337651">
+                <a:tc>
+                  <a:txBody>
+                    <a:bodyPr/>
+                    <a:lstStyle/>
+                    <a:p>
+                      <a:pPr algn="ctr"/>
+                      <a:r>
+                        <a:rPr lang="en-US" altLang="zh-CN" sz="1200" smtClean="0"/>
+                        <a:t>0</a:t>
+                      </a:r>
+                      <a:endParaRPr lang="zh-CN" altLang="en-US" sz="1200"/>
+                    </a:p>
+                  </a:txBody>
+                  <a:tcPr/>
+                </a:tc>
+                <a:tc>
+                  <a:txBody>
+                    <a:bodyPr/>
+                    <a:lstStyle/>
+                    <a:p>
+                      <a:pPr algn="ctr"/>
+                      <a:r>
+                        <a:rPr lang="en-US" altLang="zh-CN" sz="1200" smtClean="0"/>
+                        <a:t>1</a:t>
+                      </a:r>
+                      <a:endParaRPr lang="zh-CN" altLang="en-US" sz="1200"/>
+                    </a:p>
+                  </a:txBody>
+                  <a:tcPr/>
+                </a:tc>
+                <a:tc>
+                  <a:txBody>
+                    <a:bodyPr/>
+                    <a:lstStyle/>
+                    <a:p>
+                      <a:pPr algn="ctr"/>
+                      <a:r>
+                        <a:rPr lang="en-US" altLang="zh-CN" sz="1200" smtClean="0"/>
+                        <a:t>2</a:t>
+                      </a:r>
+                      <a:endParaRPr lang="zh-CN" altLang="en-US" sz="1200"/>
+                    </a:p>
+                  </a:txBody>
+                  <a:tcPr/>
+                </a:tc>
+                <a:tc>
+                  <a:txBody>
+                    <a:bodyPr/>
+                    <a:lstStyle/>
+                    <a:p>
+                      <a:pPr algn="ctr"/>
+                      <a:r>
+                        <a:rPr lang="en-US" altLang="zh-CN" sz="1200" smtClean="0"/>
+                        <a:t>3</a:t>
+                      </a:r>
+                      <a:endParaRPr lang="zh-CN" altLang="en-US" sz="1200"/>
+                    </a:p>
+                  </a:txBody>
+                  <a:tcPr/>
+                </a:tc>
+                <a:extLst>
+                  <a:ext uri="{0D108BD9-81ED-4DB2-BD59-A6C34878D82A}">
+                    <a16:rowId xmlns:a16="http://schemas.microsoft.com/office/drawing/2014/main" val="2383739247"/>
+                  </a:ext>
+                </a:extLst>
+              </a:tr>
+              <a:tr h="337651">
+                <a:tc>
+                  <a:txBody>
+                    <a:bodyPr/>
+                    <a:lstStyle/>
+                    <a:p>
+                      <a:pPr algn="ctr"/>
+                      <a:r>
+                        <a:rPr lang="en-US" altLang="zh-CN" sz="1200" smtClean="0"/>
+                        <a:t>0x12</a:t>
+                      </a:r>
+                      <a:endParaRPr lang="zh-CN" altLang="en-US" sz="1200"/>
+                    </a:p>
+                  </a:txBody>
+                  <a:tcPr/>
+                </a:tc>
+                <a:tc>
+                  <a:txBody>
+                    <a:bodyPr/>
+                    <a:lstStyle/>
+                    <a:p>
+                      <a:pPr algn="ctr"/>
+                      <a:r>
+                        <a:rPr lang="en-US" altLang="zh-CN" sz="1200" smtClean="0"/>
+                        <a:t>0x34</a:t>
+                      </a:r>
+                      <a:endParaRPr lang="zh-CN" altLang="en-US" sz="1200"/>
+                    </a:p>
+                  </a:txBody>
+                  <a:tcPr/>
+                </a:tc>
+                <a:tc>
+                  <a:txBody>
+                    <a:bodyPr/>
+                    <a:lstStyle/>
+                    <a:p>
+                      <a:pPr algn="ctr"/>
+                      <a:r>
+                        <a:rPr lang="en-US" altLang="zh-CN" sz="1200" smtClean="0"/>
+                        <a:t>0x56</a:t>
+                      </a:r>
+                      <a:endParaRPr lang="zh-CN" altLang="en-US" sz="1200"/>
+                    </a:p>
+                  </a:txBody>
+                  <a:tcPr/>
+                </a:tc>
+                <a:tc>
+                  <a:txBody>
+                    <a:bodyPr/>
+                    <a:lstStyle/>
+                    <a:p>
+                      <a:pPr algn="ctr"/>
+                      <a:r>
+                        <a:rPr lang="en-US" altLang="zh-CN" sz="1200" smtClean="0"/>
+                        <a:t>0x78</a:t>
+                      </a:r>
+                      <a:endParaRPr lang="zh-CN" altLang="en-US" sz="1200"/>
+                    </a:p>
+                  </a:txBody>
+                  <a:tcPr/>
+                </a:tc>
+                <a:extLst>
+                  <a:ext uri="{0D108BD9-81ED-4DB2-BD59-A6C34878D82A}">
+                    <a16:rowId xmlns:a16="http://schemas.microsoft.com/office/drawing/2014/main" val="799255484"/>
+                  </a:ext>
+                </a:extLst>
+              </a:tr>
+              <a:tr h="337651">
+                <a:tc>
+                  <a:txBody>
+                    <a:bodyPr/>
+                    <a:lstStyle/>
+                    <a:p>
+                      <a:pPr marL="0" marR="0" indent="0" algn="ctr" defTabSz="914400" rtl="0" eaLnBrk="1" fontAlgn="auto" latinLnBrk="0" hangingPunct="1">
+                        <a:lnSpc>
+                          <a:spcPct val="100000"/>
+                        </a:lnSpc>
+                        <a:spcBef>
+                          <a:spcPts val="0"/>
+                        </a:spcBef>
+                        <a:spcAft>
+                          <a:spcPts val="0"/>
+                        </a:spcAft>
+                        <a:buClrTx/>
+                        <a:buSzTx/>
+                        <a:buFontTx/>
+                        <a:buNone/>
+                        <a:tabLst/>
+                        <a:defRPr/>
+                      </a:pPr>
+                      <a:r>
+                        <a:rPr lang="en-US" altLang="zh-CN" sz="1200" smtClean="0"/>
+                        <a:t>0100 1000</a:t>
+                      </a:r>
+                      <a:endParaRPr lang="zh-CN" altLang="en-US" sz="1200" smtClean="0"/>
+                    </a:p>
+                  </a:txBody>
+                  <a:tcPr/>
+                </a:tc>
+                <a:tc>
+                  <a:txBody>
+                    <a:bodyPr/>
+                    <a:lstStyle/>
+                    <a:p>
+                      <a:pPr marL="0" marR="0" indent="0" algn="ctr" defTabSz="914400" rtl="0" eaLnBrk="1" fontAlgn="auto" latinLnBrk="0" hangingPunct="1">
+                        <a:lnSpc>
+                          <a:spcPct val="100000"/>
+                        </a:lnSpc>
+                        <a:spcBef>
+                          <a:spcPts val="0"/>
+                        </a:spcBef>
+                        <a:spcAft>
+                          <a:spcPts val="0"/>
+                        </a:spcAft>
+                        <a:buClrTx/>
+                        <a:buSzTx/>
+                        <a:buFontTx/>
+                        <a:buNone/>
+                        <a:tabLst/>
+                        <a:defRPr/>
+                      </a:pPr>
+                      <a:r>
+                        <a:rPr lang="en-US" altLang="zh-CN" sz="1200" smtClean="0"/>
+                        <a:t>0010 1100</a:t>
+                      </a:r>
+                      <a:endParaRPr lang="zh-CN" altLang="en-US" sz="1200" smtClean="0"/>
+                    </a:p>
+                  </a:txBody>
+                  <a:tcPr/>
+                </a:tc>
+                <a:tc>
+                  <a:txBody>
+                    <a:bodyPr/>
+                    <a:lstStyle/>
+                    <a:p>
+                      <a:pPr marL="0" marR="0" indent="0" algn="ctr" defTabSz="914400" rtl="0" eaLnBrk="1" fontAlgn="auto" latinLnBrk="0" hangingPunct="1">
+                        <a:lnSpc>
+                          <a:spcPct val="100000"/>
+                        </a:lnSpc>
+                        <a:spcBef>
+                          <a:spcPts val="0"/>
+                        </a:spcBef>
+                        <a:spcAft>
+                          <a:spcPts val="0"/>
+                        </a:spcAft>
+                        <a:buClrTx/>
+                        <a:buSzTx/>
+                        <a:buFontTx/>
+                        <a:buNone/>
+                        <a:tabLst/>
+                        <a:defRPr/>
+                      </a:pPr>
+                      <a:r>
+                        <a:rPr lang="en-US" altLang="zh-CN" sz="1200" smtClean="0"/>
+                        <a:t>0110 1010</a:t>
+                      </a:r>
+                      <a:endParaRPr lang="zh-CN" altLang="en-US" sz="1200" smtClean="0"/>
+                    </a:p>
+                  </a:txBody>
+                  <a:tcPr/>
+                </a:tc>
+                <a:tc>
+                  <a:txBody>
+                    <a:bodyPr/>
+                    <a:lstStyle/>
+                    <a:p>
+                      <a:pPr marL="0" marR="0" indent="0" algn="ctr" defTabSz="914400" rtl="0" eaLnBrk="1" fontAlgn="auto" latinLnBrk="0" hangingPunct="1">
+                        <a:lnSpc>
+                          <a:spcPct val="100000"/>
+                        </a:lnSpc>
+                        <a:spcBef>
+                          <a:spcPts val="0"/>
+                        </a:spcBef>
+                        <a:spcAft>
+                          <a:spcPts val="0"/>
+                        </a:spcAft>
+                        <a:buClrTx/>
+                        <a:buSzTx/>
+                        <a:buFontTx/>
+                        <a:buNone/>
+                        <a:tabLst/>
+                        <a:defRPr/>
+                      </a:pPr>
+                      <a:r>
+                        <a:rPr lang="en-US" altLang="zh-CN" sz="1200" smtClean="0"/>
+                        <a:t>0001 1110</a:t>
+                      </a:r>
+                      <a:endParaRPr lang="zh-CN" altLang="en-US" sz="1200" smtClean="0"/>
+                    </a:p>
+                  </a:txBody>
+                  <a:tcPr/>
+                </a:tc>
+                <a:extLst>
+                  <a:ext uri="{0D108BD9-81ED-4DB2-BD59-A6C34878D82A}">
+                    <a16:rowId xmlns:a16="http://schemas.microsoft.com/office/drawing/2014/main" val="3489875786"/>
+                  </a:ext>
+                </a:extLst>
+              </a:tr>
+            </a:tbl>
+          </a:graphicData>
+        </a:graphic>
+      </p:graphicFrame>
+      <p:sp>
+        <p:nvSpPr>
+          <p:cNvPr id="17" name="文本框 16"/>
+          <p:cNvSpPr txBox="1"/>
+          <p:nvPr/>
+        </p:nvSpPr>
+        <p:spPr>
+          <a:xfrm>
+            <a:off x="5756910" y="3748549"/>
+            <a:ext cx="732790" cy="276999"/>
+          </a:xfrm>
+          <a:prstGeom prst="rect">
+            <a:avLst/>
+          </a:prstGeom>
+          <a:noFill/>
+        </p:spPr>
+        <p:txBody>
+          <a:bodyPr wrap="square" rtlCol="0">
+            <a:spAutoFit/>
+          </a:bodyPr>
+          <a:lstStyle/>
+          <a:p>
+            <a:r>
+              <a:rPr lang="zh-CN" altLang="en-US" sz="1200" smtClean="0"/>
+              <a:t>接收</a:t>
+            </a:r>
+            <a:r>
+              <a:rPr lang="en-US" altLang="zh-CN" sz="1200" smtClean="0"/>
+              <a:t>bit</a:t>
+            </a:r>
+            <a:endParaRPr lang="zh-CN" altLang="en-US" sz="1200"/>
+          </a:p>
+        </p:txBody>
+      </p:sp>
+      <p:graphicFrame>
+        <p:nvGraphicFramePr>
+          <p:cNvPr id="18" name="表格 17"/>
+          <p:cNvGraphicFramePr>
+            <a:graphicFrameLocks noGrp="1"/>
+          </p:cNvGraphicFramePr>
+          <p:nvPr>
+            <p:extLst>
+              <p:ext uri="{D42A27DB-BD31-4B8C-83A1-F6EECF244321}">
+                <p14:modId xmlns:p14="http://schemas.microsoft.com/office/powerpoint/2010/main" val="985287583"/>
+              </p:ext>
+            </p:extLst>
+          </p:nvPr>
+        </p:nvGraphicFramePr>
+        <p:xfrm>
+          <a:off x="6489700" y="727287"/>
+          <a:ext cx="4033520" cy="1688255"/>
+        </p:xfrm>
+        <a:graphic>
+          <a:graphicData uri="http://schemas.openxmlformats.org/drawingml/2006/table">
+            <a:tbl>
+              <a:tblPr firstRow="1" bandRow="1">
+                <a:tableStyleId>{5C22544A-7EE6-4342-B048-85BDC9FD1C3A}</a:tableStyleId>
+              </a:tblPr>
+              <a:tblGrid>
+                <a:gridCol w="1008380">
+                  <a:extLst>
+                    <a:ext uri="{9D8B030D-6E8A-4147-A177-3AD203B41FA5}">
+                      <a16:colId xmlns:a16="http://schemas.microsoft.com/office/drawing/2014/main" val="999857592"/>
+                    </a:ext>
+                  </a:extLst>
+                </a:gridCol>
+                <a:gridCol w="1008380">
+                  <a:extLst>
+                    <a:ext uri="{9D8B030D-6E8A-4147-A177-3AD203B41FA5}">
+                      <a16:colId xmlns:a16="http://schemas.microsoft.com/office/drawing/2014/main" val="3231713072"/>
+                    </a:ext>
+                  </a:extLst>
+                </a:gridCol>
+                <a:gridCol w="1008380">
+                  <a:extLst>
+                    <a:ext uri="{9D8B030D-6E8A-4147-A177-3AD203B41FA5}">
+                      <a16:colId xmlns:a16="http://schemas.microsoft.com/office/drawing/2014/main" val="1263934671"/>
+                    </a:ext>
+                  </a:extLst>
+                </a:gridCol>
+                <a:gridCol w="1008380">
+                  <a:extLst>
+                    <a:ext uri="{9D8B030D-6E8A-4147-A177-3AD203B41FA5}">
+                      <a16:colId xmlns:a16="http://schemas.microsoft.com/office/drawing/2014/main" val="1782657733"/>
+                    </a:ext>
+                  </a:extLst>
+                </a:gridCol>
+              </a:tblGrid>
+              <a:tr h="337651">
+                <a:tc>
+                  <a:txBody>
+                    <a:bodyPr/>
+                    <a:lstStyle/>
+                    <a:p>
+                      <a:pPr algn="ctr"/>
+                      <a:r>
+                        <a:rPr lang="en-US" altLang="zh-CN" sz="1200" smtClean="0"/>
+                        <a:t>0</a:t>
+                      </a:r>
+                      <a:endParaRPr lang="zh-CN" altLang="en-US" sz="1200"/>
+                    </a:p>
+                  </a:txBody>
+                  <a:tcPr/>
+                </a:tc>
+                <a:tc>
+                  <a:txBody>
+                    <a:bodyPr/>
+                    <a:lstStyle/>
+                    <a:p>
+                      <a:pPr algn="ctr"/>
+                      <a:r>
+                        <a:rPr lang="en-US" altLang="zh-CN" sz="1200" smtClean="0"/>
+                        <a:t>1</a:t>
+                      </a:r>
+                      <a:endParaRPr lang="zh-CN" altLang="en-US" sz="1200"/>
+                    </a:p>
+                  </a:txBody>
+                  <a:tcPr/>
+                </a:tc>
+                <a:tc>
+                  <a:txBody>
+                    <a:bodyPr/>
+                    <a:lstStyle/>
+                    <a:p>
+                      <a:pPr algn="ctr"/>
+                      <a:r>
+                        <a:rPr lang="en-US" altLang="zh-CN" sz="1200" smtClean="0"/>
+                        <a:t>2</a:t>
+                      </a:r>
+                      <a:endParaRPr lang="zh-CN" altLang="en-US" sz="1200"/>
+                    </a:p>
+                  </a:txBody>
+                  <a:tcPr/>
+                </a:tc>
+                <a:tc>
+                  <a:txBody>
+                    <a:bodyPr/>
+                    <a:lstStyle/>
+                    <a:p>
+                      <a:pPr algn="ctr"/>
+                      <a:r>
+                        <a:rPr lang="en-US" altLang="zh-CN" sz="1200" smtClean="0"/>
+                        <a:t>3</a:t>
+                      </a:r>
+                      <a:endParaRPr lang="zh-CN" altLang="en-US" sz="1200"/>
+                    </a:p>
+                  </a:txBody>
+                  <a:tcPr/>
+                </a:tc>
+                <a:extLst>
+                  <a:ext uri="{0D108BD9-81ED-4DB2-BD59-A6C34878D82A}">
+                    <a16:rowId xmlns:a16="http://schemas.microsoft.com/office/drawing/2014/main" val="2383739247"/>
+                  </a:ext>
+                </a:extLst>
+              </a:tr>
+              <a:tr h="337651">
+                <a:tc>
+                  <a:txBody>
+                    <a:bodyPr/>
+                    <a:lstStyle/>
+                    <a:p>
+                      <a:pPr marL="0" marR="0" indent="0" algn="ctr" defTabSz="914400" rtl="0" eaLnBrk="1" fontAlgn="auto" latinLnBrk="0" hangingPunct="1">
+                        <a:lnSpc>
+                          <a:spcPct val="100000"/>
+                        </a:lnSpc>
+                        <a:spcBef>
+                          <a:spcPts val="0"/>
+                        </a:spcBef>
+                        <a:spcAft>
+                          <a:spcPts val="0"/>
+                        </a:spcAft>
+                        <a:buClrTx/>
+                        <a:buSzTx/>
+                        <a:buFontTx/>
+                        <a:buNone/>
+                        <a:tabLst/>
+                        <a:defRPr/>
+                      </a:pPr>
+                      <a:r>
+                        <a:rPr lang="en-US" altLang="zh-CN" sz="1200" smtClean="0"/>
+                        <a:t>0001 0010</a:t>
+                      </a:r>
+                      <a:endParaRPr lang="zh-CN" altLang="en-US" sz="1200" smtClean="0"/>
+                    </a:p>
+                  </a:txBody>
+                  <a:tcPr/>
+                </a:tc>
+                <a:tc>
+                  <a:txBody>
+                    <a:bodyPr/>
+                    <a:lstStyle/>
+                    <a:p>
+                      <a:pPr marL="0" marR="0" indent="0" algn="ctr" defTabSz="914400" rtl="0" eaLnBrk="1" fontAlgn="auto" latinLnBrk="0" hangingPunct="1">
+                        <a:lnSpc>
+                          <a:spcPct val="100000"/>
+                        </a:lnSpc>
+                        <a:spcBef>
+                          <a:spcPts val="0"/>
+                        </a:spcBef>
+                        <a:spcAft>
+                          <a:spcPts val="0"/>
+                        </a:spcAft>
+                        <a:buClrTx/>
+                        <a:buSzTx/>
+                        <a:buFontTx/>
+                        <a:buNone/>
+                        <a:tabLst/>
+                        <a:defRPr/>
+                      </a:pPr>
+                      <a:r>
+                        <a:rPr lang="en-US" altLang="zh-CN" sz="1200" smtClean="0"/>
+                        <a:t>0011</a:t>
+                      </a:r>
+                      <a:r>
+                        <a:rPr lang="en-US" altLang="zh-CN" sz="1200" baseline="0" smtClean="0"/>
+                        <a:t> 0100</a:t>
+                      </a:r>
+                      <a:endParaRPr lang="zh-CN" altLang="en-US" sz="1200" smtClean="0"/>
+                    </a:p>
+                  </a:txBody>
+                  <a:tcPr/>
+                </a:tc>
+                <a:tc>
+                  <a:txBody>
+                    <a:bodyPr/>
+                    <a:lstStyle/>
+                    <a:p>
+                      <a:pPr marL="0" marR="0" indent="0" algn="ctr" defTabSz="914400" rtl="0" eaLnBrk="1" fontAlgn="auto" latinLnBrk="0" hangingPunct="1">
+                        <a:lnSpc>
+                          <a:spcPct val="100000"/>
+                        </a:lnSpc>
+                        <a:spcBef>
+                          <a:spcPts val="0"/>
+                        </a:spcBef>
+                        <a:spcAft>
+                          <a:spcPts val="0"/>
+                        </a:spcAft>
+                        <a:buClrTx/>
+                        <a:buSzTx/>
+                        <a:buFontTx/>
+                        <a:buNone/>
+                        <a:tabLst/>
+                        <a:defRPr/>
+                      </a:pPr>
+                      <a:r>
+                        <a:rPr lang="en-US" altLang="zh-CN" sz="1200" smtClean="0"/>
+                        <a:t>0101</a:t>
+                      </a:r>
+                      <a:r>
+                        <a:rPr lang="en-US" altLang="zh-CN" sz="1200" baseline="0" smtClean="0"/>
+                        <a:t> 0110</a:t>
+                      </a:r>
+                      <a:endParaRPr lang="zh-CN" altLang="en-US" sz="1200" smtClean="0"/>
+                    </a:p>
+                  </a:txBody>
+                  <a:tcPr/>
+                </a:tc>
+                <a:tc>
+                  <a:txBody>
+                    <a:bodyPr/>
+                    <a:lstStyle/>
+                    <a:p>
+                      <a:pPr marL="0" marR="0" indent="0" algn="ctr" defTabSz="914400" rtl="0" eaLnBrk="1" fontAlgn="auto" latinLnBrk="0" hangingPunct="1">
+                        <a:lnSpc>
+                          <a:spcPct val="100000"/>
+                        </a:lnSpc>
+                        <a:spcBef>
+                          <a:spcPts val="0"/>
+                        </a:spcBef>
+                        <a:spcAft>
+                          <a:spcPts val="0"/>
+                        </a:spcAft>
+                        <a:buClrTx/>
+                        <a:buSzTx/>
+                        <a:buFontTx/>
+                        <a:buNone/>
+                        <a:tabLst/>
+                        <a:defRPr/>
+                      </a:pPr>
+                      <a:r>
+                        <a:rPr lang="en-US" altLang="zh-CN" sz="1200" smtClean="0"/>
+                        <a:t>0111 1000</a:t>
+                      </a:r>
+                      <a:endParaRPr lang="zh-CN" altLang="en-US" sz="1200" smtClean="0"/>
+                    </a:p>
+                  </a:txBody>
+                  <a:tcPr/>
+                </a:tc>
+                <a:extLst>
+                  <a:ext uri="{0D108BD9-81ED-4DB2-BD59-A6C34878D82A}">
+                    <a16:rowId xmlns:a16="http://schemas.microsoft.com/office/drawing/2014/main" val="799255484"/>
+                  </a:ext>
+                </a:extLst>
+              </a:tr>
+              <a:tr h="337651">
+                <a:tc>
+                  <a:txBody>
+                    <a:bodyPr/>
+                    <a:lstStyle/>
+                    <a:p>
+                      <a:pPr marL="0" marR="0" indent="0" algn="ctr" defTabSz="914400" rtl="0" eaLnBrk="1" fontAlgn="auto" latinLnBrk="0" hangingPunct="1">
+                        <a:lnSpc>
+                          <a:spcPct val="100000"/>
+                        </a:lnSpc>
+                        <a:spcBef>
+                          <a:spcPts val="0"/>
+                        </a:spcBef>
+                        <a:spcAft>
+                          <a:spcPts val="0"/>
+                        </a:spcAft>
+                        <a:buClrTx/>
+                        <a:buSzTx/>
+                        <a:buFontTx/>
+                        <a:buNone/>
+                        <a:tabLst/>
+                        <a:defRPr/>
+                      </a:pPr>
+                      <a:r>
+                        <a:rPr lang="en-US" altLang="zh-CN" sz="1200" smtClean="0"/>
+                        <a:t>0x12</a:t>
+                      </a:r>
+                      <a:endParaRPr lang="zh-CN" altLang="en-US" sz="1200" smtClean="0"/>
+                    </a:p>
+                  </a:txBody>
+                  <a:tcPr/>
+                </a:tc>
+                <a:tc>
+                  <a:txBody>
+                    <a:bodyPr/>
+                    <a:lstStyle/>
+                    <a:p>
+                      <a:pPr algn="ctr"/>
+                      <a:r>
+                        <a:rPr lang="en-US" altLang="zh-CN" sz="1200" smtClean="0"/>
+                        <a:t>0x34</a:t>
+                      </a:r>
+                      <a:endParaRPr lang="zh-CN" altLang="en-US" sz="1200"/>
+                    </a:p>
+                  </a:txBody>
+                  <a:tcPr/>
+                </a:tc>
+                <a:tc>
+                  <a:txBody>
+                    <a:bodyPr/>
+                    <a:lstStyle/>
+                    <a:p>
+                      <a:pPr algn="ctr"/>
+                      <a:r>
+                        <a:rPr lang="en-US" altLang="zh-CN" sz="1200" smtClean="0"/>
+                        <a:t>0x56</a:t>
+                      </a:r>
+                      <a:endParaRPr lang="zh-CN" altLang="en-US" sz="1200"/>
+                    </a:p>
+                  </a:txBody>
+                  <a:tcPr/>
+                </a:tc>
+                <a:tc>
+                  <a:txBody>
+                    <a:bodyPr/>
+                    <a:lstStyle/>
+                    <a:p>
+                      <a:pPr algn="ctr"/>
+                      <a:r>
+                        <a:rPr lang="en-US" altLang="zh-CN" sz="1200" smtClean="0"/>
+                        <a:t>0x78</a:t>
+                      </a:r>
+                      <a:endParaRPr lang="zh-CN" altLang="en-US" sz="1200"/>
+                    </a:p>
+                  </a:txBody>
+                  <a:tcPr/>
+                </a:tc>
+                <a:extLst>
+                  <a:ext uri="{0D108BD9-81ED-4DB2-BD59-A6C34878D82A}">
+                    <a16:rowId xmlns:a16="http://schemas.microsoft.com/office/drawing/2014/main" val="3489875786"/>
+                  </a:ext>
+                </a:extLst>
+              </a:tr>
+              <a:tr h="337651">
+                <a:tc>
+                  <a:txBody>
+                    <a:bodyPr/>
+                    <a:lstStyle/>
+                    <a:p>
+                      <a:pPr marL="0" marR="0" indent="0" algn="ctr" defTabSz="914400" rtl="0" eaLnBrk="1" fontAlgn="auto" latinLnBrk="0" hangingPunct="1">
+                        <a:lnSpc>
+                          <a:spcPct val="100000"/>
+                        </a:lnSpc>
+                        <a:spcBef>
+                          <a:spcPts val="0"/>
+                        </a:spcBef>
+                        <a:spcAft>
+                          <a:spcPts val="0"/>
+                        </a:spcAft>
+                        <a:buClrTx/>
+                        <a:buSzTx/>
+                        <a:buFontTx/>
+                        <a:buNone/>
+                        <a:tabLst/>
+                        <a:defRPr/>
+                      </a:pPr>
+                      <a:r>
+                        <a:rPr lang="en-US" altLang="zh-CN" sz="1200" smtClean="0"/>
+                        <a:t>0001 0010</a:t>
+                      </a:r>
+                      <a:endParaRPr lang="zh-CN" altLang="en-US" sz="1200" smtClean="0"/>
+                    </a:p>
+                  </a:txBody>
+                  <a:tcPr/>
+                </a:tc>
+                <a:tc>
+                  <a:txBody>
+                    <a:bodyPr/>
+                    <a:lstStyle/>
+                    <a:p>
+                      <a:pPr marL="0" marR="0" indent="0" algn="ctr" defTabSz="914400" rtl="0" eaLnBrk="1" fontAlgn="auto" latinLnBrk="0" hangingPunct="1">
+                        <a:lnSpc>
+                          <a:spcPct val="100000"/>
+                        </a:lnSpc>
+                        <a:spcBef>
+                          <a:spcPts val="0"/>
+                        </a:spcBef>
+                        <a:spcAft>
+                          <a:spcPts val="0"/>
+                        </a:spcAft>
+                        <a:buClrTx/>
+                        <a:buSzTx/>
+                        <a:buFontTx/>
+                        <a:buNone/>
+                        <a:tabLst/>
+                        <a:defRPr/>
+                      </a:pPr>
+                      <a:r>
+                        <a:rPr lang="en-US" altLang="zh-CN" sz="1200" smtClean="0"/>
+                        <a:t>0011</a:t>
+                      </a:r>
+                      <a:r>
+                        <a:rPr lang="en-US" altLang="zh-CN" sz="1200" baseline="0" smtClean="0"/>
+                        <a:t> 0100</a:t>
+                      </a:r>
+                      <a:endParaRPr lang="zh-CN" altLang="en-US" sz="1200" smtClean="0"/>
+                    </a:p>
+                  </a:txBody>
+                  <a:tcPr/>
+                </a:tc>
+                <a:tc>
+                  <a:txBody>
+                    <a:bodyPr/>
+                    <a:lstStyle/>
+                    <a:p>
+                      <a:pPr marL="0" marR="0" indent="0" algn="ctr" defTabSz="914400" rtl="0" eaLnBrk="1" fontAlgn="auto" latinLnBrk="0" hangingPunct="1">
+                        <a:lnSpc>
+                          <a:spcPct val="100000"/>
+                        </a:lnSpc>
+                        <a:spcBef>
+                          <a:spcPts val="0"/>
+                        </a:spcBef>
+                        <a:spcAft>
+                          <a:spcPts val="0"/>
+                        </a:spcAft>
+                        <a:buClrTx/>
+                        <a:buSzTx/>
+                        <a:buFontTx/>
+                        <a:buNone/>
+                        <a:tabLst/>
+                        <a:defRPr/>
+                      </a:pPr>
+                      <a:r>
+                        <a:rPr lang="en-US" altLang="zh-CN" sz="1200" smtClean="0"/>
+                        <a:t>0101</a:t>
+                      </a:r>
+                      <a:r>
+                        <a:rPr lang="en-US" altLang="zh-CN" sz="1200" baseline="0" smtClean="0"/>
+                        <a:t> 0110</a:t>
+                      </a:r>
+                      <a:endParaRPr lang="zh-CN" altLang="en-US" sz="1200" smtClean="0"/>
+                    </a:p>
+                  </a:txBody>
+                  <a:tcPr/>
+                </a:tc>
+                <a:tc>
+                  <a:txBody>
+                    <a:bodyPr/>
+                    <a:lstStyle/>
+                    <a:p>
+                      <a:pPr marL="0" marR="0" indent="0" algn="ctr" defTabSz="914400" rtl="0" eaLnBrk="1" fontAlgn="auto" latinLnBrk="0" hangingPunct="1">
+                        <a:lnSpc>
+                          <a:spcPct val="100000"/>
+                        </a:lnSpc>
+                        <a:spcBef>
+                          <a:spcPts val="0"/>
+                        </a:spcBef>
+                        <a:spcAft>
+                          <a:spcPts val="0"/>
+                        </a:spcAft>
+                        <a:buClrTx/>
+                        <a:buSzTx/>
+                        <a:buFontTx/>
+                        <a:buNone/>
+                        <a:tabLst/>
+                        <a:defRPr/>
+                      </a:pPr>
+                      <a:r>
+                        <a:rPr lang="en-US" altLang="zh-CN" sz="1200" smtClean="0"/>
+                        <a:t>0111 1000</a:t>
+                      </a:r>
+                      <a:endParaRPr lang="zh-CN" altLang="en-US" sz="1200" smtClean="0"/>
+                    </a:p>
+                  </a:txBody>
+                  <a:tcPr/>
+                </a:tc>
+                <a:extLst>
+                  <a:ext uri="{0D108BD9-81ED-4DB2-BD59-A6C34878D82A}">
+                    <a16:rowId xmlns:a16="http://schemas.microsoft.com/office/drawing/2014/main" val="159314956"/>
+                  </a:ext>
+                </a:extLst>
+              </a:tr>
+              <a:tr h="337651">
+                <a:tc>
+                  <a:txBody>
+                    <a:bodyPr/>
+                    <a:lstStyle/>
+                    <a:p>
+                      <a:pPr marL="0" marR="0" indent="0" algn="ctr" defTabSz="914400" rtl="0" eaLnBrk="1" fontAlgn="auto" latinLnBrk="0" hangingPunct="1">
+                        <a:lnSpc>
+                          <a:spcPct val="100000"/>
+                        </a:lnSpc>
+                        <a:spcBef>
+                          <a:spcPts val="0"/>
+                        </a:spcBef>
+                        <a:spcAft>
+                          <a:spcPts val="0"/>
+                        </a:spcAft>
+                        <a:buClrTx/>
+                        <a:buSzTx/>
+                        <a:buFontTx/>
+                        <a:buNone/>
+                        <a:tabLst/>
+                        <a:defRPr/>
+                      </a:pPr>
+                      <a:r>
+                        <a:rPr lang="en-US" altLang="zh-CN" sz="1200" smtClean="0"/>
+                        <a:t>0x12</a:t>
+                      </a:r>
+                      <a:endParaRPr lang="zh-CN" altLang="en-US" sz="1200" smtClean="0"/>
+                    </a:p>
+                  </a:txBody>
+                  <a:tcPr/>
+                </a:tc>
+                <a:tc>
+                  <a:txBody>
+                    <a:bodyPr/>
+                    <a:lstStyle/>
+                    <a:p>
+                      <a:pPr marL="0" marR="0" indent="0" algn="ctr" defTabSz="914400" rtl="0" eaLnBrk="1" fontAlgn="auto" latinLnBrk="0" hangingPunct="1">
+                        <a:lnSpc>
+                          <a:spcPct val="100000"/>
+                        </a:lnSpc>
+                        <a:spcBef>
+                          <a:spcPts val="0"/>
+                        </a:spcBef>
+                        <a:spcAft>
+                          <a:spcPts val="0"/>
+                        </a:spcAft>
+                        <a:buClrTx/>
+                        <a:buSzTx/>
+                        <a:buFontTx/>
+                        <a:buNone/>
+                        <a:tabLst/>
+                        <a:defRPr/>
+                      </a:pPr>
+                      <a:r>
+                        <a:rPr lang="en-US" altLang="zh-CN" sz="1200" smtClean="0"/>
+                        <a:t>0x34</a:t>
+                      </a:r>
+                      <a:endParaRPr lang="zh-CN" altLang="en-US" sz="1200" smtClean="0"/>
+                    </a:p>
+                  </a:txBody>
+                  <a:tcPr/>
+                </a:tc>
+                <a:tc>
+                  <a:txBody>
+                    <a:bodyPr/>
+                    <a:lstStyle/>
+                    <a:p>
+                      <a:pPr marL="0" marR="0" indent="0" algn="ctr" defTabSz="914400" rtl="0" eaLnBrk="1" fontAlgn="auto" latinLnBrk="0" hangingPunct="1">
+                        <a:lnSpc>
+                          <a:spcPct val="100000"/>
+                        </a:lnSpc>
+                        <a:spcBef>
+                          <a:spcPts val="0"/>
+                        </a:spcBef>
+                        <a:spcAft>
+                          <a:spcPts val="0"/>
+                        </a:spcAft>
+                        <a:buClrTx/>
+                        <a:buSzTx/>
+                        <a:buFontTx/>
+                        <a:buNone/>
+                        <a:tabLst/>
+                        <a:defRPr/>
+                      </a:pPr>
+                      <a:r>
+                        <a:rPr lang="en-US" altLang="zh-CN" sz="1200" smtClean="0"/>
+                        <a:t>0x56</a:t>
+                      </a:r>
+                      <a:endParaRPr lang="zh-CN" altLang="en-US" sz="1200" smtClean="0"/>
+                    </a:p>
+                  </a:txBody>
+                  <a:tcPr/>
+                </a:tc>
+                <a:tc>
+                  <a:txBody>
+                    <a:bodyPr/>
+                    <a:lstStyle/>
+                    <a:p>
+                      <a:pPr marL="0" marR="0" indent="0" algn="ctr" defTabSz="914400" rtl="0" eaLnBrk="1" fontAlgn="auto" latinLnBrk="0" hangingPunct="1">
+                        <a:lnSpc>
+                          <a:spcPct val="100000"/>
+                        </a:lnSpc>
+                        <a:spcBef>
+                          <a:spcPts val="0"/>
+                        </a:spcBef>
+                        <a:spcAft>
+                          <a:spcPts val="0"/>
+                        </a:spcAft>
+                        <a:buClrTx/>
+                        <a:buSzTx/>
+                        <a:buFontTx/>
+                        <a:buNone/>
+                        <a:tabLst/>
+                        <a:defRPr/>
+                      </a:pPr>
+                      <a:r>
+                        <a:rPr lang="en-US" altLang="zh-CN" sz="1200" smtClean="0"/>
+                        <a:t>0x78</a:t>
+                      </a:r>
+                      <a:endParaRPr lang="zh-CN" altLang="en-US" sz="1200" smtClean="0"/>
+                    </a:p>
+                  </a:txBody>
+                  <a:tcPr/>
+                </a:tc>
+                <a:extLst>
+                  <a:ext uri="{0D108BD9-81ED-4DB2-BD59-A6C34878D82A}">
+                    <a16:rowId xmlns:a16="http://schemas.microsoft.com/office/drawing/2014/main" val="2980113822"/>
+                  </a:ext>
+                </a:extLst>
+              </a:tr>
+            </a:tbl>
+          </a:graphicData>
+        </a:graphic>
+      </p:graphicFrame>
+      <p:sp>
+        <p:nvSpPr>
+          <p:cNvPr id="19" name="文本框 18"/>
+          <p:cNvSpPr txBox="1"/>
+          <p:nvPr/>
+        </p:nvSpPr>
+        <p:spPr>
+          <a:xfrm>
+            <a:off x="5676900" y="727287"/>
+            <a:ext cx="812800" cy="276999"/>
+          </a:xfrm>
+          <a:prstGeom prst="rect">
+            <a:avLst/>
+          </a:prstGeom>
+          <a:noFill/>
+        </p:spPr>
+        <p:txBody>
+          <a:bodyPr wrap="square" rtlCol="0">
+            <a:spAutoFit/>
+          </a:bodyPr>
+          <a:lstStyle/>
+          <a:p>
+            <a:pPr algn="r"/>
+            <a:r>
+              <a:rPr lang="zh-CN" altLang="en-US" sz="1200" smtClean="0"/>
+              <a:t>内存地址</a:t>
+            </a:r>
+            <a:endParaRPr lang="zh-CN" altLang="en-US" sz="1200"/>
+          </a:p>
+        </p:txBody>
+      </p:sp>
+      <p:sp>
+        <p:nvSpPr>
+          <p:cNvPr id="20" name="文本框 19"/>
+          <p:cNvSpPr txBox="1"/>
+          <p:nvPr/>
+        </p:nvSpPr>
+        <p:spPr>
+          <a:xfrm>
+            <a:off x="5859780" y="2082908"/>
+            <a:ext cx="629920" cy="276999"/>
+          </a:xfrm>
+          <a:prstGeom prst="rect">
+            <a:avLst/>
+          </a:prstGeom>
+          <a:noFill/>
+        </p:spPr>
+        <p:txBody>
+          <a:bodyPr wrap="square" rtlCol="0">
+            <a:spAutoFit/>
+          </a:bodyPr>
+          <a:lstStyle/>
+          <a:p>
+            <a:r>
+              <a:rPr lang="en-US" altLang="zh-CN" sz="1200" smtClean="0"/>
+              <a:t>hex</a:t>
+            </a:r>
+            <a:endParaRPr lang="zh-CN" altLang="en-US" sz="1200"/>
+          </a:p>
+        </p:txBody>
+      </p:sp>
+      <p:sp>
+        <p:nvSpPr>
+          <p:cNvPr id="21" name="文本框 20"/>
+          <p:cNvSpPr txBox="1"/>
+          <p:nvPr/>
+        </p:nvSpPr>
+        <p:spPr>
+          <a:xfrm>
+            <a:off x="5859780" y="1780817"/>
+            <a:ext cx="629920" cy="276999"/>
+          </a:xfrm>
+          <a:prstGeom prst="rect">
+            <a:avLst/>
+          </a:prstGeom>
+          <a:noFill/>
+        </p:spPr>
+        <p:txBody>
+          <a:bodyPr wrap="square" rtlCol="0">
+            <a:spAutoFit/>
+          </a:bodyPr>
+          <a:lstStyle/>
+          <a:p>
+            <a:r>
+              <a:rPr lang="en-US" altLang="zh-CN" sz="1200" smtClean="0"/>
+              <a:t>bit</a:t>
+            </a:r>
+            <a:endParaRPr lang="zh-CN" altLang="en-US" sz="1200"/>
+          </a:p>
+        </p:txBody>
+      </p:sp>
+      <p:sp>
+        <p:nvSpPr>
+          <p:cNvPr id="22" name="文本框 21"/>
+          <p:cNvSpPr txBox="1"/>
+          <p:nvPr/>
+        </p:nvSpPr>
+        <p:spPr>
+          <a:xfrm>
+            <a:off x="5471160" y="1414742"/>
+            <a:ext cx="1094740" cy="276999"/>
+          </a:xfrm>
+          <a:prstGeom prst="rect">
+            <a:avLst/>
+          </a:prstGeom>
+          <a:noFill/>
+        </p:spPr>
+        <p:txBody>
+          <a:bodyPr wrap="square" rtlCol="0">
+            <a:spAutoFit/>
+          </a:bodyPr>
+          <a:lstStyle/>
+          <a:p>
+            <a:pPr algn="r"/>
+            <a:r>
+              <a:rPr lang="en-US" altLang="zh-CN" sz="1200" smtClean="0"/>
+              <a:t>ntohl</a:t>
+            </a:r>
+            <a:r>
+              <a:rPr lang="zh-CN" altLang="en-US" sz="1200" smtClean="0"/>
+              <a:t>后的</a:t>
+            </a:r>
+            <a:r>
+              <a:rPr lang="en-US" altLang="zh-CN" sz="1200" smtClean="0"/>
+              <a:t>hex</a:t>
+            </a:r>
+            <a:endParaRPr lang="zh-CN" altLang="en-US" sz="1200"/>
+          </a:p>
+        </p:txBody>
+      </p:sp>
+      <p:sp>
+        <p:nvSpPr>
+          <p:cNvPr id="23" name="文本框 22"/>
+          <p:cNvSpPr txBox="1"/>
+          <p:nvPr/>
+        </p:nvSpPr>
+        <p:spPr>
+          <a:xfrm>
+            <a:off x="5497830" y="1112651"/>
+            <a:ext cx="1068070" cy="276999"/>
+          </a:xfrm>
+          <a:prstGeom prst="rect">
+            <a:avLst/>
+          </a:prstGeom>
+          <a:noFill/>
+        </p:spPr>
+        <p:txBody>
+          <a:bodyPr wrap="square" rtlCol="0">
+            <a:spAutoFit/>
+          </a:bodyPr>
+          <a:lstStyle/>
+          <a:p>
+            <a:r>
+              <a:rPr lang="en-US" altLang="zh-CN" sz="1200" smtClean="0"/>
+              <a:t>ntohl</a:t>
+            </a:r>
+            <a:r>
+              <a:rPr lang="zh-CN" altLang="en-US" sz="1200" smtClean="0"/>
+              <a:t>后的</a:t>
+            </a:r>
+            <a:r>
+              <a:rPr lang="en-US" altLang="zh-CN" sz="1200" smtClean="0"/>
+              <a:t>bit</a:t>
+            </a:r>
+            <a:endParaRPr lang="zh-CN" altLang="en-US" sz="1200"/>
+          </a:p>
+        </p:txBody>
+      </p:sp>
+      <p:sp>
+        <p:nvSpPr>
+          <p:cNvPr id="24" name="左弧形箭头 23"/>
+          <p:cNvSpPr/>
+          <p:nvPr/>
+        </p:nvSpPr>
+        <p:spPr>
+          <a:xfrm rot="16200000">
+            <a:off x="5356614" y="1775206"/>
+            <a:ext cx="815592" cy="5722875"/>
+          </a:xfrm>
+          <a:prstGeom prst="curvedRightArrow">
+            <a:avLst/>
+          </a:prstGeom>
+          <a:ln>
+            <a:noFill/>
+          </a:ln>
+        </p:spPr>
+        <p:style>
+          <a:lnRef idx="2">
+            <a:schemeClr val="accent1">
+              <a:shade val="50000"/>
+            </a:schemeClr>
+          </a:lnRef>
+          <a:fillRef idx="1">
+            <a:schemeClr val="accent1"/>
+          </a:fillRef>
+          <a:effectRef idx="0">
+            <a:schemeClr val="accent1"/>
+          </a:effectRef>
+          <a:fontRef idx="minor">
+            <a:schemeClr val="lt1"/>
+          </a:fontRef>
+        </p:style>
+        <p:txBody>
+          <a:bodyPr rtlCol="0" anchor="ctr"/>
+          <a:lstStyle/>
+          <a:p>
+            <a:pPr algn="ctr"/>
+            <a:endParaRPr lang="zh-CN" altLang="en-US">
+              <a:solidFill>
+                <a:schemeClr val="tx1"/>
+              </a:solidFill>
+            </a:endParaRPr>
+          </a:p>
+        </p:txBody>
+      </p:sp>
+      <p:sp>
+        <p:nvSpPr>
+          <p:cNvPr id="25" name="文本框 24"/>
+          <p:cNvSpPr txBox="1"/>
+          <p:nvPr/>
+        </p:nvSpPr>
+        <p:spPr>
+          <a:xfrm>
+            <a:off x="5048250" y="4752711"/>
+            <a:ext cx="1160780" cy="276999"/>
+          </a:xfrm>
+          <a:prstGeom prst="rect">
+            <a:avLst/>
+          </a:prstGeom>
+          <a:noFill/>
+        </p:spPr>
+        <p:txBody>
+          <a:bodyPr wrap="square" rtlCol="0">
+            <a:spAutoFit/>
+          </a:bodyPr>
+          <a:lstStyle/>
+          <a:p>
+            <a:r>
+              <a:rPr lang="en-US" altLang="zh-CN" sz="1200" smtClean="0"/>
+              <a:t>cable network</a:t>
+            </a:r>
+            <a:endParaRPr lang="zh-CN" altLang="en-US" sz="1200"/>
+          </a:p>
+        </p:txBody>
+      </p:sp>
+      <p:sp>
+        <p:nvSpPr>
+          <p:cNvPr id="26" name="文本框 25"/>
+          <p:cNvSpPr txBox="1"/>
+          <p:nvPr/>
+        </p:nvSpPr>
+        <p:spPr>
+          <a:xfrm>
+            <a:off x="3187700" y="2560253"/>
+            <a:ext cx="1567180" cy="276999"/>
+          </a:xfrm>
+          <a:prstGeom prst="rect">
+            <a:avLst/>
+          </a:prstGeom>
+          <a:noFill/>
+        </p:spPr>
+        <p:txBody>
+          <a:bodyPr wrap="square" rtlCol="0">
+            <a:spAutoFit/>
+          </a:bodyPr>
+          <a:lstStyle/>
+          <a:p>
+            <a:r>
+              <a:rPr lang="zh-CN" altLang="en-US" sz="1200" smtClean="0"/>
+              <a:t>网络接口适配器</a:t>
+            </a:r>
+            <a:r>
+              <a:rPr lang="en-US" altLang="zh-CN" sz="1200" smtClean="0"/>
+              <a:t>NIC</a:t>
+            </a:r>
+            <a:endParaRPr lang="zh-CN" altLang="en-US" sz="1200"/>
+          </a:p>
+        </p:txBody>
+      </p:sp>
+      <p:sp>
+        <p:nvSpPr>
+          <p:cNvPr id="28" name="文本框 27"/>
+          <p:cNvSpPr txBox="1"/>
+          <p:nvPr/>
+        </p:nvSpPr>
+        <p:spPr>
+          <a:xfrm>
+            <a:off x="7381240" y="335549"/>
+            <a:ext cx="2189480" cy="276999"/>
+          </a:xfrm>
+          <a:prstGeom prst="rect">
+            <a:avLst/>
+          </a:prstGeom>
+          <a:noFill/>
+        </p:spPr>
+        <p:txBody>
+          <a:bodyPr wrap="square" rtlCol="0">
+            <a:spAutoFit/>
+          </a:bodyPr>
+          <a:lstStyle/>
+          <a:p>
+            <a:r>
+              <a:rPr lang="zh-CN" altLang="en-US" sz="1200" smtClean="0"/>
+              <a:t>接收方：大端字节序</a:t>
+            </a:r>
+            <a:r>
+              <a:rPr lang="en-US" altLang="zh-CN" sz="1200" smtClean="0"/>
+              <a:t>/</a:t>
+            </a:r>
+            <a:r>
+              <a:rPr lang="zh-CN" altLang="en-US" sz="1200" smtClean="0"/>
+              <a:t>比特序</a:t>
+            </a:r>
+            <a:endParaRPr lang="en-US" altLang="zh-CN" sz="1200"/>
+          </a:p>
+        </p:txBody>
+      </p:sp>
+    </p:spTree>
+    <p:extLst>
+      <p:ext uri="{BB962C8B-B14F-4D97-AF65-F5344CB8AC3E}">
+        <p14:creationId xmlns:p14="http://schemas.microsoft.com/office/powerpoint/2010/main" val="561520658"/>
+      </p:ext>
+    </p:extLst>
+  </p:cSld>
+  <p:clrMapOvr>
+    <a:masterClrMapping/>
+  </p:clrMapOvr>
+</p:sld>
+</file>
+
 <file path=ppt/theme/theme1.xml><?xml version="1.0" encoding="utf-8"?>
 <a:theme xmlns:a="http://schemas.openxmlformats.org/drawingml/2006/main" name="Office 主题​​">
   <a:themeElements>

--- a/音视频编解码.pptx
+++ b/音视频编解码.pptx
@@ -22,6 +22,8 @@
     <p:sldId id="269" r:id="rId16"/>
     <p:sldId id="270" r:id="rId17"/>
     <p:sldId id="271" r:id="rId18"/>
+    <p:sldId id="273" r:id="rId19"/>
+    <p:sldId id="274" r:id="rId20"/>
   </p:sldIdLst>
   <p:sldSz cx="12192000" cy="6858000"/>
   <p:notesSz cx="6858000" cy="9144000"/>
@@ -259,7 +261,7 @@
           <a:p>
             <a:fld id="{EA80D996-CE9E-432A-86C4-A040E9078786}" type="datetimeFigureOut">
               <a:rPr lang="zh-CN" altLang="en-US" smtClean="0"/>
-              <a:t>2019/7/5</a:t>
+              <a:t>2019/7/18</a:t>
             </a:fld>
             <a:endParaRPr lang="zh-CN" altLang="en-US"/>
           </a:p>
@@ -429,7 +431,7 @@
           <a:p>
             <a:fld id="{EA80D996-CE9E-432A-86C4-A040E9078786}" type="datetimeFigureOut">
               <a:rPr lang="zh-CN" altLang="en-US" smtClean="0"/>
-              <a:t>2019/7/5</a:t>
+              <a:t>2019/7/18</a:t>
             </a:fld>
             <a:endParaRPr lang="zh-CN" altLang="en-US"/>
           </a:p>
@@ -609,7 +611,7 @@
           <a:p>
             <a:fld id="{EA80D996-CE9E-432A-86C4-A040E9078786}" type="datetimeFigureOut">
               <a:rPr lang="zh-CN" altLang="en-US" smtClean="0"/>
-              <a:t>2019/7/5</a:t>
+              <a:t>2019/7/18</a:t>
             </a:fld>
             <a:endParaRPr lang="zh-CN" altLang="en-US"/>
           </a:p>
@@ -779,7 +781,7 @@
           <a:p>
             <a:fld id="{EA80D996-CE9E-432A-86C4-A040E9078786}" type="datetimeFigureOut">
               <a:rPr lang="zh-CN" altLang="en-US" smtClean="0"/>
-              <a:t>2019/7/5</a:t>
+              <a:t>2019/7/18</a:t>
             </a:fld>
             <a:endParaRPr lang="zh-CN" altLang="en-US"/>
           </a:p>
@@ -1025,7 +1027,7 @@
           <a:p>
             <a:fld id="{EA80D996-CE9E-432A-86C4-A040E9078786}" type="datetimeFigureOut">
               <a:rPr lang="zh-CN" altLang="en-US" smtClean="0"/>
-              <a:t>2019/7/5</a:t>
+              <a:t>2019/7/18</a:t>
             </a:fld>
             <a:endParaRPr lang="zh-CN" altLang="en-US"/>
           </a:p>
@@ -1257,7 +1259,7 @@
           <a:p>
             <a:fld id="{EA80D996-CE9E-432A-86C4-A040E9078786}" type="datetimeFigureOut">
               <a:rPr lang="zh-CN" altLang="en-US" smtClean="0"/>
-              <a:t>2019/7/5</a:t>
+              <a:t>2019/7/18</a:t>
             </a:fld>
             <a:endParaRPr lang="zh-CN" altLang="en-US"/>
           </a:p>
@@ -1624,7 +1626,7 @@
           <a:p>
             <a:fld id="{EA80D996-CE9E-432A-86C4-A040E9078786}" type="datetimeFigureOut">
               <a:rPr lang="zh-CN" altLang="en-US" smtClean="0"/>
-              <a:t>2019/7/5</a:t>
+              <a:t>2019/7/18</a:t>
             </a:fld>
             <a:endParaRPr lang="zh-CN" altLang="en-US"/>
           </a:p>
@@ -1742,7 +1744,7 @@
           <a:p>
             <a:fld id="{EA80D996-CE9E-432A-86C4-A040E9078786}" type="datetimeFigureOut">
               <a:rPr lang="zh-CN" altLang="en-US" smtClean="0"/>
-              <a:t>2019/7/5</a:t>
+              <a:t>2019/7/18</a:t>
             </a:fld>
             <a:endParaRPr lang="zh-CN" altLang="en-US"/>
           </a:p>
@@ -1837,7 +1839,7 @@
           <a:p>
             <a:fld id="{EA80D996-CE9E-432A-86C4-A040E9078786}" type="datetimeFigureOut">
               <a:rPr lang="zh-CN" altLang="en-US" smtClean="0"/>
-              <a:t>2019/7/5</a:t>
+              <a:t>2019/7/18</a:t>
             </a:fld>
             <a:endParaRPr lang="zh-CN" altLang="en-US"/>
           </a:p>
@@ -2114,7 +2116,7 @@
           <a:p>
             <a:fld id="{EA80D996-CE9E-432A-86C4-A040E9078786}" type="datetimeFigureOut">
               <a:rPr lang="zh-CN" altLang="en-US" smtClean="0"/>
-              <a:t>2019/7/5</a:t>
+              <a:t>2019/7/18</a:t>
             </a:fld>
             <a:endParaRPr lang="zh-CN" altLang="en-US"/>
           </a:p>
@@ -2367,7 +2369,7 @@
           <a:p>
             <a:fld id="{EA80D996-CE9E-432A-86C4-A040E9078786}" type="datetimeFigureOut">
               <a:rPr lang="zh-CN" altLang="en-US" smtClean="0"/>
-              <a:t>2019/7/5</a:t>
+              <a:t>2019/7/18</a:t>
             </a:fld>
             <a:endParaRPr lang="zh-CN" altLang="en-US"/>
           </a:p>
@@ -2580,7 +2582,7 @@
           <a:p>
             <a:fld id="{EA80D996-CE9E-432A-86C4-A040E9078786}" type="datetimeFigureOut">
               <a:rPr lang="zh-CN" altLang="en-US" smtClean="0"/>
-              <a:t>2019/7/5</a:t>
+              <a:t>2019/7/18</a:t>
             </a:fld>
             <a:endParaRPr lang="zh-CN" altLang="en-US"/>
           </a:p>
@@ -20975,6 +20977,1528 @@
 </p:sld>
 </file>
 
+<file path=ppt/slides/slide18.xml><?xml version="1.0" encoding="utf-8"?>
+<p:sld xmlns:a="http://schemas.openxmlformats.org/drawingml/2006/main" xmlns:r="http://schemas.openxmlformats.org/officeDocument/2006/relationships" xmlns:p="http://schemas.openxmlformats.org/presentationml/2006/main">
+  <p:cSld>
+    <p:spTree>
+      <p:nvGrpSpPr>
+        <p:cNvPr id="1" name=""/>
+        <p:cNvGrpSpPr/>
+        <p:nvPr/>
+      </p:nvGrpSpPr>
+      <p:grpSpPr>
+        <a:xfrm>
+          <a:off x="0" y="0"/>
+          <a:ext cx="0" cy="0"/>
+          <a:chOff x="0" y="0"/>
+          <a:chExt cx="0" cy="0"/>
+        </a:xfrm>
+      </p:grpSpPr>
+      <p:sp>
+        <p:nvSpPr>
+          <p:cNvPr id="20" name="文本框 19"/>
+          <p:cNvSpPr txBox="1"/>
+          <p:nvPr/>
+        </p:nvSpPr>
+        <p:spPr>
+          <a:xfrm>
+            <a:off x="5328211" y="2512844"/>
+            <a:ext cx="788948" cy="415498"/>
+          </a:xfrm>
+          <a:prstGeom prst="rect">
+            <a:avLst/>
+          </a:prstGeom>
+          <a:ln>
+            <a:noFill/>
+          </a:ln>
+        </p:spPr>
+        <p:style>
+          <a:lnRef idx="2">
+            <a:schemeClr val="dk1"/>
+          </a:lnRef>
+          <a:fillRef idx="1">
+            <a:schemeClr val="lt1"/>
+          </a:fillRef>
+          <a:effectRef idx="0">
+            <a:schemeClr val="dk1"/>
+          </a:effectRef>
+          <a:fontRef idx="minor">
+            <a:schemeClr val="dk1"/>
+          </a:fontRef>
+        </p:style>
+        <p:txBody>
+          <a:bodyPr wrap="square" rtlCol="0">
+            <a:spAutoFit/>
+          </a:bodyPr>
+          <a:lstStyle>
+            <a:defPPr>
+              <a:defRPr lang="zh-CN"/>
+            </a:defPPr>
+            <a:lvl1pPr>
+              <a:defRPr sz="1050"/>
+            </a:lvl1pPr>
+          </a:lstStyle>
+          <a:p>
+            <a:pPr algn="ctr"/>
+            <a:r>
+              <a:rPr lang="zh-CN" altLang="en-US" smtClean="0"/>
+              <a:t>虚拟内存系统</a:t>
+            </a:r>
+            <a:endParaRPr lang="zh-CN" altLang="en-US"/>
+          </a:p>
+        </p:txBody>
+      </p:sp>
+      <p:sp>
+        <p:nvSpPr>
+          <p:cNvPr id="9" name="文本框 8"/>
+          <p:cNvSpPr txBox="1"/>
+          <p:nvPr/>
+        </p:nvSpPr>
+        <p:spPr>
+          <a:xfrm>
+            <a:off x="2712853" y="2666732"/>
+            <a:ext cx="875757" cy="261610"/>
+          </a:xfrm>
+          <a:prstGeom prst="rect">
+            <a:avLst/>
+          </a:prstGeom>
+          <a:ln>
+            <a:noFill/>
+          </a:ln>
+        </p:spPr>
+        <p:style>
+          <a:lnRef idx="2">
+            <a:schemeClr val="dk1"/>
+          </a:lnRef>
+          <a:fillRef idx="1">
+            <a:schemeClr val="lt1"/>
+          </a:fillRef>
+          <a:effectRef idx="0">
+            <a:schemeClr val="dk1"/>
+          </a:effectRef>
+          <a:fontRef idx="minor">
+            <a:schemeClr val="dk1"/>
+          </a:fontRef>
+        </p:style>
+        <p:txBody>
+          <a:bodyPr wrap="square" rtlCol="0">
+            <a:spAutoFit/>
+          </a:bodyPr>
+          <a:lstStyle>
+            <a:defPPr>
+              <a:defRPr lang="zh-CN"/>
+            </a:defPPr>
+            <a:lvl1pPr>
+              <a:defRPr sz="1050"/>
+            </a:lvl1pPr>
+          </a:lstStyle>
+          <a:p>
+            <a:r>
+              <a:rPr lang="zh-CN" altLang="en-US" smtClean="0"/>
+              <a:t>文件映射</a:t>
+            </a:r>
+            <a:endParaRPr lang="zh-CN" altLang="en-US"/>
+          </a:p>
+        </p:txBody>
+      </p:sp>
+      <p:sp>
+        <p:nvSpPr>
+          <p:cNvPr id="12" name="矩形 11"/>
+          <p:cNvSpPr/>
+          <p:nvPr/>
+        </p:nvSpPr>
+        <p:spPr>
+          <a:xfrm>
+            <a:off x="3512820" y="2257782"/>
+            <a:ext cx="1783080" cy="1354098"/>
+          </a:xfrm>
+          <a:prstGeom prst="rect">
+            <a:avLst/>
+          </a:prstGeom>
+          <a:gradFill flip="none" rotWithShape="1">
+            <a:gsLst>
+              <a:gs pos="0">
+                <a:schemeClr val="accent1">
+                  <a:lumMod val="20000"/>
+                  <a:lumOff val="80000"/>
+                  <a:shade val="30000"/>
+                  <a:satMod val="115000"/>
+                </a:schemeClr>
+              </a:gs>
+              <a:gs pos="50000">
+                <a:schemeClr val="accent1">
+                  <a:lumMod val="20000"/>
+                  <a:lumOff val="80000"/>
+                  <a:shade val="67500"/>
+                  <a:satMod val="115000"/>
+                </a:schemeClr>
+              </a:gs>
+              <a:gs pos="100000">
+                <a:schemeClr val="accent1">
+                  <a:lumMod val="20000"/>
+                  <a:lumOff val="80000"/>
+                  <a:shade val="100000"/>
+                  <a:satMod val="115000"/>
+                </a:schemeClr>
+              </a:gs>
+            </a:gsLst>
+            <a:path path="circle">
+              <a:fillToRect l="100000" t="100000"/>
+            </a:path>
+            <a:tileRect r="-100000" b="-100000"/>
+          </a:gradFill>
+          <a:ln>
+            <a:solidFill>
+              <a:schemeClr val="accent1">
+                <a:lumMod val="50000"/>
+              </a:schemeClr>
+            </a:solidFill>
+          </a:ln>
+        </p:spPr>
+        <p:style>
+          <a:lnRef idx="2">
+            <a:schemeClr val="accent1">
+              <a:shade val="50000"/>
+            </a:schemeClr>
+          </a:lnRef>
+          <a:fillRef idx="1">
+            <a:schemeClr val="accent1"/>
+          </a:fillRef>
+          <a:effectRef idx="0">
+            <a:schemeClr val="accent1"/>
+          </a:effectRef>
+          <a:fontRef idx="minor">
+            <a:schemeClr val="lt1"/>
+          </a:fontRef>
+        </p:style>
+        <p:txBody>
+          <a:bodyPr rtlCol="0" anchor="ctr"/>
+          <a:lstStyle/>
+          <a:p>
+            <a:pPr algn="ctr"/>
+            <a:endParaRPr lang="zh-CN" altLang="en-US"/>
+          </a:p>
+        </p:txBody>
+      </p:sp>
+      <p:sp>
+        <p:nvSpPr>
+          <p:cNvPr id="5" name="文本框 4"/>
+          <p:cNvSpPr txBox="1"/>
+          <p:nvPr/>
+        </p:nvSpPr>
+        <p:spPr>
+          <a:xfrm>
+            <a:off x="3674673" y="2655436"/>
+            <a:ext cx="1480459" cy="577081"/>
+          </a:xfrm>
+          <a:prstGeom prst="rect">
+            <a:avLst/>
+          </a:prstGeom>
+          <a:solidFill>
+            <a:schemeClr val="accent1">
+              <a:lumMod val="40000"/>
+              <a:lumOff val="60000"/>
+            </a:schemeClr>
+          </a:solidFill>
+          <a:ln>
+            <a:solidFill>
+              <a:schemeClr val="tx1"/>
+            </a:solidFill>
+          </a:ln>
+        </p:spPr>
+        <p:txBody>
+          <a:bodyPr wrap="square" rtlCol="0">
+            <a:spAutoFit/>
+          </a:bodyPr>
+          <a:lstStyle>
+            <a:defPPr>
+              <a:defRPr lang="zh-CN"/>
+            </a:defPPr>
+            <a:lvl1pPr>
+              <a:defRPr sz="1050"/>
+            </a:lvl1pPr>
+          </a:lstStyle>
+          <a:p>
+            <a:pPr algn="ctr"/>
+            <a:r>
+              <a:rPr lang="zh-CN" altLang="en-US" smtClean="0"/>
+              <a:t>文件视图</a:t>
+            </a:r>
+            <a:endParaRPr lang="en-US" altLang="zh-CN" smtClean="0"/>
+          </a:p>
+          <a:p>
+            <a:pPr algn="ctr"/>
+            <a:r>
+              <a:rPr lang="zh-CN" altLang="en-US" smtClean="0"/>
+              <a:t>（文件视图即进程虚拟内存空间的一部分）</a:t>
+            </a:r>
+            <a:endParaRPr lang="zh-CN" altLang="en-US"/>
+          </a:p>
+        </p:txBody>
+      </p:sp>
+      <p:cxnSp>
+        <p:nvCxnSpPr>
+          <p:cNvPr id="7" name="直接箭头连接符 6"/>
+          <p:cNvCxnSpPr>
+            <a:endCxn id="5" idx="1"/>
+          </p:cNvCxnSpPr>
+          <p:nvPr/>
+        </p:nvCxnSpPr>
+        <p:spPr>
+          <a:xfrm flipV="1">
+            <a:off x="2552699" y="2943977"/>
+            <a:ext cx="1121974" cy="1"/>
+          </a:xfrm>
+          <a:prstGeom prst="straightConnector1">
+            <a:avLst/>
+          </a:prstGeom>
+          <a:ln>
+            <a:headEnd type="triangle" w="med" len="med"/>
+            <a:tailEnd type="triangle" w="med" len="med"/>
+          </a:ln>
+        </p:spPr>
+        <p:style>
+          <a:lnRef idx="1">
+            <a:schemeClr val="dk1"/>
+          </a:lnRef>
+          <a:fillRef idx="0">
+            <a:schemeClr val="dk1"/>
+          </a:fillRef>
+          <a:effectRef idx="0">
+            <a:schemeClr val="dk1"/>
+          </a:effectRef>
+          <a:fontRef idx="minor">
+            <a:schemeClr val="tx1"/>
+          </a:fontRef>
+        </p:style>
+      </p:cxnSp>
+      <p:sp>
+        <p:nvSpPr>
+          <p:cNvPr id="15" name="矩形 14"/>
+          <p:cNvSpPr/>
+          <p:nvPr/>
+        </p:nvSpPr>
+        <p:spPr>
+          <a:xfrm>
+            <a:off x="6095867" y="2387322"/>
+            <a:ext cx="1642519" cy="1082040"/>
+          </a:xfrm>
+          <a:prstGeom prst="rect">
+            <a:avLst/>
+          </a:prstGeom>
+          <a:gradFill flip="none" rotWithShape="1">
+            <a:gsLst>
+              <a:gs pos="0">
+                <a:schemeClr val="accent1">
+                  <a:lumMod val="20000"/>
+                  <a:lumOff val="80000"/>
+                  <a:shade val="30000"/>
+                  <a:satMod val="115000"/>
+                </a:schemeClr>
+              </a:gs>
+              <a:gs pos="50000">
+                <a:schemeClr val="accent1">
+                  <a:lumMod val="20000"/>
+                  <a:lumOff val="80000"/>
+                  <a:shade val="67500"/>
+                  <a:satMod val="115000"/>
+                </a:schemeClr>
+              </a:gs>
+              <a:gs pos="100000">
+                <a:schemeClr val="accent1">
+                  <a:lumMod val="20000"/>
+                  <a:lumOff val="80000"/>
+                  <a:shade val="100000"/>
+                  <a:satMod val="115000"/>
+                </a:schemeClr>
+              </a:gs>
+            </a:gsLst>
+            <a:path path="circle">
+              <a:fillToRect l="100000" t="100000"/>
+            </a:path>
+            <a:tileRect r="-100000" b="-100000"/>
+          </a:gradFill>
+          <a:ln>
+            <a:solidFill>
+              <a:schemeClr val="accent1">
+                <a:lumMod val="50000"/>
+              </a:schemeClr>
+            </a:solidFill>
+          </a:ln>
+        </p:spPr>
+        <p:style>
+          <a:lnRef idx="2">
+            <a:schemeClr val="accent1">
+              <a:shade val="50000"/>
+            </a:schemeClr>
+          </a:lnRef>
+          <a:fillRef idx="1">
+            <a:schemeClr val="accent1"/>
+          </a:fillRef>
+          <a:effectRef idx="0">
+            <a:schemeClr val="accent1"/>
+          </a:effectRef>
+          <a:fontRef idx="minor">
+            <a:schemeClr val="lt1"/>
+          </a:fontRef>
+        </p:style>
+        <p:txBody>
+          <a:bodyPr rtlCol="0" anchor="ctr"/>
+          <a:lstStyle/>
+          <a:p>
+            <a:pPr algn="ctr"/>
+            <a:r>
+              <a:rPr lang="zh-CN" altLang="en-US" sz="1050">
+                <a:solidFill>
+                  <a:schemeClr val="tx1"/>
+                </a:solidFill>
+              </a:rPr>
+              <a:t>物理内存</a:t>
+            </a:r>
+          </a:p>
+        </p:txBody>
+      </p:sp>
+      <p:cxnSp>
+        <p:nvCxnSpPr>
+          <p:cNvPr id="19" name="直接箭头连接符 18"/>
+          <p:cNvCxnSpPr>
+            <a:stCxn id="12" idx="3"/>
+            <a:endCxn id="15" idx="1"/>
+          </p:cNvCxnSpPr>
+          <p:nvPr/>
+        </p:nvCxnSpPr>
+        <p:spPr>
+          <a:xfrm flipV="1">
+            <a:off x="5295900" y="2928342"/>
+            <a:ext cx="799967" cy="6489"/>
+          </a:xfrm>
+          <a:prstGeom prst="straightConnector1">
+            <a:avLst/>
+          </a:prstGeom>
+          <a:ln>
+            <a:headEnd type="triangle"/>
+            <a:tailEnd type="triangle"/>
+          </a:ln>
+        </p:spPr>
+        <p:style>
+          <a:lnRef idx="1">
+            <a:schemeClr val="dk1"/>
+          </a:lnRef>
+          <a:fillRef idx="0">
+            <a:schemeClr val="dk1"/>
+          </a:fillRef>
+          <a:effectRef idx="0">
+            <a:schemeClr val="dk1"/>
+          </a:effectRef>
+          <a:fontRef idx="minor">
+            <a:schemeClr val="tx1"/>
+          </a:fontRef>
+        </p:style>
+      </p:cxnSp>
+      <p:sp>
+        <p:nvSpPr>
+          <p:cNvPr id="21" name="文本框 20"/>
+          <p:cNvSpPr txBox="1"/>
+          <p:nvPr/>
+        </p:nvSpPr>
+        <p:spPr>
+          <a:xfrm>
+            <a:off x="3750192" y="3295240"/>
+            <a:ext cx="1329419" cy="253916"/>
+          </a:xfrm>
+          <a:prstGeom prst="rect">
+            <a:avLst/>
+          </a:prstGeom>
+          <a:ln>
+            <a:noFill/>
+          </a:ln>
+        </p:spPr>
+        <p:style>
+          <a:lnRef idx="2">
+            <a:schemeClr val="dk1"/>
+          </a:lnRef>
+          <a:fillRef idx="1">
+            <a:schemeClr val="lt1"/>
+          </a:fillRef>
+          <a:effectRef idx="0">
+            <a:schemeClr val="dk1"/>
+          </a:effectRef>
+          <a:fontRef idx="minor">
+            <a:schemeClr val="dk1"/>
+          </a:fontRef>
+        </p:style>
+        <p:txBody>
+          <a:bodyPr wrap="square" rtlCol="0">
+            <a:spAutoFit/>
+          </a:bodyPr>
+          <a:lstStyle>
+            <a:defPPr>
+              <a:defRPr lang="zh-CN"/>
+            </a:defPPr>
+            <a:lvl1pPr>
+              <a:defRPr sz="1050"/>
+            </a:lvl1pPr>
+          </a:lstStyle>
+          <a:p>
+            <a:r>
+              <a:rPr lang="zh-CN" altLang="en-US" smtClean="0"/>
+              <a:t>进程虚拟内存空间</a:t>
+            </a:r>
+            <a:endParaRPr lang="zh-CN" altLang="en-US"/>
+          </a:p>
+        </p:txBody>
+      </p:sp>
+      <p:sp>
+        <p:nvSpPr>
+          <p:cNvPr id="28" name="文本框 27"/>
+          <p:cNvSpPr txBox="1"/>
+          <p:nvPr/>
+        </p:nvSpPr>
+        <p:spPr>
+          <a:xfrm>
+            <a:off x="1091626" y="2666732"/>
+            <a:ext cx="1480459" cy="577081"/>
+          </a:xfrm>
+          <a:prstGeom prst="rect">
+            <a:avLst/>
+          </a:prstGeom>
+          <a:gradFill flip="none" rotWithShape="1">
+            <a:gsLst>
+              <a:gs pos="0">
+                <a:schemeClr val="accent1">
+                  <a:lumMod val="20000"/>
+                  <a:lumOff val="80000"/>
+                  <a:shade val="30000"/>
+                  <a:satMod val="115000"/>
+                </a:schemeClr>
+              </a:gs>
+              <a:gs pos="50000">
+                <a:schemeClr val="accent1">
+                  <a:lumMod val="20000"/>
+                  <a:lumOff val="80000"/>
+                  <a:shade val="67500"/>
+                  <a:satMod val="115000"/>
+                </a:schemeClr>
+              </a:gs>
+              <a:gs pos="100000">
+                <a:schemeClr val="accent1">
+                  <a:lumMod val="20000"/>
+                  <a:lumOff val="80000"/>
+                  <a:shade val="100000"/>
+                  <a:satMod val="115000"/>
+                </a:schemeClr>
+              </a:gs>
+            </a:gsLst>
+            <a:path path="circle">
+              <a:fillToRect l="100000" t="100000"/>
+            </a:path>
+            <a:tileRect r="-100000" b="-100000"/>
+          </a:gradFill>
+          <a:ln>
+            <a:solidFill>
+              <a:schemeClr val="accent1">
+                <a:lumMod val="50000"/>
+              </a:schemeClr>
+            </a:solidFill>
+          </a:ln>
+        </p:spPr>
+        <p:style>
+          <a:lnRef idx="2">
+            <a:schemeClr val="accent1">
+              <a:shade val="50000"/>
+            </a:schemeClr>
+          </a:lnRef>
+          <a:fillRef idx="1">
+            <a:schemeClr val="accent1"/>
+          </a:fillRef>
+          <a:effectRef idx="0">
+            <a:schemeClr val="accent1"/>
+          </a:effectRef>
+          <a:fontRef idx="minor">
+            <a:schemeClr val="lt1"/>
+          </a:fontRef>
+        </p:style>
+        <p:txBody>
+          <a:bodyPr rot="0" spcFirstLastPara="0" vertOverflow="overflow" horzOverflow="overflow" vert="horz" wrap="square" lIns="91440" tIns="45720" rIns="91440" bIns="45720" numCol="1" spcCol="0" rtlCol="0" fromWordArt="0" anchor="ctr" anchorCtr="0" forceAA="0" compatLnSpc="1">
+            <a:prstTxWarp prst="textNoShape">
+              <a:avLst/>
+            </a:prstTxWarp>
+            <a:noAutofit/>
+          </a:bodyPr>
+          <a:lstStyle>
+            <a:defPPr>
+              <a:defRPr lang="zh-CN"/>
+            </a:defPPr>
+            <a:lvl1pPr algn="ctr">
+              <a:defRPr sz="1050"/>
+            </a:lvl1pPr>
+            <a:lvl2pPr>
+              <a:defRPr>
+                <a:solidFill>
+                  <a:schemeClr val="lt1"/>
+                </a:solidFill>
+              </a:defRPr>
+            </a:lvl2pPr>
+            <a:lvl3pPr>
+              <a:defRPr>
+                <a:solidFill>
+                  <a:schemeClr val="lt1"/>
+                </a:solidFill>
+              </a:defRPr>
+            </a:lvl3pPr>
+            <a:lvl4pPr>
+              <a:defRPr>
+                <a:solidFill>
+                  <a:schemeClr val="lt1"/>
+                </a:solidFill>
+              </a:defRPr>
+            </a:lvl4pPr>
+            <a:lvl5pPr>
+              <a:defRPr>
+                <a:solidFill>
+                  <a:schemeClr val="lt1"/>
+                </a:solidFill>
+              </a:defRPr>
+            </a:lvl5pPr>
+            <a:lvl6pPr>
+              <a:defRPr>
+                <a:solidFill>
+                  <a:schemeClr val="lt1"/>
+                </a:solidFill>
+              </a:defRPr>
+            </a:lvl6pPr>
+            <a:lvl7pPr>
+              <a:defRPr>
+                <a:solidFill>
+                  <a:schemeClr val="lt1"/>
+                </a:solidFill>
+              </a:defRPr>
+            </a:lvl7pPr>
+            <a:lvl8pPr>
+              <a:defRPr>
+                <a:solidFill>
+                  <a:schemeClr val="lt1"/>
+                </a:solidFill>
+              </a:defRPr>
+            </a:lvl8pPr>
+            <a:lvl9pPr>
+              <a:defRPr>
+                <a:solidFill>
+                  <a:schemeClr val="lt1"/>
+                </a:solidFill>
+              </a:defRPr>
+            </a:lvl9pPr>
+          </a:lstStyle>
+          <a:p>
+            <a:endParaRPr lang="en-US" altLang="zh-CN"/>
+          </a:p>
+          <a:p>
+            <a:r>
+              <a:rPr lang="zh-CN" altLang="en-US">
+                <a:solidFill>
+                  <a:schemeClr val="tx1"/>
+                </a:solidFill>
+              </a:rPr>
+              <a:t>磁盘文件</a:t>
+            </a:r>
+            <a:endParaRPr lang="en-US" altLang="zh-CN">
+              <a:solidFill>
+                <a:schemeClr val="tx1"/>
+              </a:solidFill>
+            </a:endParaRPr>
+          </a:p>
+          <a:p>
+            <a:endParaRPr lang="zh-CN" altLang="en-US"/>
+          </a:p>
+        </p:txBody>
+      </p:sp>
+    </p:spTree>
+    <p:extLst>
+      <p:ext uri="{BB962C8B-B14F-4D97-AF65-F5344CB8AC3E}">
+        <p14:creationId xmlns:p14="http://schemas.microsoft.com/office/powerpoint/2010/main" val="4163836169"/>
+      </p:ext>
+    </p:extLst>
+  </p:cSld>
+  <p:clrMapOvr>
+    <a:masterClrMapping/>
+  </p:clrMapOvr>
+</p:sld>
+</file>
+
+<file path=ppt/slides/slide19.xml><?xml version="1.0" encoding="utf-8"?>
+<p:sld xmlns:a="http://schemas.openxmlformats.org/drawingml/2006/main" xmlns:r="http://schemas.openxmlformats.org/officeDocument/2006/relationships" xmlns:p="http://schemas.openxmlformats.org/presentationml/2006/main">
+  <p:cSld>
+    <p:spTree>
+      <p:nvGrpSpPr>
+        <p:cNvPr id="1" name=""/>
+        <p:cNvGrpSpPr/>
+        <p:nvPr/>
+      </p:nvGrpSpPr>
+      <p:grpSpPr>
+        <a:xfrm>
+          <a:off x="0" y="0"/>
+          <a:ext cx="0" cy="0"/>
+          <a:chOff x="0" y="0"/>
+          <a:chExt cx="0" cy="0"/>
+        </a:xfrm>
+      </p:grpSpPr>
+      <p:graphicFrame>
+        <p:nvGraphicFramePr>
+          <p:cNvPr id="4" name="表格 3"/>
+          <p:cNvGraphicFramePr>
+            <a:graphicFrameLocks noGrp="1"/>
+          </p:cNvGraphicFramePr>
+          <p:nvPr>
+            <p:extLst>
+              <p:ext uri="{D42A27DB-BD31-4B8C-83A1-F6EECF244321}">
+                <p14:modId xmlns:p14="http://schemas.microsoft.com/office/powerpoint/2010/main" val="2790133274"/>
+              </p:ext>
+            </p:extLst>
+          </p:nvPr>
+        </p:nvGraphicFramePr>
+        <p:xfrm>
+          <a:off x="1472276" y="731780"/>
+          <a:ext cx="4503074" cy="2754312"/>
+        </p:xfrm>
+        <a:graphic>
+          <a:graphicData uri="http://schemas.openxmlformats.org/drawingml/2006/table">
+            <a:tbl>
+              <a:tblPr firstRow="1" bandRow="1">
+                <a:tableStyleId>{5940675A-B579-460E-94D1-54222C63F5DA}</a:tableStyleId>
+              </a:tblPr>
+              <a:tblGrid>
+                <a:gridCol w="1734787">
+                  <a:extLst>
+                    <a:ext uri="{9D8B030D-6E8A-4147-A177-3AD203B41FA5}">
+                      <a16:colId xmlns:a16="http://schemas.microsoft.com/office/drawing/2014/main" val="2672957971"/>
+                    </a:ext>
+                  </a:extLst>
+                </a:gridCol>
+                <a:gridCol w="2768287">
+                  <a:extLst>
+                    <a:ext uri="{9D8B030D-6E8A-4147-A177-3AD203B41FA5}">
+                      <a16:colId xmlns:a16="http://schemas.microsoft.com/office/drawing/2014/main" val="425931253"/>
+                    </a:ext>
+                  </a:extLst>
+                </a:gridCol>
+              </a:tblGrid>
+              <a:tr h="342212">
+                <a:tc>
+                  <a:txBody>
+                    <a:bodyPr/>
+                    <a:lstStyle/>
+                    <a:p>
+                      <a:r>
+                        <a:rPr lang="zh-CN" altLang="en-US" sz="1100" smtClean="0">
+                          <a:latin typeface="Times New Roman" panose="02020603050405020304" pitchFamily="18" charset="0"/>
+                          <a:cs typeface="Times New Roman" panose="02020603050405020304" pitchFamily="18" charset="0"/>
+                        </a:rPr>
+                        <a:t>内存地址</a:t>
+                      </a:r>
+                      <a:endParaRPr lang="zh-CN" altLang="en-US" sz="1100">
+                        <a:latin typeface="Times New Roman" panose="02020603050405020304" pitchFamily="18" charset="0"/>
+                        <a:cs typeface="Times New Roman" panose="02020603050405020304" pitchFamily="18" charset="0"/>
+                      </a:endParaRPr>
+                    </a:p>
+                  </a:txBody>
+                  <a:tcPr anchor="ctr">
+                    <a:gradFill flip="none" rotWithShape="1">
+                      <a:gsLst>
+                        <a:gs pos="0">
+                          <a:schemeClr val="accent1">
+                            <a:tint val="66000"/>
+                            <a:satMod val="160000"/>
+                          </a:schemeClr>
+                        </a:gs>
+                        <a:gs pos="50000">
+                          <a:schemeClr val="accent1">
+                            <a:tint val="44500"/>
+                            <a:satMod val="160000"/>
+                          </a:schemeClr>
+                        </a:gs>
+                        <a:gs pos="100000">
+                          <a:schemeClr val="accent1">
+                            <a:tint val="23500"/>
+                            <a:satMod val="160000"/>
+                          </a:schemeClr>
+                        </a:gs>
+                      </a:gsLst>
+                      <a:lin ang="18900000" scaled="1"/>
+                      <a:tileRect/>
+                    </a:gradFill>
+                  </a:tcPr>
+                </a:tc>
+                <a:tc>
+                  <a:txBody>
+                    <a:bodyPr/>
+                    <a:lstStyle/>
+                    <a:p>
+                      <a:r>
+                        <a:rPr lang="zh-CN" altLang="en-US" sz="1100" smtClean="0">
+                          <a:latin typeface="Times New Roman" panose="02020603050405020304" pitchFamily="18" charset="0"/>
+                          <a:cs typeface="Times New Roman" panose="02020603050405020304" pitchFamily="18" charset="0"/>
+                        </a:rPr>
+                        <a:t>页面状态</a:t>
+                      </a:r>
+                      <a:endParaRPr lang="zh-CN" altLang="en-US" sz="1100">
+                        <a:latin typeface="Times New Roman" panose="02020603050405020304" pitchFamily="18" charset="0"/>
+                        <a:cs typeface="Times New Roman" panose="02020603050405020304" pitchFamily="18" charset="0"/>
+                      </a:endParaRPr>
+                    </a:p>
+                  </a:txBody>
+                  <a:tcPr anchor="ctr">
+                    <a:gradFill flip="none" rotWithShape="1">
+                      <a:gsLst>
+                        <a:gs pos="0">
+                          <a:schemeClr val="accent1">
+                            <a:tint val="66000"/>
+                            <a:satMod val="160000"/>
+                          </a:schemeClr>
+                        </a:gs>
+                        <a:gs pos="50000">
+                          <a:schemeClr val="accent1">
+                            <a:tint val="44500"/>
+                            <a:satMod val="160000"/>
+                          </a:schemeClr>
+                        </a:gs>
+                        <a:gs pos="100000">
+                          <a:schemeClr val="accent1">
+                            <a:tint val="23500"/>
+                            <a:satMod val="160000"/>
+                          </a:schemeClr>
+                        </a:gs>
+                      </a:gsLst>
+                      <a:lin ang="18900000" scaled="1"/>
+                      <a:tileRect/>
+                    </a:gradFill>
+                  </a:tcPr>
+                </a:tc>
+                <a:extLst>
+                  <a:ext uri="{0D108BD9-81ED-4DB2-BD59-A6C34878D82A}">
+                    <a16:rowId xmlns:a16="http://schemas.microsoft.com/office/drawing/2014/main" val="3889628359"/>
+                  </a:ext>
+                </a:extLst>
+              </a:tr>
+              <a:tr h="342212">
+                <a:tc>
+                  <a:txBody>
+                    <a:bodyPr/>
+                    <a:lstStyle/>
+                    <a:p>
+                      <a:r>
+                        <a:rPr lang="zh-CN" altLang="en-US" sz="1100" smtClean="0">
+                          <a:latin typeface="Times New Roman" panose="02020603050405020304" pitchFamily="18" charset="0"/>
+                          <a:cs typeface="Times New Roman" panose="02020603050405020304" pitchFamily="18" charset="0"/>
+                        </a:rPr>
+                        <a:t>第一个页面</a:t>
+                      </a:r>
+                      <a:r>
+                        <a:rPr lang="en-US" altLang="zh-CN" sz="1100" smtClean="0">
+                          <a:latin typeface="Times New Roman" panose="02020603050405020304" pitchFamily="18" charset="0"/>
+                          <a:cs typeface="Times New Roman" panose="02020603050405020304" pitchFamily="18" charset="0"/>
+                        </a:rPr>
+                        <a:t>4KB</a:t>
+                      </a:r>
+                      <a:endParaRPr lang="zh-CN" altLang="en-US" sz="1100">
+                        <a:latin typeface="Times New Roman" panose="02020603050405020304" pitchFamily="18" charset="0"/>
+                        <a:cs typeface="Times New Roman" panose="02020603050405020304" pitchFamily="18" charset="0"/>
+                      </a:endParaRPr>
+                    </a:p>
+                  </a:txBody>
+                  <a:tcPr anchor="ctr">
+                    <a:gradFill flip="none" rotWithShape="1">
+                      <a:gsLst>
+                        <a:gs pos="0">
+                          <a:schemeClr val="accent1">
+                            <a:tint val="66000"/>
+                            <a:satMod val="160000"/>
+                          </a:schemeClr>
+                        </a:gs>
+                        <a:gs pos="50000">
+                          <a:schemeClr val="accent1">
+                            <a:tint val="44500"/>
+                            <a:satMod val="160000"/>
+                          </a:schemeClr>
+                        </a:gs>
+                        <a:gs pos="100000">
+                          <a:schemeClr val="accent1">
+                            <a:tint val="23500"/>
+                            <a:satMod val="160000"/>
+                          </a:schemeClr>
+                        </a:gs>
+                      </a:gsLst>
+                      <a:lin ang="18900000" scaled="1"/>
+                      <a:tileRect/>
+                    </a:gradFill>
+                  </a:tcPr>
+                </a:tc>
+                <a:tc>
+                  <a:txBody>
+                    <a:bodyPr/>
+                    <a:lstStyle/>
+                    <a:p>
+                      <a:r>
+                        <a:rPr lang="zh-CN" altLang="en-US" sz="1100" smtClean="0">
+                          <a:latin typeface="Times New Roman" panose="02020603050405020304" pitchFamily="18" charset="0"/>
+                          <a:cs typeface="Times New Roman" panose="02020603050405020304" pitchFamily="18" charset="0"/>
+                        </a:rPr>
+                        <a:t>（栈顶）已缓存页面 </a:t>
+                      </a:r>
+                      <a:r>
+                        <a:rPr lang="en-US" altLang="zh-CN" sz="1100" smtClean="0">
+                          <a:latin typeface="Times New Roman" panose="02020603050405020304" pitchFamily="18" charset="0"/>
+                          <a:cs typeface="Times New Roman" panose="02020603050405020304" pitchFamily="18" charset="0"/>
+                        </a:rPr>
+                        <a:t>PAGE_READWRITE</a:t>
+                      </a:r>
+                      <a:endParaRPr lang="zh-CN" altLang="en-US" sz="1100">
+                        <a:latin typeface="Times New Roman" panose="02020603050405020304" pitchFamily="18" charset="0"/>
+                        <a:cs typeface="Times New Roman" panose="02020603050405020304" pitchFamily="18" charset="0"/>
+                      </a:endParaRPr>
+                    </a:p>
+                  </a:txBody>
+                  <a:tcPr anchor="ctr">
+                    <a:gradFill flip="none" rotWithShape="1">
+                      <a:gsLst>
+                        <a:gs pos="0">
+                          <a:schemeClr val="accent1">
+                            <a:tint val="66000"/>
+                            <a:satMod val="160000"/>
+                          </a:schemeClr>
+                        </a:gs>
+                        <a:gs pos="50000">
+                          <a:schemeClr val="accent1">
+                            <a:tint val="44500"/>
+                            <a:satMod val="160000"/>
+                          </a:schemeClr>
+                        </a:gs>
+                        <a:gs pos="100000">
+                          <a:schemeClr val="accent1">
+                            <a:tint val="23500"/>
+                            <a:satMod val="160000"/>
+                          </a:schemeClr>
+                        </a:gs>
+                      </a:gsLst>
+                      <a:lin ang="18900000" scaled="1"/>
+                      <a:tileRect/>
+                    </a:gradFill>
+                  </a:tcPr>
+                </a:tc>
+                <a:extLst>
+                  <a:ext uri="{0D108BD9-81ED-4DB2-BD59-A6C34878D82A}">
+                    <a16:rowId xmlns:a16="http://schemas.microsoft.com/office/drawing/2014/main" val="3816113316"/>
+                  </a:ext>
+                </a:extLst>
+              </a:tr>
+              <a:tr h="342212">
+                <a:tc>
+                  <a:txBody>
+                    <a:bodyPr/>
+                    <a:lstStyle/>
+                    <a:p>
+                      <a:pPr marL="0" marR="0" indent="0" algn="l" defTabSz="914400" rtl="0" eaLnBrk="1" fontAlgn="auto" latinLnBrk="0" hangingPunct="1">
+                        <a:lnSpc>
+                          <a:spcPct val="100000"/>
+                        </a:lnSpc>
+                        <a:spcBef>
+                          <a:spcPts val="0"/>
+                        </a:spcBef>
+                        <a:spcAft>
+                          <a:spcPts val="0"/>
+                        </a:spcAft>
+                        <a:buClrTx/>
+                        <a:buSzTx/>
+                        <a:buFontTx/>
+                        <a:buNone/>
+                        <a:tabLst/>
+                        <a:defRPr/>
+                      </a:pPr>
+                      <a:r>
+                        <a:rPr lang="zh-CN" altLang="en-US" sz="1100" smtClean="0">
+                          <a:latin typeface="Times New Roman" panose="02020603050405020304" pitchFamily="18" charset="0"/>
+                          <a:cs typeface="Times New Roman" panose="02020603050405020304" pitchFamily="18" charset="0"/>
+                        </a:rPr>
+                        <a:t>第二个页面</a:t>
+                      </a:r>
+                      <a:r>
+                        <a:rPr lang="en-US" altLang="zh-CN" sz="1100" smtClean="0">
+                          <a:latin typeface="Times New Roman" panose="02020603050405020304" pitchFamily="18" charset="0"/>
+                          <a:cs typeface="Times New Roman" panose="02020603050405020304" pitchFamily="18" charset="0"/>
+                        </a:rPr>
+                        <a:t>4KB</a:t>
+                      </a:r>
+                      <a:endParaRPr lang="zh-CN" altLang="en-US" sz="1100" smtClean="0">
+                        <a:latin typeface="Times New Roman" panose="02020603050405020304" pitchFamily="18" charset="0"/>
+                        <a:cs typeface="Times New Roman" panose="02020603050405020304" pitchFamily="18" charset="0"/>
+                      </a:endParaRPr>
+                    </a:p>
+                  </a:txBody>
+                  <a:tcPr anchor="ctr">
+                    <a:gradFill flip="none" rotWithShape="1">
+                      <a:gsLst>
+                        <a:gs pos="0">
+                          <a:schemeClr val="accent1">
+                            <a:tint val="66000"/>
+                            <a:satMod val="160000"/>
+                          </a:schemeClr>
+                        </a:gs>
+                        <a:gs pos="50000">
+                          <a:schemeClr val="accent1">
+                            <a:tint val="44500"/>
+                            <a:satMod val="160000"/>
+                          </a:schemeClr>
+                        </a:gs>
+                        <a:gs pos="100000">
+                          <a:schemeClr val="accent1">
+                            <a:tint val="23500"/>
+                            <a:satMod val="160000"/>
+                          </a:schemeClr>
+                        </a:gs>
+                      </a:gsLst>
+                      <a:lin ang="18900000" scaled="1"/>
+                      <a:tileRect/>
+                    </a:gradFill>
+                  </a:tcPr>
+                </a:tc>
+                <a:tc>
+                  <a:txBody>
+                    <a:bodyPr/>
+                    <a:lstStyle/>
+                    <a:p>
+                      <a:r>
+                        <a:rPr lang="zh-CN" altLang="en-US" sz="1100" smtClean="0">
+                          <a:latin typeface="Times New Roman" panose="02020603050405020304" pitchFamily="18" charset="0"/>
+                          <a:cs typeface="Times New Roman" panose="02020603050405020304" pitchFamily="18" charset="0"/>
+                        </a:rPr>
+                        <a:t>已分配页面 </a:t>
+                      </a:r>
+                      <a:r>
+                        <a:rPr lang="en-US" altLang="zh-CN" sz="1100" smtClean="0">
+                          <a:latin typeface="Times New Roman" panose="02020603050405020304" pitchFamily="18" charset="0"/>
+                          <a:cs typeface="Times New Roman" panose="02020603050405020304" pitchFamily="18" charset="0"/>
+                        </a:rPr>
+                        <a:t>PAGE_GUARD</a:t>
+                      </a:r>
+                      <a:endParaRPr lang="zh-CN" altLang="en-US" sz="1100">
+                        <a:latin typeface="Times New Roman" panose="02020603050405020304" pitchFamily="18" charset="0"/>
+                        <a:cs typeface="Times New Roman" panose="02020603050405020304" pitchFamily="18" charset="0"/>
+                      </a:endParaRPr>
+                    </a:p>
+                  </a:txBody>
+                  <a:tcPr anchor="ctr">
+                    <a:gradFill flip="none" rotWithShape="1">
+                      <a:gsLst>
+                        <a:gs pos="0">
+                          <a:schemeClr val="accent1">
+                            <a:tint val="66000"/>
+                            <a:satMod val="160000"/>
+                          </a:schemeClr>
+                        </a:gs>
+                        <a:gs pos="50000">
+                          <a:schemeClr val="accent1">
+                            <a:tint val="44500"/>
+                            <a:satMod val="160000"/>
+                          </a:schemeClr>
+                        </a:gs>
+                        <a:gs pos="100000">
+                          <a:schemeClr val="accent1">
+                            <a:tint val="23500"/>
+                            <a:satMod val="160000"/>
+                          </a:schemeClr>
+                        </a:gs>
+                      </a:gsLst>
+                      <a:lin ang="18900000" scaled="1"/>
+                      <a:tileRect/>
+                    </a:gradFill>
+                  </a:tcPr>
+                </a:tc>
+                <a:extLst>
+                  <a:ext uri="{0D108BD9-81ED-4DB2-BD59-A6C34878D82A}">
+                    <a16:rowId xmlns:a16="http://schemas.microsoft.com/office/drawing/2014/main" val="3418997161"/>
+                  </a:ext>
+                </a:extLst>
+              </a:tr>
+              <a:tr h="342212">
+                <a:tc>
+                  <a:txBody>
+                    <a:bodyPr/>
+                    <a:lstStyle/>
+                    <a:p>
+                      <a:pPr marL="0" marR="0" indent="0" algn="l" defTabSz="914400" rtl="0" eaLnBrk="1" fontAlgn="auto" latinLnBrk="0" hangingPunct="1">
+                        <a:lnSpc>
+                          <a:spcPct val="100000"/>
+                        </a:lnSpc>
+                        <a:spcBef>
+                          <a:spcPts val="0"/>
+                        </a:spcBef>
+                        <a:spcAft>
+                          <a:spcPts val="0"/>
+                        </a:spcAft>
+                        <a:buClrTx/>
+                        <a:buSzTx/>
+                        <a:buFontTx/>
+                        <a:buNone/>
+                        <a:tabLst/>
+                        <a:defRPr/>
+                      </a:pPr>
+                      <a:r>
+                        <a:rPr lang="zh-CN" altLang="en-US" sz="1100" smtClean="0">
+                          <a:latin typeface="Times New Roman" panose="02020603050405020304" pitchFamily="18" charset="0"/>
+                          <a:cs typeface="Times New Roman" panose="02020603050405020304" pitchFamily="18" charset="0"/>
+                        </a:rPr>
+                        <a:t>第三个页面</a:t>
+                      </a:r>
+                      <a:r>
+                        <a:rPr lang="en-US" altLang="zh-CN" sz="1100" smtClean="0">
+                          <a:latin typeface="Times New Roman" panose="02020603050405020304" pitchFamily="18" charset="0"/>
+                          <a:cs typeface="Times New Roman" panose="02020603050405020304" pitchFamily="18" charset="0"/>
+                        </a:rPr>
+                        <a:t>4KB</a:t>
+                      </a:r>
+                      <a:endParaRPr lang="zh-CN" altLang="en-US" sz="1100" smtClean="0">
+                        <a:latin typeface="Times New Roman" panose="02020603050405020304" pitchFamily="18" charset="0"/>
+                        <a:cs typeface="Times New Roman" panose="02020603050405020304" pitchFamily="18" charset="0"/>
+                      </a:endParaRPr>
+                    </a:p>
+                  </a:txBody>
+                  <a:tcPr anchor="ctr">
+                    <a:gradFill flip="none" rotWithShape="1">
+                      <a:gsLst>
+                        <a:gs pos="0">
+                          <a:schemeClr val="accent1">
+                            <a:tint val="66000"/>
+                            <a:satMod val="160000"/>
+                          </a:schemeClr>
+                        </a:gs>
+                        <a:gs pos="50000">
+                          <a:schemeClr val="accent1">
+                            <a:tint val="44500"/>
+                            <a:satMod val="160000"/>
+                          </a:schemeClr>
+                        </a:gs>
+                        <a:gs pos="100000">
+                          <a:schemeClr val="accent1">
+                            <a:tint val="23500"/>
+                            <a:satMod val="160000"/>
+                          </a:schemeClr>
+                        </a:gs>
+                      </a:gsLst>
+                      <a:lin ang="18900000" scaled="1"/>
+                      <a:tileRect/>
+                    </a:gradFill>
+                  </a:tcPr>
+                </a:tc>
+                <a:tc>
+                  <a:txBody>
+                    <a:bodyPr/>
+                    <a:lstStyle/>
+                    <a:p>
+                      <a:pPr marL="0" marR="0" indent="0" algn="l" defTabSz="914400" rtl="0" eaLnBrk="1" fontAlgn="auto" latinLnBrk="0" hangingPunct="1">
+                        <a:lnSpc>
+                          <a:spcPct val="100000"/>
+                        </a:lnSpc>
+                        <a:spcBef>
+                          <a:spcPts val="0"/>
+                        </a:spcBef>
+                        <a:spcAft>
+                          <a:spcPts val="0"/>
+                        </a:spcAft>
+                        <a:buClrTx/>
+                        <a:buSzTx/>
+                        <a:buFontTx/>
+                        <a:buNone/>
+                        <a:tabLst/>
+                        <a:defRPr/>
+                      </a:pPr>
+                      <a:r>
+                        <a:rPr lang="zh-CN" altLang="en-US" sz="1100" smtClean="0">
+                          <a:latin typeface="Times New Roman" panose="02020603050405020304" pitchFamily="18" charset="0"/>
+                          <a:cs typeface="Times New Roman" panose="02020603050405020304" pitchFamily="18" charset="0"/>
+                        </a:rPr>
+                        <a:t>已分配页面 </a:t>
+                      </a:r>
+                      <a:r>
+                        <a:rPr lang="en-US" altLang="zh-CN" sz="1100" smtClean="0">
+                          <a:latin typeface="Times New Roman" panose="02020603050405020304" pitchFamily="18" charset="0"/>
+                          <a:cs typeface="Times New Roman" panose="02020603050405020304" pitchFamily="18" charset="0"/>
+                        </a:rPr>
+                        <a:t>PAGE_GUARD</a:t>
+                      </a:r>
+                      <a:endParaRPr lang="zh-CN" altLang="en-US" sz="1100" smtClean="0">
+                        <a:latin typeface="Times New Roman" panose="02020603050405020304" pitchFamily="18" charset="0"/>
+                        <a:cs typeface="Times New Roman" panose="02020603050405020304" pitchFamily="18" charset="0"/>
+                      </a:endParaRPr>
+                    </a:p>
+                  </a:txBody>
+                  <a:tcPr anchor="ctr">
+                    <a:gradFill flip="none" rotWithShape="1">
+                      <a:gsLst>
+                        <a:gs pos="0">
+                          <a:schemeClr val="accent1">
+                            <a:tint val="66000"/>
+                            <a:satMod val="160000"/>
+                          </a:schemeClr>
+                        </a:gs>
+                        <a:gs pos="50000">
+                          <a:schemeClr val="accent1">
+                            <a:tint val="44500"/>
+                            <a:satMod val="160000"/>
+                          </a:schemeClr>
+                        </a:gs>
+                        <a:gs pos="100000">
+                          <a:schemeClr val="accent1">
+                            <a:tint val="23500"/>
+                            <a:satMod val="160000"/>
+                          </a:schemeClr>
+                        </a:gs>
+                      </a:gsLst>
+                      <a:lin ang="18900000" scaled="1"/>
+                      <a:tileRect/>
+                    </a:gradFill>
+                  </a:tcPr>
+                </a:tc>
+                <a:extLst>
+                  <a:ext uri="{0D108BD9-81ED-4DB2-BD59-A6C34878D82A}">
+                    <a16:rowId xmlns:a16="http://schemas.microsoft.com/office/drawing/2014/main" val="3948322033"/>
+                  </a:ext>
+                </a:extLst>
+              </a:tr>
+              <a:tr h="669349">
+                <a:tc gridSpan="2">
+                  <a:txBody>
+                    <a:bodyPr/>
+                    <a:lstStyle/>
+                    <a:p>
+                      <a:pPr algn="ctr"/>
+                      <a:r>
+                        <a:rPr lang="en-US" altLang="zh-CN" sz="4000" smtClean="0">
+                          <a:latin typeface="Times New Roman" panose="02020603050405020304" pitchFamily="18" charset="0"/>
+                          <a:cs typeface="Times New Roman" panose="02020603050405020304" pitchFamily="18" charset="0"/>
+                        </a:rPr>
+                        <a:t>……</a:t>
+                      </a:r>
+                      <a:endParaRPr lang="zh-CN" altLang="en-US" sz="4000">
+                        <a:latin typeface="Times New Roman" panose="02020603050405020304" pitchFamily="18" charset="0"/>
+                        <a:cs typeface="Times New Roman" panose="02020603050405020304" pitchFamily="18" charset="0"/>
+                      </a:endParaRPr>
+                    </a:p>
+                  </a:txBody>
+                  <a:tcPr anchor="ctr">
+                    <a:gradFill flip="none" rotWithShape="1">
+                      <a:gsLst>
+                        <a:gs pos="0">
+                          <a:schemeClr val="accent1">
+                            <a:tint val="66000"/>
+                            <a:satMod val="160000"/>
+                          </a:schemeClr>
+                        </a:gs>
+                        <a:gs pos="50000">
+                          <a:schemeClr val="accent1">
+                            <a:tint val="44500"/>
+                            <a:satMod val="160000"/>
+                          </a:schemeClr>
+                        </a:gs>
+                        <a:gs pos="100000">
+                          <a:schemeClr val="accent1">
+                            <a:tint val="23500"/>
+                            <a:satMod val="160000"/>
+                          </a:schemeClr>
+                        </a:gs>
+                      </a:gsLst>
+                      <a:lin ang="18900000" scaled="1"/>
+                      <a:tileRect/>
+                    </a:gradFill>
+                  </a:tcPr>
+                </a:tc>
+                <a:tc hMerge="1">
+                  <a:txBody>
+                    <a:bodyPr/>
+                    <a:lstStyle/>
+                    <a:p>
+                      <a:endParaRPr lang="zh-CN" altLang="en-US"/>
+                    </a:p>
+                  </a:txBody>
+                  <a:tcPr/>
+                </a:tc>
+                <a:extLst>
+                  <a:ext uri="{0D108BD9-81ED-4DB2-BD59-A6C34878D82A}">
+                    <a16:rowId xmlns:a16="http://schemas.microsoft.com/office/drawing/2014/main" val="1441946313"/>
+                  </a:ext>
+                </a:extLst>
+              </a:tr>
+              <a:tr h="342212">
+                <a:tc>
+                  <a:txBody>
+                    <a:bodyPr/>
+                    <a:lstStyle/>
+                    <a:p>
+                      <a:r>
+                        <a:rPr lang="zh-CN" altLang="en-US" sz="1100" smtClean="0">
+                          <a:latin typeface="Times New Roman" panose="02020603050405020304" pitchFamily="18" charset="0"/>
+                          <a:cs typeface="Times New Roman" panose="02020603050405020304" pitchFamily="18" charset="0"/>
+                        </a:rPr>
+                        <a:t>倒数第二个页面</a:t>
+                      </a:r>
+                      <a:r>
+                        <a:rPr lang="en-US" altLang="zh-CN" sz="1100" smtClean="0">
+                          <a:latin typeface="Times New Roman" panose="02020603050405020304" pitchFamily="18" charset="0"/>
+                          <a:cs typeface="Times New Roman" panose="02020603050405020304" pitchFamily="18" charset="0"/>
+                        </a:rPr>
+                        <a:t>4KB</a:t>
+                      </a:r>
+                      <a:endParaRPr lang="zh-CN" altLang="en-US" sz="1100">
+                        <a:latin typeface="Times New Roman" panose="02020603050405020304" pitchFamily="18" charset="0"/>
+                        <a:cs typeface="Times New Roman" panose="02020603050405020304" pitchFamily="18" charset="0"/>
+                      </a:endParaRPr>
+                    </a:p>
+                  </a:txBody>
+                  <a:tcPr anchor="ctr">
+                    <a:gradFill flip="none" rotWithShape="1">
+                      <a:gsLst>
+                        <a:gs pos="0">
+                          <a:schemeClr val="accent1">
+                            <a:tint val="66000"/>
+                            <a:satMod val="160000"/>
+                          </a:schemeClr>
+                        </a:gs>
+                        <a:gs pos="50000">
+                          <a:schemeClr val="accent1">
+                            <a:tint val="44500"/>
+                            <a:satMod val="160000"/>
+                          </a:schemeClr>
+                        </a:gs>
+                        <a:gs pos="100000">
+                          <a:schemeClr val="accent1">
+                            <a:tint val="23500"/>
+                            <a:satMod val="160000"/>
+                          </a:schemeClr>
+                        </a:gs>
+                      </a:gsLst>
+                      <a:lin ang="18900000" scaled="1"/>
+                      <a:tileRect/>
+                    </a:gradFill>
+                  </a:tcPr>
+                </a:tc>
+                <a:tc>
+                  <a:txBody>
+                    <a:bodyPr/>
+                    <a:lstStyle/>
+                    <a:p>
+                      <a:pPr marL="0" marR="0" indent="0" algn="l" defTabSz="914400" rtl="0" eaLnBrk="1" fontAlgn="auto" latinLnBrk="0" hangingPunct="1">
+                        <a:lnSpc>
+                          <a:spcPct val="100000"/>
+                        </a:lnSpc>
+                        <a:spcBef>
+                          <a:spcPts val="0"/>
+                        </a:spcBef>
+                        <a:spcAft>
+                          <a:spcPts val="0"/>
+                        </a:spcAft>
+                        <a:buClrTx/>
+                        <a:buSzTx/>
+                        <a:buFontTx/>
+                        <a:buNone/>
+                        <a:tabLst/>
+                        <a:defRPr/>
+                      </a:pPr>
+                      <a:r>
+                        <a:rPr lang="zh-CN" altLang="en-US" sz="1100" smtClean="0">
+                          <a:latin typeface="Times New Roman" panose="02020603050405020304" pitchFamily="18" charset="0"/>
+                          <a:cs typeface="Times New Roman" panose="02020603050405020304" pitchFamily="18" charset="0"/>
+                        </a:rPr>
+                        <a:t>已分配页面</a:t>
+                      </a:r>
+                      <a:r>
+                        <a:rPr lang="en-US" altLang="zh-CN" sz="1100" smtClean="0">
+                          <a:latin typeface="Times New Roman" panose="02020603050405020304" pitchFamily="18" charset="0"/>
+                          <a:cs typeface="Times New Roman" panose="02020603050405020304" pitchFamily="18" charset="0"/>
+                        </a:rPr>
+                        <a:t>PAGE_GUARD</a:t>
+                      </a:r>
+                      <a:endParaRPr lang="zh-CN" altLang="en-US" sz="1100" smtClean="0">
+                        <a:latin typeface="Times New Roman" panose="02020603050405020304" pitchFamily="18" charset="0"/>
+                        <a:cs typeface="Times New Roman" panose="02020603050405020304" pitchFamily="18" charset="0"/>
+                      </a:endParaRPr>
+                    </a:p>
+                  </a:txBody>
+                  <a:tcPr anchor="ctr">
+                    <a:gradFill flip="none" rotWithShape="1">
+                      <a:gsLst>
+                        <a:gs pos="0">
+                          <a:schemeClr val="accent1">
+                            <a:tint val="66000"/>
+                            <a:satMod val="160000"/>
+                          </a:schemeClr>
+                        </a:gs>
+                        <a:gs pos="50000">
+                          <a:schemeClr val="accent1">
+                            <a:tint val="44500"/>
+                            <a:satMod val="160000"/>
+                          </a:schemeClr>
+                        </a:gs>
+                        <a:gs pos="100000">
+                          <a:schemeClr val="accent1">
+                            <a:tint val="23500"/>
+                            <a:satMod val="160000"/>
+                          </a:schemeClr>
+                        </a:gs>
+                      </a:gsLst>
+                      <a:lin ang="18900000" scaled="1"/>
+                      <a:tileRect/>
+                    </a:gradFill>
+                  </a:tcPr>
+                </a:tc>
+                <a:extLst>
+                  <a:ext uri="{0D108BD9-81ED-4DB2-BD59-A6C34878D82A}">
+                    <a16:rowId xmlns:a16="http://schemas.microsoft.com/office/drawing/2014/main" val="2824714129"/>
+                  </a:ext>
+                </a:extLst>
+              </a:tr>
+              <a:tr h="342212">
+                <a:tc>
+                  <a:txBody>
+                    <a:bodyPr/>
+                    <a:lstStyle/>
+                    <a:p>
+                      <a:r>
+                        <a:rPr lang="zh-CN" altLang="en-US" sz="1100" smtClean="0">
+                          <a:latin typeface="Times New Roman" panose="02020603050405020304" pitchFamily="18" charset="0"/>
+                          <a:cs typeface="Times New Roman" panose="02020603050405020304" pitchFamily="18" charset="0"/>
+                        </a:rPr>
+                        <a:t>倒数第一个页面</a:t>
+                      </a:r>
+                      <a:r>
+                        <a:rPr lang="en-US" altLang="zh-CN" sz="1100" smtClean="0">
+                          <a:latin typeface="Times New Roman" panose="02020603050405020304" pitchFamily="18" charset="0"/>
+                          <a:cs typeface="Times New Roman" panose="02020603050405020304" pitchFamily="18" charset="0"/>
+                        </a:rPr>
+                        <a:t>4KB</a:t>
+                      </a:r>
+                      <a:endParaRPr lang="zh-CN" altLang="en-US" sz="1100">
+                        <a:latin typeface="Times New Roman" panose="02020603050405020304" pitchFamily="18" charset="0"/>
+                        <a:cs typeface="Times New Roman" panose="02020603050405020304" pitchFamily="18" charset="0"/>
+                      </a:endParaRPr>
+                    </a:p>
+                  </a:txBody>
+                  <a:tcPr anchor="ctr">
+                    <a:gradFill flip="none" rotWithShape="1">
+                      <a:gsLst>
+                        <a:gs pos="0">
+                          <a:schemeClr val="accent1">
+                            <a:tint val="66000"/>
+                            <a:satMod val="160000"/>
+                          </a:schemeClr>
+                        </a:gs>
+                        <a:gs pos="50000">
+                          <a:schemeClr val="accent1">
+                            <a:tint val="44500"/>
+                            <a:satMod val="160000"/>
+                          </a:schemeClr>
+                        </a:gs>
+                        <a:gs pos="100000">
+                          <a:schemeClr val="accent1">
+                            <a:tint val="23500"/>
+                            <a:satMod val="160000"/>
+                          </a:schemeClr>
+                        </a:gs>
+                      </a:gsLst>
+                      <a:lin ang="18900000" scaled="1"/>
+                      <a:tileRect/>
+                    </a:gradFill>
+                  </a:tcPr>
+                </a:tc>
+                <a:tc>
+                  <a:txBody>
+                    <a:bodyPr/>
+                    <a:lstStyle/>
+                    <a:p>
+                      <a:pPr marL="0" marR="0" indent="0" algn="l" defTabSz="914400" rtl="0" eaLnBrk="1" fontAlgn="auto" latinLnBrk="0" hangingPunct="1">
+                        <a:lnSpc>
+                          <a:spcPct val="100000"/>
+                        </a:lnSpc>
+                        <a:spcBef>
+                          <a:spcPts val="0"/>
+                        </a:spcBef>
+                        <a:spcAft>
+                          <a:spcPts val="0"/>
+                        </a:spcAft>
+                        <a:buClrTx/>
+                        <a:buSzTx/>
+                        <a:buFontTx/>
+                        <a:buNone/>
+                        <a:tabLst/>
+                        <a:defRPr/>
+                      </a:pPr>
+                      <a:r>
+                        <a:rPr lang="zh-CN" altLang="en-US" sz="1100" smtClean="0">
+                          <a:latin typeface="Times New Roman" panose="02020603050405020304" pitchFamily="18" charset="0"/>
+                          <a:cs typeface="Times New Roman" panose="02020603050405020304" pitchFamily="18" charset="0"/>
+                        </a:rPr>
+                        <a:t>（栈底）已分配页面 </a:t>
+                      </a:r>
+                      <a:r>
+                        <a:rPr lang="en-US" altLang="zh-CN" sz="1100" smtClean="0">
+                          <a:latin typeface="Times New Roman" panose="02020603050405020304" pitchFamily="18" charset="0"/>
+                          <a:cs typeface="Times New Roman" panose="02020603050405020304" pitchFamily="18" charset="0"/>
+                        </a:rPr>
+                        <a:t>PAGE_GUARD</a:t>
+                      </a:r>
+                      <a:endParaRPr lang="zh-CN" altLang="en-US" sz="1100" smtClean="0">
+                        <a:latin typeface="Times New Roman" panose="02020603050405020304" pitchFamily="18" charset="0"/>
+                        <a:cs typeface="Times New Roman" panose="02020603050405020304" pitchFamily="18" charset="0"/>
+                      </a:endParaRPr>
+                    </a:p>
+                  </a:txBody>
+                  <a:tcPr anchor="ctr">
+                    <a:gradFill flip="none" rotWithShape="1">
+                      <a:gsLst>
+                        <a:gs pos="0">
+                          <a:schemeClr val="accent1">
+                            <a:tint val="66000"/>
+                            <a:satMod val="160000"/>
+                          </a:schemeClr>
+                        </a:gs>
+                        <a:gs pos="50000">
+                          <a:schemeClr val="accent1">
+                            <a:tint val="44500"/>
+                            <a:satMod val="160000"/>
+                          </a:schemeClr>
+                        </a:gs>
+                        <a:gs pos="100000">
+                          <a:schemeClr val="accent1">
+                            <a:tint val="23500"/>
+                            <a:satMod val="160000"/>
+                          </a:schemeClr>
+                        </a:gs>
+                      </a:gsLst>
+                      <a:lin ang="18900000" scaled="1"/>
+                      <a:tileRect/>
+                    </a:gradFill>
+                  </a:tcPr>
+                </a:tc>
+                <a:extLst>
+                  <a:ext uri="{0D108BD9-81ED-4DB2-BD59-A6C34878D82A}">
+                    <a16:rowId xmlns:a16="http://schemas.microsoft.com/office/drawing/2014/main" val="253440169"/>
+                  </a:ext>
+                </a:extLst>
+              </a:tr>
+            </a:tbl>
+          </a:graphicData>
+        </a:graphic>
+      </p:graphicFrame>
+    </p:spTree>
+    <p:extLst>
+      <p:ext uri="{BB962C8B-B14F-4D97-AF65-F5344CB8AC3E}">
+        <p14:creationId xmlns:p14="http://schemas.microsoft.com/office/powerpoint/2010/main" val="441369387"/>
+      </p:ext>
+    </p:extLst>
+  </p:cSld>
+  <p:clrMapOvr>
+    <a:masterClrMapping/>
+  </p:clrMapOvr>
+</p:sld>
+</file>
+
 <file path=ppt/slides/slide2.xml><?xml version="1.0" encoding="utf-8"?>
 <p:sld xmlns:a="http://schemas.openxmlformats.org/drawingml/2006/main" xmlns:r="http://schemas.openxmlformats.org/officeDocument/2006/relationships" xmlns:p="http://schemas.openxmlformats.org/presentationml/2006/main">
   <p:cSld>

--- a/音视频编解码.pptx
+++ b/音视频编解码.pptx
@@ -261,7 +261,7 @@
           <a:p>
             <a:fld id="{EA80D996-CE9E-432A-86C4-A040E9078786}" type="datetimeFigureOut">
               <a:rPr lang="zh-CN" altLang="en-US" smtClean="0"/>
-              <a:t>2019/7/18</a:t>
+              <a:t>2019/7/25</a:t>
             </a:fld>
             <a:endParaRPr lang="zh-CN" altLang="en-US"/>
           </a:p>
@@ -431,7 +431,7 @@
           <a:p>
             <a:fld id="{EA80D996-CE9E-432A-86C4-A040E9078786}" type="datetimeFigureOut">
               <a:rPr lang="zh-CN" altLang="en-US" smtClean="0"/>
-              <a:t>2019/7/18</a:t>
+              <a:t>2019/7/25</a:t>
             </a:fld>
             <a:endParaRPr lang="zh-CN" altLang="en-US"/>
           </a:p>
@@ -611,7 +611,7 @@
           <a:p>
             <a:fld id="{EA80D996-CE9E-432A-86C4-A040E9078786}" type="datetimeFigureOut">
               <a:rPr lang="zh-CN" altLang="en-US" smtClean="0"/>
-              <a:t>2019/7/18</a:t>
+              <a:t>2019/7/25</a:t>
             </a:fld>
             <a:endParaRPr lang="zh-CN" altLang="en-US"/>
           </a:p>
@@ -781,7 +781,7 @@
           <a:p>
             <a:fld id="{EA80D996-CE9E-432A-86C4-A040E9078786}" type="datetimeFigureOut">
               <a:rPr lang="zh-CN" altLang="en-US" smtClean="0"/>
-              <a:t>2019/7/18</a:t>
+              <a:t>2019/7/25</a:t>
             </a:fld>
             <a:endParaRPr lang="zh-CN" altLang="en-US"/>
           </a:p>
@@ -1027,7 +1027,7 @@
           <a:p>
             <a:fld id="{EA80D996-CE9E-432A-86C4-A040E9078786}" type="datetimeFigureOut">
               <a:rPr lang="zh-CN" altLang="en-US" smtClean="0"/>
-              <a:t>2019/7/18</a:t>
+              <a:t>2019/7/25</a:t>
             </a:fld>
             <a:endParaRPr lang="zh-CN" altLang="en-US"/>
           </a:p>
@@ -1259,7 +1259,7 @@
           <a:p>
             <a:fld id="{EA80D996-CE9E-432A-86C4-A040E9078786}" type="datetimeFigureOut">
               <a:rPr lang="zh-CN" altLang="en-US" smtClean="0"/>
-              <a:t>2019/7/18</a:t>
+              <a:t>2019/7/25</a:t>
             </a:fld>
             <a:endParaRPr lang="zh-CN" altLang="en-US"/>
           </a:p>
@@ -1626,7 +1626,7 @@
           <a:p>
             <a:fld id="{EA80D996-CE9E-432A-86C4-A040E9078786}" type="datetimeFigureOut">
               <a:rPr lang="zh-CN" altLang="en-US" smtClean="0"/>
-              <a:t>2019/7/18</a:t>
+              <a:t>2019/7/25</a:t>
             </a:fld>
             <a:endParaRPr lang="zh-CN" altLang="en-US"/>
           </a:p>
@@ -1744,7 +1744,7 @@
           <a:p>
             <a:fld id="{EA80D996-CE9E-432A-86C4-A040E9078786}" type="datetimeFigureOut">
               <a:rPr lang="zh-CN" altLang="en-US" smtClean="0"/>
-              <a:t>2019/7/18</a:t>
+              <a:t>2019/7/25</a:t>
             </a:fld>
             <a:endParaRPr lang="zh-CN" altLang="en-US"/>
           </a:p>
@@ -1839,7 +1839,7 @@
           <a:p>
             <a:fld id="{EA80D996-CE9E-432A-86C4-A040E9078786}" type="datetimeFigureOut">
               <a:rPr lang="zh-CN" altLang="en-US" smtClean="0"/>
-              <a:t>2019/7/18</a:t>
+              <a:t>2019/7/25</a:t>
             </a:fld>
             <a:endParaRPr lang="zh-CN" altLang="en-US"/>
           </a:p>
@@ -2116,7 +2116,7 @@
           <a:p>
             <a:fld id="{EA80D996-CE9E-432A-86C4-A040E9078786}" type="datetimeFigureOut">
               <a:rPr lang="zh-CN" altLang="en-US" smtClean="0"/>
-              <a:t>2019/7/18</a:t>
+              <a:t>2019/7/25</a:t>
             </a:fld>
             <a:endParaRPr lang="zh-CN" altLang="en-US"/>
           </a:p>
@@ -2369,7 +2369,7 @@
           <a:p>
             <a:fld id="{EA80D996-CE9E-432A-86C4-A040E9078786}" type="datetimeFigureOut">
               <a:rPr lang="zh-CN" altLang="en-US" smtClean="0"/>
-              <a:t>2019/7/18</a:t>
+              <a:t>2019/7/25</a:t>
             </a:fld>
             <a:endParaRPr lang="zh-CN" altLang="en-US"/>
           </a:p>
@@ -2582,7 +2582,7 @@
           <a:p>
             <a:fld id="{EA80D996-CE9E-432A-86C4-A040E9078786}" type="datetimeFigureOut">
               <a:rPr lang="zh-CN" altLang="en-US" smtClean="0"/>
-              <a:t>2019/7/18</a:t>
+              <a:t>2019/7/25</a:t>
             </a:fld>
             <a:endParaRPr lang="zh-CN" altLang="en-US"/>
           </a:p>
@@ -21651,7 +21651,7 @@
           <p:nvPr>
             <p:extLst>
               <p:ext uri="{D42A27DB-BD31-4B8C-83A1-F6EECF244321}">
-                <p14:modId xmlns:p14="http://schemas.microsoft.com/office/powerpoint/2010/main" val="2790133274"/>
+                <p14:modId xmlns:p14="http://schemas.microsoft.com/office/powerpoint/2010/main" val="1108238317"/>
               </p:ext>
             </p:extLst>
           </p:nvPr>
@@ -21970,7 +21970,7 @@
                           <a:latin typeface="Times New Roman" panose="02020603050405020304" pitchFamily="18" charset="0"/>
                           <a:cs typeface="Times New Roman" panose="02020603050405020304" pitchFamily="18" charset="0"/>
                         </a:rPr>
-                        <a:t>已分配页面 </a:t>
+                        <a:t>已缓存页面 </a:t>
                       </a:r>
                       <a:r>
                         <a:rPr lang="en-US" altLang="zh-CN" sz="1100" smtClean="0">

--- a/音视频编解码.pptx
+++ b/音视频编解码.pptx
@@ -24,6 +24,8 @@
     <p:sldId id="271" r:id="rId18"/>
     <p:sldId id="273" r:id="rId19"/>
     <p:sldId id="274" r:id="rId20"/>
+    <p:sldId id="275" r:id="rId21"/>
+    <p:sldId id="276" r:id="rId22"/>
   </p:sldIdLst>
   <p:sldSz cx="12192000" cy="6858000"/>
   <p:notesSz cx="6858000" cy="9144000"/>
@@ -261,7 +263,7 @@
           <a:p>
             <a:fld id="{EA80D996-CE9E-432A-86C4-A040E9078786}" type="datetimeFigureOut">
               <a:rPr lang="zh-CN" altLang="en-US" smtClean="0"/>
-              <a:t>2019/7/25</a:t>
+              <a:t>2019/8/29</a:t>
             </a:fld>
             <a:endParaRPr lang="zh-CN" altLang="en-US"/>
           </a:p>
@@ -431,7 +433,7 @@
           <a:p>
             <a:fld id="{EA80D996-CE9E-432A-86C4-A040E9078786}" type="datetimeFigureOut">
               <a:rPr lang="zh-CN" altLang="en-US" smtClean="0"/>
-              <a:t>2019/7/25</a:t>
+              <a:t>2019/8/29</a:t>
             </a:fld>
             <a:endParaRPr lang="zh-CN" altLang="en-US"/>
           </a:p>
@@ -611,7 +613,7 @@
           <a:p>
             <a:fld id="{EA80D996-CE9E-432A-86C4-A040E9078786}" type="datetimeFigureOut">
               <a:rPr lang="zh-CN" altLang="en-US" smtClean="0"/>
-              <a:t>2019/7/25</a:t>
+              <a:t>2019/8/29</a:t>
             </a:fld>
             <a:endParaRPr lang="zh-CN" altLang="en-US"/>
           </a:p>
@@ -781,7 +783,7 @@
           <a:p>
             <a:fld id="{EA80D996-CE9E-432A-86C4-A040E9078786}" type="datetimeFigureOut">
               <a:rPr lang="zh-CN" altLang="en-US" smtClean="0"/>
-              <a:t>2019/7/25</a:t>
+              <a:t>2019/8/29</a:t>
             </a:fld>
             <a:endParaRPr lang="zh-CN" altLang="en-US"/>
           </a:p>
@@ -1027,7 +1029,7 @@
           <a:p>
             <a:fld id="{EA80D996-CE9E-432A-86C4-A040E9078786}" type="datetimeFigureOut">
               <a:rPr lang="zh-CN" altLang="en-US" smtClean="0"/>
-              <a:t>2019/7/25</a:t>
+              <a:t>2019/8/29</a:t>
             </a:fld>
             <a:endParaRPr lang="zh-CN" altLang="en-US"/>
           </a:p>
@@ -1259,7 +1261,7 @@
           <a:p>
             <a:fld id="{EA80D996-CE9E-432A-86C4-A040E9078786}" type="datetimeFigureOut">
               <a:rPr lang="zh-CN" altLang="en-US" smtClean="0"/>
-              <a:t>2019/7/25</a:t>
+              <a:t>2019/8/29</a:t>
             </a:fld>
             <a:endParaRPr lang="zh-CN" altLang="en-US"/>
           </a:p>
@@ -1626,7 +1628,7 @@
           <a:p>
             <a:fld id="{EA80D996-CE9E-432A-86C4-A040E9078786}" type="datetimeFigureOut">
               <a:rPr lang="zh-CN" altLang="en-US" smtClean="0"/>
-              <a:t>2019/7/25</a:t>
+              <a:t>2019/8/29</a:t>
             </a:fld>
             <a:endParaRPr lang="zh-CN" altLang="en-US"/>
           </a:p>
@@ -1744,7 +1746,7 @@
           <a:p>
             <a:fld id="{EA80D996-CE9E-432A-86C4-A040E9078786}" type="datetimeFigureOut">
               <a:rPr lang="zh-CN" altLang="en-US" smtClean="0"/>
-              <a:t>2019/7/25</a:t>
+              <a:t>2019/8/29</a:t>
             </a:fld>
             <a:endParaRPr lang="zh-CN" altLang="en-US"/>
           </a:p>
@@ -1839,7 +1841,7 @@
           <a:p>
             <a:fld id="{EA80D996-CE9E-432A-86C4-A040E9078786}" type="datetimeFigureOut">
               <a:rPr lang="zh-CN" altLang="en-US" smtClean="0"/>
-              <a:t>2019/7/25</a:t>
+              <a:t>2019/8/29</a:t>
             </a:fld>
             <a:endParaRPr lang="zh-CN" altLang="en-US"/>
           </a:p>
@@ -2116,7 +2118,7 @@
           <a:p>
             <a:fld id="{EA80D996-CE9E-432A-86C4-A040E9078786}" type="datetimeFigureOut">
               <a:rPr lang="zh-CN" altLang="en-US" smtClean="0"/>
-              <a:t>2019/7/25</a:t>
+              <a:t>2019/8/29</a:t>
             </a:fld>
             <a:endParaRPr lang="zh-CN" altLang="en-US"/>
           </a:p>
@@ -2369,7 +2371,7 @@
           <a:p>
             <a:fld id="{EA80D996-CE9E-432A-86C4-A040E9078786}" type="datetimeFigureOut">
               <a:rPr lang="zh-CN" altLang="en-US" smtClean="0"/>
-              <a:t>2019/7/25</a:t>
+              <a:t>2019/8/29</a:t>
             </a:fld>
             <a:endParaRPr lang="zh-CN" altLang="en-US"/>
           </a:p>
@@ -2582,7 +2584,7 @@
           <a:p>
             <a:fld id="{EA80D996-CE9E-432A-86C4-A040E9078786}" type="datetimeFigureOut">
               <a:rPr lang="zh-CN" altLang="en-US" smtClean="0"/>
-              <a:t>2019/7/25</a:t>
+              <a:t>2019/8/29</a:t>
             </a:fld>
             <a:endParaRPr lang="zh-CN" altLang="en-US"/>
           </a:p>
@@ -23414,6 +23416,1097 @@
 </p:sld>
 </file>
 
+<file path=ppt/slides/slide20.xml><?xml version="1.0" encoding="utf-8"?>
+<p:sld xmlns:a="http://schemas.openxmlformats.org/drawingml/2006/main" xmlns:r="http://schemas.openxmlformats.org/officeDocument/2006/relationships" xmlns:p="http://schemas.openxmlformats.org/presentationml/2006/main">
+  <p:cSld>
+    <p:spTree>
+      <p:nvGrpSpPr>
+        <p:cNvPr id="1" name=""/>
+        <p:cNvGrpSpPr/>
+        <p:nvPr/>
+      </p:nvGrpSpPr>
+      <p:grpSpPr>
+        <a:xfrm>
+          <a:off x="0" y="0"/>
+          <a:ext cx="0" cy="0"/>
+          <a:chOff x="0" y="0"/>
+          <a:chExt cx="0" cy="0"/>
+        </a:xfrm>
+      </p:grpSpPr>
+      <p:pic>
+        <p:nvPicPr>
+          <p:cNvPr id="4" name="图片 3"/>
+          <p:cNvPicPr>
+            <a:picLocks noChangeAspect="1"/>
+          </p:cNvPicPr>
+          <p:nvPr/>
+        </p:nvPicPr>
+        <p:blipFill>
+          <a:blip r:embed="rId2"/>
+          <a:stretch>
+            <a:fillRect/>
+          </a:stretch>
+        </p:blipFill>
+        <p:spPr>
+          <a:xfrm>
+            <a:off x="1645993" y="1700944"/>
+            <a:ext cx="7000875" cy="2066925"/>
+          </a:xfrm>
+          <a:prstGeom prst="rect">
+            <a:avLst/>
+          </a:prstGeom>
+        </p:spPr>
+      </p:pic>
+      <p:sp>
+        <p:nvSpPr>
+          <p:cNvPr id="5" name="矩形 4"/>
+          <p:cNvSpPr/>
+          <p:nvPr/>
+        </p:nvSpPr>
+        <p:spPr>
+          <a:xfrm>
+            <a:off x="1881554" y="1987061"/>
+            <a:ext cx="369276" cy="316521"/>
+          </a:xfrm>
+          <a:prstGeom prst="rect">
+            <a:avLst/>
+          </a:prstGeom>
+          <a:noFill/>
+          <a:ln w="19050">
+            <a:solidFill>
+              <a:srgbClr val="FF0000"/>
+            </a:solidFill>
+          </a:ln>
+        </p:spPr>
+        <p:style>
+          <a:lnRef idx="2">
+            <a:schemeClr val="accent1">
+              <a:shade val="50000"/>
+            </a:schemeClr>
+          </a:lnRef>
+          <a:fillRef idx="1">
+            <a:schemeClr val="accent1"/>
+          </a:fillRef>
+          <a:effectRef idx="0">
+            <a:schemeClr val="accent1"/>
+          </a:effectRef>
+          <a:fontRef idx="minor">
+            <a:schemeClr val="lt1"/>
+          </a:fontRef>
+        </p:style>
+        <p:txBody>
+          <a:bodyPr rtlCol="0" anchor="ctr"/>
+          <a:lstStyle/>
+          <a:p>
+            <a:pPr algn="ctr"/>
+            <a:endParaRPr lang="zh-CN" altLang="en-US"/>
+          </a:p>
+        </p:txBody>
+      </p:sp>
+      <p:sp>
+        <p:nvSpPr>
+          <p:cNvPr id="6" name="矩形标注 5"/>
+          <p:cNvSpPr/>
+          <p:nvPr/>
+        </p:nvSpPr>
+        <p:spPr>
+          <a:xfrm>
+            <a:off x="2000249" y="1405299"/>
+            <a:ext cx="883628" cy="286117"/>
+          </a:xfrm>
+          <a:prstGeom prst="wedgeRectCallout">
+            <a:avLst>
+              <a:gd name="adj1" fmla="val -50458"/>
+              <a:gd name="adj2" fmla="val 160835"/>
+            </a:avLst>
+          </a:prstGeom>
+        </p:spPr>
+        <p:style>
+          <a:lnRef idx="1">
+            <a:schemeClr val="accent2"/>
+          </a:lnRef>
+          <a:fillRef idx="2">
+            <a:schemeClr val="accent2"/>
+          </a:fillRef>
+          <a:effectRef idx="1">
+            <a:schemeClr val="accent2"/>
+          </a:effectRef>
+          <a:fontRef idx="minor">
+            <a:schemeClr val="dk1"/>
+          </a:fontRef>
+        </p:style>
+        <p:txBody>
+          <a:bodyPr rtlCol="0" anchor="ctr"/>
+          <a:lstStyle/>
+          <a:p>
+            <a:pPr algn="ctr"/>
+            <a:r>
+              <a:rPr lang="zh-CN" altLang="en-US" sz="1200" smtClean="0">
+                <a:solidFill>
+                  <a:schemeClr val="tx1"/>
+                </a:solidFill>
+              </a:rPr>
+              <a:t>窗口标题</a:t>
+            </a:r>
+            <a:endParaRPr lang="zh-CN" altLang="en-US" sz="1200">
+              <a:solidFill>
+                <a:schemeClr val="tx1"/>
+              </a:solidFill>
+            </a:endParaRPr>
+          </a:p>
+        </p:txBody>
+      </p:sp>
+      <p:sp>
+        <p:nvSpPr>
+          <p:cNvPr id="7" name="矩形 6"/>
+          <p:cNvSpPr/>
+          <p:nvPr/>
+        </p:nvSpPr>
+        <p:spPr>
+          <a:xfrm>
+            <a:off x="2362933" y="1987060"/>
+            <a:ext cx="520944" cy="316521"/>
+          </a:xfrm>
+          <a:prstGeom prst="rect">
+            <a:avLst/>
+          </a:prstGeom>
+          <a:noFill/>
+          <a:ln w="19050">
+            <a:solidFill>
+              <a:srgbClr val="FF0000"/>
+            </a:solidFill>
+          </a:ln>
+        </p:spPr>
+        <p:style>
+          <a:lnRef idx="2">
+            <a:schemeClr val="accent1">
+              <a:shade val="50000"/>
+            </a:schemeClr>
+          </a:lnRef>
+          <a:fillRef idx="1">
+            <a:schemeClr val="accent1"/>
+          </a:fillRef>
+          <a:effectRef idx="0">
+            <a:schemeClr val="accent1"/>
+          </a:effectRef>
+          <a:fontRef idx="minor">
+            <a:schemeClr val="lt1"/>
+          </a:fontRef>
+        </p:style>
+        <p:txBody>
+          <a:bodyPr rtlCol="0" anchor="ctr"/>
+          <a:lstStyle/>
+          <a:p>
+            <a:pPr algn="ctr"/>
+            <a:endParaRPr lang="zh-CN" altLang="en-US"/>
+          </a:p>
+        </p:txBody>
+      </p:sp>
+      <p:sp>
+        <p:nvSpPr>
+          <p:cNvPr id="8" name="矩形标注 7"/>
+          <p:cNvSpPr/>
+          <p:nvPr/>
+        </p:nvSpPr>
+        <p:spPr>
+          <a:xfrm>
+            <a:off x="3071812" y="1414827"/>
+            <a:ext cx="1166079" cy="286117"/>
+          </a:xfrm>
+          <a:prstGeom prst="wedgeRectCallout">
+            <a:avLst>
+              <a:gd name="adj1" fmla="val -89591"/>
+              <a:gd name="adj2" fmla="val 145470"/>
+            </a:avLst>
+          </a:prstGeom>
+        </p:spPr>
+        <p:style>
+          <a:lnRef idx="1">
+            <a:schemeClr val="accent2"/>
+          </a:lnRef>
+          <a:fillRef idx="2">
+            <a:schemeClr val="accent2"/>
+          </a:fillRef>
+          <a:effectRef idx="1">
+            <a:schemeClr val="accent2"/>
+          </a:effectRef>
+          <a:fontRef idx="minor">
+            <a:schemeClr val="dk1"/>
+          </a:fontRef>
+        </p:style>
+        <p:txBody>
+          <a:bodyPr rtlCol="0" anchor="ctr"/>
+          <a:lstStyle/>
+          <a:p>
+            <a:pPr algn="ctr"/>
+            <a:r>
+              <a:rPr lang="en-US" altLang="zh-CN" sz="1200" smtClean="0">
+                <a:solidFill>
+                  <a:schemeClr val="tx1"/>
+                </a:solidFill>
+              </a:rPr>
+              <a:t>ui</a:t>
+            </a:r>
+            <a:r>
+              <a:rPr lang="zh-CN" altLang="en-US" sz="1200" smtClean="0">
+                <a:solidFill>
+                  <a:schemeClr val="tx1"/>
+                </a:solidFill>
+              </a:rPr>
+              <a:t>文件的名字</a:t>
+            </a:r>
+            <a:endParaRPr lang="zh-CN" altLang="en-US" sz="1200">
+              <a:solidFill>
+                <a:schemeClr val="tx1"/>
+              </a:solidFill>
+            </a:endParaRPr>
+          </a:p>
+        </p:txBody>
+      </p:sp>
+      <p:sp>
+        <p:nvSpPr>
+          <p:cNvPr id="9" name="矩形 8"/>
+          <p:cNvSpPr/>
+          <p:nvPr/>
+        </p:nvSpPr>
+        <p:spPr>
+          <a:xfrm>
+            <a:off x="1645992" y="1987060"/>
+            <a:ext cx="235561" cy="298935"/>
+          </a:xfrm>
+          <a:prstGeom prst="rect">
+            <a:avLst/>
+          </a:prstGeom>
+          <a:noFill/>
+          <a:ln w="19050">
+            <a:solidFill>
+              <a:srgbClr val="FF0000"/>
+            </a:solidFill>
+          </a:ln>
+        </p:spPr>
+        <p:style>
+          <a:lnRef idx="2">
+            <a:schemeClr val="accent1">
+              <a:shade val="50000"/>
+            </a:schemeClr>
+          </a:lnRef>
+          <a:fillRef idx="1">
+            <a:schemeClr val="accent1"/>
+          </a:fillRef>
+          <a:effectRef idx="0">
+            <a:schemeClr val="accent1"/>
+          </a:effectRef>
+          <a:fontRef idx="minor">
+            <a:schemeClr val="lt1"/>
+          </a:fontRef>
+        </p:style>
+        <p:txBody>
+          <a:bodyPr rtlCol="0" anchor="ctr"/>
+          <a:lstStyle/>
+          <a:p>
+            <a:pPr algn="ctr"/>
+            <a:endParaRPr lang="zh-CN" altLang="en-US"/>
+          </a:p>
+        </p:txBody>
+      </p:sp>
+    </p:spTree>
+    <p:extLst>
+      <p:ext uri="{BB962C8B-B14F-4D97-AF65-F5344CB8AC3E}">
+        <p14:creationId xmlns:p14="http://schemas.microsoft.com/office/powerpoint/2010/main" val="3824550758"/>
+      </p:ext>
+    </p:extLst>
+  </p:cSld>
+  <p:clrMapOvr>
+    <a:masterClrMapping/>
+  </p:clrMapOvr>
+</p:sld>
+</file>
+
+<file path=ppt/slides/slide21.xml><?xml version="1.0" encoding="utf-8"?>
+<p:sld xmlns:a="http://schemas.openxmlformats.org/drawingml/2006/main" xmlns:r="http://schemas.openxmlformats.org/officeDocument/2006/relationships" xmlns:p="http://schemas.openxmlformats.org/presentationml/2006/main">
+  <p:cSld>
+    <p:spTree>
+      <p:nvGrpSpPr>
+        <p:cNvPr id="1" name=""/>
+        <p:cNvGrpSpPr/>
+        <p:nvPr/>
+      </p:nvGrpSpPr>
+      <p:grpSpPr>
+        <a:xfrm>
+          <a:off x="0" y="0"/>
+          <a:ext cx="0" cy="0"/>
+          <a:chOff x="0" y="0"/>
+          <a:chExt cx="0" cy="0"/>
+        </a:xfrm>
+      </p:grpSpPr>
+      <p:sp>
+        <p:nvSpPr>
+          <p:cNvPr id="4" name="文本框 3"/>
+          <p:cNvSpPr txBox="1"/>
+          <p:nvPr/>
+        </p:nvSpPr>
+        <p:spPr>
+          <a:xfrm>
+            <a:off x="685801" y="1546141"/>
+            <a:ext cx="2038350" cy="253916"/>
+          </a:xfrm>
+          <a:prstGeom prst="rect">
+            <a:avLst/>
+          </a:prstGeom>
+          <a:ln/>
+        </p:spPr>
+        <p:style>
+          <a:lnRef idx="2">
+            <a:schemeClr val="dk1"/>
+          </a:lnRef>
+          <a:fillRef idx="1">
+            <a:schemeClr val="lt1"/>
+          </a:fillRef>
+          <a:effectRef idx="0">
+            <a:schemeClr val="dk1"/>
+          </a:effectRef>
+          <a:fontRef idx="minor">
+            <a:schemeClr val="dk1"/>
+          </a:fontRef>
+        </p:style>
+        <p:txBody>
+          <a:bodyPr wrap="square" rtlCol="0">
+            <a:spAutoFit/>
+          </a:bodyPr>
+          <a:lstStyle>
+            <a:defPPr>
+              <a:defRPr lang="zh-CN"/>
+            </a:defPPr>
+            <a:lvl1pPr>
+              <a:defRPr sz="1050"/>
+            </a:lvl1pPr>
+          </a:lstStyle>
+          <a:p>
+            <a:r>
+              <a:rPr lang="en-US" altLang="zh-CN" smtClean="0"/>
+              <a:t>avformat_write_header(s,options)</a:t>
+            </a:r>
+            <a:endParaRPr lang="zh-CN" altLang="en-US"/>
+          </a:p>
+        </p:txBody>
+      </p:sp>
+      <p:sp>
+        <p:nvSpPr>
+          <p:cNvPr id="5" name="文本框 4"/>
+          <p:cNvSpPr txBox="1"/>
+          <p:nvPr/>
+        </p:nvSpPr>
+        <p:spPr>
+          <a:xfrm>
+            <a:off x="3060319" y="1546141"/>
+            <a:ext cx="1962531" cy="253916"/>
+          </a:xfrm>
+          <a:prstGeom prst="rect">
+            <a:avLst/>
+          </a:prstGeom>
+          <a:ln/>
+        </p:spPr>
+        <p:style>
+          <a:lnRef idx="2">
+            <a:schemeClr val="dk1"/>
+          </a:lnRef>
+          <a:fillRef idx="1">
+            <a:schemeClr val="lt1"/>
+          </a:fillRef>
+          <a:effectRef idx="0">
+            <a:schemeClr val="dk1"/>
+          </a:effectRef>
+          <a:fontRef idx="minor">
+            <a:schemeClr val="dk1"/>
+          </a:fontRef>
+        </p:style>
+        <p:txBody>
+          <a:bodyPr wrap="square" rtlCol="0">
+            <a:spAutoFit/>
+          </a:bodyPr>
+          <a:lstStyle>
+            <a:defPPr>
+              <a:defRPr lang="zh-CN"/>
+            </a:defPPr>
+            <a:lvl1pPr>
+              <a:defRPr sz="1050">
+                <a:solidFill>
+                  <a:schemeClr val="dk1"/>
+                </a:solidFill>
+              </a:defRPr>
+            </a:lvl1pPr>
+            <a:lvl2pPr>
+              <a:defRPr>
+                <a:solidFill>
+                  <a:schemeClr val="dk1"/>
+                </a:solidFill>
+              </a:defRPr>
+            </a:lvl2pPr>
+            <a:lvl3pPr>
+              <a:defRPr>
+                <a:solidFill>
+                  <a:schemeClr val="dk1"/>
+                </a:solidFill>
+              </a:defRPr>
+            </a:lvl3pPr>
+            <a:lvl4pPr>
+              <a:defRPr>
+                <a:solidFill>
+                  <a:schemeClr val="dk1"/>
+                </a:solidFill>
+              </a:defRPr>
+            </a:lvl4pPr>
+            <a:lvl5pPr>
+              <a:defRPr>
+                <a:solidFill>
+                  <a:schemeClr val="dk1"/>
+                </a:solidFill>
+              </a:defRPr>
+            </a:lvl5pPr>
+            <a:lvl6pPr>
+              <a:defRPr>
+                <a:solidFill>
+                  <a:schemeClr val="dk1"/>
+                </a:solidFill>
+              </a:defRPr>
+            </a:lvl6pPr>
+            <a:lvl7pPr>
+              <a:defRPr>
+                <a:solidFill>
+                  <a:schemeClr val="dk1"/>
+                </a:solidFill>
+              </a:defRPr>
+            </a:lvl7pPr>
+            <a:lvl8pPr>
+              <a:defRPr>
+                <a:solidFill>
+                  <a:schemeClr val="dk1"/>
+                </a:solidFill>
+              </a:defRPr>
+            </a:lvl8pPr>
+            <a:lvl9pPr>
+              <a:defRPr>
+                <a:solidFill>
+                  <a:schemeClr val="dk1"/>
+                </a:solidFill>
+              </a:defRPr>
+            </a:lvl9pPr>
+          </a:lstStyle>
+          <a:p>
+            <a:r>
+              <a:rPr lang="en-US" altLang="zh-CN"/>
+              <a:t>avformat_init_output(s,options)</a:t>
+            </a:r>
+          </a:p>
+        </p:txBody>
+      </p:sp>
+      <p:sp>
+        <p:nvSpPr>
+          <p:cNvPr id="6" name="文本框 5"/>
+          <p:cNvSpPr txBox="1"/>
+          <p:nvPr/>
+        </p:nvSpPr>
+        <p:spPr>
+          <a:xfrm>
+            <a:off x="5359019" y="1551980"/>
+            <a:ext cx="1543431" cy="253916"/>
+          </a:xfrm>
+          <a:prstGeom prst="rect">
+            <a:avLst/>
+          </a:prstGeom>
+          <a:ln/>
+        </p:spPr>
+        <p:style>
+          <a:lnRef idx="2">
+            <a:schemeClr val="dk1"/>
+          </a:lnRef>
+          <a:fillRef idx="1">
+            <a:schemeClr val="lt1"/>
+          </a:fillRef>
+          <a:effectRef idx="0">
+            <a:schemeClr val="dk1"/>
+          </a:effectRef>
+          <a:fontRef idx="minor">
+            <a:schemeClr val="dk1"/>
+          </a:fontRef>
+        </p:style>
+        <p:txBody>
+          <a:bodyPr wrap="square" rtlCol="0">
+            <a:spAutoFit/>
+          </a:bodyPr>
+          <a:lstStyle>
+            <a:defPPr>
+              <a:defRPr lang="zh-CN"/>
+            </a:defPPr>
+            <a:lvl1pPr>
+              <a:defRPr sz="1050">
+                <a:solidFill>
+                  <a:schemeClr val="dk1"/>
+                </a:solidFill>
+              </a:defRPr>
+            </a:lvl1pPr>
+            <a:lvl2pPr>
+              <a:defRPr>
+                <a:solidFill>
+                  <a:schemeClr val="dk1"/>
+                </a:solidFill>
+              </a:defRPr>
+            </a:lvl2pPr>
+            <a:lvl3pPr>
+              <a:defRPr>
+                <a:solidFill>
+                  <a:schemeClr val="dk1"/>
+                </a:solidFill>
+              </a:defRPr>
+            </a:lvl3pPr>
+            <a:lvl4pPr>
+              <a:defRPr>
+                <a:solidFill>
+                  <a:schemeClr val="dk1"/>
+                </a:solidFill>
+              </a:defRPr>
+            </a:lvl4pPr>
+            <a:lvl5pPr>
+              <a:defRPr>
+                <a:solidFill>
+                  <a:schemeClr val="dk1"/>
+                </a:solidFill>
+              </a:defRPr>
+            </a:lvl5pPr>
+            <a:lvl6pPr>
+              <a:defRPr>
+                <a:solidFill>
+                  <a:schemeClr val="dk1"/>
+                </a:solidFill>
+              </a:defRPr>
+            </a:lvl6pPr>
+            <a:lvl7pPr>
+              <a:defRPr>
+                <a:solidFill>
+                  <a:schemeClr val="dk1"/>
+                </a:solidFill>
+              </a:defRPr>
+            </a:lvl7pPr>
+            <a:lvl8pPr>
+              <a:defRPr>
+                <a:solidFill>
+                  <a:schemeClr val="dk1"/>
+                </a:solidFill>
+              </a:defRPr>
+            </a:lvl8pPr>
+            <a:lvl9pPr>
+              <a:defRPr>
+                <a:solidFill>
+                  <a:schemeClr val="dk1"/>
+                </a:solidFill>
+              </a:defRPr>
+            </a:lvl9pPr>
+          </a:lstStyle>
+          <a:p>
+            <a:r>
+              <a:rPr lang="en-US" altLang="zh-CN"/>
+              <a:t>init_muxer(</a:t>
+            </a:r>
+            <a:r>
+              <a:rPr lang="en-US" altLang="zh-CN"/>
+              <a:t>s, options</a:t>
+            </a:r>
+            <a:r>
+              <a:rPr lang="en-US" altLang="zh-CN"/>
+              <a:t>)</a:t>
+            </a:r>
+          </a:p>
+        </p:txBody>
+      </p:sp>
+      <p:sp>
+        <p:nvSpPr>
+          <p:cNvPr id="7" name="文本框 6"/>
+          <p:cNvSpPr txBox="1"/>
+          <p:nvPr/>
+        </p:nvSpPr>
+        <p:spPr>
+          <a:xfrm>
+            <a:off x="3060316" y="1925807"/>
+            <a:ext cx="1962531" cy="577081"/>
+          </a:xfrm>
+          <a:prstGeom prst="rect">
+            <a:avLst/>
+          </a:prstGeom>
+          <a:ln/>
+        </p:spPr>
+        <p:style>
+          <a:lnRef idx="1">
+            <a:schemeClr val="accent6"/>
+          </a:lnRef>
+          <a:fillRef idx="2">
+            <a:schemeClr val="accent6"/>
+          </a:fillRef>
+          <a:effectRef idx="1">
+            <a:schemeClr val="accent6"/>
+          </a:effectRef>
+          <a:fontRef idx="minor">
+            <a:schemeClr val="dk1"/>
+          </a:fontRef>
+        </p:style>
+        <p:txBody>
+          <a:bodyPr wrap="square" rtlCol="0">
+            <a:spAutoFit/>
+          </a:bodyPr>
+          <a:lstStyle>
+            <a:defPPr>
+              <a:defRPr lang="zh-CN"/>
+            </a:defPPr>
+            <a:lvl1pPr>
+              <a:defRPr sz="1050"/>
+            </a:lvl1pPr>
+          </a:lstStyle>
+          <a:p>
+            <a:pPr algn="ctr"/>
+            <a:endParaRPr lang="en-US" altLang="zh-CN" smtClean="0"/>
+          </a:p>
+          <a:p>
+            <a:pPr algn="ctr"/>
+            <a:r>
+              <a:rPr lang="en-US" altLang="zh-CN" smtClean="0"/>
+              <a:t>s-</a:t>
+            </a:r>
+            <a:r>
+              <a:rPr lang="en-US" altLang="zh-CN"/>
+              <a:t>&gt;oformat-&gt;</a:t>
+            </a:r>
+            <a:r>
+              <a:rPr lang="en-US" altLang="zh-CN"/>
+              <a:t>write_header(s</a:t>
+            </a:r>
+            <a:r>
+              <a:rPr lang="en-US" altLang="zh-CN" smtClean="0"/>
+              <a:t>)</a:t>
+            </a:r>
+          </a:p>
+          <a:p>
+            <a:pPr algn="ctr"/>
+            <a:endParaRPr lang="en-US" altLang="zh-CN" smtClean="0"/>
+          </a:p>
+        </p:txBody>
+      </p:sp>
+      <p:sp>
+        <p:nvSpPr>
+          <p:cNvPr id="8" name="文本框 7"/>
+          <p:cNvSpPr txBox="1"/>
+          <p:nvPr/>
+        </p:nvSpPr>
+        <p:spPr>
+          <a:xfrm>
+            <a:off x="3060316" y="2622754"/>
+            <a:ext cx="1962531" cy="253916"/>
+          </a:xfrm>
+          <a:prstGeom prst="rect">
+            <a:avLst/>
+          </a:prstGeom>
+          <a:ln/>
+        </p:spPr>
+        <p:style>
+          <a:lnRef idx="2">
+            <a:schemeClr val="dk1"/>
+          </a:lnRef>
+          <a:fillRef idx="1">
+            <a:schemeClr val="lt1"/>
+          </a:fillRef>
+          <a:effectRef idx="0">
+            <a:schemeClr val="dk1"/>
+          </a:effectRef>
+          <a:fontRef idx="minor">
+            <a:schemeClr val="dk1"/>
+          </a:fontRef>
+        </p:style>
+        <p:txBody>
+          <a:bodyPr wrap="square" rtlCol="0">
+            <a:spAutoFit/>
+          </a:bodyPr>
+          <a:lstStyle>
+            <a:defPPr>
+              <a:defRPr lang="zh-CN"/>
+            </a:defPPr>
+            <a:lvl1pPr>
+              <a:defRPr sz="1050">
+                <a:solidFill>
+                  <a:schemeClr val="dk1"/>
+                </a:solidFill>
+              </a:defRPr>
+            </a:lvl1pPr>
+            <a:lvl2pPr>
+              <a:defRPr>
+                <a:solidFill>
+                  <a:schemeClr val="dk1"/>
+                </a:solidFill>
+              </a:defRPr>
+            </a:lvl2pPr>
+            <a:lvl3pPr>
+              <a:defRPr>
+                <a:solidFill>
+                  <a:schemeClr val="dk1"/>
+                </a:solidFill>
+              </a:defRPr>
+            </a:lvl3pPr>
+            <a:lvl4pPr>
+              <a:defRPr>
+                <a:solidFill>
+                  <a:schemeClr val="dk1"/>
+                </a:solidFill>
+              </a:defRPr>
+            </a:lvl4pPr>
+            <a:lvl5pPr>
+              <a:defRPr>
+                <a:solidFill>
+                  <a:schemeClr val="dk1"/>
+                </a:solidFill>
+              </a:defRPr>
+            </a:lvl5pPr>
+            <a:lvl6pPr>
+              <a:defRPr>
+                <a:solidFill>
+                  <a:schemeClr val="dk1"/>
+                </a:solidFill>
+              </a:defRPr>
+            </a:lvl6pPr>
+            <a:lvl7pPr>
+              <a:defRPr>
+                <a:solidFill>
+                  <a:schemeClr val="dk1"/>
+                </a:solidFill>
+              </a:defRPr>
+            </a:lvl7pPr>
+            <a:lvl8pPr>
+              <a:defRPr>
+                <a:solidFill>
+                  <a:schemeClr val="dk1"/>
+                </a:solidFill>
+              </a:defRPr>
+            </a:lvl8pPr>
+            <a:lvl9pPr>
+              <a:defRPr>
+                <a:solidFill>
+                  <a:schemeClr val="dk1"/>
+                </a:solidFill>
+              </a:defRPr>
+            </a:lvl9pPr>
+          </a:lstStyle>
+          <a:p>
+            <a:r>
+              <a:rPr lang="en-US" altLang="zh-CN"/>
+              <a:t>flush_if_needed(s)</a:t>
+            </a:r>
+            <a:endParaRPr lang="zh-CN" altLang="en-US"/>
+          </a:p>
+        </p:txBody>
+      </p:sp>
+      <p:sp>
+        <p:nvSpPr>
+          <p:cNvPr id="9" name="文本框 8"/>
+          <p:cNvSpPr txBox="1"/>
+          <p:nvPr/>
+        </p:nvSpPr>
+        <p:spPr>
+          <a:xfrm>
+            <a:off x="3060315" y="3071951"/>
+            <a:ext cx="1962531" cy="253916"/>
+          </a:xfrm>
+          <a:prstGeom prst="rect">
+            <a:avLst/>
+          </a:prstGeom>
+          <a:ln/>
+        </p:spPr>
+        <p:style>
+          <a:lnRef idx="2">
+            <a:schemeClr val="dk1"/>
+          </a:lnRef>
+          <a:fillRef idx="1">
+            <a:schemeClr val="lt1"/>
+          </a:fillRef>
+          <a:effectRef idx="0">
+            <a:schemeClr val="dk1"/>
+          </a:effectRef>
+          <a:fontRef idx="minor">
+            <a:schemeClr val="dk1"/>
+          </a:fontRef>
+        </p:style>
+        <p:txBody>
+          <a:bodyPr wrap="square" rtlCol="0">
+            <a:spAutoFit/>
+          </a:bodyPr>
+          <a:lstStyle>
+            <a:defPPr>
+              <a:defRPr lang="zh-CN"/>
+            </a:defPPr>
+            <a:lvl1pPr>
+              <a:defRPr sz="1050">
+                <a:solidFill>
+                  <a:schemeClr val="dk1"/>
+                </a:solidFill>
+              </a:defRPr>
+            </a:lvl1pPr>
+            <a:lvl2pPr>
+              <a:defRPr>
+                <a:solidFill>
+                  <a:schemeClr val="dk1"/>
+                </a:solidFill>
+              </a:defRPr>
+            </a:lvl2pPr>
+            <a:lvl3pPr>
+              <a:defRPr>
+                <a:solidFill>
+                  <a:schemeClr val="dk1"/>
+                </a:solidFill>
+              </a:defRPr>
+            </a:lvl3pPr>
+            <a:lvl4pPr>
+              <a:defRPr>
+                <a:solidFill>
+                  <a:schemeClr val="dk1"/>
+                </a:solidFill>
+              </a:defRPr>
+            </a:lvl4pPr>
+            <a:lvl5pPr>
+              <a:defRPr>
+                <a:solidFill>
+                  <a:schemeClr val="dk1"/>
+                </a:solidFill>
+              </a:defRPr>
+            </a:lvl5pPr>
+            <a:lvl6pPr>
+              <a:defRPr>
+                <a:solidFill>
+                  <a:schemeClr val="dk1"/>
+                </a:solidFill>
+              </a:defRPr>
+            </a:lvl6pPr>
+            <a:lvl7pPr>
+              <a:defRPr>
+                <a:solidFill>
+                  <a:schemeClr val="dk1"/>
+                </a:solidFill>
+              </a:defRPr>
+            </a:lvl7pPr>
+            <a:lvl8pPr>
+              <a:defRPr>
+                <a:solidFill>
+                  <a:schemeClr val="dk1"/>
+                </a:solidFill>
+              </a:defRPr>
+            </a:lvl8pPr>
+            <a:lvl9pPr>
+              <a:defRPr>
+                <a:solidFill>
+                  <a:schemeClr val="dk1"/>
+                </a:solidFill>
+              </a:defRPr>
+            </a:lvl9pPr>
+          </a:lstStyle>
+          <a:p>
+            <a:r>
+              <a:rPr lang="en-US" altLang="zh-CN"/>
+              <a:t>init_pts(s)</a:t>
+            </a:r>
+            <a:endParaRPr lang="zh-CN" altLang="en-US"/>
+          </a:p>
+        </p:txBody>
+      </p:sp>
+      <p:cxnSp>
+        <p:nvCxnSpPr>
+          <p:cNvPr id="11" name="直接箭头连接符 10"/>
+          <p:cNvCxnSpPr>
+            <a:stCxn id="4" idx="3"/>
+            <a:endCxn id="5" idx="1"/>
+          </p:cNvCxnSpPr>
+          <p:nvPr/>
+        </p:nvCxnSpPr>
+        <p:spPr>
+          <a:xfrm>
+            <a:off x="2724151" y="1673099"/>
+            <a:ext cx="336168" cy="0"/>
+          </a:xfrm>
+          <a:prstGeom prst="straightConnector1">
+            <a:avLst/>
+          </a:prstGeom>
+          <a:ln>
+            <a:tailEnd type="triangle"/>
+          </a:ln>
+        </p:spPr>
+        <p:style>
+          <a:lnRef idx="1">
+            <a:schemeClr val="dk1"/>
+          </a:lnRef>
+          <a:fillRef idx="0">
+            <a:schemeClr val="dk1"/>
+          </a:fillRef>
+          <a:effectRef idx="0">
+            <a:schemeClr val="dk1"/>
+          </a:effectRef>
+          <a:fontRef idx="minor">
+            <a:schemeClr val="tx1"/>
+          </a:fontRef>
+        </p:style>
+      </p:cxnSp>
+      <p:cxnSp>
+        <p:nvCxnSpPr>
+          <p:cNvPr id="13" name="直接箭头连接符 12"/>
+          <p:cNvCxnSpPr>
+            <a:stCxn id="5" idx="3"/>
+            <a:endCxn id="6" idx="1"/>
+          </p:cNvCxnSpPr>
+          <p:nvPr/>
+        </p:nvCxnSpPr>
+        <p:spPr>
+          <a:xfrm>
+            <a:off x="5022850" y="1673099"/>
+            <a:ext cx="336169" cy="5839"/>
+          </a:xfrm>
+          <a:prstGeom prst="straightConnector1">
+            <a:avLst/>
+          </a:prstGeom>
+          <a:ln>
+            <a:tailEnd type="triangle"/>
+          </a:ln>
+        </p:spPr>
+        <p:style>
+          <a:lnRef idx="1">
+            <a:schemeClr val="dk1"/>
+          </a:lnRef>
+          <a:fillRef idx="0">
+            <a:schemeClr val="dk1"/>
+          </a:fillRef>
+          <a:effectRef idx="0">
+            <a:schemeClr val="dk1"/>
+          </a:effectRef>
+          <a:fontRef idx="minor">
+            <a:schemeClr val="tx1"/>
+          </a:fontRef>
+        </p:style>
+      </p:cxnSp>
+      <p:cxnSp>
+        <p:nvCxnSpPr>
+          <p:cNvPr id="15" name="肘形连接符 14"/>
+          <p:cNvCxnSpPr>
+            <a:stCxn id="4" idx="3"/>
+            <a:endCxn id="7" idx="1"/>
+          </p:cNvCxnSpPr>
+          <p:nvPr/>
+        </p:nvCxnSpPr>
+        <p:spPr>
+          <a:xfrm>
+            <a:off x="2724151" y="1673099"/>
+            <a:ext cx="336165" cy="541249"/>
+          </a:xfrm>
+          <a:prstGeom prst="bentConnector3">
+            <a:avLst/>
+          </a:prstGeom>
+          <a:ln w="19050">
+            <a:solidFill>
+              <a:srgbClr val="00B050"/>
+            </a:solidFill>
+            <a:tailEnd type="triangle"/>
+          </a:ln>
+        </p:spPr>
+        <p:style>
+          <a:lnRef idx="1">
+            <a:schemeClr val="accent1"/>
+          </a:lnRef>
+          <a:fillRef idx="0">
+            <a:schemeClr val="accent1"/>
+          </a:fillRef>
+          <a:effectRef idx="0">
+            <a:schemeClr val="accent1"/>
+          </a:effectRef>
+          <a:fontRef idx="minor">
+            <a:schemeClr val="tx1"/>
+          </a:fontRef>
+        </p:style>
+      </p:cxnSp>
+      <p:cxnSp>
+        <p:nvCxnSpPr>
+          <p:cNvPr id="21" name="肘形连接符 20"/>
+          <p:cNvCxnSpPr>
+            <a:stCxn id="4" idx="3"/>
+            <a:endCxn id="8" idx="1"/>
+          </p:cNvCxnSpPr>
+          <p:nvPr/>
+        </p:nvCxnSpPr>
+        <p:spPr>
+          <a:xfrm>
+            <a:off x="2724151" y="1673099"/>
+            <a:ext cx="336165" cy="1076613"/>
+          </a:xfrm>
+          <a:prstGeom prst="bentConnector3">
+            <a:avLst/>
+          </a:prstGeom>
+          <a:ln>
+            <a:tailEnd type="triangle"/>
+          </a:ln>
+        </p:spPr>
+        <p:style>
+          <a:lnRef idx="1">
+            <a:schemeClr val="dk1"/>
+          </a:lnRef>
+          <a:fillRef idx="0">
+            <a:schemeClr val="dk1"/>
+          </a:fillRef>
+          <a:effectRef idx="0">
+            <a:schemeClr val="dk1"/>
+          </a:effectRef>
+          <a:fontRef idx="minor">
+            <a:schemeClr val="tx1"/>
+          </a:fontRef>
+        </p:style>
+      </p:cxnSp>
+      <p:cxnSp>
+        <p:nvCxnSpPr>
+          <p:cNvPr id="23" name="肘形连接符 22"/>
+          <p:cNvCxnSpPr>
+            <a:stCxn id="4" idx="3"/>
+            <a:endCxn id="9" idx="1"/>
+          </p:cNvCxnSpPr>
+          <p:nvPr/>
+        </p:nvCxnSpPr>
+        <p:spPr>
+          <a:xfrm>
+            <a:off x="2724151" y="1673099"/>
+            <a:ext cx="336164" cy="1525810"/>
+          </a:xfrm>
+          <a:prstGeom prst="bentConnector3">
+            <a:avLst/>
+          </a:prstGeom>
+          <a:ln>
+            <a:tailEnd type="triangle"/>
+          </a:ln>
+        </p:spPr>
+        <p:style>
+          <a:lnRef idx="1">
+            <a:schemeClr val="dk1"/>
+          </a:lnRef>
+          <a:fillRef idx="0">
+            <a:schemeClr val="dk1"/>
+          </a:fillRef>
+          <a:effectRef idx="0">
+            <a:schemeClr val="dk1"/>
+          </a:effectRef>
+          <a:fontRef idx="minor">
+            <a:schemeClr val="tx1"/>
+          </a:fontRef>
+        </p:style>
+      </p:cxnSp>
+    </p:spTree>
+    <p:extLst>
+      <p:ext uri="{BB962C8B-B14F-4D97-AF65-F5344CB8AC3E}">
+        <p14:creationId xmlns:p14="http://schemas.microsoft.com/office/powerpoint/2010/main" val="2640888244"/>
+      </p:ext>
+    </p:extLst>
+  </p:cSld>
+  <p:clrMapOvr>
+    <a:masterClrMapping/>
+  </p:clrMapOvr>
+</p:sld>
+</file>
+
 <file path=ppt/slides/slide3.xml><?xml version="1.0" encoding="utf-8"?>
 <p:sld xmlns:a="http://schemas.openxmlformats.org/drawingml/2006/main" xmlns:r="http://schemas.openxmlformats.org/officeDocument/2006/relationships" xmlns:p="http://schemas.openxmlformats.org/presentationml/2006/main">
   <p:cSld>
